--- a/05_작업자료/_PPT생성본/데이터분석_결과보고서.pptx
+++ b/05_작업자료/_PPT생성본/데이터분석_결과보고서.pptx
@@ -5,29 +5,29 @@
     <p:sldMasterId id="2147483648" r:id="rId1"/>
   </p:sldMasterIdLst>
   <p:sldIdLst>
-    <p:sldId id="256" r:id="rId7"/>
-    <p:sldId id="257" r:id="rId8"/>
-    <p:sldId id="258" r:id="rId9"/>
-    <p:sldId id="259" r:id="rId10"/>
-    <p:sldId id="260" r:id="rId11"/>
-    <p:sldId id="261" r:id="rId12"/>
-    <p:sldId id="262" r:id="rId13"/>
-    <p:sldId id="263" r:id="rId14"/>
-    <p:sldId id="264" r:id="rId15"/>
-    <p:sldId id="265" r:id="rId16"/>
-    <p:sldId id="266" r:id="rId17"/>
-    <p:sldId id="267" r:id="rId18"/>
-    <p:sldId id="268" r:id="rId19"/>
-    <p:sldId id="269" r:id="rId20"/>
-    <p:sldId id="270" r:id="rId21"/>
-    <p:sldId id="271" r:id="rId22"/>
-    <p:sldId id="272" r:id="rId23"/>
-    <p:sldId id="273" r:id="rId24"/>
-    <p:sldId id="274" r:id="rId25"/>
-    <p:sldId id="275" r:id="rId26"/>
-    <p:sldId id="276" r:id="rId27"/>
+    <p:sldId id="256" r:id="rId2"/>
+    <p:sldId id="276" r:id="rId26"/>
+    <p:sldId id="257" r:id="rId3"/>
+    <p:sldId id="258" r:id="rId4"/>
+    <p:sldId id="259" r:id="rId5"/>
+    <p:sldId id="260" r:id="rId6"/>
+    <p:sldId id="261" r:id="rId7"/>
+    <p:sldId id="262" r:id="rId8"/>
+    <p:sldId id="263" r:id="rId9"/>
+    <p:sldId id="264" r:id="rId10"/>
+    <p:sldId id="265" r:id="rId11"/>
+    <p:sldId id="266" r:id="rId12"/>
+    <p:sldId id="267" r:id="rId13"/>
+    <p:sldId id="268" r:id="rId14"/>
+    <p:sldId id="269" r:id="rId15"/>
+    <p:sldId id="270" r:id="rId16"/>
+    <p:sldId id="271" r:id="rId17"/>
+    <p:sldId id="272" r:id="rId18"/>
+    <p:sldId id="273" r:id="rId19"/>
+    <p:sldId id="274" r:id="rId20"/>
+    <p:sldId id="275" r:id="rId21"/>
   </p:sldIdLst>
-  <p:sldSz cx="12191695" cy="6858000" type="screen4x3"/>
+  <p:sldSz cx="12192000" cy="6858000"/>
   <p:notesSz cx="6858000" cy="9144000"/>
   <p:defaultTextStyle>
     <a:defPPr>
@@ -124,6 +124,22 @@
       </a:defRPr>
     </a:lvl9pPr>
   </p:defaultTextStyle>
+  <p:extLst>
+    <p:ext uri="{EFAFB233-063F-42B5-8137-9DF3F51BA10A}">
+      <p15:sldGuideLst xmlns:p15="http://schemas.microsoft.com/office/powerpoint/2012/main">
+        <p15:guide id="1" orient="horz" pos="2160">
+          <p15:clr>
+            <a:srgbClr val="A4A3A4"/>
+          </p15:clr>
+        </p15:guide>
+        <p15:guide id="2" pos="2880">
+          <p15:clr>
+            <a:srgbClr val="A4A3A4"/>
+          </p15:clr>
+        </p15:guide>
+      </p15:sldGuideLst>
+    </p:ext>
+  </p:extLst>
 </p:presentation>
 </file>
 
@@ -165,10 +181,9 @@
           <a:lstStyle/>
           <a:p>
             <a:r>
-              <a:rPr lang="en-US" smtClean="0"/>
+              <a:rPr lang="en-US"/>
               <a:t>Click to edit Master title style</a:t>
             </a:r>
-            <a:endParaRPr lang="en-US"/>
           </a:p>
         </p:txBody>
       </p:sp>
@@ -284,10 +299,9 @@
           </a:lstStyle>
           <a:p>
             <a:r>
-              <a:rPr lang="en-US" smtClean="0"/>
+              <a:rPr lang="en-US"/>
               <a:t>Click to edit Master subtitle style</a:t>
             </a:r>
-            <a:endParaRPr lang="en-US"/>
           </a:p>
         </p:txBody>
       </p:sp>
@@ -308,7 +322,7 @@
           <a:p>
             <a:fld id="{5BCAD085-E8A6-8845-BD4E-CB4CCA059FC4}" type="datetimeFigureOut">
               <a:rPr lang="en-US" smtClean="0"/>
-              <a:t>1/27/13</a:t>
+              <a:t>8/12/2026</a:t>
             </a:fld>
             <a:endParaRPr lang="en-US"/>
           </a:p>
@@ -402,10 +416,9 @@
           <a:lstStyle/>
           <a:p>
             <a:r>
-              <a:rPr lang="en-US" smtClean="0"/>
+              <a:rPr lang="en-US"/>
               <a:t>Click to edit Master title style</a:t>
             </a:r>
-            <a:endParaRPr lang="en-US"/>
           </a:p>
         </p:txBody>
       </p:sp>
@@ -426,38 +439,37 @@
           <a:p>
             <a:pPr lvl="0"/>
             <a:r>
-              <a:rPr lang="en-US" smtClean="0"/>
+              <a:rPr lang="en-US"/>
               <a:t>Click to edit Master text styles</a:t>
             </a:r>
           </a:p>
           <a:p>
             <a:pPr lvl="1"/>
             <a:r>
-              <a:rPr lang="en-US" smtClean="0"/>
+              <a:rPr lang="en-US"/>
               <a:t>Second level</a:t>
             </a:r>
           </a:p>
           <a:p>
             <a:pPr lvl="2"/>
             <a:r>
-              <a:rPr lang="en-US" smtClean="0"/>
+              <a:rPr lang="en-US"/>
               <a:t>Third level</a:t>
             </a:r>
           </a:p>
           <a:p>
             <a:pPr lvl="3"/>
             <a:r>
-              <a:rPr lang="en-US" smtClean="0"/>
+              <a:rPr lang="en-US"/>
               <a:t>Fourth level</a:t>
             </a:r>
           </a:p>
           <a:p>
             <a:pPr lvl="4"/>
             <a:r>
-              <a:rPr lang="en-US" smtClean="0"/>
+              <a:rPr lang="en-US"/>
               <a:t>Fifth level</a:t>
             </a:r>
-            <a:endParaRPr lang="en-US"/>
           </a:p>
         </p:txBody>
       </p:sp>
@@ -478,7 +490,7 @@
           <a:p>
             <a:fld id="{5BCAD085-E8A6-8845-BD4E-CB4CCA059FC4}" type="datetimeFigureOut">
               <a:rPr lang="en-US" smtClean="0"/>
-              <a:t>1/27/13</a:t>
+              <a:t>8/12/2026</a:t>
             </a:fld>
             <a:endParaRPr lang="en-US"/>
           </a:p>
@@ -577,10 +589,9 @@
           <a:lstStyle/>
           <a:p>
             <a:r>
-              <a:rPr lang="en-US" smtClean="0"/>
+              <a:rPr lang="en-US"/>
               <a:t>Click to edit Master title style</a:t>
             </a:r>
-            <a:endParaRPr lang="en-US"/>
           </a:p>
         </p:txBody>
       </p:sp>
@@ -606,38 +617,37 @@
           <a:p>
             <a:pPr lvl="0"/>
             <a:r>
-              <a:rPr lang="en-US" smtClean="0"/>
+              <a:rPr lang="en-US"/>
               <a:t>Click to edit Master text styles</a:t>
             </a:r>
           </a:p>
           <a:p>
             <a:pPr lvl="1"/>
             <a:r>
-              <a:rPr lang="en-US" smtClean="0"/>
+              <a:rPr lang="en-US"/>
               <a:t>Second level</a:t>
             </a:r>
           </a:p>
           <a:p>
             <a:pPr lvl="2"/>
             <a:r>
-              <a:rPr lang="en-US" smtClean="0"/>
+              <a:rPr lang="en-US"/>
               <a:t>Third level</a:t>
             </a:r>
           </a:p>
           <a:p>
             <a:pPr lvl="3"/>
             <a:r>
-              <a:rPr lang="en-US" smtClean="0"/>
+              <a:rPr lang="en-US"/>
               <a:t>Fourth level</a:t>
             </a:r>
           </a:p>
           <a:p>
             <a:pPr lvl="4"/>
             <a:r>
-              <a:rPr lang="en-US" smtClean="0"/>
+              <a:rPr lang="en-US"/>
               <a:t>Fifth level</a:t>
             </a:r>
-            <a:endParaRPr lang="en-US"/>
           </a:p>
         </p:txBody>
       </p:sp>
@@ -658,7 +668,7 @@
           <a:p>
             <a:fld id="{5BCAD085-E8A6-8845-BD4E-CB4CCA059FC4}" type="datetimeFigureOut">
               <a:rPr lang="en-US" smtClean="0"/>
-              <a:t>1/27/13</a:t>
+              <a:t>8/12/2026</a:t>
             </a:fld>
             <a:endParaRPr lang="en-US"/>
           </a:p>
@@ -752,10 +762,9 @@
           <a:lstStyle/>
           <a:p>
             <a:r>
-              <a:rPr lang="en-US" smtClean="0"/>
+              <a:rPr lang="en-US"/>
               <a:t>Click to edit Master title style</a:t>
             </a:r>
-            <a:endParaRPr lang="en-US"/>
           </a:p>
         </p:txBody>
       </p:sp>
@@ -776,38 +785,37 @@
           <a:p>
             <a:pPr lvl="0"/>
             <a:r>
-              <a:rPr lang="en-US" smtClean="0"/>
+              <a:rPr lang="en-US"/>
               <a:t>Click to edit Master text styles</a:t>
             </a:r>
           </a:p>
           <a:p>
             <a:pPr lvl="1"/>
             <a:r>
-              <a:rPr lang="en-US" smtClean="0"/>
+              <a:rPr lang="en-US"/>
               <a:t>Second level</a:t>
             </a:r>
           </a:p>
           <a:p>
             <a:pPr lvl="2"/>
             <a:r>
-              <a:rPr lang="en-US" smtClean="0"/>
+              <a:rPr lang="en-US"/>
               <a:t>Third level</a:t>
             </a:r>
           </a:p>
           <a:p>
             <a:pPr lvl="3"/>
             <a:r>
-              <a:rPr lang="en-US" smtClean="0"/>
+              <a:rPr lang="en-US"/>
               <a:t>Fourth level</a:t>
             </a:r>
           </a:p>
           <a:p>
             <a:pPr lvl="4"/>
             <a:r>
-              <a:rPr lang="en-US" smtClean="0"/>
+              <a:rPr lang="en-US"/>
               <a:t>Fifth level</a:t>
             </a:r>
-            <a:endParaRPr lang="en-US"/>
           </a:p>
         </p:txBody>
       </p:sp>
@@ -828,7 +836,7 @@
           <a:p>
             <a:fld id="{5BCAD085-E8A6-8845-BD4E-CB4CCA059FC4}" type="datetimeFigureOut">
               <a:rPr lang="en-US" smtClean="0"/>
-              <a:t>1/27/13</a:t>
+              <a:t>8/12/2026</a:t>
             </a:fld>
             <a:endParaRPr lang="en-US"/>
           </a:p>
@@ -931,10 +939,9 @@
           </a:lstStyle>
           <a:p>
             <a:r>
-              <a:rPr lang="en-US" smtClean="0"/>
+              <a:rPr lang="en-US"/>
               <a:t>Click to edit Master title style</a:t>
             </a:r>
-            <a:endParaRPr lang="en-US"/>
           </a:p>
         </p:txBody>
       </p:sp>
@@ -1051,7 +1058,7 @@
           <a:p>
             <a:pPr lvl="0"/>
             <a:r>
-              <a:rPr lang="en-US" smtClean="0"/>
+              <a:rPr lang="en-US"/>
               <a:t>Click to edit Master text styles</a:t>
             </a:r>
           </a:p>
@@ -1074,7 +1081,7 @@
           <a:p>
             <a:fld id="{5BCAD085-E8A6-8845-BD4E-CB4CCA059FC4}" type="datetimeFigureOut">
               <a:rPr lang="en-US" smtClean="0"/>
-              <a:t>1/27/13</a:t>
+              <a:t>8/12/2026</a:t>
             </a:fld>
             <a:endParaRPr lang="en-US"/>
           </a:p>
@@ -1168,10 +1175,9 @@
           <a:lstStyle/>
           <a:p>
             <a:r>
-              <a:rPr lang="en-US" smtClean="0"/>
+              <a:rPr lang="en-US"/>
               <a:t>Click to edit Master title style</a:t>
             </a:r>
-            <a:endParaRPr lang="en-US"/>
           </a:p>
         </p:txBody>
       </p:sp>
@@ -1225,38 +1231,37 @@
           <a:p>
             <a:pPr lvl="0"/>
             <a:r>
-              <a:rPr lang="en-US" smtClean="0"/>
+              <a:rPr lang="en-US"/>
               <a:t>Click to edit Master text styles</a:t>
             </a:r>
           </a:p>
           <a:p>
             <a:pPr lvl="1"/>
             <a:r>
-              <a:rPr lang="en-US" smtClean="0"/>
+              <a:rPr lang="en-US"/>
               <a:t>Second level</a:t>
             </a:r>
           </a:p>
           <a:p>
             <a:pPr lvl="2"/>
             <a:r>
-              <a:rPr lang="en-US" smtClean="0"/>
+              <a:rPr lang="en-US"/>
               <a:t>Third level</a:t>
             </a:r>
           </a:p>
           <a:p>
             <a:pPr lvl="3"/>
             <a:r>
-              <a:rPr lang="en-US" smtClean="0"/>
+              <a:rPr lang="en-US"/>
               <a:t>Fourth level</a:t>
             </a:r>
           </a:p>
           <a:p>
             <a:pPr lvl="4"/>
             <a:r>
-              <a:rPr lang="en-US" smtClean="0"/>
+              <a:rPr lang="en-US"/>
               <a:t>Fifth level</a:t>
             </a:r>
-            <a:endParaRPr lang="en-US"/>
           </a:p>
         </p:txBody>
       </p:sp>
@@ -1310,38 +1315,37 @@
           <a:p>
             <a:pPr lvl="0"/>
             <a:r>
-              <a:rPr lang="en-US" smtClean="0"/>
+              <a:rPr lang="en-US"/>
               <a:t>Click to edit Master text styles</a:t>
             </a:r>
           </a:p>
           <a:p>
             <a:pPr lvl="1"/>
             <a:r>
-              <a:rPr lang="en-US" smtClean="0"/>
+              <a:rPr lang="en-US"/>
               <a:t>Second level</a:t>
             </a:r>
           </a:p>
           <a:p>
             <a:pPr lvl="2"/>
             <a:r>
-              <a:rPr lang="en-US" smtClean="0"/>
+              <a:rPr lang="en-US"/>
               <a:t>Third level</a:t>
             </a:r>
           </a:p>
           <a:p>
             <a:pPr lvl="3"/>
             <a:r>
-              <a:rPr lang="en-US" smtClean="0"/>
+              <a:rPr lang="en-US"/>
               <a:t>Fourth level</a:t>
             </a:r>
           </a:p>
           <a:p>
             <a:pPr lvl="4"/>
             <a:r>
-              <a:rPr lang="en-US" smtClean="0"/>
+              <a:rPr lang="en-US"/>
               <a:t>Fifth level</a:t>
             </a:r>
-            <a:endParaRPr lang="en-US"/>
           </a:p>
         </p:txBody>
       </p:sp>
@@ -1362,7 +1366,7 @@
           <a:p>
             <a:fld id="{5BCAD085-E8A6-8845-BD4E-CB4CCA059FC4}" type="datetimeFigureOut">
               <a:rPr lang="en-US" smtClean="0"/>
-              <a:t>1/27/13</a:t>
+              <a:t>8/12/2026</a:t>
             </a:fld>
             <a:endParaRPr lang="en-US"/>
           </a:p>
@@ -1460,10 +1464,9 @@
           </a:lstStyle>
           <a:p>
             <a:r>
-              <a:rPr lang="en-US" smtClean="0"/>
+              <a:rPr lang="en-US"/>
               <a:t>Click to edit Master title style</a:t>
             </a:r>
-            <a:endParaRPr lang="en-US"/>
           </a:p>
         </p:txBody>
       </p:sp>
@@ -1526,7 +1529,7 @@
           <a:p>
             <a:pPr lvl="0"/>
             <a:r>
-              <a:rPr lang="en-US" smtClean="0"/>
+              <a:rPr lang="en-US"/>
               <a:t>Click to edit Master text styles</a:t>
             </a:r>
           </a:p>
@@ -1582,38 +1585,37 @@
           <a:p>
             <a:pPr lvl="0"/>
             <a:r>
-              <a:rPr lang="en-US" smtClean="0"/>
+              <a:rPr lang="en-US"/>
               <a:t>Click to edit Master text styles</a:t>
             </a:r>
           </a:p>
           <a:p>
             <a:pPr lvl="1"/>
             <a:r>
-              <a:rPr lang="en-US" smtClean="0"/>
+              <a:rPr lang="en-US"/>
               <a:t>Second level</a:t>
             </a:r>
           </a:p>
           <a:p>
             <a:pPr lvl="2"/>
             <a:r>
-              <a:rPr lang="en-US" smtClean="0"/>
+              <a:rPr lang="en-US"/>
               <a:t>Third level</a:t>
             </a:r>
           </a:p>
           <a:p>
             <a:pPr lvl="3"/>
             <a:r>
-              <a:rPr lang="en-US" smtClean="0"/>
+              <a:rPr lang="en-US"/>
               <a:t>Fourth level</a:t>
             </a:r>
           </a:p>
           <a:p>
             <a:pPr lvl="4"/>
             <a:r>
-              <a:rPr lang="en-US" smtClean="0"/>
+              <a:rPr lang="en-US"/>
               <a:t>Fifth level</a:t>
             </a:r>
-            <a:endParaRPr lang="en-US"/>
           </a:p>
         </p:txBody>
       </p:sp>
@@ -1676,7 +1678,7 @@
           <a:p>
             <a:pPr lvl="0"/>
             <a:r>
-              <a:rPr lang="en-US" smtClean="0"/>
+              <a:rPr lang="en-US"/>
               <a:t>Click to edit Master text styles</a:t>
             </a:r>
           </a:p>
@@ -1732,38 +1734,37 @@
           <a:p>
             <a:pPr lvl="0"/>
             <a:r>
-              <a:rPr lang="en-US" smtClean="0"/>
+              <a:rPr lang="en-US"/>
               <a:t>Click to edit Master text styles</a:t>
             </a:r>
           </a:p>
           <a:p>
             <a:pPr lvl="1"/>
             <a:r>
-              <a:rPr lang="en-US" smtClean="0"/>
+              <a:rPr lang="en-US"/>
               <a:t>Second level</a:t>
             </a:r>
           </a:p>
           <a:p>
             <a:pPr lvl="2"/>
             <a:r>
-              <a:rPr lang="en-US" smtClean="0"/>
+              <a:rPr lang="en-US"/>
               <a:t>Third level</a:t>
             </a:r>
           </a:p>
           <a:p>
             <a:pPr lvl="3"/>
             <a:r>
-              <a:rPr lang="en-US" smtClean="0"/>
+              <a:rPr lang="en-US"/>
               <a:t>Fourth level</a:t>
             </a:r>
           </a:p>
           <a:p>
             <a:pPr lvl="4"/>
             <a:r>
-              <a:rPr lang="en-US" smtClean="0"/>
+              <a:rPr lang="en-US"/>
               <a:t>Fifth level</a:t>
             </a:r>
-            <a:endParaRPr lang="en-US"/>
           </a:p>
         </p:txBody>
       </p:sp>
@@ -1784,7 +1785,7 @@
           <a:p>
             <a:fld id="{5BCAD085-E8A6-8845-BD4E-CB4CCA059FC4}" type="datetimeFigureOut">
               <a:rPr lang="en-US" smtClean="0"/>
-              <a:t>1/27/13</a:t>
+              <a:t>8/12/2026</a:t>
             </a:fld>
             <a:endParaRPr lang="en-US"/>
           </a:p>
@@ -1878,10 +1879,9 @@
           <a:lstStyle/>
           <a:p>
             <a:r>
-              <a:rPr lang="en-US" smtClean="0"/>
+              <a:rPr lang="en-US"/>
               <a:t>Click to edit Master title style</a:t>
             </a:r>
-            <a:endParaRPr lang="en-US"/>
           </a:p>
         </p:txBody>
       </p:sp>
@@ -1902,7 +1902,7 @@
           <a:p>
             <a:fld id="{5BCAD085-E8A6-8845-BD4E-CB4CCA059FC4}" type="datetimeFigureOut">
               <a:rPr lang="en-US" smtClean="0"/>
-              <a:t>1/27/13</a:t>
+              <a:t>8/12/2026</a:t>
             </a:fld>
             <a:endParaRPr lang="en-US"/>
           </a:p>
@@ -1997,7 +1997,7 @@
           <a:p>
             <a:fld id="{5BCAD085-E8A6-8845-BD4E-CB4CCA059FC4}" type="datetimeFigureOut">
               <a:rPr lang="en-US" smtClean="0"/>
-              <a:t>1/27/13</a:t>
+              <a:t>8/12/2026</a:t>
             </a:fld>
             <a:endParaRPr lang="en-US"/>
           </a:p>
@@ -2100,10 +2100,9 @@
           </a:lstStyle>
           <a:p>
             <a:r>
-              <a:rPr lang="en-US" smtClean="0"/>
+              <a:rPr lang="en-US"/>
               <a:t>Click to edit Master title style</a:t>
             </a:r>
-            <a:endParaRPr lang="en-US"/>
           </a:p>
         </p:txBody>
       </p:sp>
@@ -2157,38 +2156,37 @@
           <a:p>
             <a:pPr lvl="0"/>
             <a:r>
-              <a:rPr lang="en-US" smtClean="0"/>
+              <a:rPr lang="en-US"/>
               <a:t>Click to edit Master text styles</a:t>
             </a:r>
           </a:p>
           <a:p>
             <a:pPr lvl="1"/>
             <a:r>
-              <a:rPr lang="en-US" smtClean="0"/>
+              <a:rPr lang="en-US"/>
               <a:t>Second level</a:t>
             </a:r>
           </a:p>
           <a:p>
             <a:pPr lvl="2"/>
             <a:r>
-              <a:rPr lang="en-US" smtClean="0"/>
+              <a:rPr lang="en-US"/>
               <a:t>Third level</a:t>
             </a:r>
           </a:p>
           <a:p>
             <a:pPr lvl="3"/>
             <a:r>
-              <a:rPr lang="en-US" smtClean="0"/>
+              <a:rPr lang="en-US"/>
               <a:t>Fourth level</a:t>
             </a:r>
           </a:p>
           <a:p>
             <a:pPr lvl="4"/>
             <a:r>
-              <a:rPr lang="en-US" smtClean="0"/>
+              <a:rPr lang="en-US"/>
               <a:t>Fifth level</a:t>
             </a:r>
-            <a:endParaRPr lang="en-US"/>
           </a:p>
         </p:txBody>
       </p:sp>
@@ -2251,7 +2249,7 @@
           <a:p>
             <a:pPr lvl="0"/>
             <a:r>
-              <a:rPr lang="en-US" smtClean="0"/>
+              <a:rPr lang="en-US"/>
               <a:t>Click to edit Master text styles</a:t>
             </a:r>
           </a:p>
@@ -2274,7 +2272,7 @@
           <a:p>
             <a:fld id="{5BCAD085-E8A6-8845-BD4E-CB4CCA059FC4}" type="datetimeFigureOut">
               <a:rPr lang="en-US" smtClean="0"/>
-              <a:t>1/27/13</a:t>
+              <a:t>8/12/2026</a:t>
             </a:fld>
             <a:endParaRPr lang="en-US"/>
           </a:p>
@@ -2377,10 +2375,9 @@
           </a:lstStyle>
           <a:p>
             <a:r>
-              <a:rPr lang="en-US" smtClean="0"/>
+              <a:rPr lang="en-US"/>
               <a:t>Click to edit Master title style</a:t>
             </a:r>
-            <a:endParaRPr lang="en-US"/>
           </a:p>
         </p:txBody>
       </p:sp>
@@ -2504,7 +2501,7 @@
           <a:p>
             <a:pPr lvl="0"/>
             <a:r>
-              <a:rPr lang="en-US" smtClean="0"/>
+              <a:rPr lang="en-US"/>
               <a:t>Click to edit Master text styles</a:t>
             </a:r>
           </a:p>
@@ -2527,7 +2524,7 @@
           <a:p>
             <a:fld id="{5BCAD085-E8A6-8845-BD4E-CB4CCA059FC4}" type="datetimeFigureOut">
               <a:rPr lang="en-US" smtClean="0"/>
-              <a:t>1/27/13</a:t>
+              <a:t>8/12/2026</a:t>
             </a:fld>
             <a:endParaRPr lang="en-US"/>
           </a:p>
@@ -2636,10 +2633,9 @@
           <a:lstStyle/>
           <a:p>
             <a:r>
-              <a:rPr lang="en-US" smtClean="0"/>
+              <a:rPr lang="en-US"/>
               <a:t>Click to edit Master title style</a:t>
             </a:r>
-            <a:endParaRPr lang="en-US"/>
           </a:p>
         </p:txBody>
       </p:sp>
@@ -2670,38 +2666,37 @@
           <a:p>
             <a:pPr lvl="0"/>
             <a:r>
-              <a:rPr lang="en-US" smtClean="0"/>
+              <a:rPr lang="en-US"/>
               <a:t>Click to edit Master text styles</a:t>
             </a:r>
           </a:p>
           <a:p>
             <a:pPr lvl="1"/>
             <a:r>
-              <a:rPr lang="en-US" smtClean="0"/>
+              <a:rPr lang="en-US"/>
               <a:t>Second level</a:t>
             </a:r>
           </a:p>
           <a:p>
             <a:pPr lvl="2"/>
             <a:r>
-              <a:rPr lang="en-US" smtClean="0"/>
+              <a:rPr lang="en-US"/>
               <a:t>Third level</a:t>
             </a:r>
           </a:p>
           <a:p>
             <a:pPr lvl="3"/>
             <a:r>
-              <a:rPr lang="en-US" smtClean="0"/>
+              <a:rPr lang="en-US"/>
               <a:t>Fourth level</a:t>
             </a:r>
           </a:p>
           <a:p>
             <a:pPr lvl="4"/>
             <a:r>
-              <a:rPr lang="en-US" smtClean="0"/>
+              <a:rPr lang="en-US"/>
               <a:t>Fifth level</a:t>
             </a:r>
-            <a:endParaRPr lang="en-US"/>
           </a:p>
         </p:txBody>
       </p:sp>
@@ -2740,7 +2735,7 @@
           <a:p>
             <a:fld id="{5BCAD085-E8A6-8845-BD4E-CB4CCA059FC4}" type="datetimeFigureOut">
               <a:rPr lang="en-US" smtClean="0"/>
-              <a:t>1/27/13</a:t>
+              <a:t>8/12/2026</a:t>
             </a:fld>
             <a:endParaRPr lang="en-US"/>
           </a:p>
@@ -3099,7 +3094,7 @@
 </file>
 
 <file path=ppt/slides/slide1.xml><?xml version="1.0" encoding="utf-8"?>
-<p:sld xmlns:a="http://schemas.openxmlformats.org/drawingml/2006/main" xmlns:p="http://schemas.openxmlformats.org/presentationml/2006/main" xmlns:r="http://schemas.openxmlformats.org/officeDocument/2006/relationships">
+<p:sld xmlns:a="http://schemas.openxmlformats.org/drawingml/2006/main" xmlns:r="http://schemas.openxmlformats.org/officeDocument/2006/relationships" xmlns:p="http://schemas.openxmlformats.org/presentationml/2006/main">
   <p:cSld>
     <p:spTree>
       <p:nvGrpSpPr>
@@ -3107,51 +3102,14 @@
         <p:cNvGrpSpPr/>
         <p:nvPr/>
       </p:nvGrpSpPr>
-      <p:grpSpPr/>
-      <p:sp>
-        <p:nvSpPr>
-          <p:cNvPr id="2" name="Rectangle 1"/>
-          <p:cNvSpPr/>
-          <p:nvPr/>
-        </p:nvSpPr>
-        <p:spPr>
-          <a:xfrm>
-            <a:off x="0" y="0"/>
-            <a:ext cx="12191695" cy="6858000"/>
-          </a:xfrm>
-          <a:prstGeom prst="rect">
-            <a:avLst/>
-          </a:prstGeom>
-          <a:solidFill>
-            <a:srgbClr val="FFFFFF"/>
-          </a:solidFill>
-          <a:ln>
-            <a:noFill/>
-          </a:ln>
-          <a:effectLst/>
-        </p:spPr>
-        <p:style>
-          <a:lnRef idx="1">
-            <a:schemeClr val="accent1"/>
-          </a:lnRef>
-          <a:fillRef idx="3">
-            <a:schemeClr val="accent1"/>
-          </a:fillRef>
-          <a:effectRef idx="2">
-            <a:schemeClr val="accent1"/>
-          </a:effectRef>
-          <a:fontRef idx="minor">
-            <a:schemeClr val="lt1"/>
-          </a:fontRef>
-        </p:style>
-        <p:txBody>
-          <a:bodyPr rtlCol="0" anchor="ctr"/>
-          <a:lstStyle/>
-          <a:p>
-            <a:pPr algn="ctr"/>
-          </a:p>
-        </p:txBody>
-      </p:sp>
+      <p:grpSpPr>
+        <a:xfrm>
+          <a:off x="0" y="0"/>
+          <a:ext cx="0" cy="0"/>
+          <a:chOff x="0" y="0"/>
+          <a:chExt cx="0" cy="0"/>
+        </a:xfrm>
+      </p:grpSpPr>
       <p:sp>
         <p:nvSpPr>
           <p:cNvPr id="3" name="Rounded Rectangle 2"/>
@@ -3177,7 +3135,7 @@
                 <a:srgbClr val="73787E"/>
               </a:gs>
             </a:gsLst>
-            <a:lin scaled="0" ang="18900000"/>
+            <a:lin ang="18900000" scaled="0"/>
           </a:gradFill>
           <a:ln>
             <a:noFill/>
@@ -3209,6 +3167,7 @@
           <a:lstStyle/>
           <a:p>
             <a:pPr algn="ctr"/>
+            <a:endParaRPr/>
           </a:p>
         </p:txBody>
       </p:sp>
@@ -3220,8 +3179,8 @@
         </p:nvSpPr>
         <p:spPr>
           <a:xfrm>
-            <a:off x="914400" y="1481328"/>
-            <a:ext cx="8467344" cy="1764792"/>
+            <a:off x="914399" y="1481328"/>
+            <a:ext cx="8464063" cy="1769267"/>
           </a:xfrm>
           <a:prstGeom prst="rect">
             <a:avLst/>
@@ -3243,15 +3202,62 @@
               </a:spcAft>
             </a:pPr>
             <a:r>
-              <a:rPr sz="1450" b="0">
+              <a:rPr sz="1450" b="0" dirty="0" err="1">
                 <a:solidFill>
                   <a:srgbClr val="767A7F"/>
                 </a:solidFill>
                 <a:latin typeface="맑은 고딕"/>
                 <a:ea typeface="맑은 고딕"/>
               </a:rPr>
-              <a:t>데이터 분석 결과보고서</a:t>
-            </a:r>
+              <a:t>데이터</a:t>
+            </a:r>
+            <a:r>
+              <a:rPr sz="1450" b="0" dirty="0">
+                <a:solidFill>
+                  <a:srgbClr val="767A7F"/>
+                </a:solidFill>
+                <a:latin typeface="맑은 고딕"/>
+                <a:ea typeface="맑은 고딕"/>
+              </a:rPr>
+              <a:t> </a:t>
+            </a:r>
+            <a:r>
+              <a:rPr sz="1450" b="0" dirty="0" err="1">
+                <a:solidFill>
+                  <a:srgbClr val="767A7F"/>
+                </a:solidFill>
+                <a:latin typeface="맑은 고딕"/>
+                <a:ea typeface="맑은 고딕"/>
+              </a:rPr>
+              <a:t>분석</a:t>
+            </a:r>
+            <a:r>
+              <a:rPr sz="1450" b="0" dirty="0">
+                <a:solidFill>
+                  <a:srgbClr val="767A7F"/>
+                </a:solidFill>
+                <a:latin typeface="맑은 고딕"/>
+                <a:ea typeface="맑은 고딕"/>
+              </a:rPr>
+              <a:t> </a:t>
+            </a:r>
+            <a:r>
+              <a:rPr sz="1450" b="0" dirty="0" err="1">
+                <a:solidFill>
+                  <a:srgbClr val="767A7F"/>
+                </a:solidFill>
+                <a:latin typeface="맑은 고딕"/>
+                <a:ea typeface="맑은 고딕"/>
+              </a:rPr>
+              <a:t>결과보고서</a:t>
+            </a:r>
+            <a:endParaRPr sz="1450" b="0" dirty="0">
+              <a:solidFill>
+                <a:srgbClr val="767A7F"/>
+              </a:solidFill>
+              <a:latin typeface="맑은 고딕"/>
+              <a:ea typeface="맑은 고딕"/>
+            </a:endParaRPr>
           </a:p>
           <a:p>
             <a:pPr>
@@ -3263,7 +3269,7 @@
               </a:spcAft>
             </a:pPr>
             <a:r>
-              <a:rPr sz="4700" b="1">
+              <a:rPr lang="ko-KR" altLang="en-US" sz="4700" b="1" dirty="0">
                 <a:solidFill>
                   <a:srgbClr val="1C1C1E"/>
                 </a:solidFill>
@@ -3272,6 +3278,13 @@
               </a:rPr>
               <a:t>분만취약지 지원제도 개선안</a:t>
             </a:r>
+            <a:endParaRPr lang="en-US" altLang="ko-KR" sz="1900" dirty="0">
+              <a:solidFill>
+                <a:srgbClr val="33393F"/>
+              </a:solidFill>
+              <a:latin typeface="맑은 고딕"/>
+              <a:ea typeface="맑은 고딕"/>
+            </a:endParaRPr>
           </a:p>
           <a:p>
             <a:pPr>
@@ -3279,19 +3292,156 @@
                 <a:spcPct val="114000"/>
               </a:lnSpc>
               <a:spcAft>
-                <a:spcPts val="0"/>
-              </a:spcAft>
-            </a:pPr>
-            <a:r>
-              <a:rPr sz="1900" b="0">
+                <a:spcPts val="800"/>
+              </a:spcAft>
+            </a:pPr>
+            <a:r>
+              <a:rPr sz="1900" b="0" dirty="0" err="1">
                 <a:solidFill>
                   <a:srgbClr val="33393F"/>
                 </a:solidFill>
                 <a:latin typeface="맑은 고딕"/>
                 <a:ea typeface="맑은 고딕"/>
               </a:rPr>
-              <a:t>분만취약지 지원 제도의 모든 절차 속 데이터 감사와 개선된 분석 모형 제안</a:t>
-            </a:r>
+              <a:t>분만취약지</a:t>
+            </a:r>
+            <a:r>
+              <a:rPr sz="1900" b="0" dirty="0">
+                <a:solidFill>
+                  <a:srgbClr val="33393F"/>
+                </a:solidFill>
+                <a:latin typeface="맑은 고딕"/>
+                <a:ea typeface="맑은 고딕"/>
+              </a:rPr>
+              <a:t> </a:t>
+            </a:r>
+            <a:r>
+              <a:rPr lang="ko-KR" altLang="en-US" sz="1900" b="0" dirty="0">
+                <a:solidFill>
+                  <a:srgbClr val="33393F"/>
+                </a:solidFill>
+                <a:latin typeface="맑은 고딕"/>
+                <a:ea typeface="맑은 고딕"/>
+              </a:rPr>
+              <a:t>지원 </a:t>
+            </a:r>
+            <a:r>
+              <a:rPr sz="1900" b="0" dirty="0" err="1">
+                <a:solidFill>
+                  <a:srgbClr val="33393F"/>
+                </a:solidFill>
+                <a:latin typeface="맑은 고딕"/>
+                <a:ea typeface="맑은 고딕"/>
+              </a:rPr>
+              <a:t>제도의</a:t>
+            </a:r>
+            <a:r>
+              <a:rPr sz="1900" b="0" dirty="0">
+                <a:solidFill>
+                  <a:srgbClr val="33393F"/>
+                </a:solidFill>
+                <a:latin typeface="맑은 고딕"/>
+                <a:ea typeface="맑은 고딕"/>
+              </a:rPr>
+              <a:t> </a:t>
+            </a:r>
+            <a:r>
+              <a:rPr lang="ko-KR" altLang="en-US" sz="1900" b="0" dirty="0">
+                <a:solidFill>
+                  <a:srgbClr val="33393F"/>
+                </a:solidFill>
+                <a:latin typeface="맑은 고딕"/>
+                <a:ea typeface="맑은 고딕"/>
+              </a:rPr>
+              <a:t>모든 절차 속 데이터</a:t>
+            </a:r>
+            <a:r>
+              <a:rPr sz="1900" b="0" dirty="0">
+                <a:solidFill>
+                  <a:srgbClr val="33393F"/>
+                </a:solidFill>
+                <a:latin typeface="맑은 고딕"/>
+                <a:ea typeface="맑은 고딕"/>
+              </a:rPr>
+              <a:t> </a:t>
+            </a:r>
+            <a:r>
+              <a:rPr sz="1900" b="0" dirty="0" err="1">
+                <a:solidFill>
+                  <a:srgbClr val="33393F"/>
+                </a:solidFill>
+                <a:latin typeface="맑은 고딕"/>
+                <a:ea typeface="맑은 고딕"/>
+              </a:rPr>
+              <a:t>감사와</a:t>
+            </a:r>
+            <a:r>
+              <a:rPr sz="1900" b="0" dirty="0">
+                <a:solidFill>
+                  <a:srgbClr val="33393F"/>
+                </a:solidFill>
+                <a:latin typeface="맑은 고딕"/>
+                <a:ea typeface="맑은 고딕"/>
+              </a:rPr>
+              <a:t> </a:t>
+            </a:r>
+            <a:r>
+              <a:rPr lang="ko-KR" altLang="en-US" sz="1900" dirty="0">
+                <a:solidFill>
+                  <a:srgbClr val="33393F"/>
+                </a:solidFill>
+                <a:latin typeface="맑은 고딕"/>
+                <a:ea typeface="맑은 고딕"/>
+              </a:rPr>
+              <a:t>개선된 분석</a:t>
+            </a:r>
+            <a:r>
+              <a:rPr sz="1900" b="0" dirty="0">
+                <a:solidFill>
+                  <a:srgbClr val="33393F"/>
+                </a:solidFill>
+                <a:latin typeface="맑은 고딕"/>
+                <a:ea typeface="맑은 고딕"/>
+              </a:rPr>
+              <a:t> </a:t>
+            </a:r>
+            <a:r>
+              <a:rPr sz="1900" b="0" dirty="0" err="1">
+                <a:solidFill>
+                  <a:srgbClr val="33393F"/>
+                </a:solidFill>
+                <a:latin typeface="맑은 고딕"/>
+                <a:ea typeface="맑은 고딕"/>
+              </a:rPr>
+              <a:t>모형</a:t>
+            </a:r>
+            <a:r>
+              <a:rPr lang="en-US" sz="1900" b="0" dirty="0">
+                <a:solidFill>
+                  <a:srgbClr val="33393F"/>
+                </a:solidFill>
+                <a:latin typeface="맑은 고딕"/>
+                <a:ea typeface="맑은 고딕"/>
+              </a:rPr>
+              <a:t> </a:t>
+            </a:r>
+            <a:r>
+              <a:rPr lang="ko-KR" altLang="en-US" sz="1900" b="0" dirty="0">
+                <a:solidFill>
+                  <a:srgbClr val="33393F"/>
+                </a:solidFill>
+                <a:latin typeface="맑은 고딕"/>
+                <a:ea typeface="맑은 고딕"/>
+              </a:rPr>
+              <a:t>제안</a:t>
+            </a:r>
+            <a:endParaRPr sz="1900" b="0" dirty="0">
+              <a:solidFill>
+                <a:srgbClr val="33393F"/>
+              </a:solidFill>
+              <a:latin typeface="맑은 고딕"/>
+              <a:ea typeface="맑은 고딕"/>
+            </a:endParaRPr>
           </a:p>
         </p:txBody>
       </p:sp>
@@ -3318,7 +3468,7 @@
                 <a:srgbClr val="FFFFFF"/>
               </a:gs>
             </a:gsLst>
-            <a:lin scaled="0" ang="0"/>
+            <a:lin ang="0" scaled="0"/>
           </a:gradFill>
           <a:ln>
             <a:noFill/>
@@ -3344,6 +3494,7 @@
           <a:lstStyle/>
           <a:p>
             <a:pPr algn="ctr"/>
+            <a:endParaRPr/>
           </a:p>
         </p:txBody>
       </p:sp>
@@ -3356,7 +3507,7 @@
         <p:spPr>
           <a:xfrm>
             <a:off x="914400" y="4663440"/>
-            <a:ext cx="6949440" cy="310896"/>
+            <a:ext cx="6949440" cy="307777"/>
           </a:xfrm>
           <a:prstGeom prst="rect">
             <a:avLst/>
@@ -3374,19 +3525,156 @@
                 <a:spcPct val="114000"/>
               </a:lnSpc>
               <a:spcAft>
-                <a:spcPts val="0"/>
-              </a:spcAft>
-            </a:pPr>
-            <a:r>
-              <a:rPr sz="1350" b="1">
-                <a:solidFill>
-                  <a:srgbClr val="1C1C1E"/>
-                </a:solidFill>
-                <a:latin typeface="맑은 고딕"/>
-                <a:ea typeface="맑은 고딕"/>
-              </a:rPr>
-              <a:t>2026 제5회 명지대학교 창의적 SW프로그램 경진대회 · 빅데이터 분석 부문</a:t>
-            </a:r>
+                <a:spcPts val="600"/>
+              </a:spcAft>
+            </a:pPr>
+            <a:r>
+              <a:rPr sz="1350" b="1" dirty="0">
+                <a:solidFill>
+                  <a:srgbClr val="1C1C1E"/>
+                </a:solidFill>
+                <a:latin typeface="맑은 고딕"/>
+                <a:ea typeface="맑은 고딕"/>
+              </a:rPr>
+              <a:t>2026 제5회 </a:t>
+            </a:r>
+            <a:r>
+              <a:rPr sz="1350" b="1" dirty="0" err="1">
+                <a:solidFill>
+                  <a:srgbClr val="1C1C1E"/>
+                </a:solidFill>
+                <a:latin typeface="맑은 고딕"/>
+                <a:ea typeface="맑은 고딕"/>
+              </a:rPr>
+              <a:t>명지대학교</a:t>
+            </a:r>
+            <a:r>
+              <a:rPr sz="1350" b="1" dirty="0">
+                <a:solidFill>
+                  <a:srgbClr val="1C1C1E"/>
+                </a:solidFill>
+                <a:latin typeface="맑은 고딕"/>
+                <a:ea typeface="맑은 고딕"/>
+              </a:rPr>
+              <a:t> </a:t>
+            </a:r>
+            <a:r>
+              <a:rPr sz="1350" b="1" dirty="0" err="1">
+                <a:solidFill>
+                  <a:srgbClr val="1C1C1E"/>
+                </a:solidFill>
+                <a:latin typeface="맑은 고딕"/>
+                <a:ea typeface="맑은 고딕"/>
+              </a:rPr>
+              <a:t>창의적</a:t>
+            </a:r>
+            <a:r>
+              <a:rPr sz="1350" b="1" dirty="0">
+                <a:solidFill>
+                  <a:srgbClr val="1C1C1E"/>
+                </a:solidFill>
+                <a:latin typeface="맑은 고딕"/>
+                <a:ea typeface="맑은 고딕"/>
+              </a:rPr>
+              <a:t> </a:t>
+            </a:r>
+            <a:r>
+              <a:rPr sz="1350" b="1" dirty="0" err="1">
+                <a:solidFill>
+                  <a:srgbClr val="1C1C1E"/>
+                </a:solidFill>
+                <a:latin typeface="맑은 고딕"/>
+                <a:ea typeface="맑은 고딕"/>
+              </a:rPr>
+              <a:t>SW프로그램</a:t>
+            </a:r>
+            <a:r>
+              <a:rPr sz="1350" b="1" dirty="0">
+                <a:solidFill>
+                  <a:srgbClr val="1C1C1E"/>
+                </a:solidFill>
+                <a:latin typeface="맑은 고딕"/>
+                <a:ea typeface="맑은 고딕"/>
+              </a:rPr>
+              <a:t> </a:t>
+            </a:r>
+            <a:r>
+              <a:rPr sz="1350" b="1" dirty="0" err="1">
+                <a:solidFill>
+                  <a:srgbClr val="1C1C1E"/>
+                </a:solidFill>
+                <a:latin typeface="맑은 고딕"/>
+                <a:ea typeface="맑은 고딕"/>
+              </a:rPr>
+              <a:t>경진대회</a:t>
+            </a:r>
+            <a:r>
+              <a:rPr sz="1350" b="1" dirty="0">
+                <a:solidFill>
+                  <a:srgbClr val="1C1C1E"/>
+                </a:solidFill>
+                <a:latin typeface="맑은 고딕"/>
+                <a:ea typeface="맑은 고딕"/>
+              </a:rPr>
+              <a:t> · </a:t>
+            </a:r>
+            <a:r>
+              <a:rPr sz="1350" b="1" dirty="0" err="1">
+                <a:solidFill>
+                  <a:srgbClr val="1C1C1E"/>
+                </a:solidFill>
+                <a:latin typeface="맑은 고딕"/>
+                <a:ea typeface="맑은 고딕"/>
+              </a:rPr>
+              <a:t>빅데이터</a:t>
+            </a:r>
+            <a:r>
+              <a:rPr sz="1350" b="1" dirty="0">
+                <a:solidFill>
+                  <a:srgbClr val="1C1C1E"/>
+                </a:solidFill>
+                <a:latin typeface="맑은 고딕"/>
+                <a:ea typeface="맑은 고딕"/>
+              </a:rPr>
+              <a:t> </a:t>
+            </a:r>
+            <a:r>
+              <a:rPr sz="1350" b="1" dirty="0" err="1">
+                <a:solidFill>
+                  <a:srgbClr val="1C1C1E"/>
+                </a:solidFill>
+                <a:latin typeface="맑은 고딕"/>
+                <a:ea typeface="맑은 고딕"/>
+              </a:rPr>
+              <a:t>분석</a:t>
+            </a:r>
+            <a:r>
+              <a:rPr sz="1350" b="1" dirty="0">
+                <a:solidFill>
+                  <a:srgbClr val="1C1C1E"/>
+                </a:solidFill>
+                <a:latin typeface="맑은 고딕"/>
+                <a:ea typeface="맑은 고딕"/>
+              </a:rPr>
+              <a:t> </a:t>
+            </a:r>
+            <a:r>
+              <a:rPr sz="1350" b="1" dirty="0" err="1">
+                <a:solidFill>
+                  <a:srgbClr val="1C1C1E"/>
+                </a:solidFill>
+                <a:latin typeface="맑은 고딕"/>
+                <a:ea typeface="맑은 고딕"/>
+              </a:rPr>
+              <a:t>부문</a:t>
+            </a:r>
+            <a:endParaRPr sz="1350" b="1" dirty="0">
+              <a:solidFill>
+                <a:srgbClr val="1C1C1E"/>
+              </a:solidFill>
+              <a:latin typeface="맑은 고딕"/>
+              <a:ea typeface="맑은 고딕"/>
+            </a:endParaRPr>
           </a:p>
         </p:txBody>
       </p:sp>
@@ -3399,7 +3687,7 @@
 </file>
 
 <file path=ppt/slides/slide10.xml><?xml version="1.0" encoding="utf-8"?>
-<p:sld xmlns:a="http://schemas.openxmlformats.org/drawingml/2006/main" xmlns:p="http://schemas.openxmlformats.org/presentationml/2006/main" xmlns:r="http://schemas.openxmlformats.org/officeDocument/2006/relationships">
+<p:sld xmlns:a="http://schemas.openxmlformats.org/drawingml/2006/main" xmlns:r="http://schemas.openxmlformats.org/officeDocument/2006/relationships" xmlns:p="http://schemas.openxmlformats.org/presentationml/2006/main">
   <p:cSld>
     <p:spTree>
       <p:nvGrpSpPr>
@@ -3407,7 +3695,14 @@
         <p:cNvGrpSpPr/>
         <p:nvPr/>
       </p:nvGrpSpPr>
-      <p:grpSpPr/>
+      <p:grpSpPr>
+        <a:xfrm>
+          <a:off x="0" y="0"/>
+          <a:ext cx="0" cy="0"/>
+          <a:chOff x="0" y="0"/>
+          <a:chExt cx="0" cy="0"/>
+        </a:xfrm>
+      </p:grpSpPr>
       <p:sp>
         <p:nvSpPr>
           <p:cNvPr id="2" name="Rectangle 1"/>
@@ -3449,6 +3744,7 @@
           <a:lstStyle/>
           <a:p>
             <a:pPr algn="ctr"/>
+            <a:endParaRPr/>
           </a:p>
         </p:txBody>
       </p:sp>
@@ -3477,7 +3773,7 @@
                 <a:srgbClr val="73787E"/>
               </a:gs>
             </a:gsLst>
-            <a:lin scaled="0" ang="18900000"/>
+            <a:lin ang="18900000" scaled="0"/>
           </a:gradFill>
           <a:ln>
             <a:noFill/>
@@ -3509,6 +3805,7 @@
           <a:lstStyle/>
           <a:p>
             <a:pPr algn="ctr"/>
+            <a:endParaRPr/>
           </a:p>
         </p:txBody>
       </p:sp>
@@ -3578,7 +3875,7 @@
                 <a:srgbClr val="FFFFFF"/>
               </a:gs>
             </a:gsLst>
-            <a:lin scaled="0" ang="0"/>
+            <a:lin ang="0" scaled="0"/>
           </a:gradFill>
           <a:ln>
             <a:noFill/>
@@ -3604,6 +3901,7 @@
           <a:lstStyle/>
           <a:p>
             <a:pPr algn="ctr"/>
+            <a:endParaRPr/>
           </a:p>
         </p:txBody>
       </p:sp>
@@ -3761,7 +4059,7 @@
                 <a:srgbClr val="4A4F55"/>
               </a:gs>
             </a:gsLst>
-            <a:lin scaled="0" ang="14700000"/>
+            <a:lin ang="14700000" scaled="0"/>
           </a:gradFill>
           <a:ln>
             <a:noFill/>
@@ -3793,6 +4091,7 @@
           <a:lstStyle/>
           <a:p>
             <a:pPr algn="ctr"/>
+            <a:endParaRPr/>
           </a:p>
         </p:txBody>
       </p:sp>
@@ -3910,6 +4209,7 @@
           <a:lstStyle/>
           <a:p>
             <a:pPr algn="ctr"/>
+            <a:endParaRPr/>
           </a:p>
         </p:txBody>
       </p:sp>
@@ -4067,6 +4367,7 @@
           <a:lstStyle/>
           <a:p>
             <a:pPr algn="ctr"/>
+            <a:endParaRPr/>
           </a:p>
         </p:txBody>
       </p:sp>
@@ -4202,7 +4503,7 @@
 </file>
 
 <file path=ppt/slides/slide11.xml><?xml version="1.0" encoding="utf-8"?>
-<p:sld xmlns:a="http://schemas.openxmlformats.org/drawingml/2006/main" xmlns:p="http://schemas.openxmlformats.org/presentationml/2006/main" xmlns:r="http://schemas.openxmlformats.org/officeDocument/2006/relationships">
+<p:sld xmlns:a="http://schemas.openxmlformats.org/drawingml/2006/main" xmlns:r="http://schemas.openxmlformats.org/officeDocument/2006/relationships" xmlns:p="http://schemas.openxmlformats.org/presentationml/2006/main">
   <p:cSld>
     <p:spTree>
       <p:nvGrpSpPr>
@@ -4210,7 +4511,14 @@
         <p:cNvGrpSpPr/>
         <p:nvPr/>
       </p:nvGrpSpPr>
-      <p:grpSpPr/>
+      <p:grpSpPr>
+        <a:xfrm>
+          <a:off x="0" y="0"/>
+          <a:ext cx="0" cy="0"/>
+          <a:chOff x="0" y="0"/>
+          <a:chExt cx="0" cy="0"/>
+        </a:xfrm>
+      </p:grpSpPr>
       <p:sp>
         <p:nvSpPr>
           <p:cNvPr id="2" name="Rectangle 1"/>
@@ -4252,6 +4560,7 @@
           <a:lstStyle/>
           <a:p>
             <a:pPr algn="ctr"/>
+            <a:endParaRPr/>
           </a:p>
         </p:txBody>
       </p:sp>
@@ -4280,7 +4589,7 @@
                 <a:srgbClr val="73787E"/>
               </a:gs>
             </a:gsLst>
-            <a:lin scaled="0" ang="18900000"/>
+            <a:lin ang="18900000" scaled="0"/>
           </a:gradFill>
           <a:ln>
             <a:noFill/>
@@ -4312,6 +4621,7 @@
           <a:lstStyle/>
           <a:p>
             <a:pPr algn="ctr"/>
+            <a:endParaRPr/>
           </a:p>
         </p:txBody>
       </p:sp>
@@ -4381,7 +4691,7 @@
                 <a:srgbClr val="FFFFFF"/>
               </a:gs>
             </a:gsLst>
-            <a:lin scaled="0" ang="0"/>
+            <a:lin ang="0" scaled="0"/>
           </a:gradFill>
           <a:ln>
             <a:noFill/>
@@ -4407,6 +4717,7 @@
           <a:lstStyle/>
           <a:p>
             <a:pPr algn="ctr"/>
+            <a:endParaRPr/>
           </a:p>
         </p:txBody>
       </p:sp>
@@ -4515,9 +4826,27 @@
                 <a:tableStyleId>{5C22544A-7EE6-4342-B048-85BDC9FD1C3A}</a:tableStyleId>
               </a:tblPr>
               <a:tblGrid>
-                <a:gridCol w="3291840"/>
-                <a:gridCol w="4846320"/>
-                <a:gridCol w="3154680"/>
+                <a:gridCol w="3291840">
+                  <a:extLst>
+                    <a:ext uri="{9D8B030D-6E8A-4147-A177-3AD203B41FA5}">
+                      <a16:colId xmlns:a16="http://schemas.microsoft.com/office/drawing/2014/main" val="20000"/>
+                    </a:ext>
+                  </a:extLst>
+                </a:gridCol>
+                <a:gridCol w="4846320">
+                  <a:extLst>
+                    <a:ext uri="{9D8B030D-6E8A-4147-A177-3AD203B41FA5}">
+                      <a16:colId xmlns:a16="http://schemas.microsoft.com/office/drawing/2014/main" val="20001"/>
+                    </a:ext>
+                  </a:extLst>
+                </a:gridCol>
+                <a:gridCol w="3154680">
+                  <a:extLst>
+                    <a:ext uri="{9D8B030D-6E8A-4147-A177-3AD203B41FA5}">
+                      <a16:colId xmlns:a16="http://schemas.microsoft.com/office/drawing/2014/main" val="20002"/>
+                    </a:ext>
+                  </a:extLst>
+                </a:gridCol>
               </a:tblGrid>
               <a:tr h="512064">
                 <a:tc>
@@ -4542,7 +4871,7 @@
                       </a:r>
                     </a:p>
                   </a:txBody>
-                  <a:tcPr marT="27432" marB="27432" marL="73152" marR="73152" anchor="ctr">
+                  <a:tcPr marL="73152" marR="73152" marT="27432" marB="27432" anchor="ctr">
                     <a:solidFill>
                       <a:srgbClr val="33393F"/>
                     </a:solidFill>
@@ -4570,7 +4899,7 @@
                       </a:r>
                     </a:p>
                   </a:txBody>
-                  <a:tcPr marT="27432" marB="27432" marL="73152" marR="73152" anchor="ctr">
+                  <a:tcPr marL="73152" marR="73152" marT="27432" marB="27432" anchor="ctr">
                     <a:solidFill>
                       <a:srgbClr val="33393F"/>
                     </a:solidFill>
@@ -4598,12 +4927,17 @@
                       </a:r>
                     </a:p>
                   </a:txBody>
-                  <a:tcPr marT="27432" marB="27432" marL="73152" marR="73152" anchor="ctr">
+                  <a:tcPr marL="73152" marR="73152" marT="27432" marB="27432" anchor="ctr">
                     <a:solidFill>
                       <a:srgbClr val="33393F"/>
                     </a:solidFill>
                   </a:tcPr>
                 </a:tc>
+                <a:extLst>
+                  <a:ext uri="{0D108BD9-81ED-4DB2-BD59-A6C34878D82A}">
+                    <a16:rowId xmlns:a16="http://schemas.microsoft.com/office/drawing/2014/main" val="10000"/>
+                  </a:ext>
+                </a:extLst>
               </a:tr>
               <a:tr h="512064">
                 <a:tc>
@@ -4628,7 +4962,7 @@
                       </a:r>
                     </a:p>
                   </a:txBody>
-                  <a:tcPr marT="27432" marB="27432" marL="73152" marR="73152" anchor="ctr">
+                  <a:tcPr marL="73152" marR="73152" marT="27432" marB="27432" anchor="ctr">
                     <a:solidFill>
                       <a:srgbClr val="E3E5E8"/>
                     </a:solidFill>
@@ -4656,7 +4990,7 @@
                       </a:r>
                     </a:p>
                   </a:txBody>
-                  <a:tcPr marT="27432" marB="27432" marL="73152" marR="73152" anchor="ctr">
+                  <a:tcPr marL="73152" marR="73152" marT="27432" marB="27432" anchor="ctr">
                     <a:solidFill>
                       <a:srgbClr val="E3E5E8"/>
                     </a:solidFill>
@@ -4684,12 +5018,17 @@
                       </a:r>
                     </a:p>
                   </a:txBody>
-                  <a:tcPr marT="27432" marB="27432" marL="73152" marR="73152" anchor="ctr">
+                  <a:tcPr marL="73152" marR="73152" marT="27432" marB="27432" anchor="ctr">
                     <a:solidFill>
                       <a:srgbClr val="E3E5E8"/>
                     </a:solidFill>
                   </a:tcPr>
                 </a:tc>
+                <a:extLst>
+                  <a:ext uri="{0D108BD9-81ED-4DB2-BD59-A6C34878D82A}">
+                    <a16:rowId xmlns:a16="http://schemas.microsoft.com/office/drawing/2014/main" val="10001"/>
+                  </a:ext>
+                </a:extLst>
               </a:tr>
               <a:tr h="512064">
                 <a:tc>
@@ -4714,7 +5053,7 @@
                       </a:r>
                     </a:p>
                   </a:txBody>
-                  <a:tcPr marT="27432" marB="27432" marL="73152" marR="73152" anchor="ctr">
+                  <a:tcPr marL="73152" marR="73152" marT="27432" marB="27432" anchor="ctr">
                     <a:solidFill>
                       <a:srgbClr val="F6F7F8"/>
                     </a:solidFill>
@@ -4742,7 +5081,7 @@
                       </a:r>
                     </a:p>
                   </a:txBody>
-                  <a:tcPr marT="27432" marB="27432" marL="73152" marR="73152" anchor="ctr">
+                  <a:tcPr marL="73152" marR="73152" marT="27432" marB="27432" anchor="ctr">
                     <a:solidFill>
                       <a:srgbClr val="F6F7F8"/>
                     </a:solidFill>
@@ -4770,12 +5109,17 @@
                       </a:r>
                     </a:p>
                   </a:txBody>
-                  <a:tcPr marT="27432" marB="27432" marL="73152" marR="73152" anchor="ctr">
+                  <a:tcPr marL="73152" marR="73152" marT="27432" marB="27432" anchor="ctr">
                     <a:solidFill>
                       <a:srgbClr val="F6F7F8"/>
                     </a:solidFill>
                   </a:tcPr>
                 </a:tc>
+                <a:extLst>
+                  <a:ext uri="{0D108BD9-81ED-4DB2-BD59-A6C34878D82A}">
+                    <a16:rowId xmlns:a16="http://schemas.microsoft.com/office/drawing/2014/main" val="10002"/>
+                  </a:ext>
+                </a:extLst>
               </a:tr>
             </a:tbl>
           </a:graphicData>
@@ -4832,6 +5176,7 @@
           <a:lstStyle/>
           <a:p>
             <a:pPr algn="ctr"/>
+            <a:endParaRPr/>
           </a:p>
         </p:txBody>
       </p:sp>
@@ -5009,6 +5354,7 @@
           <a:lstStyle/>
           <a:p>
             <a:pPr algn="ctr"/>
+            <a:endParaRPr/>
           </a:p>
         </p:txBody>
       </p:sp>
@@ -5144,7 +5490,7 @@
 </file>
 
 <file path=ppt/slides/slide12.xml><?xml version="1.0" encoding="utf-8"?>
-<p:sld xmlns:a="http://schemas.openxmlformats.org/drawingml/2006/main" xmlns:p="http://schemas.openxmlformats.org/presentationml/2006/main" xmlns:r="http://schemas.openxmlformats.org/officeDocument/2006/relationships">
+<p:sld xmlns:a="http://schemas.openxmlformats.org/drawingml/2006/main" xmlns:r="http://schemas.openxmlformats.org/officeDocument/2006/relationships" xmlns:p="http://schemas.openxmlformats.org/presentationml/2006/main">
   <p:cSld>
     <p:spTree>
       <p:nvGrpSpPr>
@@ -5152,7 +5498,14 @@
         <p:cNvGrpSpPr/>
         <p:nvPr/>
       </p:nvGrpSpPr>
-      <p:grpSpPr/>
+      <p:grpSpPr>
+        <a:xfrm>
+          <a:off x="0" y="0"/>
+          <a:ext cx="0" cy="0"/>
+          <a:chOff x="0" y="0"/>
+          <a:chExt cx="0" cy="0"/>
+        </a:xfrm>
+      </p:grpSpPr>
       <p:sp>
         <p:nvSpPr>
           <p:cNvPr id="2" name="Rectangle 1"/>
@@ -5194,6 +5547,7 @@
           <a:lstStyle/>
           <a:p>
             <a:pPr algn="ctr"/>
+            <a:endParaRPr/>
           </a:p>
         </p:txBody>
       </p:sp>
@@ -5222,7 +5576,7 @@
                 <a:srgbClr val="73787E"/>
               </a:gs>
             </a:gsLst>
-            <a:lin scaled="0" ang="18900000"/>
+            <a:lin ang="18900000" scaled="0"/>
           </a:gradFill>
           <a:ln>
             <a:noFill/>
@@ -5254,6 +5608,7 @@
           <a:lstStyle/>
           <a:p>
             <a:pPr algn="ctr"/>
+            <a:endParaRPr/>
           </a:p>
         </p:txBody>
       </p:sp>
@@ -5323,7 +5678,7 @@
                 <a:srgbClr val="FFFFFF"/>
               </a:gs>
             </a:gsLst>
-            <a:lin scaled="0" ang="0"/>
+            <a:lin ang="0" scaled="0"/>
           </a:gradFill>
           <a:ln>
             <a:noFill/>
@@ -5349,6 +5704,7 @@
           <a:lstStyle/>
           <a:p>
             <a:pPr algn="ctr"/>
+            <a:endParaRPr/>
           </a:p>
         </p:txBody>
       </p:sp>
@@ -5489,6 +5845,7 @@
           <a:lstStyle/>
           <a:p>
             <a:pPr algn="ctr"/>
+            <a:endParaRPr/>
           </a:p>
         </p:txBody>
       </p:sp>
@@ -5606,6 +5963,7 @@
           <a:lstStyle/>
           <a:p>
             <a:pPr algn="ctr"/>
+            <a:endParaRPr/>
           </a:p>
         </p:txBody>
       </p:sp>
@@ -5743,6 +6101,7 @@
           <a:lstStyle/>
           <a:p>
             <a:pPr algn="ctr"/>
+            <a:endParaRPr/>
           </a:p>
         </p:txBody>
       </p:sp>
@@ -5880,6 +6239,7 @@
           <a:lstStyle/>
           <a:p>
             <a:pPr algn="ctr"/>
+            <a:endParaRPr/>
           </a:p>
         </p:txBody>
       </p:sp>
@@ -6018,7 +6378,7 @@
 </file>
 
 <file path=ppt/slides/slide13.xml><?xml version="1.0" encoding="utf-8"?>
-<p:sld xmlns:a="http://schemas.openxmlformats.org/drawingml/2006/main" xmlns:p="http://schemas.openxmlformats.org/presentationml/2006/main" xmlns:r="http://schemas.openxmlformats.org/officeDocument/2006/relationships">
+<p:sld xmlns:a="http://schemas.openxmlformats.org/drawingml/2006/main" xmlns:r="http://schemas.openxmlformats.org/officeDocument/2006/relationships" xmlns:p="http://schemas.openxmlformats.org/presentationml/2006/main">
   <p:cSld>
     <p:spTree>
       <p:nvGrpSpPr>
@@ -6026,7 +6386,14 @@
         <p:cNvGrpSpPr/>
         <p:nvPr/>
       </p:nvGrpSpPr>
-      <p:grpSpPr/>
+      <p:grpSpPr>
+        <a:xfrm>
+          <a:off x="0" y="0"/>
+          <a:ext cx="0" cy="0"/>
+          <a:chOff x="0" y="0"/>
+          <a:chExt cx="0" cy="0"/>
+        </a:xfrm>
+      </p:grpSpPr>
       <p:sp>
         <p:nvSpPr>
           <p:cNvPr id="2" name="Rectangle 1"/>
@@ -6068,6 +6435,7 @@
           <a:lstStyle/>
           <a:p>
             <a:pPr algn="ctr"/>
+            <a:endParaRPr/>
           </a:p>
         </p:txBody>
       </p:sp>
@@ -6096,7 +6464,7 @@
                 <a:srgbClr val="73787E"/>
               </a:gs>
             </a:gsLst>
-            <a:lin scaled="0" ang="18900000"/>
+            <a:lin ang="18900000" scaled="0"/>
           </a:gradFill>
           <a:ln>
             <a:noFill/>
@@ -6128,6 +6496,7 @@
           <a:lstStyle/>
           <a:p>
             <a:pPr algn="ctr"/>
+            <a:endParaRPr/>
           </a:p>
         </p:txBody>
       </p:sp>
@@ -6197,7 +6566,7 @@
                 <a:srgbClr val="FFFFFF"/>
               </a:gs>
             </a:gsLst>
-            <a:lin scaled="0" ang="0"/>
+            <a:lin ang="0" scaled="0"/>
           </a:gradFill>
           <a:ln>
             <a:noFill/>
@@ -6223,6 +6592,7 @@
           <a:lstStyle/>
           <a:p>
             <a:pPr algn="ctr"/>
+            <a:endParaRPr/>
           </a:p>
         </p:txBody>
       </p:sp>
@@ -6363,6 +6733,7 @@
           <a:lstStyle/>
           <a:p>
             <a:pPr algn="ctr"/>
+            <a:endParaRPr/>
           </a:p>
         </p:txBody>
       </p:sp>
@@ -6500,6 +6871,7 @@
           <a:lstStyle/>
           <a:p>
             <a:pPr algn="ctr"/>
+            <a:endParaRPr/>
           </a:p>
         </p:txBody>
       </p:sp>
@@ -6675,6 +7047,7 @@
           <a:lstStyle/>
           <a:p>
             <a:pPr algn="ctr"/>
+            <a:endParaRPr/>
           </a:p>
         </p:txBody>
       </p:sp>
@@ -6711,7 +7084,7 @@
 </file>
 
 <file path=ppt/slides/slide14.xml><?xml version="1.0" encoding="utf-8"?>
-<p:sld xmlns:a="http://schemas.openxmlformats.org/drawingml/2006/main" xmlns:p="http://schemas.openxmlformats.org/presentationml/2006/main" xmlns:r="http://schemas.openxmlformats.org/officeDocument/2006/relationships">
+<p:sld xmlns:a="http://schemas.openxmlformats.org/drawingml/2006/main" xmlns:r="http://schemas.openxmlformats.org/officeDocument/2006/relationships" xmlns:p="http://schemas.openxmlformats.org/presentationml/2006/main">
   <p:cSld>
     <p:spTree>
       <p:nvGrpSpPr>
@@ -6719,7 +7092,14 @@
         <p:cNvGrpSpPr/>
         <p:nvPr/>
       </p:nvGrpSpPr>
-      <p:grpSpPr/>
+      <p:grpSpPr>
+        <a:xfrm>
+          <a:off x="0" y="0"/>
+          <a:ext cx="0" cy="0"/>
+          <a:chOff x="0" y="0"/>
+          <a:chExt cx="0" cy="0"/>
+        </a:xfrm>
+      </p:grpSpPr>
       <p:sp>
         <p:nvSpPr>
           <p:cNvPr id="2" name="Rectangle 1"/>
@@ -6761,6 +7141,7 @@
           <a:lstStyle/>
           <a:p>
             <a:pPr algn="ctr"/>
+            <a:endParaRPr/>
           </a:p>
         </p:txBody>
       </p:sp>
@@ -6789,7 +7170,7 @@
                 <a:srgbClr val="73787E"/>
               </a:gs>
             </a:gsLst>
-            <a:lin scaled="0" ang="18900000"/>
+            <a:lin ang="18900000" scaled="0"/>
           </a:gradFill>
           <a:ln>
             <a:noFill/>
@@ -6821,6 +7202,7 @@
           <a:lstStyle/>
           <a:p>
             <a:pPr algn="ctr"/>
+            <a:endParaRPr/>
           </a:p>
         </p:txBody>
       </p:sp>
@@ -6890,7 +7272,7 @@
                 <a:srgbClr val="FFFFFF"/>
               </a:gs>
             </a:gsLst>
-            <a:lin scaled="0" ang="0"/>
+            <a:lin ang="0" scaled="0"/>
           </a:gradFill>
           <a:ln>
             <a:noFill/>
@@ -6916,6 +7298,7 @@
           <a:lstStyle/>
           <a:p>
             <a:pPr algn="ctr"/>
+            <a:endParaRPr/>
           </a:p>
         </p:txBody>
       </p:sp>
@@ -7067,9 +7450,27 @@
                 <a:tableStyleId>{5C22544A-7EE6-4342-B048-85BDC9FD1C3A}</a:tableStyleId>
               </a:tblPr>
               <a:tblGrid>
-                <a:gridCol w="3931920"/>
-                <a:gridCol w="4206240"/>
-                <a:gridCol w="3154680"/>
+                <a:gridCol w="3931920">
+                  <a:extLst>
+                    <a:ext uri="{9D8B030D-6E8A-4147-A177-3AD203B41FA5}">
+                      <a16:colId xmlns:a16="http://schemas.microsoft.com/office/drawing/2014/main" val="20000"/>
+                    </a:ext>
+                  </a:extLst>
+                </a:gridCol>
+                <a:gridCol w="4206240">
+                  <a:extLst>
+                    <a:ext uri="{9D8B030D-6E8A-4147-A177-3AD203B41FA5}">
+                      <a16:colId xmlns:a16="http://schemas.microsoft.com/office/drawing/2014/main" val="20001"/>
+                    </a:ext>
+                  </a:extLst>
+                </a:gridCol>
+                <a:gridCol w="3154680">
+                  <a:extLst>
+                    <a:ext uri="{9D8B030D-6E8A-4147-A177-3AD203B41FA5}">
+                      <a16:colId xmlns:a16="http://schemas.microsoft.com/office/drawing/2014/main" val="20002"/>
+                    </a:ext>
+                  </a:extLst>
+                </a:gridCol>
               </a:tblGrid>
               <a:tr h="457200">
                 <a:tc>
@@ -7094,7 +7495,7 @@
                       </a:r>
                     </a:p>
                   </a:txBody>
-                  <a:tcPr marT="27432" marB="27432" marL="73152" marR="73152" anchor="ctr">
+                  <a:tcPr marL="73152" marR="73152" marT="27432" marB="27432" anchor="ctr">
                     <a:solidFill>
                       <a:srgbClr val="33393F"/>
                     </a:solidFill>
@@ -7122,7 +7523,7 @@
                       </a:r>
                     </a:p>
                   </a:txBody>
-                  <a:tcPr marT="27432" marB="27432" marL="73152" marR="73152" anchor="ctr">
+                  <a:tcPr marL="73152" marR="73152" marT="27432" marB="27432" anchor="ctr">
                     <a:solidFill>
                       <a:srgbClr val="33393F"/>
                     </a:solidFill>
@@ -7150,12 +7551,17 @@
                       </a:r>
                     </a:p>
                   </a:txBody>
-                  <a:tcPr marT="27432" marB="27432" marL="73152" marR="73152" anchor="ctr">
+                  <a:tcPr marL="73152" marR="73152" marT="27432" marB="27432" anchor="ctr">
                     <a:solidFill>
                       <a:srgbClr val="33393F"/>
                     </a:solidFill>
                   </a:tcPr>
                 </a:tc>
+                <a:extLst>
+                  <a:ext uri="{0D108BD9-81ED-4DB2-BD59-A6C34878D82A}">
+                    <a16:rowId xmlns:a16="http://schemas.microsoft.com/office/drawing/2014/main" val="10000"/>
+                  </a:ext>
+                </a:extLst>
               </a:tr>
               <a:tr h="457200">
                 <a:tc>
@@ -7180,7 +7586,7 @@
                       </a:r>
                     </a:p>
                   </a:txBody>
-                  <a:tcPr marT="27432" marB="27432" marL="73152" marR="73152" anchor="ctr">
+                  <a:tcPr marL="73152" marR="73152" marT="27432" marB="27432" anchor="ctr">
                     <a:solidFill>
                       <a:srgbClr val="FFFFFF"/>
                     </a:solidFill>
@@ -7208,7 +7614,7 @@
                       </a:r>
                     </a:p>
                   </a:txBody>
-                  <a:tcPr marT="27432" marB="27432" marL="73152" marR="73152" anchor="ctr">
+                  <a:tcPr marL="73152" marR="73152" marT="27432" marB="27432" anchor="ctr">
                     <a:solidFill>
                       <a:srgbClr val="FFFFFF"/>
                     </a:solidFill>
@@ -7236,12 +7642,17 @@
                       </a:r>
                     </a:p>
                   </a:txBody>
-                  <a:tcPr marT="27432" marB="27432" marL="73152" marR="73152" anchor="ctr">
+                  <a:tcPr marL="73152" marR="73152" marT="27432" marB="27432" anchor="ctr">
                     <a:solidFill>
                       <a:srgbClr val="FFFFFF"/>
                     </a:solidFill>
                   </a:tcPr>
                 </a:tc>
+                <a:extLst>
+                  <a:ext uri="{0D108BD9-81ED-4DB2-BD59-A6C34878D82A}">
+                    <a16:rowId xmlns:a16="http://schemas.microsoft.com/office/drawing/2014/main" val="10001"/>
+                  </a:ext>
+                </a:extLst>
               </a:tr>
               <a:tr h="457200">
                 <a:tc>
@@ -7266,7 +7677,7 @@
                       </a:r>
                     </a:p>
                   </a:txBody>
-                  <a:tcPr marT="27432" marB="27432" marL="73152" marR="73152" anchor="ctr">
+                  <a:tcPr marL="73152" marR="73152" marT="27432" marB="27432" anchor="ctr">
                     <a:solidFill>
                       <a:srgbClr val="F6F7F8"/>
                     </a:solidFill>
@@ -7294,7 +7705,7 @@
                       </a:r>
                     </a:p>
                   </a:txBody>
-                  <a:tcPr marT="27432" marB="27432" marL="73152" marR="73152" anchor="ctr">
+                  <a:tcPr marL="73152" marR="73152" marT="27432" marB="27432" anchor="ctr">
                     <a:solidFill>
                       <a:srgbClr val="F6F7F8"/>
                     </a:solidFill>
@@ -7322,12 +7733,17 @@
                       </a:r>
                     </a:p>
                   </a:txBody>
-                  <a:tcPr marT="27432" marB="27432" marL="73152" marR="73152" anchor="ctr">
+                  <a:tcPr marL="73152" marR="73152" marT="27432" marB="27432" anchor="ctr">
                     <a:solidFill>
                       <a:srgbClr val="F6F7F8"/>
                     </a:solidFill>
                   </a:tcPr>
                 </a:tc>
+                <a:extLst>
+                  <a:ext uri="{0D108BD9-81ED-4DB2-BD59-A6C34878D82A}">
+                    <a16:rowId xmlns:a16="http://schemas.microsoft.com/office/drawing/2014/main" val="10002"/>
+                  </a:ext>
+                </a:extLst>
               </a:tr>
               <a:tr h="457200">
                 <a:tc>
@@ -7352,7 +7768,7 @@
                       </a:r>
                     </a:p>
                   </a:txBody>
-                  <a:tcPr marT="27432" marB="27432" marL="73152" marR="73152" anchor="ctr">
+                  <a:tcPr marL="73152" marR="73152" marT="27432" marB="27432" anchor="ctr">
                     <a:solidFill>
                       <a:srgbClr val="FFFFFF"/>
                     </a:solidFill>
@@ -7380,7 +7796,7 @@
                       </a:r>
                     </a:p>
                   </a:txBody>
-                  <a:tcPr marT="27432" marB="27432" marL="73152" marR="73152" anchor="ctr">
+                  <a:tcPr marL="73152" marR="73152" marT="27432" marB="27432" anchor="ctr">
                     <a:solidFill>
                       <a:srgbClr val="FFFFFF"/>
                     </a:solidFill>
@@ -7408,12 +7824,17 @@
                       </a:r>
                     </a:p>
                   </a:txBody>
-                  <a:tcPr marT="27432" marB="27432" marL="73152" marR="73152" anchor="ctr">
+                  <a:tcPr marL="73152" marR="73152" marT="27432" marB="27432" anchor="ctr">
                     <a:solidFill>
                       <a:srgbClr val="FFFFFF"/>
                     </a:solidFill>
                   </a:tcPr>
                 </a:tc>
+                <a:extLst>
+                  <a:ext uri="{0D108BD9-81ED-4DB2-BD59-A6C34878D82A}">
+                    <a16:rowId xmlns:a16="http://schemas.microsoft.com/office/drawing/2014/main" val="10003"/>
+                  </a:ext>
+                </a:extLst>
               </a:tr>
               <a:tr h="457200">
                 <a:tc>
@@ -7438,7 +7859,7 @@
                       </a:r>
                     </a:p>
                   </a:txBody>
-                  <a:tcPr marT="27432" marB="27432" marL="73152" marR="73152" anchor="ctr">
+                  <a:tcPr marL="73152" marR="73152" marT="27432" marB="27432" anchor="ctr">
                     <a:solidFill>
                       <a:srgbClr val="F6F7F8"/>
                     </a:solidFill>
@@ -7466,7 +7887,7 @@
                       </a:r>
                     </a:p>
                   </a:txBody>
-                  <a:tcPr marT="27432" marB="27432" marL="73152" marR="73152" anchor="ctr">
+                  <a:tcPr marL="73152" marR="73152" marT="27432" marB="27432" anchor="ctr">
                     <a:solidFill>
                       <a:srgbClr val="F6F7F8"/>
                     </a:solidFill>
@@ -7494,12 +7915,17 @@
                       </a:r>
                     </a:p>
                   </a:txBody>
-                  <a:tcPr marT="27432" marB="27432" marL="73152" marR="73152" anchor="ctr">
+                  <a:tcPr marL="73152" marR="73152" marT="27432" marB="27432" anchor="ctr">
                     <a:solidFill>
                       <a:srgbClr val="F6F7F8"/>
                     </a:solidFill>
                   </a:tcPr>
                 </a:tc>
+                <a:extLst>
+                  <a:ext uri="{0D108BD9-81ED-4DB2-BD59-A6C34878D82A}">
+                    <a16:rowId xmlns:a16="http://schemas.microsoft.com/office/drawing/2014/main" val="10004"/>
+                  </a:ext>
+                </a:extLst>
               </a:tr>
               <a:tr h="457200">
                 <a:tc>
@@ -7524,7 +7950,7 @@
                       </a:r>
                     </a:p>
                   </a:txBody>
-                  <a:tcPr marT="27432" marB="27432" marL="73152" marR="73152" anchor="ctr">
+                  <a:tcPr marL="73152" marR="73152" marT="27432" marB="27432" anchor="ctr">
                     <a:solidFill>
                       <a:srgbClr val="E3E5E8"/>
                     </a:solidFill>
@@ -7552,7 +7978,7 @@
                       </a:r>
                     </a:p>
                   </a:txBody>
-                  <a:tcPr marT="27432" marB="27432" marL="73152" marR="73152" anchor="ctr">
+                  <a:tcPr marL="73152" marR="73152" marT="27432" marB="27432" anchor="ctr">
                     <a:solidFill>
                       <a:srgbClr val="E3E5E8"/>
                     </a:solidFill>
@@ -7580,12 +8006,17 @@
                       </a:r>
                     </a:p>
                   </a:txBody>
-                  <a:tcPr marT="27432" marB="27432" marL="73152" marR="73152" anchor="ctr">
+                  <a:tcPr marL="73152" marR="73152" marT="27432" marB="27432" anchor="ctr">
                     <a:solidFill>
                       <a:srgbClr val="E3E5E8"/>
                     </a:solidFill>
                   </a:tcPr>
                 </a:tc>
+                <a:extLst>
+                  <a:ext uri="{0D108BD9-81ED-4DB2-BD59-A6C34878D82A}">
+                    <a16:rowId xmlns:a16="http://schemas.microsoft.com/office/drawing/2014/main" val="10005"/>
+                  </a:ext>
+                </a:extLst>
               </a:tr>
             </a:tbl>
           </a:graphicData>
@@ -7642,6 +8073,7 @@
           <a:lstStyle/>
           <a:p>
             <a:pPr algn="ctr"/>
+            <a:endParaRPr/>
           </a:p>
         </p:txBody>
       </p:sp>
@@ -7757,7 +8189,7 @@
 </file>
 
 <file path=ppt/slides/slide15.xml><?xml version="1.0" encoding="utf-8"?>
-<p:sld xmlns:a="http://schemas.openxmlformats.org/drawingml/2006/main" xmlns:p="http://schemas.openxmlformats.org/presentationml/2006/main" xmlns:r="http://schemas.openxmlformats.org/officeDocument/2006/relationships">
+<p:sld xmlns:a="http://schemas.openxmlformats.org/drawingml/2006/main" xmlns:r="http://schemas.openxmlformats.org/officeDocument/2006/relationships" xmlns:p="http://schemas.openxmlformats.org/presentationml/2006/main">
   <p:cSld>
     <p:spTree>
       <p:nvGrpSpPr>
@@ -7765,7 +8197,14 @@
         <p:cNvGrpSpPr/>
         <p:nvPr/>
       </p:nvGrpSpPr>
-      <p:grpSpPr/>
+      <p:grpSpPr>
+        <a:xfrm>
+          <a:off x="0" y="0"/>
+          <a:ext cx="0" cy="0"/>
+          <a:chOff x="0" y="0"/>
+          <a:chExt cx="0" cy="0"/>
+        </a:xfrm>
+      </p:grpSpPr>
       <p:sp>
         <p:nvSpPr>
           <p:cNvPr id="2" name="Rectangle 1"/>
@@ -7807,6 +8246,7 @@
           <a:lstStyle/>
           <a:p>
             <a:pPr algn="ctr"/>
+            <a:endParaRPr/>
           </a:p>
         </p:txBody>
       </p:sp>
@@ -7835,7 +8275,7 @@
                 <a:srgbClr val="73787E"/>
               </a:gs>
             </a:gsLst>
-            <a:lin scaled="0" ang="18900000"/>
+            <a:lin ang="18900000" scaled="0"/>
           </a:gradFill>
           <a:ln>
             <a:noFill/>
@@ -7867,6 +8307,7 @@
           <a:lstStyle/>
           <a:p>
             <a:pPr algn="ctr"/>
+            <a:endParaRPr/>
           </a:p>
         </p:txBody>
       </p:sp>
@@ -7936,7 +8377,7 @@
                 <a:srgbClr val="FFFFFF"/>
               </a:gs>
             </a:gsLst>
-            <a:lin scaled="0" ang="0"/>
+            <a:lin ang="0" scaled="0"/>
           </a:gradFill>
           <a:ln>
             <a:noFill/>
@@ -7962,6 +8403,7 @@
           <a:lstStyle/>
           <a:p>
             <a:pPr algn="ctr"/>
+            <a:endParaRPr/>
           </a:p>
         </p:txBody>
       </p:sp>
@@ -8102,6 +8544,7 @@
           <a:lstStyle/>
           <a:p>
             <a:pPr algn="ctr"/>
+            <a:endParaRPr/>
           </a:p>
         </p:txBody>
       </p:sp>
@@ -8259,6 +8702,7 @@
           <a:lstStyle/>
           <a:p>
             <a:pPr algn="ctr"/>
+            <a:endParaRPr/>
           </a:p>
         </p:txBody>
       </p:sp>
@@ -8414,6 +8858,7 @@
           <a:lstStyle/>
           <a:p>
             <a:pPr algn="ctr"/>
+            <a:endParaRPr/>
           </a:p>
         </p:txBody>
       </p:sp>
@@ -8450,7 +8895,7 @@
 </file>
 
 <file path=ppt/slides/slide16.xml><?xml version="1.0" encoding="utf-8"?>
-<p:sld xmlns:a="http://schemas.openxmlformats.org/drawingml/2006/main" xmlns:p="http://schemas.openxmlformats.org/presentationml/2006/main" xmlns:r="http://schemas.openxmlformats.org/officeDocument/2006/relationships">
+<p:sld xmlns:a="http://schemas.openxmlformats.org/drawingml/2006/main" xmlns:r="http://schemas.openxmlformats.org/officeDocument/2006/relationships" xmlns:p="http://schemas.openxmlformats.org/presentationml/2006/main">
   <p:cSld>
     <p:spTree>
       <p:nvGrpSpPr>
@@ -8458,7 +8903,14 @@
         <p:cNvGrpSpPr/>
         <p:nvPr/>
       </p:nvGrpSpPr>
-      <p:grpSpPr/>
+      <p:grpSpPr>
+        <a:xfrm>
+          <a:off x="0" y="0"/>
+          <a:ext cx="0" cy="0"/>
+          <a:chOff x="0" y="0"/>
+          <a:chExt cx="0" cy="0"/>
+        </a:xfrm>
+      </p:grpSpPr>
       <p:sp>
         <p:nvSpPr>
           <p:cNvPr id="2" name="Rectangle 1"/>
@@ -8500,6 +8952,7 @@
           <a:lstStyle/>
           <a:p>
             <a:pPr algn="ctr"/>
+            <a:endParaRPr/>
           </a:p>
         </p:txBody>
       </p:sp>
@@ -8528,7 +8981,7 @@
                 <a:srgbClr val="73787E"/>
               </a:gs>
             </a:gsLst>
-            <a:lin scaled="0" ang="18900000"/>
+            <a:lin ang="18900000" scaled="0"/>
           </a:gradFill>
           <a:ln>
             <a:noFill/>
@@ -8560,6 +9013,7 @@
           <a:lstStyle/>
           <a:p>
             <a:pPr algn="ctr"/>
+            <a:endParaRPr/>
           </a:p>
         </p:txBody>
       </p:sp>
@@ -8629,7 +9083,7 @@
                 <a:srgbClr val="FFFFFF"/>
               </a:gs>
             </a:gsLst>
-            <a:lin scaled="0" ang="0"/>
+            <a:lin ang="0" scaled="0"/>
           </a:gradFill>
           <a:ln>
             <a:noFill/>
@@ -8655,6 +9109,7 @@
           <a:lstStyle/>
           <a:p>
             <a:pPr algn="ctr"/>
+            <a:endParaRPr/>
           </a:p>
         </p:txBody>
       </p:sp>
@@ -8795,6 +9250,7 @@
           <a:lstStyle/>
           <a:p>
             <a:pPr algn="ctr"/>
+            <a:endParaRPr/>
           </a:p>
         </p:txBody>
       </p:sp>
@@ -8992,6 +9448,7 @@
           <a:lstStyle/>
           <a:p>
             <a:pPr algn="ctr"/>
+            <a:endParaRPr/>
           </a:p>
         </p:txBody>
       </p:sp>
@@ -9147,6 +9604,7 @@
           <a:lstStyle/>
           <a:p>
             <a:pPr algn="ctr"/>
+            <a:endParaRPr/>
           </a:p>
         </p:txBody>
       </p:sp>
@@ -9183,7 +9641,7 @@
 </file>
 
 <file path=ppt/slides/slide17.xml><?xml version="1.0" encoding="utf-8"?>
-<p:sld xmlns:a="http://schemas.openxmlformats.org/drawingml/2006/main" xmlns:p="http://schemas.openxmlformats.org/presentationml/2006/main" xmlns:r="http://schemas.openxmlformats.org/officeDocument/2006/relationships">
+<p:sld xmlns:a="http://schemas.openxmlformats.org/drawingml/2006/main" xmlns:r="http://schemas.openxmlformats.org/officeDocument/2006/relationships" xmlns:p="http://schemas.openxmlformats.org/presentationml/2006/main">
   <p:cSld>
     <p:spTree>
       <p:nvGrpSpPr>
@@ -9191,7 +9649,14 @@
         <p:cNvGrpSpPr/>
         <p:nvPr/>
       </p:nvGrpSpPr>
-      <p:grpSpPr/>
+      <p:grpSpPr>
+        <a:xfrm>
+          <a:off x="0" y="0"/>
+          <a:ext cx="0" cy="0"/>
+          <a:chOff x="0" y="0"/>
+          <a:chExt cx="0" cy="0"/>
+        </a:xfrm>
+      </p:grpSpPr>
       <p:sp>
         <p:nvSpPr>
           <p:cNvPr id="2" name="Rectangle 1"/>
@@ -9233,6 +9698,7 @@
           <a:lstStyle/>
           <a:p>
             <a:pPr algn="ctr"/>
+            <a:endParaRPr/>
           </a:p>
         </p:txBody>
       </p:sp>
@@ -9261,7 +9727,7 @@
                 <a:srgbClr val="73787E"/>
               </a:gs>
             </a:gsLst>
-            <a:lin scaled="0" ang="18900000"/>
+            <a:lin ang="18900000" scaled="0"/>
           </a:gradFill>
           <a:ln>
             <a:noFill/>
@@ -9293,6 +9759,7 @@
           <a:lstStyle/>
           <a:p>
             <a:pPr algn="ctr"/>
+            <a:endParaRPr/>
           </a:p>
         </p:txBody>
       </p:sp>
@@ -9362,7 +9829,7 @@
                 <a:srgbClr val="FFFFFF"/>
               </a:gs>
             </a:gsLst>
-            <a:lin scaled="0" ang="0"/>
+            <a:lin ang="0" scaled="0"/>
           </a:gradFill>
           <a:ln>
             <a:noFill/>
@@ -9388,6 +9855,7 @@
           <a:lstStyle/>
           <a:p>
             <a:pPr algn="ctr"/>
+            <a:endParaRPr/>
           </a:p>
         </p:txBody>
       </p:sp>
@@ -9526,6 +9994,7 @@
           <a:lstStyle/>
           <a:p>
             <a:pPr algn="ctr"/>
+            <a:endParaRPr/>
           </a:p>
         </p:txBody>
       </p:sp>
@@ -9604,6 +10073,7 @@
           <a:lstStyle/>
           <a:p>
             <a:pPr algn="ctr"/>
+            <a:endParaRPr/>
           </a:p>
         </p:txBody>
       </p:sp>
@@ -9761,6 +10231,7 @@
           <a:lstStyle/>
           <a:p>
             <a:pPr algn="ctr"/>
+            <a:endParaRPr/>
           </a:p>
         </p:txBody>
       </p:sp>
@@ -9876,7 +10347,7 @@
 </file>
 
 <file path=ppt/slides/slide18.xml><?xml version="1.0" encoding="utf-8"?>
-<p:sld xmlns:a="http://schemas.openxmlformats.org/drawingml/2006/main" xmlns:p="http://schemas.openxmlformats.org/presentationml/2006/main" xmlns:r="http://schemas.openxmlformats.org/officeDocument/2006/relationships">
+<p:sld xmlns:a="http://schemas.openxmlformats.org/drawingml/2006/main" xmlns:r="http://schemas.openxmlformats.org/officeDocument/2006/relationships" xmlns:p="http://schemas.openxmlformats.org/presentationml/2006/main">
   <p:cSld>
     <p:spTree>
       <p:nvGrpSpPr>
@@ -9884,7 +10355,14 @@
         <p:cNvGrpSpPr/>
         <p:nvPr/>
       </p:nvGrpSpPr>
-      <p:grpSpPr/>
+      <p:grpSpPr>
+        <a:xfrm>
+          <a:off x="0" y="0"/>
+          <a:ext cx="0" cy="0"/>
+          <a:chOff x="0" y="0"/>
+          <a:chExt cx="0" cy="0"/>
+        </a:xfrm>
+      </p:grpSpPr>
       <p:sp>
         <p:nvSpPr>
           <p:cNvPr id="2" name="Rectangle 1"/>
@@ -9926,6 +10404,7 @@
           <a:lstStyle/>
           <a:p>
             <a:pPr algn="ctr"/>
+            <a:endParaRPr/>
           </a:p>
         </p:txBody>
       </p:sp>
@@ -9954,7 +10433,7 @@
                 <a:srgbClr val="73787E"/>
               </a:gs>
             </a:gsLst>
-            <a:lin scaled="0" ang="18900000"/>
+            <a:lin ang="18900000" scaled="0"/>
           </a:gradFill>
           <a:ln>
             <a:noFill/>
@@ -9986,6 +10465,7 @@
           <a:lstStyle/>
           <a:p>
             <a:pPr algn="ctr"/>
+            <a:endParaRPr/>
           </a:p>
         </p:txBody>
       </p:sp>
@@ -10055,7 +10535,7 @@
                 <a:srgbClr val="FFFFFF"/>
               </a:gs>
             </a:gsLst>
-            <a:lin scaled="0" ang="0"/>
+            <a:lin ang="0" scaled="0"/>
           </a:gradFill>
           <a:ln>
             <a:noFill/>
@@ -10081,6 +10561,7 @@
           <a:lstStyle/>
           <a:p>
             <a:pPr algn="ctr"/>
+            <a:endParaRPr/>
           </a:p>
         </p:txBody>
       </p:sp>
@@ -10221,6 +10702,7 @@
           <a:lstStyle/>
           <a:p>
             <a:pPr algn="ctr"/>
+            <a:endParaRPr/>
           </a:p>
         </p:txBody>
       </p:sp>
@@ -10378,6 +10860,7 @@
           <a:lstStyle/>
           <a:p>
             <a:pPr algn="ctr"/>
+            <a:endParaRPr/>
           </a:p>
         </p:txBody>
       </p:sp>
@@ -10535,6 +11018,7 @@
           <a:lstStyle/>
           <a:p>
             <a:pPr algn="ctr"/>
+            <a:endParaRPr/>
           </a:p>
         </p:txBody>
       </p:sp>
@@ -10692,6 +11176,7 @@
           <a:lstStyle/>
           <a:p>
             <a:pPr algn="ctr"/>
+            <a:endParaRPr/>
           </a:p>
         </p:txBody>
       </p:sp>
@@ -10787,7 +11272,7 @@
 </file>
 
 <file path=ppt/slides/slide19.xml><?xml version="1.0" encoding="utf-8"?>
-<p:sld xmlns:a="http://schemas.openxmlformats.org/drawingml/2006/main" xmlns:p="http://schemas.openxmlformats.org/presentationml/2006/main" xmlns:r="http://schemas.openxmlformats.org/officeDocument/2006/relationships">
+<p:sld xmlns:a="http://schemas.openxmlformats.org/drawingml/2006/main" xmlns:r="http://schemas.openxmlformats.org/officeDocument/2006/relationships" xmlns:p="http://schemas.openxmlformats.org/presentationml/2006/main">
   <p:cSld>
     <p:spTree>
       <p:nvGrpSpPr>
@@ -10795,7 +11280,14 @@
         <p:cNvGrpSpPr/>
         <p:nvPr/>
       </p:nvGrpSpPr>
-      <p:grpSpPr/>
+      <p:grpSpPr>
+        <a:xfrm>
+          <a:off x="0" y="0"/>
+          <a:ext cx="0" cy="0"/>
+          <a:chOff x="0" y="0"/>
+          <a:chExt cx="0" cy="0"/>
+        </a:xfrm>
+      </p:grpSpPr>
       <p:sp>
         <p:nvSpPr>
           <p:cNvPr id="2" name="Rectangle 1"/>
@@ -10837,6 +11329,7 @@
           <a:lstStyle/>
           <a:p>
             <a:pPr algn="ctr"/>
+            <a:endParaRPr/>
           </a:p>
         </p:txBody>
       </p:sp>
@@ -10865,7 +11358,7 @@
                 <a:srgbClr val="73787E"/>
               </a:gs>
             </a:gsLst>
-            <a:lin scaled="0" ang="18900000"/>
+            <a:lin ang="18900000" scaled="0"/>
           </a:gradFill>
           <a:ln>
             <a:noFill/>
@@ -10897,6 +11390,7 @@
           <a:lstStyle/>
           <a:p>
             <a:pPr algn="ctr"/>
+            <a:endParaRPr/>
           </a:p>
         </p:txBody>
       </p:sp>
@@ -10966,7 +11460,7 @@
                 <a:srgbClr val="FFFFFF"/>
               </a:gs>
             </a:gsLst>
-            <a:lin scaled="0" ang="0"/>
+            <a:lin ang="0" scaled="0"/>
           </a:gradFill>
           <a:ln>
             <a:noFill/>
@@ -10992,6 +11486,7 @@
           <a:lstStyle/>
           <a:p>
             <a:pPr algn="ctr"/>
+            <a:endParaRPr/>
           </a:p>
         </p:txBody>
       </p:sp>
@@ -11100,10 +11595,34 @@
                 <a:tableStyleId>{5C22544A-7EE6-4342-B048-85BDC9FD1C3A}</a:tableStyleId>
               </a:tblPr>
               <a:tblGrid>
-                <a:gridCol w="502920"/>
-                <a:gridCol w="5577840"/>
-                <a:gridCol w="3840480"/>
-                <a:gridCol w="1371600"/>
+                <a:gridCol w="502920">
+                  <a:extLst>
+                    <a:ext uri="{9D8B030D-6E8A-4147-A177-3AD203B41FA5}">
+                      <a16:colId xmlns:a16="http://schemas.microsoft.com/office/drawing/2014/main" val="20000"/>
+                    </a:ext>
+                  </a:extLst>
+                </a:gridCol>
+                <a:gridCol w="5577840">
+                  <a:extLst>
+                    <a:ext uri="{9D8B030D-6E8A-4147-A177-3AD203B41FA5}">
+                      <a16:colId xmlns:a16="http://schemas.microsoft.com/office/drawing/2014/main" val="20001"/>
+                    </a:ext>
+                  </a:extLst>
+                </a:gridCol>
+                <a:gridCol w="3840480">
+                  <a:extLst>
+                    <a:ext uri="{9D8B030D-6E8A-4147-A177-3AD203B41FA5}">
+                      <a16:colId xmlns:a16="http://schemas.microsoft.com/office/drawing/2014/main" val="20002"/>
+                    </a:ext>
+                  </a:extLst>
+                </a:gridCol>
+                <a:gridCol w="1371600">
+                  <a:extLst>
+                    <a:ext uri="{9D8B030D-6E8A-4147-A177-3AD203B41FA5}">
+                      <a16:colId xmlns:a16="http://schemas.microsoft.com/office/drawing/2014/main" val="20003"/>
+                    </a:ext>
+                  </a:extLst>
+                </a:gridCol>
               </a:tblGrid>
               <a:tr h="475488">
                 <a:tc>
@@ -11128,7 +11647,7 @@
                       </a:r>
                     </a:p>
                   </a:txBody>
-                  <a:tcPr marT="27432" marB="27432" marL="73152" marR="73152" anchor="ctr">
+                  <a:tcPr marL="73152" marR="73152" marT="27432" marB="27432" anchor="ctr">
                     <a:solidFill>
                       <a:srgbClr val="33393F"/>
                     </a:solidFill>
@@ -11156,7 +11675,7 @@
                       </a:r>
                     </a:p>
                   </a:txBody>
-                  <a:tcPr marT="27432" marB="27432" marL="73152" marR="73152" anchor="ctr">
+                  <a:tcPr marL="73152" marR="73152" marT="27432" marB="27432" anchor="ctr">
                     <a:solidFill>
                       <a:srgbClr val="33393F"/>
                     </a:solidFill>
@@ -11184,7 +11703,7 @@
                       </a:r>
                     </a:p>
                   </a:txBody>
-                  <a:tcPr marT="27432" marB="27432" marL="73152" marR="73152" anchor="ctr">
+                  <a:tcPr marL="73152" marR="73152" marT="27432" marB="27432" anchor="ctr">
                     <a:solidFill>
                       <a:srgbClr val="33393F"/>
                     </a:solidFill>
@@ -11212,12 +11731,17 @@
                       </a:r>
                     </a:p>
                   </a:txBody>
-                  <a:tcPr marT="27432" marB="27432" marL="73152" marR="73152" anchor="ctr">
+                  <a:tcPr marL="73152" marR="73152" marT="27432" marB="27432" anchor="ctr">
                     <a:solidFill>
                       <a:srgbClr val="33393F"/>
                     </a:solidFill>
                   </a:tcPr>
                 </a:tc>
+                <a:extLst>
+                  <a:ext uri="{0D108BD9-81ED-4DB2-BD59-A6C34878D82A}">
+                    <a16:rowId xmlns:a16="http://schemas.microsoft.com/office/drawing/2014/main" val="10000"/>
+                  </a:ext>
+                </a:extLst>
               </a:tr>
               <a:tr h="475488">
                 <a:tc>
@@ -11242,7 +11766,7 @@
                       </a:r>
                     </a:p>
                   </a:txBody>
-                  <a:tcPr marT="27432" marB="27432" marL="73152" marR="73152" anchor="ctr">
+                  <a:tcPr marL="73152" marR="73152" marT="27432" marB="27432" anchor="ctr">
                     <a:solidFill>
                       <a:srgbClr val="FFFFFF"/>
                     </a:solidFill>
@@ -11270,7 +11794,7 @@
                       </a:r>
                     </a:p>
                   </a:txBody>
-                  <a:tcPr marT="27432" marB="27432" marL="73152" marR="73152" anchor="ctr">
+                  <a:tcPr marL="73152" marR="73152" marT="27432" marB="27432" anchor="ctr">
                     <a:solidFill>
                       <a:srgbClr val="FFFFFF"/>
                     </a:solidFill>
@@ -11298,7 +11822,7 @@
                       </a:r>
                     </a:p>
                   </a:txBody>
-                  <a:tcPr marT="27432" marB="27432" marL="73152" marR="73152" anchor="ctr">
+                  <a:tcPr marL="73152" marR="73152" marT="27432" marB="27432" anchor="ctr">
                     <a:solidFill>
                       <a:srgbClr val="FFFFFF"/>
                     </a:solidFill>
@@ -11326,12 +11850,17 @@
                       </a:r>
                     </a:p>
                   </a:txBody>
-                  <a:tcPr marT="27432" marB="27432" marL="73152" marR="73152" anchor="ctr">
+                  <a:tcPr marL="73152" marR="73152" marT="27432" marB="27432" anchor="ctr">
                     <a:solidFill>
                       <a:srgbClr val="FFFFFF"/>
                     </a:solidFill>
                   </a:tcPr>
                 </a:tc>
+                <a:extLst>
+                  <a:ext uri="{0D108BD9-81ED-4DB2-BD59-A6C34878D82A}">
+                    <a16:rowId xmlns:a16="http://schemas.microsoft.com/office/drawing/2014/main" val="10001"/>
+                  </a:ext>
+                </a:extLst>
               </a:tr>
               <a:tr h="475488">
                 <a:tc>
@@ -11356,7 +11885,7 @@
                       </a:r>
                     </a:p>
                   </a:txBody>
-                  <a:tcPr marT="27432" marB="27432" marL="73152" marR="73152" anchor="ctr">
+                  <a:tcPr marL="73152" marR="73152" marT="27432" marB="27432" anchor="ctr">
                     <a:solidFill>
                       <a:srgbClr val="F6F7F8"/>
                     </a:solidFill>
@@ -11384,7 +11913,7 @@
                       </a:r>
                     </a:p>
                   </a:txBody>
-                  <a:tcPr marT="27432" marB="27432" marL="73152" marR="73152" anchor="ctr">
+                  <a:tcPr marL="73152" marR="73152" marT="27432" marB="27432" anchor="ctr">
                     <a:solidFill>
                       <a:srgbClr val="F6F7F8"/>
                     </a:solidFill>
@@ -11412,7 +11941,7 @@
                       </a:r>
                     </a:p>
                   </a:txBody>
-                  <a:tcPr marT="27432" marB="27432" marL="73152" marR="73152" anchor="ctr">
+                  <a:tcPr marL="73152" marR="73152" marT="27432" marB="27432" anchor="ctr">
                     <a:solidFill>
                       <a:srgbClr val="F6F7F8"/>
                     </a:solidFill>
@@ -11440,12 +11969,17 @@
                       </a:r>
                     </a:p>
                   </a:txBody>
-                  <a:tcPr marT="27432" marB="27432" marL="73152" marR="73152" anchor="ctr">
+                  <a:tcPr marL="73152" marR="73152" marT="27432" marB="27432" anchor="ctr">
                     <a:solidFill>
                       <a:srgbClr val="F6F7F8"/>
                     </a:solidFill>
                   </a:tcPr>
                 </a:tc>
+                <a:extLst>
+                  <a:ext uri="{0D108BD9-81ED-4DB2-BD59-A6C34878D82A}">
+                    <a16:rowId xmlns:a16="http://schemas.microsoft.com/office/drawing/2014/main" val="10002"/>
+                  </a:ext>
+                </a:extLst>
               </a:tr>
               <a:tr h="475488">
                 <a:tc>
@@ -11470,7 +12004,7 @@
                       </a:r>
                     </a:p>
                   </a:txBody>
-                  <a:tcPr marT="27432" marB="27432" marL="73152" marR="73152" anchor="ctr">
+                  <a:tcPr marL="73152" marR="73152" marT="27432" marB="27432" anchor="ctr">
                     <a:solidFill>
                       <a:srgbClr val="FFFFFF"/>
                     </a:solidFill>
@@ -11498,7 +12032,7 @@
                       </a:r>
                     </a:p>
                   </a:txBody>
-                  <a:tcPr marT="27432" marB="27432" marL="73152" marR="73152" anchor="ctr">
+                  <a:tcPr marL="73152" marR="73152" marT="27432" marB="27432" anchor="ctr">
                     <a:solidFill>
                       <a:srgbClr val="FFFFFF"/>
                     </a:solidFill>
@@ -11526,7 +12060,7 @@
                       </a:r>
                     </a:p>
                   </a:txBody>
-                  <a:tcPr marT="27432" marB="27432" marL="73152" marR="73152" anchor="ctr">
+                  <a:tcPr marL="73152" marR="73152" marT="27432" marB="27432" anchor="ctr">
                     <a:solidFill>
                       <a:srgbClr val="FFFFFF"/>
                     </a:solidFill>
@@ -11554,12 +12088,17 @@
                       </a:r>
                     </a:p>
                   </a:txBody>
-                  <a:tcPr marT="27432" marB="27432" marL="73152" marR="73152" anchor="ctr">
+                  <a:tcPr marL="73152" marR="73152" marT="27432" marB="27432" anchor="ctr">
                     <a:solidFill>
                       <a:srgbClr val="FFFFFF"/>
                     </a:solidFill>
                   </a:tcPr>
                 </a:tc>
+                <a:extLst>
+                  <a:ext uri="{0D108BD9-81ED-4DB2-BD59-A6C34878D82A}">
+                    <a16:rowId xmlns:a16="http://schemas.microsoft.com/office/drawing/2014/main" val="10003"/>
+                  </a:ext>
+                </a:extLst>
               </a:tr>
               <a:tr h="475488">
                 <a:tc>
@@ -11584,7 +12123,7 @@
                       </a:r>
                     </a:p>
                   </a:txBody>
-                  <a:tcPr marT="27432" marB="27432" marL="73152" marR="73152" anchor="ctr">
+                  <a:tcPr marL="73152" marR="73152" marT="27432" marB="27432" anchor="ctr">
                     <a:solidFill>
                       <a:srgbClr val="F6F7F8"/>
                     </a:solidFill>
@@ -11612,7 +12151,7 @@
                       </a:r>
                     </a:p>
                   </a:txBody>
-                  <a:tcPr marT="27432" marB="27432" marL="73152" marR="73152" anchor="ctr">
+                  <a:tcPr marL="73152" marR="73152" marT="27432" marB="27432" anchor="ctr">
                     <a:solidFill>
                       <a:srgbClr val="F6F7F8"/>
                     </a:solidFill>
@@ -11640,7 +12179,7 @@
                       </a:r>
                     </a:p>
                   </a:txBody>
-                  <a:tcPr marT="27432" marB="27432" marL="73152" marR="73152" anchor="ctr">
+                  <a:tcPr marL="73152" marR="73152" marT="27432" marB="27432" anchor="ctr">
                     <a:solidFill>
                       <a:srgbClr val="F6F7F8"/>
                     </a:solidFill>
@@ -11668,12 +12207,17 @@
                       </a:r>
                     </a:p>
                   </a:txBody>
-                  <a:tcPr marT="27432" marB="27432" marL="73152" marR="73152" anchor="ctr">
+                  <a:tcPr marL="73152" marR="73152" marT="27432" marB="27432" anchor="ctr">
                     <a:solidFill>
                       <a:srgbClr val="F6F7F8"/>
                     </a:solidFill>
                   </a:tcPr>
                 </a:tc>
+                <a:extLst>
+                  <a:ext uri="{0D108BD9-81ED-4DB2-BD59-A6C34878D82A}">
+                    <a16:rowId xmlns:a16="http://schemas.microsoft.com/office/drawing/2014/main" val="10004"/>
+                  </a:ext>
+                </a:extLst>
               </a:tr>
               <a:tr h="475488">
                 <a:tc>
@@ -11698,7 +12242,7 @@
                       </a:r>
                     </a:p>
                   </a:txBody>
-                  <a:tcPr marT="27432" marB="27432" marL="73152" marR="73152" anchor="ctr">
+                  <a:tcPr marL="73152" marR="73152" marT="27432" marB="27432" anchor="ctr">
                     <a:solidFill>
                       <a:srgbClr val="FFFFFF"/>
                     </a:solidFill>
@@ -11726,7 +12270,7 @@
                       </a:r>
                     </a:p>
                   </a:txBody>
-                  <a:tcPr marT="27432" marB="27432" marL="73152" marR="73152" anchor="ctr">
+                  <a:tcPr marL="73152" marR="73152" marT="27432" marB="27432" anchor="ctr">
                     <a:solidFill>
                       <a:srgbClr val="FFFFFF"/>
                     </a:solidFill>
@@ -11754,7 +12298,7 @@
                       </a:r>
                     </a:p>
                   </a:txBody>
-                  <a:tcPr marT="27432" marB="27432" marL="73152" marR="73152" anchor="ctr">
+                  <a:tcPr marL="73152" marR="73152" marT="27432" marB="27432" anchor="ctr">
                     <a:solidFill>
                       <a:srgbClr val="FFFFFF"/>
                     </a:solidFill>
@@ -11782,12 +12326,17 @@
                       </a:r>
                     </a:p>
                   </a:txBody>
-                  <a:tcPr marT="27432" marB="27432" marL="73152" marR="73152" anchor="ctr">
+                  <a:tcPr marL="73152" marR="73152" marT="27432" marB="27432" anchor="ctr">
                     <a:solidFill>
                       <a:srgbClr val="FFFFFF"/>
                     </a:solidFill>
                   </a:tcPr>
                 </a:tc>
+                <a:extLst>
+                  <a:ext uri="{0D108BD9-81ED-4DB2-BD59-A6C34878D82A}">
+                    <a16:rowId xmlns:a16="http://schemas.microsoft.com/office/drawing/2014/main" val="10005"/>
+                  </a:ext>
+                </a:extLst>
               </a:tr>
             </a:tbl>
           </a:graphicData>
@@ -12208,7 +12757,7 @@
                 <a:latin typeface="맑은 고딕"/>
                 <a:ea typeface="맑은 고딕"/>
               </a:rPr>
-              <a:t>Ⅰ. 배경</a:t>
+              <a:t>Ⅰ. 배경과 요약</a:t>
             </a:r>
           </a:p>
           <a:p>
@@ -12228,7 +12777,7 @@
                 <a:latin typeface="맑은 고딕"/>
                 <a:ea typeface="맑은 고딕"/>
               </a:rPr>
-              <a:t>03   아이디어의 발단</a:t>
+              <a:t>03   연구 배경 — 제도와 접근성의 두 축</a:t>
             </a:r>
           </a:p>
           <a:p>
@@ -13116,7 +13665,7 @@
                 <a:latin typeface="맑은 고딕"/>
                 <a:ea typeface="맑은 고딕"/>
               </a:rPr>
-              <a:t>발단·연구 질문의 상세한 배경과 분석 설계는 「데이터 분석 계획서」에서 다룬다.</a:t>
+              <a:t>연구의 발단·문제의식과 분석 설계의 상세는 「데이터 분석 계획서」에서 다룬다. 본 보고서는 그 결과를 보고한다.</a:t>
             </a:r>
           </a:p>
         </p:txBody>
@@ -13130,7 +13679,7 @@
 </file>
 
 <file path=ppt/slides/slide20.xml><?xml version="1.0" encoding="utf-8"?>
-<p:sld xmlns:a="http://schemas.openxmlformats.org/drawingml/2006/main" xmlns:p="http://schemas.openxmlformats.org/presentationml/2006/main" xmlns:r="http://schemas.openxmlformats.org/officeDocument/2006/relationships">
+<p:sld xmlns:a="http://schemas.openxmlformats.org/drawingml/2006/main" xmlns:r="http://schemas.openxmlformats.org/officeDocument/2006/relationships" xmlns:p="http://schemas.openxmlformats.org/presentationml/2006/main">
   <p:cSld>
     <p:spTree>
       <p:nvGrpSpPr>
@@ -13138,7 +13687,14 @@
         <p:cNvGrpSpPr/>
         <p:nvPr/>
       </p:nvGrpSpPr>
-      <p:grpSpPr/>
+      <p:grpSpPr>
+        <a:xfrm>
+          <a:off x="0" y="0"/>
+          <a:ext cx="0" cy="0"/>
+          <a:chOff x="0" y="0"/>
+          <a:chExt cx="0" cy="0"/>
+        </a:xfrm>
+      </p:grpSpPr>
       <p:sp>
         <p:nvSpPr>
           <p:cNvPr id="2" name="Rectangle 1"/>
@@ -13180,6 +13736,7 @@
           <a:lstStyle/>
           <a:p>
             <a:pPr algn="ctr"/>
+            <a:endParaRPr/>
           </a:p>
         </p:txBody>
       </p:sp>
@@ -13208,7 +13765,7 @@
                 <a:srgbClr val="73787E"/>
               </a:gs>
             </a:gsLst>
-            <a:lin scaled="0" ang="18900000"/>
+            <a:lin ang="18900000" scaled="0"/>
           </a:gradFill>
           <a:ln>
             <a:noFill/>
@@ -13240,6 +13797,7 @@
           <a:lstStyle/>
           <a:p>
             <a:pPr algn="ctr"/>
+            <a:endParaRPr/>
           </a:p>
         </p:txBody>
       </p:sp>
@@ -13309,7 +13867,7 @@
                 <a:srgbClr val="FFFFFF"/>
               </a:gs>
             </a:gsLst>
-            <a:lin scaled="0" ang="0"/>
+            <a:lin ang="0" scaled="0"/>
           </a:gradFill>
           <a:ln>
             <a:noFill/>
@@ -13335,6 +13893,7 @@
           <a:lstStyle/>
           <a:p>
             <a:pPr algn="ctr"/>
+            <a:endParaRPr/>
           </a:p>
         </p:txBody>
       </p:sp>
@@ -13475,6 +14034,7 @@
           <a:lstStyle/>
           <a:p>
             <a:pPr algn="ctr"/>
+            <a:endParaRPr/>
           </a:p>
         </p:txBody>
       </p:sp>
@@ -13672,6 +14232,7 @@
           <a:lstStyle/>
           <a:p>
             <a:pPr algn="ctr"/>
+            <a:endParaRPr/>
           </a:p>
         </p:txBody>
       </p:sp>
@@ -13850,7 +14411,7 @@
 </file>
 
 <file path=ppt/slides/slide21.xml><?xml version="1.0" encoding="utf-8"?>
-<p:sld xmlns:a="http://schemas.openxmlformats.org/drawingml/2006/main" xmlns:p="http://schemas.openxmlformats.org/presentationml/2006/main" xmlns:r="http://schemas.openxmlformats.org/officeDocument/2006/relationships">
+<p:sld xmlns:a="http://schemas.openxmlformats.org/drawingml/2006/main" xmlns:r="http://schemas.openxmlformats.org/officeDocument/2006/relationships" xmlns:p="http://schemas.openxmlformats.org/presentationml/2006/main">
   <p:cSld>
     <p:spTree>
       <p:nvGrpSpPr>
@@ -13858,7 +14419,14 @@
         <p:cNvGrpSpPr/>
         <p:nvPr/>
       </p:nvGrpSpPr>
-      <p:grpSpPr/>
+      <p:grpSpPr>
+        <a:xfrm>
+          <a:off x="0" y="0"/>
+          <a:ext cx="0" cy="0"/>
+          <a:chOff x="0" y="0"/>
+          <a:chExt cx="0" cy="0"/>
+        </a:xfrm>
+      </p:grpSpPr>
       <p:sp>
         <p:nvSpPr>
           <p:cNvPr id="2" name="Rectangle 1"/>
@@ -13900,6 +14468,7 @@
           <a:lstStyle/>
           <a:p>
             <a:pPr algn="ctr"/>
+            <a:endParaRPr/>
           </a:p>
         </p:txBody>
       </p:sp>
@@ -13969,7 +14538,7 @@
                 <a:srgbClr val="FFFFFF"/>
               </a:gs>
             </a:gsLst>
-            <a:lin scaled="0" ang="0"/>
+            <a:lin ang="0" scaled="0"/>
           </a:gradFill>
           <a:ln>
             <a:noFill/>
@@ -13995,6 +14564,7 @@
           <a:lstStyle/>
           <a:p>
             <a:pPr algn="ctr"/>
+            <a:endParaRPr/>
           </a:p>
         </p:txBody>
       </p:sp>
@@ -14173,7 +14743,7 @@
 </file>
 
 <file path=ppt/slides/slide3.xml><?xml version="1.0" encoding="utf-8"?>
-<p:sld xmlns:a="http://schemas.openxmlformats.org/drawingml/2006/main" xmlns:p="http://schemas.openxmlformats.org/presentationml/2006/main" xmlns:r="http://schemas.openxmlformats.org/officeDocument/2006/relationships">
+<p:sld xmlns:a="http://schemas.openxmlformats.org/drawingml/2006/main" xmlns:r="http://schemas.openxmlformats.org/officeDocument/2006/relationships" xmlns:p="http://schemas.openxmlformats.org/presentationml/2006/main">
   <p:cSld>
     <p:spTree>
       <p:nvGrpSpPr>
@@ -14181,7 +14751,14 @@
         <p:cNvGrpSpPr/>
         <p:nvPr/>
       </p:nvGrpSpPr>
-      <p:grpSpPr/>
+      <p:grpSpPr>
+        <a:xfrm>
+          <a:off x="0" y="0"/>
+          <a:ext cx="0" cy="0"/>
+          <a:chOff x="0" y="0"/>
+          <a:chExt cx="0" cy="0"/>
+        </a:xfrm>
+      </p:grpSpPr>
       <p:sp>
         <p:nvSpPr>
           <p:cNvPr id="2" name="Rectangle 1"/>
@@ -14223,6 +14800,7 @@
           <a:lstStyle/>
           <a:p>
             <a:pPr algn="ctr"/>
+            <a:endParaRPr/>
           </a:p>
         </p:txBody>
       </p:sp>
@@ -14251,7 +14829,7 @@
                 <a:srgbClr val="73787E"/>
               </a:gs>
             </a:gsLst>
-            <a:lin scaled="0" ang="18900000"/>
+            <a:lin ang="18900000" scaled="0"/>
           </a:gradFill>
           <a:ln>
             <a:noFill/>
@@ -14283,6 +14861,7 @@
           <a:lstStyle/>
           <a:p>
             <a:pPr algn="ctr"/>
+            <a:endParaRPr/>
           </a:p>
         </p:txBody>
       </p:sp>
@@ -14294,8 +14873,8 @@
         </p:nvSpPr>
         <p:spPr>
           <a:xfrm>
-            <a:off x="960120" y="274320"/>
-            <a:ext cx="9692640" cy="685800"/>
+            <a:off x="960120" y="399564"/>
+            <a:ext cx="9692640" cy="435312"/>
           </a:xfrm>
           <a:prstGeom prst="rect">
             <a:avLst/>
@@ -14317,15 +14896,142 @@
               </a:spcAft>
             </a:pPr>
             <a:r>
-              <a:rPr sz="2150" b="1">
-                <a:solidFill>
-                  <a:srgbClr val="1C1C1E"/>
-                </a:solidFill>
-                <a:latin typeface="맑은 고딕"/>
-                <a:ea typeface="맑은 고딕"/>
-              </a:rPr>
-              <a:t>아이디어의 발단 — 자원 부족은 실재한다. 그런데 원인이 그것뿐인가</a:t>
-            </a:r>
+              <a:rPr lang="ko-KR" altLang="en-US" sz="2150" b="1" dirty="0">
+                <a:solidFill>
+                  <a:srgbClr val="1C1C1E"/>
+                </a:solidFill>
+                <a:latin typeface="맑은 고딕"/>
+                <a:ea typeface="맑은 고딕"/>
+              </a:rPr>
+              <a:t>연구 배경 — 분만취약지 제도와 접근성의 두 축</a:t>
+            </a:r>
+            <a:r>
+              <a:rPr sz="2150" b="1" dirty="0">
+                <a:solidFill>
+                  <a:srgbClr val="1C1C1E"/>
+                </a:solidFill>
+                <a:latin typeface="맑은 고딕"/>
+                <a:ea typeface="맑은 고딕"/>
+              </a:rPr>
+              <a:t/>
+            </a:r>
+            <a:r>
+              <a:rPr sz="2150" b="1" dirty="0" err="1">
+                <a:solidFill>
+                  <a:srgbClr val="1C1C1E"/>
+                </a:solidFill>
+                <a:latin typeface="맑은 고딕"/>
+                <a:ea typeface="맑은 고딕"/>
+              </a:rPr>
+              <a:t/>
+            </a:r>
+            <a:r>
+              <a:rPr sz="2150" b="1" dirty="0">
+                <a:solidFill>
+                  <a:srgbClr val="1C1C1E"/>
+                </a:solidFill>
+                <a:latin typeface="맑은 고딕"/>
+                <a:ea typeface="맑은 고딕"/>
+              </a:rPr>
+              <a:t/>
+            </a:r>
+            <a:r>
+              <a:rPr sz="2150" b="1" dirty="0" err="1">
+                <a:solidFill>
+                  <a:srgbClr val="1C1C1E"/>
+                </a:solidFill>
+                <a:latin typeface="맑은 고딕"/>
+                <a:ea typeface="맑은 고딕"/>
+              </a:rPr>
+              <a:t/>
+            </a:r>
+            <a:r>
+              <a:rPr sz="2150" b="1" dirty="0">
+                <a:solidFill>
+                  <a:srgbClr val="1C1C1E"/>
+                </a:solidFill>
+                <a:latin typeface="맑은 고딕"/>
+                <a:ea typeface="맑은 고딕"/>
+              </a:rPr>
+              <a:t/>
+            </a:r>
+            <a:r>
+              <a:rPr sz="2150" b="1" dirty="0" err="1">
+                <a:solidFill>
+                  <a:srgbClr val="1C1C1E"/>
+                </a:solidFill>
+                <a:latin typeface="맑은 고딕"/>
+                <a:ea typeface="맑은 고딕"/>
+              </a:rPr>
+              <a:t/>
+            </a:r>
+            <a:r>
+              <a:rPr sz="2150" b="1" dirty="0">
+                <a:solidFill>
+                  <a:srgbClr val="1C1C1E"/>
+                </a:solidFill>
+                <a:latin typeface="맑은 고딕"/>
+                <a:ea typeface="맑은 고딕"/>
+              </a:rPr>
+              <a:t/>
+            </a:r>
+            <a:r>
+              <a:rPr sz="2150" b="1" dirty="0" err="1">
+                <a:solidFill>
+                  <a:srgbClr val="1C1C1E"/>
+                </a:solidFill>
+                <a:latin typeface="맑은 고딕"/>
+                <a:ea typeface="맑은 고딕"/>
+              </a:rPr>
+              <a:t/>
+            </a:r>
+            <a:r>
+              <a:rPr sz="2150" b="1" dirty="0">
+                <a:solidFill>
+                  <a:srgbClr val="1C1C1E"/>
+                </a:solidFill>
+                <a:latin typeface="맑은 고딕"/>
+                <a:ea typeface="맑은 고딕"/>
+              </a:rPr>
+              <a:t/>
+            </a:r>
+            <a:r>
+              <a:rPr sz="2150" b="1" dirty="0" err="1">
+                <a:solidFill>
+                  <a:srgbClr val="1C1C1E"/>
+                </a:solidFill>
+                <a:latin typeface="맑은 고딕"/>
+                <a:ea typeface="맑은 고딕"/>
+              </a:rPr>
+              <a:t/>
+            </a:r>
+            <a:r>
+              <a:rPr sz="2150" b="1" dirty="0">
+                <a:solidFill>
+                  <a:srgbClr val="1C1C1E"/>
+                </a:solidFill>
+                <a:latin typeface="맑은 고딕"/>
+                <a:ea typeface="맑은 고딕"/>
+              </a:rPr>
+              <a:t/>
+            </a:r>
+            <a:r>
+              <a:rPr sz="2150" b="1" dirty="0" err="1">
+                <a:solidFill>
+                  <a:srgbClr val="1C1C1E"/>
+                </a:solidFill>
+                <a:latin typeface="맑은 고딕"/>
+                <a:ea typeface="맑은 고딕"/>
+              </a:rPr>
+              <a:t/>
+            </a:r>
+            <a:endParaRPr sz="2150" b="1" dirty="0">
+              <a:solidFill>
+                <a:srgbClr val="1C1C1E"/>
+              </a:solidFill>
+              <a:latin typeface="맑은 고딕"/>
+              <a:ea typeface="맑은 고딕"/>
+            </a:endParaRPr>
           </a:p>
         </p:txBody>
       </p:sp>
@@ -14352,7 +15058,7 @@
                 <a:srgbClr val="FFFFFF"/>
               </a:gs>
             </a:gsLst>
-            <a:lin scaled="0" ang="0"/>
+            <a:lin ang="0" scaled="0"/>
           </a:gradFill>
           <a:ln>
             <a:noFill/>
@@ -14378,6 +15084,7 @@
           <a:lstStyle/>
           <a:p>
             <a:pPr algn="ctr"/>
+            <a:endParaRPr/>
           </a:p>
         </p:txBody>
       </p:sp>
@@ -14433,7 +15140,7 @@
         <p:spPr>
           <a:xfrm>
             <a:off x="548640" y="1097280"/>
-            <a:ext cx="11155680" cy="384048"/>
+            <a:ext cx="11155680" cy="291747"/>
           </a:xfrm>
           <a:prstGeom prst="rect">
             <a:avLst/>
@@ -14455,15 +15162,122 @@
               </a:spcAft>
             </a:pPr>
             <a:r>
-              <a:rPr sz="1250" b="0">
+              <a:rPr lang="ko-KR" altLang="en-US" sz="1250" b="0" dirty="0">
                 <a:solidFill>
                   <a:srgbClr val="767A7F"/>
                 </a:solidFill>
                 <a:latin typeface="맑은 고딕"/>
                 <a:ea typeface="맑은 고딕"/>
               </a:rPr>
-              <a:t>부족(㉠)과 배분(㉡)은 다른 문제이고 해법도 다르다 — 본 연구는 ㉡을 맡는다</a:t>
-            </a:r>
+              <a:t>무엇을 다루는 제도이고, 이 연구는 그중 무엇을 감사했는가</a:t>
+            </a:r>
+            <a:r>
+              <a:rPr lang="en-US" altLang="ko-KR" sz="1250" b="0" dirty="0">
+                <a:solidFill>
+                  <a:srgbClr val="767A7F"/>
+                </a:solidFill>
+                <a:latin typeface="맑은 고딕"/>
+                <a:ea typeface="맑은 고딕"/>
+              </a:rPr>
+              <a:t/>
+            </a:r>
+            <a:r>
+              <a:rPr sz="1250" b="0" dirty="0">
+                <a:solidFill>
+                  <a:srgbClr val="767A7F"/>
+                </a:solidFill>
+                <a:latin typeface="맑은 고딕"/>
+                <a:ea typeface="맑은 고딕"/>
+              </a:rPr>
+              <a:t/>
+            </a:r>
+            <a:r>
+              <a:rPr sz="1250" b="0" dirty="0" err="1">
+                <a:solidFill>
+                  <a:srgbClr val="767A7F"/>
+                </a:solidFill>
+                <a:latin typeface="맑은 고딕"/>
+                <a:ea typeface="맑은 고딕"/>
+              </a:rPr>
+              <a:t/>
+            </a:r>
+            <a:r>
+              <a:rPr sz="1250" b="0" dirty="0">
+                <a:solidFill>
+                  <a:srgbClr val="767A7F"/>
+                </a:solidFill>
+                <a:latin typeface="맑은 고딕"/>
+                <a:ea typeface="맑은 고딕"/>
+              </a:rPr>
+              <a:t/>
+            </a:r>
+            <a:r>
+              <a:rPr sz="1250" b="0" dirty="0" err="1">
+                <a:solidFill>
+                  <a:srgbClr val="767A7F"/>
+                </a:solidFill>
+                <a:latin typeface="맑은 고딕"/>
+                <a:ea typeface="맑은 고딕"/>
+              </a:rPr>
+              <a:t/>
+            </a:r>
+            <a:r>
+              <a:rPr sz="1250" b="0" dirty="0">
+                <a:solidFill>
+                  <a:srgbClr val="767A7F"/>
+                </a:solidFill>
+                <a:latin typeface="맑은 고딕"/>
+                <a:ea typeface="맑은 고딕"/>
+              </a:rPr>
+              <a:t/>
+            </a:r>
+            <a:r>
+              <a:rPr sz="1250" b="0" dirty="0" err="1">
+                <a:solidFill>
+                  <a:srgbClr val="767A7F"/>
+                </a:solidFill>
+                <a:latin typeface="맑은 고딕"/>
+                <a:ea typeface="맑은 고딕"/>
+              </a:rPr>
+              <a:t/>
+            </a:r>
+            <a:r>
+              <a:rPr sz="1250" b="0" dirty="0">
+                <a:solidFill>
+                  <a:srgbClr val="767A7F"/>
+                </a:solidFill>
+                <a:latin typeface="맑은 고딕"/>
+                <a:ea typeface="맑은 고딕"/>
+              </a:rPr>
+              <a:t/>
+            </a:r>
+            <a:r>
+              <a:rPr sz="1250" b="0" dirty="0" err="1">
+                <a:solidFill>
+                  <a:srgbClr val="767A7F"/>
+                </a:solidFill>
+                <a:latin typeface="맑은 고딕"/>
+                <a:ea typeface="맑은 고딕"/>
+              </a:rPr>
+              <a:t/>
+            </a:r>
+            <a:r>
+              <a:rPr lang="ko-KR" altLang="en-US" sz="1250" b="0" dirty="0">
+                <a:solidFill>
+                  <a:srgbClr val="767A7F"/>
+                </a:solidFill>
+                <a:latin typeface="맑은 고딕"/>
+                <a:ea typeface="맑은 고딕"/>
+              </a:rPr>
+              <a:t/>
+            </a:r>
+            <a:endParaRPr sz="1250" b="0" dirty="0">
+              <a:solidFill>
+                <a:srgbClr val="767A7F"/>
+              </a:solidFill>
+              <a:latin typeface="맑은 고딕"/>
+              <a:ea typeface="맑은 고딕"/>
+            </a:endParaRPr>
           </a:p>
         </p:txBody>
       </p:sp>
@@ -14561,6 +15375,7 @@
           <a:lstStyle/>
           <a:p>
             <a:pPr algn="ctr"/>
+            <a:endParaRPr/>
           </a:p>
         </p:txBody>
       </p:sp>
@@ -14573,7 +15388,7 @@
         <p:spPr>
           <a:xfrm>
             <a:off x="685800" y="1499616"/>
-            <a:ext cx="3246120" cy="1527048"/>
+            <a:ext cx="3246120" cy="933269"/>
           </a:xfrm>
           <a:prstGeom prst="rect">
             <a:avLst/>
@@ -14595,35 +15410,309 @@
               </a:spcAft>
             </a:pPr>
             <a:r>
-              <a:rPr sz="1300" b="1">
+              <a:rPr sz="1300" b="1" dirty="0">
                 <a:solidFill>
                   <a:srgbClr val="33393F"/>
                 </a:solidFill>
                 <a:latin typeface="맑은 고딕"/>
                 <a:ea typeface="맑은 고딕"/>
               </a:rPr>
-              <a:t>① 여전히 존재하는 분만취약지</a:t>
-            </a:r>
-          </a:p>
-          <a:p>
-            <a:pPr marL="160020" indent="-160020">
-              <a:lnSpc>
-                <a:spcPct val="114000"/>
-              </a:lnSpc>
-              <a:spcAft>
-                <a:spcPts val="200"/>
-              </a:spcAft>
-            </a:pPr>
-            <a:r>
-              <a:rPr sz="1100" b="0">
-                <a:solidFill>
-                  <a:srgbClr val="1C1C1E"/>
-                </a:solidFill>
-                <a:latin typeface="맑은 고딕"/>
-                <a:ea typeface="맑은 고딕"/>
-              </a:rPr>
-              <a:t>• "지방에 분만실이 없다" — 해마다 반복되는 기사. 처방도 늘 같다: 의사를 늘리고 병원을 지어라. 그리고 이 처방은 옳다 — 절대량이 모자란 것은 사실이다</a:t>
-            </a:r>
+              <a:t>① 분만취약지란 무엇인가</a:t>
+            </a:r>
+            <a:r>
+              <a:rPr lang="ko-KR" altLang="en-US" sz="1300" b="1" dirty="0">
+                <a:solidFill>
+                  <a:srgbClr val="33393F"/>
+                </a:solidFill>
+                <a:latin typeface="맑은 고딕"/>
+                <a:ea typeface="맑은 고딕"/>
+              </a:rPr>
+              <a:t/>
+            </a:r>
+            <a:endParaRPr lang="en-US" altLang="ko-KR" sz="1300" b="1" dirty="0">
+              <a:solidFill>
+                <a:srgbClr val="33393F"/>
+              </a:solidFill>
+              <a:latin typeface="맑은 고딕"/>
+              <a:ea typeface="맑은 고딕"/>
+            </a:endParaRPr>
+          </a:p>
+          <a:p>
+            <a:pPr>
+              <a:lnSpc>
+                <a:spcPct val="114000"/>
+              </a:lnSpc>
+              <a:spcAft>
+                <a:spcPts val="350"/>
+              </a:spcAft>
+            </a:pPr>
+            <a:r>
+              <a:rPr sz="1100" b="0" dirty="0">
+                <a:solidFill>
+                  <a:srgbClr val="1C1C1E"/>
+                </a:solidFill>
+                <a:latin typeface="맑은 고딕"/>
+                <a:ea typeface="맑은 고딕"/>
+              </a:rPr>
+              <a:t>• 소득·인구가 적은 지역이 아니라, 그 지역 가임기 여성이 ① 분만 가능 기관까지 60분 안에 닿기 어렵고(접근성) ② 실제 출산도 60분 안에 하지 못하는(이용률) 시·군 — 즉 거리와 시간으로 정의된다</a:t>
+            </a:r>
+            <a:r>
+              <a:rPr sz="1100" b="0" dirty="0" err="1">
+                <a:solidFill>
+                  <a:srgbClr val="1C1C1E"/>
+                </a:solidFill>
+                <a:latin typeface="맑은 고딕"/>
+                <a:ea typeface="맑은 고딕"/>
+              </a:rPr>
+              <a:t/>
+            </a:r>
+            <a:r>
+              <a:rPr sz="1100" b="0" dirty="0">
+                <a:solidFill>
+                  <a:srgbClr val="1C1C1E"/>
+                </a:solidFill>
+                <a:latin typeface="맑은 고딕"/>
+                <a:ea typeface="맑은 고딕"/>
+              </a:rPr>
+              <a:t/>
+            </a:r>
+            <a:r>
+              <a:rPr sz="1100" b="0" dirty="0" err="1">
+                <a:solidFill>
+                  <a:srgbClr val="1C1C1E"/>
+                </a:solidFill>
+                <a:latin typeface="맑은 고딕"/>
+                <a:ea typeface="맑은 고딕"/>
+              </a:rPr>
+              <a:t/>
+            </a:r>
+            <a:r>
+              <a:rPr sz="1100" b="0" dirty="0">
+                <a:solidFill>
+                  <a:srgbClr val="1C1C1E"/>
+                </a:solidFill>
+                <a:latin typeface="맑은 고딕"/>
+                <a:ea typeface="맑은 고딕"/>
+              </a:rPr>
+              <a:t/>
+            </a:r>
+            <a:r>
+              <a:rPr sz="1100" b="0" dirty="0" err="1">
+                <a:solidFill>
+                  <a:srgbClr val="1C1C1E"/>
+                </a:solidFill>
+                <a:latin typeface="맑은 고딕"/>
+                <a:ea typeface="맑은 고딕"/>
+              </a:rPr>
+              <a:t/>
+            </a:r>
+            <a:r>
+              <a:rPr sz="1100" b="0" dirty="0">
+                <a:solidFill>
+                  <a:srgbClr val="1C1C1E"/>
+                </a:solidFill>
+                <a:latin typeface="맑은 고딕"/>
+                <a:ea typeface="맑은 고딕"/>
+              </a:rPr>
+              <a:t/>
+            </a:r>
+            <a:r>
+              <a:rPr sz="1100" b="0" dirty="0" err="1">
+                <a:solidFill>
+                  <a:srgbClr val="1C1C1E"/>
+                </a:solidFill>
+                <a:latin typeface="맑은 고딕"/>
+                <a:ea typeface="맑은 고딕"/>
+              </a:rPr>
+              <a:t/>
+            </a:r>
+            <a:r>
+              <a:rPr sz="1100" b="0" dirty="0">
+                <a:solidFill>
+                  <a:srgbClr val="1C1C1E"/>
+                </a:solidFill>
+                <a:latin typeface="맑은 고딕"/>
+                <a:ea typeface="맑은 고딕"/>
+              </a:rPr>
+              <a:t/>
+            </a:r>
+            <a:r>
+              <a:rPr sz="1100" b="0" dirty="0" err="1">
+                <a:solidFill>
+                  <a:srgbClr val="1C1C1E"/>
+                </a:solidFill>
+                <a:latin typeface="맑은 고딕"/>
+                <a:ea typeface="맑은 고딕"/>
+              </a:rPr>
+              <a:t/>
+            </a:r>
+            <a:r>
+              <a:rPr sz="1100" b="0" dirty="0">
+                <a:solidFill>
+                  <a:srgbClr val="1C1C1E"/>
+                </a:solidFill>
+                <a:latin typeface="맑은 고딕"/>
+                <a:ea typeface="맑은 고딕"/>
+              </a:rPr>
+              <a:t/>
+            </a:r>
+            <a:r>
+              <a:rPr sz="1100" b="0" dirty="0" err="1">
+                <a:solidFill>
+                  <a:srgbClr val="1C1C1E"/>
+                </a:solidFill>
+                <a:latin typeface="맑은 고딕"/>
+                <a:ea typeface="맑은 고딕"/>
+              </a:rPr>
+              <a:t/>
+            </a:r>
+            <a:r>
+              <a:rPr sz="1100" b="0" dirty="0">
+                <a:solidFill>
+                  <a:srgbClr val="1C1C1E"/>
+                </a:solidFill>
+                <a:latin typeface="맑은 고딕"/>
+                <a:ea typeface="맑은 고딕"/>
+              </a:rPr>
+              <a:t/>
+            </a:r>
+            <a:r>
+              <a:rPr sz="1100" b="0" dirty="0" err="1">
+                <a:solidFill>
+                  <a:srgbClr val="1C1C1E"/>
+                </a:solidFill>
+                <a:latin typeface="맑은 고딕"/>
+                <a:ea typeface="맑은 고딕"/>
+              </a:rPr>
+              <a:t/>
+            </a:r>
+            <a:r>
+              <a:rPr sz="1100" b="0" dirty="0">
+                <a:solidFill>
+                  <a:srgbClr val="1C1C1E"/>
+                </a:solidFill>
+                <a:latin typeface="맑은 고딕"/>
+                <a:ea typeface="맑은 고딕"/>
+              </a:rPr>
+              <a:t/>
+            </a:r>
+            <a:r>
+              <a:rPr sz="1100" b="0" dirty="0" err="1">
+                <a:solidFill>
+                  <a:srgbClr val="1C1C1E"/>
+                </a:solidFill>
+                <a:latin typeface="맑은 고딕"/>
+                <a:ea typeface="맑은 고딕"/>
+              </a:rPr>
+              <a:t/>
+            </a:r>
+            <a:r>
+              <a:rPr sz="1100" b="0" dirty="0">
+                <a:solidFill>
+                  <a:srgbClr val="1C1C1E"/>
+                </a:solidFill>
+                <a:latin typeface="맑은 고딕"/>
+                <a:ea typeface="맑은 고딕"/>
+              </a:rPr>
+              <a:t/>
+            </a:r>
+            <a:r>
+              <a:rPr sz="1100" b="0" dirty="0" err="1">
+                <a:solidFill>
+                  <a:srgbClr val="1C1C1E"/>
+                </a:solidFill>
+                <a:latin typeface="맑은 고딕"/>
+                <a:ea typeface="맑은 고딕"/>
+              </a:rPr>
+              <a:t/>
+            </a:r>
+            <a:r>
+              <a:rPr sz="1100" b="0" dirty="0">
+                <a:solidFill>
+                  <a:srgbClr val="1C1C1E"/>
+                </a:solidFill>
+                <a:latin typeface="맑은 고딕"/>
+                <a:ea typeface="맑은 고딕"/>
+              </a:rPr>
+              <a:t/>
+            </a:r>
+            <a:r>
+              <a:rPr sz="1100" b="0" dirty="0" err="1">
+                <a:solidFill>
+                  <a:srgbClr val="1C1C1E"/>
+                </a:solidFill>
+                <a:latin typeface="맑은 고딕"/>
+                <a:ea typeface="맑은 고딕"/>
+              </a:rPr>
+              <a:t/>
+            </a:r>
+            <a:r>
+              <a:rPr sz="1100" b="0" dirty="0">
+                <a:solidFill>
+                  <a:srgbClr val="1C1C1E"/>
+                </a:solidFill>
+                <a:latin typeface="맑은 고딕"/>
+                <a:ea typeface="맑은 고딕"/>
+              </a:rPr>
+              <a:t/>
+            </a:r>
+            <a:r>
+              <a:rPr sz="1100" b="0" dirty="0" err="1">
+                <a:solidFill>
+                  <a:srgbClr val="1C1C1E"/>
+                </a:solidFill>
+                <a:latin typeface="맑은 고딕"/>
+                <a:ea typeface="맑은 고딕"/>
+              </a:rPr>
+              <a:t/>
+            </a:r>
+            <a:r>
+              <a:rPr sz="1100" b="0" dirty="0">
+                <a:solidFill>
+                  <a:srgbClr val="1C1C1E"/>
+                </a:solidFill>
+                <a:latin typeface="맑은 고딕"/>
+                <a:ea typeface="맑은 고딕"/>
+              </a:rPr>
+              <a:t/>
+            </a:r>
+            <a:r>
+              <a:rPr sz="1100" b="0" dirty="0" err="1">
+                <a:solidFill>
+                  <a:srgbClr val="1C1C1E"/>
+                </a:solidFill>
+                <a:latin typeface="맑은 고딕"/>
+                <a:ea typeface="맑은 고딕"/>
+              </a:rPr>
+              <a:t/>
+            </a:r>
+            <a:r>
+              <a:rPr sz="1100" b="0" dirty="0">
+                <a:solidFill>
+                  <a:srgbClr val="1C1C1E"/>
+                </a:solidFill>
+                <a:latin typeface="맑은 고딕"/>
+                <a:ea typeface="맑은 고딕"/>
+              </a:rPr>
+              <a:t/>
+            </a:r>
+            <a:r>
+              <a:rPr sz="1100" b="0" dirty="0" err="1">
+                <a:solidFill>
+                  <a:srgbClr val="1C1C1E"/>
+                </a:solidFill>
+                <a:latin typeface="맑은 고딕"/>
+                <a:ea typeface="맑은 고딕"/>
+              </a:rPr>
+              <a:t/>
+            </a:r>
+            <a:endParaRPr sz="1100" b="0" dirty="0">
+              <a:solidFill>
+                <a:srgbClr val="1C1C1E"/>
+              </a:solidFill>
+              <a:latin typeface="맑은 고딕"/>
+              <a:ea typeface="맑은 고딕"/>
+            </a:endParaRPr>
           </a:p>
         </p:txBody>
       </p:sp>
@@ -14678,6 +15767,7 @@
           <a:lstStyle/>
           <a:p>
             <a:pPr algn="ctr"/>
+            <a:endParaRPr/>
           </a:p>
         </p:txBody>
       </p:sp>
@@ -14712,15 +15802,52 @@
               </a:spcAft>
             </a:pPr>
             <a:r>
-              <a:rPr sz="1300" b="1">
+              <a:rPr sz="1300" b="1" dirty="0">
                 <a:solidFill>
                   <a:srgbClr val="33393F"/>
                 </a:solidFill>
                 <a:latin typeface="맑은 고딕"/>
                 <a:ea typeface="맑은 고딕"/>
               </a:rPr>
-              <a:t>② 그런데 원인이 그것뿐인가</a:t>
-            </a:r>
+              <a:t>② 접근성은 원래 두 축이다</a:t>
+            </a:r>
+            <a:r>
+              <a:rPr sz="1300" b="1" dirty="0" err="1">
+                <a:solidFill>
+                  <a:srgbClr val="33393F"/>
+                </a:solidFill>
+                <a:latin typeface="맑은 고딕"/>
+                <a:ea typeface="맑은 고딕"/>
+              </a:rPr>
+              <a:t/>
+            </a:r>
+            <a:r>
+              <a:rPr sz="1300" b="1" dirty="0">
+                <a:solidFill>
+                  <a:srgbClr val="33393F"/>
+                </a:solidFill>
+                <a:latin typeface="맑은 고딕"/>
+                <a:ea typeface="맑은 고딕"/>
+              </a:rPr>
+              <a:t/>
+            </a:r>
+            <a:r>
+              <a:rPr sz="1300" b="1" dirty="0" err="1">
+                <a:solidFill>
+                  <a:srgbClr val="33393F"/>
+                </a:solidFill>
+                <a:latin typeface="맑은 고딕"/>
+                <a:ea typeface="맑은 고딕"/>
+              </a:rPr>
+              <a:t/>
+            </a:r>
+            <a:endParaRPr sz="1300" b="1" dirty="0">
+              <a:solidFill>
+                <a:srgbClr val="33393F"/>
+              </a:solidFill>
+              <a:latin typeface="맑은 고딕"/>
+              <a:ea typeface="맑은 고딕"/>
+            </a:endParaRPr>
           </a:p>
           <a:p>
             <a:pPr marL="160020" indent="-160020">
@@ -14732,15 +15859,232 @@
               </a:spcAft>
             </a:pPr>
             <a:r>
-              <a:rPr sz="1100" b="0">
-                <a:solidFill>
-                  <a:srgbClr val="1C1C1E"/>
-                </a:solidFill>
-                <a:latin typeface="맑은 고딕"/>
-                <a:ea typeface="맑은 고딕"/>
-              </a:rPr>
-              <a:t>• 자원이 모자란 것(㉠)과, 있는 자원이 체계적으로 배분되지 않는 것(㉡)은 다른 문제다. 그리고 둘은 동시에 성립할 수 있다</a:t>
-            </a:r>
+              <a:rPr sz="1100" b="0" dirty="0">
+                <a:solidFill>
+                  <a:srgbClr val="1C1C1E"/>
+                </a:solidFill>
+                <a:latin typeface="맑은 고딕"/>
+                <a:ea typeface="맑은 고딕"/>
+              </a:rPr>
+              <a:t>• 보건지리학 표준(2SFCA)은 접근성을 공간 축(얼마나 멀리 있는가) × 비공간 축(그곳에 의사가 있는가)의 결합으로 본다. 현행 판정식이 어느 축을 보는지가 감사의 출발점이다</a:t>
+            </a:r>
+            <a:r>
+              <a:rPr sz="1100" b="0" dirty="0" err="1">
+                <a:solidFill>
+                  <a:srgbClr val="1C1C1E"/>
+                </a:solidFill>
+                <a:latin typeface="맑은 고딕"/>
+                <a:ea typeface="맑은 고딕"/>
+              </a:rPr>
+              <a:t/>
+            </a:r>
+            <a:r>
+              <a:rPr sz="1100" b="0" dirty="0">
+                <a:solidFill>
+                  <a:srgbClr val="1C1C1E"/>
+                </a:solidFill>
+                <a:latin typeface="맑은 고딕"/>
+                <a:ea typeface="맑은 고딕"/>
+              </a:rPr>
+              <a:t/>
+            </a:r>
+            <a:r>
+              <a:rPr sz="1100" b="0" dirty="0" err="1">
+                <a:solidFill>
+                  <a:srgbClr val="1C1C1E"/>
+                </a:solidFill>
+                <a:latin typeface="맑은 고딕"/>
+                <a:ea typeface="맑은 고딕"/>
+              </a:rPr>
+              <a:t/>
+            </a:r>
+            <a:r>
+              <a:rPr sz="1100" b="0" dirty="0">
+                <a:solidFill>
+                  <a:srgbClr val="1C1C1E"/>
+                </a:solidFill>
+                <a:latin typeface="맑은 고딕"/>
+                <a:ea typeface="맑은 고딕"/>
+              </a:rPr>
+              <a:t/>
+            </a:r>
+            <a:r>
+              <a:rPr sz="1100" b="0" dirty="0" err="1">
+                <a:solidFill>
+                  <a:srgbClr val="1C1C1E"/>
+                </a:solidFill>
+                <a:latin typeface="맑은 고딕"/>
+                <a:ea typeface="맑은 고딕"/>
+              </a:rPr>
+              <a:t/>
+            </a:r>
+            <a:r>
+              <a:rPr sz="1100" b="0" dirty="0">
+                <a:solidFill>
+                  <a:srgbClr val="1C1C1E"/>
+                </a:solidFill>
+                <a:latin typeface="맑은 고딕"/>
+                <a:ea typeface="맑은 고딕"/>
+              </a:rPr>
+              <a:t/>
+            </a:r>
+            <a:r>
+              <a:rPr sz="1100" b="0" dirty="0" err="1">
+                <a:solidFill>
+                  <a:srgbClr val="1C1C1E"/>
+                </a:solidFill>
+                <a:latin typeface="맑은 고딕"/>
+                <a:ea typeface="맑은 고딕"/>
+              </a:rPr>
+              <a:t/>
+            </a:r>
+            <a:r>
+              <a:rPr sz="1100" b="0" dirty="0">
+                <a:solidFill>
+                  <a:srgbClr val="1C1C1E"/>
+                </a:solidFill>
+                <a:latin typeface="맑은 고딕"/>
+                <a:ea typeface="맑은 고딕"/>
+              </a:rPr>
+              <a:t/>
+            </a:r>
+            <a:r>
+              <a:rPr sz="1100" b="0" dirty="0" err="1">
+                <a:solidFill>
+                  <a:srgbClr val="1C1C1E"/>
+                </a:solidFill>
+                <a:latin typeface="맑은 고딕"/>
+                <a:ea typeface="맑은 고딕"/>
+              </a:rPr>
+              <a:t/>
+            </a:r>
+            <a:r>
+              <a:rPr sz="1100" b="0" dirty="0">
+                <a:solidFill>
+                  <a:srgbClr val="1C1C1E"/>
+                </a:solidFill>
+                <a:latin typeface="맑은 고딕"/>
+                <a:ea typeface="맑은 고딕"/>
+              </a:rPr>
+              <a:t/>
+            </a:r>
+            <a:r>
+              <a:rPr sz="1100" b="0" dirty="0" err="1">
+                <a:solidFill>
+                  <a:srgbClr val="1C1C1E"/>
+                </a:solidFill>
+                <a:latin typeface="맑은 고딕"/>
+                <a:ea typeface="맑은 고딕"/>
+              </a:rPr>
+              <a:t/>
+            </a:r>
+            <a:r>
+              <a:rPr sz="1100" b="0" dirty="0">
+                <a:solidFill>
+                  <a:srgbClr val="1C1C1E"/>
+                </a:solidFill>
+                <a:latin typeface="맑은 고딕"/>
+                <a:ea typeface="맑은 고딕"/>
+              </a:rPr>
+              <a:t/>
+            </a:r>
+            <a:r>
+              <a:rPr sz="1100" b="0" dirty="0" err="1">
+                <a:solidFill>
+                  <a:srgbClr val="1C1C1E"/>
+                </a:solidFill>
+                <a:latin typeface="맑은 고딕"/>
+                <a:ea typeface="맑은 고딕"/>
+              </a:rPr>
+              <a:t/>
+            </a:r>
+            <a:r>
+              <a:rPr sz="1100" b="0" dirty="0">
+                <a:solidFill>
+                  <a:srgbClr val="1C1C1E"/>
+                </a:solidFill>
+                <a:latin typeface="맑은 고딕"/>
+                <a:ea typeface="맑은 고딕"/>
+              </a:rPr>
+              <a:t/>
+            </a:r>
+            <a:r>
+              <a:rPr sz="1100" b="0" dirty="0" err="1">
+                <a:solidFill>
+                  <a:srgbClr val="1C1C1E"/>
+                </a:solidFill>
+                <a:latin typeface="맑은 고딕"/>
+                <a:ea typeface="맑은 고딕"/>
+              </a:rPr>
+              <a:t/>
+            </a:r>
+            <a:r>
+              <a:rPr sz="1100" b="0" dirty="0">
+                <a:solidFill>
+                  <a:srgbClr val="1C1C1E"/>
+                </a:solidFill>
+                <a:latin typeface="맑은 고딕"/>
+                <a:ea typeface="맑은 고딕"/>
+              </a:rPr>
+              <a:t/>
+            </a:r>
+            <a:r>
+              <a:rPr sz="1100" b="0" dirty="0" err="1">
+                <a:solidFill>
+                  <a:srgbClr val="1C1C1E"/>
+                </a:solidFill>
+                <a:latin typeface="맑은 고딕"/>
+                <a:ea typeface="맑은 고딕"/>
+              </a:rPr>
+              <a:t/>
+            </a:r>
+            <a:r>
+              <a:rPr sz="1100" b="0" dirty="0">
+                <a:solidFill>
+                  <a:srgbClr val="1C1C1E"/>
+                </a:solidFill>
+                <a:latin typeface="맑은 고딕"/>
+                <a:ea typeface="맑은 고딕"/>
+              </a:rPr>
+              <a:t/>
+            </a:r>
+            <a:r>
+              <a:rPr sz="1100" b="0" dirty="0" err="1">
+                <a:solidFill>
+                  <a:srgbClr val="1C1C1E"/>
+                </a:solidFill>
+                <a:latin typeface="맑은 고딕"/>
+                <a:ea typeface="맑은 고딕"/>
+              </a:rPr>
+              <a:t/>
+            </a:r>
+            <a:r>
+              <a:rPr sz="1100" b="0" dirty="0">
+                <a:solidFill>
+                  <a:srgbClr val="1C1C1E"/>
+                </a:solidFill>
+                <a:latin typeface="맑은 고딕"/>
+                <a:ea typeface="맑은 고딕"/>
+              </a:rPr>
+              <a:t/>
+            </a:r>
+            <a:r>
+              <a:rPr sz="1100" b="0" dirty="0" err="1">
+                <a:solidFill>
+                  <a:srgbClr val="1C1C1E"/>
+                </a:solidFill>
+                <a:latin typeface="맑은 고딕"/>
+                <a:ea typeface="맑은 고딕"/>
+              </a:rPr>
+              <a:t/>
+            </a:r>
+            <a:endParaRPr sz="1100" b="0" dirty="0">
+              <a:solidFill>
+                <a:srgbClr val="1C1C1E"/>
+              </a:solidFill>
+              <a:latin typeface="맑은 고딕"/>
+              <a:ea typeface="맑은 고딕"/>
+            </a:endParaRPr>
           </a:p>
         </p:txBody>
       </p:sp>
@@ -14795,6 +16139,7 @@
           <a:lstStyle/>
           <a:p>
             <a:pPr algn="ctr"/>
+            <a:endParaRPr/>
           </a:p>
         </p:txBody>
       </p:sp>
@@ -14807,7 +16152,7 @@
         <p:spPr>
           <a:xfrm>
             <a:off x="8366760" y="1499616"/>
-            <a:ext cx="3246120" cy="1527048"/>
+            <a:ext cx="3246120" cy="933269"/>
           </a:xfrm>
           <a:prstGeom prst="rect">
             <a:avLst/>
@@ -14829,35 +16174,389 @@
               </a:spcAft>
             </a:pPr>
             <a:r>
-              <a:rPr sz="1300" b="1">
+              <a:rPr sz="1300" b="1" dirty="0">
                 <a:solidFill>
                   <a:srgbClr val="000000"/>
                 </a:solidFill>
                 <a:latin typeface="맑은 고딕"/>
                 <a:ea typeface="맑은 고딕"/>
               </a:rPr>
-              <a:t>③ 해결할 수 있는 문제</a:t>
-            </a:r>
-          </a:p>
-          <a:p>
-            <a:pPr marL="160020" indent="-160020">
-              <a:lnSpc>
-                <a:spcPct val="114000"/>
-              </a:lnSpc>
-              <a:spcAft>
-                <a:spcPts val="200"/>
-              </a:spcAft>
-            </a:pPr>
-            <a:r>
-              <a:rPr sz="1100" b="0">
-                <a:solidFill>
-                  <a:srgbClr val="1C1C1E"/>
-                </a:solidFill>
-                <a:latin typeface="맑은 고딕"/>
-                <a:ea typeface="맑은 고딕"/>
-              </a:rPr>
-              <a:t>• ㉠은 예산·인력의 영역이라 데이터가 답할 수 없다. ㉡은 배분 규칙의 문제이므로 데이터로 답할 수 있다 — 그리고 ㉡은 아직 검증된 적이 없다</a:t>
-            </a:r>
+              <a:t>③ 이 연구가 감사한 것</a:t>
+            </a:r>
+            <a:r>
+              <a:rPr lang="ko-KR" altLang="en-US" sz="1300" b="1" dirty="0">
+                <a:solidFill>
+                  <a:srgbClr val="000000"/>
+                </a:solidFill>
+                <a:latin typeface="맑은 고딕"/>
+                <a:ea typeface="맑은 고딕"/>
+              </a:rPr>
+              <a:t/>
+            </a:r>
+            <a:endParaRPr lang="en-US" altLang="ko-KR" sz="1300" b="1" dirty="0">
+              <a:solidFill>
+                <a:srgbClr val="000000"/>
+              </a:solidFill>
+              <a:latin typeface="맑은 고딕"/>
+              <a:ea typeface="맑은 고딕"/>
+            </a:endParaRPr>
+          </a:p>
+          <a:p>
+            <a:pPr>
+              <a:lnSpc>
+                <a:spcPct val="114000"/>
+              </a:lnSpc>
+              <a:spcAft>
+                <a:spcPts val="350"/>
+              </a:spcAft>
+            </a:pPr>
+            <a:r>
+              <a:rPr sz="1100" b="0" dirty="0">
+                <a:solidFill>
+                  <a:srgbClr val="1C1C1E"/>
+                </a:solidFill>
+                <a:latin typeface="맑은 고딕"/>
+                <a:ea typeface="맑은 고딕"/>
+              </a:rPr>
+              <a:t>• 자원이 모자란 것(㉠)은 예산·인력의 영역이라 데이터가 답할 수 없다. 있는 자원이 체계적으로 배분되지 않는 것(㉡)은 규칙의 문제이므로 데이터로 답할 수 있다 — 본 연구는 ㉡을 감사했다</a:t>
+            </a:r>
+            <a:r>
+              <a:rPr sz="1100" b="0" dirty="0" err="1">
+                <a:solidFill>
+                  <a:srgbClr val="1C1C1E"/>
+                </a:solidFill>
+                <a:latin typeface="맑은 고딕"/>
+                <a:ea typeface="맑은 고딕"/>
+              </a:rPr>
+              <a:t/>
+            </a:r>
+            <a:r>
+              <a:rPr sz="1100" b="0" dirty="0">
+                <a:solidFill>
+                  <a:srgbClr val="1C1C1E"/>
+                </a:solidFill>
+                <a:latin typeface="맑은 고딕"/>
+                <a:ea typeface="맑은 고딕"/>
+              </a:rPr>
+              <a:t/>
+            </a:r>
+            <a:r>
+              <a:rPr sz="1100" b="0" dirty="0" err="1">
+                <a:solidFill>
+                  <a:srgbClr val="1C1C1E"/>
+                </a:solidFill>
+                <a:latin typeface="맑은 고딕"/>
+                <a:ea typeface="맑은 고딕"/>
+              </a:rPr>
+              <a:t/>
+            </a:r>
+            <a:r>
+              <a:rPr sz="1100" b="0" dirty="0">
+                <a:solidFill>
+                  <a:srgbClr val="1C1C1E"/>
+                </a:solidFill>
+                <a:latin typeface="맑은 고딕"/>
+                <a:ea typeface="맑은 고딕"/>
+              </a:rPr>
+              <a:t/>
+            </a:r>
+            <a:r>
+              <a:rPr sz="1100" b="0" dirty="0" err="1">
+                <a:solidFill>
+                  <a:srgbClr val="1C1C1E"/>
+                </a:solidFill>
+                <a:latin typeface="맑은 고딕"/>
+                <a:ea typeface="맑은 고딕"/>
+              </a:rPr>
+              <a:t/>
+            </a:r>
+            <a:r>
+              <a:rPr sz="1100" b="0" dirty="0">
+                <a:solidFill>
+                  <a:srgbClr val="1C1C1E"/>
+                </a:solidFill>
+                <a:latin typeface="맑은 고딕"/>
+                <a:ea typeface="맑은 고딕"/>
+              </a:rPr>
+              <a:t/>
+            </a:r>
+            <a:r>
+              <a:rPr sz="1100" b="0" dirty="0" err="1">
+                <a:solidFill>
+                  <a:srgbClr val="1C1C1E"/>
+                </a:solidFill>
+                <a:latin typeface="맑은 고딕"/>
+                <a:ea typeface="맑은 고딕"/>
+              </a:rPr>
+              <a:t/>
+            </a:r>
+            <a:r>
+              <a:rPr sz="1100" b="0" dirty="0">
+                <a:solidFill>
+                  <a:srgbClr val="1C1C1E"/>
+                </a:solidFill>
+                <a:latin typeface="맑은 고딕"/>
+                <a:ea typeface="맑은 고딕"/>
+              </a:rPr>
+              <a:t/>
+            </a:r>
+            <a:r>
+              <a:rPr sz="1100" b="0" dirty="0" err="1">
+                <a:solidFill>
+                  <a:srgbClr val="1C1C1E"/>
+                </a:solidFill>
+                <a:latin typeface="맑은 고딕"/>
+                <a:ea typeface="맑은 고딕"/>
+              </a:rPr>
+              <a:t/>
+            </a:r>
+            <a:r>
+              <a:rPr sz="1100" b="0" dirty="0">
+                <a:solidFill>
+                  <a:srgbClr val="1C1C1E"/>
+                </a:solidFill>
+                <a:latin typeface="맑은 고딕"/>
+                <a:ea typeface="맑은 고딕"/>
+              </a:rPr>
+              <a:t/>
+            </a:r>
+            <a:r>
+              <a:rPr sz="1100" b="0" dirty="0" err="1">
+                <a:solidFill>
+                  <a:srgbClr val="1C1C1E"/>
+                </a:solidFill>
+                <a:latin typeface="맑은 고딕"/>
+                <a:ea typeface="맑은 고딕"/>
+              </a:rPr>
+              <a:t/>
+            </a:r>
+            <a:r>
+              <a:rPr sz="1100" b="0" dirty="0">
+                <a:solidFill>
+                  <a:srgbClr val="1C1C1E"/>
+                </a:solidFill>
+                <a:latin typeface="맑은 고딕"/>
+                <a:ea typeface="맑은 고딕"/>
+              </a:rPr>
+              <a:t/>
+            </a:r>
+            <a:r>
+              <a:rPr sz="1100" b="0" dirty="0" err="1">
+                <a:solidFill>
+                  <a:srgbClr val="1C1C1E"/>
+                </a:solidFill>
+                <a:latin typeface="맑은 고딕"/>
+                <a:ea typeface="맑은 고딕"/>
+              </a:rPr>
+              <a:t/>
+            </a:r>
+            <a:r>
+              <a:rPr sz="1100" b="0" dirty="0">
+                <a:solidFill>
+                  <a:srgbClr val="1C1C1E"/>
+                </a:solidFill>
+                <a:latin typeface="맑은 고딕"/>
+                <a:ea typeface="맑은 고딕"/>
+              </a:rPr>
+              <a:t/>
+            </a:r>
+            <a:r>
+              <a:rPr sz="1100" b="0" dirty="0" err="1">
+                <a:solidFill>
+                  <a:srgbClr val="1C1C1E"/>
+                </a:solidFill>
+                <a:latin typeface="맑은 고딕"/>
+                <a:ea typeface="맑은 고딕"/>
+              </a:rPr>
+              <a:t/>
+            </a:r>
+            <a:r>
+              <a:rPr sz="1100" b="0" dirty="0">
+                <a:solidFill>
+                  <a:srgbClr val="1C1C1E"/>
+                </a:solidFill>
+                <a:latin typeface="맑은 고딕"/>
+                <a:ea typeface="맑은 고딕"/>
+              </a:rPr>
+              <a:t/>
+            </a:r>
+            <a:r>
+              <a:rPr sz="1100" b="0" dirty="0" err="1">
+                <a:solidFill>
+                  <a:srgbClr val="1C1C1E"/>
+                </a:solidFill>
+                <a:latin typeface="맑은 고딕"/>
+                <a:ea typeface="맑은 고딕"/>
+              </a:rPr>
+              <a:t/>
+            </a:r>
+            <a:r>
+              <a:rPr sz="1100" b="0" dirty="0">
+                <a:solidFill>
+                  <a:srgbClr val="1C1C1E"/>
+                </a:solidFill>
+                <a:latin typeface="맑은 고딕"/>
+                <a:ea typeface="맑은 고딕"/>
+              </a:rPr>
+              <a:t/>
+            </a:r>
+            <a:r>
+              <a:rPr sz="1100" b="0" dirty="0" err="1">
+                <a:solidFill>
+                  <a:srgbClr val="1C1C1E"/>
+                </a:solidFill>
+                <a:latin typeface="맑은 고딕"/>
+                <a:ea typeface="맑은 고딕"/>
+              </a:rPr>
+              <a:t/>
+            </a:r>
+            <a:r>
+              <a:rPr sz="1100" b="0" dirty="0">
+                <a:solidFill>
+                  <a:srgbClr val="1C1C1E"/>
+                </a:solidFill>
+                <a:latin typeface="맑은 고딕"/>
+                <a:ea typeface="맑은 고딕"/>
+              </a:rPr>
+              <a:t/>
+            </a:r>
+            <a:r>
+              <a:rPr sz="1100" b="0" dirty="0" err="1">
+                <a:solidFill>
+                  <a:srgbClr val="1C1C1E"/>
+                </a:solidFill>
+                <a:latin typeface="맑은 고딕"/>
+                <a:ea typeface="맑은 고딕"/>
+              </a:rPr>
+              <a:t/>
+            </a:r>
+            <a:r>
+              <a:rPr sz="1100" b="0" dirty="0">
+                <a:solidFill>
+                  <a:srgbClr val="1C1C1E"/>
+                </a:solidFill>
+                <a:latin typeface="맑은 고딕"/>
+                <a:ea typeface="맑은 고딕"/>
+              </a:rPr>
+              <a:t/>
+            </a:r>
+            <a:r>
+              <a:rPr sz="1100" b="0" dirty="0" err="1">
+                <a:solidFill>
+                  <a:srgbClr val="1C1C1E"/>
+                </a:solidFill>
+                <a:latin typeface="맑은 고딕"/>
+                <a:ea typeface="맑은 고딕"/>
+              </a:rPr>
+              <a:t/>
+            </a:r>
+            <a:r>
+              <a:rPr sz="1100" b="0" dirty="0">
+                <a:solidFill>
+                  <a:srgbClr val="1C1C1E"/>
+                </a:solidFill>
+                <a:latin typeface="맑은 고딕"/>
+                <a:ea typeface="맑은 고딕"/>
+              </a:rPr>
+              <a:t/>
+            </a:r>
+            <a:r>
+              <a:rPr sz="1100" b="0" dirty="0" err="1">
+                <a:solidFill>
+                  <a:srgbClr val="1C1C1E"/>
+                </a:solidFill>
+                <a:latin typeface="맑은 고딕"/>
+                <a:ea typeface="맑은 고딕"/>
+              </a:rPr>
+              <a:t/>
+            </a:r>
+            <a:r>
+              <a:rPr sz="1100" b="0" dirty="0">
+                <a:solidFill>
+                  <a:srgbClr val="1C1C1E"/>
+                </a:solidFill>
+                <a:latin typeface="맑은 고딕"/>
+                <a:ea typeface="맑은 고딕"/>
+              </a:rPr>
+              <a:t/>
+            </a:r>
+            <a:r>
+              <a:rPr sz="1100" b="0" dirty="0" err="1">
+                <a:solidFill>
+                  <a:srgbClr val="1C1C1E"/>
+                </a:solidFill>
+                <a:latin typeface="맑은 고딕"/>
+                <a:ea typeface="맑은 고딕"/>
+              </a:rPr>
+              <a:t/>
+            </a:r>
+            <a:r>
+              <a:rPr sz="1100" b="0" dirty="0">
+                <a:solidFill>
+                  <a:srgbClr val="1C1C1E"/>
+                </a:solidFill>
+                <a:latin typeface="맑은 고딕"/>
+                <a:ea typeface="맑은 고딕"/>
+              </a:rPr>
+              <a:t/>
+            </a:r>
+            <a:r>
+              <a:rPr sz="1100" b="0" dirty="0" err="1">
+                <a:solidFill>
+                  <a:srgbClr val="1C1C1E"/>
+                </a:solidFill>
+                <a:latin typeface="맑은 고딕"/>
+                <a:ea typeface="맑은 고딕"/>
+              </a:rPr>
+              <a:t/>
+            </a:r>
+            <a:r>
+              <a:rPr sz="1100" b="0" dirty="0">
+                <a:solidFill>
+                  <a:srgbClr val="1C1C1E"/>
+                </a:solidFill>
+                <a:latin typeface="맑은 고딕"/>
+                <a:ea typeface="맑은 고딕"/>
+              </a:rPr>
+              <a:t/>
+            </a:r>
+            <a:r>
+              <a:rPr sz="1100" b="0" dirty="0" err="1">
+                <a:solidFill>
+                  <a:srgbClr val="1C1C1E"/>
+                </a:solidFill>
+                <a:latin typeface="맑은 고딕"/>
+                <a:ea typeface="맑은 고딕"/>
+              </a:rPr>
+              <a:t/>
+            </a:r>
+            <a:r>
+              <a:rPr sz="1100" b="0" dirty="0">
+                <a:solidFill>
+                  <a:srgbClr val="1C1C1E"/>
+                </a:solidFill>
+                <a:latin typeface="맑은 고딕"/>
+                <a:ea typeface="맑은 고딕"/>
+              </a:rPr>
+              <a:t/>
+            </a:r>
+            <a:r>
+              <a:rPr sz="1100" b="0" dirty="0" err="1">
+                <a:solidFill>
+                  <a:srgbClr val="1C1C1E"/>
+                </a:solidFill>
+                <a:latin typeface="맑은 고딕"/>
+                <a:ea typeface="맑은 고딕"/>
+              </a:rPr>
+              <a:t/>
+            </a:r>
+            <a:endParaRPr sz="1100" b="0" dirty="0">
+              <a:solidFill>
+                <a:srgbClr val="1C1C1E"/>
+              </a:solidFill>
+              <a:latin typeface="맑은 고딕"/>
+              <a:ea typeface="맑은 고딕"/>
+            </a:endParaRPr>
           </a:p>
         </p:txBody>
       </p:sp>
@@ -14912,6 +16611,7 @@
           <a:lstStyle/>
           <a:p>
             <a:pPr algn="ctr"/>
+            <a:endParaRPr/>
           </a:p>
         </p:txBody>
       </p:sp>
@@ -14924,7 +16624,7 @@
         <p:spPr>
           <a:xfrm>
             <a:off x="685800" y="3529584"/>
-            <a:ext cx="10927080" cy="1316736"/>
+            <a:ext cx="10927080" cy="1370568"/>
           </a:xfrm>
           <a:prstGeom prst="rect">
             <a:avLst/>
@@ -14946,14 +16646,204 @@
               </a:spcAft>
             </a:pPr>
             <a:r>
-              <a:rPr sz="1300" b="1">
+              <a:rPr sz="1300" b="1" dirty="0" err="1">
                 <a:solidFill>
                   <a:srgbClr val="33393F"/>
                 </a:solidFill>
                 <a:latin typeface="맑은 고딕"/>
                 <a:ea typeface="맑은 고딕"/>
               </a:rPr>
-              <a:t>그리고 자원을 공백 지역으로 보내는 제도는 이미 있다 — 「분만취약지 지원사업」(15년째)</a:t>
+              <a:t>제도는 15년째 운영 중이다 — 그런데 결과는</a:t>
+            </a:r>
+            <a:r>
+              <a:rPr sz="1300" b="1" dirty="0">
+                <a:solidFill>
+                  <a:srgbClr val="33393F"/>
+                </a:solidFill>
+                <a:latin typeface="맑은 고딕"/>
+                <a:ea typeface="맑은 고딕"/>
+              </a:rPr>
+              <a:t/>
+            </a:r>
+            <a:r>
+              <a:rPr sz="1300" b="1" dirty="0" err="1">
+                <a:solidFill>
+                  <a:srgbClr val="33393F"/>
+                </a:solidFill>
+                <a:latin typeface="맑은 고딕"/>
+                <a:ea typeface="맑은 고딕"/>
+              </a:rPr>
+              <a:t/>
+            </a:r>
+            <a:r>
+              <a:rPr sz="1300" b="1" dirty="0">
+                <a:solidFill>
+                  <a:srgbClr val="33393F"/>
+                </a:solidFill>
+                <a:latin typeface="맑은 고딕"/>
+                <a:ea typeface="맑은 고딕"/>
+              </a:rPr>
+              <a:t/>
+            </a:r>
+            <a:r>
+              <a:rPr sz="1300" b="1" dirty="0" err="1">
+                <a:solidFill>
+                  <a:srgbClr val="33393F"/>
+                </a:solidFill>
+                <a:latin typeface="맑은 고딕"/>
+                <a:ea typeface="맑은 고딕"/>
+              </a:rPr>
+              <a:t/>
+            </a:r>
+            <a:r>
+              <a:rPr sz="1300" b="1" dirty="0">
+                <a:solidFill>
+                  <a:srgbClr val="33393F"/>
+                </a:solidFill>
+                <a:latin typeface="맑은 고딕"/>
+                <a:ea typeface="맑은 고딕"/>
+              </a:rPr>
+              <a:t/>
+            </a:r>
+            <a:r>
+              <a:rPr sz="1300" b="1" dirty="0" err="1">
+                <a:solidFill>
+                  <a:srgbClr val="33393F"/>
+                </a:solidFill>
+                <a:latin typeface="맑은 고딕"/>
+                <a:ea typeface="맑은 고딕"/>
+              </a:rPr>
+              <a:t/>
+            </a:r>
+            <a:r>
+              <a:rPr sz="1300" b="1" dirty="0">
+                <a:solidFill>
+                  <a:srgbClr val="33393F"/>
+                </a:solidFill>
+                <a:latin typeface="맑은 고딕"/>
+                <a:ea typeface="맑은 고딕"/>
+              </a:rPr>
+              <a:t/>
+            </a:r>
+            <a:r>
+              <a:rPr sz="1300" b="1" dirty="0" err="1">
+                <a:solidFill>
+                  <a:srgbClr val="33393F"/>
+                </a:solidFill>
+                <a:latin typeface="맑은 고딕"/>
+                <a:ea typeface="맑은 고딕"/>
+              </a:rPr>
+              <a:t/>
+            </a:r>
+            <a:r>
+              <a:rPr sz="1300" b="1" dirty="0">
+                <a:solidFill>
+                  <a:srgbClr val="33393F"/>
+                </a:solidFill>
+                <a:latin typeface="맑은 고딕"/>
+                <a:ea typeface="맑은 고딕"/>
+              </a:rPr>
+              <a:t/>
+            </a:r>
+            <a:r>
+              <a:rPr sz="1300" b="1" dirty="0" err="1">
+                <a:solidFill>
+                  <a:srgbClr val="33393F"/>
+                </a:solidFill>
+                <a:latin typeface="맑은 고딕"/>
+                <a:ea typeface="맑은 고딕"/>
+              </a:rPr>
+              <a:t/>
+            </a:r>
+            <a:r>
+              <a:rPr sz="1300" b="1" dirty="0">
+                <a:solidFill>
+                  <a:srgbClr val="33393F"/>
+                </a:solidFill>
+                <a:latin typeface="맑은 고딕"/>
+                <a:ea typeface="맑은 고딕"/>
+              </a:rPr>
+              <a:t/>
+            </a:r>
+            <a:r>
+              <a:rPr sz="1300" b="1" dirty="0" err="1">
+                <a:solidFill>
+                  <a:srgbClr val="33393F"/>
+                </a:solidFill>
+                <a:latin typeface="맑은 고딕"/>
+                <a:ea typeface="맑은 고딕"/>
+              </a:rPr>
+              <a:t/>
+            </a:r>
+            <a:r>
+              <a:rPr sz="1300" b="1" dirty="0">
+                <a:solidFill>
+                  <a:srgbClr val="33393F"/>
+                </a:solidFill>
+                <a:latin typeface="맑은 고딕"/>
+                <a:ea typeface="맑은 고딕"/>
+              </a:rPr>
+              <a:t/>
+            </a:r>
+            <a:r>
+              <a:rPr sz="1300" b="1" dirty="0" err="1">
+                <a:solidFill>
+                  <a:srgbClr val="33393F"/>
+                </a:solidFill>
+                <a:latin typeface="맑은 고딕"/>
+                <a:ea typeface="맑은 고딕"/>
+              </a:rPr>
+              <a:t/>
+            </a:r>
+            <a:r>
+              <a:rPr sz="1300" b="1" dirty="0">
+                <a:solidFill>
+                  <a:srgbClr val="33393F"/>
+                </a:solidFill>
+                <a:latin typeface="맑은 고딕"/>
+                <a:ea typeface="맑은 고딕"/>
+              </a:rPr>
+              <a:t/>
+            </a:r>
+            <a:r>
+              <a:rPr sz="1300" b="1" dirty="0" err="1">
+                <a:solidFill>
+                  <a:srgbClr val="33393F"/>
+                </a:solidFill>
+                <a:latin typeface="맑은 고딕"/>
+                <a:ea typeface="맑은 고딕"/>
+              </a:rPr>
+              <a:t/>
+            </a:r>
+            <a:r>
+              <a:rPr sz="1300" b="1" dirty="0">
+                <a:solidFill>
+                  <a:srgbClr val="33393F"/>
+                </a:solidFill>
+                <a:latin typeface="맑은 고딕"/>
+                <a:ea typeface="맑은 고딕"/>
+              </a:rPr>
+              <a:t/>
+            </a:r>
+            <a:r>
+              <a:rPr sz="1300" b="1" dirty="0" err="1">
+                <a:solidFill>
+                  <a:srgbClr val="33393F"/>
+                </a:solidFill>
+                <a:latin typeface="맑은 고딕"/>
+                <a:ea typeface="맑은 고딕"/>
+              </a:rPr>
+              <a:t/>
+            </a:r>
+            <a:r>
+              <a:rPr sz="1300" b="1" dirty="0">
+                <a:solidFill>
+                  <a:srgbClr val="33393F"/>
+                </a:solidFill>
+                <a:latin typeface="맑은 고딕"/>
+                <a:ea typeface="맑은 고딕"/>
+              </a:rPr>
+              <a:t/>
             </a:r>
           </a:p>
           <a:p>
@@ -14966,15 +16856,452 @@
               </a:spcAft>
             </a:pPr>
             <a:r>
-              <a:rPr sz="1100" b="0">
-                <a:solidFill>
-                  <a:srgbClr val="1C1C1E"/>
-                </a:solidFill>
-                <a:latin typeface="맑은 고딕"/>
-                <a:ea typeface="맑은 고딕"/>
-              </a:rPr>
-              <a:t>• 분만취약지 = 소득·인구가 적은 지역이 아니라, 그 지역 가임기 여성이 ① 분만 가능 기관까지 60분 안에 닿기 어렵고(접근성) ② 실제 출산도 60분 안에 하지 못하는(이용률) 시·군</a:t>
-            </a:r>
+              <a:rPr sz="1100" b="0" dirty="0">
+                <a:solidFill>
+                  <a:srgbClr val="1C1C1E"/>
+                </a:solidFill>
+                <a:latin typeface="맑은 고딕"/>
+                <a:ea typeface="맑은 고딕"/>
+              </a:rPr>
+              <a:t>• 전국 108곳이 분만취약지로 지정되어 있다 (A 32곳 · B 21곳 · C 55곳)</a:t>
+            </a:r>
+            <a:r>
+              <a:rPr sz="1100" b="0" dirty="0" err="1">
+                <a:solidFill>
+                  <a:srgbClr val="1C1C1E"/>
+                </a:solidFill>
+                <a:latin typeface="맑은 고딕"/>
+                <a:ea typeface="맑은 고딕"/>
+              </a:rPr>
+              <a:t/>
+            </a:r>
+            <a:r>
+              <a:rPr sz="1100" b="0" dirty="0">
+                <a:solidFill>
+                  <a:srgbClr val="1C1C1E"/>
+                </a:solidFill>
+                <a:latin typeface="맑은 고딕"/>
+                <a:ea typeface="맑은 고딕"/>
+              </a:rPr>
+              <a:t/>
+            </a:r>
+            <a:r>
+              <a:rPr sz="1100" b="0" dirty="0" err="1">
+                <a:solidFill>
+                  <a:srgbClr val="1C1C1E"/>
+                </a:solidFill>
+                <a:latin typeface="맑은 고딕"/>
+                <a:ea typeface="맑은 고딕"/>
+              </a:rPr>
+              <a:t/>
+            </a:r>
+            <a:r>
+              <a:rPr sz="1100" b="0" dirty="0">
+                <a:solidFill>
+                  <a:srgbClr val="1C1C1E"/>
+                </a:solidFill>
+                <a:latin typeface="맑은 고딕"/>
+                <a:ea typeface="맑은 고딕"/>
+              </a:rPr>
+              <a:t/>
+            </a:r>
+            <a:r>
+              <a:rPr sz="1100" b="0" dirty="0" err="1">
+                <a:solidFill>
+                  <a:srgbClr val="1C1C1E"/>
+                </a:solidFill>
+                <a:latin typeface="맑은 고딕"/>
+                <a:ea typeface="맑은 고딕"/>
+              </a:rPr>
+              <a:t/>
+            </a:r>
+            <a:r>
+              <a:rPr sz="1100" b="0" dirty="0">
+                <a:solidFill>
+                  <a:srgbClr val="1C1C1E"/>
+                </a:solidFill>
+                <a:latin typeface="맑은 고딕"/>
+                <a:ea typeface="맑은 고딕"/>
+              </a:rPr>
+              <a:t/>
+            </a:r>
+            <a:r>
+              <a:rPr sz="1100" b="0" dirty="0" err="1">
+                <a:solidFill>
+                  <a:srgbClr val="1C1C1E"/>
+                </a:solidFill>
+                <a:latin typeface="맑은 고딕"/>
+                <a:ea typeface="맑은 고딕"/>
+              </a:rPr>
+              <a:t/>
+            </a:r>
+            <a:r>
+              <a:rPr sz="1100" b="0" dirty="0">
+                <a:solidFill>
+                  <a:srgbClr val="1C1C1E"/>
+                </a:solidFill>
+                <a:latin typeface="맑은 고딕"/>
+                <a:ea typeface="맑은 고딕"/>
+              </a:rPr>
+              <a:t/>
+            </a:r>
+            <a:r>
+              <a:rPr sz="1100" b="0" dirty="0" err="1">
+                <a:solidFill>
+                  <a:srgbClr val="1C1C1E"/>
+                </a:solidFill>
+                <a:latin typeface="맑은 고딕"/>
+                <a:ea typeface="맑은 고딕"/>
+              </a:rPr>
+              <a:t/>
+            </a:r>
+            <a:r>
+              <a:rPr sz="1100" b="0" dirty="0">
+                <a:solidFill>
+                  <a:srgbClr val="1C1C1E"/>
+                </a:solidFill>
+                <a:latin typeface="맑은 고딕"/>
+                <a:ea typeface="맑은 고딕"/>
+              </a:rPr>
+              <a:t/>
+            </a:r>
+            <a:r>
+              <a:rPr sz="1100" b="0" dirty="0" err="1">
+                <a:solidFill>
+                  <a:srgbClr val="1C1C1E"/>
+                </a:solidFill>
+                <a:latin typeface="맑은 고딕"/>
+                <a:ea typeface="맑은 고딕"/>
+              </a:rPr>
+              <a:t/>
+            </a:r>
+            <a:r>
+              <a:rPr sz="1100" b="0" dirty="0">
+                <a:solidFill>
+                  <a:srgbClr val="1C1C1E"/>
+                </a:solidFill>
+                <a:latin typeface="맑은 고딕"/>
+                <a:ea typeface="맑은 고딕"/>
+              </a:rPr>
+              <a:t/>
+            </a:r>
+            <a:r>
+              <a:rPr sz="1100" b="0" dirty="0" err="1">
+                <a:solidFill>
+                  <a:srgbClr val="1C1C1E"/>
+                </a:solidFill>
+                <a:latin typeface="맑은 고딕"/>
+                <a:ea typeface="맑은 고딕"/>
+              </a:rPr>
+              <a:t/>
+            </a:r>
+            <a:r>
+              <a:rPr sz="1100" b="0" dirty="0">
+                <a:solidFill>
+                  <a:srgbClr val="1C1C1E"/>
+                </a:solidFill>
+                <a:latin typeface="맑은 고딕"/>
+                <a:ea typeface="맑은 고딕"/>
+              </a:rPr>
+              <a:t/>
+            </a:r>
+            <a:r>
+              <a:rPr sz="1100" b="0" dirty="0" err="1">
+                <a:solidFill>
+                  <a:srgbClr val="1C1C1E"/>
+                </a:solidFill>
+                <a:latin typeface="맑은 고딕"/>
+                <a:ea typeface="맑은 고딕"/>
+              </a:rPr>
+              <a:t/>
+            </a:r>
+            <a:r>
+              <a:rPr sz="1100" b="0" dirty="0">
+                <a:solidFill>
+                  <a:srgbClr val="1C1C1E"/>
+                </a:solidFill>
+                <a:latin typeface="맑은 고딕"/>
+                <a:ea typeface="맑은 고딕"/>
+              </a:rPr>
+              <a:t/>
+            </a:r>
+            <a:r>
+              <a:rPr sz="1100" b="0" dirty="0" err="1">
+                <a:solidFill>
+                  <a:srgbClr val="1C1C1E"/>
+                </a:solidFill>
+                <a:latin typeface="맑은 고딕"/>
+                <a:ea typeface="맑은 고딕"/>
+              </a:rPr>
+              <a:t/>
+            </a:r>
+            <a:r>
+              <a:rPr sz="1100" b="0" dirty="0">
+                <a:solidFill>
+                  <a:srgbClr val="1C1C1E"/>
+                </a:solidFill>
+                <a:latin typeface="맑은 고딕"/>
+                <a:ea typeface="맑은 고딕"/>
+              </a:rPr>
+              <a:t/>
+            </a:r>
+            <a:r>
+              <a:rPr sz="1100" b="0" dirty="0" err="1">
+                <a:solidFill>
+                  <a:srgbClr val="1C1C1E"/>
+                </a:solidFill>
+                <a:latin typeface="맑은 고딕"/>
+                <a:ea typeface="맑은 고딕"/>
+              </a:rPr>
+              <a:t/>
+            </a:r>
+            <a:r>
+              <a:rPr sz="1100" b="0" dirty="0">
+                <a:solidFill>
+                  <a:srgbClr val="1C1C1E"/>
+                </a:solidFill>
+                <a:latin typeface="맑은 고딕"/>
+                <a:ea typeface="맑은 고딕"/>
+              </a:rPr>
+              <a:t/>
+            </a:r>
+            <a:r>
+              <a:rPr sz="1100" b="0" dirty="0" err="1">
+                <a:solidFill>
+                  <a:srgbClr val="1C1C1E"/>
+                </a:solidFill>
+                <a:latin typeface="맑은 고딕"/>
+                <a:ea typeface="맑은 고딕"/>
+              </a:rPr>
+              <a:t/>
+            </a:r>
+            <a:r>
+              <a:rPr sz="1100" b="0" dirty="0">
+                <a:solidFill>
+                  <a:srgbClr val="1C1C1E"/>
+                </a:solidFill>
+                <a:latin typeface="맑은 고딕"/>
+                <a:ea typeface="맑은 고딕"/>
+              </a:rPr>
+              <a:t/>
+            </a:r>
+            <a:r>
+              <a:rPr sz="1100" b="0" dirty="0" err="1">
+                <a:solidFill>
+                  <a:srgbClr val="1C1C1E"/>
+                </a:solidFill>
+                <a:latin typeface="맑은 고딕"/>
+                <a:ea typeface="맑은 고딕"/>
+              </a:rPr>
+              <a:t/>
+            </a:r>
+            <a:r>
+              <a:rPr sz="1100" b="0" dirty="0">
+                <a:solidFill>
+                  <a:srgbClr val="1C1C1E"/>
+                </a:solidFill>
+                <a:latin typeface="맑은 고딕"/>
+                <a:ea typeface="맑은 고딕"/>
+              </a:rPr>
+              <a:t/>
+            </a:r>
+            <a:r>
+              <a:rPr sz="1100" b="0" dirty="0" err="1">
+                <a:solidFill>
+                  <a:srgbClr val="1C1C1E"/>
+                </a:solidFill>
+                <a:latin typeface="맑은 고딕"/>
+                <a:ea typeface="맑은 고딕"/>
+              </a:rPr>
+              <a:t/>
+            </a:r>
+            <a:r>
+              <a:rPr sz="1100" b="0" dirty="0">
+                <a:solidFill>
+                  <a:srgbClr val="1C1C1E"/>
+                </a:solidFill>
+                <a:latin typeface="맑은 고딕"/>
+                <a:ea typeface="맑은 고딕"/>
+              </a:rPr>
+              <a:t/>
+            </a:r>
+            <a:r>
+              <a:rPr sz="1100" b="0" dirty="0" err="1">
+                <a:solidFill>
+                  <a:srgbClr val="1C1C1E"/>
+                </a:solidFill>
+                <a:latin typeface="맑은 고딕"/>
+                <a:ea typeface="맑은 고딕"/>
+              </a:rPr>
+              <a:t/>
+            </a:r>
+            <a:r>
+              <a:rPr sz="1100" b="0" dirty="0">
+                <a:solidFill>
+                  <a:srgbClr val="1C1C1E"/>
+                </a:solidFill>
+                <a:latin typeface="맑은 고딕"/>
+                <a:ea typeface="맑은 고딕"/>
+              </a:rPr>
+              <a:t/>
+            </a:r>
+            <a:r>
+              <a:rPr sz="1100" b="0" dirty="0" err="1">
+                <a:solidFill>
+                  <a:srgbClr val="1C1C1E"/>
+                </a:solidFill>
+                <a:latin typeface="맑은 고딕"/>
+                <a:ea typeface="맑은 고딕"/>
+              </a:rPr>
+              <a:t/>
+            </a:r>
+            <a:r>
+              <a:rPr sz="1100" b="0" dirty="0">
+                <a:solidFill>
+                  <a:srgbClr val="1C1C1E"/>
+                </a:solidFill>
+                <a:latin typeface="맑은 고딕"/>
+                <a:ea typeface="맑은 고딕"/>
+              </a:rPr>
+              <a:t/>
+            </a:r>
+            <a:r>
+              <a:rPr sz="1100" b="0" dirty="0" err="1">
+                <a:solidFill>
+                  <a:srgbClr val="1C1C1E"/>
+                </a:solidFill>
+                <a:latin typeface="맑은 고딕"/>
+                <a:ea typeface="맑은 고딕"/>
+              </a:rPr>
+              <a:t/>
+            </a:r>
+            <a:r>
+              <a:rPr sz="1100" b="0" dirty="0">
+                <a:solidFill>
+                  <a:srgbClr val="1C1C1E"/>
+                </a:solidFill>
+                <a:latin typeface="맑은 고딕"/>
+                <a:ea typeface="맑은 고딕"/>
+              </a:rPr>
+              <a:t/>
+            </a:r>
+            <a:r>
+              <a:rPr sz="1100" b="0" dirty="0" err="1">
+                <a:solidFill>
+                  <a:srgbClr val="1C1C1E"/>
+                </a:solidFill>
+                <a:latin typeface="맑은 고딕"/>
+                <a:ea typeface="맑은 고딕"/>
+              </a:rPr>
+              <a:t/>
+            </a:r>
+            <a:r>
+              <a:rPr sz="1100" b="0" dirty="0">
+                <a:solidFill>
+                  <a:srgbClr val="1C1C1E"/>
+                </a:solidFill>
+                <a:latin typeface="맑은 고딕"/>
+                <a:ea typeface="맑은 고딕"/>
+              </a:rPr>
+              <a:t/>
+            </a:r>
+            <a:r>
+              <a:rPr sz="1100" b="0" dirty="0" err="1">
+                <a:solidFill>
+                  <a:srgbClr val="1C1C1E"/>
+                </a:solidFill>
+                <a:latin typeface="맑은 고딕"/>
+                <a:ea typeface="맑은 고딕"/>
+              </a:rPr>
+              <a:t/>
+            </a:r>
+            <a:r>
+              <a:rPr sz="1100" b="0" dirty="0">
+                <a:solidFill>
+                  <a:srgbClr val="1C1C1E"/>
+                </a:solidFill>
+                <a:latin typeface="맑은 고딕"/>
+                <a:ea typeface="맑은 고딕"/>
+              </a:rPr>
+              <a:t/>
+            </a:r>
+            <a:r>
+              <a:rPr sz="1100" b="0" dirty="0" err="1">
+                <a:solidFill>
+                  <a:srgbClr val="1C1C1E"/>
+                </a:solidFill>
+                <a:latin typeface="맑은 고딕"/>
+                <a:ea typeface="맑은 고딕"/>
+              </a:rPr>
+              <a:t/>
+            </a:r>
+            <a:r>
+              <a:rPr sz="1100" b="0" dirty="0">
+                <a:solidFill>
+                  <a:srgbClr val="1C1C1E"/>
+                </a:solidFill>
+                <a:latin typeface="맑은 고딕"/>
+                <a:ea typeface="맑은 고딕"/>
+              </a:rPr>
+              <a:t/>
+            </a:r>
+            <a:r>
+              <a:rPr sz="1100" b="0" dirty="0" err="1">
+                <a:solidFill>
+                  <a:srgbClr val="1C1C1E"/>
+                </a:solidFill>
+                <a:latin typeface="맑은 고딕"/>
+                <a:ea typeface="맑은 고딕"/>
+              </a:rPr>
+              <a:t/>
+            </a:r>
+            <a:r>
+              <a:rPr sz="1100" b="0" dirty="0">
+                <a:solidFill>
+                  <a:srgbClr val="1C1C1E"/>
+                </a:solidFill>
+                <a:latin typeface="맑은 고딕"/>
+                <a:ea typeface="맑은 고딕"/>
+              </a:rPr>
+              <a:t/>
+            </a:r>
+            <a:r>
+              <a:rPr sz="1100" b="0" dirty="0" err="1">
+                <a:solidFill>
+                  <a:srgbClr val="1C1C1E"/>
+                </a:solidFill>
+                <a:latin typeface="맑은 고딕"/>
+                <a:ea typeface="맑은 고딕"/>
+              </a:rPr>
+              <a:t/>
+            </a:r>
+            <a:r>
+              <a:rPr sz="1100" b="0" dirty="0">
+                <a:solidFill>
+                  <a:srgbClr val="1C1C1E"/>
+                </a:solidFill>
+                <a:latin typeface="맑은 고딕"/>
+                <a:ea typeface="맑은 고딕"/>
+              </a:rPr>
+              <a:t/>
+            </a:r>
+            <a:r>
+              <a:rPr sz="1100" b="0" dirty="0" err="1">
+                <a:solidFill>
+                  <a:srgbClr val="1C1C1E"/>
+                </a:solidFill>
+                <a:latin typeface="맑은 고딕"/>
+                <a:ea typeface="맑은 고딕"/>
+              </a:rPr>
+              <a:t/>
+            </a:r>
+            <a:endParaRPr sz="1100" b="0" dirty="0">
+              <a:solidFill>
+                <a:srgbClr val="1C1C1E"/>
+              </a:solidFill>
+              <a:latin typeface="맑은 고딕"/>
+              <a:ea typeface="맑은 고딕"/>
+            </a:endParaRPr>
           </a:p>
           <a:p>
             <a:pPr marL="160020" indent="-160020">
@@ -14986,15 +17313,252 @@
               </a:spcAft>
             </a:pPr>
             <a:r>
-              <a:rPr sz="1100" b="0">
-                <a:solidFill>
-                  <a:srgbClr val="1C1C1E"/>
-                </a:solidFill>
-                <a:latin typeface="맑은 고딕"/>
-                <a:ea typeface="맑은 고딕"/>
-              </a:rPr>
-              <a:t>• 즉 이 제도에서 "취약"은 처음부터 끝까지 거리와 시간으로 정의된다 — 이 점이 본 연구의 첫 번째 표적이 된다</a:t>
-            </a:r>
+              <a:rPr sz="1100" b="0" dirty="0">
+                <a:solidFill>
+                  <a:srgbClr val="1C1C1E"/>
+                </a:solidFill>
+                <a:latin typeface="맑은 고딕"/>
+                <a:ea typeface="맑은 고딕"/>
+              </a:rPr>
+              <a:t>• 15년 누적 지원은 57개소 (분만 36 · 외래 15 · 순회 6). 2025년 신규는 전국 1개소</a:t>
+            </a:r>
+            <a:r>
+              <a:rPr sz="1100" b="0" dirty="0" err="1">
+                <a:solidFill>
+                  <a:srgbClr val="1C1C1E"/>
+                </a:solidFill>
+                <a:latin typeface="맑은 고딕"/>
+                <a:ea typeface="맑은 고딕"/>
+              </a:rPr>
+              <a:t/>
+            </a:r>
+            <a:r>
+              <a:rPr sz="1100" b="0" dirty="0">
+                <a:solidFill>
+                  <a:srgbClr val="1C1C1E"/>
+                </a:solidFill>
+                <a:latin typeface="맑은 고딕"/>
+                <a:ea typeface="맑은 고딕"/>
+              </a:rPr>
+              <a:t/>
+            </a:r>
+            <a:r>
+              <a:rPr sz="1100" b="0" dirty="0" err="1">
+                <a:solidFill>
+                  <a:srgbClr val="1C1C1E"/>
+                </a:solidFill>
+                <a:latin typeface="맑은 고딕"/>
+                <a:ea typeface="맑은 고딕"/>
+              </a:rPr>
+              <a:t/>
+            </a:r>
+            <a:r>
+              <a:rPr sz="1100" b="0" dirty="0">
+                <a:solidFill>
+                  <a:srgbClr val="1C1C1E"/>
+                </a:solidFill>
+                <a:latin typeface="맑은 고딕"/>
+                <a:ea typeface="맑은 고딕"/>
+              </a:rPr>
+              <a:t/>
+            </a:r>
+            <a:r>
+              <a:rPr sz="1100" b="0" dirty="0" err="1">
+                <a:solidFill>
+                  <a:srgbClr val="1C1C1E"/>
+                </a:solidFill>
+                <a:latin typeface="맑은 고딕"/>
+                <a:ea typeface="맑은 고딕"/>
+              </a:rPr>
+              <a:t/>
+            </a:r>
+            <a:r>
+              <a:rPr sz="1100" b="0" dirty="0">
+                <a:solidFill>
+                  <a:srgbClr val="1C1C1E"/>
+                </a:solidFill>
+                <a:latin typeface="맑은 고딕"/>
+                <a:ea typeface="맑은 고딕"/>
+              </a:rPr>
+              <a:t/>
+            </a:r>
+            <a:r>
+              <a:rPr sz="1100" b="0" dirty="0" err="1">
+                <a:solidFill>
+                  <a:srgbClr val="1C1C1E"/>
+                </a:solidFill>
+                <a:latin typeface="맑은 고딕"/>
+                <a:ea typeface="맑은 고딕"/>
+              </a:rPr>
+              <a:t/>
+            </a:r>
+            <a:r>
+              <a:rPr sz="1100" b="0" dirty="0">
+                <a:solidFill>
+                  <a:srgbClr val="1C1C1E"/>
+                </a:solidFill>
+                <a:latin typeface="맑은 고딕"/>
+                <a:ea typeface="맑은 고딕"/>
+              </a:rPr>
+              <a:t/>
+            </a:r>
+            <a:r>
+              <a:rPr sz="1100" b="0" dirty="0" err="1">
+                <a:solidFill>
+                  <a:srgbClr val="1C1C1E"/>
+                </a:solidFill>
+                <a:latin typeface="맑은 고딕"/>
+                <a:ea typeface="맑은 고딕"/>
+              </a:rPr>
+              <a:t/>
+            </a:r>
+            <a:r>
+              <a:rPr sz="1100" b="0" dirty="0">
+                <a:solidFill>
+                  <a:srgbClr val="1C1C1E"/>
+                </a:solidFill>
+                <a:latin typeface="맑은 고딕"/>
+                <a:ea typeface="맑은 고딕"/>
+              </a:rPr>
+              <a:t/>
+            </a:r>
+            <a:r>
+              <a:rPr sz="1100" b="0" dirty="0" err="1">
+                <a:solidFill>
+                  <a:srgbClr val="1C1C1E"/>
+                </a:solidFill>
+                <a:latin typeface="맑은 고딕"/>
+                <a:ea typeface="맑은 고딕"/>
+              </a:rPr>
+              <a:t/>
+            </a:r>
+            <a:r>
+              <a:rPr sz="1100" b="0" dirty="0">
+                <a:solidFill>
+                  <a:srgbClr val="1C1C1E"/>
+                </a:solidFill>
+                <a:latin typeface="맑은 고딕"/>
+                <a:ea typeface="맑은 고딕"/>
+              </a:rPr>
+              <a:t/>
+            </a:r>
+            <a:r>
+              <a:rPr sz="1100" b="0" dirty="0" err="1">
+                <a:solidFill>
+                  <a:srgbClr val="1C1C1E"/>
+                </a:solidFill>
+                <a:latin typeface="맑은 고딕"/>
+                <a:ea typeface="맑은 고딕"/>
+              </a:rPr>
+              <a:t/>
+            </a:r>
+            <a:r>
+              <a:rPr sz="1100" b="0" dirty="0">
+                <a:solidFill>
+                  <a:srgbClr val="1C1C1E"/>
+                </a:solidFill>
+                <a:latin typeface="맑은 고딕"/>
+                <a:ea typeface="맑은 고딕"/>
+              </a:rPr>
+              <a:t/>
+            </a:r>
+            <a:r>
+              <a:rPr sz="1100" b="0" dirty="0" err="1">
+                <a:solidFill>
+                  <a:srgbClr val="1C1C1E"/>
+                </a:solidFill>
+                <a:latin typeface="맑은 고딕"/>
+                <a:ea typeface="맑은 고딕"/>
+              </a:rPr>
+              <a:t/>
+            </a:r>
+            <a:r>
+              <a:rPr sz="1100" b="0" dirty="0">
+                <a:solidFill>
+                  <a:srgbClr val="1C1C1E"/>
+                </a:solidFill>
+                <a:latin typeface="맑은 고딕"/>
+                <a:ea typeface="맑은 고딕"/>
+              </a:rPr>
+              <a:t/>
+            </a:r>
+            <a:r>
+              <a:rPr sz="1100" b="0" dirty="0" err="1">
+                <a:solidFill>
+                  <a:srgbClr val="1C1C1E"/>
+                </a:solidFill>
+                <a:latin typeface="맑은 고딕"/>
+                <a:ea typeface="맑은 고딕"/>
+              </a:rPr>
+              <a:t/>
+            </a:r>
+            <a:r>
+              <a:rPr sz="1100" b="0" dirty="0">
+                <a:solidFill>
+                  <a:srgbClr val="1C1C1E"/>
+                </a:solidFill>
+                <a:latin typeface="맑은 고딕"/>
+                <a:ea typeface="맑은 고딕"/>
+              </a:rPr>
+              <a:t/>
+            </a:r>
+            <a:r>
+              <a:rPr sz="1100" b="0" dirty="0" err="1">
+                <a:solidFill>
+                  <a:srgbClr val="1C1C1E"/>
+                </a:solidFill>
+                <a:latin typeface="맑은 고딕"/>
+                <a:ea typeface="맑은 고딕"/>
+              </a:rPr>
+              <a:t/>
+            </a:r>
+            <a:r>
+              <a:rPr sz="1100" b="0" dirty="0">
+                <a:solidFill>
+                  <a:srgbClr val="1C1C1E"/>
+                </a:solidFill>
+                <a:latin typeface="맑은 고딕"/>
+                <a:ea typeface="맑은 고딕"/>
+              </a:rPr>
+              <a:t/>
+            </a:r>
+            <a:r>
+              <a:rPr sz="1100" b="0" dirty="0" err="1">
+                <a:solidFill>
+                  <a:srgbClr val="1C1C1E"/>
+                </a:solidFill>
+                <a:latin typeface="맑은 고딕"/>
+                <a:ea typeface="맑은 고딕"/>
+              </a:rPr>
+              <a:t/>
+            </a:r>
+            <a:r>
+              <a:rPr sz="1100" b="0" dirty="0">
+                <a:solidFill>
+                  <a:srgbClr val="1C1C1E"/>
+                </a:solidFill>
+                <a:latin typeface="맑은 고딕"/>
+                <a:ea typeface="맑은 고딕"/>
+              </a:rPr>
+              <a:t/>
+            </a:r>
+            <a:r>
+              <a:rPr sz="1100" b="0" dirty="0" err="1">
+                <a:solidFill>
+                  <a:srgbClr val="1C1C1E"/>
+                </a:solidFill>
+                <a:latin typeface="맑은 고딕"/>
+                <a:ea typeface="맑은 고딕"/>
+              </a:rPr>
+              <a:t/>
+            </a:r>
+            <a:endParaRPr sz="1100" b="0" dirty="0">
+              <a:solidFill>
+                <a:srgbClr val="1C1C1E"/>
+              </a:solidFill>
+              <a:latin typeface="맑은 고딕"/>
+              <a:ea typeface="맑은 고딕"/>
+            </a:endParaRPr>
           </a:p>
           <a:p>
             <a:pPr marL="160020" indent="-160020">
@@ -15006,14 +17570,284 @@
               </a:spcAft>
             </a:pPr>
             <a:r>
-              <a:rPr sz="1100" b="0">
-                <a:solidFill>
-                  <a:srgbClr val="1C1C1E"/>
-                </a:solidFill>
-                <a:latin typeface="맑은 고딕"/>
-                <a:ea typeface="맑은 고딕"/>
-              </a:rPr>
-              <a:t>• 정부는 2년마다 전국을 재어 A·B·C 등급을 매기고, 지정 지역 병원에 분만실 설치비 약 10억 원 + 연 운영비 약 5억 원을 지원 (15년 누적 57개소)</a:t>
+              <a:rPr sz="1100" b="0" dirty="0">
+                <a:solidFill>
+                  <a:srgbClr val="1C1C1E"/>
+                </a:solidFill>
+                <a:latin typeface="맑은 고딕"/>
+                <a:ea typeface="맑은 고딕"/>
+              </a:rPr>
+              <a:t>• 통로도 있고 자격을 갖춘 지역도 있는데 한 해에 열리는 문은 하나다 — 그렇다면 순서를 정하는 규칙이 있어야 한다</a:t>
+            </a:r>
+            <a:r>
+              <a:rPr sz="1100" b="0" dirty="0" err="1">
+                <a:solidFill>
+                  <a:srgbClr val="1C1C1E"/>
+                </a:solidFill>
+                <a:latin typeface="맑은 고딕"/>
+                <a:ea typeface="맑은 고딕"/>
+              </a:rPr>
+              <a:t/>
+            </a:r>
+            <a:r>
+              <a:rPr sz="1100" b="0" dirty="0">
+                <a:solidFill>
+                  <a:srgbClr val="1C1C1E"/>
+                </a:solidFill>
+                <a:latin typeface="맑은 고딕"/>
+                <a:ea typeface="맑은 고딕"/>
+              </a:rPr>
+              <a:t/>
+            </a:r>
+            <a:r>
+              <a:rPr sz="1100" b="0" dirty="0" err="1">
+                <a:solidFill>
+                  <a:srgbClr val="1C1C1E"/>
+                </a:solidFill>
+                <a:latin typeface="맑은 고딕"/>
+                <a:ea typeface="맑은 고딕"/>
+              </a:rPr>
+              <a:t/>
+            </a:r>
+            <a:r>
+              <a:rPr lang="en-US" sz="1100" b="0" dirty="0">
+                <a:solidFill>
+                  <a:srgbClr val="1C1C1E"/>
+                </a:solidFill>
+                <a:latin typeface="맑은 고딕"/>
+                <a:ea typeface="맑은 고딕"/>
+              </a:rPr>
+              <a:t/>
+            </a:r>
+            <a:r>
+              <a:rPr lang="ko-KR" altLang="en-US" sz="1100" b="0" dirty="0">
+                <a:solidFill>
+                  <a:srgbClr val="1C1C1E"/>
+                </a:solidFill>
+                <a:latin typeface="맑은 고딕"/>
+                <a:ea typeface="맑은 고딕"/>
+              </a:rPr>
+              <a:t/>
+            </a:r>
+            <a:r>
+              <a:rPr sz="1100" b="0" dirty="0">
+                <a:solidFill>
+                  <a:srgbClr val="1C1C1E"/>
+                </a:solidFill>
+                <a:latin typeface="맑은 고딕"/>
+                <a:ea typeface="맑은 고딕"/>
+              </a:rPr>
+              <a:t/>
+            </a:r>
+            <a:r>
+              <a:rPr lang="ko-KR" altLang="en-US" sz="1100" b="0" dirty="0">
+                <a:solidFill>
+                  <a:srgbClr val="1C1C1E"/>
+                </a:solidFill>
+                <a:latin typeface="맑은 고딕"/>
+                <a:ea typeface="맑은 고딕"/>
+              </a:rPr>
+              <a:t/>
+            </a:r>
+            <a:r>
+              <a:rPr sz="1100" b="0" dirty="0">
+                <a:solidFill>
+                  <a:srgbClr val="1C1C1E"/>
+                </a:solidFill>
+                <a:latin typeface="맑은 고딕"/>
+                <a:ea typeface="맑은 고딕"/>
+              </a:rPr>
+              <a:t/>
+            </a:r>
+            <a:r>
+              <a:rPr sz="1100" b="0" dirty="0" err="1">
+                <a:solidFill>
+                  <a:srgbClr val="1C1C1E"/>
+                </a:solidFill>
+                <a:latin typeface="맑은 고딕"/>
+                <a:ea typeface="맑은 고딕"/>
+              </a:rPr>
+              <a:t/>
+            </a:r>
+            <a:r>
+              <a:rPr sz="1100" b="0" dirty="0">
+                <a:solidFill>
+                  <a:srgbClr val="1C1C1E"/>
+                </a:solidFill>
+                <a:latin typeface="맑은 고딕"/>
+                <a:ea typeface="맑은 고딕"/>
+              </a:rPr>
+              <a:t/>
+            </a:r>
+            <a:r>
+              <a:rPr sz="1100" b="0" dirty="0" err="1">
+                <a:solidFill>
+                  <a:srgbClr val="1C1C1E"/>
+                </a:solidFill>
+                <a:latin typeface="맑은 고딕"/>
+                <a:ea typeface="맑은 고딕"/>
+              </a:rPr>
+              <a:t/>
+            </a:r>
+            <a:r>
+              <a:rPr sz="1100" b="0" dirty="0">
+                <a:solidFill>
+                  <a:srgbClr val="1C1C1E"/>
+                </a:solidFill>
+                <a:latin typeface="맑은 고딕"/>
+                <a:ea typeface="맑은 고딕"/>
+              </a:rPr>
+              <a:t/>
+            </a:r>
+            <a:r>
+              <a:rPr lang="ko-KR" altLang="en-US" sz="1100" dirty="0">
+                <a:solidFill>
+                  <a:srgbClr val="1C1C1E"/>
+                </a:solidFill>
+                <a:latin typeface="맑은 고딕"/>
+                <a:ea typeface="맑은 고딕"/>
+              </a:rPr>
+              <a:t/>
+            </a:r>
+            <a:r>
+              <a:rPr lang="ko-KR" altLang="en-US" sz="1100" b="0" dirty="0">
+                <a:solidFill>
+                  <a:srgbClr val="1C1C1E"/>
+                </a:solidFill>
+                <a:latin typeface="맑은 고딕"/>
+                <a:ea typeface="맑은 고딕"/>
+              </a:rPr>
+              <a:t/>
+            </a:r>
+            <a:r>
+              <a:rPr sz="1100" b="0" dirty="0">
+                <a:solidFill>
+                  <a:srgbClr val="1C1C1E"/>
+                </a:solidFill>
+                <a:latin typeface="맑은 고딕"/>
+                <a:ea typeface="맑은 고딕"/>
+              </a:rPr>
+              <a:t/>
+            </a:r>
+            <a:r>
+              <a:rPr sz="1100" b="0" dirty="0" err="1">
+                <a:solidFill>
+                  <a:srgbClr val="1C1C1E"/>
+                </a:solidFill>
+                <a:latin typeface="맑은 고딕"/>
+                <a:ea typeface="맑은 고딕"/>
+              </a:rPr>
+              <a:t/>
+            </a:r>
+            <a:r>
+              <a:rPr sz="1100" b="0" dirty="0">
+                <a:solidFill>
+                  <a:srgbClr val="1C1C1E"/>
+                </a:solidFill>
+                <a:latin typeface="맑은 고딕"/>
+                <a:ea typeface="맑은 고딕"/>
+              </a:rPr>
+              <a:t/>
+            </a:r>
+            <a:r>
+              <a:rPr sz="1100" b="0" dirty="0" err="1">
+                <a:solidFill>
+                  <a:srgbClr val="1C1C1E"/>
+                </a:solidFill>
+                <a:latin typeface="맑은 고딕"/>
+                <a:ea typeface="맑은 고딕"/>
+              </a:rPr>
+              <a:t/>
+            </a:r>
+            <a:r>
+              <a:rPr sz="1100" b="0" dirty="0">
+                <a:solidFill>
+                  <a:srgbClr val="1C1C1E"/>
+                </a:solidFill>
+                <a:latin typeface="맑은 고딕"/>
+                <a:ea typeface="맑은 고딕"/>
+              </a:rPr>
+              <a:t/>
+            </a:r>
+            <a:r>
+              <a:rPr sz="1100" b="0" dirty="0" err="1">
+                <a:solidFill>
+                  <a:srgbClr val="1C1C1E"/>
+                </a:solidFill>
+                <a:latin typeface="맑은 고딕"/>
+                <a:ea typeface="맑은 고딕"/>
+              </a:rPr>
+              <a:t/>
+            </a:r>
+            <a:r>
+              <a:rPr sz="1100" b="0" dirty="0">
+                <a:solidFill>
+                  <a:srgbClr val="1C1C1E"/>
+                </a:solidFill>
+                <a:latin typeface="맑은 고딕"/>
+                <a:ea typeface="맑은 고딕"/>
+              </a:rPr>
+              <a:t/>
+            </a:r>
+            <a:r>
+              <a:rPr sz="1100" b="0" dirty="0" err="1">
+                <a:solidFill>
+                  <a:srgbClr val="1C1C1E"/>
+                </a:solidFill>
+                <a:latin typeface="맑은 고딕"/>
+                <a:ea typeface="맑은 고딕"/>
+              </a:rPr>
+              <a:t/>
+            </a:r>
+            <a:r>
+              <a:rPr sz="1100" b="0" dirty="0">
+                <a:solidFill>
+                  <a:srgbClr val="1C1C1E"/>
+                </a:solidFill>
+                <a:latin typeface="맑은 고딕"/>
+                <a:ea typeface="맑은 고딕"/>
+              </a:rPr>
+              <a:t/>
+            </a:r>
+            <a:r>
+              <a:rPr sz="1100" b="0" dirty="0" err="1">
+                <a:solidFill>
+                  <a:srgbClr val="1C1C1E"/>
+                </a:solidFill>
+                <a:latin typeface="맑은 고딕"/>
+                <a:ea typeface="맑은 고딕"/>
+              </a:rPr>
+              <a:t/>
+            </a:r>
+            <a:r>
+              <a:rPr sz="1100" b="0" dirty="0">
+                <a:solidFill>
+                  <a:srgbClr val="1C1C1E"/>
+                </a:solidFill>
+                <a:latin typeface="맑은 고딕"/>
+                <a:ea typeface="맑은 고딕"/>
+              </a:rPr>
+              <a:t/>
+            </a:r>
+            <a:r>
+              <a:rPr sz="1100" b="0" dirty="0" err="1">
+                <a:solidFill>
+                  <a:srgbClr val="1C1C1E"/>
+                </a:solidFill>
+                <a:latin typeface="맑은 고딕"/>
+                <a:ea typeface="맑은 고딕"/>
+              </a:rPr>
+              <a:t/>
+            </a:r>
+            <a:r>
+              <a:rPr sz="1100" b="0" dirty="0">
+                <a:solidFill>
+                  <a:srgbClr val="1C1C1E"/>
+                </a:solidFill>
+                <a:latin typeface="맑은 고딕"/>
+                <a:ea typeface="맑은 고딕"/>
+              </a:rPr>
+              <a:t/>
             </a:r>
           </a:p>
         </p:txBody>
@@ -15027,7 +17861,7 @@
         <p:spPr>
           <a:xfrm>
             <a:off x="502920" y="5230368"/>
-            <a:ext cx="11247120" cy="1005840"/>
+            <a:ext cx="11247120" cy="331629"/>
           </a:xfrm>
           <a:prstGeom prst="rect">
             <a:avLst/>
@@ -15049,35 +17883,272 @@
               </a:spcAft>
             </a:pPr>
             <a:r>
-              <a:rPr sz="1500" b="1">
-                <a:solidFill>
-                  <a:srgbClr val="1C1C1E"/>
-                </a:solidFill>
-                <a:latin typeface="맑은 고딕"/>
-                <a:ea typeface="맑은 고딕"/>
-              </a:rPr>
-              <a:t>자원 부족은 여전히 문제다. 다만 그것과 별개로, 있는 자원이 체계적으로 배분되지 않는 문제가 함께 있다.</a:t>
-            </a:r>
-          </a:p>
-          <a:p>
-            <a:pPr>
-              <a:lnSpc>
-                <a:spcPct val="114000"/>
-              </a:lnSpc>
-              <a:spcAft>
-                <a:spcPts val="0"/>
-              </a:spcAft>
-            </a:pPr>
-            <a:r>
-              <a:rPr sz="1500" b="1">
+              <a:rPr sz="1500" b="1" dirty="0">
+                <a:solidFill>
+                  <a:srgbClr val="1C1C1E"/>
+                </a:solidFill>
+                <a:latin typeface="맑은 고딕"/>
+                <a:ea typeface="맑은 고딕"/>
+              </a:rPr>
+              <a:t>자원 부족은 여전히 문제다. 다만 그와 별개로, 있는 자원이 체계적으로 배분되지 않는 문제가 함께 있다.</a:t>
+            </a:r>
+            <a:r>
+              <a:rPr lang="ko-KR" altLang="en-US" sz="1500" b="1" dirty="0">
+                <a:solidFill>
+                  <a:srgbClr val="1C1C1E"/>
+                </a:solidFill>
+                <a:latin typeface="맑은 고딕"/>
+                <a:ea typeface="맑은 고딕"/>
+              </a:rPr>
+              <a:t/>
+            </a:r>
+            <a:r>
+              <a:rPr sz="1500" b="1" dirty="0" err="1">
+                <a:solidFill>
+                  <a:srgbClr val="1C1C1E"/>
+                </a:solidFill>
+                <a:latin typeface="맑은 고딕"/>
+                <a:ea typeface="맑은 고딕"/>
+              </a:rPr>
+              <a:t/>
+            </a:r>
+            <a:r>
+              <a:rPr sz="1500" b="1" dirty="0">
+                <a:solidFill>
+                  <a:srgbClr val="1C1C1E"/>
+                </a:solidFill>
+                <a:latin typeface="맑은 고딕"/>
+                <a:ea typeface="맑은 고딕"/>
+              </a:rPr>
+              <a:t/>
+            </a:r>
+            <a:r>
+              <a:rPr sz="1500" b="1" dirty="0" err="1">
+                <a:solidFill>
+                  <a:srgbClr val="1C1C1E"/>
+                </a:solidFill>
+                <a:latin typeface="맑은 고딕"/>
+                <a:ea typeface="맑은 고딕"/>
+              </a:rPr>
+              <a:t/>
+            </a:r>
+            <a:r>
+              <a:rPr sz="1500" b="1" dirty="0">
+                <a:solidFill>
+                  <a:srgbClr val="1C1C1E"/>
+                </a:solidFill>
+                <a:latin typeface="맑은 고딕"/>
+                <a:ea typeface="맑은 고딕"/>
+              </a:rPr>
+              <a:t/>
+            </a:r>
+            <a:r>
+              <a:rPr lang="ko-KR" altLang="en-US" sz="1500" b="1" dirty="0">
+                <a:solidFill>
+                  <a:srgbClr val="1C1C1E"/>
+                </a:solidFill>
+                <a:latin typeface="맑은 고딕"/>
+                <a:ea typeface="맑은 고딕"/>
+              </a:rPr>
+              <a:t/>
+            </a:r>
+            <a:r>
+              <a:rPr lang="en-US" altLang="ko-KR" sz="1500" b="1" dirty="0">
+                <a:solidFill>
+                  <a:srgbClr val="1C1C1E"/>
+                </a:solidFill>
+                <a:latin typeface="맑은 고딕"/>
+                <a:ea typeface="맑은 고딕"/>
+              </a:rPr>
+              <a:t/>
+            </a:r>
+            <a:r>
+              <a:rPr sz="1500" b="1" dirty="0">
                 <a:solidFill>
                   <a:srgbClr val="000000"/>
                 </a:solidFill>
                 <a:latin typeface="맑은 고딕"/>
                 <a:ea typeface="맑은 고딕"/>
               </a:rPr>
-              <a:t>"지금 있는 것은 체계적으로, 필요한 곳으로 배분되고 있는가" — 이것이 본 연구의 질문이다.</a:t>
-            </a:r>
+              <a:t/>
+            </a:r>
+            <a:r>
+              <a:rPr lang="ko-KR" altLang="en-US" sz="1500" b="1" dirty="0">
+                <a:solidFill>
+                  <a:srgbClr val="000000"/>
+                </a:solidFill>
+                <a:latin typeface="맑은 고딕"/>
+                <a:ea typeface="맑은 고딕"/>
+              </a:rPr>
+              <a:t/>
+            </a:r>
+            <a:r>
+              <a:rPr sz="1500" b="1" dirty="0" err="1">
+                <a:solidFill>
+                  <a:srgbClr val="000000"/>
+                </a:solidFill>
+                <a:latin typeface="맑은 고딕"/>
+                <a:ea typeface="맑은 고딕"/>
+              </a:rPr>
+              <a:t/>
+            </a:r>
+            <a:r>
+              <a:rPr sz="1500" b="1" dirty="0">
+                <a:solidFill>
+                  <a:srgbClr val="000000"/>
+                </a:solidFill>
+                <a:latin typeface="맑은 고딕"/>
+                <a:ea typeface="맑은 고딕"/>
+              </a:rPr>
+              <a:t/>
+            </a:r>
+            <a:r>
+              <a:rPr sz="1500" b="1" dirty="0" err="1">
+                <a:solidFill>
+                  <a:srgbClr val="000000"/>
+                </a:solidFill>
+                <a:latin typeface="맑은 고딕"/>
+                <a:ea typeface="맑은 고딕"/>
+              </a:rPr>
+              <a:t/>
+            </a:r>
+            <a:r>
+              <a:rPr sz="1500" b="1" dirty="0">
+                <a:solidFill>
+                  <a:srgbClr val="000000"/>
+                </a:solidFill>
+                <a:latin typeface="맑은 고딕"/>
+                <a:ea typeface="맑은 고딕"/>
+              </a:rPr>
+              <a:t/>
+            </a:r>
+            <a:r>
+              <a:rPr sz="1500" b="1" dirty="0" err="1">
+                <a:solidFill>
+                  <a:srgbClr val="000000"/>
+                </a:solidFill>
+                <a:latin typeface="맑은 고딕"/>
+                <a:ea typeface="맑은 고딕"/>
+              </a:rPr>
+              <a:t/>
+            </a:r>
+            <a:r>
+              <a:rPr sz="1500" b="1" dirty="0">
+                <a:solidFill>
+                  <a:srgbClr val="000000"/>
+                </a:solidFill>
+                <a:latin typeface="맑은 고딕"/>
+                <a:ea typeface="맑은 고딕"/>
+              </a:rPr>
+              <a:t/>
+            </a:r>
+            <a:r>
+              <a:rPr sz="1500" b="1" dirty="0" err="1">
+                <a:solidFill>
+                  <a:srgbClr val="000000"/>
+                </a:solidFill>
+                <a:latin typeface="맑은 고딕"/>
+                <a:ea typeface="맑은 고딕"/>
+              </a:rPr>
+              <a:t/>
+            </a:r>
+            <a:r>
+              <a:rPr sz="1500" b="1" dirty="0">
+                <a:solidFill>
+                  <a:srgbClr val="000000"/>
+                </a:solidFill>
+                <a:latin typeface="맑은 고딕"/>
+                <a:ea typeface="맑은 고딕"/>
+              </a:rPr>
+              <a:t/>
+            </a:r>
+            <a:r>
+              <a:rPr sz="1500" b="1" dirty="0" err="1">
+                <a:solidFill>
+                  <a:srgbClr val="000000"/>
+                </a:solidFill>
+                <a:latin typeface="맑은 고딕"/>
+                <a:ea typeface="맑은 고딕"/>
+              </a:rPr>
+              <a:t/>
+            </a:r>
+            <a:r>
+              <a:rPr sz="1500" b="1" dirty="0">
+                <a:solidFill>
+                  <a:srgbClr val="000000"/>
+                </a:solidFill>
+                <a:latin typeface="맑은 고딕"/>
+                <a:ea typeface="맑은 고딕"/>
+              </a:rPr>
+              <a:t/>
+            </a:r>
+            <a:r>
+              <a:rPr sz="1500" b="1" dirty="0" err="1">
+                <a:solidFill>
+                  <a:srgbClr val="000000"/>
+                </a:solidFill>
+                <a:latin typeface="맑은 고딕"/>
+                <a:ea typeface="맑은 고딕"/>
+              </a:rPr>
+              <a:t/>
+            </a:r>
+            <a:r>
+              <a:rPr sz="1500" b="1" dirty="0">
+                <a:solidFill>
+                  <a:srgbClr val="000000"/>
+                </a:solidFill>
+                <a:latin typeface="맑은 고딕"/>
+                <a:ea typeface="맑은 고딕"/>
+              </a:rPr>
+              <a:t/>
+            </a:r>
+            <a:r>
+              <a:rPr sz="1500" b="1" dirty="0" err="1">
+                <a:solidFill>
+                  <a:srgbClr val="000000"/>
+                </a:solidFill>
+                <a:latin typeface="맑은 고딕"/>
+                <a:ea typeface="맑은 고딕"/>
+              </a:rPr>
+              <a:t/>
+            </a:r>
+            <a:r>
+              <a:rPr sz="1500" b="1" dirty="0">
+                <a:solidFill>
+                  <a:srgbClr val="000000"/>
+                </a:solidFill>
+                <a:latin typeface="맑은 고딕"/>
+                <a:ea typeface="맑은 고딕"/>
+              </a:rPr>
+              <a:t/>
+            </a:r>
+            <a:r>
+              <a:rPr sz="1500" b="1" dirty="0" err="1">
+                <a:solidFill>
+                  <a:srgbClr val="000000"/>
+                </a:solidFill>
+                <a:latin typeface="맑은 고딕"/>
+                <a:ea typeface="맑은 고딕"/>
+              </a:rPr>
+              <a:t/>
+            </a:r>
+            <a:r>
+              <a:rPr sz="1500" b="1" dirty="0">
+                <a:solidFill>
+                  <a:srgbClr val="000000"/>
+                </a:solidFill>
+                <a:latin typeface="맑은 고딕"/>
+                <a:ea typeface="맑은 고딕"/>
+              </a:rPr>
+              <a:t/>
+            </a:r>
+            <a:endParaRPr lang="en-US" sz="1500" b="1" dirty="0">
+              <a:solidFill>
+                <a:srgbClr val="000000"/>
+              </a:solidFill>
+              <a:latin typeface="맑은 고딕"/>
+              <a:ea typeface="맑은 고딕"/>
+            </a:endParaRPr>
           </a:p>
         </p:txBody>
       </p:sp>
@@ -15090,7 +18161,7 @@
 </file>
 
 <file path=ppt/slides/slide4.xml><?xml version="1.0" encoding="utf-8"?>
-<p:sld xmlns:a="http://schemas.openxmlformats.org/drawingml/2006/main" xmlns:p="http://schemas.openxmlformats.org/presentationml/2006/main" xmlns:r="http://schemas.openxmlformats.org/officeDocument/2006/relationships">
+<p:sld xmlns:a="http://schemas.openxmlformats.org/drawingml/2006/main" xmlns:r="http://schemas.openxmlformats.org/officeDocument/2006/relationships" xmlns:p="http://schemas.openxmlformats.org/presentationml/2006/main">
   <p:cSld>
     <p:spTree>
       <p:nvGrpSpPr>
@@ -15098,7 +18169,14 @@
         <p:cNvGrpSpPr/>
         <p:nvPr/>
       </p:nvGrpSpPr>
-      <p:grpSpPr/>
+      <p:grpSpPr>
+        <a:xfrm>
+          <a:off x="0" y="0"/>
+          <a:ext cx="0" cy="0"/>
+          <a:chOff x="0" y="0"/>
+          <a:chExt cx="0" cy="0"/>
+        </a:xfrm>
+      </p:grpSpPr>
       <p:sp>
         <p:nvSpPr>
           <p:cNvPr id="2" name="Rectangle 1"/>
@@ -15140,6 +18218,7 @@
           <a:lstStyle/>
           <a:p>
             <a:pPr algn="ctr"/>
+            <a:endParaRPr/>
           </a:p>
         </p:txBody>
       </p:sp>
@@ -15168,7 +18247,7 @@
                 <a:srgbClr val="73787E"/>
               </a:gs>
             </a:gsLst>
-            <a:lin scaled="0" ang="18900000"/>
+            <a:lin ang="18900000" scaled="0"/>
           </a:gradFill>
           <a:ln>
             <a:noFill/>
@@ -15200,6 +18279,7 @@
           <a:lstStyle/>
           <a:p>
             <a:pPr algn="ctr"/>
+            <a:endParaRPr/>
           </a:p>
         </p:txBody>
       </p:sp>
@@ -15211,8 +18291,8 @@
         </p:nvSpPr>
         <p:spPr>
           <a:xfrm>
-            <a:off x="960120" y="274320"/>
-            <a:ext cx="9692640" cy="685800"/>
+            <a:off x="960120" y="399564"/>
+            <a:ext cx="9692640" cy="435312"/>
           </a:xfrm>
           <a:prstGeom prst="rect">
             <a:avLst/>
@@ -15234,15 +18314,62 @@
               </a:spcAft>
             </a:pPr>
             <a:r>
-              <a:rPr sz="2150" b="1">
-                <a:solidFill>
-                  <a:srgbClr val="1C1C1E"/>
-                </a:solidFill>
-                <a:latin typeface="맑은 고딕"/>
-                <a:ea typeface="맑은 고딕"/>
-              </a:rPr>
-              <a:t>연구 요약 — 네 가지 발견</a:t>
-            </a:r>
+              <a:rPr lang="ko-KR" altLang="en-US" sz="2150" b="1" dirty="0">
+                <a:solidFill>
+                  <a:srgbClr val="1C1C1E"/>
+                </a:solidFill>
+                <a:latin typeface="맑은 고딕"/>
+                <a:ea typeface="맑은 고딕"/>
+              </a:rPr>
+              <a:t>데이터 분석을 통한 </a:t>
+            </a:r>
+            <a:r>
+              <a:rPr sz="2150" b="1" dirty="0">
+                <a:solidFill>
+                  <a:srgbClr val="1C1C1E"/>
+                </a:solidFill>
+                <a:latin typeface="맑은 고딕"/>
+                <a:ea typeface="맑은 고딕"/>
+              </a:rPr>
+              <a:t>네 </a:t>
+            </a:r>
+            <a:r>
+              <a:rPr sz="2150" b="1" dirty="0" err="1">
+                <a:solidFill>
+                  <a:srgbClr val="1C1C1E"/>
+                </a:solidFill>
+                <a:latin typeface="맑은 고딕"/>
+                <a:ea typeface="맑은 고딕"/>
+              </a:rPr>
+              <a:t>가지</a:t>
+            </a:r>
+            <a:r>
+              <a:rPr sz="2150" b="1" dirty="0">
+                <a:solidFill>
+                  <a:srgbClr val="1C1C1E"/>
+                </a:solidFill>
+                <a:latin typeface="맑은 고딕"/>
+                <a:ea typeface="맑은 고딕"/>
+              </a:rPr>
+              <a:t> </a:t>
+            </a:r>
+            <a:r>
+              <a:rPr sz="2150" b="1" dirty="0" err="1">
+                <a:solidFill>
+                  <a:srgbClr val="1C1C1E"/>
+                </a:solidFill>
+                <a:latin typeface="맑은 고딕"/>
+                <a:ea typeface="맑은 고딕"/>
+              </a:rPr>
+              <a:t>발견</a:t>
+            </a:r>
+            <a:endParaRPr sz="2150" b="1" dirty="0">
+              <a:solidFill>
+                <a:srgbClr val="1C1C1E"/>
+              </a:solidFill>
+              <a:latin typeface="맑은 고딕"/>
+              <a:ea typeface="맑은 고딕"/>
+            </a:endParaRPr>
           </a:p>
         </p:txBody>
       </p:sp>
@@ -15269,7 +18396,7 @@
                 <a:srgbClr val="FFFFFF"/>
               </a:gs>
             </a:gsLst>
-            <a:lin scaled="0" ang="0"/>
+            <a:lin ang="0" scaled="0"/>
           </a:gradFill>
           <a:ln>
             <a:noFill/>
@@ -15295,6 +18422,7 @@
           <a:lstStyle/>
           <a:p>
             <a:pPr algn="ctr"/>
+            <a:endParaRPr/>
           </a:p>
         </p:txBody>
       </p:sp>
@@ -15435,6 +18563,7 @@
           <a:lstStyle/>
           <a:p>
             <a:pPr algn="ctr"/>
+            <a:endParaRPr/>
           </a:p>
         </p:txBody>
       </p:sp>
@@ -15447,7 +18576,7 @@
         <p:spPr>
           <a:xfrm>
             <a:off x="685800" y="1362456"/>
-            <a:ext cx="5166359" cy="1664208"/>
+            <a:ext cx="5166359" cy="958660"/>
           </a:xfrm>
           <a:prstGeom prst="rect">
             <a:avLst/>
@@ -15469,15 +18598,82 @@
               </a:spcAft>
             </a:pPr>
             <a:r>
-              <a:rPr sz="1300" b="1">
+              <a:rPr sz="1300" b="1" dirty="0" err="1">
                 <a:solidFill>
                   <a:srgbClr val="33393F"/>
                 </a:solidFill>
                 <a:latin typeface="맑은 고딕"/>
                 <a:ea typeface="맑은 고딕"/>
               </a:rPr>
-              <a:t>발견 1 · 지정은 이동시간만 본다</a:t>
-            </a:r>
+              <a:t>발견</a:t>
+            </a:r>
+            <a:r>
+              <a:rPr sz="1300" b="1" dirty="0">
+                <a:solidFill>
+                  <a:srgbClr val="33393F"/>
+                </a:solidFill>
+                <a:latin typeface="맑은 고딕"/>
+                <a:ea typeface="맑은 고딕"/>
+              </a:rPr>
+              <a:t> 1 · </a:t>
+            </a:r>
+            <a:r>
+              <a:rPr sz="1300" b="1" dirty="0" err="1">
+                <a:solidFill>
+                  <a:srgbClr val="33393F"/>
+                </a:solidFill>
+                <a:latin typeface="맑은 고딕"/>
+                <a:ea typeface="맑은 고딕"/>
+              </a:rPr>
+              <a:t>지정은</a:t>
+            </a:r>
+            <a:r>
+              <a:rPr sz="1300" b="1" dirty="0">
+                <a:solidFill>
+                  <a:srgbClr val="33393F"/>
+                </a:solidFill>
+                <a:latin typeface="맑은 고딕"/>
+                <a:ea typeface="맑은 고딕"/>
+              </a:rPr>
+              <a:t> </a:t>
+            </a:r>
+            <a:r>
+              <a:rPr sz="1300" b="1" dirty="0" err="1">
+                <a:solidFill>
+                  <a:srgbClr val="33393F"/>
+                </a:solidFill>
+                <a:latin typeface="맑은 고딕"/>
+                <a:ea typeface="맑은 고딕"/>
+              </a:rPr>
+              <a:t>이동시간만</a:t>
+            </a:r>
+            <a:r>
+              <a:rPr sz="1300" b="1" dirty="0">
+                <a:solidFill>
+                  <a:srgbClr val="33393F"/>
+                </a:solidFill>
+                <a:latin typeface="맑은 고딕"/>
+                <a:ea typeface="맑은 고딕"/>
+              </a:rPr>
+              <a:t> </a:t>
+            </a:r>
+            <a:r>
+              <a:rPr sz="1300" b="1" dirty="0" err="1">
+                <a:solidFill>
+                  <a:srgbClr val="33393F"/>
+                </a:solidFill>
+                <a:latin typeface="맑은 고딕"/>
+                <a:ea typeface="맑은 고딕"/>
+              </a:rPr>
+              <a:t>본다</a:t>
+            </a:r>
+            <a:endParaRPr sz="1300" b="1" dirty="0">
+              <a:solidFill>
+                <a:srgbClr val="33393F"/>
+              </a:solidFill>
+              <a:latin typeface="맑은 고딕"/>
+              <a:ea typeface="맑은 고딕"/>
+            </a:endParaRPr>
           </a:p>
           <a:p>
             <a:pPr marL="160020" indent="-160020">
@@ -15489,15 +18685,332 @@
               </a:spcAft>
             </a:pPr>
             <a:r>
-              <a:rPr sz="1150" b="0">
-                <a:solidFill>
-                  <a:srgbClr val="1C1C1E"/>
-                </a:solidFill>
-                <a:latin typeface="맑은 고딕"/>
-                <a:ea typeface="맑은 고딕"/>
-              </a:rPr>
-              <a:t>• 공표 판정식(접근성·TRI)이 실제 지정 159건 중 158건(99.4%)을 재현. 공급 변수를 추가해도 판별력(AUC)은 전혀 늘지 않는다</a:t>
-            </a:r>
+              <a:rPr sz="1150" b="0" dirty="0">
+                <a:solidFill>
+                  <a:srgbClr val="1C1C1E"/>
+                </a:solidFill>
+                <a:latin typeface="맑은 고딕"/>
+                <a:ea typeface="맑은 고딕"/>
+              </a:rPr>
+              <a:t>• </a:t>
+            </a:r>
+            <a:r>
+              <a:rPr lang="ko-KR" altLang="en-US" sz="1150" dirty="0">
+                <a:solidFill>
+                  <a:srgbClr val="1C1C1E"/>
+                </a:solidFill>
+                <a:latin typeface="맑은 고딕"/>
+                <a:ea typeface="맑은 고딕"/>
+              </a:rPr>
+              <a:t>의료</a:t>
+            </a:r>
+            <a:r>
+              <a:rPr lang="ko-KR" altLang="en-US" sz="1150" b="0" dirty="0">
+                <a:solidFill>
+                  <a:srgbClr val="1C1C1E"/>
+                </a:solidFill>
+                <a:latin typeface="맑은 고딕"/>
+                <a:ea typeface="맑은 고딕"/>
+              </a:rPr>
+              <a:t> </a:t>
+            </a:r>
+            <a:r>
+              <a:rPr lang="ko-KR" altLang="en-US" sz="1150" dirty="0">
+                <a:solidFill>
+                  <a:srgbClr val="1C1C1E"/>
+                </a:solidFill>
+                <a:latin typeface="맑은 고딕"/>
+                <a:ea typeface="맑은 고딕"/>
+              </a:rPr>
+              <a:t>접근성과 </a:t>
+            </a:r>
+            <a:r>
+              <a:rPr lang="en-US" altLang="ko-KR" sz="1150" dirty="0">
+                <a:solidFill>
+                  <a:srgbClr val="1C1C1E"/>
+                </a:solidFill>
+                <a:latin typeface="맑은 고딕"/>
+                <a:ea typeface="맑은 고딕"/>
+              </a:rPr>
+              <a:t>TRI(</a:t>
+            </a:r>
+            <a:r>
+              <a:rPr lang="ko-KR" altLang="en-US" sz="1150" dirty="0">
+                <a:solidFill>
+                  <a:srgbClr val="1C1C1E"/>
+                </a:solidFill>
+                <a:latin typeface="맑은 고딕"/>
+                <a:ea typeface="맑은 고딕"/>
+              </a:rPr>
+              <a:t>기준시간내 </a:t>
+            </a:r>
+            <a:r>
+              <a:rPr lang="ko-KR" altLang="en-US" sz="1150" dirty="0" err="1">
+                <a:solidFill>
+                  <a:srgbClr val="1C1C1E"/>
+                </a:solidFill>
+                <a:latin typeface="맑은 고딕"/>
+                <a:ea typeface="맑은 고딕"/>
+              </a:rPr>
+              <a:t>의료이용률</a:t>
+            </a:r>
+            <a:r>
+              <a:rPr lang="en-US" altLang="ko-KR" sz="1150" dirty="0">
+                <a:solidFill>
+                  <a:srgbClr val="1C1C1E"/>
+                </a:solidFill>
+                <a:latin typeface="맑은 고딕"/>
+                <a:ea typeface="맑은 고딕"/>
+              </a:rPr>
+              <a:t>) </a:t>
+            </a:r>
+            <a:r>
+              <a:rPr lang="ko-KR" altLang="en-US" sz="1150" dirty="0">
+                <a:solidFill>
+                  <a:srgbClr val="1C1C1E"/>
+                </a:solidFill>
+                <a:latin typeface="맑은 고딕"/>
+                <a:ea typeface="맑은 고딕"/>
+              </a:rPr>
+              <a:t>만 반영하는 </a:t>
+            </a:r>
+            <a:r>
+              <a:rPr sz="1150" b="0" dirty="0" err="1">
+                <a:solidFill>
+                  <a:srgbClr val="1C1C1E"/>
+                </a:solidFill>
+                <a:latin typeface="맑은 고딕"/>
+                <a:ea typeface="맑은 고딕"/>
+              </a:rPr>
+              <a:t>공표</a:t>
+            </a:r>
+            <a:r>
+              <a:rPr sz="1150" b="0" dirty="0">
+                <a:solidFill>
+                  <a:srgbClr val="1C1C1E"/>
+                </a:solidFill>
+                <a:latin typeface="맑은 고딕"/>
+                <a:ea typeface="맑은 고딕"/>
+              </a:rPr>
+              <a:t> </a:t>
+            </a:r>
+            <a:r>
+              <a:rPr sz="1150" b="0" dirty="0" err="1">
+                <a:solidFill>
+                  <a:srgbClr val="1C1C1E"/>
+                </a:solidFill>
+                <a:latin typeface="맑은 고딕"/>
+                <a:ea typeface="맑은 고딕"/>
+              </a:rPr>
+              <a:t>판정식이</a:t>
+            </a:r>
+            <a:r>
+              <a:rPr sz="1150" b="0" dirty="0">
+                <a:solidFill>
+                  <a:srgbClr val="1C1C1E"/>
+                </a:solidFill>
+                <a:latin typeface="맑은 고딕"/>
+                <a:ea typeface="맑은 고딕"/>
+              </a:rPr>
+              <a:t> </a:t>
+            </a:r>
+            <a:r>
+              <a:rPr sz="1150" b="0" dirty="0" err="1">
+                <a:solidFill>
+                  <a:srgbClr val="1C1C1E"/>
+                </a:solidFill>
+                <a:latin typeface="맑은 고딕"/>
+                <a:ea typeface="맑은 고딕"/>
+              </a:rPr>
+              <a:t>실제</a:t>
+            </a:r>
+            <a:r>
+              <a:rPr sz="1150" b="0" dirty="0">
+                <a:solidFill>
+                  <a:srgbClr val="1C1C1E"/>
+                </a:solidFill>
+                <a:latin typeface="맑은 고딕"/>
+                <a:ea typeface="맑은 고딕"/>
+              </a:rPr>
+              <a:t> </a:t>
+            </a:r>
+            <a:r>
+              <a:rPr sz="1150" b="0" dirty="0" err="1">
+                <a:solidFill>
+                  <a:srgbClr val="1C1C1E"/>
+                </a:solidFill>
+                <a:latin typeface="맑은 고딕"/>
+                <a:ea typeface="맑은 고딕"/>
+              </a:rPr>
+              <a:t>지정</a:t>
+            </a:r>
+            <a:r>
+              <a:rPr sz="1150" b="0" dirty="0">
+                <a:solidFill>
+                  <a:srgbClr val="1C1C1E"/>
+                </a:solidFill>
+                <a:latin typeface="맑은 고딕"/>
+                <a:ea typeface="맑은 고딕"/>
+              </a:rPr>
+              <a:t> 159건 중 158건(99.4%)을 </a:t>
+            </a:r>
+            <a:r>
+              <a:rPr sz="1150" b="0" dirty="0" err="1">
+                <a:solidFill>
+                  <a:srgbClr val="1C1C1E"/>
+                </a:solidFill>
+                <a:latin typeface="맑은 고딕"/>
+                <a:ea typeface="맑은 고딕"/>
+              </a:rPr>
+              <a:t>재현</a:t>
+            </a:r>
+            <a:r>
+              <a:rPr sz="1150" b="0" dirty="0">
+                <a:solidFill>
+                  <a:srgbClr val="1C1C1E"/>
+                </a:solidFill>
+                <a:latin typeface="맑은 고딕"/>
+                <a:ea typeface="맑은 고딕"/>
+              </a:rPr>
+              <a:t>. </a:t>
+            </a:r>
+            <a:r>
+              <a:rPr sz="1150" b="0" dirty="0" err="1">
+                <a:solidFill>
+                  <a:srgbClr val="1C1C1E"/>
+                </a:solidFill>
+                <a:latin typeface="맑은 고딕"/>
+                <a:ea typeface="맑은 고딕"/>
+              </a:rPr>
+              <a:t>공급</a:t>
+            </a:r>
+            <a:r>
+              <a:rPr sz="1150" b="0" dirty="0">
+                <a:solidFill>
+                  <a:srgbClr val="1C1C1E"/>
+                </a:solidFill>
+                <a:latin typeface="맑은 고딕"/>
+                <a:ea typeface="맑은 고딕"/>
+              </a:rPr>
+              <a:t> </a:t>
+            </a:r>
+            <a:r>
+              <a:rPr sz="1150" b="0" dirty="0" err="1">
+                <a:solidFill>
+                  <a:srgbClr val="1C1C1E"/>
+                </a:solidFill>
+                <a:latin typeface="맑은 고딕"/>
+                <a:ea typeface="맑은 고딕"/>
+              </a:rPr>
+              <a:t>변수를</a:t>
+            </a:r>
+            <a:r>
+              <a:rPr sz="1150" b="0" dirty="0">
+                <a:solidFill>
+                  <a:srgbClr val="1C1C1E"/>
+                </a:solidFill>
+                <a:latin typeface="맑은 고딕"/>
+                <a:ea typeface="맑은 고딕"/>
+              </a:rPr>
+              <a:t> </a:t>
+            </a:r>
+            <a:r>
+              <a:rPr sz="1150" b="0" dirty="0" err="1">
+                <a:solidFill>
+                  <a:srgbClr val="1C1C1E"/>
+                </a:solidFill>
+                <a:latin typeface="맑은 고딕"/>
+                <a:ea typeface="맑은 고딕"/>
+              </a:rPr>
+              <a:t>추가해도</a:t>
+            </a:r>
+            <a:r>
+              <a:rPr sz="1150" b="0" dirty="0">
+                <a:solidFill>
+                  <a:srgbClr val="1C1C1E"/>
+                </a:solidFill>
+                <a:latin typeface="맑은 고딕"/>
+                <a:ea typeface="맑은 고딕"/>
+              </a:rPr>
+              <a:t> </a:t>
+            </a:r>
+            <a:r>
+              <a:rPr sz="1150" b="0" dirty="0" err="1">
+                <a:solidFill>
+                  <a:srgbClr val="1C1C1E"/>
+                </a:solidFill>
+                <a:latin typeface="맑은 고딕"/>
+                <a:ea typeface="맑은 고딕"/>
+              </a:rPr>
+              <a:t>판별력</a:t>
+            </a:r>
+            <a:r>
+              <a:rPr sz="1150" b="0" dirty="0">
+                <a:solidFill>
+                  <a:srgbClr val="1C1C1E"/>
+                </a:solidFill>
+                <a:latin typeface="맑은 고딕"/>
+                <a:ea typeface="맑은 고딕"/>
+              </a:rPr>
+              <a:t>(AUC)은 </a:t>
+            </a:r>
+            <a:r>
+              <a:rPr sz="1150" b="0" dirty="0" err="1">
+                <a:solidFill>
+                  <a:srgbClr val="1C1C1E"/>
+                </a:solidFill>
+                <a:latin typeface="맑은 고딕"/>
+                <a:ea typeface="맑은 고딕"/>
+              </a:rPr>
+              <a:t>전혀</a:t>
+            </a:r>
+            <a:r>
+              <a:rPr sz="1150" b="0" dirty="0">
+                <a:solidFill>
+                  <a:srgbClr val="1C1C1E"/>
+                </a:solidFill>
+                <a:latin typeface="맑은 고딕"/>
+                <a:ea typeface="맑은 고딕"/>
+              </a:rPr>
+              <a:t> </a:t>
+            </a:r>
+            <a:r>
+              <a:rPr sz="1150" b="0" dirty="0" err="1">
+                <a:solidFill>
+                  <a:srgbClr val="1C1C1E"/>
+                </a:solidFill>
+                <a:latin typeface="맑은 고딕"/>
+                <a:ea typeface="맑은 고딕"/>
+              </a:rPr>
+              <a:t>늘지</a:t>
+            </a:r>
+            <a:r>
+              <a:rPr sz="1150" b="0" dirty="0">
+                <a:solidFill>
+                  <a:srgbClr val="1C1C1E"/>
+                </a:solidFill>
+                <a:latin typeface="맑은 고딕"/>
+                <a:ea typeface="맑은 고딕"/>
+              </a:rPr>
+              <a:t> </a:t>
+            </a:r>
+            <a:r>
+              <a:rPr sz="1150" b="0" dirty="0" err="1">
+                <a:solidFill>
+                  <a:srgbClr val="1C1C1E"/>
+                </a:solidFill>
+                <a:latin typeface="맑은 고딕"/>
+                <a:ea typeface="맑은 고딕"/>
+              </a:rPr>
+              <a:t>않는다</a:t>
+            </a:r>
+            <a:endParaRPr sz="1150" b="0" dirty="0">
+              <a:solidFill>
+                <a:srgbClr val="1C1C1E"/>
+              </a:solidFill>
+              <a:latin typeface="맑은 고딕"/>
+              <a:ea typeface="맑은 고딕"/>
+            </a:endParaRPr>
           </a:p>
         </p:txBody>
       </p:sp>
@@ -15552,6 +19065,7 @@
           <a:lstStyle/>
           <a:p>
             <a:pPr algn="ctr"/>
+            <a:endParaRPr/>
           </a:p>
         </p:txBody>
       </p:sp>
@@ -15564,7 +19078,7 @@
         <p:spPr>
           <a:xfrm>
             <a:off x="6446520" y="1362456"/>
-            <a:ext cx="5166359" cy="1664208"/>
+            <a:ext cx="5166359" cy="958660"/>
           </a:xfrm>
           <a:prstGeom prst="rect">
             <a:avLst/>
@@ -15586,15 +19100,112 @@
               </a:spcAft>
             </a:pPr>
             <a:r>
-              <a:rPr sz="1300" b="1">
+              <a:rPr sz="1300" b="1" dirty="0" err="1">
                 <a:solidFill>
                   <a:srgbClr val="000000"/>
                 </a:solidFill>
                 <a:latin typeface="맑은 고딕"/>
                 <a:ea typeface="맑은 고딕"/>
               </a:rPr>
-              <a:t>발견 2 · 공급 공백형 사각지대 실재</a:t>
-            </a:r>
+              <a:t>발견</a:t>
+            </a:r>
+            <a:r>
+              <a:rPr sz="1300" b="1" dirty="0">
+                <a:solidFill>
+                  <a:srgbClr val="000000"/>
+                </a:solidFill>
+                <a:latin typeface="맑은 고딕"/>
+                <a:ea typeface="맑은 고딕"/>
+              </a:rPr>
+              <a:t> 2 · </a:t>
+            </a:r>
+            <a:r>
+              <a:rPr sz="1300" b="1" dirty="0" err="1">
+                <a:solidFill>
+                  <a:srgbClr val="000000"/>
+                </a:solidFill>
+                <a:latin typeface="맑은 고딕"/>
+                <a:ea typeface="맑은 고딕"/>
+              </a:rPr>
+              <a:t>공급</a:t>
+            </a:r>
+            <a:r>
+              <a:rPr sz="1300" b="1" dirty="0">
+                <a:solidFill>
+                  <a:srgbClr val="000000"/>
+                </a:solidFill>
+                <a:latin typeface="맑은 고딕"/>
+                <a:ea typeface="맑은 고딕"/>
+              </a:rPr>
+              <a:t> </a:t>
+            </a:r>
+            <a:r>
+              <a:rPr sz="1300" b="1" dirty="0" err="1">
+                <a:solidFill>
+                  <a:srgbClr val="000000"/>
+                </a:solidFill>
+                <a:latin typeface="맑은 고딕"/>
+                <a:ea typeface="맑은 고딕"/>
+              </a:rPr>
+              <a:t>공백</a:t>
+            </a:r>
+            <a:r>
+              <a:rPr lang="ko-KR" altLang="en-US" sz="1300" b="1" dirty="0">
+                <a:solidFill>
+                  <a:srgbClr val="000000"/>
+                </a:solidFill>
+                <a:latin typeface="맑은 고딕"/>
+                <a:ea typeface="맑은 고딕"/>
+              </a:rPr>
+              <a:t>이 있는</a:t>
+            </a:r>
+            <a:r>
+              <a:rPr sz="1300" b="1" dirty="0">
+                <a:solidFill>
+                  <a:srgbClr val="000000"/>
+                </a:solidFill>
+                <a:latin typeface="맑은 고딕"/>
+                <a:ea typeface="맑은 고딕"/>
+              </a:rPr>
+              <a:t> </a:t>
+            </a:r>
+            <a:r>
+              <a:rPr sz="1300" b="1" dirty="0" err="1">
+                <a:solidFill>
+                  <a:srgbClr val="000000"/>
+                </a:solidFill>
+                <a:latin typeface="맑은 고딕"/>
+                <a:ea typeface="맑은 고딕"/>
+              </a:rPr>
+              <a:t>사각지대</a:t>
+            </a:r>
+            <a:r>
+              <a:rPr lang="en-US" sz="1300" b="1" dirty="0">
+                <a:solidFill>
+                  <a:srgbClr val="000000"/>
+                </a:solidFill>
+                <a:latin typeface="맑은 고딕"/>
+                <a:ea typeface="맑은 고딕"/>
+              </a:rPr>
+              <a:t> </a:t>
+            </a:r>
+            <a:r>
+              <a:rPr lang="ko-KR" altLang="en-US" sz="1300" b="1" dirty="0">
+                <a:solidFill>
+                  <a:srgbClr val="000000"/>
+                </a:solidFill>
+                <a:latin typeface="맑은 고딕"/>
+                <a:ea typeface="맑은 고딕"/>
+              </a:rPr>
+              <a:t>실재</a:t>
+            </a:r>
+            <a:endParaRPr sz="1300" b="1" dirty="0">
+              <a:solidFill>
+                <a:srgbClr val="000000"/>
+              </a:solidFill>
+              <a:latin typeface="맑은 고딕"/>
+              <a:ea typeface="맑은 고딕"/>
+            </a:endParaRPr>
           </a:p>
           <a:p>
             <a:pPr marL="160020" indent="-160020">
@@ -15606,15 +19217,412 @@
               </a:spcAft>
             </a:pPr>
             <a:r>
-              <a:rPr sz="1150" b="0">
-                <a:solidFill>
-                  <a:srgbClr val="1C1C1E"/>
-                </a:solidFill>
-                <a:latin typeface="맑은 고딕"/>
-                <a:ea typeface="맑은 고딕"/>
-              </a:rPr>
-              <a:t>• 거리 기준은 통과하지만 관내 공급이 소멸한 지역 — 분만 완전 사각 5곳(등급 체계 밖), 소아과 5개 지역 입원 5,689건 전량(100%) 관외 유출</a:t>
-            </a:r>
+              <a:rPr sz="1150" b="0" dirty="0">
+                <a:solidFill>
+                  <a:srgbClr val="1C1C1E"/>
+                </a:solidFill>
+                <a:latin typeface="맑은 고딕"/>
+                <a:ea typeface="맑은 고딕"/>
+              </a:rPr>
+              <a:t>• </a:t>
+            </a:r>
+            <a:r>
+              <a:rPr sz="1150" b="0" dirty="0" err="1">
+                <a:solidFill>
+                  <a:srgbClr val="1C1C1E"/>
+                </a:solidFill>
+                <a:latin typeface="맑은 고딕"/>
+                <a:ea typeface="맑은 고딕"/>
+              </a:rPr>
+              <a:t>거리</a:t>
+            </a:r>
+            <a:r>
+              <a:rPr sz="1150" b="0" dirty="0">
+                <a:solidFill>
+                  <a:srgbClr val="1C1C1E"/>
+                </a:solidFill>
+                <a:latin typeface="맑은 고딕"/>
+                <a:ea typeface="맑은 고딕"/>
+              </a:rPr>
+              <a:t> </a:t>
+            </a:r>
+            <a:r>
+              <a:rPr sz="1150" b="0" dirty="0" err="1">
+                <a:solidFill>
+                  <a:srgbClr val="1C1C1E"/>
+                </a:solidFill>
+                <a:latin typeface="맑은 고딕"/>
+                <a:ea typeface="맑은 고딕"/>
+              </a:rPr>
+              <a:t>기준은</a:t>
+            </a:r>
+            <a:r>
+              <a:rPr sz="1150" b="0" dirty="0">
+                <a:solidFill>
+                  <a:srgbClr val="1C1C1E"/>
+                </a:solidFill>
+                <a:latin typeface="맑은 고딕"/>
+                <a:ea typeface="맑은 고딕"/>
+              </a:rPr>
+              <a:t> </a:t>
+            </a:r>
+            <a:r>
+              <a:rPr sz="1150" b="0" dirty="0" err="1">
+                <a:solidFill>
+                  <a:srgbClr val="1C1C1E"/>
+                </a:solidFill>
+                <a:latin typeface="맑은 고딕"/>
+                <a:ea typeface="맑은 고딕"/>
+              </a:rPr>
+              <a:t>통과하지만</a:t>
+            </a:r>
+            <a:r>
+              <a:rPr sz="1150" b="0" dirty="0">
+                <a:solidFill>
+                  <a:srgbClr val="1C1C1E"/>
+                </a:solidFill>
+                <a:latin typeface="맑은 고딕"/>
+                <a:ea typeface="맑은 고딕"/>
+              </a:rPr>
+              <a:t> </a:t>
+            </a:r>
+            <a:r>
+              <a:rPr sz="1150" b="0" dirty="0" err="1">
+                <a:solidFill>
+                  <a:srgbClr val="1C1C1E"/>
+                </a:solidFill>
+                <a:latin typeface="맑은 고딕"/>
+                <a:ea typeface="맑은 고딕"/>
+              </a:rPr>
+              <a:t>관내</a:t>
+            </a:r>
+            <a:r>
+              <a:rPr sz="1150" b="0" dirty="0">
+                <a:solidFill>
+                  <a:srgbClr val="1C1C1E"/>
+                </a:solidFill>
+                <a:latin typeface="맑은 고딕"/>
+                <a:ea typeface="맑은 고딕"/>
+              </a:rPr>
+              <a:t> </a:t>
+            </a:r>
+            <a:r>
+              <a:rPr sz="1150" b="0" dirty="0" err="1">
+                <a:solidFill>
+                  <a:srgbClr val="1C1C1E"/>
+                </a:solidFill>
+                <a:latin typeface="맑은 고딕"/>
+                <a:ea typeface="맑은 고딕"/>
+              </a:rPr>
+              <a:t>공급이</a:t>
+            </a:r>
+            <a:r>
+              <a:rPr sz="1150" b="0" dirty="0">
+                <a:solidFill>
+                  <a:srgbClr val="1C1C1E"/>
+                </a:solidFill>
+                <a:latin typeface="맑은 고딕"/>
+                <a:ea typeface="맑은 고딕"/>
+              </a:rPr>
+              <a:t> </a:t>
+            </a:r>
+            <a:r>
+              <a:rPr sz="1150" b="0" dirty="0" err="1">
+                <a:solidFill>
+                  <a:srgbClr val="1C1C1E"/>
+                </a:solidFill>
+                <a:latin typeface="맑은 고딕"/>
+                <a:ea typeface="맑은 고딕"/>
+              </a:rPr>
+              <a:t>소멸한</a:t>
+            </a:r>
+            <a:r>
+              <a:rPr sz="1150" b="0" dirty="0">
+                <a:solidFill>
+                  <a:srgbClr val="1C1C1E"/>
+                </a:solidFill>
+                <a:latin typeface="맑은 고딕"/>
+                <a:ea typeface="맑은 고딕"/>
+              </a:rPr>
+              <a:t> </a:t>
+            </a:r>
+            <a:r>
+              <a:rPr sz="1150" b="0" dirty="0" err="1">
+                <a:solidFill>
+                  <a:srgbClr val="1C1C1E"/>
+                </a:solidFill>
+                <a:latin typeface="맑은 고딕"/>
+                <a:ea typeface="맑은 고딕"/>
+              </a:rPr>
+              <a:t>지역</a:t>
+            </a:r>
+            <a:r>
+              <a:rPr lang="en-US" sz="1150" b="0" dirty="0">
+                <a:solidFill>
+                  <a:srgbClr val="1C1C1E"/>
+                </a:solidFill>
+                <a:latin typeface="맑은 고딕"/>
+                <a:ea typeface="맑은 고딕"/>
+              </a:rPr>
+              <a:t>(</a:t>
+            </a:r>
+            <a:r>
+              <a:rPr lang="ko-KR" altLang="en-US" sz="1150" b="0" dirty="0">
+                <a:solidFill>
+                  <a:srgbClr val="1C1C1E"/>
+                </a:solidFill>
+                <a:latin typeface="맑은 고딕"/>
+                <a:ea typeface="맑은 고딕"/>
+              </a:rPr>
+              <a:t>가까운 의료시설은 존재하나</a:t>
+            </a:r>
+            <a:r>
+              <a:rPr lang="en-US" altLang="ko-KR" sz="1150" b="0" dirty="0">
+                <a:solidFill>
+                  <a:srgbClr val="1C1C1E"/>
+                </a:solidFill>
+                <a:latin typeface="맑은 고딕"/>
+                <a:ea typeface="맑은 고딕"/>
+              </a:rPr>
+              <a:t>, </a:t>
+            </a:r>
+            <a:r>
+              <a:rPr lang="ko-KR" altLang="en-US" sz="1150" b="0" dirty="0">
+                <a:solidFill>
+                  <a:srgbClr val="1C1C1E"/>
+                </a:solidFill>
+                <a:latin typeface="맑은 고딕"/>
+                <a:ea typeface="맑은 고딕"/>
+              </a:rPr>
+              <a:t>정작 해당 지역 사람들은 </a:t>
+            </a:r>
+            <a:r>
+              <a:rPr lang="ko-KR" altLang="en-US" sz="1150" b="0" dirty="0" err="1">
+                <a:solidFill>
+                  <a:srgbClr val="1C1C1E"/>
+                </a:solidFill>
+                <a:latin typeface="맑은 고딕"/>
+                <a:ea typeface="맑은 고딕"/>
+              </a:rPr>
+              <a:t>타지역</a:t>
+            </a:r>
+            <a:r>
+              <a:rPr lang="ko-KR" altLang="en-US" sz="1150" b="0" dirty="0">
+                <a:solidFill>
+                  <a:srgbClr val="1C1C1E"/>
+                </a:solidFill>
+                <a:latin typeface="맑은 고딕"/>
+                <a:ea typeface="맑은 고딕"/>
+              </a:rPr>
+              <a:t> 의료시설을 이용</a:t>
+            </a:r>
+            <a:r>
+              <a:rPr lang="en-US" altLang="ko-KR" sz="1150" b="0" dirty="0">
+                <a:solidFill>
+                  <a:srgbClr val="1C1C1E"/>
+                </a:solidFill>
+                <a:latin typeface="맑은 고딕"/>
+                <a:ea typeface="맑은 고딕"/>
+              </a:rPr>
+              <a:t>)</a:t>
+            </a:r>
+            <a:r>
+              <a:rPr sz="1150" b="0" dirty="0">
+                <a:solidFill>
+                  <a:srgbClr val="1C1C1E"/>
+                </a:solidFill>
+                <a:latin typeface="맑은 고딕"/>
+                <a:ea typeface="맑은 고딕"/>
+              </a:rPr>
+              <a:t> — </a:t>
+            </a:r>
+            <a:r>
+              <a:rPr sz="1150" b="0" dirty="0" err="1">
+                <a:solidFill>
+                  <a:srgbClr val="1C1C1E"/>
+                </a:solidFill>
+                <a:latin typeface="맑은 고딕"/>
+                <a:ea typeface="맑은 고딕"/>
+              </a:rPr>
+              <a:t>분만</a:t>
+            </a:r>
+            <a:r>
+              <a:rPr sz="1150" b="0" dirty="0">
+                <a:solidFill>
+                  <a:srgbClr val="1C1C1E"/>
+                </a:solidFill>
+                <a:latin typeface="맑은 고딕"/>
+                <a:ea typeface="맑은 고딕"/>
+              </a:rPr>
+              <a:t> </a:t>
+            </a:r>
+            <a:r>
+              <a:rPr sz="1150" b="0" dirty="0" err="1">
+                <a:solidFill>
+                  <a:srgbClr val="1C1C1E"/>
+                </a:solidFill>
+                <a:latin typeface="맑은 고딕"/>
+                <a:ea typeface="맑은 고딕"/>
+              </a:rPr>
+              <a:t>완전</a:t>
+            </a:r>
+            <a:r>
+              <a:rPr sz="1150" b="0" dirty="0">
+                <a:solidFill>
+                  <a:srgbClr val="1C1C1E"/>
+                </a:solidFill>
+                <a:latin typeface="맑은 고딕"/>
+                <a:ea typeface="맑은 고딕"/>
+              </a:rPr>
+              <a:t> </a:t>
+            </a:r>
+            <a:r>
+              <a:rPr sz="1150" b="0" dirty="0" err="1">
+                <a:solidFill>
+                  <a:srgbClr val="1C1C1E"/>
+                </a:solidFill>
+                <a:latin typeface="맑은 고딕"/>
+                <a:ea typeface="맑은 고딕"/>
+              </a:rPr>
+              <a:t>사각</a:t>
+            </a:r>
+            <a:r>
+              <a:rPr sz="1150" b="0" dirty="0">
+                <a:solidFill>
+                  <a:srgbClr val="1C1C1E"/>
+                </a:solidFill>
+                <a:latin typeface="맑은 고딕"/>
+                <a:ea typeface="맑은 고딕"/>
+              </a:rPr>
+              <a:t> 5곳</a:t>
+            </a:r>
+            <a:r>
+              <a:rPr lang="en-US" sz="1150" b="0" dirty="0">
+                <a:solidFill>
+                  <a:srgbClr val="1C1C1E"/>
+                </a:solidFill>
+                <a:latin typeface="맑은 고딕"/>
+                <a:ea typeface="맑은 고딕"/>
+              </a:rPr>
+              <a:t>, </a:t>
+            </a:r>
+            <a:r>
+              <a:rPr sz="1150" b="0" dirty="0" err="1">
+                <a:solidFill>
+                  <a:srgbClr val="1C1C1E"/>
+                </a:solidFill>
+                <a:latin typeface="맑은 고딕"/>
+                <a:ea typeface="맑은 고딕"/>
+              </a:rPr>
+              <a:t>소아과</a:t>
+            </a:r>
+            <a:r>
+              <a:rPr sz="1150" b="0" dirty="0">
+                <a:solidFill>
+                  <a:srgbClr val="1C1C1E"/>
+                </a:solidFill>
+                <a:latin typeface="맑은 고딕"/>
+                <a:ea typeface="맑은 고딕"/>
+              </a:rPr>
+              <a:t> 5개 </a:t>
+            </a:r>
+            <a:r>
+              <a:rPr sz="1150" b="0" dirty="0" err="1">
+                <a:solidFill>
+                  <a:srgbClr val="1C1C1E"/>
+                </a:solidFill>
+                <a:latin typeface="맑은 고딕"/>
+                <a:ea typeface="맑은 고딕"/>
+              </a:rPr>
+              <a:t>지역</a:t>
+            </a:r>
+            <a:r>
+              <a:rPr sz="1150" b="0" dirty="0">
+                <a:solidFill>
+                  <a:srgbClr val="1C1C1E"/>
+                </a:solidFill>
+                <a:latin typeface="맑은 고딕"/>
+                <a:ea typeface="맑은 고딕"/>
+              </a:rPr>
+              <a:t> </a:t>
+            </a:r>
+            <a:r>
+              <a:rPr sz="1150" b="0" dirty="0" err="1">
+                <a:solidFill>
+                  <a:srgbClr val="1C1C1E"/>
+                </a:solidFill>
+                <a:latin typeface="맑은 고딕"/>
+                <a:ea typeface="맑은 고딕"/>
+              </a:rPr>
+              <a:t>입원</a:t>
+            </a:r>
+            <a:r>
+              <a:rPr sz="1150" b="0" dirty="0">
+                <a:solidFill>
+                  <a:srgbClr val="1C1C1E"/>
+                </a:solidFill>
+                <a:latin typeface="맑은 고딕"/>
+                <a:ea typeface="맑은 고딕"/>
+              </a:rPr>
+              <a:t> 5,689건 </a:t>
+            </a:r>
+            <a:r>
+              <a:rPr sz="1150" b="0" dirty="0" err="1">
+                <a:solidFill>
+                  <a:srgbClr val="1C1C1E"/>
+                </a:solidFill>
+                <a:latin typeface="맑은 고딕"/>
+                <a:ea typeface="맑은 고딕"/>
+              </a:rPr>
+              <a:t>전량</a:t>
+            </a:r>
+            <a:r>
+              <a:rPr sz="1150" b="0" dirty="0">
+                <a:solidFill>
+                  <a:srgbClr val="1C1C1E"/>
+                </a:solidFill>
+                <a:latin typeface="맑은 고딕"/>
+                <a:ea typeface="맑은 고딕"/>
+              </a:rPr>
+              <a:t>(100%) </a:t>
+            </a:r>
+            <a:r>
+              <a:rPr sz="1150" b="0" dirty="0" err="1">
+                <a:solidFill>
+                  <a:srgbClr val="1C1C1E"/>
+                </a:solidFill>
+                <a:latin typeface="맑은 고딕"/>
+                <a:ea typeface="맑은 고딕"/>
+              </a:rPr>
+              <a:t>관외</a:t>
+            </a:r>
+            <a:r>
+              <a:rPr sz="1150" b="0" dirty="0">
+                <a:solidFill>
+                  <a:srgbClr val="1C1C1E"/>
+                </a:solidFill>
+                <a:latin typeface="맑은 고딕"/>
+                <a:ea typeface="맑은 고딕"/>
+              </a:rPr>
+              <a:t> </a:t>
+            </a:r>
+            <a:r>
+              <a:rPr sz="1150" b="0" dirty="0" err="1">
+                <a:solidFill>
+                  <a:srgbClr val="1C1C1E"/>
+                </a:solidFill>
+                <a:latin typeface="맑은 고딕"/>
+                <a:ea typeface="맑은 고딕"/>
+              </a:rPr>
+              <a:t>유출</a:t>
+            </a:r>
+            <a:endParaRPr sz="1150" b="0" dirty="0">
+              <a:solidFill>
+                <a:srgbClr val="1C1C1E"/>
+              </a:solidFill>
+              <a:latin typeface="맑은 고딕"/>
+              <a:ea typeface="맑은 고딕"/>
+            </a:endParaRPr>
           </a:p>
         </p:txBody>
       </p:sp>
@@ -15669,6 +19677,7 @@
           <a:lstStyle/>
           <a:p>
             <a:pPr algn="ctr"/>
+            <a:endParaRPr/>
           </a:p>
         </p:txBody>
       </p:sp>
@@ -15703,15 +19712,122 @@
               </a:spcAft>
             </a:pPr>
             <a:r>
-              <a:rPr sz="1300" b="1">
+              <a:rPr sz="1300" b="1" dirty="0" err="1">
                 <a:solidFill>
                   <a:srgbClr val="000000"/>
                 </a:solidFill>
                 <a:latin typeface="맑은 고딕"/>
                 <a:ea typeface="맑은 고딕"/>
               </a:rPr>
-              <a:t>발견 3 · 배분 규칙은 데이터 밖에 있다</a:t>
-            </a:r>
+              <a:t>발견</a:t>
+            </a:r>
+            <a:r>
+              <a:rPr sz="1300" b="1" dirty="0">
+                <a:solidFill>
+                  <a:srgbClr val="000000"/>
+                </a:solidFill>
+                <a:latin typeface="맑은 고딕"/>
+                <a:ea typeface="맑은 고딕"/>
+              </a:rPr>
+              <a:t> 3 · </a:t>
+            </a:r>
+            <a:r>
+              <a:rPr sz="1300" b="1" dirty="0" err="1">
+                <a:solidFill>
+                  <a:srgbClr val="000000"/>
+                </a:solidFill>
+                <a:latin typeface="맑은 고딕"/>
+                <a:ea typeface="맑은 고딕"/>
+              </a:rPr>
+              <a:t>배분</a:t>
+            </a:r>
+            <a:r>
+              <a:rPr sz="1300" b="1" dirty="0">
+                <a:solidFill>
+                  <a:srgbClr val="000000"/>
+                </a:solidFill>
+                <a:latin typeface="맑은 고딕"/>
+                <a:ea typeface="맑은 고딕"/>
+              </a:rPr>
+              <a:t> </a:t>
+            </a:r>
+            <a:r>
+              <a:rPr sz="1300" b="1" dirty="0" err="1">
+                <a:solidFill>
+                  <a:srgbClr val="000000"/>
+                </a:solidFill>
+                <a:latin typeface="맑은 고딕"/>
+                <a:ea typeface="맑은 고딕"/>
+              </a:rPr>
+              <a:t>규칙은</a:t>
+            </a:r>
+            <a:r>
+              <a:rPr sz="1300" b="1" dirty="0">
+                <a:solidFill>
+                  <a:srgbClr val="000000"/>
+                </a:solidFill>
+                <a:latin typeface="맑은 고딕"/>
+                <a:ea typeface="맑은 고딕"/>
+              </a:rPr>
+              <a:t> </a:t>
+            </a:r>
+            <a:r>
+              <a:rPr sz="1300" b="1" dirty="0" err="1">
+                <a:solidFill>
+                  <a:srgbClr val="000000"/>
+                </a:solidFill>
+                <a:latin typeface="맑은 고딕"/>
+                <a:ea typeface="맑은 고딕"/>
+              </a:rPr>
+              <a:t>데이터</a:t>
+            </a:r>
+            <a:r>
+              <a:rPr sz="1300" b="1" dirty="0">
+                <a:solidFill>
+                  <a:srgbClr val="000000"/>
+                </a:solidFill>
+                <a:latin typeface="맑은 고딕"/>
+                <a:ea typeface="맑은 고딕"/>
+              </a:rPr>
+              <a:t> </a:t>
+            </a:r>
+            <a:r>
+              <a:rPr sz="1300" b="1" dirty="0" err="1">
+                <a:solidFill>
+                  <a:srgbClr val="000000"/>
+                </a:solidFill>
+                <a:latin typeface="맑은 고딕"/>
+                <a:ea typeface="맑은 고딕"/>
+              </a:rPr>
+              <a:t>밖에</a:t>
+            </a:r>
+            <a:r>
+              <a:rPr sz="1300" b="1" dirty="0">
+                <a:solidFill>
+                  <a:srgbClr val="000000"/>
+                </a:solidFill>
+                <a:latin typeface="맑은 고딕"/>
+                <a:ea typeface="맑은 고딕"/>
+              </a:rPr>
+              <a:t> </a:t>
+            </a:r>
+            <a:r>
+              <a:rPr sz="1300" b="1" dirty="0" err="1">
+                <a:solidFill>
+                  <a:srgbClr val="000000"/>
+                </a:solidFill>
+                <a:latin typeface="맑은 고딕"/>
+                <a:ea typeface="맑은 고딕"/>
+              </a:rPr>
+              <a:t>있다</a:t>
+            </a:r>
+            <a:endParaRPr sz="1300" b="1" dirty="0">
+              <a:solidFill>
+                <a:srgbClr val="000000"/>
+              </a:solidFill>
+              <a:latin typeface="맑은 고딕"/>
+              <a:ea typeface="맑은 고딕"/>
+            </a:endParaRPr>
           </a:p>
           <a:p>
             <a:pPr marL="160020" indent="-160020">
@@ -15723,14 +19839,274 @@
               </a:spcAft>
             </a:pPr>
             <a:r>
-              <a:rPr sz="1150" b="0">
-                <a:solidFill>
-                  <a:srgbClr val="1C1C1E"/>
-                </a:solidFill>
-                <a:latin typeface="맑은 고딕"/>
-                <a:ea typeface="맑은 고딕"/>
-              </a:rPr>
-              <a:t>• 실질 취약지 A·B 53곳 중 21곳만 기지원. A등급 지원 오즈는 B의 4.82배(p=0.021)인데, 그 선정은 공개 지표로 16% 남짓만 설명된다(McFadden R² 0.163)</a:t>
+              <a:rPr sz="1150" b="0" dirty="0">
+                <a:solidFill>
+                  <a:srgbClr val="1C1C1E"/>
+                </a:solidFill>
+                <a:latin typeface="맑은 고딕"/>
+                <a:ea typeface="맑은 고딕"/>
+              </a:rPr>
+              <a:t>• </a:t>
+            </a:r>
+            <a:r>
+              <a:rPr sz="1150" b="0" dirty="0" err="1">
+                <a:solidFill>
+                  <a:srgbClr val="1C1C1E"/>
+                </a:solidFill>
+                <a:latin typeface="맑은 고딕"/>
+                <a:ea typeface="맑은 고딕"/>
+              </a:rPr>
+              <a:t>실질</a:t>
+            </a:r>
+            <a:r>
+              <a:rPr sz="1150" b="0" dirty="0">
+                <a:solidFill>
+                  <a:srgbClr val="1C1C1E"/>
+                </a:solidFill>
+                <a:latin typeface="맑은 고딕"/>
+                <a:ea typeface="맑은 고딕"/>
+              </a:rPr>
+              <a:t> </a:t>
+            </a:r>
+            <a:r>
+              <a:rPr sz="1150" b="0" dirty="0" err="1">
+                <a:solidFill>
+                  <a:srgbClr val="1C1C1E"/>
+                </a:solidFill>
+                <a:latin typeface="맑은 고딕"/>
+                <a:ea typeface="맑은 고딕"/>
+              </a:rPr>
+              <a:t>취약지</a:t>
+            </a:r>
+            <a:r>
+              <a:rPr sz="1150" b="0" dirty="0">
+                <a:solidFill>
+                  <a:srgbClr val="1C1C1E"/>
+                </a:solidFill>
+                <a:latin typeface="맑은 고딕"/>
+                <a:ea typeface="맑은 고딕"/>
+              </a:rPr>
+              <a:t> A·B 53곳 중 21곳만 </a:t>
+            </a:r>
+            <a:r>
+              <a:rPr sz="1150" b="0" dirty="0" err="1">
+                <a:solidFill>
+                  <a:srgbClr val="1C1C1E"/>
+                </a:solidFill>
+                <a:latin typeface="맑은 고딕"/>
+                <a:ea typeface="맑은 고딕"/>
+              </a:rPr>
+              <a:t>기지원</a:t>
+            </a:r>
+            <a:r>
+              <a:rPr sz="1150" b="0" dirty="0">
+                <a:solidFill>
+                  <a:srgbClr val="1C1C1E"/>
+                </a:solidFill>
+                <a:latin typeface="맑은 고딕"/>
+                <a:ea typeface="맑은 고딕"/>
+              </a:rPr>
+              <a:t>. </a:t>
+            </a:r>
+            <a:r>
+              <a:rPr sz="1150" b="0" dirty="0" err="1">
+                <a:solidFill>
+                  <a:srgbClr val="1C1C1E"/>
+                </a:solidFill>
+                <a:latin typeface="맑은 고딕"/>
+                <a:ea typeface="맑은 고딕"/>
+              </a:rPr>
+              <a:t>A등급</a:t>
+            </a:r>
+            <a:r>
+              <a:rPr sz="1150" b="0" dirty="0">
+                <a:solidFill>
+                  <a:srgbClr val="1C1C1E"/>
+                </a:solidFill>
+                <a:latin typeface="맑은 고딕"/>
+                <a:ea typeface="맑은 고딕"/>
+              </a:rPr>
+              <a:t> </a:t>
+            </a:r>
+            <a:r>
+              <a:rPr sz="1150" b="0" dirty="0" err="1">
+                <a:solidFill>
+                  <a:srgbClr val="1C1C1E"/>
+                </a:solidFill>
+                <a:latin typeface="맑은 고딕"/>
+                <a:ea typeface="맑은 고딕"/>
+              </a:rPr>
+              <a:t>지원</a:t>
+            </a:r>
+            <a:r>
+              <a:rPr sz="1150" b="0" dirty="0">
+                <a:solidFill>
+                  <a:srgbClr val="1C1C1E"/>
+                </a:solidFill>
+                <a:latin typeface="맑은 고딕"/>
+                <a:ea typeface="맑은 고딕"/>
+              </a:rPr>
+              <a:t> </a:t>
+            </a:r>
+            <a:r>
+              <a:rPr sz="1150" b="0" dirty="0" err="1">
+                <a:solidFill>
+                  <a:srgbClr val="1C1C1E"/>
+                </a:solidFill>
+                <a:latin typeface="맑은 고딕"/>
+                <a:ea typeface="맑은 고딕"/>
+              </a:rPr>
+              <a:t>오즈는</a:t>
+            </a:r>
+            <a:r>
+              <a:rPr sz="1150" b="0" dirty="0">
+                <a:solidFill>
+                  <a:srgbClr val="1C1C1E"/>
+                </a:solidFill>
+                <a:latin typeface="맑은 고딕"/>
+                <a:ea typeface="맑은 고딕"/>
+              </a:rPr>
+              <a:t> </a:t>
+            </a:r>
+            <a:r>
+              <a:rPr sz="1150" b="0" dirty="0" err="1">
+                <a:solidFill>
+                  <a:srgbClr val="1C1C1E"/>
+                </a:solidFill>
+                <a:latin typeface="맑은 고딕"/>
+                <a:ea typeface="맑은 고딕"/>
+              </a:rPr>
+              <a:t>B의</a:t>
+            </a:r>
+            <a:r>
+              <a:rPr sz="1150" b="0" dirty="0">
+                <a:solidFill>
+                  <a:srgbClr val="1C1C1E"/>
+                </a:solidFill>
+                <a:latin typeface="맑은 고딕"/>
+                <a:ea typeface="맑은 고딕"/>
+              </a:rPr>
+              <a:t> 4.82배(p=0.021)</a:t>
+            </a:r>
+            <a:r>
+              <a:rPr sz="1150" b="0" dirty="0" err="1">
+                <a:solidFill>
+                  <a:srgbClr val="1C1C1E"/>
+                </a:solidFill>
+                <a:latin typeface="맑은 고딕"/>
+                <a:ea typeface="맑은 고딕"/>
+              </a:rPr>
+              <a:t>인데</a:t>
+            </a:r>
+            <a:r>
+              <a:rPr sz="1150" b="0" dirty="0">
+                <a:solidFill>
+                  <a:srgbClr val="1C1C1E"/>
+                </a:solidFill>
+                <a:latin typeface="맑은 고딕"/>
+                <a:ea typeface="맑은 고딕"/>
+              </a:rPr>
+              <a:t>, 그 </a:t>
+            </a:r>
+            <a:r>
+              <a:rPr sz="1150" b="0" dirty="0" err="1">
+                <a:solidFill>
+                  <a:srgbClr val="1C1C1E"/>
+                </a:solidFill>
+                <a:latin typeface="맑은 고딕"/>
+                <a:ea typeface="맑은 고딕"/>
+              </a:rPr>
+              <a:t>선정은</a:t>
+            </a:r>
+            <a:r>
+              <a:rPr sz="1150" b="0" dirty="0">
+                <a:solidFill>
+                  <a:srgbClr val="1C1C1E"/>
+                </a:solidFill>
+                <a:latin typeface="맑은 고딕"/>
+                <a:ea typeface="맑은 고딕"/>
+              </a:rPr>
+              <a:t> </a:t>
+            </a:r>
+            <a:r>
+              <a:rPr sz="1150" b="0" dirty="0" err="1">
+                <a:solidFill>
+                  <a:srgbClr val="1C1C1E"/>
+                </a:solidFill>
+                <a:latin typeface="맑은 고딕"/>
+                <a:ea typeface="맑은 고딕"/>
+              </a:rPr>
+              <a:t>공개</a:t>
+            </a:r>
+            <a:r>
+              <a:rPr sz="1150" b="0" dirty="0">
+                <a:solidFill>
+                  <a:srgbClr val="1C1C1E"/>
+                </a:solidFill>
+                <a:latin typeface="맑은 고딕"/>
+                <a:ea typeface="맑은 고딕"/>
+              </a:rPr>
+              <a:t> </a:t>
+            </a:r>
+            <a:r>
+              <a:rPr sz="1150" b="0" dirty="0" err="1">
+                <a:solidFill>
+                  <a:srgbClr val="1C1C1E"/>
+                </a:solidFill>
+                <a:latin typeface="맑은 고딕"/>
+                <a:ea typeface="맑은 고딕"/>
+              </a:rPr>
+              <a:t>지표로</a:t>
+            </a:r>
+            <a:r>
+              <a:rPr sz="1150" b="0" dirty="0">
+                <a:solidFill>
+                  <a:srgbClr val="1C1C1E"/>
+                </a:solidFill>
+                <a:latin typeface="맑은 고딕"/>
+                <a:ea typeface="맑은 고딕"/>
+              </a:rPr>
+              <a:t> 16% </a:t>
+            </a:r>
+            <a:r>
+              <a:rPr sz="1150" b="0" dirty="0" err="1">
+                <a:solidFill>
+                  <a:srgbClr val="1C1C1E"/>
+                </a:solidFill>
+                <a:latin typeface="맑은 고딕"/>
+                <a:ea typeface="맑은 고딕"/>
+              </a:rPr>
+              <a:t>남짓만</a:t>
+            </a:r>
+            <a:r>
+              <a:rPr sz="1150" b="0" dirty="0">
+                <a:solidFill>
+                  <a:srgbClr val="1C1C1E"/>
+                </a:solidFill>
+                <a:latin typeface="맑은 고딕"/>
+                <a:ea typeface="맑은 고딕"/>
+              </a:rPr>
+              <a:t> </a:t>
+            </a:r>
+            <a:r>
+              <a:rPr sz="1150" b="0" dirty="0" err="1">
+                <a:solidFill>
+                  <a:srgbClr val="1C1C1E"/>
+                </a:solidFill>
+                <a:latin typeface="맑은 고딕"/>
+                <a:ea typeface="맑은 고딕"/>
+              </a:rPr>
+              <a:t>설명된다</a:t>
+            </a:r>
+            <a:r>
+              <a:rPr sz="1150" b="0" dirty="0">
+                <a:solidFill>
+                  <a:srgbClr val="1C1C1E"/>
+                </a:solidFill>
+                <a:latin typeface="맑은 고딕"/>
+                <a:ea typeface="맑은 고딕"/>
+              </a:rPr>
+              <a:t>(McFadden R² 0.163)</a:t>
             </a:r>
           </a:p>
         </p:txBody>
@@ -15786,6 +20162,7 @@
           <a:lstStyle/>
           <a:p>
             <a:pPr algn="ctr"/>
+            <a:endParaRPr/>
           </a:p>
         </p:txBody>
       </p:sp>
@@ -15820,15 +20197,122 @@
               </a:spcAft>
             </a:pPr>
             <a:r>
-              <a:rPr sz="1300" b="1">
+              <a:rPr sz="1300" b="1" dirty="0" err="1">
                 <a:solidFill>
                   <a:srgbClr val="33393F"/>
                 </a:solidFill>
                 <a:latin typeface="맑은 고딕"/>
                 <a:ea typeface="맑은 고딕"/>
               </a:rPr>
-              <a:t>발견 4 · 깊이는 보지만 인원 수는 안 본다</a:t>
-            </a:r>
+              <a:t>발견</a:t>
+            </a:r>
+            <a:r>
+              <a:rPr sz="1300" b="1" dirty="0">
+                <a:solidFill>
+                  <a:srgbClr val="33393F"/>
+                </a:solidFill>
+                <a:latin typeface="맑은 고딕"/>
+                <a:ea typeface="맑은 고딕"/>
+              </a:rPr>
+              <a:t> 4 · </a:t>
+            </a:r>
+            <a:r>
+              <a:rPr sz="1300" b="1" dirty="0" err="1">
+                <a:solidFill>
+                  <a:srgbClr val="33393F"/>
+                </a:solidFill>
+                <a:latin typeface="맑은 고딕"/>
+                <a:ea typeface="맑은 고딕"/>
+              </a:rPr>
+              <a:t>깊이는</a:t>
+            </a:r>
+            <a:r>
+              <a:rPr sz="1300" b="1" dirty="0">
+                <a:solidFill>
+                  <a:srgbClr val="33393F"/>
+                </a:solidFill>
+                <a:latin typeface="맑은 고딕"/>
+                <a:ea typeface="맑은 고딕"/>
+              </a:rPr>
+              <a:t> </a:t>
+            </a:r>
+            <a:r>
+              <a:rPr sz="1300" b="1" dirty="0" err="1">
+                <a:solidFill>
+                  <a:srgbClr val="33393F"/>
+                </a:solidFill>
+                <a:latin typeface="맑은 고딕"/>
+                <a:ea typeface="맑은 고딕"/>
+              </a:rPr>
+              <a:t>보지만</a:t>
+            </a:r>
+            <a:r>
+              <a:rPr sz="1300" b="1" dirty="0">
+                <a:solidFill>
+                  <a:srgbClr val="33393F"/>
+                </a:solidFill>
+                <a:latin typeface="맑은 고딕"/>
+                <a:ea typeface="맑은 고딕"/>
+              </a:rPr>
+              <a:t> </a:t>
+            </a:r>
+            <a:r>
+              <a:rPr sz="1300" b="1" dirty="0" err="1">
+                <a:solidFill>
+                  <a:srgbClr val="33393F"/>
+                </a:solidFill>
+                <a:latin typeface="맑은 고딕"/>
+                <a:ea typeface="맑은 고딕"/>
+              </a:rPr>
+              <a:t>인원</a:t>
+            </a:r>
+            <a:r>
+              <a:rPr sz="1300" b="1" dirty="0">
+                <a:solidFill>
+                  <a:srgbClr val="33393F"/>
+                </a:solidFill>
+                <a:latin typeface="맑은 고딕"/>
+                <a:ea typeface="맑은 고딕"/>
+              </a:rPr>
+              <a:t> </a:t>
+            </a:r>
+            <a:r>
+              <a:rPr sz="1300" b="1" dirty="0" err="1">
+                <a:solidFill>
+                  <a:srgbClr val="33393F"/>
+                </a:solidFill>
+                <a:latin typeface="맑은 고딕"/>
+                <a:ea typeface="맑은 고딕"/>
+              </a:rPr>
+              <a:t>수는</a:t>
+            </a:r>
+            <a:r>
+              <a:rPr sz="1300" b="1" dirty="0">
+                <a:solidFill>
+                  <a:srgbClr val="33393F"/>
+                </a:solidFill>
+                <a:latin typeface="맑은 고딕"/>
+                <a:ea typeface="맑은 고딕"/>
+              </a:rPr>
+              <a:t> 안 </a:t>
+            </a:r>
+            <a:r>
+              <a:rPr sz="1300" b="1" dirty="0" err="1">
+                <a:solidFill>
+                  <a:srgbClr val="33393F"/>
+                </a:solidFill>
+                <a:latin typeface="맑은 고딕"/>
+                <a:ea typeface="맑은 고딕"/>
+              </a:rPr>
+              <a:t>본다</a:t>
+            </a:r>
+            <a:endParaRPr sz="1300" b="1" dirty="0">
+              <a:solidFill>
+                <a:srgbClr val="33393F"/>
+              </a:solidFill>
+              <a:latin typeface="맑은 고딕"/>
+              <a:ea typeface="맑은 고딕"/>
+            </a:endParaRPr>
           </a:p>
           <a:p>
             <a:pPr marL="160020" indent="-160020">
@@ -15840,15 +20324,372 @@
               </a:spcAft>
             </a:pPr>
             <a:r>
-              <a:rPr sz="1150" b="0">
-                <a:solidFill>
-                  <a:srgbClr val="1C1C1E"/>
-                </a:solidFill>
-                <a:latin typeface="맑은 고딕"/>
-                <a:ea typeface="맑은 고딕"/>
-              </a:rPr>
-              <a:t>• 현행 배분은 취약 심도와는 정렬(ρ=+0.381), 영향 인원 규모(부담)와는 무관(ρ=−0.131). 두 관점의 순위 상관은 −0.190 — 축의 선택이 결과를 바꾼다</a:t>
-            </a:r>
+              <a:rPr sz="1150" b="0" dirty="0">
+                <a:solidFill>
+                  <a:srgbClr val="1C1C1E"/>
+                </a:solidFill>
+                <a:latin typeface="맑은 고딕"/>
+                <a:ea typeface="맑은 고딕"/>
+              </a:rPr>
+              <a:t>• </a:t>
+            </a:r>
+            <a:r>
+              <a:rPr sz="1150" b="0" dirty="0" err="1">
+                <a:solidFill>
+                  <a:srgbClr val="1C1C1E"/>
+                </a:solidFill>
+                <a:latin typeface="맑은 고딕"/>
+                <a:ea typeface="맑은 고딕"/>
+              </a:rPr>
+              <a:t>현행</a:t>
+            </a:r>
+            <a:r>
+              <a:rPr sz="1150" b="0" dirty="0">
+                <a:solidFill>
+                  <a:srgbClr val="1C1C1E"/>
+                </a:solidFill>
+                <a:latin typeface="맑은 고딕"/>
+                <a:ea typeface="맑은 고딕"/>
+              </a:rPr>
+              <a:t> </a:t>
+            </a:r>
+            <a:r>
+              <a:rPr sz="1150" b="0" dirty="0" err="1">
+                <a:solidFill>
+                  <a:srgbClr val="1C1C1E"/>
+                </a:solidFill>
+                <a:latin typeface="맑은 고딕"/>
+                <a:ea typeface="맑은 고딕"/>
+              </a:rPr>
+              <a:t>배분은</a:t>
+            </a:r>
+            <a:r>
+              <a:rPr sz="1150" b="0" dirty="0">
+                <a:solidFill>
+                  <a:srgbClr val="1C1C1E"/>
+                </a:solidFill>
+                <a:latin typeface="맑은 고딕"/>
+                <a:ea typeface="맑은 고딕"/>
+              </a:rPr>
+              <a:t> </a:t>
+            </a:r>
+            <a:r>
+              <a:rPr sz="1150" b="0" dirty="0" err="1">
+                <a:solidFill>
+                  <a:srgbClr val="1C1C1E"/>
+                </a:solidFill>
+                <a:latin typeface="맑은 고딕"/>
+                <a:ea typeface="맑은 고딕"/>
+              </a:rPr>
+              <a:t>취약</a:t>
+            </a:r>
+            <a:r>
+              <a:rPr sz="1150" b="0" dirty="0">
+                <a:solidFill>
+                  <a:srgbClr val="1C1C1E"/>
+                </a:solidFill>
+                <a:latin typeface="맑은 고딕"/>
+                <a:ea typeface="맑은 고딕"/>
+              </a:rPr>
+              <a:t> </a:t>
+            </a:r>
+            <a:r>
+              <a:rPr sz="1150" b="0" dirty="0" err="1">
+                <a:solidFill>
+                  <a:srgbClr val="1C1C1E"/>
+                </a:solidFill>
+                <a:latin typeface="맑은 고딕"/>
+                <a:ea typeface="맑은 고딕"/>
+              </a:rPr>
+              <a:t>심도와는</a:t>
+            </a:r>
+            <a:r>
+              <a:rPr sz="1150" b="0" dirty="0">
+                <a:solidFill>
+                  <a:srgbClr val="1C1C1E"/>
+                </a:solidFill>
+                <a:latin typeface="맑은 고딕"/>
+                <a:ea typeface="맑은 고딕"/>
+              </a:rPr>
+              <a:t> </a:t>
+            </a:r>
+            <a:r>
+              <a:rPr sz="1150" b="0" dirty="0" err="1">
+                <a:solidFill>
+                  <a:srgbClr val="1C1C1E"/>
+                </a:solidFill>
+                <a:latin typeface="맑은 고딕"/>
+                <a:ea typeface="맑은 고딕"/>
+              </a:rPr>
+              <a:t>정렬</a:t>
+            </a:r>
+            <a:r>
+              <a:rPr sz="1150" b="0" dirty="0">
+                <a:solidFill>
+                  <a:srgbClr val="1C1C1E"/>
+                </a:solidFill>
+                <a:latin typeface="맑은 고딕"/>
+                <a:ea typeface="맑은 고딕"/>
+              </a:rPr>
+              <a:t>(ρ=+0.381), </a:t>
+            </a:r>
+            <a:r>
+              <a:rPr sz="1150" b="0" dirty="0" err="1">
+                <a:solidFill>
+                  <a:srgbClr val="1C1C1E"/>
+                </a:solidFill>
+                <a:latin typeface="맑은 고딕"/>
+                <a:ea typeface="맑은 고딕"/>
+              </a:rPr>
+              <a:t>영향</a:t>
+            </a:r>
+            <a:r>
+              <a:rPr sz="1150" b="0" dirty="0">
+                <a:solidFill>
+                  <a:srgbClr val="1C1C1E"/>
+                </a:solidFill>
+                <a:latin typeface="맑은 고딕"/>
+                <a:ea typeface="맑은 고딕"/>
+              </a:rPr>
+              <a:t> </a:t>
+            </a:r>
+            <a:r>
+              <a:rPr sz="1150" b="0" dirty="0" err="1">
+                <a:solidFill>
+                  <a:srgbClr val="1C1C1E"/>
+                </a:solidFill>
+                <a:latin typeface="맑은 고딕"/>
+                <a:ea typeface="맑은 고딕"/>
+              </a:rPr>
+              <a:t>인원</a:t>
+            </a:r>
+            <a:r>
+              <a:rPr sz="1150" b="0" dirty="0">
+                <a:solidFill>
+                  <a:srgbClr val="1C1C1E"/>
+                </a:solidFill>
+                <a:latin typeface="맑은 고딕"/>
+                <a:ea typeface="맑은 고딕"/>
+              </a:rPr>
+              <a:t> </a:t>
+            </a:r>
+            <a:r>
+              <a:rPr sz="1150" b="0" dirty="0" err="1">
+                <a:solidFill>
+                  <a:srgbClr val="1C1C1E"/>
+                </a:solidFill>
+                <a:latin typeface="맑은 고딕"/>
+                <a:ea typeface="맑은 고딕"/>
+              </a:rPr>
+              <a:t>규모</a:t>
+            </a:r>
+            <a:r>
+              <a:rPr sz="1150" b="0" dirty="0">
+                <a:solidFill>
+                  <a:srgbClr val="1C1C1E"/>
+                </a:solidFill>
+                <a:latin typeface="맑은 고딕"/>
+                <a:ea typeface="맑은 고딕"/>
+              </a:rPr>
+              <a:t>(</a:t>
+            </a:r>
+            <a:r>
+              <a:rPr sz="1150" b="0" dirty="0" err="1">
+                <a:solidFill>
+                  <a:srgbClr val="1C1C1E"/>
+                </a:solidFill>
+                <a:latin typeface="맑은 고딕"/>
+                <a:ea typeface="맑은 고딕"/>
+              </a:rPr>
+              <a:t>부담</a:t>
+            </a:r>
+            <a:r>
+              <a:rPr sz="1150" b="0" dirty="0">
+                <a:solidFill>
+                  <a:srgbClr val="1C1C1E"/>
+                </a:solidFill>
+                <a:latin typeface="맑은 고딕"/>
+                <a:ea typeface="맑은 고딕"/>
+              </a:rPr>
+              <a:t>)</a:t>
+            </a:r>
+            <a:r>
+              <a:rPr sz="1150" b="0" dirty="0" err="1">
+                <a:solidFill>
+                  <a:srgbClr val="1C1C1E"/>
+                </a:solidFill>
+                <a:latin typeface="맑은 고딕"/>
+                <a:ea typeface="맑은 고딕"/>
+              </a:rPr>
+              <a:t>와는</a:t>
+            </a:r>
+            <a:r>
+              <a:rPr sz="1150" b="0" dirty="0">
+                <a:solidFill>
+                  <a:srgbClr val="1C1C1E"/>
+                </a:solidFill>
+                <a:latin typeface="맑은 고딕"/>
+                <a:ea typeface="맑은 고딕"/>
+              </a:rPr>
+              <a:t> </a:t>
+            </a:r>
+            <a:r>
+              <a:rPr sz="1150" b="0" dirty="0" err="1">
+                <a:solidFill>
+                  <a:srgbClr val="1C1C1E"/>
+                </a:solidFill>
+                <a:latin typeface="맑은 고딕"/>
+                <a:ea typeface="맑은 고딕"/>
+              </a:rPr>
+              <a:t>무관</a:t>
+            </a:r>
+            <a:r>
+              <a:rPr sz="1150" b="0" dirty="0">
+                <a:solidFill>
+                  <a:srgbClr val="1C1C1E"/>
+                </a:solidFill>
+                <a:latin typeface="맑은 고딕"/>
+                <a:ea typeface="맑은 고딕"/>
+              </a:rPr>
+              <a:t>(ρ=−0.131). 두 </a:t>
+            </a:r>
+            <a:r>
+              <a:rPr sz="1150" b="0" dirty="0" err="1">
+                <a:solidFill>
+                  <a:srgbClr val="1C1C1E"/>
+                </a:solidFill>
+                <a:latin typeface="맑은 고딕"/>
+                <a:ea typeface="맑은 고딕"/>
+              </a:rPr>
+              <a:t>관점의</a:t>
+            </a:r>
+            <a:r>
+              <a:rPr sz="1150" b="0" dirty="0">
+                <a:solidFill>
+                  <a:srgbClr val="1C1C1E"/>
+                </a:solidFill>
+                <a:latin typeface="맑은 고딕"/>
+                <a:ea typeface="맑은 고딕"/>
+              </a:rPr>
+              <a:t> </a:t>
+            </a:r>
+            <a:r>
+              <a:rPr sz="1150" b="0" dirty="0" err="1">
+                <a:solidFill>
+                  <a:srgbClr val="1C1C1E"/>
+                </a:solidFill>
+                <a:latin typeface="맑은 고딕"/>
+                <a:ea typeface="맑은 고딕"/>
+              </a:rPr>
+              <a:t>순위</a:t>
+            </a:r>
+            <a:r>
+              <a:rPr sz="1150" b="0" dirty="0">
+                <a:solidFill>
+                  <a:srgbClr val="1C1C1E"/>
+                </a:solidFill>
+                <a:latin typeface="맑은 고딕"/>
+                <a:ea typeface="맑은 고딕"/>
+              </a:rPr>
+              <a:t> </a:t>
+            </a:r>
+            <a:r>
+              <a:rPr sz="1150" b="0" dirty="0" err="1">
+                <a:solidFill>
+                  <a:srgbClr val="1C1C1E"/>
+                </a:solidFill>
+                <a:latin typeface="맑은 고딕"/>
+                <a:ea typeface="맑은 고딕"/>
+              </a:rPr>
+              <a:t>상관은</a:t>
+            </a:r>
+            <a:r>
+              <a:rPr sz="1150" b="0" dirty="0">
+                <a:solidFill>
+                  <a:srgbClr val="1C1C1E"/>
+                </a:solidFill>
+                <a:latin typeface="맑은 고딕"/>
+                <a:ea typeface="맑은 고딕"/>
+              </a:rPr>
+              <a:t> −0.190 — </a:t>
+            </a:r>
+            <a:r>
+              <a:rPr sz="1150" b="0" dirty="0" err="1">
+                <a:solidFill>
+                  <a:srgbClr val="1C1C1E"/>
+                </a:solidFill>
+                <a:latin typeface="맑은 고딕"/>
+                <a:ea typeface="맑은 고딕"/>
+              </a:rPr>
+              <a:t>축의</a:t>
+            </a:r>
+            <a:r>
+              <a:rPr sz="1150" b="0" dirty="0">
+                <a:solidFill>
+                  <a:srgbClr val="1C1C1E"/>
+                </a:solidFill>
+                <a:latin typeface="맑은 고딕"/>
+                <a:ea typeface="맑은 고딕"/>
+              </a:rPr>
+              <a:t> </a:t>
+            </a:r>
+            <a:r>
+              <a:rPr sz="1150" b="0" dirty="0" err="1">
+                <a:solidFill>
+                  <a:srgbClr val="1C1C1E"/>
+                </a:solidFill>
+                <a:latin typeface="맑은 고딕"/>
+                <a:ea typeface="맑은 고딕"/>
+              </a:rPr>
+              <a:t>선택이</a:t>
+            </a:r>
+            <a:r>
+              <a:rPr sz="1150" b="0" dirty="0">
+                <a:solidFill>
+                  <a:srgbClr val="1C1C1E"/>
+                </a:solidFill>
+                <a:latin typeface="맑은 고딕"/>
+                <a:ea typeface="맑은 고딕"/>
+              </a:rPr>
+              <a:t> </a:t>
+            </a:r>
+            <a:r>
+              <a:rPr sz="1150" b="0" dirty="0" err="1">
+                <a:solidFill>
+                  <a:srgbClr val="1C1C1E"/>
+                </a:solidFill>
+                <a:latin typeface="맑은 고딕"/>
+                <a:ea typeface="맑은 고딕"/>
+              </a:rPr>
+              <a:t>결과를</a:t>
+            </a:r>
+            <a:r>
+              <a:rPr sz="1150" b="0" dirty="0">
+                <a:solidFill>
+                  <a:srgbClr val="1C1C1E"/>
+                </a:solidFill>
+                <a:latin typeface="맑은 고딕"/>
+                <a:ea typeface="맑은 고딕"/>
+              </a:rPr>
+              <a:t> </a:t>
+            </a:r>
+            <a:r>
+              <a:rPr sz="1150" b="0" dirty="0" err="1">
+                <a:solidFill>
+                  <a:srgbClr val="1C1C1E"/>
+                </a:solidFill>
+                <a:latin typeface="맑은 고딕"/>
+                <a:ea typeface="맑은 고딕"/>
+              </a:rPr>
+              <a:t>바꾼다</a:t>
+            </a:r>
+            <a:endParaRPr sz="1150" b="0" dirty="0">
+              <a:solidFill>
+                <a:srgbClr val="1C1C1E"/>
+              </a:solidFill>
+              <a:latin typeface="맑은 고딕"/>
+              <a:ea typeface="맑은 고딕"/>
+            </a:endParaRPr>
           </a:p>
         </p:txBody>
       </p:sp>
@@ -15904,7 +20745,7 @@
 </file>
 
 <file path=ppt/slides/slide5.xml><?xml version="1.0" encoding="utf-8"?>
-<p:sld xmlns:a="http://schemas.openxmlformats.org/drawingml/2006/main" xmlns:p="http://schemas.openxmlformats.org/presentationml/2006/main" xmlns:r="http://schemas.openxmlformats.org/officeDocument/2006/relationships">
+<p:sld xmlns:a="http://schemas.openxmlformats.org/drawingml/2006/main" xmlns:r="http://schemas.openxmlformats.org/officeDocument/2006/relationships" xmlns:p="http://schemas.openxmlformats.org/presentationml/2006/main">
   <p:cSld>
     <p:spTree>
       <p:nvGrpSpPr>
@@ -15912,7 +20753,14 @@
         <p:cNvGrpSpPr/>
         <p:nvPr/>
       </p:nvGrpSpPr>
-      <p:grpSpPr/>
+      <p:grpSpPr>
+        <a:xfrm>
+          <a:off x="0" y="0"/>
+          <a:ext cx="0" cy="0"/>
+          <a:chOff x="0" y="0"/>
+          <a:chExt cx="0" cy="0"/>
+        </a:xfrm>
+      </p:grpSpPr>
       <p:sp>
         <p:nvSpPr>
           <p:cNvPr id="2" name="Rectangle 1"/>
@@ -15954,6 +20802,7 @@
           <a:lstStyle/>
           <a:p>
             <a:pPr algn="ctr"/>
+            <a:endParaRPr/>
           </a:p>
         </p:txBody>
       </p:sp>
@@ -15982,7 +20831,7 @@
                 <a:srgbClr val="73787E"/>
               </a:gs>
             </a:gsLst>
-            <a:lin scaled="0" ang="18900000"/>
+            <a:lin ang="18900000" scaled="0"/>
           </a:gradFill>
           <a:ln>
             <a:noFill/>
@@ -16014,6 +20863,7 @@
           <a:lstStyle/>
           <a:p>
             <a:pPr algn="ctr"/>
+            <a:endParaRPr/>
           </a:p>
         </p:txBody>
       </p:sp>
@@ -16083,7 +20933,7 @@
                 <a:srgbClr val="FFFFFF"/>
               </a:gs>
             </a:gsLst>
-            <a:lin scaled="0" ang="0"/>
+            <a:lin ang="0" scaled="0"/>
           </a:gradFill>
           <a:ln>
             <a:noFill/>
@@ -16109,6 +20959,7 @@
           <a:lstStyle/>
           <a:p>
             <a:pPr algn="ctr"/>
+            <a:endParaRPr/>
           </a:p>
         </p:txBody>
       </p:sp>
@@ -16292,6 +21143,7 @@
           <a:lstStyle/>
           <a:p>
             <a:pPr algn="ctr"/>
+            <a:endParaRPr/>
           </a:p>
         </p:txBody>
       </p:sp>
@@ -16472,6 +21324,7 @@
           <a:lstStyle/>
           <a:p>
             <a:pPr algn="ctr"/>
+            <a:endParaRPr/>
           </a:p>
         </p:txBody>
       </p:sp>
@@ -16652,6 +21505,7 @@
           <a:lstStyle/>
           <a:p>
             <a:pPr algn="ctr"/>
+            <a:endParaRPr/>
           </a:p>
         </p:txBody>
       </p:sp>
@@ -16763,7 +21617,7 @@
                 <a:srgbClr val="4A4F55"/>
               </a:gs>
             </a:gsLst>
-            <a:lin scaled="0" ang="14700000"/>
+            <a:lin ang="14700000" scaled="0"/>
           </a:gradFill>
           <a:ln>
             <a:noFill/>
@@ -16795,6 +21649,7 @@
           <a:lstStyle/>
           <a:p>
             <a:pPr algn="ctr"/>
+            <a:endParaRPr/>
           </a:p>
         </p:txBody>
       </p:sp>
@@ -16892,6 +21747,7 @@
           <a:lstStyle/>
           <a:p>
             <a:pPr algn="ctr"/>
+            <a:endParaRPr/>
           </a:p>
         </p:txBody>
       </p:sp>
@@ -16989,6 +21845,7 @@
           <a:lstStyle/>
           <a:p>
             <a:pPr algn="ctr"/>
+            <a:endParaRPr/>
           </a:p>
         </p:txBody>
       </p:sp>
@@ -17060,7 +21917,7 @@
                 <a:srgbClr val="4A4F55"/>
               </a:gs>
             </a:gsLst>
-            <a:lin scaled="0" ang="14700000"/>
+            <a:lin ang="14700000" scaled="0"/>
           </a:gradFill>
           <a:ln>
             <a:noFill/>
@@ -17092,6 +21949,7 @@
           <a:lstStyle/>
           <a:p>
             <a:pPr algn="ctr"/>
+            <a:endParaRPr/>
           </a:p>
         </p:txBody>
       </p:sp>
@@ -17189,6 +22047,7 @@
           <a:lstStyle/>
           <a:p>
             <a:pPr algn="ctr"/>
+            <a:endParaRPr/>
           </a:p>
         </p:txBody>
       </p:sp>
@@ -17286,6 +22145,7 @@
           <a:lstStyle/>
           <a:p>
             <a:pPr algn="ctr"/>
+            <a:endParaRPr/>
           </a:p>
         </p:txBody>
       </p:sp>
@@ -17357,7 +22217,7 @@
                 <a:srgbClr val="4A4F55"/>
               </a:gs>
             </a:gsLst>
-            <a:lin scaled="0" ang="14700000"/>
+            <a:lin ang="14700000" scaled="0"/>
           </a:gradFill>
           <a:ln>
             <a:noFill/>
@@ -17389,6 +22249,7 @@
           <a:lstStyle/>
           <a:p>
             <a:pPr algn="ctr"/>
+            <a:endParaRPr/>
           </a:p>
         </p:txBody>
       </p:sp>
@@ -17486,6 +22347,7 @@
           <a:lstStyle/>
           <a:p>
             <a:pPr algn="ctr"/>
+            <a:endParaRPr/>
           </a:p>
         </p:txBody>
       </p:sp>
@@ -17583,6 +22445,7 @@
           <a:lstStyle/>
           <a:p>
             <a:pPr algn="ctr"/>
+            <a:endParaRPr/>
           </a:p>
         </p:txBody>
       </p:sp>
@@ -17654,7 +22517,7 @@
                 <a:srgbClr val="4A4F55"/>
               </a:gs>
             </a:gsLst>
-            <a:lin scaled="0" ang="14700000"/>
+            <a:lin ang="14700000" scaled="0"/>
           </a:gradFill>
           <a:ln>
             <a:noFill/>
@@ -17686,6 +22549,7 @@
           <a:lstStyle/>
           <a:p>
             <a:pPr algn="ctr"/>
+            <a:endParaRPr/>
           </a:p>
         </p:txBody>
       </p:sp>
@@ -17783,6 +22647,7 @@
           <a:lstStyle/>
           <a:p>
             <a:pPr algn="ctr"/>
+            <a:endParaRPr/>
           </a:p>
         </p:txBody>
       </p:sp>
@@ -17880,6 +22745,7 @@
           <a:lstStyle/>
           <a:p>
             <a:pPr algn="ctr"/>
+            <a:endParaRPr/>
           </a:p>
         </p:txBody>
       </p:sp>
@@ -17978,7 +22844,7 @@
 </file>
 
 <file path=ppt/slides/slide6.xml><?xml version="1.0" encoding="utf-8"?>
-<p:sld xmlns:a="http://schemas.openxmlformats.org/drawingml/2006/main" xmlns:p="http://schemas.openxmlformats.org/presentationml/2006/main" xmlns:r="http://schemas.openxmlformats.org/officeDocument/2006/relationships">
+<p:sld xmlns:a="http://schemas.openxmlformats.org/drawingml/2006/main" xmlns:r="http://schemas.openxmlformats.org/officeDocument/2006/relationships" xmlns:p="http://schemas.openxmlformats.org/presentationml/2006/main">
   <p:cSld>
     <p:spTree>
       <p:nvGrpSpPr>
@@ -17986,7 +22852,14 @@
         <p:cNvGrpSpPr/>
         <p:nvPr/>
       </p:nvGrpSpPr>
-      <p:grpSpPr/>
+      <p:grpSpPr>
+        <a:xfrm>
+          <a:off x="0" y="0"/>
+          <a:ext cx="0" cy="0"/>
+          <a:chOff x="0" y="0"/>
+          <a:chExt cx="0" cy="0"/>
+        </a:xfrm>
+      </p:grpSpPr>
       <p:sp>
         <p:nvSpPr>
           <p:cNvPr id="2" name="Rectangle 1"/>
@@ -18028,6 +22901,7 @@
           <a:lstStyle/>
           <a:p>
             <a:pPr algn="ctr"/>
+            <a:endParaRPr/>
           </a:p>
         </p:txBody>
       </p:sp>
@@ -18056,7 +22930,7 @@
                 <a:srgbClr val="73787E"/>
               </a:gs>
             </a:gsLst>
-            <a:lin scaled="0" ang="18900000"/>
+            <a:lin ang="18900000" scaled="0"/>
           </a:gradFill>
           <a:ln>
             <a:noFill/>
@@ -18088,6 +22962,7 @@
           <a:lstStyle/>
           <a:p>
             <a:pPr algn="ctr"/>
+            <a:endParaRPr/>
           </a:p>
         </p:txBody>
       </p:sp>
@@ -18157,7 +23032,7 @@
                 <a:srgbClr val="FFFFFF"/>
               </a:gs>
             </a:gsLst>
-            <a:lin scaled="0" ang="0"/>
+            <a:lin ang="0" scaled="0"/>
           </a:gradFill>
           <a:ln>
             <a:noFill/>
@@ -18183,6 +23058,7 @@
           <a:lstStyle/>
           <a:p>
             <a:pPr algn="ctr"/>
+            <a:endParaRPr/>
           </a:p>
         </p:txBody>
       </p:sp>
@@ -18291,9 +23167,27 @@
                 <a:tableStyleId>{5C22544A-7EE6-4342-B048-85BDC9FD1C3A}</a:tableStyleId>
               </a:tblPr>
               <a:tblGrid>
-                <a:gridCol w="2834640"/>
-                <a:gridCol w="6675120"/>
-                <a:gridCol w="1783080"/>
+                <a:gridCol w="2834640">
+                  <a:extLst>
+                    <a:ext uri="{9D8B030D-6E8A-4147-A177-3AD203B41FA5}">
+                      <a16:colId xmlns:a16="http://schemas.microsoft.com/office/drawing/2014/main" val="20000"/>
+                    </a:ext>
+                  </a:extLst>
+                </a:gridCol>
+                <a:gridCol w="6675120">
+                  <a:extLst>
+                    <a:ext uri="{9D8B030D-6E8A-4147-A177-3AD203B41FA5}">
+                      <a16:colId xmlns:a16="http://schemas.microsoft.com/office/drawing/2014/main" val="20001"/>
+                    </a:ext>
+                  </a:extLst>
+                </a:gridCol>
+                <a:gridCol w="1783080">
+                  <a:extLst>
+                    <a:ext uri="{9D8B030D-6E8A-4147-A177-3AD203B41FA5}">
+                      <a16:colId xmlns:a16="http://schemas.microsoft.com/office/drawing/2014/main" val="20002"/>
+                    </a:ext>
+                  </a:extLst>
+                </a:gridCol>
               </a:tblGrid>
               <a:tr h="457200">
                 <a:tc>
@@ -18318,7 +23212,7 @@
                       </a:r>
                     </a:p>
                   </a:txBody>
-                  <a:tcPr marT="27432" marB="27432" marL="73152" marR="73152" anchor="ctr">
+                  <a:tcPr marL="73152" marR="73152" marT="27432" marB="27432" anchor="ctr">
                     <a:solidFill>
                       <a:srgbClr val="33393F"/>
                     </a:solidFill>
@@ -18346,7 +23240,7 @@
                       </a:r>
                     </a:p>
                   </a:txBody>
-                  <a:tcPr marT="27432" marB="27432" marL="73152" marR="73152" anchor="ctr">
+                  <a:tcPr marL="73152" marR="73152" marT="27432" marB="27432" anchor="ctr">
                     <a:solidFill>
                       <a:srgbClr val="33393F"/>
                     </a:solidFill>
@@ -18374,12 +23268,17 @@
                       </a:r>
                     </a:p>
                   </a:txBody>
-                  <a:tcPr marT="27432" marB="27432" marL="73152" marR="73152" anchor="ctr">
+                  <a:tcPr marL="73152" marR="73152" marT="27432" marB="27432" anchor="ctr">
                     <a:solidFill>
                       <a:srgbClr val="33393F"/>
                     </a:solidFill>
                   </a:tcPr>
                 </a:tc>
+                <a:extLst>
+                  <a:ext uri="{0D108BD9-81ED-4DB2-BD59-A6C34878D82A}">
+                    <a16:rowId xmlns:a16="http://schemas.microsoft.com/office/drawing/2014/main" val="10000"/>
+                  </a:ext>
+                </a:extLst>
               </a:tr>
               <a:tr h="457200">
                 <a:tc>
@@ -18404,7 +23303,7 @@
                       </a:r>
                     </a:p>
                   </a:txBody>
-                  <a:tcPr marT="27432" marB="27432" marL="73152" marR="73152" anchor="ctr">
+                  <a:tcPr marL="73152" marR="73152" marT="27432" marB="27432" anchor="ctr">
                     <a:solidFill>
                       <a:srgbClr val="FFFFFF"/>
                     </a:solidFill>
@@ -18432,7 +23331,7 @@
                       </a:r>
                     </a:p>
                   </a:txBody>
-                  <a:tcPr marT="27432" marB="27432" marL="73152" marR="73152" anchor="ctr">
+                  <a:tcPr marL="73152" marR="73152" marT="27432" marB="27432" anchor="ctr">
                     <a:solidFill>
                       <a:srgbClr val="FFFFFF"/>
                     </a:solidFill>
@@ -18460,12 +23359,17 @@
                       </a:r>
                     </a:p>
                   </a:txBody>
-                  <a:tcPr marT="27432" marB="27432" marL="73152" marR="73152" anchor="ctr">
+                  <a:tcPr marL="73152" marR="73152" marT="27432" marB="27432" anchor="ctr">
                     <a:solidFill>
                       <a:srgbClr val="FFFFFF"/>
                     </a:solidFill>
                   </a:tcPr>
                 </a:tc>
+                <a:extLst>
+                  <a:ext uri="{0D108BD9-81ED-4DB2-BD59-A6C34878D82A}">
+                    <a16:rowId xmlns:a16="http://schemas.microsoft.com/office/drawing/2014/main" val="10001"/>
+                  </a:ext>
+                </a:extLst>
               </a:tr>
               <a:tr h="457200">
                 <a:tc>
@@ -18490,7 +23394,7 @@
                       </a:r>
                     </a:p>
                   </a:txBody>
-                  <a:tcPr marT="27432" marB="27432" marL="73152" marR="73152" anchor="ctr">
+                  <a:tcPr marL="73152" marR="73152" marT="27432" marB="27432" anchor="ctr">
                     <a:solidFill>
                       <a:srgbClr val="F6F7F8"/>
                     </a:solidFill>
@@ -18518,7 +23422,7 @@
                       </a:r>
                     </a:p>
                   </a:txBody>
-                  <a:tcPr marT="27432" marB="27432" marL="73152" marR="73152" anchor="ctr">
+                  <a:tcPr marL="73152" marR="73152" marT="27432" marB="27432" anchor="ctr">
                     <a:solidFill>
                       <a:srgbClr val="F6F7F8"/>
                     </a:solidFill>
@@ -18546,12 +23450,17 @@
                       </a:r>
                     </a:p>
                   </a:txBody>
-                  <a:tcPr marT="27432" marB="27432" marL="73152" marR="73152" anchor="ctr">
+                  <a:tcPr marL="73152" marR="73152" marT="27432" marB="27432" anchor="ctr">
                     <a:solidFill>
                       <a:srgbClr val="F6F7F8"/>
                     </a:solidFill>
                   </a:tcPr>
                 </a:tc>
+                <a:extLst>
+                  <a:ext uri="{0D108BD9-81ED-4DB2-BD59-A6C34878D82A}">
+                    <a16:rowId xmlns:a16="http://schemas.microsoft.com/office/drawing/2014/main" val="10002"/>
+                  </a:ext>
+                </a:extLst>
               </a:tr>
             </a:tbl>
           </a:graphicData>
@@ -18651,6 +23560,7 @@
           <a:lstStyle/>
           <a:p>
             <a:pPr algn="ctr"/>
+            <a:endParaRPr/>
           </a:p>
         </p:txBody>
       </p:sp>
@@ -18768,6 +23678,7 @@
           <a:lstStyle/>
           <a:p>
             <a:pPr algn="ctr"/>
+            <a:endParaRPr/>
           </a:p>
         </p:txBody>
       </p:sp>
@@ -18885,6 +23796,7 @@
           <a:lstStyle/>
           <a:p>
             <a:pPr algn="ctr"/>
+            <a:endParaRPr/>
           </a:p>
         </p:txBody>
       </p:sp>
@@ -19002,6 +23914,7 @@
           <a:lstStyle/>
           <a:p>
             <a:pPr algn="ctr"/>
+            <a:endParaRPr/>
           </a:p>
         </p:txBody>
       </p:sp>
@@ -19077,7 +23990,7 @@
 </file>
 
 <file path=ppt/slides/slide7.xml><?xml version="1.0" encoding="utf-8"?>
-<p:sld xmlns:a="http://schemas.openxmlformats.org/drawingml/2006/main" xmlns:p="http://schemas.openxmlformats.org/presentationml/2006/main" xmlns:r="http://schemas.openxmlformats.org/officeDocument/2006/relationships">
+<p:sld xmlns:a="http://schemas.openxmlformats.org/drawingml/2006/main" xmlns:r="http://schemas.openxmlformats.org/officeDocument/2006/relationships" xmlns:p="http://schemas.openxmlformats.org/presentationml/2006/main">
   <p:cSld>
     <p:spTree>
       <p:nvGrpSpPr>
@@ -19085,7 +23998,14 @@
         <p:cNvGrpSpPr/>
         <p:nvPr/>
       </p:nvGrpSpPr>
-      <p:grpSpPr/>
+      <p:grpSpPr>
+        <a:xfrm>
+          <a:off x="0" y="0"/>
+          <a:ext cx="0" cy="0"/>
+          <a:chOff x="0" y="0"/>
+          <a:chExt cx="0" cy="0"/>
+        </a:xfrm>
+      </p:grpSpPr>
       <p:sp>
         <p:nvSpPr>
           <p:cNvPr id="2" name="Rectangle 1"/>
@@ -19127,6 +24047,7 @@
           <a:lstStyle/>
           <a:p>
             <a:pPr algn="ctr"/>
+            <a:endParaRPr/>
           </a:p>
         </p:txBody>
       </p:sp>
@@ -19155,7 +24076,7 @@
                 <a:srgbClr val="73787E"/>
               </a:gs>
             </a:gsLst>
-            <a:lin scaled="0" ang="18900000"/>
+            <a:lin ang="18900000" scaled="0"/>
           </a:gradFill>
           <a:ln>
             <a:noFill/>
@@ -19187,6 +24108,7 @@
           <a:lstStyle/>
           <a:p>
             <a:pPr algn="ctr"/>
+            <a:endParaRPr/>
           </a:p>
         </p:txBody>
       </p:sp>
@@ -19256,7 +24178,7 @@
                 <a:srgbClr val="FFFFFF"/>
               </a:gs>
             </a:gsLst>
-            <a:lin scaled="0" ang="0"/>
+            <a:lin ang="0" scaled="0"/>
           </a:gradFill>
           <a:ln>
             <a:noFill/>
@@ -19282,6 +24204,7 @@
           <a:lstStyle/>
           <a:p>
             <a:pPr algn="ctr"/>
+            <a:endParaRPr/>
           </a:p>
         </p:txBody>
       </p:sp>
@@ -19390,9 +24313,27 @@
                 <a:tableStyleId>{5C22544A-7EE6-4342-B048-85BDC9FD1C3A}</a:tableStyleId>
               </a:tblPr>
               <a:tblGrid>
-                <a:gridCol w="822960"/>
-                <a:gridCol w="3931920"/>
-                <a:gridCol w="1188720"/>
+                <a:gridCol w="822960">
+                  <a:extLst>
+                    <a:ext uri="{9D8B030D-6E8A-4147-A177-3AD203B41FA5}">
+                      <a16:colId xmlns:a16="http://schemas.microsoft.com/office/drawing/2014/main" val="20000"/>
+                    </a:ext>
+                  </a:extLst>
+                </a:gridCol>
+                <a:gridCol w="3931920">
+                  <a:extLst>
+                    <a:ext uri="{9D8B030D-6E8A-4147-A177-3AD203B41FA5}">
+                      <a16:colId xmlns:a16="http://schemas.microsoft.com/office/drawing/2014/main" val="20001"/>
+                    </a:ext>
+                  </a:extLst>
+                </a:gridCol>
+                <a:gridCol w="1188720">
+                  <a:extLst>
+                    <a:ext uri="{9D8B030D-6E8A-4147-A177-3AD203B41FA5}">
+                      <a16:colId xmlns:a16="http://schemas.microsoft.com/office/drawing/2014/main" val="20002"/>
+                    </a:ext>
+                  </a:extLst>
+                </a:gridCol>
               </a:tblGrid>
               <a:tr h="457200">
                 <a:tc>
@@ -19417,7 +24358,7 @@
                       </a:r>
                     </a:p>
                   </a:txBody>
-                  <a:tcPr marT="27432" marB="27432" marL="73152" marR="73152" anchor="ctr">
+                  <a:tcPr marL="73152" marR="73152" marT="27432" marB="27432" anchor="ctr">
                     <a:solidFill>
                       <a:srgbClr val="33393F"/>
                     </a:solidFill>
@@ -19445,7 +24386,7 @@
                       </a:r>
                     </a:p>
                   </a:txBody>
-                  <a:tcPr marT="27432" marB="27432" marL="73152" marR="73152" anchor="ctr">
+                  <a:tcPr marL="73152" marR="73152" marT="27432" marB="27432" anchor="ctr">
                     <a:solidFill>
                       <a:srgbClr val="33393F"/>
                     </a:solidFill>
@@ -19473,12 +24414,17 @@
                       </a:r>
                     </a:p>
                   </a:txBody>
-                  <a:tcPr marT="27432" marB="27432" marL="73152" marR="73152" anchor="ctr">
+                  <a:tcPr marL="73152" marR="73152" marT="27432" marB="27432" anchor="ctr">
                     <a:solidFill>
                       <a:srgbClr val="33393F"/>
                     </a:solidFill>
                   </a:tcPr>
                 </a:tc>
+                <a:extLst>
+                  <a:ext uri="{0D108BD9-81ED-4DB2-BD59-A6C34878D82A}">
+                    <a16:rowId xmlns:a16="http://schemas.microsoft.com/office/drawing/2014/main" val="10000"/>
+                  </a:ext>
+                </a:extLst>
               </a:tr>
               <a:tr h="457200">
                 <a:tc>
@@ -19503,7 +24449,7 @@
                       </a:r>
                     </a:p>
                   </a:txBody>
-                  <a:tcPr marT="27432" marB="27432" marL="73152" marR="73152" anchor="ctr">
+                  <a:tcPr marL="73152" marR="73152" marT="27432" marB="27432" anchor="ctr">
                     <a:solidFill>
                       <a:srgbClr val="FFFFFF"/>
                     </a:solidFill>
@@ -19531,7 +24477,7 @@
                       </a:r>
                     </a:p>
                   </a:txBody>
-                  <a:tcPr marT="27432" marB="27432" marL="73152" marR="73152" anchor="ctr">
+                  <a:tcPr marL="73152" marR="73152" marT="27432" marB="27432" anchor="ctr">
                     <a:solidFill>
                       <a:srgbClr val="FFFFFF"/>
                     </a:solidFill>
@@ -19559,12 +24505,17 @@
                       </a:r>
                     </a:p>
                   </a:txBody>
-                  <a:tcPr marT="27432" marB="27432" marL="73152" marR="73152" anchor="ctr">
+                  <a:tcPr marL="73152" marR="73152" marT="27432" marB="27432" anchor="ctr">
                     <a:solidFill>
                       <a:srgbClr val="FFFFFF"/>
                     </a:solidFill>
                   </a:tcPr>
                 </a:tc>
+                <a:extLst>
+                  <a:ext uri="{0D108BD9-81ED-4DB2-BD59-A6C34878D82A}">
+                    <a16:rowId xmlns:a16="http://schemas.microsoft.com/office/drawing/2014/main" val="10001"/>
+                  </a:ext>
+                </a:extLst>
               </a:tr>
               <a:tr h="457200">
                 <a:tc>
@@ -19589,7 +24540,7 @@
                       </a:r>
                     </a:p>
                   </a:txBody>
-                  <a:tcPr marT="27432" marB="27432" marL="73152" marR="73152" anchor="ctr">
+                  <a:tcPr marL="73152" marR="73152" marT="27432" marB="27432" anchor="ctr">
                     <a:solidFill>
                       <a:srgbClr val="F6F7F8"/>
                     </a:solidFill>
@@ -19617,7 +24568,7 @@
                       </a:r>
                     </a:p>
                   </a:txBody>
-                  <a:tcPr marT="27432" marB="27432" marL="73152" marR="73152" anchor="ctr">
+                  <a:tcPr marL="73152" marR="73152" marT="27432" marB="27432" anchor="ctr">
                     <a:solidFill>
                       <a:srgbClr val="F6F7F8"/>
                     </a:solidFill>
@@ -19645,12 +24596,17 @@
                       </a:r>
                     </a:p>
                   </a:txBody>
-                  <a:tcPr marT="27432" marB="27432" marL="73152" marR="73152" anchor="ctr">
+                  <a:tcPr marL="73152" marR="73152" marT="27432" marB="27432" anchor="ctr">
                     <a:solidFill>
                       <a:srgbClr val="F6F7F8"/>
                     </a:solidFill>
                   </a:tcPr>
                 </a:tc>
+                <a:extLst>
+                  <a:ext uri="{0D108BD9-81ED-4DB2-BD59-A6C34878D82A}">
+                    <a16:rowId xmlns:a16="http://schemas.microsoft.com/office/drawing/2014/main" val="10002"/>
+                  </a:ext>
+                </a:extLst>
               </a:tr>
               <a:tr h="457200">
                 <a:tc>
@@ -19675,7 +24631,7 @@
                       </a:r>
                     </a:p>
                   </a:txBody>
-                  <a:tcPr marT="27432" marB="27432" marL="73152" marR="73152" anchor="ctr">
+                  <a:tcPr marL="73152" marR="73152" marT="27432" marB="27432" anchor="ctr">
                     <a:solidFill>
                       <a:srgbClr val="FFFFFF"/>
                     </a:solidFill>
@@ -19703,7 +24659,7 @@
                       </a:r>
                     </a:p>
                   </a:txBody>
-                  <a:tcPr marT="27432" marB="27432" marL="73152" marR="73152" anchor="ctr">
+                  <a:tcPr marL="73152" marR="73152" marT="27432" marB="27432" anchor="ctr">
                     <a:solidFill>
                       <a:srgbClr val="FFFFFF"/>
                     </a:solidFill>
@@ -19731,12 +24687,17 @@
                       </a:r>
                     </a:p>
                   </a:txBody>
-                  <a:tcPr marT="27432" marB="27432" marL="73152" marR="73152" anchor="ctr">
+                  <a:tcPr marL="73152" marR="73152" marT="27432" marB="27432" anchor="ctr">
                     <a:solidFill>
                       <a:srgbClr val="FFFFFF"/>
                     </a:solidFill>
                   </a:tcPr>
                 </a:tc>
+                <a:extLst>
+                  <a:ext uri="{0D108BD9-81ED-4DB2-BD59-A6C34878D82A}">
+                    <a16:rowId xmlns:a16="http://schemas.microsoft.com/office/drawing/2014/main" val="10003"/>
+                  </a:ext>
+                </a:extLst>
               </a:tr>
             </a:tbl>
           </a:graphicData>
@@ -19793,6 +24754,7 @@
           <a:lstStyle/>
           <a:p>
             <a:pPr algn="ctr"/>
+            <a:endParaRPr/>
           </a:p>
         </p:txBody>
       </p:sp>
@@ -19930,6 +24892,7 @@
           <a:lstStyle/>
           <a:p>
             <a:pPr algn="ctr"/>
+            <a:endParaRPr/>
           </a:p>
         </p:txBody>
       </p:sp>
@@ -20107,6 +25070,7 @@
           <a:lstStyle/>
           <a:p>
             <a:pPr algn="ctr"/>
+            <a:endParaRPr/>
           </a:p>
         </p:txBody>
       </p:sp>
@@ -20245,7 +25209,7 @@
 </file>
 
 <file path=ppt/slides/slide8.xml><?xml version="1.0" encoding="utf-8"?>
-<p:sld xmlns:a="http://schemas.openxmlformats.org/drawingml/2006/main" xmlns:p="http://schemas.openxmlformats.org/presentationml/2006/main" xmlns:r="http://schemas.openxmlformats.org/officeDocument/2006/relationships">
+<p:sld xmlns:a="http://schemas.openxmlformats.org/drawingml/2006/main" xmlns:r="http://schemas.openxmlformats.org/officeDocument/2006/relationships" xmlns:p="http://schemas.openxmlformats.org/presentationml/2006/main">
   <p:cSld>
     <p:spTree>
       <p:nvGrpSpPr>
@@ -20253,7 +25217,14 @@
         <p:cNvGrpSpPr/>
         <p:nvPr/>
       </p:nvGrpSpPr>
-      <p:grpSpPr/>
+      <p:grpSpPr>
+        <a:xfrm>
+          <a:off x="0" y="0"/>
+          <a:ext cx="0" cy="0"/>
+          <a:chOff x="0" y="0"/>
+          <a:chExt cx="0" cy="0"/>
+        </a:xfrm>
+      </p:grpSpPr>
       <p:sp>
         <p:nvSpPr>
           <p:cNvPr id="2" name="Rectangle 1"/>
@@ -20295,6 +25266,7 @@
           <a:lstStyle/>
           <a:p>
             <a:pPr algn="ctr"/>
+            <a:endParaRPr/>
           </a:p>
         </p:txBody>
       </p:sp>
@@ -20323,7 +25295,7 @@
                 <a:srgbClr val="73787E"/>
               </a:gs>
             </a:gsLst>
-            <a:lin scaled="0" ang="18900000"/>
+            <a:lin ang="18900000" scaled="0"/>
           </a:gradFill>
           <a:ln>
             <a:noFill/>
@@ -20355,6 +25327,7 @@
           <a:lstStyle/>
           <a:p>
             <a:pPr algn="ctr"/>
+            <a:endParaRPr/>
           </a:p>
         </p:txBody>
       </p:sp>
@@ -20424,7 +25397,7 @@
                 <a:srgbClr val="FFFFFF"/>
               </a:gs>
             </a:gsLst>
-            <a:lin scaled="0" ang="0"/>
+            <a:lin ang="0" scaled="0"/>
           </a:gradFill>
           <a:ln>
             <a:noFill/>
@@ -20450,6 +25423,7 @@
           <a:lstStyle/>
           <a:p>
             <a:pPr algn="ctr"/>
+            <a:endParaRPr/>
           </a:p>
         </p:txBody>
       </p:sp>
@@ -20558,8 +25532,20 @@
                 <a:tableStyleId>{5C22544A-7EE6-4342-B048-85BDC9FD1C3A}</a:tableStyleId>
               </a:tblPr>
               <a:tblGrid>
-                <a:gridCol w="5760720"/>
-                <a:gridCol w="5532120"/>
+                <a:gridCol w="5760720">
+                  <a:extLst>
+                    <a:ext uri="{9D8B030D-6E8A-4147-A177-3AD203B41FA5}">
+                      <a16:colId xmlns:a16="http://schemas.microsoft.com/office/drawing/2014/main" val="20000"/>
+                    </a:ext>
+                  </a:extLst>
+                </a:gridCol>
+                <a:gridCol w="5532120">
+                  <a:extLst>
+                    <a:ext uri="{9D8B030D-6E8A-4147-A177-3AD203B41FA5}">
+                      <a16:colId xmlns:a16="http://schemas.microsoft.com/office/drawing/2014/main" val="20001"/>
+                    </a:ext>
+                  </a:extLst>
+                </a:gridCol>
               </a:tblGrid>
               <a:tr h="475488">
                 <a:tc>
@@ -20584,7 +25570,7 @@
                       </a:r>
                     </a:p>
                   </a:txBody>
-                  <a:tcPr marT="27432" marB="27432" marL="73152" marR="73152" anchor="ctr">
+                  <a:tcPr marL="73152" marR="73152" marT="27432" marB="27432" anchor="ctr">
                     <a:solidFill>
                       <a:srgbClr val="33393F"/>
                     </a:solidFill>
@@ -20612,12 +25598,17 @@
                       </a:r>
                     </a:p>
                   </a:txBody>
-                  <a:tcPr marT="27432" marB="27432" marL="73152" marR="73152" anchor="ctr">
+                  <a:tcPr marL="73152" marR="73152" marT="27432" marB="27432" anchor="ctr">
                     <a:solidFill>
                       <a:srgbClr val="33393F"/>
                     </a:solidFill>
                   </a:tcPr>
                 </a:tc>
+                <a:extLst>
+                  <a:ext uri="{0D108BD9-81ED-4DB2-BD59-A6C34878D82A}">
+                    <a16:rowId xmlns:a16="http://schemas.microsoft.com/office/drawing/2014/main" val="10000"/>
+                  </a:ext>
+                </a:extLst>
               </a:tr>
               <a:tr h="475488">
                 <a:tc>
@@ -20642,7 +25633,7 @@
                       </a:r>
                     </a:p>
                   </a:txBody>
-                  <a:tcPr marT="27432" marB="27432" marL="73152" marR="73152" anchor="ctr">
+                  <a:tcPr marL="73152" marR="73152" marT="27432" marB="27432" anchor="ctr">
                     <a:solidFill>
                       <a:srgbClr val="FFFFFF"/>
                     </a:solidFill>
@@ -20670,12 +25661,17 @@
                       </a:r>
                     </a:p>
                   </a:txBody>
-                  <a:tcPr marT="27432" marB="27432" marL="73152" marR="73152" anchor="ctr">
+                  <a:tcPr marL="73152" marR="73152" marT="27432" marB="27432" anchor="ctr">
                     <a:solidFill>
                       <a:srgbClr val="FFFFFF"/>
                     </a:solidFill>
                   </a:tcPr>
                 </a:tc>
+                <a:extLst>
+                  <a:ext uri="{0D108BD9-81ED-4DB2-BD59-A6C34878D82A}">
+                    <a16:rowId xmlns:a16="http://schemas.microsoft.com/office/drawing/2014/main" val="10001"/>
+                  </a:ext>
+                </a:extLst>
               </a:tr>
               <a:tr h="475488">
                 <a:tc>
@@ -20700,7 +25696,7 @@
                       </a:r>
                     </a:p>
                   </a:txBody>
-                  <a:tcPr marT="27432" marB="27432" marL="73152" marR="73152" anchor="ctr">
+                  <a:tcPr marL="73152" marR="73152" marT="27432" marB="27432" anchor="ctr">
                     <a:solidFill>
                       <a:srgbClr val="F6F7F8"/>
                     </a:solidFill>
@@ -20728,12 +25724,17 @@
                       </a:r>
                     </a:p>
                   </a:txBody>
-                  <a:tcPr marT="27432" marB="27432" marL="73152" marR="73152" anchor="ctr">
+                  <a:tcPr marL="73152" marR="73152" marT="27432" marB="27432" anchor="ctr">
                     <a:solidFill>
                       <a:srgbClr val="F6F7F8"/>
                     </a:solidFill>
                   </a:tcPr>
                 </a:tc>
+                <a:extLst>
+                  <a:ext uri="{0D108BD9-81ED-4DB2-BD59-A6C34878D82A}">
+                    <a16:rowId xmlns:a16="http://schemas.microsoft.com/office/drawing/2014/main" val="10002"/>
+                  </a:ext>
+                </a:extLst>
               </a:tr>
             </a:tbl>
           </a:graphicData>
@@ -20790,6 +25791,7 @@
           <a:lstStyle/>
           <a:p>
             <a:pPr algn="ctr"/>
+            <a:endParaRPr/>
           </a:p>
         </p:txBody>
       </p:sp>
@@ -20907,6 +25909,7 @@
           <a:lstStyle/>
           <a:p>
             <a:pPr algn="ctr"/>
+            <a:endParaRPr/>
           </a:p>
         </p:txBody>
       </p:sp>
@@ -21024,6 +26027,7 @@
           <a:lstStyle/>
           <a:p>
             <a:pPr algn="ctr"/>
+            <a:endParaRPr/>
           </a:p>
         </p:txBody>
       </p:sp>
@@ -21141,6 +26145,7 @@
           <a:lstStyle/>
           <a:p>
             <a:pPr algn="ctr"/>
+            <a:endParaRPr/>
           </a:p>
         </p:txBody>
       </p:sp>
@@ -21256,7 +26261,7 @@
 </file>
 
 <file path=ppt/slides/slide9.xml><?xml version="1.0" encoding="utf-8"?>
-<p:sld xmlns:a="http://schemas.openxmlformats.org/drawingml/2006/main" xmlns:p="http://schemas.openxmlformats.org/presentationml/2006/main" xmlns:r="http://schemas.openxmlformats.org/officeDocument/2006/relationships">
+<p:sld xmlns:a="http://schemas.openxmlformats.org/drawingml/2006/main" xmlns:r="http://schemas.openxmlformats.org/officeDocument/2006/relationships" xmlns:p="http://schemas.openxmlformats.org/presentationml/2006/main">
   <p:cSld>
     <p:spTree>
       <p:nvGrpSpPr>
@@ -21264,7 +26269,14 @@
         <p:cNvGrpSpPr/>
         <p:nvPr/>
       </p:nvGrpSpPr>
-      <p:grpSpPr/>
+      <p:grpSpPr>
+        <a:xfrm>
+          <a:off x="0" y="0"/>
+          <a:ext cx="0" cy="0"/>
+          <a:chOff x="0" y="0"/>
+          <a:chExt cx="0" cy="0"/>
+        </a:xfrm>
+      </p:grpSpPr>
       <p:sp>
         <p:nvSpPr>
           <p:cNvPr id="2" name="Rectangle 1"/>
@@ -21306,6 +26318,7 @@
           <a:lstStyle/>
           <a:p>
             <a:pPr algn="ctr"/>
+            <a:endParaRPr/>
           </a:p>
         </p:txBody>
       </p:sp>
@@ -21334,7 +26347,7 @@
                 <a:srgbClr val="73787E"/>
               </a:gs>
             </a:gsLst>
-            <a:lin scaled="0" ang="18900000"/>
+            <a:lin ang="18900000" scaled="0"/>
           </a:gradFill>
           <a:ln>
             <a:noFill/>
@@ -21366,6 +26379,7 @@
           <a:lstStyle/>
           <a:p>
             <a:pPr algn="ctr"/>
+            <a:endParaRPr/>
           </a:p>
         </p:txBody>
       </p:sp>
@@ -21435,7 +26449,7 @@
                 <a:srgbClr val="FFFFFF"/>
               </a:gs>
             </a:gsLst>
-            <a:lin scaled="0" ang="0"/>
+            <a:lin ang="0" scaled="0"/>
           </a:gradFill>
           <a:ln>
             <a:noFill/>
@@ -21461,6 +26475,7 @@
           <a:lstStyle/>
           <a:p>
             <a:pPr algn="ctr"/>
+            <a:endParaRPr/>
           </a:p>
         </p:txBody>
       </p:sp>
@@ -21601,6 +26616,7 @@
           <a:lstStyle/>
           <a:p>
             <a:pPr algn="ctr"/>
+            <a:endParaRPr/>
           </a:p>
         </p:txBody>
       </p:sp>
@@ -21769,10 +26785,34 @@
                 <a:tableStyleId>{5C22544A-7EE6-4342-B048-85BDC9FD1C3A}</a:tableStyleId>
               </a:tblPr>
               <a:tblGrid>
-                <a:gridCol w="822960"/>
-                <a:gridCol w="822960"/>
-                <a:gridCol w="914400"/>
-                <a:gridCol w="2971800"/>
+                <a:gridCol w="822960">
+                  <a:extLst>
+                    <a:ext uri="{9D8B030D-6E8A-4147-A177-3AD203B41FA5}">
+                      <a16:colId xmlns:a16="http://schemas.microsoft.com/office/drawing/2014/main" val="20000"/>
+                    </a:ext>
+                  </a:extLst>
+                </a:gridCol>
+                <a:gridCol w="822960">
+                  <a:extLst>
+                    <a:ext uri="{9D8B030D-6E8A-4147-A177-3AD203B41FA5}">
+                      <a16:colId xmlns:a16="http://schemas.microsoft.com/office/drawing/2014/main" val="20001"/>
+                    </a:ext>
+                  </a:extLst>
+                </a:gridCol>
+                <a:gridCol w="914400">
+                  <a:extLst>
+                    <a:ext uri="{9D8B030D-6E8A-4147-A177-3AD203B41FA5}">
+                      <a16:colId xmlns:a16="http://schemas.microsoft.com/office/drawing/2014/main" val="20002"/>
+                    </a:ext>
+                  </a:extLst>
+                </a:gridCol>
+                <a:gridCol w="2971800">
+                  <a:extLst>
+                    <a:ext uri="{9D8B030D-6E8A-4147-A177-3AD203B41FA5}">
+                      <a16:colId xmlns:a16="http://schemas.microsoft.com/office/drawing/2014/main" val="20003"/>
+                    </a:ext>
+                  </a:extLst>
+                </a:gridCol>
               </a:tblGrid>
               <a:tr h="438912">
                 <a:tc>
@@ -21797,7 +26837,7 @@
                       </a:r>
                     </a:p>
                   </a:txBody>
-                  <a:tcPr marT="27432" marB="27432" marL="73152" marR="73152" anchor="ctr">
+                  <a:tcPr marL="73152" marR="73152" marT="27432" marB="27432" anchor="ctr">
                     <a:solidFill>
                       <a:srgbClr val="33393F"/>
                     </a:solidFill>
@@ -21825,7 +26865,7 @@
                       </a:r>
                     </a:p>
                   </a:txBody>
-                  <a:tcPr marT="27432" marB="27432" marL="73152" marR="73152" anchor="ctr">
+                  <a:tcPr marL="73152" marR="73152" marT="27432" marB="27432" anchor="ctr">
                     <a:solidFill>
                       <a:srgbClr val="33393F"/>
                     </a:solidFill>
@@ -21853,7 +26893,7 @@
                       </a:r>
                     </a:p>
                   </a:txBody>
-                  <a:tcPr marT="27432" marB="27432" marL="73152" marR="73152" anchor="ctr">
+                  <a:tcPr marL="73152" marR="73152" marT="27432" marB="27432" anchor="ctr">
                     <a:solidFill>
                       <a:srgbClr val="33393F"/>
                     </a:solidFill>
@@ -21881,12 +26921,17 @@
                       </a:r>
                     </a:p>
                   </a:txBody>
-                  <a:tcPr marT="27432" marB="27432" marL="73152" marR="73152" anchor="ctr">
+                  <a:tcPr marL="73152" marR="73152" marT="27432" marB="27432" anchor="ctr">
                     <a:solidFill>
                       <a:srgbClr val="33393F"/>
                     </a:solidFill>
                   </a:tcPr>
                 </a:tc>
+                <a:extLst>
+                  <a:ext uri="{0D108BD9-81ED-4DB2-BD59-A6C34878D82A}">
+                    <a16:rowId xmlns:a16="http://schemas.microsoft.com/office/drawing/2014/main" val="10000"/>
+                  </a:ext>
+                </a:extLst>
               </a:tr>
               <a:tr h="438912">
                 <a:tc>
@@ -21911,7 +26956,7 @@
                       </a:r>
                     </a:p>
                   </a:txBody>
-                  <a:tcPr marT="27432" marB="27432" marL="73152" marR="73152" anchor="ctr">
+                  <a:tcPr marL="73152" marR="73152" marT="27432" marB="27432" anchor="ctr">
                     <a:solidFill>
                       <a:srgbClr val="FFFFFF"/>
                     </a:solidFill>
@@ -21939,7 +26984,7 @@
                       </a:r>
                     </a:p>
                   </a:txBody>
-                  <a:tcPr marT="27432" marB="27432" marL="73152" marR="73152" anchor="ctr">
+                  <a:tcPr marL="73152" marR="73152" marT="27432" marB="27432" anchor="ctr">
                     <a:solidFill>
                       <a:srgbClr val="FFFFFF"/>
                     </a:solidFill>
@@ -21967,7 +27012,7 @@
                       </a:r>
                     </a:p>
                   </a:txBody>
-                  <a:tcPr marT="27432" marB="27432" marL="73152" marR="73152" anchor="ctr">
+                  <a:tcPr marL="73152" marR="73152" marT="27432" marB="27432" anchor="ctr">
                     <a:solidFill>
                       <a:srgbClr val="FFFFFF"/>
                     </a:solidFill>
@@ -21995,12 +27040,17 @@
                       </a:r>
                     </a:p>
                   </a:txBody>
-                  <a:tcPr marT="27432" marB="27432" marL="73152" marR="73152" anchor="ctr">
+                  <a:tcPr marL="73152" marR="73152" marT="27432" marB="27432" anchor="ctr">
                     <a:solidFill>
                       <a:srgbClr val="FFFFFF"/>
                     </a:solidFill>
                   </a:tcPr>
                 </a:tc>
+                <a:extLst>
+                  <a:ext uri="{0D108BD9-81ED-4DB2-BD59-A6C34878D82A}">
+                    <a16:rowId xmlns:a16="http://schemas.microsoft.com/office/drawing/2014/main" val="10001"/>
+                  </a:ext>
+                </a:extLst>
               </a:tr>
               <a:tr h="438912">
                 <a:tc>
@@ -22025,7 +27075,7 @@
                       </a:r>
                     </a:p>
                   </a:txBody>
-                  <a:tcPr marT="27432" marB="27432" marL="73152" marR="73152" anchor="ctr">
+                  <a:tcPr marL="73152" marR="73152" marT="27432" marB="27432" anchor="ctr">
                     <a:solidFill>
                       <a:srgbClr val="E3E5E8"/>
                     </a:solidFill>
@@ -22053,7 +27103,7 @@
                       </a:r>
                     </a:p>
                   </a:txBody>
-                  <a:tcPr marT="27432" marB="27432" marL="73152" marR="73152" anchor="ctr">
+                  <a:tcPr marL="73152" marR="73152" marT="27432" marB="27432" anchor="ctr">
                     <a:solidFill>
                       <a:srgbClr val="E3E5E8"/>
                     </a:solidFill>
@@ -22081,7 +27131,7 @@
                       </a:r>
                     </a:p>
                   </a:txBody>
-                  <a:tcPr marT="27432" marB="27432" marL="73152" marR="73152" anchor="ctr">
+                  <a:tcPr marL="73152" marR="73152" marT="27432" marB="27432" anchor="ctr">
                     <a:solidFill>
                       <a:srgbClr val="E3E5E8"/>
                     </a:solidFill>
@@ -22109,12 +27159,17 @@
                       </a:r>
                     </a:p>
                   </a:txBody>
-                  <a:tcPr marT="27432" marB="27432" marL="73152" marR="73152" anchor="ctr">
+                  <a:tcPr marL="73152" marR="73152" marT="27432" marB="27432" anchor="ctr">
                     <a:solidFill>
                       <a:srgbClr val="E3E5E8"/>
                     </a:solidFill>
                   </a:tcPr>
                 </a:tc>
+                <a:extLst>
+                  <a:ext uri="{0D108BD9-81ED-4DB2-BD59-A6C34878D82A}">
+                    <a16:rowId xmlns:a16="http://schemas.microsoft.com/office/drawing/2014/main" val="10002"/>
+                  </a:ext>
+                </a:extLst>
               </a:tr>
               <a:tr h="438912">
                 <a:tc>
@@ -22139,7 +27194,7 @@
                       </a:r>
                     </a:p>
                   </a:txBody>
-                  <a:tcPr marT="27432" marB="27432" marL="73152" marR="73152" anchor="ctr">
+                  <a:tcPr marL="73152" marR="73152" marT="27432" marB="27432" anchor="ctr">
                     <a:solidFill>
                       <a:srgbClr val="FFFFFF"/>
                     </a:solidFill>
@@ -22167,7 +27222,7 @@
                       </a:r>
                     </a:p>
                   </a:txBody>
-                  <a:tcPr marT="27432" marB="27432" marL="73152" marR="73152" anchor="ctr">
+                  <a:tcPr marL="73152" marR="73152" marT="27432" marB="27432" anchor="ctr">
                     <a:solidFill>
                       <a:srgbClr val="FFFFFF"/>
                     </a:solidFill>
@@ -22195,7 +27250,7 @@
                       </a:r>
                     </a:p>
                   </a:txBody>
-                  <a:tcPr marT="27432" marB="27432" marL="73152" marR="73152" anchor="ctr">
+                  <a:tcPr marL="73152" marR="73152" marT="27432" marB="27432" anchor="ctr">
                     <a:solidFill>
                       <a:srgbClr val="FFFFFF"/>
                     </a:solidFill>
@@ -22223,12 +27278,17 @@
                       </a:r>
                     </a:p>
                   </a:txBody>
-                  <a:tcPr marT="27432" marB="27432" marL="73152" marR="73152" anchor="ctr">
+                  <a:tcPr marL="73152" marR="73152" marT="27432" marB="27432" anchor="ctr">
                     <a:solidFill>
                       <a:srgbClr val="FFFFFF"/>
                     </a:solidFill>
                   </a:tcPr>
                 </a:tc>
+                <a:extLst>
+                  <a:ext uri="{0D108BD9-81ED-4DB2-BD59-A6C34878D82A}">
+                    <a16:rowId xmlns:a16="http://schemas.microsoft.com/office/drawing/2014/main" val="10003"/>
+                  </a:ext>
+                </a:extLst>
               </a:tr>
             </a:tbl>
           </a:graphicData>
@@ -22285,6 +27345,7 @@
           <a:lstStyle/>
           <a:p>
             <a:pPr algn="ctr"/>
+            <a:endParaRPr/>
           </a:p>
         </p:txBody>
       </p:sp>

--- a/05_작업자료/_PPT생성본/데이터분석_결과보고서.pptx
+++ b/05_작업자료/_PPT생성본/데이터분석_결과보고서.pptx
@@ -3986,7 +3986,7 @@
                 <a:latin typeface="맑은 고딕"/>
                 <a:ea typeface="맑은 고딕"/>
               </a:rPr>
-              <a:t>판정식은 우리가 캐낸 가설이 아니라 고시에 공표된 기준 — 본 연구는 그것을 검산했다</a:t>
+              <a:t>판정식은 우리가 캐낸 가설이 아니라 고시에 공표된 기준 — 이 프로젝트는 그것을 검산했다</a:t>
             </a:r>
           </a:p>
         </p:txBody>
@@ -5907,7 +5907,7 @@
                 <a:latin typeface="맑은 고딕"/>
                 <a:ea typeface="맑은 고딕"/>
               </a:rPr>
-              <a:t>• 현행 정의(도달 가능성) 안에서 이 반론은 옳다 — 본 연구는 정의를 부정하지 않고, 정의가 한 축만 잰다고 주장한다</a:t>
+              <a:t>• 현행 정의(도달 가능성) 안에서 이 반론은 옳다 — 이 프로젝트는 정의를 부정하지 않고, 정의가 한 축만 잰다고 주장한다</a:t>
             </a:r>
           </a:p>
         </p:txBody>
@@ -6183,7 +6183,7 @@
                 <a:latin typeface="맑은 고딕"/>
                 <a:ea typeface="맑은 고딕"/>
               </a:rPr>
-              <a:t>• 문제라고 쓰고 판정식으로는 못 잡는 틈 — 본 연구가 겨누는 지점</a:t>
+              <a:t>• 문제라고 쓰고 판정식으로는 못 잡는 틈 — 이 프로젝트가 겨누는 지점</a:t>
             </a:r>
           </a:p>
         </p:txBody>
@@ -11218,7 +11218,7 @@
                 <a:latin typeface="맑은 고딕"/>
                 <a:ea typeface="맑은 고딕"/>
               </a:rPr>
-              <a:t>임계값 차용 공개 2건 — 지침에 없는 본 연구의 가정</a:t>
+              <a:t>임계값 차용 공개 2건 — 지침에 없는 이 프로젝트의 가정</a:t>
             </a:r>
           </a:p>
           <a:p>
@@ -12777,7 +12777,7 @@
                 <a:latin typeface="맑은 고딕"/>
                 <a:ea typeface="맑은 고딕"/>
               </a:rPr>
-              <a:t>03   연구 배경 — 제도와 접근성의 두 축</a:t>
+              <a:t>03   프로젝트 배경 — 제도와 접근성의 두 축</a:t>
             </a:r>
           </a:p>
           <a:p>
@@ -12817,7 +12817,7 @@
                 <a:latin typeface="맑은 고딕"/>
                 <a:ea typeface="맑은 고딕"/>
               </a:rPr>
-              <a:t>05   문제와 연구 질문</a:t>
+              <a:t>05   문제와 핵심 질문</a:t>
             </a:r>
           </a:p>
         </p:txBody>
@@ -13665,7 +13665,7 @@
                 <a:latin typeface="맑은 고딕"/>
                 <a:ea typeface="맑은 고딕"/>
               </a:rPr>
-              <a:t>연구의 발단·문제의식과 분석 설계의 상세는 「데이터 분석 계획서」에서 다룬다. 본 보고서는 그 결과를 보고한다.</a:t>
+              <a:t>프로젝트의 발단·문제의식과 분석 설계의 상세는 「데이터 분석 계획서」에서 다룬다. 본 보고서는 그 결과를 보고한다.</a:t>
             </a:r>
           </a:p>
         </p:txBody>
@@ -14076,7 +14076,7 @@
                 <a:latin typeface="맑은 고딕"/>
                 <a:ea typeface="맑은 고딕"/>
               </a:rPr>
-              <a:t>연구의 한계 (보고서 §9, 10개 중 핵심)</a:t>
+              <a:t>분석의 한계 (보고서 §9, 10개 중 핵심)</a:t>
             </a:r>
           </a:p>
           <a:p>
@@ -14729,7 +14729,7 @@
                 <a:latin typeface="맑은 고딕"/>
                 <a:ea typeface="맑은 고딕"/>
               </a:rPr>
-              <a:t>심도와 부담 중 무엇을 우선할지는 사회의 선택이다 — 본 연구의 기여는 그 선택을 명시적으로 만든 것이다.</a:t>
+              <a:t>심도와 부담 중 무엇을 우선할지는 사회의 선택이다 — 이 프로젝트의 기여는 그 선택을 명시적으로 만든 것이다.</a:t>
             </a:r>
           </a:p>
         </p:txBody>
@@ -14903,7 +14903,7 @@
                 <a:latin typeface="맑은 고딕"/>
                 <a:ea typeface="맑은 고딕"/>
               </a:rPr>
-              <a:t>연구 배경 — 분만취약지 제도와 접근성의 두 축</a:t>
+              <a:t>프로젝트 배경 — 분만취약지 제도와 접근성의 두 축</a:t>
             </a:r>
             <a:r>
               <a:rPr sz="2150" b="1" dirty="0">
@@ -15169,7 +15169,7 @@
                 <a:latin typeface="맑은 고딕"/>
                 <a:ea typeface="맑은 고딕"/>
               </a:rPr>
-              <a:t>무엇을 다루는 제도이고, 이 연구는 그중 무엇을 감사했는가</a:t>
+              <a:t>무엇을 다루는 제도이고, 이 프로젝트는 그중 무엇을 감사했는가</a:t>
             </a:r>
             <a:r>
               <a:rPr lang="en-US" altLang="ko-KR" sz="1250" b="0" dirty="0">
@@ -16181,7 +16181,7 @@
                 <a:latin typeface="맑은 고딕"/>
                 <a:ea typeface="맑은 고딕"/>
               </a:rPr>
-              <a:t>③ 이 연구가 감사한 것</a:t>
+              <a:t>③ 이 프로젝트가 감사한 것</a:t>
             </a:r>
             <a:r>
               <a:rPr lang="ko-KR" altLang="en-US" sz="1300" b="1" dirty="0">
@@ -16218,7 +16218,7 @@
                 <a:latin typeface="맑은 고딕"/>
                 <a:ea typeface="맑은 고딕"/>
               </a:rPr>
-              <a:t>• 자원이 모자란 것(㉠)은 예산·인력의 영역이라 데이터가 답할 수 없다. 있는 자원이 체계적으로 배분되지 않는 것(㉡)은 규칙의 문제이므로 데이터로 답할 수 있다 — 본 연구는 ㉡을 감사했다</a:t>
+              <a:t>• 자원이 모자란 것(㉠)은 예산·인력의 영역이라 데이터가 답할 수 없다. 있는 자원이 체계적으로 배분되지 않는 것(㉡)은 규칙의 문제이므로 데이터로 답할 수 있다 — 이 프로젝트는 ㉡을 감사했다</a:t>
             </a:r>
             <a:r>
               <a:rPr sz="1100" b="0" dirty="0" err="1">
@@ -21691,7 +21691,7 @@
                 <a:latin typeface="맑은 고딕"/>
                 <a:ea typeface="맑은 고딕"/>
               </a:rPr>
-              <a:t>RQ1</a:t>
+              <a:t>Q1</a:t>
             </a:r>
           </a:p>
         </p:txBody>
@@ -21991,7 +21991,7 @@
                 <a:latin typeface="맑은 고딕"/>
                 <a:ea typeface="맑은 고딕"/>
               </a:rPr>
-              <a:t>RQ2</a:t>
+              <a:t>Q2</a:t>
             </a:r>
           </a:p>
         </p:txBody>
@@ -22291,7 +22291,7 @@
                 <a:latin typeface="맑은 고딕"/>
                 <a:ea typeface="맑은 고딕"/>
               </a:rPr>
-              <a:t>RQ3</a:t>
+              <a:t>Q3</a:t>
             </a:r>
           </a:p>
         </p:txBody>
@@ -22591,7 +22591,7 @@
                 <a:latin typeface="맑은 고딕"/>
                 <a:ea typeface="맑은 고딕"/>
               </a:rPr>
-              <a:t>RQ4</a:t>
+              <a:t>Q4</a:t>
             </a:r>
           </a:p>
         </p:txBody>
@@ -23858,7 +23858,7 @@
                 <a:latin typeface="맑은 고딕"/>
                 <a:ea typeface="맑은 고딕"/>
               </a:rPr>
-              <a:t>• 옆 도시 병원이라도 60분 안이면 "이용됨" — 본 연구 지정 감사의 핵심 열쇠</a:t>
+              <a:t>• 옆 도시 병원이라도 60분 안이면 "이용됨" — 이 프로젝트 지정 감사의 핵심 열쇠</a:t>
             </a:r>
           </a:p>
         </p:txBody>

--- a/05_작업자료/_PPT생성본/데이터분석_결과보고서.pptx
+++ b/05_작업자료/_PPT생성본/데이터분석_결과보고서.pptx
@@ -5,29 +5,29 @@
     <p:sldMasterId id="2147483648" r:id="rId1"/>
   </p:sldMasterIdLst>
   <p:sldIdLst>
-    <p:sldId id="256" r:id="rId2"/>
-    <p:sldId id="276" r:id="rId26"/>
-    <p:sldId id="257" r:id="rId3"/>
-    <p:sldId id="258" r:id="rId4"/>
-    <p:sldId id="259" r:id="rId5"/>
-    <p:sldId id="260" r:id="rId6"/>
-    <p:sldId id="261" r:id="rId7"/>
-    <p:sldId id="262" r:id="rId8"/>
-    <p:sldId id="263" r:id="rId9"/>
-    <p:sldId id="264" r:id="rId10"/>
-    <p:sldId id="265" r:id="rId11"/>
-    <p:sldId id="266" r:id="rId12"/>
-    <p:sldId id="267" r:id="rId13"/>
-    <p:sldId id="268" r:id="rId14"/>
-    <p:sldId id="269" r:id="rId15"/>
-    <p:sldId id="270" r:id="rId16"/>
-    <p:sldId id="271" r:id="rId17"/>
-    <p:sldId id="272" r:id="rId18"/>
-    <p:sldId id="273" r:id="rId19"/>
-    <p:sldId id="274" r:id="rId20"/>
-    <p:sldId id="275" r:id="rId21"/>
+    <p:sldId id="256" r:id="rId7"/>
+    <p:sldId id="257" r:id="rId8"/>
+    <p:sldId id="258" r:id="rId9"/>
+    <p:sldId id="259" r:id="rId10"/>
+    <p:sldId id="260" r:id="rId11"/>
+    <p:sldId id="261" r:id="rId12"/>
+    <p:sldId id="262" r:id="rId13"/>
+    <p:sldId id="263" r:id="rId14"/>
+    <p:sldId id="264" r:id="rId15"/>
+    <p:sldId id="265" r:id="rId16"/>
+    <p:sldId id="266" r:id="rId17"/>
+    <p:sldId id="267" r:id="rId18"/>
+    <p:sldId id="268" r:id="rId19"/>
+    <p:sldId id="269" r:id="rId20"/>
+    <p:sldId id="270" r:id="rId21"/>
+    <p:sldId id="271" r:id="rId22"/>
+    <p:sldId id="272" r:id="rId23"/>
+    <p:sldId id="273" r:id="rId24"/>
+    <p:sldId id="274" r:id="rId25"/>
+    <p:sldId id="275" r:id="rId26"/>
+    <p:sldId id="276" r:id="rId27"/>
   </p:sldIdLst>
-  <p:sldSz cx="12192000" cy="6858000"/>
+  <p:sldSz cx="12191695" cy="6858000" type="screen4x3"/>
   <p:notesSz cx="6858000" cy="9144000"/>
   <p:defaultTextStyle>
     <a:defPPr>
@@ -124,22 +124,6 @@
       </a:defRPr>
     </a:lvl9pPr>
   </p:defaultTextStyle>
-  <p:extLst>
-    <p:ext uri="{EFAFB233-063F-42B5-8137-9DF3F51BA10A}">
-      <p15:sldGuideLst xmlns:p15="http://schemas.microsoft.com/office/powerpoint/2012/main">
-        <p15:guide id="1" orient="horz" pos="2160">
-          <p15:clr>
-            <a:srgbClr val="A4A3A4"/>
-          </p15:clr>
-        </p15:guide>
-        <p15:guide id="2" pos="2880">
-          <p15:clr>
-            <a:srgbClr val="A4A3A4"/>
-          </p15:clr>
-        </p15:guide>
-      </p15:sldGuideLst>
-    </p:ext>
-  </p:extLst>
 </p:presentation>
 </file>
 
@@ -181,9 +165,10 @@
           <a:lstStyle/>
           <a:p>
             <a:r>
-              <a:rPr lang="en-US"/>
+              <a:rPr lang="en-US" smtClean="0"/>
               <a:t>Click to edit Master title style</a:t>
             </a:r>
+            <a:endParaRPr lang="en-US"/>
           </a:p>
         </p:txBody>
       </p:sp>
@@ -299,9 +284,10 @@
           </a:lstStyle>
           <a:p>
             <a:r>
-              <a:rPr lang="en-US"/>
+              <a:rPr lang="en-US" smtClean="0"/>
               <a:t>Click to edit Master subtitle style</a:t>
             </a:r>
+            <a:endParaRPr lang="en-US"/>
           </a:p>
         </p:txBody>
       </p:sp>
@@ -322,7 +308,7 @@
           <a:p>
             <a:fld id="{5BCAD085-E8A6-8845-BD4E-CB4CCA059FC4}" type="datetimeFigureOut">
               <a:rPr lang="en-US" smtClean="0"/>
-              <a:t>8/12/2026</a:t>
+              <a:t>1/27/13</a:t>
             </a:fld>
             <a:endParaRPr lang="en-US"/>
           </a:p>
@@ -416,9 +402,10 @@
           <a:lstStyle/>
           <a:p>
             <a:r>
-              <a:rPr lang="en-US"/>
+              <a:rPr lang="en-US" smtClean="0"/>
               <a:t>Click to edit Master title style</a:t>
             </a:r>
+            <a:endParaRPr lang="en-US"/>
           </a:p>
         </p:txBody>
       </p:sp>
@@ -439,37 +426,38 @@
           <a:p>
             <a:pPr lvl="0"/>
             <a:r>
-              <a:rPr lang="en-US"/>
+              <a:rPr lang="en-US" smtClean="0"/>
               <a:t>Click to edit Master text styles</a:t>
             </a:r>
           </a:p>
           <a:p>
             <a:pPr lvl="1"/>
             <a:r>
-              <a:rPr lang="en-US"/>
+              <a:rPr lang="en-US" smtClean="0"/>
               <a:t>Second level</a:t>
             </a:r>
           </a:p>
           <a:p>
             <a:pPr lvl="2"/>
             <a:r>
-              <a:rPr lang="en-US"/>
+              <a:rPr lang="en-US" smtClean="0"/>
               <a:t>Third level</a:t>
             </a:r>
           </a:p>
           <a:p>
             <a:pPr lvl="3"/>
             <a:r>
-              <a:rPr lang="en-US"/>
+              <a:rPr lang="en-US" smtClean="0"/>
               <a:t>Fourth level</a:t>
             </a:r>
           </a:p>
           <a:p>
             <a:pPr lvl="4"/>
             <a:r>
-              <a:rPr lang="en-US"/>
+              <a:rPr lang="en-US" smtClean="0"/>
               <a:t>Fifth level</a:t>
             </a:r>
+            <a:endParaRPr lang="en-US"/>
           </a:p>
         </p:txBody>
       </p:sp>
@@ -490,7 +478,7 @@
           <a:p>
             <a:fld id="{5BCAD085-E8A6-8845-BD4E-CB4CCA059FC4}" type="datetimeFigureOut">
               <a:rPr lang="en-US" smtClean="0"/>
-              <a:t>8/12/2026</a:t>
+              <a:t>1/27/13</a:t>
             </a:fld>
             <a:endParaRPr lang="en-US"/>
           </a:p>
@@ -589,9 +577,10 @@
           <a:lstStyle/>
           <a:p>
             <a:r>
-              <a:rPr lang="en-US"/>
+              <a:rPr lang="en-US" smtClean="0"/>
               <a:t>Click to edit Master title style</a:t>
             </a:r>
+            <a:endParaRPr lang="en-US"/>
           </a:p>
         </p:txBody>
       </p:sp>
@@ -617,37 +606,38 @@
           <a:p>
             <a:pPr lvl="0"/>
             <a:r>
-              <a:rPr lang="en-US"/>
+              <a:rPr lang="en-US" smtClean="0"/>
               <a:t>Click to edit Master text styles</a:t>
             </a:r>
           </a:p>
           <a:p>
             <a:pPr lvl="1"/>
             <a:r>
-              <a:rPr lang="en-US"/>
+              <a:rPr lang="en-US" smtClean="0"/>
               <a:t>Second level</a:t>
             </a:r>
           </a:p>
           <a:p>
             <a:pPr lvl="2"/>
             <a:r>
-              <a:rPr lang="en-US"/>
+              <a:rPr lang="en-US" smtClean="0"/>
               <a:t>Third level</a:t>
             </a:r>
           </a:p>
           <a:p>
             <a:pPr lvl="3"/>
             <a:r>
-              <a:rPr lang="en-US"/>
+              <a:rPr lang="en-US" smtClean="0"/>
               <a:t>Fourth level</a:t>
             </a:r>
           </a:p>
           <a:p>
             <a:pPr lvl="4"/>
             <a:r>
-              <a:rPr lang="en-US"/>
+              <a:rPr lang="en-US" smtClean="0"/>
               <a:t>Fifth level</a:t>
             </a:r>
+            <a:endParaRPr lang="en-US"/>
           </a:p>
         </p:txBody>
       </p:sp>
@@ -668,7 +658,7 @@
           <a:p>
             <a:fld id="{5BCAD085-E8A6-8845-BD4E-CB4CCA059FC4}" type="datetimeFigureOut">
               <a:rPr lang="en-US" smtClean="0"/>
-              <a:t>8/12/2026</a:t>
+              <a:t>1/27/13</a:t>
             </a:fld>
             <a:endParaRPr lang="en-US"/>
           </a:p>
@@ -762,9 +752,10 @@
           <a:lstStyle/>
           <a:p>
             <a:r>
-              <a:rPr lang="en-US"/>
+              <a:rPr lang="en-US" smtClean="0"/>
               <a:t>Click to edit Master title style</a:t>
             </a:r>
+            <a:endParaRPr lang="en-US"/>
           </a:p>
         </p:txBody>
       </p:sp>
@@ -785,37 +776,38 @@
           <a:p>
             <a:pPr lvl="0"/>
             <a:r>
-              <a:rPr lang="en-US"/>
+              <a:rPr lang="en-US" smtClean="0"/>
               <a:t>Click to edit Master text styles</a:t>
             </a:r>
           </a:p>
           <a:p>
             <a:pPr lvl="1"/>
             <a:r>
-              <a:rPr lang="en-US"/>
+              <a:rPr lang="en-US" smtClean="0"/>
               <a:t>Second level</a:t>
             </a:r>
           </a:p>
           <a:p>
             <a:pPr lvl="2"/>
             <a:r>
-              <a:rPr lang="en-US"/>
+              <a:rPr lang="en-US" smtClean="0"/>
               <a:t>Third level</a:t>
             </a:r>
           </a:p>
           <a:p>
             <a:pPr lvl="3"/>
             <a:r>
-              <a:rPr lang="en-US"/>
+              <a:rPr lang="en-US" smtClean="0"/>
               <a:t>Fourth level</a:t>
             </a:r>
           </a:p>
           <a:p>
             <a:pPr lvl="4"/>
             <a:r>
-              <a:rPr lang="en-US"/>
+              <a:rPr lang="en-US" smtClean="0"/>
               <a:t>Fifth level</a:t>
             </a:r>
+            <a:endParaRPr lang="en-US"/>
           </a:p>
         </p:txBody>
       </p:sp>
@@ -836,7 +828,7 @@
           <a:p>
             <a:fld id="{5BCAD085-E8A6-8845-BD4E-CB4CCA059FC4}" type="datetimeFigureOut">
               <a:rPr lang="en-US" smtClean="0"/>
-              <a:t>8/12/2026</a:t>
+              <a:t>1/27/13</a:t>
             </a:fld>
             <a:endParaRPr lang="en-US"/>
           </a:p>
@@ -939,9 +931,10 @@
           </a:lstStyle>
           <a:p>
             <a:r>
-              <a:rPr lang="en-US"/>
+              <a:rPr lang="en-US" smtClean="0"/>
               <a:t>Click to edit Master title style</a:t>
             </a:r>
+            <a:endParaRPr lang="en-US"/>
           </a:p>
         </p:txBody>
       </p:sp>
@@ -1058,7 +1051,7 @@
           <a:p>
             <a:pPr lvl="0"/>
             <a:r>
-              <a:rPr lang="en-US"/>
+              <a:rPr lang="en-US" smtClean="0"/>
               <a:t>Click to edit Master text styles</a:t>
             </a:r>
           </a:p>
@@ -1081,7 +1074,7 @@
           <a:p>
             <a:fld id="{5BCAD085-E8A6-8845-BD4E-CB4CCA059FC4}" type="datetimeFigureOut">
               <a:rPr lang="en-US" smtClean="0"/>
-              <a:t>8/12/2026</a:t>
+              <a:t>1/27/13</a:t>
             </a:fld>
             <a:endParaRPr lang="en-US"/>
           </a:p>
@@ -1175,9 +1168,10 @@
           <a:lstStyle/>
           <a:p>
             <a:r>
-              <a:rPr lang="en-US"/>
+              <a:rPr lang="en-US" smtClean="0"/>
               <a:t>Click to edit Master title style</a:t>
             </a:r>
+            <a:endParaRPr lang="en-US"/>
           </a:p>
         </p:txBody>
       </p:sp>
@@ -1231,37 +1225,38 @@
           <a:p>
             <a:pPr lvl="0"/>
             <a:r>
-              <a:rPr lang="en-US"/>
+              <a:rPr lang="en-US" smtClean="0"/>
               <a:t>Click to edit Master text styles</a:t>
             </a:r>
           </a:p>
           <a:p>
             <a:pPr lvl="1"/>
             <a:r>
-              <a:rPr lang="en-US"/>
+              <a:rPr lang="en-US" smtClean="0"/>
               <a:t>Second level</a:t>
             </a:r>
           </a:p>
           <a:p>
             <a:pPr lvl="2"/>
             <a:r>
-              <a:rPr lang="en-US"/>
+              <a:rPr lang="en-US" smtClean="0"/>
               <a:t>Third level</a:t>
             </a:r>
           </a:p>
           <a:p>
             <a:pPr lvl="3"/>
             <a:r>
-              <a:rPr lang="en-US"/>
+              <a:rPr lang="en-US" smtClean="0"/>
               <a:t>Fourth level</a:t>
             </a:r>
           </a:p>
           <a:p>
             <a:pPr lvl="4"/>
             <a:r>
-              <a:rPr lang="en-US"/>
+              <a:rPr lang="en-US" smtClean="0"/>
               <a:t>Fifth level</a:t>
             </a:r>
+            <a:endParaRPr lang="en-US"/>
           </a:p>
         </p:txBody>
       </p:sp>
@@ -1315,37 +1310,38 @@
           <a:p>
             <a:pPr lvl="0"/>
             <a:r>
-              <a:rPr lang="en-US"/>
+              <a:rPr lang="en-US" smtClean="0"/>
               <a:t>Click to edit Master text styles</a:t>
             </a:r>
           </a:p>
           <a:p>
             <a:pPr lvl="1"/>
             <a:r>
-              <a:rPr lang="en-US"/>
+              <a:rPr lang="en-US" smtClean="0"/>
               <a:t>Second level</a:t>
             </a:r>
           </a:p>
           <a:p>
             <a:pPr lvl="2"/>
             <a:r>
-              <a:rPr lang="en-US"/>
+              <a:rPr lang="en-US" smtClean="0"/>
               <a:t>Third level</a:t>
             </a:r>
           </a:p>
           <a:p>
             <a:pPr lvl="3"/>
             <a:r>
-              <a:rPr lang="en-US"/>
+              <a:rPr lang="en-US" smtClean="0"/>
               <a:t>Fourth level</a:t>
             </a:r>
           </a:p>
           <a:p>
             <a:pPr lvl="4"/>
             <a:r>
-              <a:rPr lang="en-US"/>
+              <a:rPr lang="en-US" smtClean="0"/>
               <a:t>Fifth level</a:t>
             </a:r>
+            <a:endParaRPr lang="en-US"/>
           </a:p>
         </p:txBody>
       </p:sp>
@@ -1366,7 +1362,7 @@
           <a:p>
             <a:fld id="{5BCAD085-E8A6-8845-BD4E-CB4CCA059FC4}" type="datetimeFigureOut">
               <a:rPr lang="en-US" smtClean="0"/>
-              <a:t>8/12/2026</a:t>
+              <a:t>1/27/13</a:t>
             </a:fld>
             <a:endParaRPr lang="en-US"/>
           </a:p>
@@ -1464,9 +1460,10 @@
           </a:lstStyle>
           <a:p>
             <a:r>
-              <a:rPr lang="en-US"/>
+              <a:rPr lang="en-US" smtClean="0"/>
               <a:t>Click to edit Master title style</a:t>
             </a:r>
+            <a:endParaRPr lang="en-US"/>
           </a:p>
         </p:txBody>
       </p:sp>
@@ -1529,7 +1526,7 @@
           <a:p>
             <a:pPr lvl="0"/>
             <a:r>
-              <a:rPr lang="en-US"/>
+              <a:rPr lang="en-US" smtClean="0"/>
               <a:t>Click to edit Master text styles</a:t>
             </a:r>
           </a:p>
@@ -1585,37 +1582,38 @@
           <a:p>
             <a:pPr lvl="0"/>
             <a:r>
-              <a:rPr lang="en-US"/>
+              <a:rPr lang="en-US" smtClean="0"/>
               <a:t>Click to edit Master text styles</a:t>
             </a:r>
           </a:p>
           <a:p>
             <a:pPr lvl="1"/>
             <a:r>
-              <a:rPr lang="en-US"/>
+              <a:rPr lang="en-US" smtClean="0"/>
               <a:t>Second level</a:t>
             </a:r>
           </a:p>
           <a:p>
             <a:pPr lvl="2"/>
             <a:r>
-              <a:rPr lang="en-US"/>
+              <a:rPr lang="en-US" smtClean="0"/>
               <a:t>Third level</a:t>
             </a:r>
           </a:p>
           <a:p>
             <a:pPr lvl="3"/>
             <a:r>
-              <a:rPr lang="en-US"/>
+              <a:rPr lang="en-US" smtClean="0"/>
               <a:t>Fourth level</a:t>
             </a:r>
           </a:p>
           <a:p>
             <a:pPr lvl="4"/>
             <a:r>
-              <a:rPr lang="en-US"/>
+              <a:rPr lang="en-US" smtClean="0"/>
               <a:t>Fifth level</a:t>
             </a:r>
+            <a:endParaRPr lang="en-US"/>
           </a:p>
         </p:txBody>
       </p:sp>
@@ -1678,7 +1676,7 @@
           <a:p>
             <a:pPr lvl="0"/>
             <a:r>
-              <a:rPr lang="en-US"/>
+              <a:rPr lang="en-US" smtClean="0"/>
               <a:t>Click to edit Master text styles</a:t>
             </a:r>
           </a:p>
@@ -1734,37 +1732,38 @@
           <a:p>
             <a:pPr lvl="0"/>
             <a:r>
-              <a:rPr lang="en-US"/>
+              <a:rPr lang="en-US" smtClean="0"/>
               <a:t>Click to edit Master text styles</a:t>
             </a:r>
           </a:p>
           <a:p>
             <a:pPr lvl="1"/>
             <a:r>
-              <a:rPr lang="en-US"/>
+              <a:rPr lang="en-US" smtClean="0"/>
               <a:t>Second level</a:t>
             </a:r>
           </a:p>
           <a:p>
             <a:pPr lvl="2"/>
             <a:r>
-              <a:rPr lang="en-US"/>
+              <a:rPr lang="en-US" smtClean="0"/>
               <a:t>Third level</a:t>
             </a:r>
           </a:p>
           <a:p>
             <a:pPr lvl="3"/>
             <a:r>
-              <a:rPr lang="en-US"/>
+              <a:rPr lang="en-US" smtClean="0"/>
               <a:t>Fourth level</a:t>
             </a:r>
           </a:p>
           <a:p>
             <a:pPr lvl="4"/>
             <a:r>
-              <a:rPr lang="en-US"/>
+              <a:rPr lang="en-US" smtClean="0"/>
               <a:t>Fifth level</a:t>
             </a:r>
+            <a:endParaRPr lang="en-US"/>
           </a:p>
         </p:txBody>
       </p:sp>
@@ -1785,7 +1784,7 @@
           <a:p>
             <a:fld id="{5BCAD085-E8A6-8845-BD4E-CB4CCA059FC4}" type="datetimeFigureOut">
               <a:rPr lang="en-US" smtClean="0"/>
-              <a:t>8/12/2026</a:t>
+              <a:t>1/27/13</a:t>
             </a:fld>
             <a:endParaRPr lang="en-US"/>
           </a:p>
@@ -1879,9 +1878,10 @@
           <a:lstStyle/>
           <a:p>
             <a:r>
-              <a:rPr lang="en-US"/>
+              <a:rPr lang="en-US" smtClean="0"/>
               <a:t>Click to edit Master title style</a:t>
             </a:r>
+            <a:endParaRPr lang="en-US"/>
           </a:p>
         </p:txBody>
       </p:sp>
@@ -1902,7 +1902,7 @@
           <a:p>
             <a:fld id="{5BCAD085-E8A6-8845-BD4E-CB4CCA059FC4}" type="datetimeFigureOut">
               <a:rPr lang="en-US" smtClean="0"/>
-              <a:t>8/12/2026</a:t>
+              <a:t>1/27/13</a:t>
             </a:fld>
             <a:endParaRPr lang="en-US"/>
           </a:p>
@@ -1997,7 +1997,7 @@
           <a:p>
             <a:fld id="{5BCAD085-E8A6-8845-BD4E-CB4CCA059FC4}" type="datetimeFigureOut">
               <a:rPr lang="en-US" smtClean="0"/>
-              <a:t>8/12/2026</a:t>
+              <a:t>1/27/13</a:t>
             </a:fld>
             <a:endParaRPr lang="en-US"/>
           </a:p>
@@ -2100,9 +2100,10 @@
           </a:lstStyle>
           <a:p>
             <a:r>
-              <a:rPr lang="en-US"/>
+              <a:rPr lang="en-US" smtClean="0"/>
               <a:t>Click to edit Master title style</a:t>
             </a:r>
+            <a:endParaRPr lang="en-US"/>
           </a:p>
         </p:txBody>
       </p:sp>
@@ -2156,37 +2157,38 @@
           <a:p>
             <a:pPr lvl="0"/>
             <a:r>
-              <a:rPr lang="en-US"/>
+              <a:rPr lang="en-US" smtClean="0"/>
               <a:t>Click to edit Master text styles</a:t>
             </a:r>
           </a:p>
           <a:p>
             <a:pPr lvl="1"/>
             <a:r>
-              <a:rPr lang="en-US"/>
+              <a:rPr lang="en-US" smtClean="0"/>
               <a:t>Second level</a:t>
             </a:r>
           </a:p>
           <a:p>
             <a:pPr lvl="2"/>
             <a:r>
-              <a:rPr lang="en-US"/>
+              <a:rPr lang="en-US" smtClean="0"/>
               <a:t>Third level</a:t>
             </a:r>
           </a:p>
           <a:p>
             <a:pPr lvl="3"/>
             <a:r>
-              <a:rPr lang="en-US"/>
+              <a:rPr lang="en-US" smtClean="0"/>
               <a:t>Fourth level</a:t>
             </a:r>
           </a:p>
           <a:p>
             <a:pPr lvl="4"/>
             <a:r>
-              <a:rPr lang="en-US"/>
+              <a:rPr lang="en-US" smtClean="0"/>
               <a:t>Fifth level</a:t>
             </a:r>
+            <a:endParaRPr lang="en-US"/>
           </a:p>
         </p:txBody>
       </p:sp>
@@ -2249,7 +2251,7 @@
           <a:p>
             <a:pPr lvl="0"/>
             <a:r>
-              <a:rPr lang="en-US"/>
+              <a:rPr lang="en-US" smtClean="0"/>
               <a:t>Click to edit Master text styles</a:t>
             </a:r>
           </a:p>
@@ -2272,7 +2274,7 @@
           <a:p>
             <a:fld id="{5BCAD085-E8A6-8845-BD4E-CB4CCA059FC4}" type="datetimeFigureOut">
               <a:rPr lang="en-US" smtClean="0"/>
-              <a:t>8/12/2026</a:t>
+              <a:t>1/27/13</a:t>
             </a:fld>
             <a:endParaRPr lang="en-US"/>
           </a:p>
@@ -2375,9 +2377,10 @@
           </a:lstStyle>
           <a:p>
             <a:r>
-              <a:rPr lang="en-US"/>
+              <a:rPr lang="en-US" smtClean="0"/>
               <a:t>Click to edit Master title style</a:t>
             </a:r>
+            <a:endParaRPr lang="en-US"/>
           </a:p>
         </p:txBody>
       </p:sp>
@@ -2501,7 +2504,7 @@
           <a:p>
             <a:pPr lvl="0"/>
             <a:r>
-              <a:rPr lang="en-US"/>
+              <a:rPr lang="en-US" smtClean="0"/>
               <a:t>Click to edit Master text styles</a:t>
             </a:r>
           </a:p>
@@ -2524,7 +2527,7 @@
           <a:p>
             <a:fld id="{5BCAD085-E8A6-8845-BD4E-CB4CCA059FC4}" type="datetimeFigureOut">
               <a:rPr lang="en-US" smtClean="0"/>
-              <a:t>8/12/2026</a:t>
+              <a:t>1/27/13</a:t>
             </a:fld>
             <a:endParaRPr lang="en-US"/>
           </a:p>
@@ -2633,9 +2636,10 @@
           <a:lstStyle/>
           <a:p>
             <a:r>
-              <a:rPr lang="en-US"/>
+              <a:rPr lang="en-US" smtClean="0"/>
               <a:t>Click to edit Master title style</a:t>
             </a:r>
+            <a:endParaRPr lang="en-US"/>
           </a:p>
         </p:txBody>
       </p:sp>
@@ -2666,37 +2670,38 @@
           <a:p>
             <a:pPr lvl="0"/>
             <a:r>
-              <a:rPr lang="en-US"/>
+              <a:rPr lang="en-US" smtClean="0"/>
               <a:t>Click to edit Master text styles</a:t>
             </a:r>
           </a:p>
           <a:p>
             <a:pPr lvl="1"/>
             <a:r>
-              <a:rPr lang="en-US"/>
+              <a:rPr lang="en-US" smtClean="0"/>
               <a:t>Second level</a:t>
             </a:r>
           </a:p>
           <a:p>
             <a:pPr lvl="2"/>
             <a:r>
-              <a:rPr lang="en-US"/>
+              <a:rPr lang="en-US" smtClean="0"/>
               <a:t>Third level</a:t>
             </a:r>
           </a:p>
           <a:p>
             <a:pPr lvl="3"/>
             <a:r>
-              <a:rPr lang="en-US"/>
+              <a:rPr lang="en-US" smtClean="0"/>
               <a:t>Fourth level</a:t>
             </a:r>
           </a:p>
           <a:p>
             <a:pPr lvl="4"/>
             <a:r>
-              <a:rPr lang="en-US"/>
+              <a:rPr lang="en-US" smtClean="0"/>
               <a:t>Fifth level</a:t>
             </a:r>
+            <a:endParaRPr lang="en-US"/>
           </a:p>
         </p:txBody>
       </p:sp>
@@ -2735,7 +2740,7 @@
           <a:p>
             <a:fld id="{5BCAD085-E8A6-8845-BD4E-CB4CCA059FC4}" type="datetimeFigureOut">
               <a:rPr lang="en-US" smtClean="0"/>
-              <a:t>8/12/2026</a:t>
+              <a:t>1/27/13</a:t>
             </a:fld>
             <a:endParaRPr lang="en-US"/>
           </a:p>
@@ -3094,7 +3099,7 @@
 </file>
 
 <file path=ppt/slides/slide1.xml><?xml version="1.0" encoding="utf-8"?>
-<p:sld xmlns:a="http://schemas.openxmlformats.org/drawingml/2006/main" xmlns:r="http://schemas.openxmlformats.org/officeDocument/2006/relationships" xmlns:p="http://schemas.openxmlformats.org/presentationml/2006/main">
+<p:sld xmlns:a="http://schemas.openxmlformats.org/drawingml/2006/main" xmlns:p="http://schemas.openxmlformats.org/presentationml/2006/main" xmlns:r="http://schemas.openxmlformats.org/officeDocument/2006/relationships">
   <p:cSld>
     <p:spTree>
       <p:nvGrpSpPr>
@@ -3102,14 +3107,51 @@
         <p:cNvGrpSpPr/>
         <p:nvPr/>
       </p:nvGrpSpPr>
-      <p:grpSpPr>
-        <a:xfrm>
-          <a:off x="0" y="0"/>
-          <a:ext cx="0" cy="0"/>
-          <a:chOff x="0" y="0"/>
-          <a:chExt cx="0" cy="0"/>
-        </a:xfrm>
-      </p:grpSpPr>
+      <p:grpSpPr/>
+      <p:sp>
+        <p:nvSpPr>
+          <p:cNvPr id="2" name="Rectangle 1"/>
+          <p:cNvSpPr/>
+          <p:nvPr/>
+        </p:nvSpPr>
+        <p:spPr>
+          <a:xfrm>
+            <a:off x="0" y="0"/>
+            <a:ext cx="12191695" cy="6858000"/>
+          </a:xfrm>
+          <a:prstGeom prst="rect">
+            <a:avLst/>
+          </a:prstGeom>
+          <a:solidFill>
+            <a:srgbClr val="FFFFFF"/>
+          </a:solidFill>
+          <a:ln>
+            <a:noFill/>
+          </a:ln>
+          <a:effectLst/>
+        </p:spPr>
+        <p:style>
+          <a:lnRef idx="1">
+            <a:schemeClr val="accent1"/>
+          </a:lnRef>
+          <a:fillRef idx="3">
+            <a:schemeClr val="accent1"/>
+          </a:fillRef>
+          <a:effectRef idx="2">
+            <a:schemeClr val="accent1"/>
+          </a:effectRef>
+          <a:fontRef idx="minor">
+            <a:schemeClr val="lt1"/>
+          </a:fontRef>
+        </p:style>
+        <p:txBody>
+          <a:bodyPr rtlCol="0" anchor="ctr"/>
+          <a:lstStyle/>
+          <a:p>
+            <a:pPr algn="ctr"/>
+          </a:p>
+        </p:txBody>
+      </p:sp>
       <p:sp>
         <p:nvSpPr>
           <p:cNvPr id="3" name="Rounded Rectangle 2"/>
@@ -3135,7 +3177,7 @@
                 <a:srgbClr val="73787E"/>
               </a:gs>
             </a:gsLst>
-            <a:lin ang="18900000" scaled="0"/>
+            <a:lin scaled="0" ang="18900000"/>
           </a:gradFill>
           <a:ln>
             <a:noFill/>
@@ -3167,7 +3209,6 @@
           <a:lstStyle/>
           <a:p>
             <a:pPr algn="ctr"/>
-            <a:endParaRPr/>
           </a:p>
         </p:txBody>
       </p:sp>
@@ -3179,8 +3220,8 @@
         </p:nvSpPr>
         <p:spPr>
           <a:xfrm>
-            <a:off x="914399" y="1481328"/>
-            <a:ext cx="8464063" cy="1769267"/>
+            <a:off x="914400" y="1481328"/>
+            <a:ext cx="8467344" cy="1764792"/>
           </a:xfrm>
           <a:prstGeom prst="rect">
             <a:avLst/>
@@ -3202,62 +3243,15 @@
               </a:spcAft>
             </a:pPr>
             <a:r>
-              <a:rPr sz="1450" b="0" dirty="0" err="1">
+              <a:rPr sz="1450" b="0">
                 <a:solidFill>
                   <a:srgbClr val="767A7F"/>
                 </a:solidFill>
                 <a:latin typeface="맑은 고딕"/>
                 <a:ea typeface="맑은 고딕"/>
               </a:rPr>
-              <a:t>데이터</a:t>
-            </a:r>
-            <a:r>
-              <a:rPr sz="1450" b="0" dirty="0">
-                <a:solidFill>
-                  <a:srgbClr val="767A7F"/>
-                </a:solidFill>
-                <a:latin typeface="맑은 고딕"/>
-                <a:ea typeface="맑은 고딕"/>
-              </a:rPr>
-              <a:t> </a:t>
-            </a:r>
-            <a:r>
-              <a:rPr sz="1450" b="0" dirty="0" err="1">
-                <a:solidFill>
-                  <a:srgbClr val="767A7F"/>
-                </a:solidFill>
-                <a:latin typeface="맑은 고딕"/>
-                <a:ea typeface="맑은 고딕"/>
-              </a:rPr>
-              <a:t>분석</a:t>
-            </a:r>
-            <a:r>
-              <a:rPr sz="1450" b="0" dirty="0">
-                <a:solidFill>
-                  <a:srgbClr val="767A7F"/>
-                </a:solidFill>
-                <a:latin typeface="맑은 고딕"/>
-                <a:ea typeface="맑은 고딕"/>
-              </a:rPr>
-              <a:t> </a:t>
-            </a:r>
-            <a:r>
-              <a:rPr sz="1450" b="0" dirty="0" err="1">
-                <a:solidFill>
-                  <a:srgbClr val="767A7F"/>
-                </a:solidFill>
-                <a:latin typeface="맑은 고딕"/>
-                <a:ea typeface="맑은 고딕"/>
-              </a:rPr>
-              <a:t>결과보고서</a:t>
-            </a:r>
-            <a:endParaRPr sz="1450" b="0" dirty="0">
-              <a:solidFill>
-                <a:srgbClr val="767A7F"/>
-              </a:solidFill>
-              <a:latin typeface="맑은 고딕"/>
-              <a:ea typeface="맑은 고딕"/>
-            </a:endParaRPr>
+              <a:t>데이터 분석 결과보고서</a:t>
+            </a:r>
           </a:p>
           <a:p>
             <a:pPr>
@@ -3269,7 +3263,7 @@
               </a:spcAft>
             </a:pPr>
             <a:r>
-              <a:rPr lang="ko-KR" altLang="en-US" sz="4700" b="1" dirty="0">
+              <a:rPr sz="4700" b="1">
                 <a:solidFill>
                   <a:srgbClr val="1C1C1E"/>
                 </a:solidFill>
@@ -3278,13 +3272,6 @@
               </a:rPr>
               <a:t>분만취약지 지원제도 개선안</a:t>
             </a:r>
-            <a:endParaRPr lang="en-US" altLang="ko-KR" sz="1900" dirty="0">
-              <a:solidFill>
-                <a:srgbClr val="33393F"/>
-              </a:solidFill>
-              <a:latin typeface="맑은 고딕"/>
-              <a:ea typeface="맑은 고딕"/>
-            </a:endParaRPr>
           </a:p>
           <a:p>
             <a:pPr>
@@ -3292,156 +3279,19 @@
                 <a:spcPct val="114000"/>
               </a:lnSpc>
               <a:spcAft>
-                <a:spcPts val="800"/>
-              </a:spcAft>
-            </a:pPr>
-            <a:r>
-              <a:rPr sz="1900" b="0" dirty="0" err="1">
+                <a:spcPts val="0"/>
+              </a:spcAft>
+            </a:pPr>
+            <a:r>
+              <a:rPr sz="1900" b="0">
                 <a:solidFill>
                   <a:srgbClr val="33393F"/>
                 </a:solidFill>
                 <a:latin typeface="맑은 고딕"/>
                 <a:ea typeface="맑은 고딕"/>
               </a:rPr>
-              <a:t>분만취약지</a:t>
-            </a:r>
-            <a:r>
-              <a:rPr sz="1900" b="0" dirty="0">
-                <a:solidFill>
-                  <a:srgbClr val="33393F"/>
-                </a:solidFill>
-                <a:latin typeface="맑은 고딕"/>
-                <a:ea typeface="맑은 고딕"/>
-              </a:rPr>
-              <a:t> </a:t>
-            </a:r>
-            <a:r>
-              <a:rPr lang="ko-KR" altLang="en-US" sz="1900" b="0" dirty="0">
-                <a:solidFill>
-                  <a:srgbClr val="33393F"/>
-                </a:solidFill>
-                <a:latin typeface="맑은 고딕"/>
-                <a:ea typeface="맑은 고딕"/>
-              </a:rPr>
-              <a:t>지원 </a:t>
-            </a:r>
-            <a:r>
-              <a:rPr sz="1900" b="0" dirty="0" err="1">
-                <a:solidFill>
-                  <a:srgbClr val="33393F"/>
-                </a:solidFill>
-                <a:latin typeface="맑은 고딕"/>
-                <a:ea typeface="맑은 고딕"/>
-              </a:rPr>
-              <a:t>제도의</a:t>
-            </a:r>
-            <a:r>
-              <a:rPr sz="1900" b="0" dirty="0">
-                <a:solidFill>
-                  <a:srgbClr val="33393F"/>
-                </a:solidFill>
-                <a:latin typeface="맑은 고딕"/>
-                <a:ea typeface="맑은 고딕"/>
-              </a:rPr>
-              <a:t> </a:t>
-            </a:r>
-            <a:r>
-              <a:rPr lang="ko-KR" altLang="en-US" sz="1900" b="0" dirty="0">
-                <a:solidFill>
-                  <a:srgbClr val="33393F"/>
-                </a:solidFill>
-                <a:latin typeface="맑은 고딕"/>
-                <a:ea typeface="맑은 고딕"/>
-              </a:rPr>
-              <a:t>모든 절차 속 데이터</a:t>
-            </a:r>
-            <a:r>
-              <a:rPr sz="1900" b="0" dirty="0">
-                <a:solidFill>
-                  <a:srgbClr val="33393F"/>
-                </a:solidFill>
-                <a:latin typeface="맑은 고딕"/>
-                <a:ea typeface="맑은 고딕"/>
-              </a:rPr>
-              <a:t> </a:t>
-            </a:r>
-            <a:r>
-              <a:rPr sz="1900" b="0" dirty="0" err="1">
-                <a:solidFill>
-                  <a:srgbClr val="33393F"/>
-                </a:solidFill>
-                <a:latin typeface="맑은 고딕"/>
-                <a:ea typeface="맑은 고딕"/>
-              </a:rPr>
-              <a:t>감사와</a:t>
-            </a:r>
-            <a:r>
-              <a:rPr sz="1900" b="0" dirty="0">
-                <a:solidFill>
-                  <a:srgbClr val="33393F"/>
-                </a:solidFill>
-                <a:latin typeface="맑은 고딕"/>
-                <a:ea typeface="맑은 고딕"/>
-              </a:rPr>
-              <a:t> </a:t>
-            </a:r>
-            <a:r>
-              <a:rPr lang="ko-KR" altLang="en-US" sz="1900" dirty="0">
-                <a:solidFill>
-                  <a:srgbClr val="33393F"/>
-                </a:solidFill>
-                <a:latin typeface="맑은 고딕"/>
-                <a:ea typeface="맑은 고딕"/>
-              </a:rPr>
-              <a:t>개선된 분석</a:t>
-            </a:r>
-            <a:r>
-              <a:rPr sz="1900" b="0" dirty="0">
-                <a:solidFill>
-                  <a:srgbClr val="33393F"/>
-                </a:solidFill>
-                <a:latin typeface="맑은 고딕"/>
-                <a:ea typeface="맑은 고딕"/>
-              </a:rPr>
-              <a:t> </a:t>
-            </a:r>
-            <a:r>
-              <a:rPr sz="1900" b="0" dirty="0" err="1">
-                <a:solidFill>
-                  <a:srgbClr val="33393F"/>
-                </a:solidFill>
-                <a:latin typeface="맑은 고딕"/>
-                <a:ea typeface="맑은 고딕"/>
-              </a:rPr>
-              <a:t>모형</a:t>
-            </a:r>
-            <a:r>
-              <a:rPr lang="en-US" sz="1900" b="0" dirty="0">
-                <a:solidFill>
-                  <a:srgbClr val="33393F"/>
-                </a:solidFill>
-                <a:latin typeface="맑은 고딕"/>
-                <a:ea typeface="맑은 고딕"/>
-              </a:rPr>
-              <a:t> </a:t>
-            </a:r>
-            <a:r>
-              <a:rPr lang="ko-KR" altLang="en-US" sz="1900" b="0" dirty="0">
-                <a:solidFill>
-                  <a:srgbClr val="33393F"/>
-                </a:solidFill>
-                <a:latin typeface="맑은 고딕"/>
-                <a:ea typeface="맑은 고딕"/>
-              </a:rPr>
-              <a:t>제안</a:t>
-            </a:r>
-            <a:endParaRPr sz="1900" b="0" dirty="0">
-              <a:solidFill>
-                <a:srgbClr val="33393F"/>
-              </a:solidFill>
-              <a:latin typeface="맑은 고딕"/>
-              <a:ea typeface="맑은 고딕"/>
-            </a:endParaRPr>
+              <a:t>분만취약지 지원 제도의 모든 절차 속 데이터 감사와 개선된 분석 모형 제안</a:t>
+            </a:r>
           </a:p>
         </p:txBody>
       </p:sp>
@@ -3468,7 +3318,7 @@
                 <a:srgbClr val="FFFFFF"/>
               </a:gs>
             </a:gsLst>
-            <a:lin ang="0" scaled="0"/>
+            <a:lin scaled="0" ang="0"/>
           </a:gradFill>
           <a:ln>
             <a:noFill/>
@@ -3494,7 +3344,6 @@
           <a:lstStyle/>
           <a:p>
             <a:pPr algn="ctr"/>
-            <a:endParaRPr/>
           </a:p>
         </p:txBody>
       </p:sp>
@@ -3507,7 +3356,7 @@
         <p:spPr>
           <a:xfrm>
             <a:off x="914400" y="4663440"/>
-            <a:ext cx="6949440" cy="307777"/>
+            <a:ext cx="6949440" cy="310896"/>
           </a:xfrm>
           <a:prstGeom prst="rect">
             <a:avLst/>
@@ -3525,156 +3374,19 @@
                 <a:spcPct val="114000"/>
               </a:lnSpc>
               <a:spcAft>
-                <a:spcPts val="600"/>
-              </a:spcAft>
-            </a:pPr>
-            <a:r>
-              <a:rPr sz="1350" b="1" dirty="0">
+                <a:spcPts val="0"/>
+              </a:spcAft>
+            </a:pPr>
+            <a:r>
+              <a:rPr sz="1350" b="1">
                 <a:solidFill>
                   <a:srgbClr val="1C1C1E"/>
                 </a:solidFill>
                 <a:latin typeface="맑은 고딕"/>
                 <a:ea typeface="맑은 고딕"/>
               </a:rPr>
-              <a:t>2026 제5회 </a:t>
-            </a:r>
-            <a:r>
-              <a:rPr sz="1350" b="1" dirty="0" err="1">
-                <a:solidFill>
-                  <a:srgbClr val="1C1C1E"/>
-                </a:solidFill>
-                <a:latin typeface="맑은 고딕"/>
-                <a:ea typeface="맑은 고딕"/>
-              </a:rPr>
-              <a:t>명지대학교</a:t>
-            </a:r>
-            <a:r>
-              <a:rPr sz="1350" b="1" dirty="0">
-                <a:solidFill>
-                  <a:srgbClr val="1C1C1E"/>
-                </a:solidFill>
-                <a:latin typeface="맑은 고딕"/>
-                <a:ea typeface="맑은 고딕"/>
-              </a:rPr>
-              <a:t> </a:t>
-            </a:r>
-            <a:r>
-              <a:rPr sz="1350" b="1" dirty="0" err="1">
-                <a:solidFill>
-                  <a:srgbClr val="1C1C1E"/>
-                </a:solidFill>
-                <a:latin typeface="맑은 고딕"/>
-                <a:ea typeface="맑은 고딕"/>
-              </a:rPr>
-              <a:t>창의적</a:t>
-            </a:r>
-            <a:r>
-              <a:rPr sz="1350" b="1" dirty="0">
-                <a:solidFill>
-                  <a:srgbClr val="1C1C1E"/>
-                </a:solidFill>
-                <a:latin typeface="맑은 고딕"/>
-                <a:ea typeface="맑은 고딕"/>
-              </a:rPr>
-              <a:t> </a:t>
-            </a:r>
-            <a:r>
-              <a:rPr sz="1350" b="1" dirty="0" err="1">
-                <a:solidFill>
-                  <a:srgbClr val="1C1C1E"/>
-                </a:solidFill>
-                <a:latin typeface="맑은 고딕"/>
-                <a:ea typeface="맑은 고딕"/>
-              </a:rPr>
-              <a:t>SW프로그램</a:t>
-            </a:r>
-            <a:r>
-              <a:rPr sz="1350" b="1" dirty="0">
-                <a:solidFill>
-                  <a:srgbClr val="1C1C1E"/>
-                </a:solidFill>
-                <a:latin typeface="맑은 고딕"/>
-                <a:ea typeface="맑은 고딕"/>
-              </a:rPr>
-              <a:t> </a:t>
-            </a:r>
-            <a:r>
-              <a:rPr sz="1350" b="1" dirty="0" err="1">
-                <a:solidFill>
-                  <a:srgbClr val="1C1C1E"/>
-                </a:solidFill>
-                <a:latin typeface="맑은 고딕"/>
-                <a:ea typeface="맑은 고딕"/>
-              </a:rPr>
-              <a:t>경진대회</a:t>
-            </a:r>
-            <a:r>
-              <a:rPr sz="1350" b="1" dirty="0">
-                <a:solidFill>
-                  <a:srgbClr val="1C1C1E"/>
-                </a:solidFill>
-                <a:latin typeface="맑은 고딕"/>
-                <a:ea typeface="맑은 고딕"/>
-              </a:rPr>
-              <a:t> · </a:t>
-            </a:r>
-            <a:r>
-              <a:rPr sz="1350" b="1" dirty="0" err="1">
-                <a:solidFill>
-                  <a:srgbClr val="1C1C1E"/>
-                </a:solidFill>
-                <a:latin typeface="맑은 고딕"/>
-                <a:ea typeface="맑은 고딕"/>
-              </a:rPr>
-              <a:t>빅데이터</a:t>
-            </a:r>
-            <a:r>
-              <a:rPr sz="1350" b="1" dirty="0">
-                <a:solidFill>
-                  <a:srgbClr val="1C1C1E"/>
-                </a:solidFill>
-                <a:latin typeface="맑은 고딕"/>
-                <a:ea typeface="맑은 고딕"/>
-              </a:rPr>
-              <a:t> </a:t>
-            </a:r>
-            <a:r>
-              <a:rPr sz="1350" b="1" dirty="0" err="1">
-                <a:solidFill>
-                  <a:srgbClr val="1C1C1E"/>
-                </a:solidFill>
-                <a:latin typeface="맑은 고딕"/>
-                <a:ea typeface="맑은 고딕"/>
-              </a:rPr>
-              <a:t>분석</a:t>
-            </a:r>
-            <a:r>
-              <a:rPr sz="1350" b="1" dirty="0">
-                <a:solidFill>
-                  <a:srgbClr val="1C1C1E"/>
-                </a:solidFill>
-                <a:latin typeface="맑은 고딕"/>
-                <a:ea typeface="맑은 고딕"/>
-              </a:rPr>
-              <a:t> </a:t>
-            </a:r>
-            <a:r>
-              <a:rPr sz="1350" b="1" dirty="0" err="1">
-                <a:solidFill>
-                  <a:srgbClr val="1C1C1E"/>
-                </a:solidFill>
-                <a:latin typeface="맑은 고딕"/>
-                <a:ea typeface="맑은 고딕"/>
-              </a:rPr>
-              <a:t>부문</a:t>
-            </a:r>
-            <a:endParaRPr sz="1350" b="1" dirty="0">
-              <a:solidFill>
-                <a:srgbClr val="1C1C1E"/>
-              </a:solidFill>
-              <a:latin typeface="맑은 고딕"/>
-              <a:ea typeface="맑은 고딕"/>
-            </a:endParaRPr>
+              <a:t>2026 제5회 명지대학교 창의적 SW프로그램 경진대회 · 빅데이터 분석 부문</a:t>
+            </a:r>
           </a:p>
         </p:txBody>
       </p:sp>
@@ -3687,7 +3399,7 @@
 </file>
 
 <file path=ppt/slides/slide10.xml><?xml version="1.0" encoding="utf-8"?>
-<p:sld xmlns:a="http://schemas.openxmlformats.org/drawingml/2006/main" xmlns:r="http://schemas.openxmlformats.org/officeDocument/2006/relationships" xmlns:p="http://schemas.openxmlformats.org/presentationml/2006/main">
+<p:sld xmlns:a="http://schemas.openxmlformats.org/drawingml/2006/main" xmlns:p="http://schemas.openxmlformats.org/presentationml/2006/main" xmlns:r="http://schemas.openxmlformats.org/officeDocument/2006/relationships">
   <p:cSld>
     <p:spTree>
       <p:nvGrpSpPr>
@@ -3695,14 +3407,7 @@
         <p:cNvGrpSpPr/>
         <p:nvPr/>
       </p:nvGrpSpPr>
-      <p:grpSpPr>
-        <a:xfrm>
-          <a:off x="0" y="0"/>
-          <a:ext cx="0" cy="0"/>
-          <a:chOff x="0" y="0"/>
-          <a:chExt cx="0" cy="0"/>
-        </a:xfrm>
-      </p:grpSpPr>
+      <p:grpSpPr/>
       <p:sp>
         <p:nvSpPr>
           <p:cNvPr id="2" name="Rectangle 1"/>
@@ -3744,7 +3449,6 @@
           <a:lstStyle/>
           <a:p>
             <a:pPr algn="ctr"/>
-            <a:endParaRPr/>
           </a:p>
         </p:txBody>
       </p:sp>
@@ -3773,7 +3477,7 @@
                 <a:srgbClr val="73787E"/>
               </a:gs>
             </a:gsLst>
-            <a:lin ang="18900000" scaled="0"/>
+            <a:lin scaled="0" ang="18900000"/>
           </a:gradFill>
           <a:ln>
             <a:noFill/>
@@ -3805,7 +3509,6 @@
           <a:lstStyle/>
           <a:p>
             <a:pPr algn="ctr"/>
-            <a:endParaRPr/>
           </a:p>
         </p:txBody>
       </p:sp>
@@ -3875,7 +3578,7 @@
                 <a:srgbClr val="FFFFFF"/>
               </a:gs>
             </a:gsLst>
-            <a:lin ang="0" scaled="0"/>
+            <a:lin scaled="0" ang="0"/>
           </a:gradFill>
           <a:ln>
             <a:noFill/>
@@ -3901,7 +3604,6 @@
           <a:lstStyle/>
           <a:p>
             <a:pPr algn="ctr"/>
-            <a:endParaRPr/>
           </a:p>
         </p:txBody>
       </p:sp>
@@ -4059,7 +3761,7 @@
                 <a:srgbClr val="4A4F55"/>
               </a:gs>
             </a:gsLst>
-            <a:lin ang="14700000" scaled="0"/>
+            <a:lin scaled="0" ang="14700000"/>
           </a:gradFill>
           <a:ln>
             <a:noFill/>
@@ -4091,7 +3793,6 @@
           <a:lstStyle/>
           <a:p>
             <a:pPr algn="ctr"/>
-            <a:endParaRPr/>
           </a:p>
         </p:txBody>
       </p:sp>
@@ -4209,7 +3910,6 @@
           <a:lstStyle/>
           <a:p>
             <a:pPr algn="ctr"/>
-            <a:endParaRPr/>
           </a:p>
         </p:txBody>
       </p:sp>
@@ -4367,7 +4067,6 @@
           <a:lstStyle/>
           <a:p>
             <a:pPr algn="ctr"/>
-            <a:endParaRPr/>
           </a:p>
         </p:txBody>
       </p:sp>
@@ -4503,7 +4202,7 @@
 </file>
 
 <file path=ppt/slides/slide11.xml><?xml version="1.0" encoding="utf-8"?>
-<p:sld xmlns:a="http://schemas.openxmlformats.org/drawingml/2006/main" xmlns:r="http://schemas.openxmlformats.org/officeDocument/2006/relationships" xmlns:p="http://schemas.openxmlformats.org/presentationml/2006/main">
+<p:sld xmlns:a="http://schemas.openxmlformats.org/drawingml/2006/main" xmlns:p="http://schemas.openxmlformats.org/presentationml/2006/main" xmlns:r="http://schemas.openxmlformats.org/officeDocument/2006/relationships">
   <p:cSld>
     <p:spTree>
       <p:nvGrpSpPr>
@@ -4511,14 +4210,7 @@
         <p:cNvGrpSpPr/>
         <p:nvPr/>
       </p:nvGrpSpPr>
-      <p:grpSpPr>
-        <a:xfrm>
-          <a:off x="0" y="0"/>
-          <a:ext cx="0" cy="0"/>
-          <a:chOff x="0" y="0"/>
-          <a:chExt cx="0" cy="0"/>
-        </a:xfrm>
-      </p:grpSpPr>
+      <p:grpSpPr/>
       <p:sp>
         <p:nvSpPr>
           <p:cNvPr id="2" name="Rectangle 1"/>
@@ -4560,7 +4252,6 @@
           <a:lstStyle/>
           <a:p>
             <a:pPr algn="ctr"/>
-            <a:endParaRPr/>
           </a:p>
         </p:txBody>
       </p:sp>
@@ -4589,7 +4280,7 @@
                 <a:srgbClr val="73787E"/>
               </a:gs>
             </a:gsLst>
-            <a:lin ang="18900000" scaled="0"/>
+            <a:lin scaled="0" ang="18900000"/>
           </a:gradFill>
           <a:ln>
             <a:noFill/>
@@ -4621,7 +4312,6 @@
           <a:lstStyle/>
           <a:p>
             <a:pPr algn="ctr"/>
-            <a:endParaRPr/>
           </a:p>
         </p:txBody>
       </p:sp>
@@ -4691,7 +4381,7 @@
                 <a:srgbClr val="FFFFFF"/>
               </a:gs>
             </a:gsLst>
-            <a:lin ang="0" scaled="0"/>
+            <a:lin scaled="0" ang="0"/>
           </a:gradFill>
           <a:ln>
             <a:noFill/>
@@ -4717,7 +4407,6 @@
           <a:lstStyle/>
           <a:p>
             <a:pPr algn="ctr"/>
-            <a:endParaRPr/>
           </a:p>
         </p:txBody>
       </p:sp>
@@ -4826,27 +4515,9 @@
                 <a:tableStyleId>{5C22544A-7EE6-4342-B048-85BDC9FD1C3A}</a:tableStyleId>
               </a:tblPr>
               <a:tblGrid>
-                <a:gridCol w="3291840">
-                  <a:extLst>
-                    <a:ext uri="{9D8B030D-6E8A-4147-A177-3AD203B41FA5}">
-                      <a16:colId xmlns:a16="http://schemas.microsoft.com/office/drawing/2014/main" val="20000"/>
-                    </a:ext>
-                  </a:extLst>
-                </a:gridCol>
-                <a:gridCol w="4846320">
-                  <a:extLst>
-                    <a:ext uri="{9D8B030D-6E8A-4147-A177-3AD203B41FA5}">
-                      <a16:colId xmlns:a16="http://schemas.microsoft.com/office/drawing/2014/main" val="20001"/>
-                    </a:ext>
-                  </a:extLst>
-                </a:gridCol>
-                <a:gridCol w="3154680">
-                  <a:extLst>
-                    <a:ext uri="{9D8B030D-6E8A-4147-A177-3AD203B41FA5}">
-                      <a16:colId xmlns:a16="http://schemas.microsoft.com/office/drawing/2014/main" val="20002"/>
-                    </a:ext>
-                  </a:extLst>
-                </a:gridCol>
+                <a:gridCol w="3291840"/>
+                <a:gridCol w="4846320"/>
+                <a:gridCol w="3154680"/>
               </a:tblGrid>
               <a:tr h="512064">
                 <a:tc>
@@ -4871,7 +4542,7 @@
                       </a:r>
                     </a:p>
                   </a:txBody>
-                  <a:tcPr marL="73152" marR="73152" marT="27432" marB="27432" anchor="ctr">
+                  <a:tcPr marT="27432" marB="27432" marL="73152" marR="73152" anchor="ctr">
                     <a:solidFill>
                       <a:srgbClr val="33393F"/>
                     </a:solidFill>
@@ -4899,7 +4570,7 @@
                       </a:r>
                     </a:p>
                   </a:txBody>
-                  <a:tcPr marL="73152" marR="73152" marT="27432" marB="27432" anchor="ctr">
+                  <a:tcPr marT="27432" marB="27432" marL="73152" marR="73152" anchor="ctr">
                     <a:solidFill>
                       <a:srgbClr val="33393F"/>
                     </a:solidFill>
@@ -4927,17 +4598,12 @@
                       </a:r>
                     </a:p>
                   </a:txBody>
-                  <a:tcPr marL="73152" marR="73152" marT="27432" marB="27432" anchor="ctr">
+                  <a:tcPr marT="27432" marB="27432" marL="73152" marR="73152" anchor="ctr">
                     <a:solidFill>
                       <a:srgbClr val="33393F"/>
                     </a:solidFill>
                   </a:tcPr>
                 </a:tc>
-                <a:extLst>
-                  <a:ext uri="{0D108BD9-81ED-4DB2-BD59-A6C34878D82A}">
-                    <a16:rowId xmlns:a16="http://schemas.microsoft.com/office/drawing/2014/main" val="10000"/>
-                  </a:ext>
-                </a:extLst>
               </a:tr>
               <a:tr h="512064">
                 <a:tc>
@@ -4962,7 +4628,7 @@
                       </a:r>
                     </a:p>
                   </a:txBody>
-                  <a:tcPr marL="73152" marR="73152" marT="27432" marB="27432" anchor="ctr">
+                  <a:tcPr marT="27432" marB="27432" marL="73152" marR="73152" anchor="ctr">
                     <a:solidFill>
                       <a:srgbClr val="E3E5E8"/>
                     </a:solidFill>
@@ -4990,7 +4656,7 @@
                       </a:r>
                     </a:p>
                   </a:txBody>
-                  <a:tcPr marL="73152" marR="73152" marT="27432" marB="27432" anchor="ctr">
+                  <a:tcPr marT="27432" marB="27432" marL="73152" marR="73152" anchor="ctr">
                     <a:solidFill>
                       <a:srgbClr val="E3E5E8"/>
                     </a:solidFill>
@@ -5018,17 +4684,12 @@
                       </a:r>
                     </a:p>
                   </a:txBody>
-                  <a:tcPr marL="73152" marR="73152" marT="27432" marB="27432" anchor="ctr">
+                  <a:tcPr marT="27432" marB="27432" marL="73152" marR="73152" anchor="ctr">
                     <a:solidFill>
                       <a:srgbClr val="E3E5E8"/>
                     </a:solidFill>
                   </a:tcPr>
                 </a:tc>
-                <a:extLst>
-                  <a:ext uri="{0D108BD9-81ED-4DB2-BD59-A6C34878D82A}">
-                    <a16:rowId xmlns:a16="http://schemas.microsoft.com/office/drawing/2014/main" val="10001"/>
-                  </a:ext>
-                </a:extLst>
               </a:tr>
               <a:tr h="512064">
                 <a:tc>
@@ -5053,7 +4714,7 @@
                       </a:r>
                     </a:p>
                   </a:txBody>
-                  <a:tcPr marL="73152" marR="73152" marT="27432" marB="27432" anchor="ctr">
+                  <a:tcPr marT="27432" marB="27432" marL="73152" marR="73152" anchor="ctr">
                     <a:solidFill>
                       <a:srgbClr val="F6F7F8"/>
                     </a:solidFill>
@@ -5081,7 +4742,7 @@
                       </a:r>
                     </a:p>
                   </a:txBody>
-                  <a:tcPr marL="73152" marR="73152" marT="27432" marB="27432" anchor="ctr">
+                  <a:tcPr marT="27432" marB="27432" marL="73152" marR="73152" anchor="ctr">
                     <a:solidFill>
                       <a:srgbClr val="F6F7F8"/>
                     </a:solidFill>
@@ -5109,17 +4770,12 @@
                       </a:r>
                     </a:p>
                   </a:txBody>
-                  <a:tcPr marL="73152" marR="73152" marT="27432" marB="27432" anchor="ctr">
+                  <a:tcPr marT="27432" marB="27432" marL="73152" marR="73152" anchor="ctr">
                     <a:solidFill>
                       <a:srgbClr val="F6F7F8"/>
                     </a:solidFill>
                   </a:tcPr>
                 </a:tc>
-                <a:extLst>
-                  <a:ext uri="{0D108BD9-81ED-4DB2-BD59-A6C34878D82A}">
-                    <a16:rowId xmlns:a16="http://schemas.microsoft.com/office/drawing/2014/main" val="10002"/>
-                  </a:ext>
-                </a:extLst>
               </a:tr>
             </a:tbl>
           </a:graphicData>
@@ -5176,7 +4832,6 @@
           <a:lstStyle/>
           <a:p>
             <a:pPr algn="ctr"/>
-            <a:endParaRPr/>
           </a:p>
         </p:txBody>
       </p:sp>
@@ -5354,7 +5009,6 @@
           <a:lstStyle/>
           <a:p>
             <a:pPr algn="ctr"/>
-            <a:endParaRPr/>
           </a:p>
         </p:txBody>
       </p:sp>
@@ -5490,7 +5144,7 @@
 </file>
 
 <file path=ppt/slides/slide12.xml><?xml version="1.0" encoding="utf-8"?>
-<p:sld xmlns:a="http://schemas.openxmlformats.org/drawingml/2006/main" xmlns:r="http://schemas.openxmlformats.org/officeDocument/2006/relationships" xmlns:p="http://schemas.openxmlformats.org/presentationml/2006/main">
+<p:sld xmlns:a="http://schemas.openxmlformats.org/drawingml/2006/main" xmlns:p="http://schemas.openxmlformats.org/presentationml/2006/main" xmlns:r="http://schemas.openxmlformats.org/officeDocument/2006/relationships">
   <p:cSld>
     <p:spTree>
       <p:nvGrpSpPr>
@@ -5498,14 +5152,7 @@
         <p:cNvGrpSpPr/>
         <p:nvPr/>
       </p:nvGrpSpPr>
-      <p:grpSpPr>
-        <a:xfrm>
-          <a:off x="0" y="0"/>
-          <a:ext cx="0" cy="0"/>
-          <a:chOff x="0" y="0"/>
-          <a:chExt cx="0" cy="0"/>
-        </a:xfrm>
-      </p:grpSpPr>
+      <p:grpSpPr/>
       <p:sp>
         <p:nvSpPr>
           <p:cNvPr id="2" name="Rectangle 1"/>
@@ -5547,7 +5194,6 @@
           <a:lstStyle/>
           <a:p>
             <a:pPr algn="ctr"/>
-            <a:endParaRPr/>
           </a:p>
         </p:txBody>
       </p:sp>
@@ -5576,7 +5222,7 @@
                 <a:srgbClr val="73787E"/>
               </a:gs>
             </a:gsLst>
-            <a:lin ang="18900000" scaled="0"/>
+            <a:lin scaled="0" ang="18900000"/>
           </a:gradFill>
           <a:ln>
             <a:noFill/>
@@ -5608,7 +5254,6 @@
           <a:lstStyle/>
           <a:p>
             <a:pPr algn="ctr"/>
-            <a:endParaRPr/>
           </a:p>
         </p:txBody>
       </p:sp>
@@ -5678,7 +5323,7 @@
                 <a:srgbClr val="FFFFFF"/>
               </a:gs>
             </a:gsLst>
-            <a:lin ang="0" scaled="0"/>
+            <a:lin scaled="0" ang="0"/>
           </a:gradFill>
           <a:ln>
             <a:noFill/>
@@ -5704,7 +5349,6 @@
           <a:lstStyle/>
           <a:p>
             <a:pPr algn="ctr"/>
-            <a:endParaRPr/>
           </a:p>
         </p:txBody>
       </p:sp>
@@ -5845,7 +5489,6 @@
           <a:lstStyle/>
           <a:p>
             <a:pPr algn="ctr"/>
-            <a:endParaRPr/>
           </a:p>
         </p:txBody>
       </p:sp>
@@ -5963,7 +5606,6 @@
           <a:lstStyle/>
           <a:p>
             <a:pPr algn="ctr"/>
-            <a:endParaRPr/>
           </a:p>
         </p:txBody>
       </p:sp>
@@ -6101,7 +5743,6 @@
           <a:lstStyle/>
           <a:p>
             <a:pPr algn="ctr"/>
-            <a:endParaRPr/>
           </a:p>
         </p:txBody>
       </p:sp>
@@ -6239,7 +5880,6 @@
           <a:lstStyle/>
           <a:p>
             <a:pPr algn="ctr"/>
-            <a:endParaRPr/>
           </a:p>
         </p:txBody>
       </p:sp>
@@ -6378,7 +6018,7 @@
 </file>
 
 <file path=ppt/slides/slide13.xml><?xml version="1.0" encoding="utf-8"?>
-<p:sld xmlns:a="http://schemas.openxmlformats.org/drawingml/2006/main" xmlns:r="http://schemas.openxmlformats.org/officeDocument/2006/relationships" xmlns:p="http://schemas.openxmlformats.org/presentationml/2006/main">
+<p:sld xmlns:a="http://schemas.openxmlformats.org/drawingml/2006/main" xmlns:p="http://schemas.openxmlformats.org/presentationml/2006/main" xmlns:r="http://schemas.openxmlformats.org/officeDocument/2006/relationships">
   <p:cSld>
     <p:spTree>
       <p:nvGrpSpPr>
@@ -6386,14 +6026,7 @@
         <p:cNvGrpSpPr/>
         <p:nvPr/>
       </p:nvGrpSpPr>
-      <p:grpSpPr>
-        <a:xfrm>
-          <a:off x="0" y="0"/>
-          <a:ext cx="0" cy="0"/>
-          <a:chOff x="0" y="0"/>
-          <a:chExt cx="0" cy="0"/>
-        </a:xfrm>
-      </p:grpSpPr>
+      <p:grpSpPr/>
       <p:sp>
         <p:nvSpPr>
           <p:cNvPr id="2" name="Rectangle 1"/>
@@ -6435,7 +6068,6 @@
           <a:lstStyle/>
           <a:p>
             <a:pPr algn="ctr"/>
-            <a:endParaRPr/>
           </a:p>
         </p:txBody>
       </p:sp>
@@ -6464,7 +6096,7 @@
                 <a:srgbClr val="73787E"/>
               </a:gs>
             </a:gsLst>
-            <a:lin ang="18900000" scaled="0"/>
+            <a:lin scaled="0" ang="18900000"/>
           </a:gradFill>
           <a:ln>
             <a:noFill/>
@@ -6496,7 +6128,6 @@
           <a:lstStyle/>
           <a:p>
             <a:pPr algn="ctr"/>
-            <a:endParaRPr/>
           </a:p>
         </p:txBody>
       </p:sp>
@@ -6566,7 +6197,7 @@
                 <a:srgbClr val="FFFFFF"/>
               </a:gs>
             </a:gsLst>
-            <a:lin ang="0" scaled="0"/>
+            <a:lin scaled="0" ang="0"/>
           </a:gradFill>
           <a:ln>
             <a:noFill/>
@@ -6592,7 +6223,6 @@
           <a:lstStyle/>
           <a:p>
             <a:pPr algn="ctr"/>
-            <a:endParaRPr/>
           </a:p>
         </p:txBody>
       </p:sp>
@@ -6733,7 +6363,6 @@
           <a:lstStyle/>
           <a:p>
             <a:pPr algn="ctr"/>
-            <a:endParaRPr/>
           </a:p>
         </p:txBody>
       </p:sp>
@@ -6871,7 +6500,6 @@
           <a:lstStyle/>
           <a:p>
             <a:pPr algn="ctr"/>
-            <a:endParaRPr/>
           </a:p>
         </p:txBody>
       </p:sp>
@@ -7047,7 +6675,6 @@
           <a:lstStyle/>
           <a:p>
             <a:pPr algn="ctr"/>
-            <a:endParaRPr/>
           </a:p>
         </p:txBody>
       </p:sp>
@@ -7084,7 +6711,7 @@
 </file>
 
 <file path=ppt/slides/slide14.xml><?xml version="1.0" encoding="utf-8"?>
-<p:sld xmlns:a="http://schemas.openxmlformats.org/drawingml/2006/main" xmlns:r="http://schemas.openxmlformats.org/officeDocument/2006/relationships" xmlns:p="http://schemas.openxmlformats.org/presentationml/2006/main">
+<p:sld xmlns:a="http://schemas.openxmlformats.org/drawingml/2006/main" xmlns:p="http://schemas.openxmlformats.org/presentationml/2006/main" xmlns:r="http://schemas.openxmlformats.org/officeDocument/2006/relationships">
   <p:cSld>
     <p:spTree>
       <p:nvGrpSpPr>
@@ -7092,14 +6719,7 @@
         <p:cNvGrpSpPr/>
         <p:nvPr/>
       </p:nvGrpSpPr>
-      <p:grpSpPr>
-        <a:xfrm>
-          <a:off x="0" y="0"/>
-          <a:ext cx="0" cy="0"/>
-          <a:chOff x="0" y="0"/>
-          <a:chExt cx="0" cy="0"/>
-        </a:xfrm>
-      </p:grpSpPr>
+      <p:grpSpPr/>
       <p:sp>
         <p:nvSpPr>
           <p:cNvPr id="2" name="Rectangle 1"/>
@@ -7141,7 +6761,6 @@
           <a:lstStyle/>
           <a:p>
             <a:pPr algn="ctr"/>
-            <a:endParaRPr/>
           </a:p>
         </p:txBody>
       </p:sp>
@@ -7170,7 +6789,7 @@
                 <a:srgbClr val="73787E"/>
               </a:gs>
             </a:gsLst>
-            <a:lin ang="18900000" scaled="0"/>
+            <a:lin scaled="0" ang="18900000"/>
           </a:gradFill>
           <a:ln>
             <a:noFill/>
@@ -7202,7 +6821,6 @@
           <a:lstStyle/>
           <a:p>
             <a:pPr algn="ctr"/>
-            <a:endParaRPr/>
           </a:p>
         </p:txBody>
       </p:sp>
@@ -7272,7 +6890,7 @@
                 <a:srgbClr val="FFFFFF"/>
               </a:gs>
             </a:gsLst>
-            <a:lin ang="0" scaled="0"/>
+            <a:lin scaled="0" ang="0"/>
           </a:gradFill>
           <a:ln>
             <a:noFill/>
@@ -7298,7 +6916,6 @@
           <a:lstStyle/>
           <a:p>
             <a:pPr algn="ctr"/>
-            <a:endParaRPr/>
           </a:p>
         </p:txBody>
       </p:sp>
@@ -7450,27 +7067,9 @@
                 <a:tableStyleId>{5C22544A-7EE6-4342-B048-85BDC9FD1C3A}</a:tableStyleId>
               </a:tblPr>
               <a:tblGrid>
-                <a:gridCol w="3931920">
-                  <a:extLst>
-                    <a:ext uri="{9D8B030D-6E8A-4147-A177-3AD203B41FA5}">
-                      <a16:colId xmlns:a16="http://schemas.microsoft.com/office/drawing/2014/main" val="20000"/>
-                    </a:ext>
-                  </a:extLst>
-                </a:gridCol>
-                <a:gridCol w="4206240">
-                  <a:extLst>
-                    <a:ext uri="{9D8B030D-6E8A-4147-A177-3AD203B41FA5}">
-                      <a16:colId xmlns:a16="http://schemas.microsoft.com/office/drawing/2014/main" val="20001"/>
-                    </a:ext>
-                  </a:extLst>
-                </a:gridCol>
-                <a:gridCol w="3154680">
-                  <a:extLst>
-                    <a:ext uri="{9D8B030D-6E8A-4147-A177-3AD203B41FA5}">
-                      <a16:colId xmlns:a16="http://schemas.microsoft.com/office/drawing/2014/main" val="20002"/>
-                    </a:ext>
-                  </a:extLst>
-                </a:gridCol>
+                <a:gridCol w="3931920"/>
+                <a:gridCol w="4206240"/>
+                <a:gridCol w="3154680"/>
               </a:tblGrid>
               <a:tr h="457200">
                 <a:tc>
@@ -7495,7 +7094,7 @@
                       </a:r>
                     </a:p>
                   </a:txBody>
-                  <a:tcPr marL="73152" marR="73152" marT="27432" marB="27432" anchor="ctr">
+                  <a:tcPr marT="27432" marB="27432" marL="73152" marR="73152" anchor="ctr">
                     <a:solidFill>
                       <a:srgbClr val="33393F"/>
                     </a:solidFill>
@@ -7523,7 +7122,7 @@
                       </a:r>
                     </a:p>
                   </a:txBody>
-                  <a:tcPr marL="73152" marR="73152" marT="27432" marB="27432" anchor="ctr">
+                  <a:tcPr marT="27432" marB="27432" marL="73152" marR="73152" anchor="ctr">
                     <a:solidFill>
                       <a:srgbClr val="33393F"/>
                     </a:solidFill>
@@ -7551,17 +7150,12 @@
                       </a:r>
                     </a:p>
                   </a:txBody>
-                  <a:tcPr marL="73152" marR="73152" marT="27432" marB="27432" anchor="ctr">
+                  <a:tcPr marT="27432" marB="27432" marL="73152" marR="73152" anchor="ctr">
                     <a:solidFill>
                       <a:srgbClr val="33393F"/>
                     </a:solidFill>
                   </a:tcPr>
                 </a:tc>
-                <a:extLst>
-                  <a:ext uri="{0D108BD9-81ED-4DB2-BD59-A6C34878D82A}">
-                    <a16:rowId xmlns:a16="http://schemas.microsoft.com/office/drawing/2014/main" val="10000"/>
-                  </a:ext>
-                </a:extLst>
               </a:tr>
               <a:tr h="457200">
                 <a:tc>
@@ -7586,7 +7180,7 @@
                       </a:r>
                     </a:p>
                   </a:txBody>
-                  <a:tcPr marL="73152" marR="73152" marT="27432" marB="27432" anchor="ctr">
+                  <a:tcPr marT="27432" marB="27432" marL="73152" marR="73152" anchor="ctr">
                     <a:solidFill>
                       <a:srgbClr val="FFFFFF"/>
                     </a:solidFill>
@@ -7614,7 +7208,7 @@
                       </a:r>
                     </a:p>
                   </a:txBody>
-                  <a:tcPr marL="73152" marR="73152" marT="27432" marB="27432" anchor="ctr">
+                  <a:tcPr marT="27432" marB="27432" marL="73152" marR="73152" anchor="ctr">
                     <a:solidFill>
                       <a:srgbClr val="FFFFFF"/>
                     </a:solidFill>
@@ -7642,17 +7236,12 @@
                       </a:r>
                     </a:p>
                   </a:txBody>
-                  <a:tcPr marL="73152" marR="73152" marT="27432" marB="27432" anchor="ctr">
+                  <a:tcPr marT="27432" marB="27432" marL="73152" marR="73152" anchor="ctr">
                     <a:solidFill>
                       <a:srgbClr val="FFFFFF"/>
                     </a:solidFill>
                   </a:tcPr>
                 </a:tc>
-                <a:extLst>
-                  <a:ext uri="{0D108BD9-81ED-4DB2-BD59-A6C34878D82A}">
-                    <a16:rowId xmlns:a16="http://schemas.microsoft.com/office/drawing/2014/main" val="10001"/>
-                  </a:ext>
-                </a:extLst>
               </a:tr>
               <a:tr h="457200">
                 <a:tc>
@@ -7677,7 +7266,7 @@
                       </a:r>
                     </a:p>
                   </a:txBody>
-                  <a:tcPr marL="73152" marR="73152" marT="27432" marB="27432" anchor="ctr">
+                  <a:tcPr marT="27432" marB="27432" marL="73152" marR="73152" anchor="ctr">
                     <a:solidFill>
                       <a:srgbClr val="F6F7F8"/>
                     </a:solidFill>
@@ -7705,7 +7294,7 @@
                       </a:r>
                     </a:p>
                   </a:txBody>
-                  <a:tcPr marL="73152" marR="73152" marT="27432" marB="27432" anchor="ctr">
+                  <a:tcPr marT="27432" marB="27432" marL="73152" marR="73152" anchor="ctr">
                     <a:solidFill>
                       <a:srgbClr val="F6F7F8"/>
                     </a:solidFill>
@@ -7733,17 +7322,12 @@
                       </a:r>
                     </a:p>
                   </a:txBody>
-                  <a:tcPr marL="73152" marR="73152" marT="27432" marB="27432" anchor="ctr">
+                  <a:tcPr marT="27432" marB="27432" marL="73152" marR="73152" anchor="ctr">
                     <a:solidFill>
                       <a:srgbClr val="F6F7F8"/>
                     </a:solidFill>
                   </a:tcPr>
                 </a:tc>
-                <a:extLst>
-                  <a:ext uri="{0D108BD9-81ED-4DB2-BD59-A6C34878D82A}">
-                    <a16:rowId xmlns:a16="http://schemas.microsoft.com/office/drawing/2014/main" val="10002"/>
-                  </a:ext>
-                </a:extLst>
               </a:tr>
               <a:tr h="457200">
                 <a:tc>
@@ -7768,7 +7352,7 @@
                       </a:r>
                     </a:p>
                   </a:txBody>
-                  <a:tcPr marL="73152" marR="73152" marT="27432" marB="27432" anchor="ctr">
+                  <a:tcPr marT="27432" marB="27432" marL="73152" marR="73152" anchor="ctr">
                     <a:solidFill>
                       <a:srgbClr val="FFFFFF"/>
                     </a:solidFill>
@@ -7796,7 +7380,7 @@
                       </a:r>
                     </a:p>
                   </a:txBody>
-                  <a:tcPr marL="73152" marR="73152" marT="27432" marB="27432" anchor="ctr">
+                  <a:tcPr marT="27432" marB="27432" marL="73152" marR="73152" anchor="ctr">
                     <a:solidFill>
                       <a:srgbClr val="FFFFFF"/>
                     </a:solidFill>
@@ -7824,17 +7408,12 @@
                       </a:r>
                     </a:p>
                   </a:txBody>
-                  <a:tcPr marL="73152" marR="73152" marT="27432" marB="27432" anchor="ctr">
+                  <a:tcPr marT="27432" marB="27432" marL="73152" marR="73152" anchor="ctr">
                     <a:solidFill>
                       <a:srgbClr val="FFFFFF"/>
                     </a:solidFill>
                   </a:tcPr>
                 </a:tc>
-                <a:extLst>
-                  <a:ext uri="{0D108BD9-81ED-4DB2-BD59-A6C34878D82A}">
-                    <a16:rowId xmlns:a16="http://schemas.microsoft.com/office/drawing/2014/main" val="10003"/>
-                  </a:ext>
-                </a:extLst>
               </a:tr>
               <a:tr h="457200">
                 <a:tc>
@@ -7859,7 +7438,7 @@
                       </a:r>
                     </a:p>
                   </a:txBody>
-                  <a:tcPr marL="73152" marR="73152" marT="27432" marB="27432" anchor="ctr">
+                  <a:tcPr marT="27432" marB="27432" marL="73152" marR="73152" anchor="ctr">
                     <a:solidFill>
                       <a:srgbClr val="F6F7F8"/>
                     </a:solidFill>
@@ -7887,7 +7466,7 @@
                       </a:r>
                     </a:p>
                   </a:txBody>
-                  <a:tcPr marL="73152" marR="73152" marT="27432" marB="27432" anchor="ctr">
+                  <a:tcPr marT="27432" marB="27432" marL="73152" marR="73152" anchor="ctr">
                     <a:solidFill>
                       <a:srgbClr val="F6F7F8"/>
                     </a:solidFill>
@@ -7915,17 +7494,12 @@
                       </a:r>
                     </a:p>
                   </a:txBody>
-                  <a:tcPr marL="73152" marR="73152" marT="27432" marB="27432" anchor="ctr">
+                  <a:tcPr marT="27432" marB="27432" marL="73152" marR="73152" anchor="ctr">
                     <a:solidFill>
                       <a:srgbClr val="F6F7F8"/>
                     </a:solidFill>
                   </a:tcPr>
                 </a:tc>
-                <a:extLst>
-                  <a:ext uri="{0D108BD9-81ED-4DB2-BD59-A6C34878D82A}">
-                    <a16:rowId xmlns:a16="http://schemas.microsoft.com/office/drawing/2014/main" val="10004"/>
-                  </a:ext>
-                </a:extLst>
               </a:tr>
               <a:tr h="457200">
                 <a:tc>
@@ -7950,7 +7524,7 @@
                       </a:r>
                     </a:p>
                   </a:txBody>
-                  <a:tcPr marL="73152" marR="73152" marT="27432" marB="27432" anchor="ctr">
+                  <a:tcPr marT="27432" marB="27432" marL="73152" marR="73152" anchor="ctr">
                     <a:solidFill>
                       <a:srgbClr val="E3E5E8"/>
                     </a:solidFill>
@@ -7978,7 +7552,7 @@
                       </a:r>
                     </a:p>
                   </a:txBody>
-                  <a:tcPr marL="73152" marR="73152" marT="27432" marB="27432" anchor="ctr">
+                  <a:tcPr marT="27432" marB="27432" marL="73152" marR="73152" anchor="ctr">
                     <a:solidFill>
                       <a:srgbClr val="E3E5E8"/>
                     </a:solidFill>
@@ -8006,17 +7580,12 @@
                       </a:r>
                     </a:p>
                   </a:txBody>
-                  <a:tcPr marL="73152" marR="73152" marT="27432" marB="27432" anchor="ctr">
+                  <a:tcPr marT="27432" marB="27432" marL="73152" marR="73152" anchor="ctr">
                     <a:solidFill>
                       <a:srgbClr val="E3E5E8"/>
                     </a:solidFill>
                   </a:tcPr>
                 </a:tc>
-                <a:extLst>
-                  <a:ext uri="{0D108BD9-81ED-4DB2-BD59-A6C34878D82A}">
-                    <a16:rowId xmlns:a16="http://schemas.microsoft.com/office/drawing/2014/main" val="10005"/>
-                  </a:ext>
-                </a:extLst>
               </a:tr>
             </a:tbl>
           </a:graphicData>
@@ -8073,7 +7642,6 @@
           <a:lstStyle/>
           <a:p>
             <a:pPr algn="ctr"/>
-            <a:endParaRPr/>
           </a:p>
         </p:txBody>
       </p:sp>
@@ -8189,7 +7757,7 @@
 </file>
 
 <file path=ppt/slides/slide15.xml><?xml version="1.0" encoding="utf-8"?>
-<p:sld xmlns:a="http://schemas.openxmlformats.org/drawingml/2006/main" xmlns:r="http://schemas.openxmlformats.org/officeDocument/2006/relationships" xmlns:p="http://schemas.openxmlformats.org/presentationml/2006/main">
+<p:sld xmlns:a="http://schemas.openxmlformats.org/drawingml/2006/main" xmlns:p="http://schemas.openxmlformats.org/presentationml/2006/main" xmlns:r="http://schemas.openxmlformats.org/officeDocument/2006/relationships">
   <p:cSld>
     <p:spTree>
       <p:nvGrpSpPr>
@@ -8197,14 +7765,7 @@
         <p:cNvGrpSpPr/>
         <p:nvPr/>
       </p:nvGrpSpPr>
-      <p:grpSpPr>
-        <a:xfrm>
-          <a:off x="0" y="0"/>
-          <a:ext cx="0" cy="0"/>
-          <a:chOff x="0" y="0"/>
-          <a:chExt cx="0" cy="0"/>
-        </a:xfrm>
-      </p:grpSpPr>
+      <p:grpSpPr/>
       <p:sp>
         <p:nvSpPr>
           <p:cNvPr id="2" name="Rectangle 1"/>
@@ -8246,7 +7807,6 @@
           <a:lstStyle/>
           <a:p>
             <a:pPr algn="ctr"/>
-            <a:endParaRPr/>
           </a:p>
         </p:txBody>
       </p:sp>
@@ -8275,7 +7835,7 @@
                 <a:srgbClr val="73787E"/>
               </a:gs>
             </a:gsLst>
-            <a:lin ang="18900000" scaled="0"/>
+            <a:lin scaled="0" ang="18900000"/>
           </a:gradFill>
           <a:ln>
             <a:noFill/>
@@ -8307,7 +7867,6 @@
           <a:lstStyle/>
           <a:p>
             <a:pPr algn="ctr"/>
-            <a:endParaRPr/>
           </a:p>
         </p:txBody>
       </p:sp>
@@ -8377,7 +7936,7 @@
                 <a:srgbClr val="FFFFFF"/>
               </a:gs>
             </a:gsLst>
-            <a:lin ang="0" scaled="0"/>
+            <a:lin scaled="0" ang="0"/>
           </a:gradFill>
           <a:ln>
             <a:noFill/>
@@ -8403,7 +7962,6 @@
           <a:lstStyle/>
           <a:p>
             <a:pPr algn="ctr"/>
-            <a:endParaRPr/>
           </a:p>
         </p:txBody>
       </p:sp>
@@ -8544,7 +8102,6 @@
           <a:lstStyle/>
           <a:p>
             <a:pPr algn="ctr"/>
-            <a:endParaRPr/>
           </a:p>
         </p:txBody>
       </p:sp>
@@ -8702,7 +8259,6 @@
           <a:lstStyle/>
           <a:p>
             <a:pPr algn="ctr"/>
-            <a:endParaRPr/>
           </a:p>
         </p:txBody>
       </p:sp>
@@ -8858,7 +8414,6 @@
           <a:lstStyle/>
           <a:p>
             <a:pPr algn="ctr"/>
-            <a:endParaRPr/>
           </a:p>
         </p:txBody>
       </p:sp>
@@ -8895,7 +8450,7 @@
 </file>
 
 <file path=ppt/slides/slide16.xml><?xml version="1.0" encoding="utf-8"?>
-<p:sld xmlns:a="http://schemas.openxmlformats.org/drawingml/2006/main" xmlns:r="http://schemas.openxmlformats.org/officeDocument/2006/relationships" xmlns:p="http://schemas.openxmlformats.org/presentationml/2006/main">
+<p:sld xmlns:a="http://schemas.openxmlformats.org/drawingml/2006/main" xmlns:p="http://schemas.openxmlformats.org/presentationml/2006/main" xmlns:r="http://schemas.openxmlformats.org/officeDocument/2006/relationships">
   <p:cSld>
     <p:spTree>
       <p:nvGrpSpPr>
@@ -8903,14 +8458,7 @@
         <p:cNvGrpSpPr/>
         <p:nvPr/>
       </p:nvGrpSpPr>
-      <p:grpSpPr>
-        <a:xfrm>
-          <a:off x="0" y="0"/>
-          <a:ext cx="0" cy="0"/>
-          <a:chOff x="0" y="0"/>
-          <a:chExt cx="0" cy="0"/>
-        </a:xfrm>
-      </p:grpSpPr>
+      <p:grpSpPr/>
       <p:sp>
         <p:nvSpPr>
           <p:cNvPr id="2" name="Rectangle 1"/>
@@ -8952,7 +8500,6 @@
           <a:lstStyle/>
           <a:p>
             <a:pPr algn="ctr"/>
-            <a:endParaRPr/>
           </a:p>
         </p:txBody>
       </p:sp>
@@ -8981,7 +8528,7 @@
                 <a:srgbClr val="73787E"/>
               </a:gs>
             </a:gsLst>
-            <a:lin ang="18900000" scaled="0"/>
+            <a:lin scaled="0" ang="18900000"/>
           </a:gradFill>
           <a:ln>
             <a:noFill/>
@@ -9013,7 +8560,6 @@
           <a:lstStyle/>
           <a:p>
             <a:pPr algn="ctr"/>
-            <a:endParaRPr/>
           </a:p>
         </p:txBody>
       </p:sp>
@@ -9083,7 +8629,7 @@
                 <a:srgbClr val="FFFFFF"/>
               </a:gs>
             </a:gsLst>
-            <a:lin ang="0" scaled="0"/>
+            <a:lin scaled="0" ang="0"/>
           </a:gradFill>
           <a:ln>
             <a:noFill/>
@@ -9109,7 +8655,6 @@
           <a:lstStyle/>
           <a:p>
             <a:pPr algn="ctr"/>
-            <a:endParaRPr/>
           </a:p>
         </p:txBody>
       </p:sp>
@@ -9250,7 +8795,6 @@
           <a:lstStyle/>
           <a:p>
             <a:pPr algn="ctr"/>
-            <a:endParaRPr/>
           </a:p>
         </p:txBody>
       </p:sp>
@@ -9448,7 +8992,6 @@
           <a:lstStyle/>
           <a:p>
             <a:pPr algn="ctr"/>
-            <a:endParaRPr/>
           </a:p>
         </p:txBody>
       </p:sp>
@@ -9604,7 +9147,6 @@
           <a:lstStyle/>
           <a:p>
             <a:pPr algn="ctr"/>
-            <a:endParaRPr/>
           </a:p>
         </p:txBody>
       </p:sp>
@@ -9641,7 +9183,7 @@
 </file>
 
 <file path=ppt/slides/slide17.xml><?xml version="1.0" encoding="utf-8"?>
-<p:sld xmlns:a="http://schemas.openxmlformats.org/drawingml/2006/main" xmlns:r="http://schemas.openxmlformats.org/officeDocument/2006/relationships" xmlns:p="http://schemas.openxmlformats.org/presentationml/2006/main">
+<p:sld xmlns:a="http://schemas.openxmlformats.org/drawingml/2006/main" xmlns:p="http://schemas.openxmlformats.org/presentationml/2006/main" xmlns:r="http://schemas.openxmlformats.org/officeDocument/2006/relationships">
   <p:cSld>
     <p:spTree>
       <p:nvGrpSpPr>
@@ -9649,14 +9191,7 @@
         <p:cNvGrpSpPr/>
         <p:nvPr/>
       </p:nvGrpSpPr>
-      <p:grpSpPr>
-        <a:xfrm>
-          <a:off x="0" y="0"/>
-          <a:ext cx="0" cy="0"/>
-          <a:chOff x="0" y="0"/>
-          <a:chExt cx="0" cy="0"/>
-        </a:xfrm>
-      </p:grpSpPr>
+      <p:grpSpPr/>
       <p:sp>
         <p:nvSpPr>
           <p:cNvPr id="2" name="Rectangle 1"/>
@@ -9698,7 +9233,6 @@
           <a:lstStyle/>
           <a:p>
             <a:pPr algn="ctr"/>
-            <a:endParaRPr/>
           </a:p>
         </p:txBody>
       </p:sp>
@@ -9727,7 +9261,7 @@
                 <a:srgbClr val="73787E"/>
               </a:gs>
             </a:gsLst>
-            <a:lin ang="18900000" scaled="0"/>
+            <a:lin scaled="0" ang="18900000"/>
           </a:gradFill>
           <a:ln>
             <a:noFill/>
@@ -9759,7 +9293,6 @@
           <a:lstStyle/>
           <a:p>
             <a:pPr algn="ctr"/>
-            <a:endParaRPr/>
           </a:p>
         </p:txBody>
       </p:sp>
@@ -9829,7 +9362,7 @@
                 <a:srgbClr val="FFFFFF"/>
               </a:gs>
             </a:gsLst>
-            <a:lin ang="0" scaled="0"/>
+            <a:lin scaled="0" ang="0"/>
           </a:gradFill>
           <a:ln>
             <a:noFill/>
@@ -9855,7 +9388,6 @@
           <a:lstStyle/>
           <a:p>
             <a:pPr algn="ctr"/>
-            <a:endParaRPr/>
           </a:p>
         </p:txBody>
       </p:sp>
@@ -9994,7 +9526,6 @@
           <a:lstStyle/>
           <a:p>
             <a:pPr algn="ctr"/>
-            <a:endParaRPr/>
           </a:p>
         </p:txBody>
       </p:sp>
@@ -10073,7 +9604,6 @@
           <a:lstStyle/>
           <a:p>
             <a:pPr algn="ctr"/>
-            <a:endParaRPr/>
           </a:p>
         </p:txBody>
       </p:sp>
@@ -10231,7 +9761,6 @@
           <a:lstStyle/>
           <a:p>
             <a:pPr algn="ctr"/>
-            <a:endParaRPr/>
           </a:p>
         </p:txBody>
       </p:sp>
@@ -10347,7 +9876,7 @@
 </file>
 
 <file path=ppt/slides/slide18.xml><?xml version="1.0" encoding="utf-8"?>
-<p:sld xmlns:a="http://schemas.openxmlformats.org/drawingml/2006/main" xmlns:r="http://schemas.openxmlformats.org/officeDocument/2006/relationships" xmlns:p="http://schemas.openxmlformats.org/presentationml/2006/main">
+<p:sld xmlns:a="http://schemas.openxmlformats.org/drawingml/2006/main" xmlns:p="http://schemas.openxmlformats.org/presentationml/2006/main" xmlns:r="http://schemas.openxmlformats.org/officeDocument/2006/relationships">
   <p:cSld>
     <p:spTree>
       <p:nvGrpSpPr>
@@ -10355,14 +9884,7 @@
         <p:cNvGrpSpPr/>
         <p:nvPr/>
       </p:nvGrpSpPr>
-      <p:grpSpPr>
-        <a:xfrm>
-          <a:off x="0" y="0"/>
-          <a:ext cx="0" cy="0"/>
-          <a:chOff x="0" y="0"/>
-          <a:chExt cx="0" cy="0"/>
-        </a:xfrm>
-      </p:grpSpPr>
+      <p:grpSpPr/>
       <p:sp>
         <p:nvSpPr>
           <p:cNvPr id="2" name="Rectangle 1"/>
@@ -10404,7 +9926,6 @@
           <a:lstStyle/>
           <a:p>
             <a:pPr algn="ctr"/>
-            <a:endParaRPr/>
           </a:p>
         </p:txBody>
       </p:sp>
@@ -10433,7 +9954,7 @@
                 <a:srgbClr val="73787E"/>
               </a:gs>
             </a:gsLst>
-            <a:lin ang="18900000" scaled="0"/>
+            <a:lin scaled="0" ang="18900000"/>
           </a:gradFill>
           <a:ln>
             <a:noFill/>
@@ -10465,7 +9986,6 @@
           <a:lstStyle/>
           <a:p>
             <a:pPr algn="ctr"/>
-            <a:endParaRPr/>
           </a:p>
         </p:txBody>
       </p:sp>
@@ -10535,7 +10055,7 @@
                 <a:srgbClr val="FFFFFF"/>
               </a:gs>
             </a:gsLst>
-            <a:lin ang="0" scaled="0"/>
+            <a:lin scaled="0" ang="0"/>
           </a:gradFill>
           <a:ln>
             <a:noFill/>
@@ -10561,7 +10081,6 @@
           <a:lstStyle/>
           <a:p>
             <a:pPr algn="ctr"/>
-            <a:endParaRPr/>
           </a:p>
         </p:txBody>
       </p:sp>
@@ -10702,7 +10221,6 @@
           <a:lstStyle/>
           <a:p>
             <a:pPr algn="ctr"/>
-            <a:endParaRPr/>
           </a:p>
         </p:txBody>
       </p:sp>
@@ -10860,7 +10378,6 @@
           <a:lstStyle/>
           <a:p>
             <a:pPr algn="ctr"/>
-            <a:endParaRPr/>
           </a:p>
         </p:txBody>
       </p:sp>
@@ -11018,7 +10535,6 @@
           <a:lstStyle/>
           <a:p>
             <a:pPr algn="ctr"/>
-            <a:endParaRPr/>
           </a:p>
         </p:txBody>
       </p:sp>
@@ -11176,7 +10692,6 @@
           <a:lstStyle/>
           <a:p>
             <a:pPr algn="ctr"/>
-            <a:endParaRPr/>
           </a:p>
         </p:txBody>
       </p:sp>
@@ -11272,7 +10787,7 @@
 </file>
 
 <file path=ppt/slides/slide19.xml><?xml version="1.0" encoding="utf-8"?>
-<p:sld xmlns:a="http://schemas.openxmlformats.org/drawingml/2006/main" xmlns:r="http://schemas.openxmlformats.org/officeDocument/2006/relationships" xmlns:p="http://schemas.openxmlformats.org/presentationml/2006/main">
+<p:sld xmlns:a="http://schemas.openxmlformats.org/drawingml/2006/main" xmlns:p="http://schemas.openxmlformats.org/presentationml/2006/main" xmlns:r="http://schemas.openxmlformats.org/officeDocument/2006/relationships">
   <p:cSld>
     <p:spTree>
       <p:nvGrpSpPr>
@@ -11280,14 +10795,7 @@
         <p:cNvGrpSpPr/>
         <p:nvPr/>
       </p:nvGrpSpPr>
-      <p:grpSpPr>
-        <a:xfrm>
-          <a:off x="0" y="0"/>
-          <a:ext cx="0" cy="0"/>
-          <a:chOff x="0" y="0"/>
-          <a:chExt cx="0" cy="0"/>
-        </a:xfrm>
-      </p:grpSpPr>
+      <p:grpSpPr/>
       <p:sp>
         <p:nvSpPr>
           <p:cNvPr id="2" name="Rectangle 1"/>
@@ -11329,7 +10837,6 @@
           <a:lstStyle/>
           <a:p>
             <a:pPr algn="ctr"/>
-            <a:endParaRPr/>
           </a:p>
         </p:txBody>
       </p:sp>
@@ -11358,7 +10865,7 @@
                 <a:srgbClr val="73787E"/>
               </a:gs>
             </a:gsLst>
-            <a:lin ang="18900000" scaled="0"/>
+            <a:lin scaled="0" ang="18900000"/>
           </a:gradFill>
           <a:ln>
             <a:noFill/>
@@ -11390,7 +10897,6 @@
           <a:lstStyle/>
           <a:p>
             <a:pPr algn="ctr"/>
-            <a:endParaRPr/>
           </a:p>
         </p:txBody>
       </p:sp>
@@ -11460,7 +10966,7 @@
                 <a:srgbClr val="FFFFFF"/>
               </a:gs>
             </a:gsLst>
-            <a:lin ang="0" scaled="0"/>
+            <a:lin scaled="0" ang="0"/>
           </a:gradFill>
           <a:ln>
             <a:noFill/>
@@ -11486,7 +10992,6 @@
           <a:lstStyle/>
           <a:p>
             <a:pPr algn="ctr"/>
-            <a:endParaRPr/>
           </a:p>
         </p:txBody>
       </p:sp>
@@ -11595,34 +11100,10 @@
                 <a:tableStyleId>{5C22544A-7EE6-4342-B048-85BDC9FD1C3A}</a:tableStyleId>
               </a:tblPr>
               <a:tblGrid>
-                <a:gridCol w="502920">
-                  <a:extLst>
-                    <a:ext uri="{9D8B030D-6E8A-4147-A177-3AD203B41FA5}">
-                      <a16:colId xmlns:a16="http://schemas.microsoft.com/office/drawing/2014/main" val="20000"/>
-                    </a:ext>
-                  </a:extLst>
-                </a:gridCol>
-                <a:gridCol w="5577840">
-                  <a:extLst>
-                    <a:ext uri="{9D8B030D-6E8A-4147-A177-3AD203B41FA5}">
-                      <a16:colId xmlns:a16="http://schemas.microsoft.com/office/drawing/2014/main" val="20001"/>
-                    </a:ext>
-                  </a:extLst>
-                </a:gridCol>
-                <a:gridCol w="3840480">
-                  <a:extLst>
-                    <a:ext uri="{9D8B030D-6E8A-4147-A177-3AD203B41FA5}">
-                      <a16:colId xmlns:a16="http://schemas.microsoft.com/office/drawing/2014/main" val="20002"/>
-                    </a:ext>
-                  </a:extLst>
-                </a:gridCol>
-                <a:gridCol w="1371600">
-                  <a:extLst>
-                    <a:ext uri="{9D8B030D-6E8A-4147-A177-3AD203B41FA5}">
-                      <a16:colId xmlns:a16="http://schemas.microsoft.com/office/drawing/2014/main" val="20003"/>
-                    </a:ext>
-                  </a:extLst>
-                </a:gridCol>
+                <a:gridCol w="502920"/>
+                <a:gridCol w="5577840"/>
+                <a:gridCol w="3840480"/>
+                <a:gridCol w="1371600"/>
               </a:tblGrid>
               <a:tr h="475488">
                 <a:tc>
@@ -11647,7 +11128,7 @@
                       </a:r>
                     </a:p>
                   </a:txBody>
-                  <a:tcPr marL="73152" marR="73152" marT="27432" marB="27432" anchor="ctr">
+                  <a:tcPr marT="27432" marB="27432" marL="73152" marR="73152" anchor="ctr">
                     <a:solidFill>
                       <a:srgbClr val="33393F"/>
                     </a:solidFill>
@@ -11675,7 +11156,7 @@
                       </a:r>
                     </a:p>
                   </a:txBody>
-                  <a:tcPr marL="73152" marR="73152" marT="27432" marB="27432" anchor="ctr">
+                  <a:tcPr marT="27432" marB="27432" marL="73152" marR="73152" anchor="ctr">
                     <a:solidFill>
                       <a:srgbClr val="33393F"/>
                     </a:solidFill>
@@ -11703,7 +11184,7 @@
                       </a:r>
                     </a:p>
                   </a:txBody>
-                  <a:tcPr marL="73152" marR="73152" marT="27432" marB="27432" anchor="ctr">
+                  <a:tcPr marT="27432" marB="27432" marL="73152" marR="73152" anchor="ctr">
                     <a:solidFill>
                       <a:srgbClr val="33393F"/>
                     </a:solidFill>
@@ -11731,17 +11212,12 @@
                       </a:r>
                     </a:p>
                   </a:txBody>
-                  <a:tcPr marL="73152" marR="73152" marT="27432" marB="27432" anchor="ctr">
+                  <a:tcPr marT="27432" marB="27432" marL="73152" marR="73152" anchor="ctr">
                     <a:solidFill>
                       <a:srgbClr val="33393F"/>
                     </a:solidFill>
                   </a:tcPr>
                 </a:tc>
-                <a:extLst>
-                  <a:ext uri="{0D108BD9-81ED-4DB2-BD59-A6C34878D82A}">
-                    <a16:rowId xmlns:a16="http://schemas.microsoft.com/office/drawing/2014/main" val="10000"/>
-                  </a:ext>
-                </a:extLst>
               </a:tr>
               <a:tr h="475488">
                 <a:tc>
@@ -11766,7 +11242,7 @@
                       </a:r>
                     </a:p>
                   </a:txBody>
-                  <a:tcPr marL="73152" marR="73152" marT="27432" marB="27432" anchor="ctr">
+                  <a:tcPr marT="27432" marB="27432" marL="73152" marR="73152" anchor="ctr">
                     <a:solidFill>
                       <a:srgbClr val="FFFFFF"/>
                     </a:solidFill>
@@ -11794,7 +11270,7 @@
                       </a:r>
                     </a:p>
                   </a:txBody>
-                  <a:tcPr marL="73152" marR="73152" marT="27432" marB="27432" anchor="ctr">
+                  <a:tcPr marT="27432" marB="27432" marL="73152" marR="73152" anchor="ctr">
                     <a:solidFill>
                       <a:srgbClr val="FFFFFF"/>
                     </a:solidFill>
@@ -11822,7 +11298,7 @@
                       </a:r>
                     </a:p>
                   </a:txBody>
-                  <a:tcPr marL="73152" marR="73152" marT="27432" marB="27432" anchor="ctr">
+                  <a:tcPr marT="27432" marB="27432" marL="73152" marR="73152" anchor="ctr">
                     <a:solidFill>
                       <a:srgbClr val="FFFFFF"/>
                     </a:solidFill>
@@ -11850,17 +11326,12 @@
                       </a:r>
                     </a:p>
                   </a:txBody>
-                  <a:tcPr marL="73152" marR="73152" marT="27432" marB="27432" anchor="ctr">
+                  <a:tcPr marT="27432" marB="27432" marL="73152" marR="73152" anchor="ctr">
                     <a:solidFill>
                       <a:srgbClr val="FFFFFF"/>
                     </a:solidFill>
                   </a:tcPr>
                 </a:tc>
-                <a:extLst>
-                  <a:ext uri="{0D108BD9-81ED-4DB2-BD59-A6C34878D82A}">
-                    <a16:rowId xmlns:a16="http://schemas.microsoft.com/office/drawing/2014/main" val="10001"/>
-                  </a:ext>
-                </a:extLst>
               </a:tr>
               <a:tr h="475488">
                 <a:tc>
@@ -11885,7 +11356,7 @@
                       </a:r>
                     </a:p>
                   </a:txBody>
-                  <a:tcPr marL="73152" marR="73152" marT="27432" marB="27432" anchor="ctr">
+                  <a:tcPr marT="27432" marB="27432" marL="73152" marR="73152" anchor="ctr">
                     <a:solidFill>
                       <a:srgbClr val="F6F7F8"/>
                     </a:solidFill>
@@ -11913,7 +11384,7 @@
                       </a:r>
                     </a:p>
                   </a:txBody>
-                  <a:tcPr marL="73152" marR="73152" marT="27432" marB="27432" anchor="ctr">
+                  <a:tcPr marT="27432" marB="27432" marL="73152" marR="73152" anchor="ctr">
                     <a:solidFill>
                       <a:srgbClr val="F6F7F8"/>
                     </a:solidFill>
@@ -11941,7 +11412,7 @@
                       </a:r>
                     </a:p>
                   </a:txBody>
-                  <a:tcPr marL="73152" marR="73152" marT="27432" marB="27432" anchor="ctr">
+                  <a:tcPr marT="27432" marB="27432" marL="73152" marR="73152" anchor="ctr">
                     <a:solidFill>
                       <a:srgbClr val="F6F7F8"/>
                     </a:solidFill>
@@ -11969,17 +11440,12 @@
                       </a:r>
                     </a:p>
                   </a:txBody>
-                  <a:tcPr marL="73152" marR="73152" marT="27432" marB="27432" anchor="ctr">
+                  <a:tcPr marT="27432" marB="27432" marL="73152" marR="73152" anchor="ctr">
                     <a:solidFill>
                       <a:srgbClr val="F6F7F8"/>
                     </a:solidFill>
                   </a:tcPr>
                 </a:tc>
-                <a:extLst>
-                  <a:ext uri="{0D108BD9-81ED-4DB2-BD59-A6C34878D82A}">
-                    <a16:rowId xmlns:a16="http://schemas.microsoft.com/office/drawing/2014/main" val="10002"/>
-                  </a:ext>
-                </a:extLst>
               </a:tr>
               <a:tr h="475488">
                 <a:tc>
@@ -12004,7 +11470,7 @@
                       </a:r>
                     </a:p>
                   </a:txBody>
-                  <a:tcPr marL="73152" marR="73152" marT="27432" marB="27432" anchor="ctr">
+                  <a:tcPr marT="27432" marB="27432" marL="73152" marR="73152" anchor="ctr">
                     <a:solidFill>
                       <a:srgbClr val="FFFFFF"/>
                     </a:solidFill>
@@ -12032,7 +11498,7 @@
                       </a:r>
                     </a:p>
                   </a:txBody>
-                  <a:tcPr marL="73152" marR="73152" marT="27432" marB="27432" anchor="ctr">
+                  <a:tcPr marT="27432" marB="27432" marL="73152" marR="73152" anchor="ctr">
                     <a:solidFill>
                       <a:srgbClr val="FFFFFF"/>
                     </a:solidFill>
@@ -12060,7 +11526,7 @@
                       </a:r>
                     </a:p>
                   </a:txBody>
-                  <a:tcPr marL="73152" marR="73152" marT="27432" marB="27432" anchor="ctr">
+                  <a:tcPr marT="27432" marB="27432" marL="73152" marR="73152" anchor="ctr">
                     <a:solidFill>
                       <a:srgbClr val="FFFFFF"/>
                     </a:solidFill>
@@ -12088,17 +11554,12 @@
                       </a:r>
                     </a:p>
                   </a:txBody>
-                  <a:tcPr marL="73152" marR="73152" marT="27432" marB="27432" anchor="ctr">
+                  <a:tcPr marT="27432" marB="27432" marL="73152" marR="73152" anchor="ctr">
                     <a:solidFill>
                       <a:srgbClr val="FFFFFF"/>
                     </a:solidFill>
                   </a:tcPr>
                 </a:tc>
-                <a:extLst>
-                  <a:ext uri="{0D108BD9-81ED-4DB2-BD59-A6C34878D82A}">
-                    <a16:rowId xmlns:a16="http://schemas.microsoft.com/office/drawing/2014/main" val="10003"/>
-                  </a:ext>
-                </a:extLst>
               </a:tr>
               <a:tr h="475488">
                 <a:tc>
@@ -12123,7 +11584,7 @@
                       </a:r>
                     </a:p>
                   </a:txBody>
-                  <a:tcPr marL="73152" marR="73152" marT="27432" marB="27432" anchor="ctr">
+                  <a:tcPr marT="27432" marB="27432" marL="73152" marR="73152" anchor="ctr">
                     <a:solidFill>
                       <a:srgbClr val="F6F7F8"/>
                     </a:solidFill>
@@ -12151,7 +11612,7 @@
                       </a:r>
                     </a:p>
                   </a:txBody>
-                  <a:tcPr marL="73152" marR="73152" marT="27432" marB="27432" anchor="ctr">
+                  <a:tcPr marT="27432" marB="27432" marL="73152" marR="73152" anchor="ctr">
                     <a:solidFill>
                       <a:srgbClr val="F6F7F8"/>
                     </a:solidFill>
@@ -12179,7 +11640,7 @@
                       </a:r>
                     </a:p>
                   </a:txBody>
-                  <a:tcPr marL="73152" marR="73152" marT="27432" marB="27432" anchor="ctr">
+                  <a:tcPr marT="27432" marB="27432" marL="73152" marR="73152" anchor="ctr">
                     <a:solidFill>
                       <a:srgbClr val="F6F7F8"/>
                     </a:solidFill>
@@ -12207,17 +11668,12 @@
                       </a:r>
                     </a:p>
                   </a:txBody>
-                  <a:tcPr marL="73152" marR="73152" marT="27432" marB="27432" anchor="ctr">
+                  <a:tcPr marT="27432" marB="27432" marL="73152" marR="73152" anchor="ctr">
                     <a:solidFill>
                       <a:srgbClr val="F6F7F8"/>
                     </a:solidFill>
                   </a:tcPr>
                 </a:tc>
-                <a:extLst>
-                  <a:ext uri="{0D108BD9-81ED-4DB2-BD59-A6C34878D82A}">
-                    <a16:rowId xmlns:a16="http://schemas.microsoft.com/office/drawing/2014/main" val="10004"/>
-                  </a:ext>
-                </a:extLst>
               </a:tr>
               <a:tr h="475488">
                 <a:tc>
@@ -12242,7 +11698,7 @@
                       </a:r>
                     </a:p>
                   </a:txBody>
-                  <a:tcPr marL="73152" marR="73152" marT="27432" marB="27432" anchor="ctr">
+                  <a:tcPr marT="27432" marB="27432" marL="73152" marR="73152" anchor="ctr">
                     <a:solidFill>
                       <a:srgbClr val="FFFFFF"/>
                     </a:solidFill>
@@ -12270,7 +11726,7 @@
                       </a:r>
                     </a:p>
                   </a:txBody>
-                  <a:tcPr marL="73152" marR="73152" marT="27432" marB="27432" anchor="ctr">
+                  <a:tcPr marT="27432" marB="27432" marL="73152" marR="73152" anchor="ctr">
                     <a:solidFill>
                       <a:srgbClr val="FFFFFF"/>
                     </a:solidFill>
@@ -12298,7 +11754,7 @@
                       </a:r>
                     </a:p>
                   </a:txBody>
-                  <a:tcPr marL="73152" marR="73152" marT="27432" marB="27432" anchor="ctr">
+                  <a:tcPr marT="27432" marB="27432" marL="73152" marR="73152" anchor="ctr">
                     <a:solidFill>
                       <a:srgbClr val="FFFFFF"/>
                     </a:solidFill>
@@ -12326,17 +11782,12 @@
                       </a:r>
                     </a:p>
                   </a:txBody>
-                  <a:tcPr marL="73152" marR="73152" marT="27432" marB="27432" anchor="ctr">
+                  <a:tcPr marT="27432" marB="27432" marL="73152" marR="73152" anchor="ctr">
                     <a:solidFill>
                       <a:srgbClr val="FFFFFF"/>
                     </a:solidFill>
                   </a:tcPr>
                 </a:tc>
-                <a:extLst>
-                  <a:ext uri="{0D108BD9-81ED-4DB2-BD59-A6C34878D82A}">
-                    <a16:rowId xmlns:a16="http://schemas.microsoft.com/office/drawing/2014/main" val="10005"/>
-                  </a:ext>
-                </a:extLst>
               </a:tr>
             </a:tbl>
           </a:graphicData>
@@ -12757,7 +12208,7 @@
                 <a:latin typeface="맑은 고딕"/>
                 <a:ea typeface="맑은 고딕"/>
               </a:rPr>
-              <a:t>Ⅰ. 배경과 요약</a:t>
+              <a:t>Ⅰ. 배경</a:t>
             </a:r>
           </a:p>
           <a:p>
@@ -13679,7 +13130,7 @@
 </file>
 
 <file path=ppt/slides/slide20.xml><?xml version="1.0" encoding="utf-8"?>
-<p:sld xmlns:a="http://schemas.openxmlformats.org/drawingml/2006/main" xmlns:r="http://schemas.openxmlformats.org/officeDocument/2006/relationships" xmlns:p="http://schemas.openxmlformats.org/presentationml/2006/main">
+<p:sld xmlns:a="http://schemas.openxmlformats.org/drawingml/2006/main" xmlns:p="http://schemas.openxmlformats.org/presentationml/2006/main" xmlns:r="http://schemas.openxmlformats.org/officeDocument/2006/relationships">
   <p:cSld>
     <p:spTree>
       <p:nvGrpSpPr>
@@ -13687,14 +13138,7 @@
         <p:cNvGrpSpPr/>
         <p:nvPr/>
       </p:nvGrpSpPr>
-      <p:grpSpPr>
-        <a:xfrm>
-          <a:off x="0" y="0"/>
-          <a:ext cx="0" cy="0"/>
-          <a:chOff x="0" y="0"/>
-          <a:chExt cx="0" cy="0"/>
-        </a:xfrm>
-      </p:grpSpPr>
+      <p:grpSpPr/>
       <p:sp>
         <p:nvSpPr>
           <p:cNvPr id="2" name="Rectangle 1"/>
@@ -13736,7 +13180,6 @@
           <a:lstStyle/>
           <a:p>
             <a:pPr algn="ctr"/>
-            <a:endParaRPr/>
           </a:p>
         </p:txBody>
       </p:sp>
@@ -13765,7 +13208,7 @@
                 <a:srgbClr val="73787E"/>
               </a:gs>
             </a:gsLst>
-            <a:lin ang="18900000" scaled="0"/>
+            <a:lin scaled="0" ang="18900000"/>
           </a:gradFill>
           <a:ln>
             <a:noFill/>
@@ -13797,7 +13240,6 @@
           <a:lstStyle/>
           <a:p>
             <a:pPr algn="ctr"/>
-            <a:endParaRPr/>
           </a:p>
         </p:txBody>
       </p:sp>
@@ -13867,7 +13309,7 @@
                 <a:srgbClr val="FFFFFF"/>
               </a:gs>
             </a:gsLst>
-            <a:lin ang="0" scaled="0"/>
+            <a:lin scaled="0" ang="0"/>
           </a:gradFill>
           <a:ln>
             <a:noFill/>
@@ -13893,7 +13335,6 @@
           <a:lstStyle/>
           <a:p>
             <a:pPr algn="ctr"/>
-            <a:endParaRPr/>
           </a:p>
         </p:txBody>
       </p:sp>
@@ -14034,7 +13475,6 @@
           <a:lstStyle/>
           <a:p>
             <a:pPr algn="ctr"/>
-            <a:endParaRPr/>
           </a:p>
         </p:txBody>
       </p:sp>
@@ -14232,7 +13672,6 @@
           <a:lstStyle/>
           <a:p>
             <a:pPr algn="ctr"/>
-            <a:endParaRPr/>
           </a:p>
         </p:txBody>
       </p:sp>
@@ -14411,7 +13850,7 @@
 </file>
 
 <file path=ppt/slides/slide21.xml><?xml version="1.0" encoding="utf-8"?>
-<p:sld xmlns:a="http://schemas.openxmlformats.org/drawingml/2006/main" xmlns:r="http://schemas.openxmlformats.org/officeDocument/2006/relationships" xmlns:p="http://schemas.openxmlformats.org/presentationml/2006/main">
+<p:sld xmlns:a="http://schemas.openxmlformats.org/drawingml/2006/main" xmlns:p="http://schemas.openxmlformats.org/presentationml/2006/main" xmlns:r="http://schemas.openxmlformats.org/officeDocument/2006/relationships">
   <p:cSld>
     <p:spTree>
       <p:nvGrpSpPr>
@@ -14419,14 +13858,7 @@
         <p:cNvGrpSpPr/>
         <p:nvPr/>
       </p:nvGrpSpPr>
-      <p:grpSpPr>
-        <a:xfrm>
-          <a:off x="0" y="0"/>
-          <a:ext cx="0" cy="0"/>
-          <a:chOff x="0" y="0"/>
-          <a:chExt cx="0" cy="0"/>
-        </a:xfrm>
-      </p:grpSpPr>
+      <p:grpSpPr/>
       <p:sp>
         <p:nvSpPr>
           <p:cNvPr id="2" name="Rectangle 1"/>
@@ -14468,7 +13900,6 @@
           <a:lstStyle/>
           <a:p>
             <a:pPr algn="ctr"/>
-            <a:endParaRPr/>
           </a:p>
         </p:txBody>
       </p:sp>
@@ -14538,7 +13969,7 @@
                 <a:srgbClr val="FFFFFF"/>
               </a:gs>
             </a:gsLst>
-            <a:lin ang="0" scaled="0"/>
+            <a:lin scaled="0" ang="0"/>
           </a:gradFill>
           <a:ln>
             <a:noFill/>
@@ -14564,7 +13995,6 @@
           <a:lstStyle/>
           <a:p>
             <a:pPr algn="ctr"/>
-            <a:endParaRPr/>
           </a:p>
         </p:txBody>
       </p:sp>
@@ -14743,7 +14173,7 @@
 </file>
 
 <file path=ppt/slides/slide3.xml><?xml version="1.0" encoding="utf-8"?>
-<p:sld xmlns:a="http://schemas.openxmlformats.org/drawingml/2006/main" xmlns:r="http://schemas.openxmlformats.org/officeDocument/2006/relationships" xmlns:p="http://schemas.openxmlformats.org/presentationml/2006/main">
+<p:sld xmlns:a="http://schemas.openxmlformats.org/drawingml/2006/main" xmlns:p="http://schemas.openxmlformats.org/presentationml/2006/main" xmlns:r="http://schemas.openxmlformats.org/officeDocument/2006/relationships">
   <p:cSld>
     <p:spTree>
       <p:nvGrpSpPr>
@@ -14751,14 +14181,7 @@
         <p:cNvGrpSpPr/>
         <p:nvPr/>
       </p:nvGrpSpPr>
-      <p:grpSpPr>
-        <a:xfrm>
-          <a:off x="0" y="0"/>
-          <a:ext cx="0" cy="0"/>
-          <a:chOff x="0" y="0"/>
-          <a:chExt cx="0" cy="0"/>
-        </a:xfrm>
-      </p:grpSpPr>
+      <p:grpSpPr/>
       <p:sp>
         <p:nvSpPr>
           <p:cNvPr id="2" name="Rectangle 1"/>
@@ -14800,7 +14223,6 @@
           <a:lstStyle/>
           <a:p>
             <a:pPr algn="ctr"/>
-            <a:endParaRPr/>
           </a:p>
         </p:txBody>
       </p:sp>
@@ -14829,7 +14251,7 @@
                 <a:srgbClr val="73787E"/>
               </a:gs>
             </a:gsLst>
-            <a:lin ang="18900000" scaled="0"/>
+            <a:lin scaled="0" ang="18900000"/>
           </a:gradFill>
           <a:ln>
             <a:noFill/>
@@ -14861,7 +14283,6 @@
           <a:lstStyle/>
           <a:p>
             <a:pPr algn="ctr"/>
-            <a:endParaRPr/>
           </a:p>
         </p:txBody>
       </p:sp>
@@ -14873,8 +14294,8 @@
         </p:nvSpPr>
         <p:spPr>
           <a:xfrm>
-            <a:off x="960120" y="399564"/>
-            <a:ext cx="9692640" cy="435312"/>
+            <a:off x="960120" y="274320"/>
+            <a:ext cx="9692640" cy="685800"/>
           </a:xfrm>
           <a:prstGeom prst="rect">
             <a:avLst/>
@@ -14896,7 +14317,7 @@
               </a:spcAft>
             </a:pPr>
             <a:r>
-              <a:rPr lang="ko-KR" altLang="en-US" sz="2150" b="1" dirty="0">
+              <a:rPr sz="2150" b="1">
                 <a:solidFill>
                   <a:srgbClr val="1C1C1E"/>
                 </a:solidFill>
@@ -14905,133 +14326,6 @@
               </a:rPr>
               <a:t>프로젝트 배경 — 분만취약지 제도와 접근성의 두 축</a:t>
             </a:r>
-            <a:r>
-              <a:rPr sz="2150" b="1" dirty="0">
-                <a:solidFill>
-                  <a:srgbClr val="1C1C1E"/>
-                </a:solidFill>
-                <a:latin typeface="맑은 고딕"/>
-                <a:ea typeface="맑은 고딕"/>
-              </a:rPr>
-              <a:t/>
-            </a:r>
-            <a:r>
-              <a:rPr sz="2150" b="1" dirty="0" err="1">
-                <a:solidFill>
-                  <a:srgbClr val="1C1C1E"/>
-                </a:solidFill>
-                <a:latin typeface="맑은 고딕"/>
-                <a:ea typeface="맑은 고딕"/>
-              </a:rPr>
-              <a:t/>
-            </a:r>
-            <a:r>
-              <a:rPr sz="2150" b="1" dirty="0">
-                <a:solidFill>
-                  <a:srgbClr val="1C1C1E"/>
-                </a:solidFill>
-                <a:latin typeface="맑은 고딕"/>
-                <a:ea typeface="맑은 고딕"/>
-              </a:rPr>
-              <a:t/>
-            </a:r>
-            <a:r>
-              <a:rPr sz="2150" b="1" dirty="0" err="1">
-                <a:solidFill>
-                  <a:srgbClr val="1C1C1E"/>
-                </a:solidFill>
-                <a:latin typeface="맑은 고딕"/>
-                <a:ea typeface="맑은 고딕"/>
-              </a:rPr>
-              <a:t/>
-            </a:r>
-            <a:r>
-              <a:rPr sz="2150" b="1" dirty="0">
-                <a:solidFill>
-                  <a:srgbClr val="1C1C1E"/>
-                </a:solidFill>
-                <a:latin typeface="맑은 고딕"/>
-                <a:ea typeface="맑은 고딕"/>
-              </a:rPr>
-              <a:t/>
-            </a:r>
-            <a:r>
-              <a:rPr sz="2150" b="1" dirty="0" err="1">
-                <a:solidFill>
-                  <a:srgbClr val="1C1C1E"/>
-                </a:solidFill>
-                <a:latin typeface="맑은 고딕"/>
-                <a:ea typeface="맑은 고딕"/>
-              </a:rPr>
-              <a:t/>
-            </a:r>
-            <a:r>
-              <a:rPr sz="2150" b="1" dirty="0">
-                <a:solidFill>
-                  <a:srgbClr val="1C1C1E"/>
-                </a:solidFill>
-                <a:latin typeface="맑은 고딕"/>
-                <a:ea typeface="맑은 고딕"/>
-              </a:rPr>
-              <a:t/>
-            </a:r>
-            <a:r>
-              <a:rPr sz="2150" b="1" dirty="0" err="1">
-                <a:solidFill>
-                  <a:srgbClr val="1C1C1E"/>
-                </a:solidFill>
-                <a:latin typeface="맑은 고딕"/>
-                <a:ea typeface="맑은 고딕"/>
-              </a:rPr>
-              <a:t/>
-            </a:r>
-            <a:r>
-              <a:rPr sz="2150" b="1" dirty="0">
-                <a:solidFill>
-                  <a:srgbClr val="1C1C1E"/>
-                </a:solidFill>
-                <a:latin typeface="맑은 고딕"/>
-                <a:ea typeface="맑은 고딕"/>
-              </a:rPr>
-              <a:t/>
-            </a:r>
-            <a:r>
-              <a:rPr sz="2150" b="1" dirty="0" err="1">
-                <a:solidFill>
-                  <a:srgbClr val="1C1C1E"/>
-                </a:solidFill>
-                <a:latin typeface="맑은 고딕"/>
-                <a:ea typeface="맑은 고딕"/>
-              </a:rPr>
-              <a:t/>
-            </a:r>
-            <a:r>
-              <a:rPr sz="2150" b="1" dirty="0">
-                <a:solidFill>
-                  <a:srgbClr val="1C1C1E"/>
-                </a:solidFill>
-                <a:latin typeface="맑은 고딕"/>
-                <a:ea typeface="맑은 고딕"/>
-              </a:rPr>
-              <a:t/>
-            </a:r>
-            <a:r>
-              <a:rPr sz="2150" b="1" dirty="0" err="1">
-                <a:solidFill>
-                  <a:srgbClr val="1C1C1E"/>
-                </a:solidFill>
-                <a:latin typeface="맑은 고딕"/>
-                <a:ea typeface="맑은 고딕"/>
-              </a:rPr>
-              <a:t/>
-            </a:r>
-            <a:endParaRPr sz="2150" b="1" dirty="0">
-              <a:solidFill>
-                <a:srgbClr val="1C1C1E"/>
-              </a:solidFill>
-              <a:latin typeface="맑은 고딕"/>
-              <a:ea typeface="맑은 고딕"/>
-            </a:endParaRPr>
           </a:p>
         </p:txBody>
       </p:sp>
@@ -15058,7 +14352,7 @@
                 <a:srgbClr val="FFFFFF"/>
               </a:gs>
             </a:gsLst>
-            <a:lin ang="0" scaled="0"/>
+            <a:lin scaled="0" ang="0"/>
           </a:gradFill>
           <a:ln>
             <a:noFill/>
@@ -15084,7 +14378,6 @@
           <a:lstStyle/>
           <a:p>
             <a:pPr algn="ctr"/>
-            <a:endParaRPr/>
           </a:p>
         </p:txBody>
       </p:sp>
@@ -15140,7 +14433,7 @@
         <p:spPr>
           <a:xfrm>
             <a:off x="548640" y="1097280"/>
-            <a:ext cx="11155680" cy="291747"/>
+            <a:ext cx="11155680" cy="384048"/>
           </a:xfrm>
           <a:prstGeom prst="rect">
             <a:avLst/>
@@ -15162,7 +14455,7 @@
               </a:spcAft>
             </a:pPr>
             <a:r>
-              <a:rPr lang="ko-KR" altLang="en-US" sz="1250" b="0" dirty="0">
+              <a:rPr sz="1250" b="0">
                 <a:solidFill>
                   <a:srgbClr val="767A7F"/>
                 </a:solidFill>
@@ -15171,113 +14464,6 @@
               </a:rPr>
               <a:t>무엇을 다루는 제도이고, 이 프로젝트는 그중 무엇을 감사했는가</a:t>
             </a:r>
-            <a:r>
-              <a:rPr lang="en-US" altLang="ko-KR" sz="1250" b="0" dirty="0">
-                <a:solidFill>
-                  <a:srgbClr val="767A7F"/>
-                </a:solidFill>
-                <a:latin typeface="맑은 고딕"/>
-                <a:ea typeface="맑은 고딕"/>
-              </a:rPr>
-              <a:t/>
-            </a:r>
-            <a:r>
-              <a:rPr sz="1250" b="0" dirty="0">
-                <a:solidFill>
-                  <a:srgbClr val="767A7F"/>
-                </a:solidFill>
-                <a:latin typeface="맑은 고딕"/>
-                <a:ea typeface="맑은 고딕"/>
-              </a:rPr>
-              <a:t/>
-            </a:r>
-            <a:r>
-              <a:rPr sz="1250" b="0" dirty="0" err="1">
-                <a:solidFill>
-                  <a:srgbClr val="767A7F"/>
-                </a:solidFill>
-                <a:latin typeface="맑은 고딕"/>
-                <a:ea typeface="맑은 고딕"/>
-              </a:rPr>
-              <a:t/>
-            </a:r>
-            <a:r>
-              <a:rPr sz="1250" b="0" dirty="0">
-                <a:solidFill>
-                  <a:srgbClr val="767A7F"/>
-                </a:solidFill>
-                <a:latin typeface="맑은 고딕"/>
-                <a:ea typeface="맑은 고딕"/>
-              </a:rPr>
-              <a:t/>
-            </a:r>
-            <a:r>
-              <a:rPr sz="1250" b="0" dirty="0" err="1">
-                <a:solidFill>
-                  <a:srgbClr val="767A7F"/>
-                </a:solidFill>
-                <a:latin typeface="맑은 고딕"/>
-                <a:ea typeface="맑은 고딕"/>
-              </a:rPr>
-              <a:t/>
-            </a:r>
-            <a:r>
-              <a:rPr sz="1250" b="0" dirty="0">
-                <a:solidFill>
-                  <a:srgbClr val="767A7F"/>
-                </a:solidFill>
-                <a:latin typeface="맑은 고딕"/>
-                <a:ea typeface="맑은 고딕"/>
-              </a:rPr>
-              <a:t/>
-            </a:r>
-            <a:r>
-              <a:rPr sz="1250" b="0" dirty="0" err="1">
-                <a:solidFill>
-                  <a:srgbClr val="767A7F"/>
-                </a:solidFill>
-                <a:latin typeface="맑은 고딕"/>
-                <a:ea typeface="맑은 고딕"/>
-              </a:rPr>
-              <a:t/>
-            </a:r>
-            <a:r>
-              <a:rPr sz="1250" b="0" dirty="0">
-                <a:solidFill>
-                  <a:srgbClr val="767A7F"/>
-                </a:solidFill>
-                <a:latin typeface="맑은 고딕"/>
-                <a:ea typeface="맑은 고딕"/>
-              </a:rPr>
-              <a:t/>
-            </a:r>
-            <a:r>
-              <a:rPr sz="1250" b="0" dirty="0" err="1">
-                <a:solidFill>
-                  <a:srgbClr val="767A7F"/>
-                </a:solidFill>
-                <a:latin typeface="맑은 고딕"/>
-                <a:ea typeface="맑은 고딕"/>
-              </a:rPr>
-              <a:t/>
-            </a:r>
-            <a:r>
-              <a:rPr lang="ko-KR" altLang="en-US" sz="1250" b="0" dirty="0">
-                <a:solidFill>
-                  <a:srgbClr val="767A7F"/>
-                </a:solidFill>
-                <a:latin typeface="맑은 고딕"/>
-                <a:ea typeface="맑은 고딕"/>
-              </a:rPr>
-              <a:t/>
-            </a:r>
-            <a:endParaRPr sz="1250" b="0" dirty="0">
-              <a:solidFill>
-                <a:srgbClr val="767A7F"/>
-              </a:solidFill>
-              <a:latin typeface="맑은 고딕"/>
-              <a:ea typeface="맑은 고딕"/>
-            </a:endParaRPr>
           </a:p>
         </p:txBody>
       </p:sp>
@@ -15375,7 +14561,6 @@
           <a:lstStyle/>
           <a:p>
             <a:pPr algn="ctr"/>
-            <a:endParaRPr/>
           </a:p>
         </p:txBody>
       </p:sp>
@@ -15388,7 +14573,7 @@
         <p:spPr>
           <a:xfrm>
             <a:off x="685800" y="1499616"/>
-            <a:ext cx="3246120" cy="933269"/>
+            <a:ext cx="3246120" cy="1527048"/>
           </a:xfrm>
           <a:prstGeom prst="rect">
             <a:avLst/>
@@ -15410,7 +14595,7 @@
               </a:spcAft>
             </a:pPr>
             <a:r>
-              <a:rPr sz="1300" b="1" dirty="0">
+              <a:rPr sz="1300" b="1">
                 <a:solidFill>
                   <a:srgbClr val="33393F"/>
                 </a:solidFill>
@@ -15419,35 +14604,18 @@
               </a:rPr>
               <a:t>① 분만취약지란 무엇인가</a:t>
             </a:r>
-            <a:r>
-              <a:rPr lang="ko-KR" altLang="en-US" sz="1300" b="1" dirty="0">
-                <a:solidFill>
-                  <a:srgbClr val="33393F"/>
-                </a:solidFill>
-                <a:latin typeface="맑은 고딕"/>
-                <a:ea typeface="맑은 고딕"/>
-              </a:rPr>
-              <a:t/>
-            </a:r>
-            <a:endParaRPr lang="en-US" altLang="ko-KR" sz="1300" b="1" dirty="0">
-              <a:solidFill>
-                <a:srgbClr val="33393F"/>
-              </a:solidFill>
-              <a:latin typeface="맑은 고딕"/>
-              <a:ea typeface="맑은 고딕"/>
-            </a:endParaRPr>
-          </a:p>
-          <a:p>
-            <a:pPr>
-              <a:lnSpc>
-                <a:spcPct val="114000"/>
-              </a:lnSpc>
-              <a:spcAft>
-                <a:spcPts val="350"/>
-              </a:spcAft>
-            </a:pPr>
-            <a:r>
-              <a:rPr sz="1100" b="0" dirty="0">
+          </a:p>
+          <a:p>
+            <a:pPr marL="160020" indent="-160020">
+              <a:lnSpc>
+                <a:spcPct val="114000"/>
+              </a:lnSpc>
+              <a:spcAft>
+                <a:spcPts val="200"/>
+              </a:spcAft>
+            </a:pPr>
+            <a:r>
+              <a:rPr sz="1100" b="0">
                 <a:solidFill>
                   <a:srgbClr val="1C1C1E"/>
                 </a:solidFill>
@@ -15456,263 +14624,6 @@
               </a:rPr>
               <a:t>• 소득·인구가 적은 지역이 아니라, 그 지역 가임기 여성이 ① 분만 가능 기관까지 60분 안에 닿기 어렵고(접근성) ② 실제 출산도 60분 안에 하지 못하는(이용률) 시·군 — 즉 거리와 시간으로 정의된다</a:t>
             </a:r>
-            <a:r>
-              <a:rPr sz="1100" b="0" dirty="0" err="1">
-                <a:solidFill>
-                  <a:srgbClr val="1C1C1E"/>
-                </a:solidFill>
-                <a:latin typeface="맑은 고딕"/>
-                <a:ea typeface="맑은 고딕"/>
-              </a:rPr>
-              <a:t/>
-            </a:r>
-            <a:r>
-              <a:rPr sz="1100" b="0" dirty="0">
-                <a:solidFill>
-                  <a:srgbClr val="1C1C1E"/>
-                </a:solidFill>
-                <a:latin typeface="맑은 고딕"/>
-                <a:ea typeface="맑은 고딕"/>
-              </a:rPr>
-              <a:t/>
-            </a:r>
-            <a:r>
-              <a:rPr sz="1100" b="0" dirty="0" err="1">
-                <a:solidFill>
-                  <a:srgbClr val="1C1C1E"/>
-                </a:solidFill>
-                <a:latin typeface="맑은 고딕"/>
-                <a:ea typeface="맑은 고딕"/>
-              </a:rPr>
-              <a:t/>
-            </a:r>
-            <a:r>
-              <a:rPr sz="1100" b="0" dirty="0">
-                <a:solidFill>
-                  <a:srgbClr val="1C1C1E"/>
-                </a:solidFill>
-                <a:latin typeface="맑은 고딕"/>
-                <a:ea typeface="맑은 고딕"/>
-              </a:rPr>
-              <a:t/>
-            </a:r>
-            <a:r>
-              <a:rPr sz="1100" b="0" dirty="0" err="1">
-                <a:solidFill>
-                  <a:srgbClr val="1C1C1E"/>
-                </a:solidFill>
-                <a:latin typeface="맑은 고딕"/>
-                <a:ea typeface="맑은 고딕"/>
-              </a:rPr>
-              <a:t/>
-            </a:r>
-            <a:r>
-              <a:rPr sz="1100" b="0" dirty="0">
-                <a:solidFill>
-                  <a:srgbClr val="1C1C1E"/>
-                </a:solidFill>
-                <a:latin typeface="맑은 고딕"/>
-                <a:ea typeface="맑은 고딕"/>
-              </a:rPr>
-              <a:t/>
-            </a:r>
-            <a:r>
-              <a:rPr sz="1100" b="0" dirty="0" err="1">
-                <a:solidFill>
-                  <a:srgbClr val="1C1C1E"/>
-                </a:solidFill>
-                <a:latin typeface="맑은 고딕"/>
-                <a:ea typeface="맑은 고딕"/>
-              </a:rPr>
-              <a:t/>
-            </a:r>
-            <a:r>
-              <a:rPr sz="1100" b="0" dirty="0">
-                <a:solidFill>
-                  <a:srgbClr val="1C1C1E"/>
-                </a:solidFill>
-                <a:latin typeface="맑은 고딕"/>
-                <a:ea typeface="맑은 고딕"/>
-              </a:rPr>
-              <a:t/>
-            </a:r>
-            <a:r>
-              <a:rPr sz="1100" b="0" dirty="0" err="1">
-                <a:solidFill>
-                  <a:srgbClr val="1C1C1E"/>
-                </a:solidFill>
-                <a:latin typeface="맑은 고딕"/>
-                <a:ea typeface="맑은 고딕"/>
-              </a:rPr>
-              <a:t/>
-            </a:r>
-            <a:r>
-              <a:rPr sz="1100" b="0" dirty="0">
-                <a:solidFill>
-                  <a:srgbClr val="1C1C1E"/>
-                </a:solidFill>
-                <a:latin typeface="맑은 고딕"/>
-                <a:ea typeface="맑은 고딕"/>
-              </a:rPr>
-              <a:t/>
-            </a:r>
-            <a:r>
-              <a:rPr sz="1100" b="0" dirty="0" err="1">
-                <a:solidFill>
-                  <a:srgbClr val="1C1C1E"/>
-                </a:solidFill>
-                <a:latin typeface="맑은 고딕"/>
-                <a:ea typeface="맑은 고딕"/>
-              </a:rPr>
-              <a:t/>
-            </a:r>
-            <a:r>
-              <a:rPr sz="1100" b="0" dirty="0">
-                <a:solidFill>
-                  <a:srgbClr val="1C1C1E"/>
-                </a:solidFill>
-                <a:latin typeface="맑은 고딕"/>
-                <a:ea typeface="맑은 고딕"/>
-              </a:rPr>
-              <a:t/>
-            </a:r>
-            <a:r>
-              <a:rPr sz="1100" b="0" dirty="0" err="1">
-                <a:solidFill>
-                  <a:srgbClr val="1C1C1E"/>
-                </a:solidFill>
-                <a:latin typeface="맑은 고딕"/>
-                <a:ea typeface="맑은 고딕"/>
-              </a:rPr>
-              <a:t/>
-            </a:r>
-            <a:r>
-              <a:rPr sz="1100" b="0" dirty="0">
-                <a:solidFill>
-                  <a:srgbClr val="1C1C1E"/>
-                </a:solidFill>
-                <a:latin typeface="맑은 고딕"/>
-                <a:ea typeface="맑은 고딕"/>
-              </a:rPr>
-              <a:t/>
-            </a:r>
-            <a:r>
-              <a:rPr sz="1100" b="0" dirty="0" err="1">
-                <a:solidFill>
-                  <a:srgbClr val="1C1C1E"/>
-                </a:solidFill>
-                <a:latin typeface="맑은 고딕"/>
-                <a:ea typeface="맑은 고딕"/>
-              </a:rPr>
-              <a:t/>
-            </a:r>
-            <a:r>
-              <a:rPr sz="1100" b="0" dirty="0">
-                <a:solidFill>
-                  <a:srgbClr val="1C1C1E"/>
-                </a:solidFill>
-                <a:latin typeface="맑은 고딕"/>
-                <a:ea typeface="맑은 고딕"/>
-              </a:rPr>
-              <a:t/>
-            </a:r>
-            <a:r>
-              <a:rPr sz="1100" b="0" dirty="0" err="1">
-                <a:solidFill>
-                  <a:srgbClr val="1C1C1E"/>
-                </a:solidFill>
-                <a:latin typeface="맑은 고딕"/>
-                <a:ea typeface="맑은 고딕"/>
-              </a:rPr>
-              <a:t/>
-            </a:r>
-            <a:r>
-              <a:rPr sz="1100" b="0" dirty="0">
-                <a:solidFill>
-                  <a:srgbClr val="1C1C1E"/>
-                </a:solidFill>
-                <a:latin typeface="맑은 고딕"/>
-                <a:ea typeface="맑은 고딕"/>
-              </a:rPr>
-              <a:t/>
-            </a:r>
-            <a:r>
-              <a:rPr sz="1100" b="0" dirty="0" err="1">
-                <a:solidFill>
-                  <a:srgbClr val="1C1C1E"/>
-                </a:solidFill>
-                <a:latin typeface="맑은 고딕"/>
-                <a:ea typeface="맑은 고딕"/>
-              </a:rPr>
-              <a:t/>
-            </a:r>
-            <a:r>
-              <a:rPr sz="1100" b="0" dirty="0">
-                <a:solidFill>
-                  <a:srgbClr val="1C1C1E"/>
-                </a:solidFill>
-                <a:latin typeface="맑은 고딕"/>
-                <a:ea typeface="맑은 고딕"/>
-              </a:rPr>
-              <a:t/>
-            </a:r>
-            <a:r>
-              <a:rPr sz="1100" b="0" dirty="0" err="1">
-                <a:solidFill>
-                  <a:srgbClr val="1C1C1E"/>
-                </a:solidFill>
-                <a:latin typeface="맑은 고딕"/>
-                <a:ea typeface="맑은 고딕"/>
-              </a:rPr>
-              <a:t/>
-            </a:r>
-            <a:r>
-              <a:rPr sz="1100" b="0" dirty="0">
-                <a:solidFill>
-                  <a:srgbClr val="1C1C1E"/>
-                </a:solidFill>
-                <a:latin typeface="맑은 고딕"/>
-                <a:ea typeface="맑은 고딕"/>
-              </a:rPr>
-              <a:t/>
-            </a:r>
-            <a:r>
-              <a:rPr sz="1100" b="0" dirty="0" err="1">
-                <a:solidFill>
-                  <a:srgbClr val="1C1C1E"/>
-                </a:solidFill>
-                <a:latin typeface="맑은 고딕"/>
-                <a:ea typeface="맑은 고딕"/>
-              </a:rPr>
-              <a:t/>
-            </a:r>
-            <a:r>
-              <a:rPr sz="1100" b="0" dirty="0">
-                <a:solidFill>
-                  <a:srgbClr val="1C1C1E"/>
-                </a:solidFill>
-                <a:latin typeface="맑은 고딕"/>
-                <a:ea typeface="맑은 고딕"/>
-              </a:rPr>
-              <a:t/>
-            </a:r>
-            <a:r>
-              <a:rPr sz="1100" b="0" dirty="0" err="1">
-                <a:solidFill>
-                  <a:srgbClr val="1C1C1E"/>
-                </a:solidFill>
-                <a:latin typeface="맑은 고딕"/>
-                <a:ea typeface="맑은 고딕"/>
-              </a:rPr>
-              <a:t/>
-            </a:r>
-            <a:endParaRPr sz="1100" b="0" dirty="0">
-              <a:solidFill>
-                <a:srgbClr val="1C1C1E"/>
-              </a:solidFill>
-              <a:latin typeface="맑은 고딕"/>
-              <a:ea typeface="맑은 고딕"/>
-            </a:endParaRPr>
           </a:p>
         </p:txBody>
       </p:sp>
@@ -15767,7 +14678,6 @@
           <a:lstStyle/>
           <a:p>
             <a:pPr algn="ctr"/>
-            <a:endParaRPr/>
           </a:p>
         </p:txBody>
       </p:sp>
@@ -15802,7 +14712,7 @@
               </a:spcAft>
             </a:pPr>
             <a:r>
-              <a:rPr sz="1300" b="1" dirty="0">
+              <a:rPr sz="1300" b="1">
                 <a:solidFill>
                   <a:srgbClr val="33393F"/>
                 </a:solidFill>
@@ -15811,43 +14721,6 @@
               </a:rPr>
               <a:t>② 접근성은 원래 두 축이다</a:t>
             </a:r>
-            <a:r>
-              <a:rPr sz="1300" b="1" dirty="0" err="1">
-                <a:solidFill>
-                  <a:srgbClr val="33393F"/>
-                </a:solidFill>
-                <a:latin typeface="맑은 고딕"/>
-                <a:ea typeface="맑은 고딕"/>
-              </a:rPr>
-              <a:t/>
-            </a:r>
-            <a:r>
-              <a:rPr sz="1300" b="1" dirty="0">
-                <a:solidFill>
-                  <a:srgbClr val="33393F"/>
-                </a:solidFill>
-                <a:latin typeface="맑은 고딕"/>
-                <a:ea typeface="맑은 고딕"/>
-              </a:rPr>
-              <a:t/>
-            </a:r>
-            <a:r>
-              <a:rPr sz="1300" b="1" dirty="0" err="1">
-                <a:solidFill>
-                  <a:srgbClr val="33393F"/>
-                </a:solidFill>
-                <a:latin typeface="맑은 고딕"/>
-                <a:ea typeface="맑은 고딕"/>
-              </a:rPr>
-              <a:t/>
-            </a:r>
-            <a:endParaRPr sz="1300" b="1" dirty="0">
-              <a:solidFill>
-                <a:srgbClr val="33393F"/>
-              </a:solidFill>
-              <a:latin typeface="맑은 고딕"/>
-              <a:ea typeface="맑은 고딕"/>
-            </a:endParaRPr>
           </a:p>
           <a:p>
             <a:pPr marL="160020" indent="-160020">
@@ -15859,7 +14732,7 @@
               </a:spcAft>
             </a:pPr>
             <a:r>
-              <a:rPr sz="1100" b="0" dirty="0">
+              <a:rPr sz="1100" b="0">
                 <a:solidFill>
                   <a:srgbClr val="1C1C1E"/>
                 </a:solidFill>
@@ -15868,223 +14741,6 @@
               </a:rPr>
               <a:t>• 보건지리학 표준(2SFCA)은 접근성을 공간 축(얼마나 멀리 있는가) × 비공간 축(그곳에 의사가 있는가)의 결합으로 본다. 현행 판정식이 어느 축을 보는지가 감사의 출발점이다</a:t>
             </a:r>
-            <a:r>
-              <a:rPr sz="1100" b="0" dirty="0" err="1">
-                <a:solidFill>
-                  <a:srgbClr val="1C1C1E"/>
-                </a:solidFill>
-                <a:latin typeface="맑은 고딕"/>
-                <a:ea typeface="맑은 고딕"/>
-              </a:rPr>
-              <a:t/>
-            </a:r>
-            <a:r>
-              <a:rPr sz="1100" b="0" dirty="0">
-                <a:solidFill>
-                  <a:srgbClr val="1C1C1E"/>
-                </a:solidFill>
-                <a:latin typeface="맑은 고딕"/>
-                <a:ea typeface="맑은 고딕"/>
-              </a:rPr>
-              <a:t/>
-            </a:r>
-            <a:r>
-              <a:rPr sz="1100" b="0" dirty="0" err="1">
-                <a:solidFill>
-                  <a:srgbClr val="1C1C1E"/>
-                </a:solidFill>
-                <a:latin typeface="맑은 고딕"/>
-                <a:ea typeface="맑은 고딕"/>
-              </a:rPr>
-              <a:t/>
-            </a:r>
-            <a:r>
-              <a:rPr sz="1100" b="0" dirty="0">
-                <a:solidFill>
-                  <a:srgbClr val="1C1C1E"/>
-                </a:solidFill>
-                <a:latin typeface="맑은 고딕"/>
-                <a:ea typeface="맑은 고딕"/>
-              </a:rPr>
-              <a:t/>
-            </a:r>
-            <a:r>
-              <a:rPr sz="1100" b="0" dirty="0" err="1">
-                <a:solidFill>
-                  <a:srgbClr val="1C1C1E"/>
-                </a:solidFill>
-                <a:latin typeface="맑은 고딕"/>
-                <a:ea typeface="맑은 고딕"/>
-              </a:rPr>
-              <a:t/>
-            </a:r>
-            <a:r>
-              <a:rPr sz="1100" b="0" dirty="0">
-                <a:solidFill>
-                  <a:srgbClr val="1C1C1E"/>
-                </a:solidFill>
-                <a:latin typeface="맑은 고딕"/>
-                <a:ea typeface="맑은 고딕"/>
-              </a:rPr>
-              <a:t/>
-            </a:r>
-            <a:r>
-              <a:rPr sz="1100" b="0" dirty="0" err="1">
-                <a:solidFill>
-                  <a:srgbClr val="1C1C1E"/>
-                </a:solidFill>
-                <a:latin typeface="맑은 고딕"/>
-                <a:ea typeface="맑은 고딕"/>
-              </a:rPr>
-              <a:t/>
-            </a:r>
-            <a:r>
-              <a:rPr sz="1100" b="0" dirty="0">
-                <a:solidFill>
-                  <a:srgbClr val="1C1C1E"/>
-                </a:solidFill>
-                <a:latin typeface="맑은 고딕"/>
-                <a:ea typeface="맑은 고딕"/>
-              </a:rPr>
-              <a:t/>
-            </a:r>
-            <a:r>
-              <a:rPr sz="1100" b="0" dirty="0" err="1">
-                <a:solidFill>
-                  <a:srgbClr val="1C1C1E"/>
-                </a:solidFill>
-                <a:latin typeface="맑은 고딕"/>
-                <a:ea typeface="맑은 고딕"/>
-              </a:rPr>
-              <a:t/>
-            </a:r>
-            <a:r>
-              <a:rPr sz="1100" b="0" dirty="0">
-                <a:solidFill>
-                  <a:srgbClr val="1C1C1E"/>
-                </a:solidFill>
-                <a:latin typeface="맑은 고딕"/>
-                <a:ea typeface="맑은 고딕"/>
-              </a:rPr>
-              <a:t/>
-            </a:r>
-            <a:r>
-              <a:rPr sz="1100" b="0" dirty="0" err="1">
-                <a:solidFill>
-                  <a:srgbClr val="1C1C1E"/>
-                </a:solidFill>
-                <a:latin typeface="맑은 고딕"/>
-                <a:ea typeface="맑은 고딕"/>
-              </a:rPr>
-              <a:t/>
-            </a:r>
-            <a:r>
-              <a:rPr sz="1100" b="0" dirty="0">
-                <a:solidFill>
-                  <a:srgbClr val="1C1C1E"/>
-                </a:solidFill>
-                <a:latin typeface="맑은 고딕"/>
-                <a:ea typeface="맑은 고딕"/>
-              </a:rPr>
-              <a:t/>
-            </a:r>
-            <a:r>
-              <a:rPr sz="1100" b="0" dirty="0" err="1">
-                <a:solidFill>
-                  <a:srgbClr val="1C1C1E"/>
-                </a:solidFill>
-                <a:latin typeface="맑은 고딕"/>
-                <a:ea typeface="맑은 고딕"/>
-              </a:rPr>
-              <a:t/>
-            </a:r>
-            <a:r>
-              <a:rPr sz="1100" b="0" dirty="0">
-                <a:solidFill>
-                  <a:srgbClr val="1C1C1E"/>
-                </a:solidFill>
-                <a:latin typeface="맑은 고딕"/>
-                <a:ea typeface="맑은 고딕"/>
-              </a:rPr>
-              <a:t/>
-            </a:r>
-            <a:r>
-              <a:rPr sz="1100" b="0" dirty="0" err="1">
-                <a:solidFill>
-                  <a:srgbClr val="1C1C1E"/>
-                </a:solidFill>
-                <a:latin typeface="맑은 고딕"/>
-                <a:ea typeface="맑은 고딕"/>
-              </a:rPr>
-              <a:t/>
-            </a:r>
-            <a:r>
-              <a:rPr sz="1100" b="0" dirty="0">
-                <a:solidFill>
-                  <a:srgbClr val="1C1C1E"/>
-                </a:solidFill>
-                <a:latin typeface="맑은 고딕"/>
-                <a:ea typeface="맑은 고딕"/>
-              </a:rPr>
-              <a:t/>
-            </a:r>
-            <a:r>
-              <a:rPr sz="1100" b="0" dirty="0" err="1">
-                <a:solidFill>
-                  <a:srgbClr val="1C1C1E"/>
-                </a:solidFill>
-                <a:latin typeface="맑은 고딕"/>
-                <a:ea typeface="맑은 고딕"/>
-              </a:rPr>
-              <a:t/>
-            </a:r>
-            <a:r>
-              <a:rPr sz="1100" b="0" dirty="0">
-                <a:solidFill>
-                  <a:srgbClr val="1C1C1E"/>
-                </a:solidFill>
-                <a:latin typeface="맑은 고딕"/>
-                <a:ea typeface="맑은 고딕"/>
-              </a:rPr>
-              <a:t/>
-            </a:r>
-            <a:r>
-              <a:rPr sz="1100" b="0" dirty="0" err="1">
-                <a:solidFill>
-                  <a:srgbClr val="1C1C1E"/>
-                </a:solidFill>
-                <a:latin typeface="맑은 고딕"/>
-                <a:ea typeface="맑은 고딕"/>
-              </a:rPr>
-              <a:t/>
-            </a:r>
-            <a:r>
-              <a:rPr sz="1100" b="0" dirty="0">
-                <a:solidFill>
-                  <a:srgbClr val="1C1C1E"/>
-                </a:solidFill>
-                <a:latin typeface="맑은 고딕"/>
-                <a:ea typeface="맑은 고딕"/>
-              </a:rPr>
-              <a:t/>
-            </a:r>
-            <a:r>
-              <a:rPr sz="1100" b="0" dirty="0" err="1">
-                <a:solidFill>
-                  <a:srgbClr val="1C1C1E"/>
-                </a:solidFill>
-                <a:latin typeface="맑은 고딕"/>
-                <a:ea typeface="맑은 고딕"/>
-              </a:rPr>
-              <a:t/>
-            </a:r>
-            <a:endParaRPr sz="1100" b="0" dirty="0">
-              <a:solidFill>
-                <a:srgbClr val="1C1C1E"/>
-              </a:solidFill>
-              <a:latin typeface="맑은 고딕"/>
-              <a:ea typeface="맑은 고딕"/>
-            </a:endParaRPr>
           </a:p>
         </p:txBody>
       </p:sp>
@@ -16139,7 +14795,6 @@
           <a:lstStyle/>
           <a:p>
             <a:pPr algn="ctr"/>
-            <a:endParaRPr/>
           </a:p>
         </p:txBody>
       </p:sp>
@@ -16152,7 +14807,7 @@
         <p:spPr>
           <a:xfrm>
             <a:off x="8366760" y="1499616"/>
-            <a:ext cx="3246120" cy="933269"/>
+            <a:ext cx="3246120" cy="1527048"/>
           </a:xfrm>
           <a:prstGeom prst="rect">
             <a:avLst/>
@@ -16174,7 +14829,7 @@
               </a:spcAft>
             </a:pPr>
             <a:r>
-              <a:rPr sz="1300" b="1" dirty="0">
+              <a:rPr sz="1300" b="1">
                 <a:solidFill>
                   <a:srgbClr val="000000"/>
                 </a:solidFill>
@@ -16183,35 +14838,18 @@
               </a:rPr>
               <a:t>③ 이 프로젝트가 감사한 것</a:t>
             </a:r>
-            <a:r>
-              <a:rPr lang="ko-KR" altLang="en-US" sz="1300" b="1" dirty="0">
-                <a:solidFill>
-                  <a:srgbClr val="000000"/>
-                </a:solidFill>
-                <a:latin typeface="맑은 고딕"/>
-                <a:ea typeface="맑은 고딕"/>
-              </a:rPr>
-              <a:t/>
-            </a:r>
-            <a:endParaRPr lang="en-US" altLang="ko-KR" sz="1300" b="1" dirty="0">
-              <a:solidFill>
-                <a:srgbClr val="000000"/>
-              </a:solidFill>
-              <a:latin typeface="맑은 고딕"/>
-              <a:ea typeface="맑은 고딕"/>
-            </a:endParaRPr>
-          </a:p>
-          <a:p>
-            <a:pPr>
-              <a:lnSpc>
-                <a:spcPct val="114000"/>
-              </a:lnSpc>
-              <a:spcAft>
-                <a:spcPts val="350"/>
-              </a:spcAft>
-            </a:pPr>
-            <a:r>
-              <a:rPr sz="1100" b="0" dirty="0">
+          </a:p>
+          <a:p>
+            <a:pPr marL="160020" indent="-160020">
+              <a:lnSpc>
+                <a:spcPct val="114000"/>
+              </a:lnSpc>
+              <a:spcAft>
+                <a:spcPts val="200"/>
+              </a:spcAft>
+            </a:pPr>
+            <a:r>
+              <a:rPr sz="1100" b="0">
                 <a:solidFill>
                   <a:srgbClr val="1C1C1E"/>
                 </a:solidFill>
@@ -16220,343 +14858,6 @@
               </a:rPr>
               <a:t>• 자원이 모자란 것(㉠)은 예산·인력의 영역이라 데이터가 답할 수 없다. 있는 자원이 체계적으로 배분되지 않는 것(㉡)은 규칙의 문제이므로 데이터로 답할 수 있다 — 이 프로젝트는 ㉡을 감사했다</a:t>
             </a:r>
-            <a:r>
-              <a:rPr sz="1100" b="0" dirty="0" err="1">
-                <a:solidFill>
-                  <a:srgbClr val="1C1C1E"/>
-                </a:solidFill>
-                <a:latin typeface="맑은 고딕"/>
-                <a:ea typeface="맑은 고딕"/>
-              </a:rPr>
-              <a:t/>
-            </a:r>
-            <a:r>
-              <a:rPr sz="1100" b="0" dirty="0">
-                <a:solidFill>
-                  <a:srgbClr val="1C1C1E"/>
-                </a:solidFill>
-                <a:latin typeface="맑은 고딕"/>
-                <a:ea typeface="맑은 고딕"/>
-              </a:rPr>
-              <a:t/>
-            </a:r>
-            <a:r>
-              <a:rPr sz="1100" b="0" dirty="0" err="1">
-                <a:solidFill>
-                  <a:srgbClr val="1C1C1E"/>
-                </a:solidFill>
-                <a:latin typeface="맑은 고딕"/>
-                <a:ea typeface="맑은 고딕"/>
-              </a:rPr>
-              <a:t/>
-            </a:r>
-            <a:r>
-              <a:rPr sz="1100" b="0" dirty="0">
-                <a:solidFill>
-                  <a:srgbClr val="1C1C1E"/>
-                </a:solidFill>
-                <a:latin typeface="맑은 고딕"/>
-                <a:ea typeface="맑은 고딕"/>
-              </a:rPr>
-              <a:t/>
-            </a:r>
-            <a:r>
-              <a:rPr sz="1100" b="0" dirty="0" err="1">
-                <a:solidFill>
-                  <a:srgbClr val="1C1C1E"/>
-                </a:solidFill>
-                <a:latin typeface="맑은 고딕"/>
-                <a:ea typeface="맑은 고딕"/>
-              </a:rPr>
-              <a:t/>
-            </a:r>
-            <a:r>
-              <a:rPr sz="1100" b="0" dirty="0">
-                <a:solidFill>
-                  <a:srgbClr val="1C1C1E"/>
-                </a:solidFill>
-                <a:latin typeface="맑은 고딕"/>
-                <a:ea typeface="맑은 고딕"/>
-              </a:rPr>
-              <a:t/>
-            </a:r>
-            <a:r>
-              <a:rPr sz="1100" b="0" dirty="0" err="1">
-                <a:solidFill>
-                  <a:srgbClr val="1C1C1E"/>
-                </a:solidFill>
-                <a:latin typeface="맑은 고딕"/>
-                <a:ea typeface="맑은 고딕"/>
-              </a:rPr>
-              <a:t/>
-            </a:r>
-            <a:r>
-              <a:rPr sz="1100" b="0" dirty="0">
-                <a:solidFill>
-                  <a:srgbClr val="1C1C1E"/>
-                </a:solidFill>
-                <a:latin typeface="맑은 고딕"/>
-                <a:ea typeface="맑은 고딕"/>
-              </a:rPr>
-              <a:t/>
-            </a:r>
-            <a:r>
-              <a:rPr sz="1100" b="0" dirty="0" err="1">
-                <a:solidFill>
-                  <a:srgbClr val="1C1C1E"/>
-                </a:solidFill>
-                <a:latin typeface="맑은 고딕"/>
-                <a:ea typeface="맑은 고딕"/>
-              </a:rPr>
-              <a:t/>
-            </a:r>
-            <a:r>
-              <a:rPr sz="1100" b="0" dirty="0">
-                <a:solidFill>
-                  <a:srgbClr val="1C1C1E"/>
-                </a:solidFill>
-                <a:latin typeface="맑은 고딕"/>
-                <a:ea typeface="맑은 고딕"/>
-              </a:rPr>
-              <a:t/>
-            </a:r>
-            <a:r>
-              <a:rPr sz="1100" b="0" dirty="0" err="1">
-                <a:solidFill>
-                  <a:srgbClr val="1C1C1E"/>
-                </a:solidFill>
-                <a:latin typeface="맑은 고딕"/>
-                <a:ea typeface="맑은 고딕"/>
-              </a:rPr>
-              <a:t/>
-            </a:r>
-            <a:r>
-              <a:rPr sz="1100" b="0" dirty="0">
-                <a:solidFill>
-                  <a:srgbClr val="1C1C1E"/>
-                </a:solidFill>
-                <a:latin typeface="맑은 고딕"/>
-                <a:ea typeface="맑은 고딕"/>
-              </a:rPr>
-              <a:t/>
-            </a:r>
-            <a:r>
-              <a:rPr sz="1100" b="0" dirty="0" err="1">
-                <a:solidFill>
-                  <a:srgbClr val="1C1C1E"/>
-                </a:solidFill>
-                <a:latin typeface="맑은 고딕"/>
-                <a:ea typeface="맑은 고딕"/>
-              </a:rPr>
-              <a:t/>
-            </a:r>
-            <a:r>
-              <a:rPr sz="1100" b="0" dirty="0">
-                <a:solidFill>
-                  <a:srgbClr val="1C1C1E"/>
-                </a:solidFill>
-                <a:latin typeface="맑은 고딕"/>
-                <a:ea typeface="맑은 고딕"/>
-              </a:rPr>
-              <a:t/>
-            </a:r>
-            <a:r>
-              <a:rPr sz="1100" b="0" dirty="0" err="1">
-                <a:solidFill>
-                  <a:srgbClr val="1C1C1E"/>
-                </a:solidFill>
-                <a:latin typeface="맑은 고딕"/>
-                <a:ea typeface="맑은 고딕"/>
-              </a:rPr>
-              <a:t/>
-            </a:r>
-            <a:r>
-              <a:rPr sz="1100" b="0" dirty="0">
-                <a:solidFill>
-                  <a:srgbClr val="1C1C1E"/>
-                </a:solidFill>
-                <a:latin typeface="맑은 고딕"/>
-                <a:ea typeface="맑은 고딕"/>
-              </a:rPr>
-              <a:t/>
-            </a:r>
-            <a:r>
-              <a:rPr sz="1100" b="0" dirty="0" err="1">
-                <a:solidFill>
-                  <a:srgbClr val="1C1C1E"/>
-                </a:solidFill>
-                <a:latin typeface="맑은 고딕"/>
-                <a:ea typeface="맑은 고딕"/>
-              </a:rPr>
-              <a:t/>
-            </a:r>
-            <a:r>
-              <a:rPr sz="1100" b="0" dirty="0">
-                <a:solidFill>
-                  <a:srgbClr val="1C1C1E"/>
-                </a:solidFill>
-                <a:latin typeface="맑은 고딕"/>
-                <a:ea typeface="맑은 고딕"/>
-              </a:rPr>
-              <a:t/>
-            </a:r>
-            <a:r>
-              <a:rPr sz="1100" b="0" dirty="0" err="1">
-                <a:solidFill>
-                  <a:srgbClr val="1C1C1E"/>
-                </a:solidFill>
-                <a:latin typeface="맑은 고딕"/>
-                <a:ea typeface="맑은 고딕"/>
-              </a:rPr>
-              <a:t/>
-            </a:r>
-            <a:r>
-              <a:rPr sz="1100" b="0" dirty="0">
-                <a:solidFill>
-                  <a:srgbClr val="1C1C1E"/>
-                </a:solidFill>
-                <a:latin typeface="맑은 고딕"/>
-                <a:ea typeface="맑은 고딕"/>
-              </a:rPr>
-              <a:t/>
-            </a:r>
-            <a:r>
-              <a:rPr sz="1100" b="0" dirty="0" err="1">
-                <a:solidFill>
-                  <a:srgbClr val="1C1C1E"/>
-                </a:solidFill>
-                <a:latin typeface="맑은 고딕"/>
-                <a:ea typeface="맑은 고딕"/>
-              </a:rPr>
-              <a:t/>
-            </a:r>
-            <a:r>
-              <a:rPr sz="1100" b="0" dirty="0">
-                <a:solidFill>
-                  <a:srgbClr val="1C1C1E"/>
-                </a:solidFill>
-                <a:latin typeface="맑은 고딕"/>
-                <a:ea typeface="맑은 고딕"/>
-              </a:rPr>
-              <a:t/>
-            </a:r>
-            <a:r>
-              <a:rPr sz="1100" b="0" dirty="0" err="1">
-                <a:solidFill>
-                  <a:srgbClr val="1C1C1E"/>
-                </a:solidFill>
-                <a:latin typeface="맑은 고딕"/>
-                <a:ea typeface="맑은 고딕"/>
-              </a:rPr>
-              <a:t/>
-            </a:r>
-            <a:r>
-              <a:rPr sz="1100" b="0" dirty="0">
-                <a:solidFill>
-                  <a:srgbClr val="1C1C1E"/>
-                </a:solidFill>
-                <a:latin typeface="맑은 고딕"/>
-                <a:ea typeface="맑은 고딕"/>
-              </a:rPr>
-              <a:t/>
-            </a:r>
-            <a:r>
-              <a:rPr sz="1100" b="0" dirty="0" err="1">
-                <a:solidFill>
-                  <a:srgbClr val="1C1C1E"/>
-                </a:solidFill>
-                <a:latin typeface="맑은 고딕"/>
-                <a:ea typeface="맑은 고딕"/>
-              </a:rPr>
-              <a:t/>
-            </a:r>
-            <a:r>
-              <a:rPr sz="1100" b="0" dirty="0">
-                <a:solidFill>
-                  <a:srgbClr val="1C1C1E"/>
-                </a:solidFill>
-                <a:latin typeface="맑은 고딕"/>
-                <a:ea typeface="맑은 고딕"/>
-              </a:rPr>
-              <a:t/>
-            </a:r>
-            <a:r>
-              <a:rPr sz="1100" b="0" dirty="0" err="1">
-                <a:solidFill>
-                  <a:srgbClr val="1C1C1E"/>
-                </a:solidFill>
-                <a:latin typeface="맑은 고딕"/>
-                <a:ea typeface="맑은 고딕"/>
-              </a:rPr>
-              <a:t/>
-            </a:r>
-            <a:r>
-              <a:rPr sz="1100" b="0" dirty="0">
-                <a:solidFill>
-                  <a:srgbClr val="1C1C1E"/>
-                </a:solidFill>
-                <a:latin typeface="맑은 고딕"/>
-                <a:ea typeface="맑은 고딕"/>
-              </a:rPr>
-              <a:t/>
-            </a:r>
-            <a:r>
-              <a:rPr sz="1100" b="0" dirty="0" err="1">
-                <a:solidFill>
-                  <a:srgbClr val="1C1C1E"/>
-                </a:solidFill>
-                <a:latin typeface="맑은 고딕"/>
-                <a:ea typeface="맑은 고딕"/>
-              </a:rPr>
-              <a:t/>
-            </a:r>
-            <a:r>
-              <a:rPr sz="1100" b="0" dirty="0">
-                <a:solidFill>
-                  <a:srgbClr val="1C1C1E"/>
-                </a:solidFill>
-                <a:latin typeface="맑은 고딕"/>
-                <a:ea typeface="맑은 고딕"/>
-              </a:rPr>
-              <a:t/>
-            </a:r>
-            <a:r>
-              <a:rPr sz="1100" b="0" dirty="0" err="1">
-                <a:solidFill>
-                  <a:srgbClr val="1C1C1E"/>
-                </a:solidFill>
-                <a:latin typeface="맑은 고딕"/>
-                <a:ea typeface="맑은 고딕"/>
-              </a:rPr>
-              <a:t/>
-            </a:r>
-            <a:r>
-              <a:rPr sz="1100" b="0" dirty="0">
-                <a:solidFill>
-                  <a:srgbClr val="1C1C1E"/>
-                </a:solidFill>
-                <a:latin typeface="맑은 고딕"/>
-                <a:ea typeface="맑은 고딕"/>
-              </a:rPr>
-              <a:t/>
-            </a:r>
-            <a:r>
-              <a:rPr sz="1100" b="0" dirty="0" err="1">
-                <a:solidFill>
-                  <a:srgbClr val="1C1C1E"/>
-                </a:solidFill>
-                <a:latin typeface="맑은 고딕"/>
-                <a:ea typeface="맑은 고딕"/>
-              </a:rPr>
-              <a:t/>
-            </a:r>
-            <a:endParaRPr sz="1100" b="0" dirty="0">
-              <a:solidFill>
-                <a:srgbClr val="1C1C1E"/>
-              </a:solidFill>
-              <a:latin typeface="맑은 고딕"/>
-              <a:ea typeface="맑은 고딕"/>
-            </a:endParaRPr>
           </a:p>
         </p:txBody>
       </p:sp>
@@ -16611,7 +14912,6 @@
           <a:lstStyle/>
           <a:p>
             <a:pPr algn="ctr"/>
-            <a:endParaRPr/>
           </a:p>
         </p:txBody>
       </p:sp>
@@ -16624,7 +14924,7 @@
         <p:spPr>
           <a:xfrm>
             <a:off x="685800" y="3529584"/>
-            <a:ext cx="10927080" cy="1370568"/>
+            <a:ext cx="10927080" cy="1316736"/>
           </a:xfrm>
           <a:prstGeom prst="rect">
             <a:avLst/>
@@ -16646,7 +14946,7 @@
               </a:spcAft>
             </a:pPr>
             <a:r>
-              <a:rPr sz="1300" b="1" dirty="0" err="1">
+              <a:rPr sz="1300" b="1">
                 <a:solidFill>
                   <a:srgbClr val="33393F"/>
                 </a:solidFill>
@@ -16655,196 +14955,6 @@
               </a:rPr>
               <a:t>제도는 15년째 운영 중이다 — 그런데 결과는</a:t>
             </a:r>
-            <a:r>
-              <a:rPr sz="1300" b="1" dirty="0">
-                <a:solidFill>
-                  <a:srgbClr val="33393F"/>
-                </a:solidFill>
-                <a:latin typeface="맑은 고딕"/>
-                <a:ea typeface="맑은 고딕"/>
-              </a:rPr>
-              <a:t/>
-            </a:r>
-            <a:r>
-              <a:rPr sz="1300" b="1" dirty="0" err="1">
-                <a:solidFill>
-                  <a:srgbClr val="33393F"/>
-                </a:solidFill>
-                <a:latin typeface="맑은 고딕"/>
-                <a:ea typeface="맑은 고딕"/>
-              </a:rPr>
-              <a:t/>
-            </a:r>
-            <a:r>
-              <a:rPr sz="1300" b="1" dirty="0">
-                <a:solidFill>
-                  <a:srgbClr val="33393F"/>
-                </a:solidFill>
-                <a:latin typeface="맑은 고딕"/>
-                <a:ea typeface="맑은 고딕"/>
-              </a:rPr>
-              <a:t/>
-            </a:r>
-            <a:r>
-              <a:rPr sz="1300" b="1" dirty="0" err="1">
-                <a:solidFill>
-                  <a:srgbClr val="33393F"/>
-                </a:solidFill>
-                <a:latin typeface="맑은 고딕"/>
-                <a:ea typeface="맑은 고딕"/>
-              </a:rPr>
-              <a:t/>
-            </a:r>
-            <a:r>
-              <a:rPr sz="1300" b="1" dirty="0">
-                <a:solidFill>
-                  <a:srgbClr val="33393F"/>
-                </a:solidFill>
-                <a:latin typeface="맑은 고딕"/>
-                <a:ea typeface="맑은 고딕"/>
-              </a:rPr>
-              <a:t/>
-            </a:r>
-            <a:r>
-              <a:rPr sz="1300" b="1" dirty="0" err="1">
-                <a:solidFill>
-                  <a:srgbClr val="33393F"/>
-                </a:solidFill>
-                <a:latin typeface="맑은 고딕"/>
-                <a:ea typeface="맑은 고딕"/>
-              </a:rPr>
-              <a:t/>
-            </a:r>
-            <a:r>
-              <a:rPr sz="1300" b="1" dirty="0">
-                <a:solidFill>
-                  <a:srgbClr val="33393F"/>
-                </a:solidFill>
-                <a:latin typeface="맑은 고딕"/>
-                <a:ea typeface="맑은 고딕"/>
-              </a:rPr>
-              <a:t/>
-            </a:r>
-            <a:r>
-              <a:rPr sz="1300" b="1" dirty="0" err="1">
-                <a:solidFill>
-                  <a:srgbClr val="33393F"/>
-                </a:solidFill>
-                <a:latin typeface="맑은 고딕"/>
-                <a:ea typeface="맑은 고딕"/>
-              </a:rPr>
-              <a:t/>
-            </a:r>
-            <a:r>
-              <a:rPr sz="1300" b="1" dirty="0">
-                <a:solidFill>
-                  <a:srgbClr val="33393F"/>
-                </a:solidFill>
-                <a:latin typeface="맑은 고딕"/>
-                <a:ea typeface="맑은 고딕"/>
-              </a:rPr>
-              <a:t/>
-            </a:r>
-            <a:r>
-              <a:rPr sz="1300" b="1" dirty="0" err="1">
-                <a:solidFill>
-                  <a:srgbClr val="33393F"/>
-                </a:solidFill>
-                <a:latin typeface="맑은 고딕"/>
-                <a:ea typeface="맑은 고딕"/>
-              </a:rPr>
-              <a:t/>
-            </a:r>
-            <a:r>
-              <a:rPr sz="1300" b="1" dirty="0">
-                <a:solidFill>
-                  <a:srgbClr val="33393F"/>
-                </a:solidFill>
-                <a:latin typeface="맑은 고딕"/>
-                <a:ea typeface="맑은 고딕"/>
-              </a:rPr>
-              <a:t/>
-            </a:r>
-            <a:r>
-              <a:rPr sz="1300" b="1" dirty="0" err="1">
-                <a:solidFill>
-                  <a:srgbClr val="33393F"/>
-                </a:solidFill>
-                <a:latin typeface="맑은 고딕"/>
-                <a:ea typeface="맑은 고딕"/>
-              </a:rPr>
-              <a:t/>
-            </a:r>
-            <a:r>
-              <a:rPr sz="1300" b="1" dirty="0">
-                <a:solidFill>
-                  <a:srgbClr val="33393F"/>
-                </a:solidFill>
-                <a:latin typeface="맑은 고딕"/>
-                <a:ea typeface="맑은 고딕"/>
-              </a:rPr>
-              <a:t/>
-            </a:r>
-            <a:r>
-              <a:rPr sz="1300" b="1" dirty="0" err="1">
-                <a:solidFill>
-                  <a:srgbClr val="33393F"/>
-                </a:solidFill>
-                <a:latin typeface="맑은 고딕"/>
-                <a:ea typeface="맑은 고딕"/>
-              </a:rPr>
-              <a:t/>
-            </a:r>
-            <a:r>
-              <a:rPr sz="1300" b="1" dirty="0">
-                <a:solidFill>
-                  <a:srgbClr val="33393F"/>
-                </a:solidFill>
-                <a:latin typeface="맑은 고딕"/>
-                <a:ea typeface="맑은 고딕"/>
-              </a:rPr>
-              <a:t/>
-            </a:r>
-            <a:r>
-              <a:rPr sz="1300" b="1" dirty="0" err="1">
-                <a:solidFill>
-                  <a:srgbClr val="33393F"/>
-                </a:solidFill>
-                <a:latin typeface="맑은 고딕"/>
-                <a:ea typeface="맑은 고딕"/>
-              </a:rPr>
-              <a:t/>
-            </a:r>
-            <a:r>
-              <a:rPr sz="1300" b="1" dirty="0">
-                <a:solidFill>
-                  <a:srgbClr val="33393F"/>
-                </a:solidFill>
-                <a:latin typeface="맑은 고딕"/>
-                <a:ea typeface="맑은 고딕"/>
-              </a:rPr>
-              <a:t/>
-            </a:r>
-            <a:r>
-              <a:rPr sz="1300" b="1" dirty="0" err="1">
-                <a:solidFill>
-                  <a:srgbClr val="33393F"/>
-                </a:solidFill>
-                <a:latin typeface="맑은 고딕"/>
-                <a:ea typeface="맑은 고딕"/>
-              </a:rPr>
-              <a:t/>
-            </a:r>
-            <a:r>
-              <a:rPr sz="1300" b="1" dirty="0">
-                <a:solidFill>
-                  <a:srgbClr val="33393F"/>
-                </a:solidFill>
-                <a:latin typeface="맑은 고딕"/>
-                <a:ea typeface="맑은 고딕"/>
-              </a:rPr>
-              <a:t/>
-            </a:r>
           </a:p>
           <a:p>
             <a:pPr marL="160020" indent="-160020">
@@ -16856,7 +14966,7 @@
               </a:spcAft>
             </a:pPr>
             <a:r>
-              <a:rPr sz="1100" b="0" dirty="0">
+              <a:rPr sz="1100" b="0">
                 <a:solidFill>
                   <a:srgbClr val="1C1C1E"/>
                 </a:solidFill>
@@ -16865,989 +14975,45 @@
               </a:rPr>
               <a:t>• 전국 108곳이 분만취약지로 지정되어 있다 (A 32곳 · B 21곳 · C 55곳)</a:t>
             </a:r>
-            <a:r>
-              <a:rPr sz="1100" b="0" dirty="0" err="1">
+          </a:p>
+          <a:p>
+            <a:pPr marL="160020" indent="-160020">
+              <a:lnSpc>
+                <a:spcPct val="114000"/>
+              </a:lnSpc>
+              <a:spcAft>
+                <a:spcPts val="200"/>
+              </a:spcAft>
+            </a:pPr>
+            <a:r>
+              <a:rPr sz="1100" b="0">
                 <a:solidFill>
                   <a:srgbClr val="1C1C1E"/>
                 </a:solidFill>
                 <a:latin typeface="맑은 고딕"/>
                 <a:ea typeface="맑은 고딕"/>
               </a:rPr>
-              <a:t/>
-            </a:r>
-            <a:r>
-              <a:rPr sz="1100" b="0" dirty="0">
+              <a:t>• 15년 누적 지원은 57개소 (분만 36 · 외래 15 · 순회 6). 2025년 신규는 전국 1개소</a:t>
+            </a:r>
+          </a:p>
+          <a:p>
+            <a:pPr marL="160020" indent="-160020">
+              <a:lnSpc>
+                <a:spcPct val="114000"/>
+              </a:lnSpc>
+              <a:spcAft>
+                <a:spcPts val="200"/>
+              </a:spcAft>
+            </a:pPr>
+            <a:r>
+              <a:rPr sz="1100" b="0">
                 <a:solidFill>
                   <a:srgbClr val="1C1C1E"/>
                 </a:solidFill>
                 <a:latin typeface="맑은 고딕"/>
                 <a:ea typeface="맑은 고딕"/>
               </a:rPr>
-              <a:t/>
-            </a:r>
-            <a:r>
-              <a:rPr sz="1100" b="0" dirty="0" err="1">
-                <a:solidFill>
-                  <a:srgbClr val="1C1C1E"/>
-                </a:solidFill>
-                <a:latin typeface="맑은 고딕"/>
-                <a:ea typeface="맑은 고딕"/>
-              </a:rPr>
-              <a:t/>
-            </a:r>
-            <a:r>
-              <a:rPr sz="1100" b="0" dirty="0">
-                <a:solidFill>
-                  <a:srgbClr val="1C1C1E"/>
-                </a:solidFill>
-                <a:latin typeface="맑은 고딕"/>
-                <a:ea typeface="맑은 고딕"/>
-              </a:rPr>
-              <a:t/>
-            </a:r>
-            <a:r>
-              <a:rPr sz="1100" b="0" dirty="0" err="1">
-                <a:solidFill>
-                  <a:srgbClr val="1C1C1E"/>
-                </a:solidFill>
-                <a:latin typeface="맑은 고딕"/>
-                <a:ea typeface="맑은 고딕"/>
-              </a:rPr>
-              <a:t/>
-            </a:r>
-            <a:r>
-              <a:rPr sz="1100" b="0" dirty="0">
-                <a:solidFill>
-                  <a:srgbClr val="1C1C1E"/>
-                </a:solidFill>
-                <a:latin typeface="맑은 고딕"/>
-                <a:ea typeface="맑은 고딕"/>
-              </a:rPr>
-              <a:t/>
-            </a:r>
-            <a:r>
-              <a:rPr sz="1100" b="0" dirty="0" err="1">
-                <a:solidFill>
-                  <a:srgbClr val="1C1C1E"/>
-                </a:solidFill>
-                <a:latin typeface="맑은 고딕"/>
-                <a:ea typeface="맑은 고딕"/>
-              </a:rPr>
-              <a:t/>
-            </a:r>
-            <a:r>
-              <a:rPr sz="1100" b="0" dirty="0">
-                <a:solidFill>
-                  <a:srgbClr val="1C1C1E"/>
-                </a:solidFill>
-                <a:latin typeface="맑은 고딕"/>
-                <a:ea typeface="맑은 고딕"/>
-              </a:rPr>
-              <a:t/>
-            </a:r>
-            <a:r>
-              <a:rPr sz="1100" b="0" dirty="0" err="1">
-                <a:solidFill>
-                  <a:srgbClr val="1C1C1E"/>
-                </a:solidFill>
-                <a:latin typeface="맑은 고딕"/>
-                <a:ea typeface="맑은 고딕"/>
-              </a:rPr>
-              <a:t/>
-            </a:r>
-            <a:r>
-              <a:rPr sz="1100" b="0" dirty="0">
-                <a:solidFill>
-                  <a:srgbClr val="1C1C1E"/>
-                </a:solidFill>
-                <a:latin typeface="맑은 고딕"/>
-                <a:ea typeface="맑은 고딕"/>
-              </a:rPr>
-              <a:t/>
-            </a:r>
-            <a:r>
-              <a:rPr sz="1100" b="0" dirty="0" err="1">
-                <a:solidFill>
-                  <a:srgbClr val="1C1C1E"/>
-                </a:solidFill>
-                <a:latin typeface="맑은 고딕"/>
-                <a:ea typeface="맑은 고딕"/>
-              </a:rPr>
-              <a:t/>
-            </a:r>
-            <a:r>
-              <a:rPr sz="1100" b="0" dirty="0">
-                <a:solidFill>
-                  <a:srgbClr val="1C1C1E"/>
-                </a:solidFill>
-                <a:latin typeface="맑은 고딕"/>
-                <a:ea typeface="맑은 고딕"/>
-              </a:rPr>
-              <a:t/>
-            </a:r>
-            <a:r>
-              <a:rPr sz="1100" b="0" dirty="0" err="1">
-                <a:solidFill>
-                  <a:srgbClr val="1C1C1E"/>
-                </a:solidFill>
-                <a:latin typeface="맑은 고딕"/>
-                <a:ea typeface="맑은 고딕"/>
-              </a:rPr>
-              <a:t/>
-            </a:r>
-            <a:r>
-              <a:rPr sz="1100" b="0" dirty="0">
-                <a:solidFill>
-                  <a:srgbClr val="1C1C1E"/>
-                </a:solidFill>
-                <a:latin typeface="맑은 고딕"/>
-                <a:ea typeface="맑은 고딕"/>
-              </a:rPr>
-              <a:t/>
-            </a:r>
-            <a:r>
-              <a:rPr sz="1100" b="0" dirty="0" err="1">
-                <a:solidFill>
-                  <a:srgbClr val="1C1C1E"/>
-                </a:solidFill>
-                <a:latin typeface="맑은 고딕"/>
-                <a:ea typeface="맑은 고딕"/>
-              </a:rPr>
-              <a:t/>
-            </a:r>
-            <a:r>
-              <a:rPr sz="1100" b="0" dirty="0">
-                <a:solidFill>
-                  <a:srgbClr val="1C1C1E"/>
-                </a:solidFill>
-                <a:latin typeface="맑은 고딕"/>
-                <a:ea typeface="맑은 고딕"/>
-              </a:rPr>
-              <a:t/>
-            </a:r>
-            <a:r>
-              <a:rPr sz="1100" b="0" dirty="0" err="1">
-                <a:solidFill>
-                  <a:srgbClr val="1C1C1E"/>
-                </a:solidFill>
-                <a:latin typeface="맑은 고딕"/>
-                <a:ea typeface="맑은 고딕"/>
-              </a:rPr>
-              <a:t/>
-            </a:r>
-            <a:r>
-              <a:rPr sz="1100" b="0" dirty="0">
-                <a:solidFill>
-                  <a:srgbClr val="1C1C1E"/>
-                </a:solidFill>
-                <a:latin typeface="맑은 고딕"/>
-                <a:ea typeface="맑은 고딕"/>
-              </a:rPr>
-              <a:t/>
-            </a:r>
-            <a:r>
-              <a:rPr sz="1100" b="0" dirty="0" err="1">
-                <a:solidFill>
-                  <a:srgbClr val="1C1C1E"/>
-                </a:solidFill>
-                <a:latin typeface="맑은 고딕"/>
-                <a:ea typeface="맑은 고딕"/>
-              </a:rPr>
-              <a:t/>
-            </a:r>
-            <a:r>
-              <a:rPr sz="1100" b="0" dirty="0">
-                <a:solidFill>
-                  <a:srgbClr val="1C1C1E"/>
-                </a:solidFill>
-                <a:latin typeface="맑은 고딕"/>
-                <a:ea typeface="맑은 고딕"/>
-              </a:rPr>
-              <a:t/>
-            </a:r>
-            <a:r>
-              <a:rPr sz="1100" b="0" dirty="0" err="1">
-                <a:solidFill>
-                  <a:srgbClr val="1C1C1E"/>
-                </a:solidFill>
-                <a:latin typeface="맑은 고딕"/>
-                <a:ea typeface="맑은 고딕"/>
-              </a:rPr>
-              <a:t/>
-            </a:r>
-            <a:r>
-              <a:rPr sz="1100" b="0" dirty="0">
-                <a:solidFill>
-                  <a:srgbClr val="1C1C1E"/>
-                </a:solidFill>
-                <a:latin typeface="맑은 고딕"/>
-                <a:ea typeface="맑은 고딕"/>
-              </a:rPr>
-              <a:t/>
-            </a:r>
-            <a:r>
-              <a:rPr sz="1100" b="0" dirty="0" err="1">
-                <a:solidFill>
-                  <a:srgbClr val="1C1C1E"/>
-                </a:solidFill>
-                <a:latin typeface="맑은 고딕"/>
-                <a:ea typeface="맑은 고딕"/>
-              </a:rPr>
-              <a:t/>
-            </a:r>
-            <a:r>
-              <a:rPr sz="1100" b="0" dirty="0">
-                <a:solidFill>
-                  <a:srgbClr val="1C1C1E"/>
-                </a:solidFill>
-                <a:latin typeface="맑은 고딕"/>
-                <a:ea typeface="맑은 고딕"/>
-              </a:rPr>
-              <a:t/>
-            </a:r>
-            <a:r>
-              <a:rPr sz="1100" b="0" dirty="0" err="1">
-                <a:solidFill>
-                  <a:srgbClr val="1C1C1E"/>
-                </a:solidFill>
-                <a:latin typeface="맑은 고딕"/>
-                <a:ea typeface="맑은 고딕"/>
-              </a:rPr>
-              <a:t/>
-            </a:r>
-            <a:r>
-              <a:rPr sz="1100" b="0" dirty="0">
-                <a:solidFill>
-                  <a:srgbClr val="1C1C1E"/>
-                </a:solidFill>
-                <a:latin typeface="맑은 고딕"/>
-                <a:ea typeface="맑은 고딕"/>
-              </a:rPr>
-              <a:t/>
-            </a:r>
-            <a:r>
-              <a:rPr sz="1100" b="0" dirty="0" err="1">
-                <a:solidFill>
-                  <a:srgbClr val="1C1C1E"/>
-                </a:solidFill>
-                <a:latin typeface="맑은 고딕"/>
-                <a:ea typeface="맑은 고딕"/>
-              </a:rPr>
-              <a:t/>
-            </a:r>
-            <a:r>
-              <a:rPr sz="1100" b="0" dirty="0">
-                <a:solidFill>
-                  <a:srgbClr val="1C1C1E"/>
-                </a:solidFill>
-                <a:latin typeface="맑은 고딕"/>
-                <a:ea typeface="맑은 고딕"/>
-              </a:rPr>
-              <a:t/>
-            </a:r>
-            <a:r>
-              <a:rPr sz="1100" b="0" dirty="0" err="1">
-                <a:solidFill>
-                  <a:srgbClr val="1C1C1E"/>
-                </a:solidFill>
-                <a:latin typeface="맑은 고딕"/>
-                <a:ea typeface="맑은 고딕"/>
-              </a:rPr>
-              <a:t/>
-            </a:r>
-            <a:r>
-              <a:rPr sz="1100" b="0" dirty="0">
-                <a:solidFill>
-                  <a:srgbClr val="1C1C1E"/>
-                </a:solidFill>
-                <a:latin typeface="맑은 고딕"/>
-                <a:ea typeface="맑은 고딕"/>
-              </a:rPr>
-              <a:t/>
-            </a:r>
-            <a:r>
-              <a:rPr sz="1100" b="0" dirty="0" err="1">
-                <a:solidFill>
-                  <a:srgbClr val="1C1C1E"/>
-                </a:solidFill>
-                <a:latin typeface="맑은 고딕"/>
-                <a:ea typeface="맑은 고딕"/>
-              </a:rPr>
-              <a:t/>
-            </a:r>
-            <a:r>
-              <a:rPr sz="1100" b="0" dirty="0">
-                <a:solidFill>
-                  <a:srgbClr val="1C1C1E"/>
-                </a:solidFill>
-                <a:latin typeface="맑은 고딕"/>
-                <a:ea typeface="맑은 고딕"/>
-              </a:rPr>
-              <a:t/>
-            </a:r>
-            <a:r>
-              <a:rPr sz="1100" b="0" dirty="0" err="1">
-                <a:solidFill>
-                  <a:srgbClr val="1C1C1E"/>
-                </a:solidFill>
-                <a:latin typeface="맑은 고딕"/>
-                <a:ea typeface="맑은 고딕"/>
-              </a:rPr>
-              <a:t/>
-            </a:r>
-            <a:r>
-              <a:rPr sz="1100" b="0" dirty="0">
-                <a:solidFill>
-                  <a:srgbClr val="1C1C1E"/>
-                </a:solidFill>
-                <a:latin typeface="맑은 고딕"/>
-                <a:ea typeface="맑은 고딕"/>
-              </a:rPr>
-              <a:t/>
-            </a:r>
-            <a:r>
-              <a:rPr sz="1100" b="0" dirty="0" err="1">
-                <a:solidFill>
-                  <a:srgbClr val="1C1C1E"/>
-                </a:solidFill>
-                <a:latin typeface="맑은 고딕"/>
-                <a:ea typeface="맑은 고딕"/>
-              </a:rPr>
-              <a:t/>
-            </a:r>
-            <a:r>
-              <a:rPr sz="1100" b="0" dirty="0">
-                <a:solidFill>
-                  <a:srgbClr val="1C1C1E"/>
-                </a:solidFill>
-                <a:latin typeface="맑은 고딕"/>
-                <a:ea typeface="맑은 고딕"/>
-              </a:rPr>
-              <a:t/>
-            </a:r>
-            <a:r>
-              <a:rPr sz="1100" b="0" dirty="0" err="1">
-                <a:solidFill>
-                  <a:srgbClr val="1C1C1E"/>
-                </a:solidFill>
-                <a:latin typeface="맑은 고딕"/>
-                <a:ea typeface="맑은 고딕"/>
-              </a:rPr>
-              <a:t/>
-            </a:r>
-            <a:r>
-              <a:rPr sz="1100" b="0" dirty="0">
-                <a:solidFill>
-                  <a:srgbClr val="1C1C1E"/>
-                </a:solidFill>
-                <a:latin typeface="맑은 고딕"/>
-                <a:ea typeface="맑은 고딕"/>
-              </a:rPr>
-              <a:t/>
-            </a:r>
-            <a:r>
-              <a:rPr sz="1100" b="0" dirty="0" err="1">
-                <a:solidFill>
-                  <a:srgbClr val="1C1C1E"/>
-                </a:solidFill>
-                <a:latin typeface="맑은 고딕"/>
-                <a:ea typeface="맑은 고딕"/>
-              </a:rPr>
-              <a:t/>
-            </a:r>
-            <a:r>
-              <a:rPr sz="1100" b="0" dirty="0">
-                <a:solidFill>
-                  <a:srgbClr val="1C1C1E"/>
-                </a:solidFill>
-                <a:latin typeface="맑은 고딕"/>
-                <a:ea typeface="맑은 고딕"/>
-              </a:rPr>
-              <a:t/>
-            </a:r>
-            <a:r>
-              <a:rPr sz="1100" b="0" dirty="0" err="1">
-                <a:solidFill>
-                  <a:srgbClr val="1C1C1E"/>
-                </a:solidFill>
-                <a:latin typeface="맑은 고딕"/>
-                <a:ea typeface="맑은 고딕"/>
-              </a:rPr>
-              <a:t/>
-            </a:r>
-            <a:r>
-              <a:rPr sz="1100" b="0" dirty="0">
-                <a:solidFill>
-                  <a:srgbClr val="1C1C1E"/>
-                </a:solidFill>
-                <a:latin typeface="맑은 고딕"/>
-                <a:ea typeface="맑은 고딕"/>
-              </a:rPr>
-              <a:t/>
-            </a:r>
-            <a:r>
-              <a:rPr sz="1100" b="0" dirty="0" err="1">
-                <a:solidFill>
-                  <a:srgbClr val="1C1C1E"/>
-                </a:solidFill>
-                <a:latin typeface="맑은 고딕"/>
-                <a:ea typeface="맑은 고딕"/>
-              </a:rPr>
-              <a:t/>
-            </a:r>
-            <a:endParaRPr sz="1100" b="0" dirty="0">
-              <a:solidFill>
-                <a:srgbClr val="1C1C1E"/>
-              </a:solidFill>
-              <a:latin typeface="맑은 고딕"/>
-              <a:ea typeface="맑은 고딕"/>
-            </a:endParaRPr>
-          </a:p>
-          <a:p>
-            <a:pPr marL="160020" indent="-160020">
-              <a:lnSpc>
-                <a:spcPct val="114000"/>
-              </a:lnSpc>
-              <a:spcAft>
-                <a:spcPts val="200"/>
-              </a:spcAft>
-            </a:pPr>
-            <a:r>
-              <a:rPr sz="1100" b="0" dirty="0">
-                <a:solidFill>
-                  <a:srgbClr val="1C1C1E"/>
-                </a:solidFill>
-                <a:latin typeface="맑은 고딕"/>
-                <a:ea typeface="맑은 고딕"/>
-              </a:rPr>
-              <a:t>• 15년 누적 지원은 57개소 (분만 36 · 외래 15 · 순회 6). 2025년 신규는 전국 1개소</a:t>
-            </a:r>
-            <a:r>
-              <a:rPr sz="1100" b="0" dirty="0" err="1">
-                <a:solidFill>
-                  <a:srgbClr val="1C1C1E"/>
-                </a:solidFill>
-                <a:latin typeface="맑은 고딕"/>
-                <a:ea typeface="맑은 고딕"/>
-              </a:rPr>
-              <a:t/>
-            </a:r>
-            <a:r>
-              <a:rPr sz="1100" b="0" dirty="0">
-                <a:solidFill>
-                  <a:srgbClr val="1C1C1E"/>
-                </a:solidFill>
-                <a:latin typeface="맑은 고딕"/>
-                <a:ea typeface="맑은 고딕"/>
-              </a:rPr>
-              <a:t/>
-            </a:r>
-            <a:r>
-              <a:rPr sz="1100" b="0" dirty="0" err="1">
-                <a:solidFill>
-                  <a:srgbClr val="1C1C1E"/>
-                </a:solidFill>
-                <a:latin typeface="맑은 고딕"/>
-                <a:ea typeface="맑은 고딕"/>
-              </a:rPr>
-              <a:t/>
-            </a:r>
-            <a:r>
-              <a:rPr sz="1100" b="0" dirty="0">
-                <a:solidFill>
-                  <a:srgbClr val="1C1C1E"/>
-                </a:solidFill>
-                <a:latin typeface="맑은 고딕"/>
-                <a:ea typeface="맑은 고딕"/>
-              </a:rPr>
-              <a:t/>
-            </a:r>
-            <a:r>
-              <a:rPr sz="1100" b="0" dirty="0" err="1">
-                <a:solidFill>
-                  <a:srgbClr val="1C1C1E"/>
-                </a:solidFill>
-                <a:latin typeface="맑은 고딕"/>
-                <a:ea typeface="맑은 고딕"/>
-              </a:rPr>
-              <a:t/>
-            </a:r>
-            <a:r>
-              <a:rPr sz="1100" b="0" dirty="0">
-                <a:solidFill>
-                  <a:srgbClr val="1C1C1E"/>
-                </a:solidFill>
-                <a:latin typeface="맑은 고딕"/>
-                <a:ea typeface="맑은 고딕"/>
-              </a:rPr>
-              <a:t/>
-            </a:r>
-            <a:r>
-              <a:rPr sz="1100" b="0" dirty="0" err="1">
-                <a:solidFill>
-                  <a:srgbClr val="1C1C1E"/>
-                </a:solidFill>
-                <a:latin typeface="맑은 고딕"/>
-                <a:ea typeface="맑은 고딕"/>
-              </a:rPr>
-              <a:t/>
-            </a:r>
-            <a:r>
-              <a:rPr sz="1100" b="0" dirty="0">
-                <a:solidFill>
-                  <a:srgbClr val="1C1C1E"/>
-                </a:solidFill>
-                <a:latin typeface="맑은 고딕"/>
-                <a:ea typeface="맑은 고딕"/>
-              </a:rPr>
-              <a:t/>
-            </a:r>
-            <a:r>
-              <a:rPr sz="1100" b="0" dirty="0" err="1">
-                <a:solidFill>
-                  <a:srgbClr val="1C1C1E"/>
-                </a:solidFill>
-                <a:latin typeface="맑은 고딕"/>
-                <a:ea typeface="맑은 고딕"/>
-              </a:rPr>
-              <a:t/>
-            </a:r>
-            <a:r>
-              <a:rPr sz="1100" b="0" dirty="0">
-                <a:solidFill>
-                  <a:srgbClr val="1C1C1E"/>
-                </a:solidFill>
-                <a:latin typeface="맑은 고딕"/>
-                <a:ea typeface="맑은 고딕"/>
-              </a:rPr>
-              <a:t/>
-            </a:r>
-            <a:r>
-              <a:rPr sz="1100" b="0" dirty="0" err="1">
-                <a:solidFill>
-                  <a:srgbClr val="1C1C1E"/>
-                </a:solidFill>
-                <a:latin typeface="맑은 고딕"/>
-                <a:ea typeface="맑은 고딕"/>
-              </a:rPr>
-              <a:t/>
-            </a:r>
-            <a:r>
-              <a:rPr sz="1100" b="0" dirty="0">
-                <a:solidFill>
-                  <a:srgbClr val="1C1C1E"/>
-                </a:solidFill>
-                <a:latin typeface="맑은 고딕"/>
-                <a:ea typeface="맑은 고딕"/>
-              </a:rPr>
-              <a:t/>
-            </a:r>
-            <a:r>
-              <a:rPr sz="1100" b="0" dirty="0" err="1">
-                <a:solidFill>
-                  <a:srgbClr val="1C1C1E"/>
-                </a:solidFill>
-                <a:latin typeface="맑은 고딕"/>
-                <a:ea typeface="맑은 고딕"/>
-              </a:rPr>
-              <a:t/>
-            </a:r>
-            <a:r>
-              <a:rPr sz="1100" b="0" dirty="0">
-                <a:solidFill>
-                  <a:srgbClr val="1C1C1E"/>
-                </a:solidFill>
-                <a:latin typeface="맑은 고딕"/>
-                <a:ea typeface="맑은 고딕"/>
-              </a:rPr>
-              <a:t/>
-            </a:r>
-            <a:r>
-              <a:rPr sz="1100" b="0" dirty="0" err="1">
-                <a:solidFill>
-                  <a:srgbClr val="1C1C1E"/>
-                </a:solidFill>
-                <a:latin typeface="맑은 고딕"/>
-                <a:ea typeface="맑은 고딕"/>
-              </a:rPr>
-              <a:t/>
-            </a:r>
-            <a:r>
-              <a:rPr sz="1100" b="0" dirty="0">
-                <a:solidFill>
-                  <a:srgbClr val="1C1C1E"/>
-                </a:solidFill>
-                <a:latin typeface="맑은 고딕"/>
-                <a:ea typeface="맑은 고딕"/>
-              </a:rPr>
-              <a:t/>
-            </a:r>
-            <a:r>
-              <a:rPr sz="1100" b="0" dirty="0" err="1">
-                <a:solidFill>
-                  <a:srgbClr val="1C1C1E"/>
-                </a:solidFill>
-                <a:latin typeface="맑은 고딕"/>
-                <a:ea typeface="맑은 고딕"/>
-              </a:rPr>
-              <a:t/>
-            </a:r>
-            <a:r>
-              <a:rPr sz="1100" b="0" dirty="0">
-                <a:solidFill>
-                  <a:srgbClr val="1C1C1E"/>
-                </a:solidFill>
-                <a:latin typeface="맑은 고딕"/>
-                <a:ea typeface="맑은 고딕"/>
-              </a:rPr>
-              <a:t/>
-            </a:r>
-            <a:r>
-              <a:rPr sz="1100" b="0" dirty="0" err="1">
-                <a:solidFill>
-                  <a:srgbClr val="1C1C1E"/>
-                </a:solidFill>
-                <a:latin typeface="맑은 고딕"/>
-                <a:ea typeface="맑은 고딕"/>
-              </a:rPr>
-              <a:t/>
-            </a:r>
-            <a:r>
-              <a:rPr sz="1100" b="0" dirty="0">
-                <a:solidFill>
-                  <a:srgbClr val="1C1C1E"/>
-                </a:solidFill>
-                <a:latin typeface="맑은 고딕"/>
-                <a:ea typeface="맑은 고딕"/>
-              </a:rPr>
-              <a:t/>
-            </a:r>
-            <a:r>
-              <a:rPr sz="1100" b="0" dirty="0" err="1">
-                <a:solidFill>
-                  <a:srgbClr val="1C1C1E"/>
-                </a:solidFill>
-                <a:latin typeface="맑은 고딕"/>
-                <a:ea typeface="맑은 고딕"/>
-              </a:rPr>
-              <a:t/>
-            </a:r>
-            <a:r>
-              <a:rPr sz="1100" b="0" dirty="0">
-                <a:solidFill>
-                  <a:srgbClr val="1C1C1E"/>
-                </a:solidFill>
-                <a:latin typeface="맑은 고딕"/>
-                <a:ea typeface="맑은 고딕"/>
-              </a:rPr>
-              <a:t/>
-            </a:r>
-            <a:r>
-              <a:rPr sz="1100" b="0" dirty="0" err="1">
-                <a:solidFill>
-                  <a:srgbClr val="1C1C1E"/>
-                </a:solidFill>
-                <a:latin typeface="맑은 고딕"/>
-                <a:ea typeface="맑은 고딕"/>
-              </a:rPr>
-              <a:t/>
-            </a:r>
-            <a:endParaRPr sz="1100" b="0" dirty="0">
-              <a:solidFill>
-                <a:srgbClr val="1C1C1E"/>
-              </a:solidFill>
-              <a:latin typeface="맑은 고딕"/>
-              <a:ea typeface="맑은 고딕"/>
-            </a:endParaRPr>
-          </a:p>
-          <a:p>
-            <a:pPr marL="160020" indent="-160020">
-              <a:lnSpc>
-                <a:spcPct val="114000"/>
-              </a:lnSpc>
-              <a:spcAft>
-                <a:spcPts val="200"/>
-              </a:spcAft>
-            </a:pPr>
-            <a:r>
-              <a:rPr sz="1100" b="0" dirty="0">
-                <a:solidFill>
-                  <a:srgbClr val="1C1C1E"/>
-                </a:solidFill>
-                <a:latin typeface="맑은 고딕"/>
-                <a:ea typeface="맑은 고딕"/>
-              </a:rPr>
-              <a:t>• 통로도 있고 자격을 갖춘 지역도 있는데 한 해에 열리는 문은 하나다 — 그렇다면 순서를 정하는 규칙이 있어야 한다</a:t>
-            </a:r>
-            <a:r>
-              <a:rPr sz="1100" b="0" dirty="0" err="1">
-                <a:solidFill>
-                  <a:srgbClr val="1C1C1E"/>
-                </a:solidFill>
-                <a:latin typeface="맑은 고딕"/>
-                <a:ea typeface="맑은 고딕"/>
-              </a:rPr>
-              <a:t/>
-            </a:r>
-            <a:r>
-              <a:rPr sz="1100" b="0" dirty="0">
-                <a:solidFill>
-                  <a:srgbClr val="1C1C1E"/>
-                </a:solidFill>
-                <a:latin typeface="맑은 고딕"/>
-                <a:ea typeface="맑은 고딕"/>
-              </a:rPr>
-              <a:t/>
-            </a:r>
-            <a:r>
-              <a:rPr sz="1100" b="0" dirty="0" err="1">
-                <a:solidFill>
-                  <a:srgbClr val="1C1C1E"/>
-                </a:solidFill>
-                <a:latin typeface="맑은 고딕"/>
-                <a:ea typeface="맑은 고딕"/>
-              </a:rPr>
-              <a:t/>
-            </a:r>
-            <a:r>
-              <a:rPr lang="en-US" sz="1100" b="0" dirty="0">
-                <a:solidFill>
-                  <a:srgbClr val="1C1C1E"/>
-                </a:solidFill>
-                <a:latin typeface="맑은 고딕"/>
-                <a:ea typeface="맑은 고딕"/>
-              </a:rPr>
-              <a:t/>
-            </a:r>
-            <a:r>
-              <a:rPr lang="ko-KR" altLang="en-US" sz="1100" b="0" dirty="0">
-                <a:solidFill>
-                  <a:srgbClr val="1C1C1E"/>
-                </a:solidFill>
-                <a:latin typeface="맑은 고딕"/>
-                <a:ea typeface="맑은 고딕"/>
-              </a:rPr>
-              <a:t/>
-            </a:r>
-            <a:r>
-              <a:rPr sz="1100" b="0" dirty="0">
-                <a:solidFill>
-                  <a:srgbClr val="1C1C1E"/>
-                </a:solidFill>
-                <a:latin typeface="맑은 고딕"/>
-                <a:ea typeface="맑은 고딕"/>
-              </a:rPr>
-              <a:t/>
-            </a:r>
-            <a:r>
-              <a:rPr lang="ko-KR" altLang="en-US" sz="1100" b="0" dirty="0">
-                <a:solidFill>
-                  <a:srgbClr val="1C1C1E"/>
-                </a:solidFill>
-                <a:latin typeface="맑은 고딕"/>
-                <a:ea typeface="맑은 고딕"/>
-              </a:rPr>
-              <a:t/>
-            </a:r>
-            <a:r>
-              <a:rPr sz="1100" b="0" dirty="0">
-                <a:solidFill>
-                  <a:srgbClr val="1C1C1E"/>
-                </a:solidFill>
-                <a:latin typeface="맑은 고딕"/>
-                <a:ea typeface="맑은 고딕"/>
-              </a:rPr>
-              <a:t/>
-            </a:r>
-            <a:r>
-              <a:rPr sz="1100" b="0" dirty="0" err="1">
-                <a:solidFill>
-                  <a:srgbClr val="1C1C1E"/>
-                </a:solidFill>
-                <a:latin typeface="맑은 고딕"/>
-                <a:ea typeface="맑은 고딕"/>
-              </a:rPr>
-              <a:t/>
-            </a:r>
-            <a:r>
-              <a:rPr sz="1100" b="0" dirty="0">
-                <a:solidFill>
-                  <a:srgbClr val="1C1C1E"/>
-                </a:solidFill>
-                <a:latin typeface="맑은 고딕"/>
-                <a:ea typeface="맑은 고딕"/>
-              </a:rPr>
-              <a:t/>
-            </a:r>
-            <a:r>
-              <a:rPr sz="1100" b="0" dirty="0" err="1">
-                <a:solidFill>
-                  <a:srgbClr val="1C1C1E"/>
-                </a:solidFill>
-                <a:latin typeface="맑은 고딕"/>
-                <a:ea typeface="맑은 고딕"/>
-              </a:rPr>
-              <a:t/>
-            </a:r>
-            <a:r>
-              <a:rPr sz="1100" b="0" dirty="0">
-                <a:solidFill>
-                  <a:srgbClr val="1C1C1E"/>
-                </a:solidFill>
-                <a:latin typeface="맑은 고딕"/>
-                <a:ea typeface="맑은 고딕"/>
-              </a:rPr>
-              <a:t/>
-            </a:r>
-            <a:r>
-              <a:rPr lang="ko-KR" altLang="en-US" sz="1100" dirty="0">
-                <a:solidFill>
-                  <a:srgbClr val="1C1C1E"/>
-                </a:solidFill>
-                <a:latin typeface="맑은 고딕"/>
-                <a:ea typeface="맑은 고딕"/>
-              </a:rPr>
-              <a:t/>
-            </a:r>
-            <a:r>
-              <a:rPr lang="ko-KR" altLang="en-US" sz="1100" b="0" dirty="0">
-                <a:solidFill>
-                  <a:srgbClr val="1C1C1E"/>
-                </a:solidFill>
-                <a:latin typeface="맑은 고딕"/>
-                <a:ea typeface="맑은 고딕"/>
-              </a:rPr>
-              <a:t/>
-            </a:r>
-            <a:r>
-              <a:rPr sz="1100" b="0" dirty="0">
-                <a:solidFill>
-                  <a:srgbClr val="1C1C1E"/>
-                </a:solidFill>
-                <a:latin typeface="맑은 고딕"/>
-                <a:ea typeface="맑은 고딕"/>
-              </a:rPr>
-              <a:t/>
-            </a:r>
-            <a:r>
-              <a:rPr sz="1100" b="0" dirty="0" err="1">
-                <a:solidFill>
-                  <a:srgbClr val="1C1C1E"/>
-                </a:solidFill>
-                <a:latin typeface="맑은 고딕"/>
-                <a:ea typeface="맑은 고딕"/>
-              </a:rPr>
-              <a:t/>
-            </a:r>
-            <a:r>
-              <a:rPr sz="1100" b="0" dirty="0">
-                <a:solidFill>
-                  <a:srgbClr val="1C1C1E"/>
-                </a:solidFill>
-                <a:latin typeface="맑은 고딕"/>
-                <a:ea typeface="맑은 고딕"/>
-              </a:rPr>
-              <a:t/>
-            </a:r>
-            <a:r>
-              <a:rPr sz="1100" b="0" dirty="0" err="1">
-                <a:solidFill>
-                  <a:srgbClr val="1C1C1E"/>
-                </a:solidFill>
-                <a:latin typeface="맑은 고딕"/>
-                <a:ea typeface="맑은 고딕"/>
-              </a:rPr>
-              <a:t/>
-            </a:r>
-            <a:r>
-              <a:rPr sz="1100" b="0" dirty="0">
-                <a:solidFill>
-                  <a:srgbClr val="1C1C1E"/>
-                </a:solidFill>
-                <a:latin typeface="맑은 고딕"/>
-                <a:ea typeface="맑은 고딕"/>
-              </a:rPr>
-              <a:t/>
-            </a:r>
-            <a:r>
-              <a:rPr sz="1100" b="0" dirty="0" err="1">
-                <a:solidFill>
-                  <a:srgbClr val="1C1C1E"/>
-                </a:solidFill>
-                <a:latin typeface="맑은 고딕"/>
-                <a:ea typeface="맑은 고딕"/>
-              </a:rPr>
-              <a:t/>
-            </a:r>
-            <a:r>
-              <a:rPr sz="1100" b="0" dirty="0">
-                <a:solidFill>
-                  <a:srgbClr val="1C1C1E"/>
-                </a:solidFill>
-                <a:latin typeface="맑은 고딕"/>
-                <a:ea typeface="맑은 고딕"/>
-              </a:rPr>
-              <a:t/>
-            </a:r>
-            <a:r>
-              <a:rPr sz="1100" b="0" dirty="0" err="1">
-                <a:solidFill>
-                  <a:srgbClr val="1C1C1E"/>
-                </a:solidFill>
-                <a:latin typeface="맑은 고딕"/>
-                <a:ea typeface="맑은 고딕"/>
-              </a:rPr>
-              <a:t/>
-            </a:r>
-            <a:r>
-              <a:rPr sz="1100" b="0" dirty="0">
-                <a:solidFill>
-                  <a:srgbClr val="1C1C1E"/>
-                </a:solidFill>
-                <a:latin typeface="맑은 고딕"/>
-                <a:ea typeface="맑은 고딕"/>
-              </a:rPr>
-              <a:t/>
-            </a:r>
-            <a:r>
-              <a:rPr sz="1100" b="0" dirty="0" err="1">
-                <a:solidFill>
-                  <a:srgbClr val="1C1C1E"/>
-                </a:solidFill>
-                <a:latin typeface="맑은 고딕"/>
-                <a:ea typeface="맑은 고딕"/>
-              </a:rPr>
-              <a:t/>
-            </a:r>
-            <a:r>
-              <a:rPr sz="1100" b="0" dirty="0">
-                <a:solidFill>
-                  <a:srgbClr val="1C1C1E"/>
-                </a:solidFill>
-                <a:latin typeface="맑은 고딕"/>
-                <a:ea typeface="맑은 고딕"/>
-              </a:rPr>
-              <a:t/>
-            </a:r>
-            <a:r>
-              <a:rPr sz="1100" b="0" dirty="0" err="1">
-                <a:solidFill>
-                  <a:srgbClr val="1C1C1E"/>
-                </a:solidFill>
-                <a:latin typeface="맑은 고딕"/>
-                <a:ea typeface="맑은 고딕"/>
-              </a:rPr>
-              <a:t/>
-            </a:r>
-            <a:r>
-              <a:rPr sz="1100" b="0" dirty="0">
-                <a:solidFill>
-                  <a:srgbClr val="1C1C1E"/>
-                </a:solidFill>
-                <a:latin typeface="맑은 고딕"/>
-                <a:ea typeface="맑은 고딕"/>
-              </a:rPr>
-              <a:t/>
+              <a:t>• 나눠 줄 것이 적을수록 순서는 오히려 더 중요해진다 — 한 해에 한 곳뿐이면 순서가 곧 결과다. 그런데 그 순서를 정하는 규칙이 제도에 없다</a:t>
             </a:r>
           </a:p>
         </p:txBody>
@@ -17861,7 +15027,7 @@
         <p:spPr>
           <a:xfrm>
             <a:off x="502920" y="5230368"/>
-            <a:ext cx="11247120" cy="331629"/>
+            <a:ext cx="11247120" cy="1005840"/>
           </a:xfrm>
           <a:prstGeom prst="rect">
             <a:avLst/>
@@ -17883,7 +15049,7 @@
               </a:spcAft>
             </a:pPr>
             <a:r>
-              <a:rPr sz="1500" b="1" dirty="0">
+              <a:rPr sz="1500" b="1">
                 <a:solidFill>
                   <a:srgbClr val="1C1C1E"/>
                 </a:solidFill>
@@ -17892,263 +15058,26 @@
               </a:rPr>
               <a:t>자원 부족은 여전히 문제다. 다만 그와 별개로, 있는 자원이 체계적으로 배분되지 않는 문제가 함께 있다.</a:t>
             </a:r>
-            <a:r>
-              <a:rPr lang="ko-KR" altLang="en-US" sz="1500" b="1" dirty="0">
-                <a:solidFill>
-                  <a:srgbClr val="1C1C1E"/>
-                </a:solidFill>
-                <a:latin typeface="맑은 고딕"/>
-                <a:ea typeface="맑은 고딕"/>
-              </a:rPr>
-              <a:t/>
-            </a:r>
-            <a:r>
-              <a:rPr sz="1500" b="1" dirty="0" err="1">
-                <a:solidFill>
-                  <a:srgbClr val="1C1C1E"/>
-                </a:solidFill>
-                <a:latin typeface="맑은 고딕"/>
-                <a:ea typeface="맑은 고딕"/>
-              </a:rPr>
-              <a:t/>
-            </a:r>
-            <a:r>
-              <a:rPr sz="1500" b="1" dirty="0">
-                <a:solidFill>
-                  <a:srgbClr val="1C1C1E"/>
-                </a:solidFill>
-                <a:latin typeface="맑은 고딕"/>
-                <a:ea typeface="맑은 고딕"/>
-              </a:rPr>
-              <a:t/>
-            </a:r>
-            <a:r>
-              <a:rPr sz="1500" b="1" dirty="0" err="1">
-                <a:solidFill>
-                  <a:srgbClr val="1C1C1E"/>
-                </a:solidFill>
-                <a:latin typeface="맑은 고딕"/>
-                <a:ea typeface="맑은 고딕"/>
-              </a:rPr>
-              <a:t/>
-            </a:r>
-            <a:r>
-              <a:rPr sz="1500" b="1" dirty="0">
-                <a:solidFill>
-                  <a:srgbClr val="1C1C1E"/>
-                </a:solidFill>
-                <a:latin typeface="맑은 고딕"/>
-                <a:ea typeface="맑은 고딕"/>
-              </a:rPr>
-              <a:t/>
-            </a:r>
-            <a:r>
-              <a:rPr lang="ko-KR" altLang="en-US" sz="1500" b="1" dirty="0">
-                <a:solidFill>
-                  <a:srgbClr val="1C1C1E"/>
-                </a:solidFill>
-                <a:latin typeface="맑은 고딕"/>
-                <a:ea typeface="맑은 고딕"/>
-              </a:rPr>
-              <a:t/>
-            </a:r>
-            <a:r>
-              <a:rPr lang="en-US" altLang="ko-KR" sz="1500" b="1" dirty="0">
-                <a:solidFill>
-                  <a:srgbClr val="1C1C1E"/>
-                </a:solidFill>
-                <a:latin typeface="맑은 고딕"/>
-                <a:ea typeface="맑은 고딕"/>
-              </a:rPr>
-              <a:t/>
-            </a:r>
-            <a:r>
-              <a:rPr sz="1500" b="1" dirty="0">
+          </a:p>
+          <a:p>
+            <a:pPr>
+              <a:lnSpc>
+                <a:spcPct val="114000"/>
+              </a:lnSpc>
+              <a:spcAft>
+                <a:spcPts val="0"/>
+              </a:spcAft>
+            </a:pPr>
+            <a:r>
+              <a:rPr sz="1500" b="1">
                 <a:solidFill>
                   <a:srgbClr val="000000"/>
                 </a:solidFill>
                 <a:latin typeface="맑은 고딕"/>
                 <a:ea typeface="맑은 고딕"/>
               </a:rPr>
-              <a:t/>
-            </a:r>
-            <a:r>
-              <a:rPr lang="ko-KR" altLang="en-US" sz="1500" b="1" dirty="0">
-                <a:solidFill>
-                  <a:srgbClr val="000000"/>
-                </a:solidFill>
-                <a:latin typeface="맑은 고딕"/>
-                <a:ea typeface="맑은 고딕"/>
-              </a:rPr>
-              <a:t/>
-            </a:r>
-            <a:r>
-              <a:rPr sz="1500" b="1" dirty="0" err="1">
-                <a:solidFill>
-                  <a:srgbClr val="000000"/>
-                </a:solidFill>
-                <a:latin typeface="맑은 고딕"/>
-                <a:ea typeface="맑은 고딕"/>
-              </a:rPr>
-              <a:t/>
-            </a:r>
-            <a:r>
-              <a:rPr sz="1500" b="1" dirty="0">
-                <a:solidFill>
-                  <a:srgbClr val="000000"/>
-                </a:solidFill>
-                <a:latin typeface="맑은 고딕"/>
-                <a:ea typeface="맑은 고딕"/>
-              </a:rPr>
-              <a:t/>
-            </a:r>
-            <a:r>
-              <a:rPr sz="1500" b="1" dirty="0" err="1">
-                <a:solidFill>
-                  <a:srgbClr val="000000"/>
-                </a:solidFill>
-                <a:latin typeface="맑은 고딕"/>
-                <a:ea typeface="맑은 고딕"/>
-              </a:rPr>
-              <a:t/>
-            </a:r>
-            <a:r>
-              <a:rPr sz="1500" b="1" dirty="0">
-                <a:solidFill>
-                  <a:srgbClr val="000000"/>
-                </a:solidFill>
-                <a:latin typeface="맑은 고딕"/>
-                <a:ea typeface="맑은 고딕"/>
-              </a:rPr>
-              <a:t/>
-            </a:r>
-            <a:r>
-              <a:rPr sz="1500" b="1" dirty="0" err="1">
-                <a:solidFill>
-                  <a:srgbClr val="000000"/>
-                </a:solidFill>
-                <a:latin typeface="맑은 고딕"/>
-                <a:ea typeface="맑은 고딕"/>
-              </a:rPr>
-              <a:t/>
-            </a:r>
-            <a:r>
-              <a:rPr sz="1500" b="1" dirty="0">
-                <a:solidFill>
-                  <a:srgbClr val="000000"/>
-                </a:solidFill>
-                <a:latin typeface="맑은 고딕"/>
-                <a:ea typeface="맑은 고딕"/>
-              </a:rPr>
-              <a:t/>
-            </a:r>
-            <a:r>
-              <a:rPr sz="1500" b="1" dirty="0" err="1">
-                <a:solidFill>
-                  <a:srgbClr val="000000"/>
-                </a:solidFill>
-                <a:latin typeface="맑은 고딕"/>
-                <a:ea typeface="맑은 고딕"/>
-              </a:rPr>
-              <a:t/>
-            </a:r>
-            <a:r>
-              <a:rPr sz="1500" b="1" dirty="0">
-                <a:solidFill>
-                  <a:srgbClr val="000000"/>
-                </a:solidFill>
-                <a:latin typeface="맑은 고딕"/>
-                <a:ea typeface="맑은 고딕"/>
-              </a:rPr>
-              <a:t/>
-            </a:r>
-            <a:r>
-              <a:rPr sz="1500" b="1" dirty="0" err="1">
-                <a:solidFill>
-                  <a:srgbClr val="000000"/>
-                </a:solidFill>
-                <a:latin typeface="맑은 고딕"/>
-                <a:ea typeface="맑은 고딕"/>
-              </a:rPr>
-              <a:t/>
-            </a:r>
-            <a:r>
-              <a:rPr sz="1500" b="1" dirty="0">
-                <a:solidFill>
-                  <a:srgbClr val="000000"/>
-                </a:solidFill>
-                <a:latin typeface="맑은 고딕"/>
-                <a:ea typeface="맑은 고딕"/>
-              </a:rPr>
-              <a:t/>
-            </a:r>
-            <a:r>
-              <a:rPr sz="1500" b="1" dirty="0" err="1">
-                <a:solidFill>
-                  <a:srgbClr val="000000"/>
-                </a:solidFill>
-                <a:latin typeface="맑은 고딕"/>
-                <a:ea typeface="맑은 고딕"/>
-              </a:rPr>
-              <a:t/>
-            </a:r>
-            <a:r>
-              <a:rPr sz="1500" b="1" dirty="0">
-                <a:solidFill>
-                  <a:srgbClr val="000000"/>
-                </a:solidFill>
-                <a:latin typeface="맑은 고딕"/>
-                <a:ea typeface="맑은 고딕"/>
-              </a:rPr>
-              <a:t/>
-            </a:r>
-            <a:r>
-              <a:rPr sz="1500" b="1" dirty="0" err="1">
-                <a:solidFill>
-                  <a:srgbClr val="000000"/>
-                </a:solidFill>
-                <a:latin typeface="맑은 고딕"/>
-                <a:ea typeface="맑은 고딕"/>
-              </a:rPr>
-              <a:t/>
-            </a:r>
-            <a:r>
-              <a:rPr sz="1500" b="1" dirty="0">
-                <a:solidFill>
-                  <a:srgbClr val="000000"/>
-                </a:solidFill>
-                <a:latin typeface="맑은 고딕"/>
-                <a:ea typeface="맑은 고딕"/>
-              </a:rPr>
-              <a:t/>
-            </a:r>
-            <a:r>
-              <a:rPr sz="1500" b="1" dirty="0" err="1">
-                <a:solidFill>
-                  <a:srgbClr val="000000"/>
-                </a:solidFill>
-                <a:latin typeface="맑은 고딕"/>
-                <a:ea typeface="맑은 고딕"/>
-              </a:rPr>
-              <a:t/>
-            </a:r>
-            <a:r>
-              <a:rPr sz="1500" b="1" dirty="0">
-                <a:solidFill>
-                  <a:srgbClr val="000000"/>
-                </a:solidFill>
-                <a:latin typeface="맑은 고딕"/>
-                <a:ea typeface="맑은 고딕"/>
-              </a:rPr>
-              <a:t/>
-            </a:r>
-            <a:endParaRPr lang="en-US" sz="1500" b="1" dirty="0">
-              <a:solidFill>
-                <a:srgbClr val="000000"/>
-              </a:solidFill>
-              <a:latin typeface="맑은 고딕"/>
-              <a:ea typeface="맑은 고딕"/>
-            </a:endParaRPr>
+              <a:t>"현재 주어진 자원이 체계적으로, 필요한 곳으로 배분되고 있는가" — 이것이 이 프로젝트의 질문이다.</a:t>
+            </a:r>
           </a:p>
         </p:txBody>
       </p:sp>
@@ -18161,7 +15090,7 @@
 </file>
 
 <file path=ppt/slides/slide4.xml><?xml version="1.0" encoding="utf-8"?>
-<p:sld xmlns:a="http://schemas.openxmlformats.org/drawingml/2006/main" xmlns:r="http://schemas.openxmlformats.org/officeDocument/2006/relationships" xmlns:p="http://schemas.openxmlformats.org/presentationml/2006/main">
+<p:sld xmlns:a="http://schemas.openxmlformats.org/drawingml/2006/main" xmlns:p="http://schemas.openxmlformats.org/presentationml/2006/main" xmlns:r="http://schemas.openxmlformats.org/officeDocument/2006/relationships">
   <p:cSld>
     <p:spTree>
       <p:nvGrpSpPr>
@@ -18169,14 +15098,7 @@
         <p:cNvGrpSpPr/>
         <p:nvPr/>
       </p:nvGrpSpPr>
-      <p:grpSpPr>
-        <a:xfrm>
-          <a:off x="0" y="0"/>
-          <a:ext cx="0" cy="0"/>
-          <a:chOff x="0" y="0"/>
-          <a:chExt cx="0" cy="0"/>
-        </a:xfrm>
-      </p:grpSpPr>
+      <p:grpSpPr/>
       <p:sp>
         <p:nvSpPr>
           <p:cNvPr id="2" name="Rectangle 1"/>
@@ -18218,7 +15140,6 @@
           <a:lstStyle/>
           <a:p>
             <a:pPr algn="ctr"/>
-            <a:endParaRPr/>
           </a:p>
         </p:txBody>
       </p:sp>
@@ -18247,7 +15168,7 @@
                 <a:srgbClr val="73787E"/>
               </a:gs>
             </a:gsLst>
-            <a:lin ang="18900000" scaled="0"/>
+            <a:lin scaled="0" ang="18900000"/>
           </a:gradFill>
           <a:ln>
             <a:noFill/>
@@ -18279,7 +15200,6 @@
           <a:lstStyle/>
           <a:p>
             <a:pPr algn="ctr"/>
-            <a:endParaRPr/>
           </a:p>
         </p:txBody>
       </p:sp>
@@ -18291,8 +15211,8 @@
         </p:nvSpPr>
         <p:spPr>
           <a:xfrm>
-            <a:off x="960120" y="399564"/>
-            <a:ext cx="9692640" cy="435312"/>
+            <a:off x="960120" y="274320"/>
+            <a:ext cx="9692640" cy="685800"/>
           </a:xfrm>
           <a:prstGeom prst="rect">
             <a:avLst/>
@@ -18314,62 +15234,15 @@
               </a:spcAft>
             </a:pPr>
             <a:r>
-              <a:rPr lang="ko-KR" altLang="en-US" sz="2150" b="1" dirty="0">
+              <a:rPr sz="2150" b="1">
                 <a:solidFill>
                   <a:srgbClr val="1C1C1E"/>
                 </a:solidFill>
                 <a:latin typeface="맑은 고딕"/>
                 <a:ea typeface="맑은 고딕"/>
               </a:rPr>
-              <a:t>데이터 분석을 통한 </a:t>
-            </a:r>
-            <a:r>
-              <a:rPr sz="2150" b="1" dirty="0">
-                <a:solidFill>
-                  <a:srgbClr val="1C1C1E"/>
-                </a:solidFill>
-                <a:latin typeface="맑은 고딕"/>
-                <a:ea typeface="맑은 고딕"/>
-              </a:rPr>
-              <a:t>네 </a:t>
-            </a:r>
-            <a:r>
-              <a:rPr sz="2150" b="1" dirty="0" err="1">
-                <a:solidFill>
-                  <a:srgbClr val="1C1C1E"/>
-                </a:solidFill>
-                <a:latin typeface="맑은 고딕"/>
-                <a:ea typeface="맑은 고딕"/>
-              </a:rPr>
-              <a:t>가지</a:t>
-            </a:r>
-            <a:r>
-              <a:rPr sz="2150" b="1" dirty="0">
-                <a:solidFill>
-                  <a:srgbClr val="1C1C1E"/>
-                </a:solidFill>
-                <a:latin typeface="맑은 고딕"/>
-                <a:ea typeface="맑은 고딕"/>
-              </a:rPr>
-              <a:t> </a:t>
-            </a:r>
-            <a:r>
-              <a:rPr sz="2150" b="1" dirty="0" err="1">
-                <a:solidFill>
-                  <a:srgbClr val="1C1C1E"/>
-                </a:solidFill>
-                <a:latin typeface="맑은 고딕"/>
-                <a:ea typeface="맑은 고딕"/>
-              </a:rPr>
-              <a:t>발견</a:t>
-            </a:r>
-            <a:endParaRPr sz="2150" b="1" dirty="0">
-              <a:solidFill>
-                <a:srgbClr val="1C1C1E"/>
-              </a:solidFill>
-              <a:latin typeface="맑은 고딕"/>
-              <a:ea typeface="맑은 고딕"/>
-            </a:endParaRPr>
+              <a:t>프로젝트 요약 — 네 가지 발견</a:t>
+            </a:r>
           </a:p>
         </p:txBody>
       </p:sp>
@@ -18396,7 +15269,7 @@
                 <a:srgbClr val="FFFFFF"/>
               </a:gs>
             </a:gsLst>
-            <a:lin ang="0" scaled="0"/>
+            <a:lin scaled="0" ang="0"/>
           </a:gradFill>
           <a:ln>
             <a:noFill/>
@@ -18422,7 +15295,6 @@
           <a:lstStyle/>
           <a:p>
             <a:pPr algn="ctr"/>
-            <a:endParaRPr/>
           </a:p>
         </p:txBody>
       </p:sp>
@@ -18563,7 +15435,6 @@
           <a:lstStyle/>
           <a:p>
             <a:pPr algn="ctr"/>
-            <a:endParaRPr/>
           </a:p>
         </p:txBody>
       </p:sp>
@@ -18576,7 +15447,7 @@
         <p:spPr>
           <a:xfrm>
             <a:off x="685800" y="1362456"/>
-            <a:ext cx="5166359" cy="958660"/>
+            <a:ext cx="5166359" cy="1664208"/>
           </a:xfrm>
           <a:prstGeom prst="rect">
             <a:avLst/>
@@ -18598,82 +15469,15 @@
               </a:spcAft>
             </a:pPr>
             <a:r>
-              <a:rPr sz="1300" b="1" dirty="0" err="1">
+              <a:rPr sz="1300" b="1">
                 <a:solidFill>
                   <a:srgbClr val="33393F"/>
                 </a:solidFill>
                 <a:latin typeface="맑은 고딕"/>
                 <a:ea typeface="맑은 고딕"/>
               </a:rPr>
-              <a:t>발견</a:t>
-            </a:r>
-            <a:r>
-              <a:rPr sz="1300" b="1" dirty="0">
-                <a:solidFill>
-                  <a:srgbClr val="33393F"/>
-                </a:solidFill>
-                <a:latin typeface="맑은 고딕"/>
-                <a:ea typeface="맑은 고딕"/>
-              </a:rPr>
-              <a:t> 1 · </a:t>
-            </a:r>
-            <a:r>
-              <a:rPr sz="1300" b="1" dirty="0" err="1">
-                <a:solidFill>
-                  <a:srgbClr val="33393F"/>
-                </a:solidFill>
-                <a:latin typeface="맑은 고딕"/>
-                <a:ea typeface="맑은 고딕"/>
-              </a:rPr>
-              <a:t>지정은</a:t>
-            </a:r>
-            <a:r>
-              <a:rPr sz="1300" b="1" dirty="0">
-                <a:solidFill>
-                  <a:srgbClr val="33393F"/>
-                </a:solidFill>
-                <a:latin typeface="맑은 고딕"/>
-                <a:ea typeface="맑은 고딕"/>
-              </a:rPr>
-              <a:t> </a:t>
-            </a:r>
-            <a:r>
-              <a:rPr sz="1300" b="1" dirty="0" err="1">
-                <a:solidFill>
-                  <a:srgbClr val="33393F"/>
-                </a:solidFill>
-                <a:latin typeface="맑은 고딕"/>
-                <a:ea typeface="맑은 고딕"/>
-              </a:rPr>
-              <a:t>이동시간만</a:t>
-            </a:r>
-            <a:r>
-              <a:rPr sz="1300" b="1" dirty="0">
-                <a:solidFill>
-                  <a:srgbClr val="33393F"/>
-                </a:solidFill>
-                <a:latin typeface="맑은 고딕"/>
-                <a:ea typeface="맑은 고딕"/>
-              </a:rPr>
-              <a:t> </a:t>
-            </a:r>
-            <a:r>
-              <a:rPr sz="1300" b="1" dirty="0" err="1">
-                <a:solidFill>
-                  <a:srgbClr val="33393F"/>
-                </a:solidFill>
-                <a:latin typeface="맑은 고딕"/>
-                <a:ea typeface="맑은 고딕"/>
-              </a:rPr>
-              <a:t>본다</a:t>
-            </a:r>
-            <a:endParaRPr sz="1300" b="1" dirty="0">
-              <a:solidFill>
-                <a:srgbClr val="33393F"/>
-              </a:solidFill>
-              <a:latin typeface="맑은 고딕"/>
-              <a:ea typeface="맑은 고딕"/>
-            </a:endParaRPr>
+              <a:t>발견 1 · 지정은 이동시간만 본다</a:t>
+            </a:r>
           </a:p>
           <a:p>
             <a:pPr marL="160020" indent="-160020">
@@ -18685,332 +15489,15 @@
               </a:spcAft>
             </a:pPr>
             <a:r>
-              <a:rPr sz="1150" b="0" dirty="0">
+              <a:rPr sz="1150" b="0">
                 <a:solidFill>
                   <a:srgbClr val="1C1C1E"/>
                 </a:solidFill>
                 <a:latin typeface="맑은 고딕"/>
                 <a:ea typeface="맑은 고딕"/>
               </a:rPr>
-              <a:t>• </a:t>
-            </a:r>
-            <a:r>
-              <a:rPr lang="ko-KR" altLang="en-US" sz="1150" dirty="0">
-                <a:solidFill>
-                  <a:srgbClr val="1C1C1E"/>
-                </a:solidFill>
-                <a:latin typeface="맑은 고딕"/>
-                <a:ea typeface="맑은 고딕"/>
-              </a:rPr>
-              <a:t>의료</a:t>
-            </a:r>
-            <a:r>
-              <a:rPr lang="ko-KR" altLang="en-US" sz="1150" b="0" dirty="0">
-                <a:solidFill>
-                  <a:srgbClr val="1C1C1E"/>
-                </a:solidFill>
-                <a:latin typeface="맑은 고딕"/>
-                <a:ea typeface="맑은 고딕"/>
-              </a:rPr>
-              <a:t> </a:t>
-            </a:r>
-            <a:r>
-              <a:rPr lang="ko-KR" altLang="en-US" sz="1150" dirty="0">
-                <a:solidFill>
-                  <a:srgbClr val="1C1C1E"/>
-                </a:solidFill>
-                <a:latin typeface="맑은 고딕"/>
-                <a:ea typeface="맑은 고딕"/>
-              </a:rPr>
-              <a:t>접근성과 </a:t>
-            </a:r>
-            <a:r>
-              <a:rPr lang="en-US" altLang="ko-KR" sz="1150" dirty="0">
-                <a:solidFill>
-                  <a:srgbClr val="1C1C1E"/>
-                </a:solidFill>
-                <a:latin typeface="맑은 고딕"/>
-                <a:ea typeface="맑은 고딕"/>
-              </a:rPr>
-              <a:t>TRI(</a:t>
-            </a:r>
-            <a:r>
-              <a:rPr lang="ko-KR" altLang="en-US" sz="1150" dirty="0">
-                <a:solidFill>
-                  <a:srgbClr val="1C1C1E"/>
-                </a:solidFill>
-                <a:latin typeface="맑은 고딕"/>
-                <a:ea typeface="맑은 고딕"/>
-              </a:rPr>
-              <a:t>기준시간내 </a:t>
-            </a:r>
-            <a:r>
-              <a:rPr lang="ko-KR" altLang="en-US" sz="1150" dirty="0" err="1">
-                <a:solidFill>
-                  <a:srgbClr val="1C1C1E"/>
-                </a:solidFill>
-                <a:latin typeface="맑은 고딕"/>
-                <a:ea typeface="맑은 고딕"/>
-              </a:rPr>
-              <a:t>의료이용률</a:t>
-            </a:r>
-            <a:r>
-              <a:rPr lang="en-US" altLang="ko-KR" sz="1150" dirty="0">
-                <a:solidFill>
-                  <a:srgbClr val="1C1C1E"/>
-                </a:solidFill>
-                <a:latin typeface="맑은 고딕"/>
-                <a:ea typeface="맑은 고딕"/>
-              </a:rPr>
-              <a:t>) </a:t>
-            </a:r>
-            <a:r>
-              <a:rPr lang="ko-KR" altLang="en-US" sz="1150" dirty="0">
-                <a:solidFill>
-                  <a:srgbClr val="1C1C1E"/>
-                </a:solidFill>
-                <a:latin typeface="맑은 고딕"/>
-                <a:ea typeface="맑은 고딕"/>
-              </a:rPr>
-              <a:t>만 반영하는 </a:t>
-            </a:r>
-            <a:r>
-              <a:rPr sz="1150" b="0" dirty="0" err="1">
-                <a:solidFill>
-                  <a:srgbClr val="1C1C1E"/>
-                </a:solidFill>
-                <a:latin typeface="맑은 고딕"/>
-                <a:ea typeface="맑은 고딕"/>
-              </a:rPr>
-              <a:t>공표</a:t>
-            </a:r>
-            <a:r>
-              <a:rPr sz="1150" b="0" dirty="0">
-                <a:solidFill>
-                  <a:srgbClr val="1C1C1E"/>
-                </a:solidFill>
-                <a:latin typeface="맑은 고딕"/>
-                <a:ea typeface="맑은 고딕"/>
-              </a:rPr>
-              <a:t> </a:t>
-            </a:r>
-            <a:r>
-              <a:rPr sz="1150" b="0" dirty="0" err="1">
-                <a:solidFill>
-                  <a:srgbClr val="1C1C1E"/>
-                </a:solidFill>
-                <a:latin typeface="맑은 고딕"/>
-                <a:ea typeface="맑은 고딕"/>
-              </a:rPr>
-              <a:t>판정식이</a:t>
-            </a:r>
-            <a:r>
-              <a:rPr sz="1150" b="0" dirty="0">
-                <a:solidFill>
-                  <a:srgbClr val="1C1C1E"/>
-                </a:solidFill>
-                <a:latin typeface="맑은 고딕"/>
-                <a:ea typeface="맑은 고딕"/>
-              </a:rPr>
-              <a:t> </a:t>
-            </a:r>
-            <a:r>
-              <a:rPr sz="1150" b="0" dirty="0" err="1">
-                <a:solidFill>
-                  <a:srgbClr val="1C1C1E"/>
-                </a:solidFill>
-                <a:latin typeface="맑은 고딕"/>
-                <a:ea typeface="맑은 고딕"/>
-              </a:rPr>
-              <a:t>실제</a:t>
-            </a:r>
-            <a:r>
-              <a:rPr sz="1150" b="0" dirty="0">
-                <a:solidFill>
-                  <a:srgbClr val="1C1C1E"/>
-                </a:solidFill>
-                <a:latin typeface="맑은 고딕"/>
-                <a:ea typeface="맑은 고딕"/>
-              </a:rPr>
-              <a:t> </a:t>
-            </a:r>
-            <a:r>
-              <a:rPr sz="1150" b="0" dirty="0" err="1">
-                <a:solidFill>
-                  <a:srgbClr val="1C1C1E"/>
-                </a:solidFill>
-                <a:latin typeface="맑은 고딕"/>
-                <a:ea typeface="맑은 고딕"/>
-              </a:rPr>
-              <a:t>지정</a:t>
-            </a:r>
-            <a:r>
-              <a:rPr sz="1150" b="0" dirty="0">
-                <a:solidFill>
-                  <a:srgbClr val="1C1C1E"/>
-                </a:solidFill>
-                <a:latin typeface="맑은 고딕"/>
-                <a:ea typeface="맑은 고딕"/>
-              </a:rPr>
-              <a:t> 159건 중 158건(99.4%)을 </a:t>
-            </a:r>
-            <a:r>
-              <a:rPr sz="1150" b="0" dirty="0" err="1">
-                <a:solidFill>
-                  <a:srgbClr val="1C1C1E"/>
-                </a:solidFill>
-                <a:latin typeface="맑은 고딕"/>
-                <a:ea typeface="맑은 고딕"/>
-              </a:rPr>
-              <a:t>재현</a:t>
-            </a:r>
-            <a:r>
-              <a:rPr sz="1150" b="0" dirty="0">
-                <a:solidFill>
-                  <a:srgbClr val="1C1C1E"/>
-                </a:solidFill>
-                <a:latin typeface="맑은 고딕"/>
-                <a:ea typeface="맑은 고딕"/>
-              </a:rPr>
-              <a:t>. </a:t>
-            </a:r>
-            <a:r>
-              <a:rPr sz="1150" b="0" dirty="0" err="1">
-                <a:solidFill>
-                  <a:srgbClr val="1C1C1E"/>
-                </a:solidFill>
-                <a:latin typeface="맑은 고딕"/>
-                <a:ea typeface="맑은 고딕"/>
-              </a:rPr>
-              <a:t>공급</a:t>
-            </a:r>
-            <a:r>
-              <a:rPr sz="1150" b="0" dirty="0">
-                <a:solidFill>
-                  <a:srgbClr val="1C1C1E"/>
-                </a:solidFill>
-                <a:latin typeface="맑은 고딕"/>
-                <a:ea typeface="맑은 고딕"/>
-              </a:rPr>
-              <a:t> </a:t>
-            </a:r>
-            <a:r>
-              <a:rPr sz="1150" b="0" dirty="0" err="1">
-                <a:solidFill>
-                  <a:srgbClr val="1C1C1E"/>
-                </a:solidFill>
-                <a:latin typeface="맑은 고딕"/>
-                <a:ea typeface="맑은 고딕"/>
-              </a:rPr>
-              <a:t>변수를</a:t>
-            </a:r>
-            <a:r>
-              <a:rPr sz="1150" b="0" dirty="0">
-                <a:solidFill>
-                  <a:srgbClr val="1C1C1E"/>
-                </a:solidFill>
-                <a:latin typeface="맑은 고딕"/>
-                <a:ea typeface="맑은 고딕"/>
-              </a:rPr>
-              <a:t> </a:t>
-            </a:r>
-            <a:r>
-              <a:rPr sz="1150" b="0" dirty="0" err="1">
-                <a:solidFill>
-                  <a:srgbClr val="1C1C1E"/>
-                </a:solidFill>
-                <a:latin typeface="맑은 고딕"/>
-                <a:ea typeface="맑은 고딕"/>
-              </a:rPr>
-              <a:t>추가해도</a:t>
-            </a:r>
-            <a:r>
-              <a:rPr sz="1150" b="0" dirty="0">
-                <a:solidFill>
-                  <a:srgbClr val="1C1C1E"/>
-                </a:solidFill>
-                <a:latin typeface="맑은 고딕"/>
-                <a:ea typeface="맑은 고딕"/>
-              </a:rPr>
-              <a:t> </a:t>
-            </a:r>
-            <a:r>
-              <a:rPr sz="1150" b="0" dirty="0" err="1">
-                <a:solidFill>
-                  <a:srgbClr val="1C1C1E"/>
-                </a:solidFill>
-                <a:latin typeface="맑은 고딕"/>
-                <a:ea typeface="맑은 고딕"/>
-              </a:rPr>
-              <a:t>판별력</a:t>
-            </a:r>
-            <a:r>
-              <a:rPr sz="1150" b="0" dirty="0">
-                <a:solidFill>
-                  <a:srgbClr val="1C1C1E"/>
-                </a:solidFill>
-                <a:latin typeface="맑은 고딕"/>
-                <a:ea typeface="맑은 고딕"/>
-              </a:rPr>
-              <a:t>(AUC)은 </a:t>
-            </a:r>
-            <a:r>
-              <a:rPr sz="1150" b="0" dirty="0" err="1">
-                <a:solidFill>
-                  <a:srgbClr val="1C1C1E"/>
-                </a:solidFill>
-                <a:latin typeface="맑은 고딕"/>
-                <a:ea typeface="맑은 고딕"/>
-              </a:rPr>
-              <a:t>전혀</a:t>
-            </a:r>
-            <a:r>
-              <a:rPr sz="1150" b="0" dirty="0">
-                <a:solidFill>
-                  <a:srgbClr val="1C1C1E"/>
-                </a:solidFill>
-                <a:latin typeface="맑은 고딕"/>
-                <a:ea typeface="맑은 고딕"/>
-              </a:rPr>
-              <a:t> </a:t>
-            </a:r>
-            <a:r>
-              <a:rPr sz="1150" b="0" dirty="0" err="1">
-                <a:solidFill>
-                  <a:srgbClr val="1C1C1E"/>
-                </a:solidFill>
-                <a:latin typeface="맑은 고딕"/>
-                <a:ea typeface="맑은 고딕"/>
-              </a:rPr>
-              <a:t>늘지</a:t>
-            </a:r>
-            <a:r>
-              <a:rPr sz="1150" b="0" dirty="0">
-                <a:solidFill>
-                  <a:srgbClr val="1C1C1E"/>
-                </a:solidFill>
-                <a:latin typeface="맑은 고딕"/>
-                <a:ea typeface="맑은 고딕"/>
-              </a:rPr>
-              <a:t> </a:t>
-            </a:r>
-            <a:r>
-              <a:rPr sz="1150" b="0" dirty="0" err="1">
-                <a:solidFill>
-                  <a:srgbClr val="1C1C1E"/>
-                </a:solidFill>
-                <a:latin typeface="맑은 고딕"/>
-                <a:ea typeface="맑은 고딕"/>
-              </a:rPr>
-              <a:t>않는다</a:t>
-            </a:r>
-            <a:endParaRPr sz="1150" b="0" dirty="0">
-              <a:solidFill>
-                <a:srgbClr val="1C1C1E"/>
-              </a:solidFill>
-              <a:latin typeface="맑은 고딕"/>
-              <a:ea typeface="맑은 고딕"/>
-            </a:endParaRPr>
+              <a:t>• 공표 판정식(접근성·TRI)이 실제 지정 159건 중 158건(99.4%)을 재현. 공급 변수를 추가해도 판별력(AUC)은 전혀 늘지 않는다</a:t>
+            </a:r>
           </a:p>
         </p:txBody>
       </p:sp>
@@ -19065,7 +15552,6 @@
           <a:lstStyle/>
           <a:p>
             <a:pPr algn="ctr"/>
-            <a:endParaRPr/>
           </a:p>
         </p:txBody>
       </p:sp>
@@ -19078,7 +15564,7 @@
         <p:spPr>
           <a:xfrm>
             <a:off x="6446520" y="1362456"/>
-            <a:ext cx="5166359" cy="958660"/>
+            <a:ext cx="5166359" cy="1664208"/>
           </a:xfrm>
           <a:prstGeom prst="rect">
             <a:avLst/>
@@ -19100,112 +15586,15 @@
               </a:spcAft>
             </a:pPr>
             <a:r>
-              <a:rPr sz="1300" b="1" dirty="0" err="1">
+              <a:rPr sz="1300" b="1">
                 <a:solidFill>
                   <a:srgbClr val="000000"/>
                 </a:solidFill>
                 <a:latin typeface="맑은 고딕"/>
                 <a:ea typeface="맑은 고딕"/>
               </a:rPr>
-              <a:t>발견</a:t>
-            </a:r>
-            <a:r>
-              <a:rPr sz="1300" b="1" dirty="0">
-                <a:solidFill>
-                  <a:srgbClr val="000000"/>
-                </a:solidFill>
-                <a:latin typeface="맑은 고딕"/>
-                <a:ea typeface="맑은 고딕"/>
-              </a:rPr>
-              <a:t> 2 · </a:t>
-            </a:r>
-            <a:r>
-              <a:rPr sz="1300" b="1" dirty="0" err="1">
-                <a:solidFill>
-                  <a:srgbClr val="000000"/>
-                </a:solidFill>
-                <a:latin typeface="맑은 고딕"/>
-                <a:ea typeface="맑은 고딕"/>
-              </a:rPr>
-              <a:t>공급</a:t>
-            </a:r>
-            <a:r>
-              <a:rPr sz="1300" b="1" dirty="0">
-                <a:solidFill>
-                  <a:srgbClr val="000000"/>
-                </a:solidFill>
-                <a:latin typeface="맑은 고딕"/>
-                <a:ea typeface="맑은 고딕"/>
-              </a:rPr>
-              <a:t> </a:t>
-            </a:r>
-            <a:r>
-              <a:rPr sz="1300" b="1" dirty="0" err="1">
-                <a:solidFill>
-                  <a:srgbClr val="000000"/>
-                </a:solidFill>
-                <a:latin typeface="맑은 고딕"/>
-                <a:ea typeface="맑은 고딕"/>
-              </a:rPr>
-              <a:t>공백</a:t>
-            </a:r>
-            <a:r>
-              <a:rPr lang="ko-KR" altLang="en-US" sz="1300" b="1" dirty="0">
-                <a:solidFill>
-                  <a:srgbClr val="000000"/>
-                </a:solidFill>
-                <a:latin typeface="맑은 고딕"/>
-                <a:ea typeface="맑은 고딕"/>
-              </a:rPr>
-              <a:t>이 있는</a:t>
-            </a:r>
-            <a:r>
-              <a:rPr sz="1300" b="1" dirty="0">
-                <a:solidFill>
-                  <a:srgbClr val="000000"/>
-                </a:solidFill>
-                <a:latin typeface="맑은 고딕"/>
-                <a:ea typeface="맑은 고딕"/>
-              </a:rPr>
-              <a:t> </a:t>
-            </a:r>
-            <a:r>
-              <a:rPr sz="1300" b="1" dirty="0" err="1">
-                <a:solidFill>
-                  <a:srgbClr val="000000"/>
-                </a:solidFill>
-                <a:latin typeface="맑은 고딕"/>
-                <a:ea typeface="맑은 고딕"/>
-              </a:rPr>
-              <a:t>사각지대</a:t>
-            </a:r>
-            <a:r>
-              <a:rPr lang="en-US" sz="1300" b="1" dirty="0">
-                <a:solidFill>
-                  <a:srgbClr val="000000"/>
-                </a:solidFill>
-                <a:latin typeface="맑은 고딕"/>
-                <a:ea typeface="맑은 고딕"/>
-              </a:rPr>
-              <a:t> </a:t>
-            </a:r>
-            <a:r>
-              <a:rPr lang="ko-KR" altLang="en-US" sz="1300" b="1" dirty="0">
-                <a:solidFill>
-                  <a:srgbClr val="000000"/>
-                </a:solidFill>
-                <a:latin typeface="맑은 고딕"/>
-                <a:ea typeface="맑은 고딕"/>
-              </a:rPr>
-              <a:t>실재</a:t>
-            </a:r>
-            <a:endParaRPr sz="1300" b="1" dirty="0">
-              <a:solidFill>
-                <a:srgbClr val="000000"/>
-              </a:solidFill>
-              <a:latin typeface="맑은 고딕"/>
-              <a:ea typeface="맑은 고딕"/>
-            </a:endParaRPr>
+              <a:t>발견 2 · 공급 공백형 사각지대 실재</a:t>
+            </a:r>
           </a:p>
           <a:p>
             <a:pPr marL="160020" indent="-160020">
@@ -19217,412 +15606,15 @@
               </a:spcAft>
             </a:pPr>
             <a:r>
-              <a:rPr sz="1150" b="0" dirty="0">
+              <a:rPr sz="1150" b="0">
                 <a:solidFill>
                   <a:srgbClr val="1C1C1E"/>
                 </a:solidFill>
                 <a:latin typeface="맑은 고딕"/>
                 <a:ea typeface="맑은 고딕"/>
               </a:rPr>
-              <a:t>• </a:t>
-            </a:r>
-            <a:r>
-              <a:rPr sz="1150" b="0" dirty="0" err="1">
-                <a:solidFill>
-                  <a:srgbClr val="1C1C1E"/>
-                </a:solidFill>
-                <a:latin typeface="맑은 고딕"/>
-                <a:ea typeface="맑은 고딕"/>
-              </a:rPr>
-              <a:t>거리</a:t>
-            </a:r>
-            <a:r>
-              <a:rPr sz="1150" b="0" dirty="0">
-                <a:solidFill>
-                  <a:srgbClr val="1C1C1E"/>
-                </a:solidFill>
-                <a:latin typeface="맑은 고딕"/>
-                <a:ea typeface="맑은 고딕"/>
-              </a:rPr>
-              <a:t> </a:t>
-            </a:r>
-            <a:r>
-              <a:rPr sz="1150" b="0" dirty="0" err="1">
-                <a:solidFill>
-                  <a:srgbClr val="1C1C1E"/>
-                </a:solidFill>
-                <a:latin typeface="맑은 고딕"/>
-                <a:ea typeface="맑은 고딕"/>
-              </a:rPr>
-              <a:t>기준은</a:t>
-            </a:r>
-            <a:r>
-              <a:rPr sz="1150" b="0" dirty="0">
-                <a:solidFill>
-                  <a:srgbClr val="1C1C1E"/>
-                </a:solidFill>
-                <a:latin typeface="맑은 고딕"/>
-                <a:ea typeface="맑은 고딕"/>
-              </a:rPr>
-              <a:t> </a:t>
-            </a:r>
-            <a:r>
-              <a:rPr sz="1150" b="0" dirty="0" err="1">
-                <a:solidFill>
-                  <a:srgbClr val="1C1C1E"/>
-                </a:solidFill>
-                <a:latin typeface="맑은 고딕"/>
-                <a:ea typeface="맑은 고딕"/>
-              </a:rPr>
-              <a:t>통과하지만</a:t>
-            </a:r>
-            <a:r>
-              <a:rPr sz="1150" b="0" dirty="0">
-                <a:solidFill>
-                  <a:srgbClr val="1C1C1E"/>
-                </a:solidFill>
-                <a:latin typeface="맑은 고딕"/>
-                <a:ea typeface="맑은 고딕"/>
-              </a:rPr>
-              <a:t> </a:t>
-            </a:r>
-            <a:r>
-              <a:rPr sz="1150" b="0" dirty="0" err="1">
-                <a:solidFill>
-                  <a:srgbClr val="1C1C1E"/>
-                </a:solidFill>
-                <a:latin typeface="맑은 고딕"/>
-                <a:ea typeface="맑은 고딕"/>
-              </a:rPr>
-              <a:t>관내</a:t>
-            </a:r>
-            <a:r>
-              <a:rPr sz="1150" b="0" dirty="0">
-                <a:solidFill>
-                  <a:srgbClr val="1C1C1E"/>
-                </a:solidFill>
-                <a:latin typeface="맑은 고딕"/>
-                <a:ea typeface="맑은 고딕"/>
-              </a:rPr>
-              <a:t> </a:t>
-            </a:r>
-            <a:r>
-              <a:rPr sz="1150" b="0" dirty="0" err="1">
-                <a:solidFill>
-                  <a:srgbClr val="1C1C1E"/>
-                </a:solidFill>
-                <a:latin typeface="맑은 고딕"/>
-                <a:ea typeface="맑은 고딕"/>
-              </a:rPr>
-              <a:t>공급이</a:t>
-            </a:r>
-            <a:r>
-              <a:rPr sz="1150" b="0" dirty="0">
-                <a:solidFill>
-                  <a:srgbClr val="1C1C1E"/>
-                </a:solidFill>
-                <a:latin typeface="맑은 고딕"/>
-                <a:ea typeface="맑은 고딕"/>
-              </a:rPr>
-              <a:t> </a:t>
-            </a:r>
-            <a:r>
-              <a:rPr sz="1150" b="0" dirty="0" err="1">
-                <a:solidFill>
-                  <a:srgbClr val="1C1C1E"/>
-                </a:solidFill>
-                <a:latin typeface="맑은 고딕"/>
-                <a:ea typeface="맑은 고딕"/>
-              </a:rPr>
-              <a:t>소멸한</a:t>
-            </a:r>
-            <a:r>
-              <a:rPr sz="1150" b="0" dirty="0">
-                <a:solidFill>
-                  <a:srgbClr val="1C1C1E"/>
-                </a:solidFill>
-                <a:latin typeface="맑은 고딕"/>
-                <a:ea typeface="맑은 고딕"/>
-              </a:rPr>
-              <a:t> </a:t>
-            </a:r>
-            <a:r>
-              <a:rPr sz="1150" b="0" dirty="0" err="1">
-                <a:solidFill>
-                  <a:srgbClr val="1C1C1E"/>
-                </a:solidFill>
-                <a:latin typeface="맑은 고딕"/>
-                <a:ea typeface="맑은 고딕"/>
-              </a:rPr>
-              <a:t>지역</a:t>
-            </a:r>
-            <a:r>
-              <a:rPr lang="en-US" sz="1150" b="0" dirty="0">
-                <a:solidFill>
-                  <a:srgbClr val="1C1C1E"/>
-                </a:solidFill>
-                <a:latin typeface="맑은 고딕"/>
-                <a:ea typeface="맑은 고딕"/>
-              </a:rPr>
-              <a:t>(</a:t>
-            </a:r>
-            <a:r>
-              <a:rPr lang="ko-KR" altLang="en-US" sz="1150" b="0" dirty="0">
-                <a:solidFill>
-                  <a:srgbClr val="1C1C1E"/>
-                </a:solidFill>
-                <a:latin typeface="맑은 고딕"/>
-                <a:ea typeface="맑은 고딕"/>
-              </a:rPr>
-              <a:t>가까운 의료시설은 존재하나</a:t>
-            </a:r>
-            <a:r>
-              <a:rPr lang="en-US" altLang="ko-KR" sz="1150" b="0" dirty="0">
-                <a:solidFill>
-                  <a:srgbClr val="1C1C1E"/>
-                </a:solidFill>
-                <a:latin typeface="맑은 고딕"/>
-                <a:ea typeface="맑은 고딕"/>
-              </a:rPr>
-              <a:t>, </a:t>
-            </a:r>
-            <a:r>
-              <a:rPr lang="ko-KR" altLang="en-US" sz="1150" b="0" dirty="0">
-                <a:solidFill>
-                  <a:srgbClr val="1C1C1E"/>
-                </a:solidFill>
-                <a:latin typeface="맑은 고딕"/>
-                <a:ea typeface="맑은 고딕"/>
-              </a:rPr>
-              <a:t>정작 해당 지역 사람들은 </a:t>
-            </a:r>
-            <a:r>
-              <a:rPr lang="ko-KR" altLang="en-US" sz="1150" b="0" dirty="0" err="1">
-                <a:solidFill>
-                  <a:srgbClr val="1C1C1E"/>
-                </a:solidFill>
-                <a:latin typeface="맑은 고딕"/>
-                <a:ea typeface="맑은 고딕"/>
-              </a:rPr>
-              <a:t>타지역</a:t>
-            </a:r>
-            <a:r>
-              <a:rPr lang="ko-KR" altLang="en-US" sz="1150" b="0" dirty="0">
-                <a:solidFill>
-                  <a:srgbClr val="1C1C1E"/>
-                </a:solidFill>
-                <a:latin typeface="맑은 고딕"/>
-                <a:ea typeface="맑은 고딕"/>
-              </a:rPr>
-              <a:t> 의료시설을 이용</a:t>
-            </a:r>
-            <a:r>
-              <a:rPr lang="en-US" altLang="ko-KR" sz="1150" b="0" dirty="0">
-                <a:solidFill>
-                  <a:srgbClr val="1C1C1E"/>
-                </a:solidFill>
-                <a:latin typeface="맑은 고딕"/>
-                <a:ea typeface="맑은 고딕"/>
-              </a:rPr>
-              <a:t>)</a:t>
-            </a:r>
-            <a:r>
-              <a:rPr sz="1150" b="0" dirty="0">
-                <a:solidFill>
-                  <a:srgbClr val="1C1C1E"/>
-                </a:solidFill>
-                <a:latin typeface="맑은 고딕"/>
-                <a:ea typeface="맑은 고딕"/>
-              </a:rPr>
-              <a:t> — </a:t>
-            </a:r>
-            <a:r>
-              <a:rPr sz="1150" b="0" dirty="0" err="1">
-                <a:solidFill>
-                  <a:srgbClr val="1C1C1E"/>
-                </a:solidFill>
-                <a:latin typeface="맑은 고딕"/>
-                <a:ea typeface="맑은 고딕"/>
-              </a:rPr>
-              <a:t>분만</a:t>
-            </a:r>
-            <a:r>
-              <a:rPr sz="1150" b="0" dirty="0">
-                <a:solidFill>
-                  <a:srgbClr val="1C1C1E"/>
-                </a:solidFill>
-                <a:latin typeface="맑은 고딕"/>
-                <a:ea typeface="맑은 고딕"/>
-              </a:rPr>
-              <a:t> </a:t>
-            </a:r>
-            <a:r>
-              <a:rPr sz="1150" b="0" dirty="0" err="1">
-                <a:solidFill>
-                  <a:srgbClr val="1C1C1E"/>
-                </a:solidFill>
-                <a:latin typeface="맑은 고딕"/>
-                <a:ea typeface="맑은 고딕"/>
-              </a:rPr>
-              <a:t>완전</a:t>
-            </a:r>
-            <a:r>
-              <a:rPr sz="1150" b="0" dirty="0">
-                <a:solidFill>
-                  <a:srgbClr val="1C1C1E"/>
-                </a:solidFill>
-                <a:latin typeface="맑은 고딕"/>
-                <a:ea typeface="맑은 고딕"/>
-              </a:rPr>
-              <a:t> </a:t>
-            </a:r>
-            <a:r>
-              <a:rPr sz="1150" b="0" dirty="0" err="1">
-                <a:solidFill>
-                  <a:srgbClr val="1C1C1E"/>
-                </a:solidFill>
-                <a:latin typeface="맑은 고딕"/>
-                <a:ea typeface="맑은 고딕"/>
-              </a:rPr>
-              <a:t>사각</a:t>
-            </a:r>
-            <a:r>
-              <a:rPr sz="1150" b="0" dirty="0">
-                <a:solidFill>
-                  <a:srgbClr val="1C1C1E"/>
-                </a:solidFill>
-                <a:latin typeface="맑은 고딕"/>
-                <a:ea typeface="맑은 고딕"/>
-              </a:rPr>
-              <a:t> 5곳</a:t>
-            </a:r>
-            <a:r>
-              <a:rPr lang="en-US" sz="1150" b="0" dirty="0">
-                <a:solidFill>
-                  <a:srgbClr val="1C1C1E"/>
-                </a:solidFill>
-                <a:latin typeface="맑은 고딕"/>
-                <a:ea typeface="맑은 고딕"/>
-              </a:rPr>
-              <a:t>, </a:t>
-            </a:r>
-            <a:r>
-              <a:rPr sz="1150" b="0" dirty="0" err="1">
-                <a:solidFill>
-                  <a:srgbClr val="1C1C1E"/>
-                </a:solidFill>
-                <a:latin typeface="맑은 고딕"/>
-                <a:ea typeface="맑은 고딕"/>
-              </a:rPr>
-              <a:t>소아과</a:t>
-            </a:r>
-            <a:r>
-              <a:rPr sz="1150" b="0" dirty="0">
-                <a:solidFill>
-                  <a:srgbClr val="1C1C1E"/>
-                </a:solidFill>
-                <a:latin typeface="맑은 고딕"/>
-                <a:ea typeface="맑은 고딕"/>
-              </a:rPr>
-              <a:t> 5개 </a:t>
-            </a:r>
-            <a:r>
-              <a:rPr sz="1150" b="0" dirty="0" err="1">
-                <a:solidFill>
-                  <a:srgbClr val="1C1C1E"/>
-                </a:solidFill>
-                <a:latin typeface="맑은 고딕"/>
-                <a:ea typeface="맑은 고딕"/>
-              </a:rPr>
-              <a:t>지역</a:t>
-            </a:r>
-            <a:r>
-              <a:rPr sz="1150" b="0" dirty="0">
-                <a:solidFill>
-                  <a:srgbClr val="1C1C1E"/>
-                </a:solidFill>
-                <a:latin typeface="맑은 고딕"/>
-                <a:ea typeface="맑은 고딕"/>
-              </a:rPr>
-              <a:t> </a:t>
-            </a:r>
-            <a:r>
-              <a:rPr sz="1150" b="0" dirty="0" err="1">
-                <a:solidFill>
-                  <a:srgbClr val="1C1C1E"/>
-                </a:solidFill>
-                <a:latin typeface="맑은 고딕"/>
-                <a:ea typeface="맑은 고딕"/>
-              </a:rPr>
-              <a:t>입원</a:t>
-            </a:r>
-            <a:r>
-              <a:rPr sz="1150" b="0" dirty="0">
-                <a:solidFill>
-                  <a:srgbClr val="1C1C1E"/>
-                </a:solidFill>
-                <a:latin typeface="맑은 고딕"/>
-                <a:ea typeface="맑은 고딕"/>
-              </a:rPr>
-              <a:t> 5,689건 </a:t>
-            </a:r>
-            <a:r>
-              <a:rPr sz="1150" b="0" dirty="0" err="1">
-                <a:solidFill>
-                  <a:srgbClr val="1C1C1E"/>
-                </a:solidFill>
-                <a:latin typeface="맑은 고딕"/>
-                <a:ea typeface="맑은 고딕"/>
-              </a:rPr>
-              <a:t>전량</a:t>
-            </a:r>
-            <a:r>
-              <a:rPr sz="1150" b="0" dirty="0">
-                <a:solidFill>
-                  <a:srgbClr val="1C1C1E"/>
-                </a:solidFill>
-                <a:latin typeface="맑은 고딕"/>
-                <a:ea typeface="맑은 고딕"/>
-              </a:rPr>
-              <a:t>(100%) </a:t>
-            </a:r>
-            <a:r>
-              <a:rPr sz="1150" b="0" dirty="0" err="1">
-                <a:solidFill>
-                  <a:srgbClr val="1C1C1E"/>
-                </a:solidFill>
-                <a:latin typeface="맑은 고딕"/>
-                <a:ea typeface="맑은 고딕"/>
-              </a:rPr>
-              <a:t>관외</a:t>
-            </a:r>
-            <a:r>
-              <a:rPr sz="1150" b="0" dirty="0">
-                <a:solidFill>
-                  <a:srgbClr val="1C1C1E"/>
-                </a:solidFill>
-                <a:latin typeface="맑은 고딕"/>
-                <a:ea typeface="맑은 고딕"/>
-              </a:rPr>
-              <a:t> </a:t>
-            </a:r>
-            <a:r>
-              <a:rPr sz="1150" b="0" dirty="0" err="1">
-                <a:solidFill>
-                  <a:srgbClr val="1C1C1E"/>
-                </a:solidFill>
-                <a:latin typeface="맑은 고딕"/>
-                <a:ea typeface="맑은 고딕"/>
-              </a:rPr>
-              <a:t>유출</a:t>
-            </a:r>
-            <a:endParaRPr sz="1150" b="0" dirty="0">
-              <a:solidFill>
-                <a:srgbClr val="1C1C1E"/>
-              </a:solidFill>
-              <a:latin typeface="맑은 고딕"/>
-              <a:ea typeface="맑은 고딕"/>
-            </a:endParaRPr>
+              <a:t>• 거리 기준은 통과하지만 관내 공급이 소멸한 지역 — 분만 완전 사각 5곳(등급 체계 밖), 소아과 5개 지역 입원 5,689건 전량(100%) 관외 유출</a:t>
+            </a:r>
           </a:p>
         </p:txBody>
       </p:sp>
@@ -19677,7 +15669,6 @@
           <a:lstStyle/>
           <a:p>
             <a:pPr algn="ctr"/>
-            <a:endParaRPr/>
           </a:p>
         </p:txBody>
       </p:sp>
@@ -19712,122 +15703,15 @@
               </a:spcAft>
             </a:pPr>
             <a:r>
-              <a:rPr sz="1300" b="1" dirty="0" err="1">
+              <a:rPr sz="1300" b="1">
                 <a:solidFill>
                   <a:srgbClr val="000000"/>
                 </a:solidFill>
                 <a:latin typeface="맑은 고딕"/>
                 <a:ea typeface="맑은 고딕"/>
               </a:rPr>
-              <a:t>발견</a:t>
-            </a:r>
-            <a:r>
-              <a:rPr sz="1300" b="1" dirty="0">
-                <a:solidFill>
-                  <a:srgbClr val="000000"/>
-                </a:solidFill>
-                <a:latin typeface="맑은 고딕"/>
-                <a:ea typeface="맑은 고딕"/>
-              </a:rPr>
-              <a:t> 3 · </a:t>
-            </a:r>
-            <a:r>
-              <a:rPr sz="1300" b="1" dirty="0" err="1">
-                <a:solidFill>
-                  <a:srgbClr val="000000"/>
-                </a:solidFill>
-                <a:latin typeface="맑은 고딕"/>
-                <a:ea typeface="맑은 고딕"/>
-              </a:rPr>
-              <a:t>배분</a:t>
-            </a:r>
-            <a:r>
-              <a:rPr sz="1300" b="1" dirty="0">
-                <a:solidFill>
-                  <a:srgbClr val="000000"/>
-                </a:solidFill>
-                <a:latin typeface="맑은 고딕"/>
-                <a:ea typeface="맑은 고딕"/>
-              </a:rPr>
-              <a:t> </a:t>
-            </a:r>
-            <a:r>
-              <a:rPr sz="1300" b="1" dirty="0" err="1">
-                <a:solidFill>
-                  <a:srgbClr val="000000"/>
-                </a:solidFill>
-                <a:latin typeface="맑은 고딕"/>
-                <a:ea typeface="맑은 고딕"/>
-              </a:rPr>
-              <a:t>규칙은</a:t>
-            </a:r>
-            <a:r>
-              <a:rPr sz="1300" b="1" dirty="0">
-                <a:solidFill>
-                  <a:srgbClr val="000000"/>
-                </a:solidFill>
-                <a:latin typeface="맑은 고딕"/>
-                <a:ea typeface="맑은 고딕"/>
-              </a:rPr>
-              <a:t> </a:t>
-            </a:r>
-            <a:r>
-              <a:rPr sz="1300" b="1" dirty="0" err="1">
-                <a:solidFill>
-                  <a:srgbClr val="000000"/>
-                </a:solidFill>
-                <a:latin typeface="맑은 고딕"/>
-                <a:ea typeface="맑은 고딕"/>
-              </a:rPr>
-              <a:t>데이터</a:t>
-            </a:r>
-            <a:r>
-              <a:rPr sz="1300" b="1" dirty="0">
-                <a:solidFill>
-                  <a:srgbClr val="000000"/>
-                </a:solidFill>
-                <a:latin typeface="맑은 고딕"/>
-                <a:ea typeface="맑은 고딕"/>
-              </a:rPr>
-              <a:t> </a:t>
-            </a:r>
-            <a:r>
-              <a:rPr sz="1300" b="1" dirty="0" err="1">
-                <a:solidFill>
-                  <a:srgbClr val="000000"/>
-                </a:solidFill>
-                <a:latin typeface="맑은 고딕"/>
-                <a:ea typeface="맑은 고딕"/>
-              </a:rPr>
-              <a:t>밖에</a:t>
-            </a:r>
-            <a:r>
-              <a:rPr sz="1300" b="1" dirty="0">
-                <a:solidFill>
-                  <a:srgbClr val="000000"/>
-                </a:solidFill>
-                <a:latin typeface="맑은 고딕"/>
-                <a:ea typeface="맑은 고딕"/>
-              </a:rPr>
-              <a:t> </a:t>
-            </a:r>
-            <a:r>
-              <a:rPr sz="1300" b="1" dirty="0" err="1">
-                <a:solidFill>
-                  <a:srgbClr val="000000"/>
-                </a:solidFill>
-                <a:latin typeface="맑은 고딕"/>
-                <a:ea typeface="맑은 고딕"/>
-              </a:rPr>
-              <a:t>있다</a:t>
-            </a:r>
-            <a:endParaRPr sz="1300" b="1" dirty="0">
-              <a:solidFill>
-                <a:srgbClr val="000000"/>
-              </a:solidFill>
-              <a:latin typeface="맑은 고딕"/>
-              <a:ea typeface="맑은 고딕"/>
-            </a:endParaRPr>
+              <a:t>발견 3 · 배분 규칙은 데이터 밖에 있다</a:t>
+            </a:r>
           </a:p>
           <a:p>
             <a:pPr marL="160020" indent="-160020">
@@ -19839,274 +15723,14 @@
               </a:spcAft>
             </a:pPr>
             <a:r>
-              <a:rPr sz="1150" b="0" dirty="0">
+              <a:rPr sz="1150" b="0">
                 <a:solidFill>
                   <a:srgbClr val="1C1C1E"/>
                 </a:solidFill>
                 <a:latin typeface="맑은 고딕"/>
                 <a:ea typeface="맑은 고딕"/>
               </a:rPr>
-              <a:t>• </a:t>
-            </a:r>
-            <a:r>
-              <a:rPr sz="1150" b="0" dirty="0" err="1">
-                <a:solidFill>
-                  <a:srgbClr val="1C1C1E"/>
-                </a:solidFill>
-                <a:latin typeface="맑은 고딕"/>
-                <a:ea typeface="맑은 고딕"/>
-              </a:rPr>
-              <a:t>실질</a:t>
-            </a:r>
-            <a:r>
-              <a:rPr sz="1150" b="0" dirty="0">
-                <a:solidFill>
-                  <a:srgbClr val="1C1C1E"/>
-                </a:solidFill>
-                <a:latin typeface="맑은 고딕"/>
-                <a:ea typeface="맑은 고딕"/>
-              </a:rPr>
-              <a:t> </a:t>
-            </a:r>
-            <a:r>
-              <a:rPr sz="1150" b="0" dirty="0" err="1">
-                <a:solidFill>
-                  <a:srgbClr val="1C1C1E"/>
-                </a:solidFill>
-                <a:latin typeface="맑은 고딕"/>
-                <a:ea typeface="맑은 고딕"/>
-              </a:rPr>
-              <a:t>취약지</a:t>
-            </a:r>
-            <a:r>
-              <a:rPr sz="1150" b="0" dirty="0">
-                <a:solidFill>
-                  <a:srgbClr val="1C1C1E"/>
-                </a:solidFill>
-                <a:latin typeface="맑은 고딕"/>
-                <a:ea typeface="맑은 고딕"/>
-              </a:rPr>
-              <a:t> A·B 53곳 중 21곳만 </a:t>
-            </a:r>
-            <a:r>
-              <a:rPr sz="1150" b="0" dirty="0" err="1">
-                <a:solidFill>
-                  <a:srgbClr val="1C1C1E"/>
-                </a:solidFill>
-                <a:latin typeface="맑은 고딕"/>
-                <a:ea typeface="맑은 고딕"/>
-              </a:rPr>
-              <a:t>기지원</a:t>
-            </a:r>
-            <a:r>
-              <a:rPr sz="1150" b="0" dirty="0">
-                <a:solidFill>
-                  <a:srgbClr val="1C1C1E"/>
-                </a:solidFill>
-                <a:latin typeface="맑은 고딕"/>
-                <a:ea typeface="맑은 고딕"/>
-              </a:rPr>
-              <a:t>. </a:t>
-            </a:r>
-            <a:r>
-              <a:rPr sz="1150" b="0" dirty="0" err="1">
-                <a:solidFill>
-                  <a:srgbClr val="1C1C1E"/>
-                </a:solidFill>
-                <a:latin typeface="맑은 고딕"/>
-                <a:ea typeface="맑은 고딕"/>
-              </a:rPr>
-              <a:t>A등급</a:t>
-            </a:r>
-            <a:r>
-              <a:rPr sz="1150" b="0" dirty="0">
-                <a:solidFill>
-                  <a:srgbClr val="1C1C1E"/>
-                </a:solidFill>
-                <a:latin typeface="맑은 고딕"/>
-                <a:ea typeface="맑은 고딕"/>
-              </a:rPr>
-              <a:t> </a:t>
-            </a:r>
-            <a:r>
-              <a:rPr sz="1150" b="0" dirty="0" err="1">
-                <a:solidFill>
-                  <a:srgbClr val="1C1C1E"/>
-                </a:solidFill>
-                <a:latin typeface="맑은 고딕"/>
-                <a:ea typeface="맑은 고딕"/>
-              </a:rPr>
-              <a:t>지원</a:t>
-            </a:r>
-            <a:r>
-              <a:rPr sz="1150" b="0" dirty="0">
-                <a:solidFill>
-                  <a:srgbClr val="1C1C1E"/>
-                </a:solidFill>
-                <a:latin typeface="맑은 고딕"/>
-                <a:ea typeface="맑은 고딕"/>
-              </a:rPr>
-              <a:t> </a:t>
-            </a:r>
-            <a:r>
-              <a:rPr sz="1150" b="0" dirty="0" err="1">
-                <a:solidFill>
-                  <a:srgbClr val="1C1C1E"/>
-                </a:solidFill>
-                <a:latin typeface="맑은 고딕"/>
-                <a:ea typeface="맑은 고딕"/>
-              </a:rPr>
-              <a:t>오즈는</a:t>
-            </a:r>
-            <a:r>
-              <a:rPr sz="1150" b="0" dirty="0">
-                <a:solidFill>
-                  <a:srgbClr val="1C1C1E"/>
-                </a:solidFill>
-                <a:latin typeface="맑은 고딕"/>
-                <a:ea typeface="맑은 고딕"/>
-              </a:rPr>
-              <a:t> </a:t>
-            </a:r>
-            <a:r>
-              <a:rPr sz="1150" b="0" dirty="0" err="1">
-                <a:solidFill>
-                  <a:srgbClr val="1C1C1E"/>
-                </a:solidFill>
-                <a:latin typeface="맑은 고딕"/>
-                <a:ea typeface="맑은 고딕"/>
-              </a:rPr>
-              <a:t>B의</a:t>
-            </a:r>
-            <a:r>
-              <a:rPr sz="1150" b="0" dirty="0">
-                <a:solidFill>
-                  <a:srgbClr val="1C1C1E"/>
-                </a:solidFill>
-                <a:latin typeface="맑은 고딕"/>
-                <a:ea typeface="맑은 고딕"/>
-              </a:rPr>
-              <a:t> 4.82배(p=0.021)</a:t>
-            </a:r>
-            <a:r>
-              <a:rPr sz="1150" b="0" dirty="0" err="1">
-                <a:solidFill>
-                  <a:srgbClr val="1C1C1E"/>
-                </a:solidFill>
-                <a:latin typeface="맑은 고딕"/>
-                <a:ea typeface="맑은 고딕"/>
-              </a:rPr>
-              <a:t>인데</a:t>
-            </a:r>
-            <a:r>
-              <a:rPr sz="1150" b="0" dirty="0">
-                <a:solidFill>
-                  <a:srgbClr val="1C1C1E"/>
-                </a:solidFill>
-                <a:latin typeface="맑은 고딕"/>
-                <a:ea typeface="맑은 고딕"/>
-              </a:rPr>
-              <a:t>, 그 </a:t>
-            </a:r>
-            <a:r>
-              <a:rPr sz="1150" b="0" dirty="0" err="1">
-                <a:solidFill>
-                  <a:srgbClr val="1C1C1E"/>
-                </a:solidFill>
-                <a:latin typeface="맑은 고딕"/>
-                <a:ea typeface="맑은 고딕"/>
-              </a:rPr>
-              <a:t>선정은</a:t>
-            </a:r>
-            <a:r>
-              <a:rPr sz="1150" b="0" dirty="0">
-                <a:solidFill>
-                  <a:srgbClr val="1C1C1E"/>
-                </a:solidFill>
-                <a:latin typeface="맑은 고딕"/>
-                <a:ea typeface="맑은 고딕"/>
-              </a:rPr>
-              <a:t> </a:t>
-            </a:r>
-            <a:r>
-              <a:rPr sz="1150" b="0" dirty="0" err="1">
-                <a:solidFill>
-                  <a:srgbClr val="1C1C1E"/>
-                </a:solidFill>
-                <a:latin typeface="맑은 고딕"/>
-                <a:ea typeface="맑은 고딕"/>
-              </a:rPr>
-              <a:t>공개</a:t>
-            </a:r>
-            <a:r>
-              <a:rPr sz="1150" b="0" dirty="0">
-                <a:solidFill>
-                  <a:srgbClr val="1C1C1E"/>
-                </a:solidFill>
-                <a:latin typeface="맑은 고딕"/>
-                <a:ea typeface="맑은 고딕"/>
-              </a:rPr>
-              <a:t> </a:t>
-            </a:r>
-            <a:r>
-              <a:rPr sz="1150" b="0" dirty="0" err="1">
-                <a:solidFill>
-                  <a:srgbClr val="1C1C1E"/>
-                </a:solidFill>
-                <a:latin typeface="맑은 고딕"/>
-                <a:ea typeface="맑은 고딕"/>
-              </a:rPr>
-              <a:t>지표로</a:t>
-            </a:r>
-            <a:r>
-              <a:rPr sz="1150" b="0" dirty="0">
-                <a:solidFill>
-                  <a:srgbClr val="1C1C1E"/>
-                </a:solidFill>
-                <a:latin typeface="맑은 고딕"/>
-                <a:ea typeface="맑은 고딕"/>
-              </a:rPr>
-              <a:t> 16% </a:t>
-            </a:r>
-            <a:r>
-              <a:rPr sz="1150" b="0" dirty="0" err="1">
-                <a:solidFill>
-                  <a:srgbClr val="1C1C1E"/>
-                </a:solidFill>
-                <a:latin typeface="맑은 고딕"/>
-                <a:ea typeface="맑은 고딕"/>
-              </a:rPr>
-              <a:t>남짓만</a:t>
-            </a:r>
-            <a:r>
-              <a:rPr sz="1150" b="0" dirty="0">
-                <a:solidFill>
-                  <a:srgbClr val="1C1C1E"/>
-                </a:solidFill>
-                <a:latin typeface="맑은 고딕"/>
-                <a:ea typeface="맑은 고딕"/>
-              </a:rPr>
-              <a:t> </a:t>
-            </a:r>
-            <a:r>
-              <a:rPr sz="1150" b="0" dirty="0" err="1">
-                <a:solidFill>
-                  <a:srgbClr val="1C1C1E"/>
-                </a:solidFill>
-                <a:latin typeface="맑은 고딕"/>
-                <a:ea typeface="맑은 고딕"/>
-              </a:rPr>
-              <a:t>설명된다</a:t>
-            </a:r>
-            <a:r>
-              <a:rPr sz="1150" b="0" dirty="0">
-                <a:solidFill>
-                  <a:srgbClr val="1C1C1E"/>
-                </a:solidFill>
-                <a:latin typeface="맑은 고딕"/>
-                <a:ea typeface="맑은 고딕"/>
-              </a:rPr>
-              <a:t>(McFadden R² 0.163)</a:t>
+              <a:t>• 실질 취약지 A·B 53곳 중 21곳만 기지원. A등급 지원 오즈는 B의 4.82배(p=0.021)인데, 그 선정은 공개 지표로 16% 남짓만 설명된다(McFadden R² 0.163)</a:t>
             </a:r>
           </a:p>
         </p:txBody>
@@ -20162,7 +15786,6 @@
           <a:lstStyle/>
           <a:p>
             <a:pPr algn="ctr"/>
-            <a:endParaRPr/>
           </a:p>
         </p:txBody>
       </p:sp>
@@ -20197,122 +15820,15 @@
               </a:spcAft>
             </a:pPr>
             <a:r>
-              <a:rPr sz="1300" b="1" dirty="0" err="1">
+              <a:rPr sz="1300" b="1">
                 <a:solidFill>
                   <a:srgbClr val="33393F"/>
                 </a:solidFill>
                 <a:latin typeface="맑은 고딕"/>
                 <a:ea typeface="맑은 고딕"/>
               </a:rPr>
-              <a:t>발견</a:t>
-            </a:r>
-            <a:r>
-              <a:rPr sz="1300" b="1" dirty="0">
-                <a:solidFill>
-                  <a:srgbClr val="33393F"/>
-                </a:solidFill>
-                <a:latin typeface="맑은 고딕"/>
-                <a:ea typeface="맑은 고딕"/>
-              </a:rPr>
-              <a:t> 4 · </a:t>
-            </a:r>
-            <a:r>
-              <a:rPr sz="1300" b="1" dirty="0" err="1">
-                <a:solidFill>
-                  <a:srgbClr val="33393F"/>
-                </a:solidFill>
-                <a:latin typeface="맑은 고딕"/>
-                <a:ea typeface="맑은 고딕"/>
-              </a:rPr>
-              <a:t>깊이는</a:t>
-            </a:r>
-            <a:r>
-              <a:rPr sz="1300" b="1" dirty="0">
-                <a:solidFill>
-                  <a:srgbClr val="33393F"/>
-                </a:solidFill>
-                <a:latin typeface="맑은 고딕"/>
-                <a:ea typeface="맑은 고딕"/>
-              </a:rPr>
-              <a:t> </a:t>
-            </a:r>
-            <a:r>
-              <a:rPr sz="1300" b="1" dirty="0" err="1">
-                <a:solidFill>
-                  <a:srgbClr val="33393F"/>
-                </a:solidFill>
-                <a:latin typeface="맑은 고딕"/>
-                <a:ea typeface="맑은 고딕"/>
-              </a:rPr>
-              <a:t>보지만</a:t>
-            </a:r>
-            <a:r>
-              <a:rPr sz="1300" b="1" dirty="0">
-                <a:solidFill>
-                  <a:srgbClr val="33393F"/>
-                </a:solidFill>
-                <a:latin typeface="맑은 고딕"/>
-                <a:ea typeface="맑은 고딕"/>
-              </a:rPr>
-              <a:t> </a:t>
-            </a:r>
-            <a:r>
-              <a:rPr sz="1300" b="1" dirty="0" err="1">
-                <a:solidFill>
-                  <a:srgbClr val="33393F"/>
-                </a:solidFill>
-                <a:latin typeface="맑은 고딕"/>
-                <a:ea typeface="맑은 고딕"/>
-              </a:rPr>
-              <a:t>인원</a:t>
-            </a:r>
-            <a:r>
-              <a:rPr sz="1300" b="1" dirty="0">
-                <a:solidFill>
-                  <a:srgbClr val="33393F"/>
-                </a:solidFill>
-                <a:latin typeface="맑은 고딕"/>
-                <a:ea typeface="맑은 고딕"/>
-              </a:rPr>
-              <a:t> </a:t>
-            </a:r>
-            <a:r>
-              <a:rPr sz="1300" b="1" dirty="0" err="1">
-                <a:solidFill>
-                  <a:srgbClr val="33393F"/>
-                </a:solidFill>
-                <a:latin typeface="맑은 고딕"/>
-                <a:ea typeface="맑은 고딕"/>
-              </a:rPr>
-              <a:t>수는</a:t>
-            </a:r>
-            <a:r>
-              <a:rPr sz="1300" b="1" dirty="0">
-                <a:solidFill>
-                  <a:srgbClr val="33393F"/>
-                </a:solidFill>
-                <a:latin typeface="맑은 고딕"/>
-                <a:ea typeface="맑은 고딕"/>
-              </a:rPr>
-              <a:t> 안 </a:t>
-            </a:r>
-            <a:r>
-              <a:rPr sz="1300" b="1" dirty="0" err="1">
-                <a:solidFill>
-                  <a:srgbClr val="33393F"/>
-                </a:solidFill>
-                <a:latin typeface="맑은 고딕"/>
-                <a:ea typeface="맑은 고딕"/>
-              </a:rPr>
-              <a:t>본다</a:t>
-            </a:r>
-            <a:endParaRPr sz="1300" b="1" dirty="0">
-              <a:solidFill>
-                <a:srgbClr val="33393F"/>
-              </a:solidFill>
-              <a:latin typeface="맑은 고딕"/>
-              <a:ea typeface="맑은 고딕"/>
-            </a:endParaRPr>
+              <a:t>발견 4 · 깊이는 보지만 인원 수는 안 본다</a:t>
+            </a:r>
           </a:p>
           <a:p>
             <a:pPr marL="160020" indent="-160020">
@@ -20324,372 +15840,15 @@
               </a:spcAft>
             </a:pPr>
             <a:r>
-              <a:rPr sz="1150" b="0" dirty="0">
+              <a:rPr sz="1150" b="0">
                 <a:solidFill>
                   <a:srgbClr val="1C1C1E"/>
                 </a:solidFill>
                 <a:latin typeface="맑은 고딕"/>
                 <a:ea typeface="맑은 고딕"/>
               </a:rPr>
-              <a:t>• </a:t>
-            </a:r>
-            <a:r>
-              <a:rPr sz="1150" b="0" dirty="0" err="1">
-                <a:solidFill>
-                  <a:srgbClr val="1C1C1E"/>
-                </a:solidFill>
-                <a:latin typeface="맑은 고딕"/>
-                <a:ea typeface="맑은 고딕"/>
-              </a:rPr>
-              <a:t>현행</a:t>
-            </a:r>
-            <a:r>
-              <a:rPr sz="1150" b="0" dirty="0">
-                <a:solidFill>
-                  <a:srgbClr val="1C1C1E"/>
-                </a:solidFill>
-                <a:latin typeface="맑은 고딕"/>
-                <a:ea typeface="맑은 고딕"/>
-              </a:rPr>
-              <a:t> </a:t>
-            </a:r>
-            <a:r>
-              <a:rPr sz="1150" b="0" dirty="0" err="1">
-                <a:solidFill>
-                  <a:srgbClr val="1C1C1E"/>
-                </a:solidFill>
-                <a:latin typeface="맑은 고딕"/>
-                <a:ea typeface="맑은 고딕"/>
-              </a:rPr>
-              <a:t>배분은</a:t>
-            </a:r>
-            <a:r>
-              <a:rPr sz="1150" b="0" dirty="0">
-                <a:solidFill>
-                  <a:srgbClr val="1C1C1E"/>
-                </a:solidFill>
-                <a:latin typeface="맑은 고딕"/>
-                <a:ea typeface="맑은 고딕"/>
-              </a:rPr>
-              <a:t> </a:t>
-            </a:r>
-            <a:r>
-              <a:rPr sz="1150" b="0" dirty="0" err="1">
-                <a:solidFill>
-                  <a:srgbClr val="1C1C1E"/>
-                </a:solidFill>
-                <a:latin typeface="맑은 고딕"/>
-                <a:ea typeface="맑은 고딕"/>
-              </a:rPr>
-              <a:t>취약</a:t>
-            </a:r>
-            <a:r>
-              <a:rPr sz="1150" b="0" dirty="0">
-                <a:solidFill>
-                  <a:srgbClr val="1C1C1E"/>
-                </a:solidFill>
-                <a:latin typeface="맑은 고딕"/>
-                <a:ea typeface="맑은 고딕"/>
-              </a:rPr>
-              <a:t> </a:t>
-            </a:r>
-            <a:r>
-              <a:rPr sz="1150" b="0" dirty="0" err="1">
-                <a:solidFill>
-                  <a:srgbClr val="1C1C1E"/>
-                </a:solidFill>
-                <a:latin typeface="맑은 고딕"/>
-                <a:ea typeface="맑은 고딕"/>
-              </a:rPr>
-              <a:t>심도와는</a:t>
-            </a:r>
-            <a:r>
-              <a:rPr sz="1150" b="0" dirty="0">
-                <a:solidFill>
-                  <a:srgbClr val="1C1C1E"/>
-                </a:solidFill>
-                <a:latin typeface="맑은 고딕"/>
-                <a:ea typeface="맑은 고딕"/>
-              </a:rPr>
-              <a:t> </a:t>
-            </a:r>
-            <a:r>
-              <a:rPr sz="1150" b="0" dirty="0" err="1">
-                <a:solidFill>
-                  <a:srgbClr val="1C1C1E"/>
-                </a:solidFill>
-                <a:latin typeface="맑은 고딕"/>
-                <a:ea typeface="맑은 고딕"/>
-              </a:rPr>
-              <a:t>정렬</a:t>
-            </a:r>
-            <a:r>
-              <a:rPr sz="1150" b="0" dirty="0">
-                <a:solidFill>
-                  <a:srgbClr val="1C1C1E"/>
-                </a:solidFill>
-                <a:latin typeface="맑은 고딕"/>
-                <a:ea typeface="맑은 고딕"/>
-              </a:rPr>
-              <a:t>(ρ=+0.381), </a:t>
-            </a:r>
-            <a:r>
-              <a:rPr sz="1150" b="0" dirty="0" err="1">
-                <a:solidFill>
-                  <a:srgbClr val="1C1C1E"/>
-                </a:solidFill>
-                <a:latin typeface="맑은 고딕"/>
-                <a:ea typeface="맑은 고딕"/>
-              </a:rPr>
-              <a:t>영향</a:t>
-            </a:r>
-            <a:r>
-              <a:rPr sz="1150" b="0" dirty="0">
-                <a:solidFill>
-                  <a:srgbClr val="1C1C1E"/>
-                </a:solidFill>
-                <a:latin typeface="맑은 고딕"/>
-                <a:ea typeface="맑은 고딕"/>
-              </a:rPr>
-              <a:t> </a:t>
-            </a:r>
-            <a:r>
-              <a:rPr sz="1150" b="0" dirty="0" err="1">
-                <a:solidFill>
-                  <a:srgbClr val="1C1C1E"/>
-                </a:solidFill>
-                <a:latin typeface="맑은 고딕"/>
-                <a:ea typeface="맑은 고딕"/>
-              </a:rPr>
-              <a:t>인원</a:t>
-            </a:r>
-            <a:r>
-              <a:rPr sz="1150" b="0" dirty="0">
-                <a:solidFill>
-                  <a:srgbClr val="1C1C1E"/>
-                </a:solidFill>
-                <a:latin typeface="맑은 고딕"/>
-                <a:ea typeface="맑은 고딕"/>
-              </a:rPr>
-              <a:t> </a:t>
-            </a:r>
-            <a:r>
-              <a:rPr sz="1150" b="0" dirty="0" err="1">
-                <a:solidFill>
-                  <a:srgbClr val="1C1C1E"/>
-                </a:solidFill>
-                <a:latin typeface="맑은 고딕"/>
-                <a:ea typeface="맑은 고딕"/>
-              </a:rPr>
-              <a:t>규모</a:t>
-            </a:r>
-            <a:r>
-              <a:rPr sz="1150" b="0" dirty="0">
-                <a:solidFill>
-                  <a:srgbClr val="1C1C1E"/>
-                </a:solidFill>
-                <a:latin typeface="맑은 고딕"/>
-                <a:ea typeface="맑은 고딕"/>
-              </a:rPr>
-              <a:t>(</a:t>
-            </a:r>
-            <a:r>
-              <a:rPr sz="1150" b="0" dirty="0" err="1">
-                <a:solidFill>
-                  <a:srgbClr val="1C1C1E"/>
-                </a:solidFill>
-                <a:latin typeface="맑은 고딕"/>
-                <a:ea typeface="맑은 고딕"/>
-              </a:rPr>
-              <a:t>부담</a:t>
-            </a:r>
-            <a:r>
-              <a:rPr sz="1150" b="0" dirty="0">
-                <a:solidFill>
-                  <a:srgbClr val="1C1C1E"/>
-                </a:solidFill>
-                <a:latin typeface="맑은 고딕"/>
-                <a:ea typeface="맑은 고딕"/>
-              </a:rPr>
-              <a:t>)</a:t>
-            </a:r>
-            <a:r>
-              <a:rPr sz="1150" b="0" dirty="0" err="1">
-                <a:solidFill>
-                  <a:srgbClr val="1C1C1E"/>
-                </a:solidFill>
-                <a:latin typeface="맑은 고딕"/>
-                <a:ea typeface="맑은 고딕"/>
-              </a:rPr>
-              <a:t>와는</a:t>
-            </a:r>
-            <a:r>
-              <a:rPr sz="1150" b="0" dirty="0">
-                <a:solidFill>
-                  <a:srgbClr val="1C1C1E"/>
-                </a:solidFill>
-                <a:latin typeface="맑은 고딕"/>
-                <a:ea typeface="맑은 고딕"/>
-              </a:rPr>
-              <a:t> </a:t>
-            </a:r>
-            <a:r>
-              <a:rPr sz="1150" b="0" dirty="0" err="1">
-                <a:solidFill>
-                  <a:srgbClr val="1C1C1E"/>
-                </a:solidFill>
-                <a:latin typeface="맑은 고딕"/>
-                <a:ea typeface="맑은 고딕"/>
-              </a:rPr>
-              <a:t>무관</a:t>
-            </a:r>
-            <a:r>
-              <a:rPr sz="1150" b="0" dirty="0">
-                <a:solidFill>
-                  <a:srgbClr val="1C1C1E"/>
-                </a:solidFill>
-                <a:latin typeface="맑은 고딕"/>
-                <a:ea typeface="맑은 고딕"/>
-              </a:rPr>
-              <a:t>(ρ=−0.131). 두 </a:t>
-            </a:r>
-            <a:r>
-              <a:rPr sz="1150" b="0" dirty="0" err="1">
-                <a:solidFill>
-                  <a:srgbClr val="1C1C1E"/>
-                </a:solidFill>
-                <a:latin typeface="맑은 고딕"/>
-                <a:ea typeface="맑은 고딕"/>
-              </a:rPr>
-              <a:t>관점의</a:t>
-            </a:r>
-            <a:r>
-              <a:rPr sz="1150" b="0" dirty="0">
-                <a:solidFill>
-                  <a:srgbClr val="1C1C1E"/>
-                </a:solidFill>
-                <a:latin typeface="맑은 고딕"/>
-                <a:ea typeface="맑은 고딕"/>
-              </a:rPr>
-              <a:t> </a:t>
-            </a:r>
-            <a:r>
-              <a:rPr sz="1150" b="0" dirty="0" err="1">
-                <a:solidFill>
-                  <a:srgbClr val="1C1C1E"/>
-                </a:solidFill>
-                <a:latin typeface="맑은 고딕"/>
-                <a:ea typeface="맑은 고딕"/>
-              </a:rPr>
-              <a:t>순위</a:t>
-            </a:r>
-            <a:r>
-              <a:rPr sz="1150" b="0" dirty="0">
-                <a:solidFill>
-                  <a:srgbClr val="1C1C1E"/>
-                </a:solidFill>
-                <a:latin typeface="맑은 고딕"/>
-                <a:ea typeface="맑은 고딕"/>
-              </a:rPr>
-              <a:t> </a:t>
-            </a:r>
-            <a:r>
-              <a:rPr sz="1150" b="0" dirty="0" err="1">
-                <a:solidFill>
-                  <a:srgbClr val="1C1C1E"/>
-                </a:solidFill>
-                <a:latin typeface="맑은 고딕"/>
-                <a:ea typeface="맑은 고딕"/>
-              </a:rPr>
-              <a:t>상관은</a:t>
-            </a:r>
-            <a:r>
-              <a:rPr sz="1150" b="0" dirty="0">
-                <a:solidFill>
-                  <a:srgbClr val="1C1C1E"/>
-                </a:solidFill>
-                <a:latin typeface="맑은 고딕"/>
-                <a:ea typeface="맑은 고딕"/>
-              </a:rPr>
-              <a:t> −0.190 — </a:t>
-            </a:r>
-            <a:r>
-              <a:rPr sz="1150" b="0" dirty="0" err="1">
-                <a:solidFill>
-                  <a:srgbClr val="1C1C1E"/>
-                </a:solidFill>
-                <a:latin typeface="맑은 고딕"/>
-                <a:ea typeface="맑은 고딕"/>
-              </a:rPr>
-              <a:t>축의</a:t>
-            </a:r>
-            <a:r>
-              <a:rPr sz="1150" b="0" dirty="0">
-                <a:solidFill>
-                  <a:srgbClr val="1C1C1E"/>
-                </a:solidFill>
-                <a:latin typeface="맑은 고딕"/>
-                <a:ea typeface="맑은 고딕"/>
-              </a:rPr>
-              <a:t> </a:t>
-            </a:r>
-            <a:r>
-              <a:rPr sz="1150" b="0" dirty="0" err="1">
-                <a:solidFill>
-                  <a:srgbClr val="1C1C1E"/>
-                </a:solidFill>
-                <a:latin typeface="맑은 고딕"/>
-                <a:ea typeface="맑은 고딕"/>
-              </a:rPr>
-              <a:t>선택이</a:t>
-            </a:r>
-            <a:r>
-              <a:rPr sz="1150" b="0" dirty="0">
-                <a:solidFill>
-                  <a:srgbClr val="1C1C1E"/>
-                </a:solidFill>
-                <a:latin typeface="맑은 고딕"/>
-                <a:ea typeface="맑은 고딕"/>
-              </a:rPr>
-              <a:t> </a:t>
-            </a:r>
-            <a:r>
-              <a:rPr sz="1150" b="0" dirty="0" err="1">
-                <a:solidFill>
-                  <a:srgbClr val="1C1C1E"/>
-                </a:solidFill>
-                <a:latin typeface="맑은 고딕"/>
-                <a:ea typeface="맑은 고딕"/>
-              </a:rPr>
-              <a:t>결과를</a:t>
-            </a:r>
-            <a:r>
-              <a:rPr sz="1150" b="0" dirty="0">
-                <a:solidFill>
-                  <a:srgbClr val="1C1C1E"/>
-                </a:solidFill>
-                <a:latin typeface="맑은 고딕"/>
-                <a:ea typeface="맑은 고딕"/>
-              </a:rPr>
-              <a:t> </a:t>
-            </a:r>
-            <a:r>
-              <a:rPr sz="1150" b="0" dirty="0" err="1">
-                <a:solidFill>
-                  <a:srgbClr val="1C1C1E"/>
-                </a:solidFill>
-                <a:latin typeface="맑은 고딕"/>
-                <a:ea typeface="맑은 고딕"/>
-              </a:rPr>
-              <a:t>바꾼다</a:t>
-            </a:r>
-            <a:endParaRPr sz="1150" b="0" dirty="0">
-              <a:solidFill>
-                <a:srgbClr val="1C1C1E"/>
-              </a:solidFill>
-              <a:latin typeface="맑은 고딕"/>
-              <a:ea typeface="맑은 고딕"/>
-            </a:endParaRPr>
+              <a:t>• 현행 배분은 취약 심도와는 정렬(ρ=+0.381), 영향 인원 규모(부담)와는 무관(ρ=−0.131). 두 관점의 순위 상관은 −0.190 — 축의 선택이 결과를 바꾼다</a:t>
+            </a:r>
           </a:p>
         </p:txBody>
       </p:sp>
@@ -20745,7 +15904,7 @@
 </file>
 
 <file path=ppt/slides/slide5.xml><?xml version="1.0" encoding="utf-8"?>
-<p:sld xmlns:a="http://schemas.openxmlformats.org/drawingml/2006/main" xmlns:r="http://schemas.openxmlformats.org/officeDocument/2006/relationships" xmlns:p="http://schemas.openxmlformats.org/presentationml/2006/main">
+<p:sld xmlns:a="http://schemas.openxmlformats.org/drawingml/2006/main" xmlns:p="http://schemas.openxmlformats.org/presentationml/2006/main" xmlns:r="http://schemas.openxmlformats.org/officeDocument/2006/relationships">
   <p:cSld>
     <p:spTree>
       <p:nvGrpSpPr>
@@ -20753,14 +15912,7 @@
         <p:cNvGrpSpPr/>
         <p:nvPr/>
       </p:nvGrpSpPr>
-      <p:grpSpPr>
-        <a:xfrm>
-          <a:off x="0" y="0"/>
-          <a:ext cx="0" cy="0"/>
-          <a:chOff x="0" y="0"/>
-          <a:chExt cx="0" cy="0"/>
-        </a:xfrm>
-      </p:grpSpPr>
+      <p:grpSpPr/>
       <p:sp>
         <p:nvSpPr>
           <p:cNvPr id="2" name="Rectangle 1"/>
@@ -20802,7 +15954,6 @@
           <a:lstStyle/>
           <a:p>
             <a:pPr algn="ctr"/>
-            <a:endParaRPr/>
           </a:p>
         </p:txBody>
       </p:sp>
@@ -20831,7 +15982,7 @@
                 <a:srgbClr val="73787E"/>
               </a:gs>
             </a:gsLst>
-            <a:lin ang="18900000" scaled="0"/>
+            <a:lin scaled="0" ang="18900000"/>
           </a:gradFill>
           <a:ln>
             <a:noFill/>
@@ -20863,7 +16014,6 @@
           <a:lstStyle/>
           <a:p>
             <a:pPr algn="ctr"/>
-            <a:endParaRPr/>
           </a:p>
         </p:txBody>
       </p:sp>
@@ -20933,7 +16083,7 @@
                 <a:srgbClr val="FFFFFF"/>
               </a:gs>
             </a:gsLst>
-            <a:lin ang="0" scaled="0"/>
+            <a:lin scaled="0" ang="0"/>
           </a:gradFill>
           <a:ln>
             <a:noFill/>
@@ -20959,7 +16109,6 @@
           <a:lstStyle/>
           <a:p>
             <a:pPr algn="ctr"/>
-            <a:endParaRPr/>
           </a:p>
         </p:txBody>
       </p:sp>
@@ -21143,7 +16292,6 @@
           <a:lstStyle/>
           <a:p>
             <a:pPr algn="ctr"/>
-            <a:endParaRPr/>
           </a:p>
         </p:txBody>
       </p:sp>
@@ -21324,7 +16472,6 @@
           <a:lstStyle/>
           <a:p>
             <a:pPr algn="ctr"/>
-            <a:endParaRPr/>
           </a:p>
         </p:txBody>
       </p:sp>
@@ -21505,7 +16652,6 @@
           <a:lstStyle/>
           <a:p>
             <a:pPr algn="ctr"/>
-            <a:endParaRPr/>
           </a:p>
         </p:txBody>
       </p:sp>
@@ -21617,7 +16763,7 @@
                 <a:srgbClr val="4A4F55"/>
               </a:gs>
             </a:gsLst>
-            <a:lin ang="14700000" scaled="0"/>
+            <a:lin scaled="0" ang="14700000"/>
           </a:gradFill>
           <a:ln>
             <a:noFill/>
@@ -21649,7 +16795,6 @@
           <a:lstStyle/>
           <a:p>
             <a:pPr algn="ctr"/>
-            <a:endParaRPr/>
           </a:p>
         </p:txBody>
       </p:sp>
@@ -21747,7 +16892,6 @@
           <a:lstStyle/>
           <a:p>
             <a:pPr algn="ctr"/>
-            <a:endParaRPr/>
           </a:p>
         </p:txBody>
       </p:sp>
@@ -21845,7 +16989,6 @@
           <a:lstStyle/>
           <a:p>
             <a:pPr algn="ctr"/>
-            <a:endParaRPr/>
           </a:p>
         </p:txBody>
       </p:sp>
@@ -21917,7 +17060,7 @@
                 <a:srgbClr val="4A4F55"/>
               </a:gs>
             </a:gsLst>
-            <a:lin ang="14700000" scaled="0"/>
+            <a:lin scaled="0" ang="14700000"/>
           </a:gradFill>
           <a:ln>
             <a:noFill/>
@@ -21949,7 +17092,6 @@
           <a:lstStyle/>
           <a:p>
             <a:pPr algn="ctr"/>
-            <a:endParaRPr/>
           </a:p>
         </p:txBody>
       </p:sp>
@@ -22047,7 +17189,6 @@
           <a:lstStyle/>
           <a:p>
             <a:pPr algn="ctr"/>
-            <a:endParaRPr/>
           </a:p>
         </p:txBody>
       </p:sp>
@@ -22145,7 +17286,6 @@
           <a:lstStyle/>
           <a:p>
             <a:pPr algn="ctr"/>
-            <a:endParaRPr/>
           </a:p>
         </p:txBody>
       </p:sp>
@@ -22217,7 +17357,7 @@
                 <a:srgbClr val="4A4F55"/>
               </a:gs>
             </a:gsLst>
-            <a:lin ang="14700000" scaled="0"/>
+            <a:lin scaled="0" ang="14700000"/>
           </a:gradFill>
           <a:ln>
             <a:noFill/>
@@ -22249,7 +17389,6 @@
           <a:lstStyle/>
           <a:p>
             <a:pPr algn="ctr"/>
-            <a:endParaRPr/>
           </a:p>
         </p:txBody>
       </p:sp>
@@ -22347,7 +17486,6 @@
           <a:lstStyle/>
           <a:p>
             <a:pPr algn="ctr"/>
-            <a:endParaRPr/>
           </a:p>
         </p:txBody>
       </p:sp>
@@ -22445,7 +17583,6 @@
           <a:lstStyle/>
           <a:p>
             <a:pPr algn="ctr"/>
-            <a:endParaRPr/>
           </a:p>
         </p:txBody>
       </p:sp>
@@ -22517,7 +17654,7 @@
                 <a:srgbClr val="4A4F55"/>
               </a:gs>
             </a:gsLst>
-            <a:lin ang="14700000" scaled="0"/>
+            <a:lin scaled="0" ang="14700000"/>
           </a:gradFill>
           <a:ln>
             <a:noFill/>
@@ -22549,7 +17686,6 @@
           <a:lstStyle/>
           <a:p>
             <a:pPr algn="ctr"/>
-            <a:endParaRPr/>
           </a:p>
         </p:txBody>
       </p:sp>
@@ -22647,7 +17783,6 @@
           <a:lstStyle/>
           <a:p>
             <a:pPr algn="ctr"/>
-            <a:endParaRPr/>
           </a:p>
         </p:txBody>
       </p:sp>
@@ -22745,7 +17880,6 @@
           <a:lstStyle/>
           <a:p>
             <a:pPr algn="ctr"/>
-            <a:endParaRPr/>
           </a:p>
         </p:txBody>
       </p:sp>
@@ -22844,7 +17978,7 @@
 </file>
 
 <file path=ppt/slides/slide6.xml><?xml version="1.0" encoding="utf-8"?>
-<p:sld xmlns:a="http://schemas.openxmlformats.org/drawingml/2006/main" xmlns:r="http://schemas.openxmlformats.org/officeDocument/2006/relationships" xmlns:p="http://schemas.openxmlformats.org/presentationml/2006/main">
+<p:sld xmlns:a="http://schemas.openxmlformats.org/drawingml/2006/main" xmlns:p="http://schemas.openxmlformats.org/presentationml/2006/main" xmlns:r="http://schemas.openxmlformats.org/officeDocument/2006/relationships">
   <p:cSld>
     <p:spTree>
       <p:nvGrpSpPr>
@@ -22852,14 +17986,7 @@
         <p:cNvGrpSpPr/>
         <p:nvPr/>
       </p:nvGrpSpPr>
-      <p:grpSpPr>
-        <a:xfrm>
-          <a:off x="0" y="0"/>
-          <a:ext cx="0" cy="0"/>
-          <a:chOff x="0" y="0"/>
-          <a:chExt cx="0" cy="0"/>
-        </a:xfrm>
-      </p:grpSpPr>
+      <p:grpSpPr/>
       <p:sp>
         <p:nvSpPr>
           <p:cNvPr id="2" name="Rectangle 1"/>
@@ -22901,7 +18028,6 @@
           <a:lstStyle/>
           <a:p>
             <a:pPr algn="ctr"/>
-            <a:endParaRPr/>
           </a:p>
         </p:txBody>
       </p:sp>
@@ -22930,7 +18056,7 @@
                 <a:srgbClr val="73787E"/>
               </a:gs>
             </a:gsLst>
-            <a:lin ang="18900000" scaled="0"/>
+            <a:lin scaled="0" ang="18900000"/>
           </a:gradFill>
           <a:ln>
             <a:noFill/>
@@ -22962,7 +18088,6 @@
           <a:lstStyle/>
           <a:p>
             <a:pPr algn="ctr"/>
-            <a:endParaRPr/>
           </a:p>
         </p:txBody>
       </p:sp>
@@ -23032,7 +18157,7 @@
                 <a:srgbClr val="FFFFFF"/>
               </a:gs>
             </a:gsLst>
-            <a:lin ang="0" scaled="0"/>
+            <a:lin scaled="0" ang="0"/>
           </a:gradFill>
           <a:ln>
             <a:noFill/>
@@ -23058,7 +18183,6 @@
           <a:lstStyle/>
           <a:p>
             <a:pPr algn="ctr"/>
-            <a:endParaRPr/>
           </a:p>
         </p:txBody>
       </p:sp>
@@ -23167,27 +18291,9 @@
                 <a:tableStyleId>{5C22544A-7EE6-4342-B048-85BDC9FD1C3A}</a:tableStyleId>
               </a:tblPr>
               <a:tblGrid>
-                <a:gridCol w="2834640">
-                  <a:extLst>
-                    <a:ext uri="{9D8B030D-6E8A-4147-A177-3AD203B41FA5}">
-                      <a16:colId xmlns:a16="http://schemas.microsoft.com/office/drawing/2014/main" val="20000"/>
-                    </a:ext>
-                  </a:extLst>
-                </a:gridCol>
-                <a:gridCol w="6675120">
-                  <a:extLst>
-                    <a:ext uri="{9D8B030D-6E8A-4147-A177-3AD203B41FA5}">
-                      <a16:colId xmlns:a16="http://schemas.microsoft.com/office/drawing/2014/main" val="20001"/>
-                    </a:ext>
-                  </a:extLst>
-                </a:gridCol>
-                <a:gridCol w="1783080">
-                  <a:extLst>
-                    <a:ext uri="{9D8B030D-6E8A-4147-A177-3AD203B41FA5}">
-                      <a16:colId xmlns:a16="http://schemas.microsoft.com/office/drawing/2014/main" val="20002"/>
-                    </a:ext>
-                  </a:extLst>
-                </a:gridCol>
+                <a:gridCol w="2834640"/>
+                <a:gridCol w="6675120"/>
+                <a:gridCol w="1783080"/>
               </a:tblGrid>
               <a:tr h="457200">
                 <a:tc>
@@ -23212,7 +18318,7 @@
                       </a:r>
                     </a:p>
                   </a:txBody>
-                  <a:tcPr marL="73152" marR="73152" marT="27432" marB="27432" anchor="ctr">
+                  <a:tcPr marT="27432" marB="27432" marL="73152" marR="73152" anchor="ctr">
                     <a:solidFill>
                       <a:srgbClr val="33393F"/>
                     </a:solidFill>
@@ -23240,7 +18346,7 @@
                       </a:r>
                     </a:p>
                   </a:txBody>
-                  <a:tcPr marL="73152" marR="73152" marT="27432" marB="27432" anchor="ctr">
+                  <a:tcPr marT="27432" marB="27432" marL="73152" marR="73152" anchor="ctr">
                     <a:solidFill>
                       <a:srgbClr val="33393F"/>
                     </a:solidFill>
@@ -23268,17 +18374,12 @@
                       </a:r>
                     </a:p>
                   </a:txBody>
-                  <a:tcPr marL="73152" marR="73152" marT="27432" marB="27432" anchor="ctr">
+                  <a:tcPr marT="27432" marB="27432" marL="73152" marR="73152" anchor="ctr">
                     <a:solidFill>
                       <a:srgbClr val="33393F"/>
                     </a:solidFill>
                   </a:tcPr>
                 </a:tc>
-                <a:extLst>
-                  <a:ext uri="{0D108BD9-81ED-4DB2-BD59-A6C34878D82A}">
-                    <a16:rowId xmlns:a16="http://schemas.microsoft.com/office/drawing/2014/main" val="10000"/>
-                  </a:ext>
-                </a:extLst>
               </a:tr>
               <a:tr h="457200">
                 <a:tc>
@@ -23303,7 +18404,7 @@
                       </a:r>
                     </a:p>
                   </a:txBody>
-                  <a:tcPr marL="73152" marR="73152" marT="27432" marB="27432" anchor="ctr">
+                  <a:tcPr marT="27432" marB="27432" marL="73152" marR="73152" anchor="ctr">
                     <a:solidFill>
                       <a:srgbClr val="FFFFFF"/>
                     </a:solidFill>
@@ -23331,7 +18432,7 @@
                       </a:r>
                     </a:p>
                   </a:txBody>
-                  <a:tcPr marL="73152" marR="73152" marT="27432" marB="27432" anchor="ctr">
+                  <a:tcPr marT="27432" marB="27432" marL="73152" marR="73152" anchor="ctr">
                     <a:solidFill>
                       <a:srgbClr val="FFFFFF"/>
                     </a:solidFill>
@@ -23359,17 +18460,12 @@
                       </a:r>
                     </a:p>
                   </a:txBody>
-                  <a:tcPr marL="73152" marR="73152" marT="27432" marB="27432" anchor="ctr">
+                  <a:tcPr marT="27432" marB="27432" marL="73152" marR="73152" anchor="ctr">
                     <a:solidFill>
                       <a:srgbClr val="FFFFFF"/>
                     </a:solidFill>
                   </a:tcPr>
                 </a:tc>
-                <a:extLst>
-                  <a:ext uri="{0D108BD9-81ED-4DB2-BD59-A6C34878D82A}">
-                    <a16:rowId xmlns:a16="http://schemas.microsoft.com/office/drawing/2014/main" val="10001"/>
-                  </a:ext>
-                </a:extLst>
               </a:tr>
               <a:tr h="457200">
                 <a:tc>
@@ -23394,7 +18490,7 @@
                       </a:r>
                     </a:p>
                   </a:txBody>
-                  <a:tcPr marL="73152" marR="73152" marT="27432" marB="27432" anchor="ctr">
+                  <a:tcPr marT="27432" marB="27432" marL="73152" marR="73152" anchor="ctr">
                     <a:solidFill>
                       <a:srgbClr val="F6F7F8"/>
                     </a:solidFill>
@@ -23422,7 +18518,7 @@
                       </a:r>
                     </a:p>
                   </a:txBody>
-                  <a:tcPr marL="73152" marR="73152" marT="27432" marB="27432" anchor="ctr">
+                  <a:tcPr marT="27432" marB="27432" marL="73152" marR="73152" anchor="ctr">
                     <a:solidFill>
                       <a:srgbClr val="F6F7F8"/>
                     </a:solidFill>
@@ -23450,17 +18546,12 @@
                       </a:r>
                     </a:p>
                   </a:txBody>
-                  <a:tcPr marL="73152" marR="73152" marT="27432" marB="27432" anchor="ctr">
+                  <a:tcPr marT="27432" marB="27432" marL="73152" marR="73152" anchor="ctr">
                     <a:solidFill>
                       <a:srgbClr val="F6F7F8"/>
                     </a:solidFill>
                   </a:tcPr>
                 </a:tc>
-                <a:extLst>
-                  <a:ext uri="{0D108BD9-81ED-4DB2-BD59-A6C34878D82A}">
-                    <a16:rowId xmlns:a16="http://schemas.microsoft.com/office/drawing/2014/main" val="10002"/>
-                  </a:ext>
-                </a:extLst>
               </a:tr>
             </a:tbl>
           </a:graphicData>
@@ -23560,7 +18651,6 @@
           <a:lstStyle/>
           <a:p>
             <a:pPr algn="ctr"/>
-            <a:endParaRPr/>
           </a:p>
         </p:txBody>
       </p:sp>
@@ -23678,7 +18768,6 @@
           <a:lstStyle/>
           <a:p>
             <a:pPr algn="ctr"/>
-            <a:endParaRPr/>
           </a:p>
         </p:txBody>
       </p:sp>
@@ -23796,7 +18885,6 @@
           <a:lstStyle/>
           <a:p>
             <a:pPr algn="ctr"/>
-            <a:endParaRPr/>
           </a:p>
         </p:txBody>
       </p:sp>
@@ -23858,7 +18946,7 @@
                 <a:latin typeface="맑은 고딕"/>
                 <a:ea typeface="맑은 고딕"/>
               </a:rPr>
-              <a:t>• 옆 도시 병원이라도 60분 안이면 "이용됨" — 이 프로젝트 지정 감사의 핵심 열쇠</a:t>
+              <a:t>• 옆 도시 병원이라도 60분 안이면 "이용됨" — 지정 감사의 핵심 열쇠</a:t>
             </a:r>
           </a:p>
         </p:txBody>
@@ -23914,7 +19002,6 @@
           <a:lstStyle/>
           <a:p>
             <a:pPr algn="ctr"/>
-            <a:endParaRPr/>
           </a:p>
         </p:txBody>
       </p:sp>
@@ -23990,7 +19077,7 @@
 </file>
 
 <file path=ppt/slides/slide7.xml><?xml version="1.0" encoding="utf-8"?>
-<p:sld xmlns:a="http://schemas.openxmlformats.org/drawingml/2006/main" xmlns:r="http://schemas.openxmlformats.org/officeDocument/2006/relationships" xmlns:p="http://schemas.openxmlformats.org/presentationml/2006/main">
+<p:sld xmlns:a="http://schemas.openxmlformats.org/drawingml/2006/main" xmlns:p="http://schemas.openxmlformats.org/presentationml/2006/main" xmlns:r="http://schemas.openxmlformats.org/officeDocument/2006/relationships">
   <p:cSld>
     <p:spTree>
       <p:nvGrpSpPr>
@@ -23998,14 +19085,7 @@
         <p:cNvGrpSpPr/>
         <p:nvPr/>
       </p:nvGrpSpPr>
-      <p:grpSpPr>
-        <a:xfrm>
-          <a:off x="0" y="0"/>
-          <a:ext cx="0" cy="0"/>
-          <a:chOff x="0" y="0"/>
-          <a:chExt cx="0" cy="0"/>
-        </a:xfrm>
-      </p:grpSpPr>
+      <p:grpSpPr/>
       <p:sp>
         <p:nvSpPr>
           <p:cNvPr id="2" name="Rectangle 1"/>
@@ -24047,7 +19127,6 @@
           <a:lstStyle/>
           <a:p>
             <a:pPr algn="ctr"/>
-            <a:endParaRPr/>
           </a:p>
         </p:txBody>
       </p:sp>
@@ -24076,7 +19155,7 @@
                 <a:srgbClr val="73787E"/>
               </a:gs>
             </a:gsLst>
-            <a:lin ang="18900000" scaled="0"/>
+            <a:lin scaled="0" ang="18900000"/>
           </a:gradFill>
           <a:ln>
             <a:noFill/>
@@ -24108,7 +19187,6 @@
           <a:lstStyle/>
           <a:p>
             <a:pPr algn="ctr"/>
-            <a:endParaRPr/>
           </a:p>
         </p:txBody>
       </p:sp>
@@ -24178,7 +19256,7 @@
                 <a:srgbClr val="FFFFFF"/>
               </a:gs>
             </a:gsLst>
-            <a:lin ang="0" scaled="0"/>
+            <a:lin scaled="0" ang="0"/>
           </a:gradFill>
           <a:ln>
             <a:noFill/>
@@ -24204,7 +19282,6 @@
           <a:lstStyle/>
           <a:p>
             <a:pPr algn="ctr"/>
-            <a:endParaRPr/>
           </a:p>
         </p:txBody>
       </p:sp>
@@ -24313,27 +19390,9 @@
                 <a:tableStyleId>{5C22544A-7EE6-4342-B048-85BDC9FD1C3A}</a:tableStyleId>
               </a:tblPr>
               <a:tblGrid>
-                <a:gridCol w="822960">
-                  <a:extLst>
-                    <a:ext uri="{9D8B030D-6E8A-4147-A177-3AD203B41FA5}">
-                      <a16:colId xmlns:a16="http://schemas.microsoft.com/office/drawing/2014/main" val="20000"/>
-                    </a:ext>
-                  </a:extLst>
-                </a:gridCol>
-                <a:gridCol w="3931920">
-                  <a:extLst>
-                    <a:ext uri="{9D8B030D-6E8A-4147-A177-3AD203B41FA5}">
-                      <a16:colId xmlns:a16="http://schemas.microsoft.com/office/drawing/2014/main" val="20001"/>
-                    </a:ext>
-                  </a:extLst>
-                </a:gridCol>
-                <a:gridCol w="1188720">
-                  <a:extLst>
-                    <a:ext uri="{9D8B030D-6E8A-4147-A177-3AD203B41FA5}">
-                      <a16:colId xmlns:a16="http://schemas.microsoft.com/office/drawing/2014/main" val="20002"/>
-                    </a:ext>
-                  </a:extLst>
-                </a:gridCol>
+                <a:gridCol w="822960"/>
+                <a:gridCol w="3931920"/>
+                <a:gridCol w="1188720"/>
               </a:tblGrid>
               <a:tr h="457200">
                 <a:tc>
@@ -24358,7 +19417,7 @@
                       </a:r>
                     </a:p>
                   </a:txBody>
-                  <a:tcPr marL="73152" marR="73152" marT="27432" marB="27432" anchor="ctr">
+                  <a:tcPr marT="27432" marB="27432" marL="73152" marR="73152" anchor="ctr">
                     <a:solidFill>
                       <a:srgbClr val="33393F"/>
                     </a:solidFill>
@@ -24386,7 +19445,7 @@
                       </a:r>
                     </a:p>
                   </a:txBody>
-                  <a:tcPr marL="73152" marR="73152" marT="27432" marB="27432" anchor="ctr">
+                  <a:tcPr marT="27432" marB="27432" marL="73152" marR="73152" anchor="ctr">
                     <a:solidFill>
                       <a:srgbClr val="33393F"/>
                     </a:solidFill>
@@ -24414,17 +19473,12 @@
                       </a:r>
                     </a:p>
                   </a:txBody>
-                  <a:tcPr marL="73152" marR="73152" marT="27432" marB="27432" anchor="ctr">
+                  <a:tcPr marT="27432" marB="27432" marL="73152" marR="73152" anchor="ctr">
                     <a:solidFill>
                       <a:srgbClr val="33393F"/>
                     </a:solidFill>
                   </a:tcPr>
                 </a:tc>
-                <a:extLst>
-                  <a:ext uri="{0D108BD9-81ED-4DB2-BD59-A6C34878D82A}">
-                    <a16:rowId xmlns:a16="http://schemas.microsoft.com/office/drawing/2014/main" val="10000"/>
-                  </a:ext>
-                </a:extLst>
               </a:tr>
               <a:tr h="457200">
                 <a:tc>
@@ -24449,7 +19503,7 @@
                       </a:r>
                     </a:p>
                   </a:txBody>
-                  <a:tcPr marL="73152" marR="73152" marT="27432" marB="27432" anchor="ctr">
+                  <a:tcPr marT="27432" marB="27432" marL="73152" marR="73152" anchor="ctr">
                     <a:solidFill>
                       <a:srgbClr val="FFFFFF"/>
                     </a:solidFill>
@@ -24477,7 +19531,7 @@
                       </a:r>
                     </a:p>
                   </a:txBody>
-                  <a:tcPr marL="73152" marR="73152" marT="27432" marB="27432" anchor="ctr">
+                  <a:tcPr marT="27432" marB="27432" marL="73152" marR="73152" anchor="ctr">
                     <a:solidFill>
                       <a:srgbClr val="FFFFFF"/>
                     </a:solidFill>
@@ -24505,17 +19559,12 @@
                       </a:r>
                     </a:p>
                   </a:txBody>
-                  <a:tcPr marL="73152" marR="73152" marT="27432" marB="27432" anchor="ctr">
+                  <a:tcPr marT="27432" marB="27432" marL="73152" marR="73152" anchor="ctr">
                     <a:solidFill>
                       <a:srgbClr val="FFFFFF"/>
                     </a:solidFill>
                   </a:tcPr>
                 </a:tc>
-                <a:extLst>
-                  <a:ext uri="{0D108BD9-81ED-4DB2-BD59-A6C34878D82A}">
-                    <a16:rowId xmlns:a16="http://schemas.microsoft.com/office/drawing/2014/main" val="10001"/>
-                  </a:ext>
-                </a:extLst>
               </a:tr>
               <a:tr h="457200">
                 <a:tc>
@@ -24540,7 +19589,7 @@
                       </a:r>
                     </a:p>
                   </a:txBody>
-                  <a:tcPr marL="73152" marR="73152" marT="27432" marB="27432" anchor="ctr">
+                  <a:tcPr marT="27432" marB="27432" marL="73152" marR="73152" anchor="ctr">
                     <a:solidFill>
                       <a:srgbClr val="F6F7F8"/>
                     </a:solidFill>
@@ -24568,7 +19617,7 @@
                       </a:r>
                     </a:p>
                   </a:txBody>
-                  <a:tcPr marL="73152" marR="73152" marT="27432" marB="27432" anchor="ctr">
+                  <a:tcPr marT="27432" marB="27432" marL="73152" marR="73152" anchor="ctr">
                     <a:solidFill>
                       <a:srgbClr val="F6F7F8"/>
                     </a:solidFill>
@@ -24596,17 +19645,12 @@
                       </a:r>
                     </a:p>
                   </a:txBody>
-                  <a:tcPr marL="73152" marR="73152" marT="27432" marB="27432" anchor="ctr">
+                  <a:tcPr marT="27432" marB="27432" marL="73152" marR="73152" anchor="ctr">
                     <a:solidFill>
                       <a:srgbClr val="F6F7F8"/>
                     </a:solidFill>
                   </a:tcPr>
                 </a:tc>
-                <a:extLst>
-                  <a:ext uri="{0D108BD9-81ED-4DB2-BD59-A6C34878D82A}">
-                    <a16:rowId xmlns:a16="http://schemas.microsoft.com/office/drawing/2014/main" val="10002"/>
-                  </a:ext>
-                </a:extLst>
               </a:tr>
               <a:tr h="457200">
                 <a:tc>
@@ -24631,7 +19675,7 @@
                       </a:r>
                     </a:p>
                   </a:txBody>
-                  <a:tcPr marL="73152" marR="73152" marT="27432" marB="27432" anchor="ctr">
+                  <a:tcPr marT="27432" marB="27432" marL="73152" marR="73152" anchor="ctr">
                     <a:solidFill>
                       <a:srgbClr val="FFFFFF"/>
                     </a:solidFill>
@@ -24659,7 +19703,7 @@
                       </a:r>
                     </a:p>
                   </a:txBody>
-                  <a:tcPr marL="73152" marR="73152" marT="27432" marB="27432" anchor="ctr">
+                  <a:tcPr marT="27432" marB="27432" marL="73152" marR="73152" anchor="ctr">
                     <a:solidFill>
                       <a:srgbClr val="FFFFFF"/>
                     </a:solidFill>
@@ -24687,17 +19731,12 @@
                       </a:r>
                     </a:p>
                   </a:txBody>
-                  <a:tcPr marL="73152" marR="73152" marT="27432" marB="27432" anchor="ctr">
+                  <a:tcPr marT="27432" marB="27432" marL="73152" marR="73152" anchor="ctr">
                     <a:solidFill>
                       <a:srgbClr val="FFFFFF"/>
                     </a:solidFill>
                   </a:tcPr>
                 </a:tc>
-                <a:extLst>
-                  <a:ext uri="{0D108BD9-81ED-4DB2-BD59-A6C34878D82A}">
-                    <a16:rowId xmlns:a16="http://schemas.microsoft.com/office/drawing/2014/main" val="10003"/>
-                  </a:ext>
-                </a:extLst>
               </a:tr>
             </a:tbl>
           </a:graphicData>
@@ -24754,7 +19793,6 @@
           <a:lstStyle/>
           <a:p>
             <a:pPr algn="ctr"/>
-            <a:endParaRPr/>
           </a:p>
         </p:txBody>
       </p:sp>
@@ -24892,7 +19930,6 @@
           <a:lstStyle/>
           <a:p>
             <a:pPr algn="ctr"/>
-            <a:endParaRPr/>
           </a:p>
         </p:txBody>
       </p:sp>
@@ -25070,7 +20107,6 @@
           <a:lstStyle/>
           <a:p>
             <a:pPr algn="ctr"/>
-            <a:endParaRPr/>
           </a:p>
         </p:txBody>
       </p:sp>
@@ -25209,7 +20245,7 @@
 </file>
 
 <file path=ppt/slides/slide8.xml><?xml version="1.0" encoding="utf-8"?>
-<p:sld xmlns:a="http://schemas.openxmlformats.org/drawingml/2006/main" xmlns:r="http://schemas.openxmlformats.org/officeDocument/2006/relationships" xmlns:p="http://schemas.openxmlformats.org/presentationml/2006/main">
+<p:sld xmlns:a="http://schemas.openxmlformats.org/drawingml/2006/main" xmlns:p="http://schemas.openxmlformats.org/presentationml/2006/main" xmlns:r="http://schemas.openxmlformats.org/officeDocument/2006/relationships">
   <p:cSld>
     <p:spTree>
       <p:nvGrpSpPr>
@@ -25217,14 +20253,7 @@
         <p:cNvGrpSpPr/>
         <p:nvPr/>
       </p:nvGrpSpPr>
-      <p:grpSpPr>
-        <a:xfrm>
-          <a:off x="0" y="0"/>
-          <a:ext cx="0" cy="0"/>
-          <a:chOff x="0" y="0"/>
-          <a:chExt cx="0" cy="0"/>
-        </a:xfrm>
-      </p:grpSpPr>
+      <p:grpSpPr/>
       <p:sp>
         <p:nvSpPr>
           <p:cNvPr id="2" name="Rectangle 1"/>
@@ -25266,7 +20295,6 @@
           <a:lstStyle/>
           <a:p>
             <a:pPr algn="ctr"/>
-            <a:endParaRPr/>
           </a:p>
         </p:txBody>
       </p:sp>
@@ -25295,7 +20323,7 @@
                 <a:srgbClr val="73787E"/>
               </a:gs>
             </a:gsLst>
-            <a:lin ang="18900000" scaled="0"/>
+            <a:lin scaled="0" ang="18900000"/>
           </a:gradFill>
           <a:ln>
             <a:noFill/>
@@ -25327,7 +20355,6 @@
           <a:lstStyle/>
           <a:p>
             <a:pPr algn="ctr"/>
-            <a:endParaRPr/>
           </a:p>
         </p:txBody>
       </p:sp>
@@ -25397,7 +20424,7 @@
                 <a:srgbClr val="FFFFFF"/>
               </a:gs>
             </a:gsLst>
-            <a:lin ang="0" scaled="0"/>
+            <a:lin scaled="0" ang="0"/>
           </a:gradFill>
           <a:ln>
             <a:noFill/>
@@ -25423,7 +20450,6 @@
           <a:lstStyle/>
           <a:p>
             <a:pPr algn="ctr"/>
-            <a:endParaRPr/>
           </a:p>
         </p:txBody>
       </p:sp>
@@ -25532,20 +20558,8 @@
                 <a:tableStyleId>{5C22544A-7EE6-4342-B048-85BDC9FD1C3A}</a:tableStyleId>
               </a:tblPr>
               <a:tblGrid>
-                <a:gridCol w="5760720">
-                  <a:extLst>
-                    <a:ext uri="{9D8B030D-6E8A-4147-A177-3AD203B41FA5}">
-                      <a16:colId xmlns:a16="http://schemas.microsoft.com/office/drawing/2014/main" val="20000"/>
-                    </a:ext>
-                  </a:extLst>
-                </a:gridCol>
-                <a:gridCol w="5532120">
-                  <a:extLst>
-                    <a:ext uri="{9D8B030D-6E8A-4147-A177-3AD203B41FA5}">
-                      <a16:colId xmlns:a16="http://schemas.microsoft.com/office/drawing/2014/main" val="20001"/>
-                    </a:ext>
-                  </a:extLst>
-                </a:gridCol>
+                <a:gridCol w="5760720"/>
+                <a:gridCol w="5532120"/>
               </a:tblGrid>
               <a:tr h="475488">
                 <a:tc>
@@ -25570,7 +20584,7 @@
                       </a:r>
                     </a:p>
                   </a:txBody>
-                  <a:tcPr marL="73152" marR="73152" marT="27432" marB="27432" anchor="ctr">
+                  <a:tcPr marT="27432" marB="27432" marL="73152" marR="73152" anchor="ctr">
                     <a:solidFill>
                       <a:srgbClr val="33393F"/>
                     </a:solidFill>
@@ -25598,17 +20612,12 @@
                       </a:r>
                     </a:p>
                   </a:txBody>
-                  <a:tcPr marL="73152" marR="73152" marT="27432" marB="27432" anchor="ctr">
+                  <a:tcPr marT="27432" marB="27432" marL="73152" marR="73152" anchor="ctr">
                     <a:solidFill>
                       <a:srgbClr val="33393F"/>
                     </a:solidFill>
                   </a:tcPr>
                 </a:tc>
-                <a:extLst>
-                  <a:ext uri="{0D108BD9-81ED-4DB2-BD59-A6C34878D82A}">
-                    <a16:rowId xmlns:a16="http://schemas.microsoft.com/office/drawing/2014/main" val="10000"/>
-                  </a:ext>
-                </a:extLst>
               </a:tr>
               <a:tr h="475488">
                 <a:tc>
@@ -25633,7 +20642,7 @@
                       </a:r>
                     </a:p>
                   </a:txBody>
-                  <a:tcPr marL="73152" marR="73152" marT="27432" marB="27432" anchor="ctr">
+                  <a:tcPr marT="27432" marB="27432" marL="73152" marR="73152" anchor="ctr">
                     <a:solidFill>
                       <a:srgbClr val="FFFFFF"/>
                     </a:solidFill>
@@ -25661,17 +20670,12 @@
                       </a:r>
                     </a:p>
                   </a:txBody>
-                  <a:tcPr marL="73152" marR="73152" marT="27432" marB="27432" anchor="ctr">
+                  <a:tcPr marT="27432" marB="27432" marL="73152" marR="73152" anchor="ctr">
                     <a:solidFill>
                       <a:srgbClr val="FFFFFF"/>
                     </a:solidFill>
                   </a:tcPr>
                 </a:tc>
-                <a:extLst>
-                  <a:ext uri="{0D108BD9-81ED-4DB2-BD59-A6C34878D82A}">
-                    <a16:rowId xmlns:a16="http://schemas.microsoft.com/office/drawing/2014/main" val="10001"/>
-                  </a:ext>
-                </a:extLst>
               </a:tr>
               <a:tr h="475488">
                 <a:tc>
@@ -25696,7 +20700,7 @@
                       </a:r>
                     </a:p>
                   </a:txBody>
-                  <a:tcPr marL="73152" marR="73152" marT="27432" marB="27432" anchor="ctr">
+                  <a:tcPr marT="27432" marB="27432" marL="73152" marR="73152" anchor="ctr">
                     <a:solidFill>
                       <a:srgbClr val="F6F7F8"/>
                     </a:solidFill>
@@ -25724,17 +20728,12 @@
                       </a:r>
                     </a:p>
                   </a:txBody>
-                  <a:tcPr marL="73152" marR="73152" marT="27432" marB="27432" anchor="ctr">
+                  <a:tcPr marT="27432" marB="27432" marL="73152" marR="73152" anchor="ctr">
                     <a:solidFill>
                       <a:srgbClr val="F6F7F8"/>
                     </a:solidFill>
                   </a:tcPr>
                 </a:tc>
-                <a:extLst>
-                  <a:ext uri="{0D108BD9-81ED-4DB2-BD59-A6C34878D82A}">
-                    <a16:rowId xmlns:a16="http://schemas.microsoft.com/office/drawing/2014/main" val="10002"/>
-                  </a:ext>
-                </a:extLst>
               </a:tr>
             </a:tbl>
           </a:graphicData>
@@ -25791,7 +20790,6 @@
           <a:lstStyle/>
           <a:p>
             <a:pPr algn="ctr"/>
-            <a:endParaRPr/>
           </a:p>
         </p:txBody>
       </p:sp>
@@ -25909,7 +20907,6 @@
           <a:lstStyle/>
           <a:p>
             <a:pPr algn="ctr"/>
-            <a:endParaRPr/>
           </a:p>
         </p:txBody>
       </p:sp>
@@ -26027,7 +21024,6 @@
           <a:lstStyle/>
           <a:p>
             <a:pPr algn="ctr"/>
-            <a:endParaRPr/>
           </a:p>
         </p:txBody>
       </p:sp>
@@ -26145,7 +21141,6 @@
           <a:lstStyle/>
           <a:p>
             <a:pPr algn="ctr"/>
-            <a:endParaRPr/>
           </a:p>
         </p:txBody>
       </p:sp>
@@ -26261,7 +21256,7 @@
 </file>
 
 <file path=ppt/slides/slide9.xml><?xml version="1.0" encoding="utf-8"?>
-<p:sld xmlns:a="http://schemas.openxmlformats.org/drawingml/2006/main" xmlns:r="http://schemas.openxmlformats.org/officeDocument/2006/relationships" xmlns:p="http://schemas.openxmlformats.org/presentationml/2006/main">
+<p:sld xmlns:a="http://schemas.openxmlformats.org/drawingml/2006/main" xmlns:p="http://schemas.openxmlformats.org/presentationml/2006/main" xmlns:r="http://schemas.openxmlformats.org/officeDocument/2006/relationships">
   <p:cSld>
     <p:spTree>
       <p:nvGrpSpPr>
@@ -26269,14 +21264,7 @@
         <p:cNvGrpSpPr/>
         <p:nvPr/>
       </p:nvGrpSpPr>
-      <p:grpSpPr>
-        <a:xfrm>
-          <a:off x="0" y="0"/>
-          <a:ext cx="0" cy="0"/>
-          <a:chOff x="0" y="0"/>
-          <a:chExt cx="0" cy="0"/>
-        </a:xfrm>
-      </p:grpSpPr>
+      <p:grpSpPr/>
       <p:sp>
         <p:nvSpPr>
           <p:cNvPr id="2" name="Rectangle 1"/>
@@ -26318,7 +21306,6 @@
           <a:lstStyle/>
           <a:p>
             <a:pPr algn="ctr"/>
-            <a:endParaRPr/>
           </a:p>
         </p:txBody>
       </p:sp>
@@ -26347,7 +21334,7 @@
                 <a:srgbClr val="73787E"/>
               </a:gs>
             </a:gsLst>
-            <a:lin ang="18900000" scaled="0"/>
+            <a:lin scaled="0" ang="18900000"/>
           </a:gradFill>
           <a:ln>
             <a:noFill/>
@@ -26379,7 +21366,6 @@
           <a:lstStyle/>
           <a:p>
             <a:pPr algn="ctr"/>
-            <a:endParaRPr/>
           </a:p>
         </p:txBody>
       </p:sp>
@@ -26449,7 +21435,7 @@
                 <a:srgbClr val="FFFFFF"/>
               </a:gs>
             </a:gsLst>
-            <a:lin ang="0" scaled="0"/>
+            <a:lin scaled="0" ang="0"/>
           </a:gradFill>
           <a:ln>
             <a:noFill/>
@@ -26475,7 +21461,6 @@
           <a:lstStyle/>
           <a:p>
             <a:pPr algn="ctr"/>
-            <a:endParaRPr/>
           </a:p>
         </p:txBody>
       </p:sp>
@@ -26616,7 +21601,6 @@
           <a:lstStyle/>
           <a:p>
             <a:pPr algn="ctr"/>
-            <a:endParaRPr/>
           </a:p>
         </p:txBody>
       </p:sp>
@@ -26785,34 +21769,10 @@
                 <a:tableStyleId>{5C22544A-7EE6-4342-B048-85BDC9FD1C3A}</a:tableStyleId>
               </a:tblPr>
               <a:tblGrid>
-                <a:gridCol w="822960">
-                  <a:extLst>
-                    <a:ext uri="{9D8B030D-6E8A-4147-A177-3AD203B41FA5}">
-                      <a16:colId xmlns:a16="http://schemas.microsoft.com/office/drawing/2014/main" val="20000"/>
-                    </a:ext>
-                  </a:extLst>
-                </a:gridCol>
-                <a:gridCol w="822960">
-                  <a:extLst>
-                    <a:ext uri="{9D8B030D-6E8A-4147-A177-3AD203B41FA5}">
-                      <a16:colId xmlns:a16="http://schemas.microsoft.com/office/drawing/2014/main" val="20001"/>
-                    </a:ext>
-                  </a:extLst>
-                </a:gridCol>
-                <a:gridCol w="914400">
-                  <a:extLst>
-                    <a:ext uri="{9D8B030D-6E8A-4147-A177-3AD203B41FA5}">
-                      <a16:colId xmlns:a16="http://schemas.microsoft.com/office/drawing/2014/main" val="20002"/>
-                    </a:ext>
-                  </a:extLst>
-                </a:gridCol>
-                <a:gridCol w="2971800">
-                  <a:extLst>
-                    <a:ext uri="{9D8B030D-6E8A-4147-A177-3AD203B41FA5}">
-                      <a16:colId xmlns:a16="http://schemas.microsoft.com/office/drawing/2014/main" val="20003"/>
-                    </a:ext>
-                  </a:extLst>
-                </a:gridCol>
+                <a:gridCol w="822960"/>
+                <a:gridCol w="822960"/>
+                <a:gridCol w="914400"/>
+                <a:gridCol w="2971800"/>
               </a:tblGrid>
               <a:tr h="438912">
                 <a:tc>
@@ -26837,7 +21797,7 @@
                       </a:r>
                     </a:p>
                   </a:txBody>
-                  <a:tcPr marL="73152" marR="73152" marT="27432" marB="27432" anchor="ctr">
+                  <a:tcPr marT="27432" marB="27432" marL="73152" marR="73152" anchor="ctr">
                     <a:solidFill>
                       <a:srgbClr val="33393F"/>
                     </a:solidFill>
@@ -26865,7 +21825,7 @@
                       </a:r>
                     </a:p>
                   </a:txBody>
-                  <a:tcPr marL="73152" marR="73152" marT="27432" marB="27432" anchor="ctr">
+                  <a:tcPr marT="27432" marB="27432" marL="73152" marR="73152" anchor="ctr">
                     <a:solidFill>
                       <a:srgbClr val="33393F"/>
                     </a:solidFill>
@@ -26893,7 +21853,7 @@
                       </a:r>
                     </a:p>
                   </a:txBody>
-                  <a:tcPr marL="73152" marR="73152" marT="27432" marB="27432" anchor="ctr">
+                  <a:tcPr marT="27432" marB="27432" marL="73152" marR="73152" anchor="ctr">
                     <a:solidFill>
                       <a:srgbClr val="33393F"/>
                     </a:solidFill>
@@ -26921,17 +21881,12 @@
                       </a:r>
                     </a:p>
                   </a:txBody>
-                  <a:tcPr marL="73152" marR="73152" marT="27432" marB="27432" anchor="ctr">
+                  <a:tcPr marT="27432" marB="27432" marL="73152" marR="73152" anchor="ctr">
                     <a:solidFill>
                       <a:srgbClr val="33393F"/>
                     </a:solidFill>
                   </a:tcPr>
                 </a:tc>
-                <a:extLst>
-                  <a:ext uri="{0D108BD9-81ED-4DB2-BD59-A6C34878D82A}">
-                    <a16:rowId xmlns:a16="http://schemas.microsoft.com/office/drawing/2014/main" val="10000"/>
-                  </a:ext>
-                </a:extLst>
               </a:tr>
               <a:tr h="438912">
                 <a:tc>
@@ -26956,7 +21911,7 @@
                       </a:r>
                     </a:p>
                   </a:txBody>
-                  <a:tcPr marL="73152" marR="73152" marT="27432" marB="27432" anchor="ctr">
+                  <a:tcPr marT="27432" marB="27432" marL="73152" marR="73152" anchor="ctr">
                     <a:solidFill>
                       <a:srgbClr val="FFFFFF"/>
                     </a:solidFill>
@@ -26984,7 +21939,7 @@
                       </a:r>
                     </a:p>
                   </a:txBody>
-                  <a:tcPr marL="73152" marR="73152" marT="27432" marB="27432" anchor="ctr">
+                  <a:tcPr marT="27432" marB="27432" marL="73152" marR="73152" anchor="ctr">
                     <a:solidFill>
                       <a:srgbClr val="FFFFFF"/>
                     </a:solidFill>
@@ -27012,7 +21967,7 @@
                       </a:r>
                     </a:p>
                   </a:txBody>
-                  <a:tcPr marL="73152" marR="73152" marT="27432" marB="27432" anchor="ctr">
+                  <a:tcPr marT="27432" marB="27432" marL="73152" marR="73152" anchor="ctr">
                     <a:solidFill>
                       <a:srgbClr val="FFFFFF"/>
                     </a:solidFill>
@@ -27040,17 +21995,12 @@
                       </a:r>
                     </a:p>
                   </a:txBody>
-                  <a:tcPr marL="73152" marR="73152" marT="27432" marB="27432" anchor="ctr">
+                  <a:tcPr marT="27432" marB="27432" marL="73152" marR="73152" anchor="ctr">
                     <a:solidFill>
                       <a:srgbClr val="FFFFFF"/>
                     </a:solidFill>
                   </a:tcPr>
                 </a:tc>
-                <a:extLst>
-                  <a:ext uri="{0D108BD9-81ED-4DB2-BD59-A6C34878D82A}">
-                    <a16:rowId xmlns:a16="http://schemas.microsoft.com/office/drawing/2014/main" val="10001"/>
-                  </a:ext>
-                </a:extLst>
               </a:tr>
               <a:tr h="438912">
                 <a:tc>
@@ -27075,7 +22025,7 @@
                       </a:r>
                     </a:p>
                   </a:txBody>
-                  <a:tcPr marL="73152" marR="73152" marT="27432" marB="27432" anchor="ctr">
+                  <a:tcPr marT="27432" marB="27432" marL="73152" marR="73152" anchor="ctr">
                     <a:solidFill>
                       <a:srgbClr val="E3E5E8"/>
                     </a:solidFill>
@@ -27103,7 +22053,7 @@
                       </a:r>
                     </a:p>
                   </a:txBody>
-                  <a:tcPr marL="73152" marR="73152" marT="27432" marB="27432" anchor="ctr">
+                  <a:tcPr marT="27432" marB="27432" marL="73152" marR="73152" anchor="ctr">
                     <a:solidFill>
                       <a:srgbClr val="E3E5E8"/>
                     </a:solidFill>
@@ -27131,7 +22081,7 @@
                       </a:r>
                     </a:p>
                   </a:txBody>
-                  <a:tcPr marL="73152" marR="73152" marT="27432" marB="27432" anchor="ctr">
+                  <a:tcPr marT="27432" marB="27432" marL="73152" marR="73152" anchor="ctr">
                     <a:solidFill>
                       <a:srgbClr val="E3E5E8"/>
                     </a:solidFill>
@@ -27159,17 +22109,12 @@
                       </a:r>
                     </a:p>
                   </a:txBody>
-                  <a:tcPr marL="73152" marR="73152" marT="27432" marB="27432" anchor="ctr">
+                  <a:tcPr marT="27432" marB="27432" marL="73152" marR="73152" anchor="ctr">
                     <a:solidFill>
                       <a:srgbClr val="E3E5E8"/>
                     </a:solidFill>
                   </a:tcPr>
                 </a:tc>
-                <a:extLst>
-                  <a:ext uri="{0D108BD9-81ED-4DB2-BD59-A6C34878D82A}">
-                    <a16:rowId xmlns:a16="http://schemas.microsoft.com/office/drawing/2014/main" val="10002"/>
-                  </a:ext>
-                </a:extLst>
               </a:tr>
               <a:tr h="438912">
                 <a:tc>
@@ -27194,7 +22139,7 @@
                       </a:r>
                     </a:p>
                   </a:txBody>
-                  <a:tcPr marL="73152" marR="73152" marT="27432" marB="27432" anchor="ctr">
+                  <a:tcPr marT="27432" marB="27432" marL="73152" marR="73152" anchor="ctr">
                     <a:solidFill>
                       <a:srgbClr val="FFFFFF"/>
                     </a:solidFill>
@@ -27222,7 +22167,7 @@
                       </a:r>
                     </a:p>
                   </a:txBody>
-                  <a:tcPr marL="73152" marR="73152" marT="27432" marB="27432" anchor="ctr">
+                  <a:tcPr marT="27432" marB="27432" marL="73152" marR="73152" anchor="ctr">
                     <a:solidFill>
                       <a:srgbClr val="FFFFFF"/>
                     </a:solidFill>
@@ -27250,7 +22195,7 @@
                       </a:r>
                     </a:p>
                   </a:txBody>
-                  <a:tcPr marL="73152" marR="73152" marT="27432" marB="27432" anchor="ctr">
+                  <a:tcPr marT="27432" marB="27432" marL="73152" marR="73152" anchor="ctr">
                     <a:solidFill>
                       <a:srgbClr val="FFFFFF"/>
                     </a:solidFill>
@@ -27278,17 +22223,12 @@
                       </a:r>
                     </a:p>
                   </a:txBody>
-                  <a:tcPr marL="73152" marR="73152" marT="27432" marB="27432" anchor="ctr">
+                  <a:tcPr marT="27432" marB="27432" marL="73152" marR="73152" anchor="ctr">
                     <a:solidFill>
                       <a:srgbClr val="FFFFFF"/>
                     </a:solidFill>
                   </a:tcPr>
                 </a:tc>
-                <a:extLst>
-                  <a:ext uri="{0D108BD9-81ED-4DB2-BD59-A6C34878D82A}">
-                    <a16:rowId xmlns:a16="http://schemas.microsoft.com/office/drawing/2014/main" val="10003"/>
-                  </a:ext>
-                </a:extLst>
               </a:tr>
             </a:tbl>
           </a:graphicData>
@@ -27345,7 +22285,6 @@
           <a:lstStyle/>
           <a:p>
             <a:pPr algn="ctr"/>
-            <a:endParaRPr/>
           </a:p>
         </p:txBody>
       </p:sp>

--- a/05_작업자료/_PPT생성본/데이터분석_결과보고서.pptx
+++ b/05_작업자료/_PPT생성본/데이터분석_결과보고서.pptx
@@ -5,29 +5,29 @@
     <p:sldMasterId id="2147483648" r:id="rId1"/>
   </p:sldMasterIdLst>
   <p:sldIdLst>
-    <p:sldId id="256" r:id="rId7"/>
-    <p:sldId id="257" r:id="rId8"/>
-    <p:sldId id="258" r:id="rId9"/>
-    <p:sldId id="259" r:id="rId10"/>
-    <p:sldId id="260" r:id="rId11"/>
-    <p:sldId id="261" r:id="rId12"/>
-    <p:sldId id="262" r:id="rId13"/>
-    <p:sldId id="263" r:id="rId14"/>
-    <p:sldId id="264" r:id="rId15"/>
-    <p:sldId id="265" r:id="rId16"/>
-    <p:sldId id="266" r:id="rId17"/>
-    <p:sldId id="267" r:id="rId18"/>
-    <p:sldId id="268" r:id="rId19"/>
-    <p:sldId id="269" r:id="rId20"/>
-    <p:sldId id="270" r:id="rId21"/>
-    <p:sldId id="271" r:id="rId22"/>
-    <p:sldId id="272" r:id="rId23"/>
-    <p:sldId id="273" r:id="rId24"/>
-    <p:sldId id="274" r:id="rId25"/>
-    <p:sldId id="275" r:id="rId26"/>
-    <p:sldId id="276" r:id="rId27"/>
+    <p:sldId id="256" r:id="rId2"/>
+    <p:sldId id="276" r:id="rId26"/>
+    <p:sldId id="257" r:id="rId3"/>
+    <p:sldId id="258" r:id="rId4"/>
+    <p:sldId id="259" r:id="rId5"/>
+    <p:sldId id="260" r:id="rId6"/>
+    <p:sldId id="261" r:id="rId7"/>
+    <p:sldId id="262" r:id="rId8"/>
+    <p:sldId id="263" r:id="rId9"/>
+    <p:sldId id="264" r:id="rId10"/>
+    <p:sldId id="265" r:id="rId11"/>
+    <p:sldId id="266" r:id="rId12"/>
+    <p:sldId id="267" r:id="rId13"/>
+    <p:sldId id="268" r:id="rId14"/>
+    <p:sldId id="269" r:id="rId15"/>
+    <p:sldId id="270" r:id="rId16"/>
+    <p:sldId id="271" r:id="rId17"/>
+    <p:sldId id="272" r:id="rId18"/>
+    <p:sldId id="273" r:id="rId19"/>
+    <p:sldId id="274" r:id="rId20"/>
+    <p:sldId id="275" r:id="rId21"/>
   </p:sldIdLst>
-  <p:sldSz cx="12191695" cy="6858000" type="screen4x3"/>
+  <p:sldSz cx="12192000" cy="6858000"/>
   <p:notesSz cx="6858000" cy="9144000"/>
   <p:defaultTextStyle>
     <a:defPPr>
@@ -124,6 +124,22 @@
       </a:defRPr>
     </a:lvl9pPr>
   </p:defaultTextStyle>
+  <p:extLst>
+    <p:ext uri="{EFAFB233-063F-42B5-8137-9DF3F51BA10A}">
+      <p15:sldGuideLst xmlns:p15="http://schemas.microsoft.com/office/powerpoint/2012/main">
+        <p15:guide id="1" orient="horz" pos="2160">
+          <p15:clr>
+            <a:srgbClr val="A4A3A4"/>
+          </p15:clr>
+        </p15:guide>
+        <p15:guide id="2" pos="2880">
+          <p15:clr>
+            <a:srgbClr val="A4A3A4"/>
+          </p15:clr>
+        </p15:guide>
+      </p15:sldGuideLst>
+    </p:ext>
+  </p:extLst>
 </p:presentation>
 </file>
 
@@ -165,10 +181,9 @@
           <a:lstStyle/>
           <a:p>
             <a:r>
-              <a:rPr lang="en-US" smtClean="0"/>
+              <a:rPr lang="en-US"/>
               <a:t>Click to edit Master title style</a:t>
             </a:r>
-            <a:endParaRPr lang="en-US"/>
           </a:p>
         </p:txBody>
       </p:sp>
@@ -284,10 +299,9 @@
           </a:lstStyle>
           <a:p>
             <a:r>
-              <a:rPr lang="en-US" smtClean="0"/>
+              <a:rPr lang="en-US"/>
               <a:t>Click to edit Master subtitle style</a:t>
             </a:r>
-            <a:endParaRPr lang="en-US"/>
           </a:p>
         </p:txBody>
       </p:sp>
@@ -308,7 +322,7 @@
           <a:p>
             <a:fld id="{5BCAD085-E8A6-8845-BD4E-CB4CCA059FC4}" type="datetimeFigureOut">
               <a:rPr lang="en-US" smtClean="0"/>
-              <a:t>1/27/13</a:t>
+              <a:t>8/12/2026</a:t>
             </a:fld>
             <a:endParaRPr lang="en-US"/>
           </a:p>
@@ -402,10 +416,9 @@
           <a:lstStyle/>
           <a:p>
             <a:r>
-              <a:rPr lang="en-US" smtClean="0"/>
+              <a:rPr lang="en-US"/>
               <a:t>Click to edit Master title style</a:t>
             </a:r>
-            <a:endParaRPr lang="en-US"/>
           </a:p>
         </p:txBody>
       </p:sp>
@@ -426,38 +439,37 @@
           <a:p>
             <a:pPr lvl="0"/>
             <a:r>
-              <a:rPr lang="en-US" smtClean="0"/>
+              <a:rPr lang="en-US"/>
               <a:t>Click to edit Master text styles</a:t>
             </a:r>
           </a:p>
           <a:p>
             <a:pPr lvl="1"/>
             <a:r>
-              <a:rPr lang="en-US" smtClean="0"/>
+              <a:rPr lang="en-US"/>
               <a:t>Second level</a:t>
             </a:r>
           </a:p>
           <a:p>
             <a:pPr lvl="2"/>
             <a:r>
-              <a:rPr lang="en-US" smtClean="0"/>
+              <a:rPr lang="en-US"/>
               <a:t>Third level</a:t>
             </a:r>
           </a:p>
           <a:p>
             <a:pPr lvl="3"/>
             <a:r>
-              <a:rPr lang="en-US" smtClean="0"/>
+              <a:rPr lang="en-US"/>
               <a:t>Fourth level</a:t>
             </a:r>
           </a:p>
           <a:p>
             <a:pPr lvl="4"/>
             <a:r>
-              <a:rPr lang="en-US" smtClean="0"/>
+              <a:rPr lang="en-US"/>
               <a:t>Fifth level</a:t>
             </a:r>
-            <a:endParaRPr lang="en-US"/>
           </a:p>
         </p:txBody>
       </p:sp>
@@ -478,7 +490,7 @@
           <a:p>
             <a:fld id="{5BCAD085-E8A6-8845-BD4E-CB4CCA059FC4}" type="datetimeFigureOut">
               <a:rPr lang="en-US" smtClean="0"/>
-              <a:t>1/27/13</a:t>
+              <a:t>8/12/2026</a:t>
             </a:fld>
             <a:endParaRPr lang="en-US"/>
           </a:p>
@@ -577,10 +589,9 @@
           <a:lstStyle/>
           <a:p>
             <a:r>
-              <a:rPr lang="en-US" smtClean="0"/>
+              <a:rPr lang="en-US"/>
               <a:t>Click to edit Master title style</a:t>
             </a:r>
-            <a:endParaRPr lang="en-US"/>
           </a:p>
         </p:txBody>
       </p:sp>
@@ -606,38 +617,37 @@
           <a:p>
             <a:pPr lvl="0"/>
             <a:r>
-              <a:rPr lang="en-US" smtClean="0"/>
+              <a:rPr lang="en-US"/>
               <a:t>Click to edit Master text styles</a:t>
             </a:r>
           </a:p>
           <a:p>
             <a:pPr lvl="1"/>
             <a:r>
-              <a:rPr lang="en-US" smtClean="0"/>
+              <a:rPr lang="en-US"/>
               <a:t>Second level</a:t>
             </a:r>
           </a:p>
           <a:p>
             <a:pPr lvl="2"/>
             <a:r>
-              <a:rPr lang="en-US" smtClean="0"/>
+              <a:rPr lang="en-US"/>
               <a:t>Third level</a:t>
             </a:r>
           </a:p>
           <a:p>
             <a:pPr lvl="3"/>
             <a:r>
-              <a:rPr lang="en-US" smtClean="0"/>
+              <a:rPr lang="en-US"/>
               <a:t>Fourth level</a:t>
             </a:r>
           </a:p>
           <a:p>
             <a:pPr lvl="4"/>
             <a:r>
-              <a:rPr lang="en-US" smtClean="0"/>
+              <a:rPr lang="en-US"/>
               <a:t>Fifth level</a:t>
             </a:r>
-            <a:endParaRPr lang="en-US"/>
           </a:p>
         </p:txBody>
       </p:sp>
@@ -658,7 +668,7 @@
           <a:p>
             <a:fld id="{5BCAD085-E8A6-8845-BD4E-CB4CCA059FC4}" type="datetimeFigureOut">
               <a:rPr lang="en-US" smtClean="0"/>
-              <a:t>1/27/13</a:t>
+              <a:t>8/12/2026</a:t>
             </a:fld>
             <a:endParaRPr lang="en-US"/>
           </a:p>
@@ -752,10 +762,9 @@
           <a:lstStyle/>
           <a:p>
             <a:r>
-              <a:rPr lang="en-US" smtClean="0"/>
+              <a:rPr lang="en-US"/>
               <a:t>Click to edit Master title style</a:t>
             </a:r>
-            <a:endParaRPr lang="en-US"/>
           </a:p>
         </p:txBody>
       </p:sp>
@@ -776,38 +785,37 @@
           <a:p>
             <a:pPr lvl="0"/>
             <a:r>
-              <a:rPr lang="en-US" smtClean="0"/>
+              <a:rPr lang="en-US"/>
               <a:t>Click to edit Master text styles</a:t>
             </a:r>
           </a:p>
           <a:p>
             <a:pPr lvl="1"/>
             <a:r>
-              <a:rPr lang="en-US" smtClean="0"/>
+              <a:rPr lang="en-US"/>
               <a:t>Second level</a:t>
             </a:r>
           </a:p>
           <a:p>
             <a:pPr lvl="2"/>
             <a:r>
-              <a:rPr lang="en-US" smtClean="0"/>
+              <a:rPr lang="en-US"/>
               <a:t>Third level</a:t>
             </a:r>
           </a:p>
           <a:p>
             <a:pPr lvl="3"/>
             <a:r>
-              <a:rPr lang="en-US" smtClean="0"/>
+              <a:rPr lang="en-US"/>
               <a:t>Fourth level</a:t>
             </a:r>
           </a:p>
           <a:p>
             <a:pPr lvl="4"/>
             <a:r>
-              <a:rPr lang="en-US" smtClean="0"/>
+              <a:rPr lang="en-US"/>
               <a:t>Fifth level</a:t>
             </a:r>
-            <a:endParaRPr lang="en-US"/>
           </a:p>
         </p:txBody>
       </p:sp>
@@ -828,7 +836,7 @@
           <a:p>
             <a:fld id="{5BCAD085-E8A6-8845-BD4E-CB4CCA059FC4}" type="datetimeFigureOut">
               <a:rPr lang="en-US" smtClean="0"/>
-              <a:t>1/27/13</a:t>
+              <a:t>8/12/2026</a:t>
             </a:fld>
             <a:endParaRPr lang="en-US"/>
           </a:p>
@@ -931,10 +939,9 @@
           </a:lstStyle>
           <a:p>
             <a:r>
-              <a:rPr lang="en-US" smtClean="0"/>
+              <a:rPr lang="en-US"/>
               <a:t>Click to edit Master title style</a:t>
             </a:r>
-            <a:endParaRPr lang="en-US"/>
           </a:p>
         </p:txBody>
       </p:sp>
@@ -1051,7 +1058,7 @@
           <a:p>
             <a:pPr lvl="0"/>
             <a:r>
-              <a:rPr lang="en-US" smtClean="0"/>
+              <a:rPr lang="en-US"/>
               <a:t>Click to edit Master text styles</a:t>
             </a:r>
           </a:p>
@@ -1074,7 +1081,7 @@
           <a:p>
             <a:fld id="{5BCAD085-E8A6-8845-BD4E-CB4CCA059FC4}" type="datetimeFigureOut">
               <a:rPr lang="en-US" smtClean="0"/>
-              <a:t>1/27/13</a:t>
+              <a:t>8/12/2026</a:t>
             </a:fld>
             <a:endParaRPr lang="en-US"/>
           </a:p>
@@ -1168,10 +1175,9 @@
           <a:lstStyle/>
           <a:p>
             <a:r>
-              <a:rPr lang="en-US" smtClean="0"/>
+              <a:rPr lang="en-US"/>
               <a:t>Click to edit Master title style</a:t>
             </a:r>
-            <a:endParaRPr lang="en-US"/>
           </a:p>
         </p:txBody>
       </p:sp>
@@ -1225,38 +1231,37 @@
           <a:p>
             <a:pPr lvl="0"/>
             <a:r>
-              <a:rPr lang="en-US" smtClean="0"/>
+              <a:rPr lang="en-US"/>
               <a:t>Click to edit Master text styles</a:t>
             </a:r>
           </a:p>
           <a:p>
             <a:pPr lvl="1"/>
             <a:r>
-              <a:rPr lang="en-US" smtClean="0"/>
+              <a:rPr lang="en-US"/>
               <a:t>Second level</a:t>
             </a:r>
           </a:p>
           <a:p>
             <a:pPr lvl="2"/>
             <a:r>
-              <a:rPr lang="en-US" smtClean="0"/>
+              <a:rPr lang="en-US"/>
               <a:t>Third level</a:t>
             </a:r>
           </a:p>
           <a:p>
             <a:pPr lvl="3"/>
             <a:r>
-              <a:rPr lang="en-US" smtClean="0"/>
+              <a:rPr lang="en-US"/>
               <a:t>Fourth level</a:t>
             </a:r>
           </a:p>
           <a:p>
             <a:pPr lvl="4"/>
             <a:r>
-              <a:rPr lang="en-US" smtClean="0"/>
+              <a:rPr lang="en-US"/>
               <a:t>Fifth level</a:t>
             </a:r>
-            <a:endParaRPr lang="en-US"/>
           </a:p>
         </p:txBody>
       </p:sp>
@@ -1310,38 +1315,37 @@
           <a:p>
             <a:pPr lvl="0"/>
             <a:r>
-              <a:rPr lang="en-US" smtClean="0"/>
+              <a:rPr lang="en-US"/>
               <a:t>Click to edit Master text styles</a:t>
             </a:r>
           </a:p>
           <a:p>
             <a:pPr lvl="1"/>
             <a:r>
-              <a:rPr lang="en-US" smtClean="0"/>
+              <a:rPr lang="en-US"/>
               <a:t>Second level</a:t>
             </a:r>
           </a:p>
           <a:p>
             <a:pPr lvl="2"/>
             <a:r>
-              <a:rPr lang="en-US" smtClean="0"/>
+              <a:rPr lang="en-US"/>
               <a:t>Third level</a:t>
             </a:r>
           </a:p>
           <a:p>
             <a:pPr lvl="3"/>
             <a:r>
-              <a:rPr lang="en-US" smtClean="0"/>
+              <a:rPr lang="en-US"/>
               <a:t>Fourth level</a:t>
             </a:r>
           </a:p>
           <a:p>
             <a:pPr lvl="4"/>
             <a:r>
-              <a:rPr lang="en-US" smtClean="0"/>
+              <a:rPr lang="en-US"/>
               <a:t>Fifth level</a:t>
             </a:r>
-            <a:endParaRPr lang="en-US"/>
           </a:p>
         </p:txBody>
       </p:sp>
@@ -1362,7 +1366,7 @@
           <a:p>
             <a:fld id="{5BCAD085-E8A6-8845-BD4E-CB4CCA059FC4}" type="datetimeFigureOut">
               <a:rPr lang="en-US" smtClean="0"/>
-              <a:t>1/27/13</a:t>
+              <a:t>8/12/2026</a:t>
             </a:fld>
             <a:endParaRPr lang="en-US"/>
           </a:p>
@@ -1460,10 +1464,9 @@
           </a:lstStyle>
           <a:p>
             <a:r>
-              <a:rPr lang="en-US" smtClean="0"/>
+              <a:rPr lang="en-US"/>
               <a:t>Click to edit Master title style</a:t>
             </a:r>
-            <a:endParaRPr lang="en-US"/>
           </a:p>
         </p:txBody>
       </p:sp>
@@ -1526,7 +1529,7 @@
           <a:p>
             <a:pPr lvl="0"/>
             <a:r>
-              <a:rPr lang="en-US" smtClean="0"/>
+              <a:rPr lang="en-US"/>
               <a:t>Click to edit Master text styles</a:t>
             </a:r>
           </a:p>
@@ -1582,38 +1585,37 @@
           <a:p>
             <a:pPr lvl="0"/>
             <a:r>
-              <a:rPr lang="en-US" smtClean="0"/>
+              <a:rPr lang="en-US"/>
               <a:t>Click to edit Master text styles</a:t>
             </a:r>
           </a:p>
           <a:p>
             <a:pPr lvl="1"/>
             <a:r>
-              <a:rPr lang="en-US" smtClean="0"/>
+              <a:rPr lang="en-US"/>
               <a:t>Second level</a:t>
             </a:r>
           </a:p>
           <a:p>
             <a:pPr lvl="2"/>
             <a:r>
-              <a:rPr lang="en-US" smtClean="0"/>
+              <a:rPr lang="en-US"/>
               <a:t>Third level</a:t>
             </a:r>
           </a:p>
           <a:p>
             <a:pPr lvl="3"/>
             <a:r>
-              <a:rPr lang="en-US" smtClean="0"/>
+              <a:rPr lang="en-US"/>
               <a:t>Fourth level</a:t>
             </a:r>
           </a:p>
           <a:p>
             <a:pPr lvl="4"/>
             <a:r>
-              <a:rPr lang="en-US" smtClean="0"/>
+              <a:rPr lang="en-US"/>
               <a:t>Fifth level</a:t>
             </a:r>
-            <a:endParaRPr lang="en-US"/>
           </a:p>
         </p:txBody>
       </p:sp>
@@ -1676,7 +1678,7 @@
           <a:p>
             <a:pPr lvl="0"/>
             <a:r>
-              <a:rPr lang="en-US" smtClean="0"/>
+              <a:rPr lang="en-US"/>
               <a:t>Click to edit Master text styles</a:t>
             </a:r>
           </a:p>
@@ -1732,38 +1734,37 @@
           <a:p>
             <a:pPr lvl="0"/>
             <a:r>
-              <a:rPr lang="en-US" smtClean="0"/>
+              <a:rPr lang="en-US"/>
               <a:t>Click to edit Master text styles</a:t>
             </a:r>
           </a:p>
           <a:p>
             <a:pPr lvl="1"/>
             <a:r>
-              <a:rPr lang="en-US" smtClean="0"/>
+              <a:rPr lang="en-US"/>
               <a:t>Second level</a:t>
             </a:r>
           </a:p>
           <a:p>
             <a:pPr lvl="2"/>
             <a:r>
-              <a:rPr lang="en-US" smtClean="0"/>
+              <a:rPr lang="en-US"/>
               <a:t>Third level</a:t>
             </a:r>
           </a:p>
           <a:p>
             <a:pPr lvl="3"/>
             <a:r>
-              <a:rPr lang="en-US" smtClean="0"/>
+              <a:rPr lang="en-US"/>
               <a:t>Fourth level</a:t>
             </a:r>
           </a:p>
           <a:p>
             <a:pPr lvl="4"/>
             <a:r>
-              <a:rPr lang="en-US" smtClean="0"/>
+              <a:rPr lang="en-US"/>
               <a:t>Fifth level</a:t>
             </a:r>
-            <a:endParaRPr lang="en-US"/>
           </a:p>
         </p:txBody>
       </p:sp>
@@ -1784,7 +1785,7 @@
           <a:p>
             <a:fld id="{5BCAD085-E8A6-8845-BD4E-CB4CCA059FC4}" type="datetimeFigureOut">
               <a:rPr lang="en-US" smtClean="0"/>
-              <a:t>1/27/13</a:t>
+              <a:t>8/12/2026</a:t>
             </a:fld>
             <a:endParaRPr lang="en-US"/>
           </a:p>
@@ -1878,10 +1879,9 @@
           <a:lstStyle/>
           <a:p>
             <a:r>
-              <a:rPr lang="en-US" smtClean="0"/>
+              <a:rPr lang="en-US"/>
               <a:t>Click to edit Master title style</a:t>
             </a:r>
-            <a:endParaRPr lang="en-US"/>
           </a:p>
         </p:txBody>
       </p:sp>
@@ -1902,7 +1902,7 @@
           <a:p>
             <a:fld id="{5BCAD085-E8A6-8845-BD4E-CB4CCA059FC4}" type="datetimeFigureOut">
               <a:rPr lang="en-US" smtClean="0"/>
-              <a:t>1/27/13</a:t>
+              <a:t>8/12/2026</a:t>
             </a:fld>
             <a:endParaRPr lang="en-US"/>
           </a:p>
@@ -1997,7 +1997,7 @@
           <a:p>
             <a:fld id="{5BCAD085-E8A6-8845-BD4E-CB4CCA059FC4}" type="datetimeFigureOut">
               <a:rPr lang="en-US" smtClean="0"/>
-              <a:t>1/27/13</a:t>
+              <a:t>8/12/2026</a:t>
             </a:fld>
             <a:endParaRPr lang="en-US"/>
           </a:p>
@@ -2100,10 +2100,9 @@
           </a:lstStyle>
           <a:p>
             <a:r>
-              <a:rPr lang="en-US" smtClean="0"/>
+              <a:rPr lang="en-US"/>
               <a:t>Click to edit Master title style</a:t>
             </a:r>
-            <a:endParaRPr lang="en-US"/>
           </a:p>
         </p:txBody>
       </p:sp>
@@ -2157,38 +2156,37 @@
           <a:p>
             <a:pPr lvl="0"/>
             <a:r>
-              <a:rPr lang="en-US" smtClean="0"/>
+              <a:rPr lang="en-US"/>
               <a:t>Click to edit Master text styles</a:t>
             </a:r>
           </a:p>
           <a:p>
             <a:pPr lvl="1"/>
             <a:r>
-              <a:rPr lang="en-US" smtClean="0"/>
+              <a:rPr lang="en-US"/>
               <a:t>Second level</a:t>
             </a:r>
           </a:p>
           <a:p>
             <a:pPr lvl="2"/>
             <a:r>
-              <a:rPr lang="en-US" smtClean="0"/>
+              <a:rPr lang="en-US"/>
               <a:t>Third level</a:t>
             </a:r>
           </a:p>
           <a:p>
             <a:pPr lvl="3"/>
             <a:r>
-              <a:rPr lang="en-US" smtClean="0"/>
+              <a:rPr lang="en-US"/>
               <a:t>Fourth level</a:t>
             </a:r>
           </a:p>
           <a:p>
             <a:pPr lvl="4"/>
             <a:r>
-              <a:rPr lang="en-US" smtClean="0"/>
+              <a:rPr lang="en-US"/>
               <a:t>Fifth level</a:t>
             </a:r>
-            <a:endParaRPr lang="en-US"/>
           </a:p>
         </p:txBody>
       </p:sp>
@@ -2251,7 +2249,7 @@
           <a:p>
             <a:pPr lvl="0"/>
             <a:r>
-              <a:rPr lang="en-US" smtClean="0"/>
+              <a:rPr lang="en-US"/>
               <a:t>Click to edit Master text styles</a:t>
             </a:r>
           </a:p>
@@ -2274,7 +2272,7 @@
           <a:p>
             <a:fld id="{5BCAD085-E8A6-8845-BD4E-CB4CCA059FC4}" type="datetimeFigureOut">
               <a:rPr lang="en-US" smtClean="0"/>
-              <a:t>1/27/13</a:t>
+              <a:t>8/12/2026</a:t>
             </a:fld>
             <a:endParaRPr lang="en-US"/>
           </a:p>
@@ -2377,10 +2375,9 @@
           </a:lstStyle>
           <a:p>
             <a:r>
-              <a:rPr lang="en-US" smtClean="0"/>
+              <a:rPr lang="en-US"/>
               <a:t>Click to edit Master title style</a:t>
             </a:r>
-            <a:endParaRPr lang="en-US"/>
           </a:p>
         </p:txBody>
       </p:sp>
@@ -2504,7 +2501,7 @@
           <a:p>
             <a:pPr lvl="0"/>
             <a:r>
-              <a:rPr lang="en-US" smtClean="0"/>
+              <a:rPr lang="en-US"/>
               <a:t>Click to edit Master text styles</a:t>
             </a:r>
           </a:p>
@@ -2527,7 +2524,7 @@
           <a:p>
             <a:fld id="{5BCAD085-E8A6-8845-BD4E-CB4CCA059FC4}" type="datetimeFigureOut">
               <a:rPr lang="en-US" smtClean="0"/>
-              <a:t>1/27/13</a:t>
+              <a:t>8/12/2026</a:t>
             </a:fld>
             <a:endParaRPr lang="en-US"/>
           </a:p>
@@ -2636,10 +2633,9 @@
           <a:lstStyle/>
           <a:p>
             <a:r>
-              <a:rPr lang="en-US" smtClean="0"/>
+              <a:rPr lang="en-US"/>
               <a:t>Click to edit Master title style</a:t>
             </a:r>
-            <a:endParaRPr lang="en-US"/>
           </a:p>
         </p:txBody>
       </p:sp>
@@ -2670,38 +2666,37 @@
           <a:p>
             <a:pPr lvl="0"/>
             <a:r>
-              <a:rPr lang="en-US" smtClean="0"/>
+              <a:rPr lang="en-US"/>
               <a:t>Click to edit Master text styles</a:t>
             </a:r>
           </a:p>
           <a:p>
             <a:pPr lvl="1"/>
             <a:r>
-              <a:rPr lang="en-US" smtClean="0"/>
+              <a:rPr lang="en-US"/>
               <a:t>Second level</a:t>
             </a:r>
           </a:p>
           <a:p>
             <a:pPr lvl="2"/>
             <a:r>
-              <a:rPr lang="en-US" smtClean="0"/>
+              <a:rPr lang="en-US"/>
               <a:t>Third level</a:t>
             </a:r>
           </a:p>
           <a:p>
             <a:pPr lvl="3"/>
             <a:r>
-              <a:rPr lang="en-US" smtClean="0"/>
+              <a:rPr lang="en-US"/>
               <a:t>Fourth level</a:t>
             </a:r>
           </a:p>
           <a:p>
             <a:pPr lvl="4"/>
             <a:r>
-              <a:rPr lang="en-US" smtClean="0"/>
+              <a:rPr lang="en-US"/>
               <a:t>Fifth level</a:t>
             </a:r>
-            <a:endParaRPr lang="en-US"/>
           </a:p>
         </p:txBody>
       </p:sp>
@@ -2740,7 +2735,7 @@
           <a:p>
             <a:fld id="{5BCAD085-E8A6-8845-BD4E-CB4CCA059FC4}" type="datetimeFigureOut">
               <a:rPr lang="en-US" smtClean="0"/>
-              <a:t>1/27/13</a:t>
+              <a:t>8/12/2026</a:t>
             </a:fld>
             <a:endParaRPr lang="en-US"/>
           </a:p>
@@ -3099,7 +3094,7 @@
 </file>
 
 <file path=ppt/slides/slide1.xml><?xml version="1.0" encoding="utf-8"?>
-<p:sld xmlns:a="http://schemas.openxmlformats.org/drawingml/2006/main" xmlns:p="http://schemas.openxmlformats.org/presentationml/2006/main" xmlns:r="http://schemas.openxmlformats.org/officeDocument/2006/relationships">
+<p:sld xmlns:a="http://schemas.openxmlformats.org/drawingml/2006/main" xmlns:r="http://schemas.openxmlformats.org/officeDocument/2006/relationships" xmlns:p="http://schemas.openxmlformats.org/presentationml/2006/main">
   <p:cSld>
     <p:spTree>
       <p:nvGrpSpPr>
@@ -3107,51 +3102,14 @@
         <p:cNvGrpSpPr/>
         <p:nvPr/>
       </p:nvGrpSpPr>
-      <p:grpSpPr/>
-      <p:sp>
-        <p:nvSpPr>
-          <p:cNvPr id="2" name="Rectangle 1"/>
-          <p:cNvSpPr/>
-          <p:nvPr/>
-        </p:nvSpPr>
-        <p:spPr>
-          <a:xfrm>
-            <a:off x="0" y="0"/>
-            <a:ext cx="12191695" cy="6858000"/>
-          </a:xfrm>
-          <a:prstGeom prst="rect">
-            <a:avLst/>
-          </a:prstGeom>
-          <a:solidFill>
-            <a:srgbClr val="FFFFFF"/>
-          </a:solidFill>
-          <a:ln>
-            <a:noFill/>
-          </a:ln>
-          <a:effectLst/>
-        </p:spPr>
-        <p:style>
-          <a:lnRef idx="1">
-            <a:schemeClr val="accent1"/>
-          </a:lnRef>
-          <a:fillRef idx="3">
-            <a:schemeClr val="accent1"/>
-          </a:fillRef>
-          <a:effectRef idx="2">
-            <a:schemeClr val="accent1"/>
-          </a:effectRef>
-          <a:fontRef idx="minor">
-            <a:schemeClr val="lt1"/>
-          </a:fontRef>
-        </p:style>
-        <p:txBody>
-          <a:bodyPr rtlCol="0" anchor="ctr"/>
-          <a:lstStyle/>
-          <a:p>
-            <a:pPr algn="ctr"/>
-          </a:p>
-        </p:txBody>
-      </p:sp>
+      <p:grpSpPr>
+        <a:xfrm>
+          <a:off x="0" y="0"/>
+          <a:ext cx="0" cy="0"/>
+          <a:chOff x="0" y="0"/>
+          <a:chExt cx="0" cy="0"/>
+        </a:xfrm>
+      </p:grpSpPr>
       <p:sp>
         <p:nvSpPr>
           <p:cNvPr id="3" name="Rounded Rectangle 2"/>
@@ -3177,7 +3135,7 @@
                 <a:srgbClr val="73787E"/>
               </a:gs>
             </a:gsLst>
-            <a:lin scaled="0" ang="18900000"/>
+            <a:lin ang="18900000" scaled="0"/>
           </a:gradFill>
           <a:ln>
             <a:noFill/>
@@ -3209,6 +3167,7 @@
           <a:lstStyle/>
           <a:p>
             <a:pPr algn="ctr"/>
+            <a:endParaRPr/>
           </a:p>
         </p:txBody>
       </p:sp>
@@ -3220,8 +3179,8 @@
         </p:nvSpPr>
         <p:spPr>
           <a:xfrm>
-            <a:off x="914400" y="1481328"/>
-            <a:ext cx="8467344" cy="1764792"/>
+            <a:off x="914399" y="1481328"/>
+            <a:ext cx="8464063" cy="1769267"/>
           </a:xfrm>
           <a:prstGeom prst="rect">
             <a:avLst/>
@@ -3243,15 +3202,62 @@
               </a:spcAft>
             </a:pPr>
             <a:r>
-              <a:rPr sz="1450" b="0">
+              <a:rPr sz="1450" b="0" dirty="0" err="1">
                 <a:solidFill>
                   <a:srgbClr val="767A7F"/>
                 </a:solidFill>
                 <a:latin typeface="맑은 고딕"/>
                 <a:ea typeface="맑은 고딕"/>
               </a:rPr>
-              <a:t>데이터 분석 결과보고서</a:t>
-            </a:r>
+              <a:t>데이터</a:t>
+            </a:r>
+            <a:r>
+              <a:rPr sz="1450" b="0" dirty="0">
+                <a:solidFill>
+                  <a:srgbClr val="767A7F"/>
+                </a:solidFill>
+                <a:latin typeface="맑은 고딕"/>
+                <a:ea typeface="맑은 고딕"/>
+              </a:rPr>
+              <a:t> </a:t>
+            </a:r>
+            <a:r>
+              <a:rPr sz="1450" b="0" dirty="0" err="1">
+                <a:solidFill>
+                  <a:srgbClr val="767A7F"/>
+                </a:solidFill>
+                <a:latin typeface="맑은 고딕"/>
+                <a:ea typeface="맑은 고딕"/>
+              </a:rPr>
+              <a:t>분석</a:t>
+            </a:r>
+            <a:r>
+              <a:rPr sz="1450" b="0" dirty="0">
+                <a:solidFill>
+                  <a:srgbClr val="767A7F"/>
+                </a:solidFill>
+                <a:latin typeface="맑은 고딕"/>
+                <a:ea typeface="맑은 고딕"/>
+              </a:rPr>
+              <a:t> </a:t>
+            </a:r>
+            <a:r>
+              <a:rPr sz="1450" b="0" dirty="0" err="1">
+                <a:solidFill>
+                  <a:srgbClr val="767A7F"/>
+                </a:solidFill>
+                <a:latin typeface="맑은 고딕"/>
+                <a:ea typeface="맑은 고딕"/>
+              </a:rPr>
+              <a:t>결과보고서</a:t>
+            </a:r>
+            <a:endParaRPr sz="1450" b="0" dirty="0">
+              <a:solidFill>
+                <a:srgbClr val="767A7F"/>
+              </a:solidFill>
+              <a:latin typeface="맑은 고딕"/>
+              <a:ea typeface="맑은 고딕"/>
+            </a:endParaRPr>
           </a:p>
           <a:p>
             <a:pPr>
@@ -3263,7 +3269,7 @@
               </a:spcAft>
             </a:pPr>
             <a:r>
-              <a:rPr sz="4700" b="1">
+              <a:rPr lang="ko-KR" altLang="en-US" sz="4700" b="1" dirty="0">
                 <a:solidFill>
                   <a:srgbClr val="1C1C1E"/>
                 </a:solidFill>
@@ -3272,6 +3278,13 @@
               </a:rPr>
               <a:t>분만취약지 지원제도 개선안</a:t>
             </a:r>
+            <a:endParaRPr lang="en-US" altLang="ko-KR" sz="1900" dirty="0">
+              <a:solidFill>
+                <a:srgbClr val="33393F"/>
+              </a:solidFill>
+              <a:latin typeface="맑은 고딕"/>
+              <a:ea typeface="맑은 고딕"/>
+            </a:endParaRPr>
           </a:p>
           <a:p>
             <a:pPr>
@@ -3279,19 +3292,156 @@
                 <a:spcPct val="114000"/>
               </a:lnSpc>
               <a:spcAft>
-                <a:spcPts val="0"/>
-              </a:spcAft>
-            </a:pPr>
-            <a:r>
-              <a:rPr sz="1900" b="0">
+                <a:spcPts val="800"/>
+              </a:spcAft>
+            </a:pPr>
+            <a:r>
+              <a:rPr sz="1900" b="0" dirty="0" err="1">
                 <a:solidFill>
                   <a:srgbClr val="33393F"/>
                 </a:solidFill>
                 <a:latin typeface="맑은 고딕"/>
                 <a:ea typeface="맑은 고딕"/>
               </a:rPr>
-              <a:t>분만취약지 지원 제도의 모든 절차 속 데이터 감사와 개선된 분석 모형 제안</a:t>
-            </a:r>
+              <a:t>분만취약지</a:t>
+            </a:r>
+            <a:r>
+              <a:rPr sz="1900" b="0" dirty="0">
+                <a:solidFill>
+                  <a:srgbClr val="33393F"/>
+                </a:solidFill>
+                <a:latin typeface="맑은 고딕"/>
+                <a:ea typeface="맑은 고딕"/>
+              </a:rPr>
+              <a:t> </a:t>
+            </a:r>
+            <a:r>
+              <a:rPr lang="ko-KR" altLang="en-US" sz="1900" b="0" dirty="0">
+                <a:solidFill>
+                  <a:srgbClr val="33393F"/>
+                </a:solidFill>
+                <a:latin typeface="맑은 고딕"/>
+                <a:ea typeface="맑은 고딕"/>
+              </a:rPr>
+              <a:t>지원 </a:t>
+            </a:r>
+            <a:r>
+              <a:rPr sz="1900" b="0" dirty="0" err="1">
+                <a:solidFill>
+                  <a:srgbClr val="33393F"/>
+                </a:solidFill>
+                <a:latin typeface="맑은 고딕"/>
+                <a:ea typeface="맑은 고딕"/>
+              </a:rPr>
+              <a:t>제도의</a:t>
+            </a:r>
+            <a:r>
+              <a:rPr sz="1900" b="0" dirty="0">
+                <a:solidFill>
+                  <a:srgbClr val="33393F"/>
+                </a:solidFill>
+                <a:latin typeface="맑은 고딕"/>
+                <a:ea typeface="맑은 고딕"/>
+              </a:rPr>
+              <a:t> </a:t>
+            </a:r>
+            <a:r>
+              <a:rPr lang="ko-KR" altLang="en-US" sz="1900" b="0" dirty="0">
+                <a:solidFill>
+                  <a:srgbClr val="33393F"/>
+                </a:solidFill>
+                <a:latin typeface="맑은 고딕"/>
+                <a:ea typeface="맑은 고딕"/>
+              </a:rPr>
+              <a:t>모든 절차 속 데이터</a:t>
+            </a:r>
+            <a:r>
+              <a:rPr sz="1900" b="0" dirty="0">
+                <a:solidFill>
+                  <a:srgbClr val="33393F"/>
+                </a:solidFill>
+                <a:latin typeface="맑은 고딕"/>
+                <a:ea typeface="맑은 고딕"/>
+              </a:rPr>
+              <a:t> </a:t>
+            </a:r>
+            <a:r>
+              <a:rPr sz="1900" b="0" dirty="0" err="1">
+                <a:solidFill>
+                  <a:srgbClr val="33393F"/>
+                </a:solidFill>
+                <a:latin typeface="맑은 고딕"/>
+                <a:ea typeface="맑은 고딕"/>
+              </a:rPr>
+              <a:t>감사와</a:t>
+            </a:r>
+            <a:r>
+              <a:rPr sz="1900" b="0" dirty="0">
+                <a:solidFill>
+                  <a:srgbClr val="33393F"/>
+                </a:solidFill>
+                <a:latin typeface="맑은 고딕"/>
+                <a:ea typeface="맑은 고딕"/>
+              </a:rPr>
+              <a:t> </a:t>
+            </a:r>
+            <a:r>
+              <a:rPr lang="ko-KR" altLang="en-US" sz="1900" dirty="0">
+                <a:solidFill>
+                  <a:srgbClr val="33393F"/>
+                </a:solidFill>
+                <a:latin typeface="맑은 고딕"/>
+                <a:ea typeface="맑은 고딕"/>
+              </a:rPr>
+              <a:t>개선된 분석</a:t>
+            </a:r>
+            <a:r>
+              <a:rPr sz="1900" b="0" dirty="0">
+                <a:solidFill>
+                  <a:srgbClr val="33393F"/>
+                </a:solidFill>
+                <a:latin typeface="맑은 고딕"/>
+                <a:ea typeface="맑은 고딕"/>
+              </a:rPr>
+              <a:t> </a:t>
+            </a:r>
+            <a:r>
+              <a:rPr sz="1900" b="0" dirty="0" err="1">
+                <a:solidFill>
+                  <a:srgbClr val="33393F"/>
+                </a:solidFill>
+                <a:latin typeface="맑은 고딕"/>
+                <a:ea typeface="맑은 고딕"/>
+              </a:rPr>
+              <a:t>모형</a:t>
+            </a:r>
+            <a:r>
+              <a:rPr lang="en-US" sz="1900" b="0" dirty="0">
+                <a:solidFill>
+                  <a:srgbClr val="33393F"/>
+                </a:solidFill>
+                <a:latin typeface="맑은 고딕"/>
+                <a:ea typeface="맑은 고딕"/>
+              </a:rPr>
+              <a:t> </a:t>
+            </a:r>
+            <a:r>
+              <a:rPr lang="ko-KR" altLang="en-US" sz="1900" b="0" dirty="0">
+                <a:solidFill>
+                  <a:srgbClr val="33393F"/>
+                </a:solidFill>
+                <a:latin typeface="맑은 고딕"/>
+                <a:ea typeface="맑은 고딕"/>
+              </a:rPr>
+              <a:t>제안</a:t>
+            </a:r>
+            <a:endParaRPr sz="1900" b="0" dirty="0">
+              <a:solidFill>
+                <a:srgbClr val="33393F"/>
+              </a:solidFill>
+              <a:latin typeface="맑은 고딕"/>
+              <a:ea typeface="맑은 고딕"/>
+            </a:endParaRPr>
           </a:p>
         </p:txBody>
       </p:sp>
@@ -3318,7 +3468,7 @@
                 <a:srgbClr val="FFFFFF"/>
               </a:gs>
             </a:gsLst>
-            <a:lin scaled="0" ang="0"/>
+            <a:lin ang="0" scaled="0"/>
           </a:gradFill>
           <a:ln>
             <a:noFill/>
@@ -3344,6 +3494,7 @@
           <a:lstStyle/>
           <a:p>
             <a:pPr algn="ctr"/>
+            <a:endParaRPr/>
           </a:p>
         </p:txBody>
       </p:sp>
@@ -3356,7 +3507,7 @@
         <p:spPr>
           <a:xfrm>
             <a:off x="914400" y="4663440"/>
-            <a:ext cx="6949440" cy="310896"/>
+            <a:ext cx="6949440" cy="307777"/>
           </a:xfrm>
           <a:prstGeom prst="rect">
             <a:avLst/>
@@ -3374,19 +3525,156 @@
                 <a:spcPct val="114000"/>
               </a:lnSpc>
               <a:spcAft>
-                <a:spcPts val="0"/>
-              </a:spcAft>
-            </a:pPr>
-            <a:r>
-              <a:rPr sz="1350" b="1">
-                <a:solidFill>
-                  <a:srgbClr val="1C1C1E"/>
-                </a:solidFill>
-                <a:latin typeface="맑은 고딕"/>
-                <a:ea typeface="맑은 고딕"/>
-              </a:rPr>
-              <a:t>2026 제5회 명지대학교 창의적 SW프로그램 경진대회 · 빅데이터 분석 부문</a:t>
-            </a:r>
+                <a:spcPts val="600"/>
+              </a:spcAft>
+            </a:pPr>
+            <a:r>
+              <a:rPr sz="1350" b="1" dirty="0">
+                <a:solidFill>
+                  <a:srgbClr val="1C1C1E"/>
+                </a:solidFill>
+                <a:latin typeface="맑은 고딕"/>
+                <a:ea typeface="맑은 고딕"/>
+              </a:rPr>
+              <a:t>2026 제5회 </a:t>
+            </a:r>
+            <a:r>
+              <a:rPr sz="1350" b="1" dirty="0" err="1">
+                <a:solidFill>
+                  <a:srgbClr val="1C1C1E"/>
+                </a:solidFill>
+                <a:latin typeface="맑은 고딕"/>
+                <a:ea typeface="맑은 고딕"/>
+              </a:rPr>
+              <a:t>명지대학교</a:t>
+            </a:r>
+            <a:r>
+              <a:rPr sz="1350" b="1" dirty="0">
+                <a:solidFill>
+                  <a:srgbClr val="1C1C1E"/>
+                </a:solidFill>
+                <a:latin typeface="맑은 고딕"/>
+                <a:ea typeface="맑은 고딕"/>
+              </a:rPr>
+              <a:t> </a:t>
+            </a:r>
+            <a:r>
+              <a:rPr sz="1350" b="1" dirty="0" err="1">
+                <a:solidFill>
+                  <a:srgbClr val="1C1C1E"/>
+                </a:solidFill>
+                <a:latin typeface="맑은 고딕"/>
+                <a:ea typeface="맑은 고딕"/>
+              </a:rPr>
+              <a:t>창의적</a:t>
+            </a:r>
+            <a:r>
+              <a:rPr sz="1350" b="1" dirty="0">
+                <a:solidFill>
+                  <a:srgbClr val="1C1C1E"/>
+                </a:solidFill>
+                <a:latin typeface="맑은 고딕"/>
+                <a:ea typeface="맑은 고딕"/>
+              </a:rPr>
+              <a:t> </a:t>
+            </a:r>
+            <a:r>
+              <a:rPr sz="1350" b="1" dirty="0" err="1">
+                <a:solidFill>
+                  <a:srgbClr val="1C1C1E"/>
+                </a:solidFill>
+                <a:latin typeface="맑은 고딕"/>
+                <a:ea typeface="맑은 고딕"/>
+              </a:rPr>
+              <a:t>SW프로그램</a:t>
+            </a:r>
+            <a:r>
+              <a:rPr sz="1350" b="1" dirty="0">
+                <a:solidFill>
+                  <a:srgbClr val="1C1C1E"/>
+                </a:solidFill>
+                <a:latin typeface="맑은 고딕"/>
+                <a:ea typeface="맑은 고딕"/>
+              </a:rPr>
+              <a:t> </a:t>
+            </a:r>
+            <a:r>
+              <a:rPr sz="1350" b="1" dirty="0" err="1">
+                <a:solidFill>
+                  <a:srgbClr val="1C1C1E"/>
+                </a:solidFill>
+                <a:latin typeface="맑은 고딕"/>
+                <a:ea typeface="맑은 고딕"/>
+              </a:rPr>
+              <a:t>경진대회</a:t>
+            </a:r>
+            <a:r>
+              <a:rPr sz="1350" b="1" dirty="0">
+                <a:solidFill>
+                  <a:srgbClr val="1C1C1E"/>
+                </a:solidFill>
+                <a:latin typeface="맑은 고딕"/>
+                <a:ea typeface="맑은 고딕"/>
+              </a:rPr>
+              <a:t> · </a:t>
+            </a:r>
+            <a:r>
+              <a:rPr sz="1350" b="1" dirty="0" err="1">
+                <a:solidFill>
+                  <a:srgbClr val="1C1C1E"/>
+                </a:solidFill>
+                <a:latin typeface="맑은 고딕"/>
+                <a:ea typeface="맑은 고딕"/>
+              </a:rPr>
+              <a:t>빅데이터</a:t>
+            </a:r>
+            <a:r>
+              <a:rPr sz="1350" b="1" dirty="0">
+                <a:solidFill>
+                  <a:srgbClr val="1C1C1E"/>
+                </a:solidFill>
+                <a:latin typeface="맑은 고딕"/>
+                <a:ea typeface="맑은 고딕"/>
+              </a:rPr>
+              <a:t> </a:t>
+            </a:r>
+            <a:r>
+              <a:rPr sz="1350" b="1" dirty="0" err="1">
+                <a:solidFill>
+                  <a:srgbClr val="1C1C1E"/>
+                </a:solidFill>
+                <a:latin typeface="맑은 고딕"/>
+                <a:ea typeface="맑은 고딕"/>
+              </a:rPr>
+              <a:t>분석</a:t>
+            </a:r>
+            <a:r>
+              <a:rPr sz="1350" b="1" dirty="0">
+                <a:solidFill>
+                  <a:srgbClr val="1C1C1E"/>
+                </a:solidFill>
+                <a:latin typeface="맑은 고딕"/>
+                <a:ea typeface="맑은 고딕"/>
+              </a:rPr>
+              <a:t> </a:t>
+            </a:r>
+            <a:r>
+              <a:rPr sz="1350" b="1" dirty="0" err="1">
+                <a:solidFill>
+                  <a:srgbClr val="1C1C1E"/>
+                </a:solidFill>
+                <a:latin typeface="맑은 고딕"/>
+                <a:ea typeface="맑은 고딕"/>
+              </a:rPr>
+              <a:t>부문</a:t>
+            </a:r>
+            <a:endParaRPr sz="1350" b="1" dirty="0">
+              <a:solidFill>
+                <a:srgbClr val="1C1C1E"/>
+              </a:solidFill>
+              <a:latin typeface="맑은 고딕"/>
+              <a:ea typeface="맑은 고딕"/>
+            </a:endParaRPr>
           </a:p>
         </p:txBody>
       </p:sp>
@@ -3399,7 +3687,7 @@
 </file>
 
 <file path=ppt/slides/slide10.xml><?xml version="1.0" encoding="utf-8"?>
-<p:sld xmlns:a="http://schemas.openxmlformats.org/drawingml/2006/main" xmlns:p="http://schemas.openxmlformats.org/presentationml/2006/main" xmlns:r="http://schemas.openxmlformats.org/officeDocument/2006/relationships">
+<p:sld xmlns:a="http://schemas.openxmlformats.org/drawingml/2006/main" xmlns:r="http://schemas.openxmlformats.org/officeDocument/2006/relationships" xmlns:p="http://schemas.openxmlformats.org/presentationml/2006/main">
   <p:cSld>
     <p:spTree>
       <p:nvGrpSpPr>
@@ -3407,7 +3695,14 @@
         <p:cNvGrpSpPr/>
         <p:nvPr/>
       </p:nvGrpSpPr>
-      <p:grpSpPr/>
+      <p:grpSpPr>
+        <a:xfrm>
+          <a:off x="0" y="0"/>
+          <a:ext cx="0" cy="0"/>
+          <a:chOff x="0" y="0"/>
+          <a:chExt cx="0" cy="0"/>
+        </a:xfrm>
+      </p:grpSpPr>
       <p:sp>
         <p:nvSpPr>
           <p:cNvPr id="2" name="Rectangle 1"/>
@@ -3449,6 +3744,7 @@
           <a:lstStyle/>
           <a:p>
             <a:pPr algn="ctr"/>
+            <a:endParaRPr/>
           </a:p>
         </p:txBody>
       </p:sp>
@@ -3460,8 +3756,8 @@
         </p:nvSpPr>
         <p:spPr>
           <a:xfrm>
-            <a:off x="502920" y="475488"/>
-            <a:ext cx="310896" cy="310896"/>
+            <a:off x="554736" y="527304"/>
+            <a:ext cx="207264" cy="207264"/>
           </a:xfrm>
           <a:prstGeom prst="roundRect">
             <a:avLst>
@@ -3477,7 +3773,7 @@
                 <a:srgbClr val="73787E"/>
               </a:gs>
             </a:gsLst>
-            <a:lin scaled="0" ang="18900000"/>
+            <a:lin ang="18900000" scaled="0"/>
           </a:gradFill>
           <a:ln>
             <a:noFill/>
@@ -3509,6 +3805,7 @@
           <a:lstStyle/>
           <a:p>
             <a:pPr algn="ctr"/>
+            <a:endParaRPr/>
           </a:p>
         </p:txBody>
       </p:sp>
@@ -3578,7 +3875,7 @@
                 <a:srgbClr val="FFFFFF"/>
               </a:gs>
             </a:gsLst>
-            <a:lin scaled="0" ang="0"/>
+            <a:lin ang="0" scaled="0"/>
           </a:gradFill>
           <a:ln>
             <a:noFill/>
@@ -3604,6 +3901,7 @@
           <a:lstStyle/>
           <a:p>
             <a:pPr algn="ctr"/>
+            <a:endParaRPr/>
           </a:p>
         </p:txBody>
       </p:sp>
@@ -3761,7 +4059,7 @@
                 <a:srgbClr val="4A4F55"/>
               </a:gs>
             </a:gsLst>
-            <a:lin scaled="0" ang="14700000"/>
+            <a:lin ang="14700000" scaled="0"/>
           </a:gradFill>
           <a:ln>
             <a:noFill/>
@@ -3793,6 +4091,7 @@
           <a:lstStyle/>
           <a:p>
             <a:pPr algn="ctr"/>
+            <a:endParaRPr/>
           </a:p>
         </p:txBody>
       </p:sp>
@@ -3910,6 +4209,7 @@
           <a:lstStyle/>
           <a:p>
             <a:pPr algn="ctr"/>
+            <a:endParaRPr/>
           </a:p>
         </p:txBody>
       </p:sp>
@@ -4067,6 +4367,7 @@
           <a:lstStyle/>
           <a:p>
             <a:pPr algn="ctr"/>
+            <a:endParaRPr/>
           </a:p>
         </p:txBody>
       </p:sp>
@@ -4202,7 +4503,7 @@
 </file>
 
 <file path=ppt/slides/slide11.xml><?xml version="1.0" encoding="utf-8"?>
-<p:sld xmlns:a="http://schemas.openxmlformats.org/drawingml/2006/main" xmlns:p="http://schemas.openxmlformats.org/presentationml/2006/main" xmlns:r="http://schemas.openxmlformats.org/officeDocument/2006/relationships">
+<p:sld xmlns:a="http://schemas.openxmlformats.org/drawingml/2006/main" xmlns:r="http://schemas.openxmlformats.org/officeDocument/2006/relationships" xmlns:p="http://schemas.openxmlformats.org/presentationml/2006/main">
   <p:cSld>
     <p:spTree>
       <p:nvGrpSpPr>
@@ -4210,7 +4511,14 @@
         <p:cNvGrpSpPr/>
         <p:nvPr/>
       </p:nvGrpSpPr>
-      <p:grpSpPr/>
+      <p:grpSpPr>
+        <a:xfrm>
+          <a:off x="0" y="0"/>
+          <a:ext cx="0" cy="0"/>
+          <a:chOff x="0" y="0"/>
+          <a:chExt cx="0" cy="0"/>
+        </a:xfrm>
+      </p:grpSpPr>
       <p:sp>
         <p:nvSpPr>
           <p:cNvPr id="2" name="Rectangle 1"/>
@@ -4252,6 +4560,7 @@
           <a:lstStyle/>
           <a:p>
             <a:pPr algn="ctr"/>
+            <a:endParaRPr/>
           </a:p>
         </p:txBody>
       </p:sp>
@@ -4263,8 +4572,8 @@
         </p:nvSpPr>
         <p:spPr>
           <a:xfrm>
-            <a:off x="502920" y="475488"/>
-            <a:ext cx="310896" cy="310896"/>
+            <a:off x="554736" y="527304"/>
+            <a:ext cx="207264" cy="207264"/>
           </a:xfrm>
           <a:prstGeom prst="roundRect">
             <a:avLst>
@@ -4280,7 +4589,7 @@
                 <a:srgbClr val="73787E"/>
               </a:gs>
             </a:gsLst>
-            <a:lin scaled="0" ang="18900000"/>
+            <a:lin ang="18900000" scaled="0"/>
           </a:gradFill>
           <a:ln>
             <a:noFill/>
@@ -4312,6 +4621,7 @@
           <a:lstStyle/>
           <a:p>
             <a:pPr algn="ctr"/>
+            <a:endParaRPr/>
           </a:p>
         </p:txBody>
       </p:sp>
@@ -4381,7 +4691,7 @@
                 <a:srgbClr val="FFFFFF"/>
               </a:gs>
             </a:gsLst>
-            <a:lin scaled="0" ang="0"/>
+            <a:lin ang="0" scaled="0"/>
           </a:gradFill>
           <a:ln>
             <a:noFill/>
@@ -4407,6 +4717,7 @@
           <a:lstStyle/>
           <a:p>
             <a:pPr algn="ctr"/>
+            <a:endParaRPr/>
           </a:p>
         </p:txBody>
       </p:sp>
@@ -4515,9 +4826,27 @@
                 <a:tableStyleId>{5C22544A-7EE6-4342-B048-85BDC9FD1C3A}</a:tableStyleId>
               </a:tblPr>
               <a:tblGrid>
-                <a:gridCol w="3291840"/>
-                <a:gridCol w="4846320"/>
-                <a:gridCol w="3154680"/>
+                <a:gridCol w="3291840">
+                  <a:extLst>
+                    <a:ext uri="{9D8B030D-6E8A-4147-A177-3AD203B41FA5}">
+                      <a16:colId xmlns:a16="http://schemas.microsoft.com/office/drawing/2014/main" val="20000"/>
+                    </a:ext>
+                  </a:extLst>
+                </a:gridCol>
+                <a:gridCol w="4846320">
+                  <a:extLst>
+                    <a:ext uri="{9D8B030D-6E8A-4147-A177-3AD203B41FA5}">
+                      <a16:colId xmlns:a16="http://schemas.microsoft.com/office/drawing/2014/main" val="20001"/>
+                    </a:ext>
+                  </a:extLst>
+                </a:gridCol>
+                <a:gridCol w="3154680">
+                  <a:extLst>
+                    <a:ext uri="{9D8B030D-6E8A-4147-A177-3AD203B41FA5}">
+                      <a16:colId xmlns:a16="http://schemas.microsoft.com/office/drawing/2014/main" val="20002"/>
+                    </a:ext>
+                  </a:extLst>
+                </a:gridCol>
               </a:tblGrid>
               <a:tr h="512064">
                 <a:tc>
@@ -4542,7 +4871,7 @@
                       </a:r>
                     </a:p>
                   </a:txBody>
-                  <a:tcPr marT="27432" marB="27432" marL="73152" marR="73152" anchor="ctr">
+                  <a:tcPr marL="73152" marR="73152" marT="27432" marB="27432" anchor="ctr">
                     <a:solidFill>
                       <a:srgbClr val="33393F"/>
                     </a:solidFill>
@@ -4570,7 +4899,7 @@
                       </a:r>
                     </a:p>
                   </a:txBody>
-                  <a:tcPr marT="27432" marB="27432" marL="73152" marR="73152" anchor="ctr">
+                  <a:tcPr marL="73152" marR="73152" marT="27432" marB="27432" anchor="ctr">
                     <a:solidFill>
                       <a:srgbClr val="33393F"/>
                     </a:solidFill>
@@ -4598,12 +4927,17 @@
                       </a:r>
                     </a:p>
                   </a:txBody>
-                  <a:tcPr marT="27432" marB="27432" marL="73152" marR="73152" anchor="ctr">
+                  <a:tcPr marL="73152" marR="73152" marT="27432" marB="27432" anchor="ctr">
                     <a:solidFill>
                       <a:srgbClr val="33393F"/>
                     </a:solidFill>
                   </a:tcPr>
                 </a:tc>
+                <a:extLst>
+                  <a:ext uri="{0D108BD9-81ED-4DB2-BD59-A6C34878D82A}">
+                    <a16:rowId xmlns:a16="http://schemas.microsoft.com/office/drawing/2014/main" val="10000"/>
+                  </a:ext>
+                </a:extLst>
               </a:tr>
               <a:tr h="512064">
                 <a:tc>
@@ -4628,7 +4962,7 @@
                       </a:r>
                     </a:p>
                   </a:txBody>
-                  <a:tcPr marT="27432" marB="27432" marL="73152" marR="73152" anchor="ctr">
+                  <a:tcPr marL="73152" marR="73152" marT="27432" marB="27432" anchor="ctr">
                     <a:solidFill>
                       <a:srgbClr val="E3E5E8"/>
                     </a:solidFill>
@@ -4656,7 +4990,7 @@
                       </a:r>
                     </a:p>
                   </a:txBody>
-                  <a:tcPr marT="27432" marB="27432" marL="73152" marR="73152" anchor="ctr">
+                  <a:tcPr marL="73152" marR="73152" marT="27432" marB="27432" anchor="ctr">
                     <a:solidFill>
                       <a:srgbClr val="E3E5E8"/>
                     </a:solidFill>
@@ -4684,12 +5018,17 @@
                       </a:r>
                     </a:p>
                   </a:txBody>
-                  <a:tcPr marT="27432" marB="27432" marL="73152" marR="73152" anchor="ctr">
+                  <a:tcPr marL="73152" marR="73152" marT="27432" marB="27432" anchor="ctr">
                     <a:solidFill>
                       <a:srgbClr val="E3E5E8"/>
                     </a:solidFill>
                   </a:tcPr>
                 </a:tc>
+                <a:extLst>
+                  <a:ext uri="{0D108BD9-81ED-4DB2-BD59-A6C34878D82A}">
+                    <a16:rowId xmlns:a16="http://schemas.microsoft.com/office/drawing/2014/main" val="10001"/>
+                  </a:ext>
+                </a:extLst>
               </a:tr>
               <a:tr h="512064">
                 <a:tc>
@@ -4714,7 +5053,7 @@
                       </a:r>
                     </a:p>
                   </a:txBody>
-                  <a:tcPr marT="27432" marB="27432" marL="73152" marR="73152" anchor="ctr">
+                  <a:tcPr marL="73152" marR="73152" marT="27432" marB="27432" anchor="ctr">
                     <a:solidFill>
                       <a:srgbClr val="F6F7F8"/>
                     </a:solidFill>
@@ -4742,7 +5081,7 @@
                       </a:r>
                     </a:p>
                   </a:txBody>
-                  <a:tcPr marT="27432" marB="27432" marL="73152" marR="73152" anchor="ctr">
+                  <a:tcPr marL="73152" marR="73152" marT="27432" marB="27432" anchor="ctr">
                     <a:solidFill>
                       <a:srgbClr val="F6F7F8"/>
                     </a:solidFill>
@@ -4770,12 +5109,17 @@
                       </a:r>
                     </a:p>
                   </a:txBody>
-                  <a:tcPr marT="27432" marB="27432" marL="73152" marR="73152" anchor="ctr">
+                  <a:tcPr marL="73152" marR="73152" marT="27432" marB="27432" anchor="ctr">
                     <a:solidFill>
                       <a:srgbClr val="F6F7F8"/>
                     </a:solidFill>
                   </a:tcPr>
                 </a:tc>
+                <a:extLst>
+                  <a:ext uri="{0D108BD9-81ED-4DB2-BD59-A6C34878D82A}">
+                    <a16:rowId xmlns:a16="http://schemas.microsoft.com/office/drawing/2014/main" val="10002"/>
+                  </a:ext>
+                </a:extLst>
               </a:tr>
             </a:tbl>
           </a:graphicData>
@@ -4832,6 +5176,7 @@
           <a:lstStyle/>
           <a:p>
             <a:pPr algn="ctr"/>
+            <a:endParaRPr/>
           </a:p>
         </p:txBody>
       </p:sp>
@@ -5009,6 +5354,7 @@
           <a:lstStyle/>
           <a:p>
             <a:pPr algn="ctr"/>
+            <a:endParaRPr/>
           </a:p>
         </p:txBody>
       </p:sp>
@@ -5144,7 +5490,7 @@
 </file>
 
 <file path=ppt/slides/slide12.xml><?xml version="1.0" encoding="utf-8"?>
-<p:sld xmlns:a="http://schemas.openxmlformats.org/drawingml/2006/main" xmlns:p="http://schemas.openxmlformats.org/presentationml/2006/main" xmlns:r="http://schemas.openxmlformats.org/officeDocument/2006/relationships">
+<p:sld xmlns:a="http://schemas.openxmlformats.org/drawingml/2006/main" xmlns:r="http://schemas.openxmlformats.org/officeDocument/2006/relationships" xmlns:p="http://schemas.openxmlformats.org/presentationml/2006/main">
   <p:cSld>
     <p:spTree>
       <p:nvGrpSpPr>
@@ -5152,7 +5498,14 @@
         <p:cNvGrpSpPr/>
         <p:nvPr/>
       </p:nvGrpSpPr>
-      <p:grpSpPr/>
+      <p:grpSpPr>
+        <a:xfrm>
+          <a:off x="0" y="0"/>
+          <a:ext cx="0" cy="0"/>
+          <a:chOff x="0" y="0"/>
+          <a:chExt cx="0" cy="0"/>
+        </a:xfrm>
+      </p:grpSpPr>
       <p:sp>
         <p:nvSpPr>
           <p:cNvPr id="2" name="Rectangle 1"/>
@@ -5194,6 +5547,7 @@
           <a:lstStyle/>
           <a:p>
             <a:pPr algn="ctr"/>
+            <a:endParaRPr/>
           </a:p>
         </p:txBody>
       </p:sp>
@@ -5205,8 +5559,8 @@
         </p:nvSpPr>
         <p:spPr>
           <a:xfrm>
-            <a:off x="502920" y="475488"/>
-            <a:ext cx="310896" cy="310896"/>
+            <a:off x="554736" y="527304"/>
+            <a:ext cx="207264" cy="207264"/>
           </a:xfrm>
           <a:prstGeom prst="roundRect">
             <a:avLst>
@@ -5222,7 +5576,7 @@
                 <a:srgbClr val="73787E"/>
               </a:gs>
             </a:gsLst>
-            <a:lin scaled="0" ang="18900000"/>
+            <a:lin ang="18900000" scaled="0"/>
           </a:gradFill>
           <a:ln>
             <a:noFill/>
@@ -5254,6 +5608,7 @@
           <a:lstStyle/>
           <a:p>
             <a:pPr algn="ctr"/>
+            <a:endParaRPr/>
           </a:p>
         </p:txBody>
       </p:sp>
@@ -5323,7 +5678,7 @@
                 <a:srgbClr val="FFFFFF"/>
               </a:gs>
             </a:gsLst>
-            <a:lin scaled="0" ang="0"/>
+            <a:lin ang="0" scaled="0"/>
           </a:gradFill>
           <a:ln>
             <a:noFill/>
@@ -5349,6 +5704,7 @@
           <a:lstStyle/>
           <a:p>
             <a:pPr algn="ctr"/>
+            <a:endParaRPr/>
           </a:p>
         </p:txBody>
       </p:sp>
@@ -5489,6 +5845,7 @@
           <a:lstStyle/>
           <a:p>
             <a:pPr algn="ctr"/>
+            <a:endParaRPr/>
           </a:p>
         </p:txBody>
       </p:sp>
@@ -5606,6 +5963,7 @@
           <a:lstStyle/>
           <a:p>
             <a:pPr algn="ctr"/>
+            <a:endParaRPr/>
           </a:p>
         </p:txBody>
       </p:sp>
@@ -5743,6 +6101,7 @@
           <a:lstStyle/>
           <a:p>
             <a:pPr algn="ctr"/>
+            <a:endParaRPr/>
           </a:p>
         </p:txBody>
       </p:sp>
@@ -5880,6 +6239,7 @@
           <a:lstStyle/>
           <a:p>
             <a:pPr algn="ctr"/>
+            <a:endParaRPr/>
           </a:p>
         </p:txBody>
       </p:sp>
@@ -6018,7 +6378,7 @@
 </file>
 
 <file path=ppt/slides/slide13.xml><?xml version="1.0" encoding="utf-8"?>
-<p:sld xmlns:a="http://schemas.openxmlformats.org/drawingml/2006/main" xmlns:p="http://schemas.openxmlformats.org/presentationml/2006/main" xmlns:r="http://schemas.openxmlformats.org/officeDocument/2006/relationships">
+<p:sld xmlns:a="http://schemas.openxmlformats.org/drawingml/2006/main" xmlns:r="http://schemas.openxmlformats.org/officeDocument/2006/relationships" xmlns:p="http://schemas.openxmlformats.org/presentationml/2006/main">
   <p:cSld>
     <p:spTree>
       <p:nvGrpSpPr>
@@ -6026,7 +6386,14 @@
         <p:cNvGrpSpPr/>
         <p:nvPr/>
       </p:nvGrpSpPr>
-      <p:grpSpPr/>
+      <p:grpSpPr>
+        <a:xfrm>
+          <a:off x="0" y="0"/>
+          <a:ext cx="0" cy="0"/>
+          <a:chOff x="0" y="0"/>
+          <a:chExt cx="0" cy="0"/>
+        </a:xfrm>
+      </p:grpSpPr>
       <p:sp>
         <p:nvSpPr>
           <p:cNvPr id="2" name="Rectangle 1"/>
@@ -6068,6 +6435,7 @@
           <a:lstStyle/>
           <a:p>
             <a:pPr algn="ctr"/>
+            <a:endParaRPr/>
           </a:p>
         </p:txBody>
       </p:sp>
@@ -6079,8 +6447,8 @@
         </p:nvSpPr>
         <p:spPr>
           <a:xfrm>
-            <a:off x="502920" y="475488"/>
-            <a:ext cx="310896" cy="310896"/>
+            <a:off x="554736" y="527304"/>
+            <a:ext cx="207264" cy="207264"/>
           </a:xfrm>
           <a:prstGeom prst="roundRect">
             <a:avLst>
@@ -6096,7 +6464,7 @@
                 <a:srgbClr val="73787E"/>
               </a:gs>
             </a:gsLst>
-            <a:lin scaled="0" ang="18900000"/>
+            <a:lin ang="18900000" scaled="0"/>
           </a:gradFill>
           <a:ln>
             <a:noFill/>
@@ -6128,6 +6496,7 @@
           <a:lstStyle/>
           <a:p>
             <a:pPr algn="ctr"/>
+            <a:endParaRPr/>
           </a:p>
         </p:txBody>
       </p:sp>
@@ -6197,7 +6566,7 @@
                 <a:srgbClr val="FFFFFF"/>
               </a:gs>
             </a:gsLst>
-            <a:lin scaled="0" ang="0"/>
+            <a:lin ang="0" scaled="0"/>
           </a:gradFill>
           <a:ln>
             <a:noFill/>
@@ -6223,6 +6592,7 @@
           <a:lstStyle/>
           <a:p>
             <a:pPr algn="ctr"/>
+            <a:endParaRPr/>
           </a:p>
         </p:txBody>
       </p:sp>
@@ -6363,6 +6733,7 @@
           <a:lstStyle/>
           <a:p>
             <a:pPr algn="ctr"/>
+            <a:endParaRPr/>
           </a:p>
         </p:txBody>
       </p:sp>
@@ -6500,6 +6871,7 @@
           <a:lstStyle/>
           <a:p>
             <a:pPr algn="ctr"/>
+            <a:endParaRPr/>
           </a:p>
         </p:txBody>
       </p:sp>
@@ -6675,6 +7047,7 @@
           <a:lstStyle/>
           <a:p>
             <a:pPr algn="ctr"/>
+            <a:endParaRPr/>
           </a:p>
         </p:txBody>
       </p:sp>
@@ -6711,7 +7084,7 @@
 </file>
 
 <file path=ppt/slides/slide14.xml><?xml version="1.0" encoding="utf-8"?>
-<p:sld xmlns:a="http://schemas.openxmlformats.org/drawingml/2006/main" xmlns:p="http://schemas.openxmlformats.org/presentationml/2006/main" xmlns:r="http://schemas.openxmlformats.org/officeDocument/2006/relationships">
+<p:sld xmlns:a="http://schemas.openxmlformats.org/drawingml/2006/main" xmlns:r="http://schemas.openxmlformats.org/officeDocument/2006/relationships" xmlns:p="http://schemas.openxmlformats.org/presentationml/2006/main">
   <p:cSld>
     <p:spTree>
       <p:nvGrpSpPr>
@@ -6719,7 +7092,14 @@
         <p:cNvGrpSpPr/>
         <p:nvPr/>
       </p:nvGrpSpPr>
-      <p:grpSpPr/>
+      <p:grpSpPr>
+        <a:xfrm>
+          <a:off x="0" y="0"/>
+          <a:ext cx="0" cy="0"/>
+          <a:chOff x="0" y="0"/>
+          <a:chExt cx="0" cy="0"/>
+        </a:xfrm>
+      </p:grpSpPr>
       <p:sp>
         <p:nvSpPr>
           <p:cNvPr id="2" name="Rectangle 1"/>
@@ -6761,6 +7141,7 @@
           <a:lstStyle/>
           <a:p>
             <a:pPr algn="ctr"/>
+            <a:endParaRPr/>
           </a:p>
         </p:txBody>
       </p:sp>
@@ -6772,8 +7153,8 @@
         </p:nvSpPr>
         <p:spPr>
           <a:xfrm>
-            <a:off x="502920" y="475488"/>
-            <a:ext cx="310896" cy="310896"/>
+            <a:off x="554736" y="527304"/>
+            <a:ext cx="207264" cy="207264"/>
           </a:xfrm>
           <a:prstGeom prst="roundRect">
             <a:avLst>
@@ -6789,7 +7170,7 @@
                 <a:srgbClr val="73787E"/>
               </a:gs>
             </a:gsLst>
-            <a:lin scaled="0" ang="18900000"/>
+            <a:lin ang="18900000" scaled="0"/>
           </a:gradFill>
           <a:ln>
             <a:noFill/>
@@ -6821,6 +7202,7 @@
           <a:lstStyle/>
           <a:p>
             <a:pPr algn="ctr"/>
+            <a:endParaRPr/>
           </a:p>
         </p:txBody>
       </p:sp>
@@ -6890,7 +7272,7 @@
                 <a:srgbClr val="FFFFFF"/>
               </a:gs>
             </a:gsLst>
-            <a:lin scaled="0" ang="0"/>
+            <a:lin ang="0" scaled="0"/>
           </a:gradFill>
           <a:ln>
             <a:noFill/>
@@ -6916,6 +7298,7 @@
           <a:lstStyle/>
           <a:p>
             <a:pPr algn="ctr"/>
+            <a:endParaRPr/>
           </a:p>
         </p:txBody>
       </p:sp>
@@ -7067,9 +7450,27 @@
                 <a:tableStyleId>{5C22544A-7EE6-4342-B048-85BDC9FD1C3A}</a:tableStyleId>
               </a:tblPr>
               <a:tblGrid>
-                <a:gridCol w="3931920"/>
-                <a:gridCol w="4206240"/>
-                <a:gridCol w="3154680"/>
+                <a:gridCol w="3931920">
+                  <a:extLst>
+                    <a:ext uri="{9D8B030D-6E8A-4147-A177-3AD203B41FA5}">
+                      <a16:colId xmlns:a16="http://schemas.microsoft.com/office/drawing/2014/main" val="20000"/>
+                    </a:ext>
+                  </a:extLst>
+                </a:gridCol>
+                <a:gridCol w="4206240">
+                  <a:extLst>
+                    <a:ext uri="{9D8B030D-6E8A-4147-A177-3AD203B41FA5}">
+                      <a16:colId xmlns:a16="http://schemas.microsoft.com/office/drawing/2014/main" val="20001"/>
+                    </a:ext>
+                  </a:extLst>
+                </a:gridCol>
+                <a:gridCol w="3154680">
+                  <a:extLst>
+                    <a:ext uri="{9D8B030D-6E8A-4147-A177-3AD203B41FA5}">
+                      <a16:colId xmlns:a16="http://schemas.microsoft.com/office/drawing/2014/main" val="20002"/>
+                    </a:ext>
+                  </a:extLst>
+                </a:gridCol>
               </a:tblGrid>
               <a:tr h="457200">
                 <a:tc>
@@ -7094,7 +7495,7 @@
                       </a:r>
                     </a:p>
                   </a:txBody>
-                  <a:tcPr marT="27432" marB="27432" marL="73152" marR="73152" anchor="ctr">
+                  <a:tcPr marL="73152" marR="73152" marT="27432" marB="27432" anchor="ctr">
                     <a:solidFill>
                       <a:srgbClr val="33393F"/>
                     </a:solidFill>
@@ -7122,7 +7523,7 @@
                       </a:r>
                     </a:p>
                   </a:txBody>
-                  <a:tcPr marT="27432" marB="27432" marL="73152" marR="73152" anchor="ctr">
+                  <a:tcPr marL="73152" marR="73152" marT="27432" marB="27432" anchor="ctr">
                     <a:solidFill>
                       <a:srgbClr val="33393F"/>
                     </a:solidFill>
@@ -7150,12 +7551,17 @@
                       </a:r>
                     </a:p>
                   </a:txBody>
-                  <a:tcPr marT="27432" marB="27432" marL="73152" marR="73152" anchor="ctr">
+                  <a:tcPr marL="73152" marR="73152" marT="27432" marB="27432" anchor="ctr">
                     <a:solidFill>
                       <a:srgbClr val="33393F"/>
                     </a:solidFill>
                   </a:tcPr>
                 </a:tc>
+                <a:extLst>
+                  <a:ext uri="{0D108BD9-81ED-4DB2-BD59-A6C34878D82A}">
+                    <a16:rowId xmlns:a16="http://schemas.microsoft.com/office/drawing/2014/main" val="10000"/>
+                  </a:ext>
+                </a:extLst>
               </a:tr>
               <a:tr h="457200">
                 <a:tc>
@@ -7180,7 +7586,7 @@
                       </a:r>
                     </a:p>
                   </a:txBody>
-                  <a:tcPr marT="27432" marB="27432" marL="73152" marR="73152" anchor="ctr">
+                  <a:tcPr marL="73152" marR="73152" marT="27432" marB="27432" anchor="ctr">
                     <a:solidFill>
                       <a:srgbClr val="FFFFFF"/>
                     </a:solidFill>
@@ -7208,7 +7614,7 @@
                       </a:r>
                     </a:p>
                   </a:txBody>
-                  <a:tcPr marT="27432" marB="27432" marL="73152" marR="73152" anchor="ctr">
+                  <a:tcPr marL="73152" marR="73152" marT="27432" marB="27432" anchor="ctr">
                     <a:solidFill>
                       <a:srgbClr val="FFFFFF"/>
                     </a:solidFill>
@@ -7236,12 +7642,17 @@
                       </a:r>
                     </a:p>
                   </a:txBody>
-                  <a:tcPr marT="27432" marB="27432" marL="73152" marR="73152" anchor="ctr">
+                  <a:tcPr marL="73152" marR="73152" marT="27432" marB="27432" anchor="ctr">
                     <a:solidFill>
                       <a:srgbClr val="FFFFFF"/>
                     </a:solidFill>
                   </a:tcPr>
                 </a:tc>
+                <a:extLst>
+                  <a:ext uri="{0D108BD9-81ED-4DB2-BD59-A6C34878D82A}">
+                    <a16:rowId xmlns:a16="http://schemas.microsoft.com/office/drawing/2014/main" val="10001"/>
+                  </a:ext>
+                </a:extLst>
               </a:tr>
               <a:tr h="457200">
                 <a:tc>
@@ -7266,7 +7677,7 @@
                       </a:r>
                     </a:p>
                   </a:txBody>
-                  <a:tcPr marT="27432" marB="27432" marL="73152" marR="73152" anchor="ctr">
+                  <a:tcPr marL="73152" marR="73152" marT="27432" marB="27432" anchor="ctr">
                     <a:solidFill>
                       <a:srgbClr val="F6F7F8"/>
                     </a:solidFill>
@@ -7294,7 +7705,7 @@
                       </a:r>
                     </a:p>
                   </a:txBody>
-                  <a:tcPr marT="27432" marB="27432" marL="73152" marR="73152" anchor="ctr">
+                  <a:tcPr marL="73152" marR="73152" marT="27432" marB="27432" anchor="ctr">
                     <a:solidFill>
                       <a:srgbClr val="F6F7F8"/>
                     </a:solidFill>
@@ -7322,12 +7733,17 @@
                       </a:r>
                     </a:p>
                   </a:txBody>
-                  <a:tcPr marT="27432" marB="27432" marL="73152" marR="73152" anchor="ctr">
+                  <a:tcPr marL="73152" marR="73152" marT="27432" marB="27432" anchor="ctr">
                     <a:solidFill>
                       <a:srgbClr val="F6F7F8"/>
                     </a:solidFill>
                   </a:tcPr>
                 </a:tc>
+                <a:extLst>
+                  <a:ext uri="{0D108BD9-81ED-4DB2-BD59-A6C34878D82A}">
+                    <a16:rowId xmlns:a16="http://schemas.microsoft.com/office/drawing/2014/main" val="10002"/>
+                  </a:ext>
+                </a:extLst>
               </a:tr>
               <a:tr h="457200">
                 <a:tc>
@@ -7352,7 +7768,7 @@
                       </a:r>
                     </a:p>
                   </a:txBody>
-                  <a:tcPr marT="27432" marB="27432" marL="73152" marR="73152" anchor="ctr">
+                  <a:tcPr marL="73152" marR="73152" marT="27432" marB="27432" anchor="ctr">
                     <a:solidFill>
                       <a:srgbClr val="FFFFFF"/>
                     </a:solidFill>
@@ -7380,7 +7796,7 @@
                       </a:r>
                     </a:p>
                   </a:txBody>
-                  <a:tcPr marT="27432" marB="27432" marL="73152" marR="73152" anchor="ctr">
+                  <a:tcPr marL="73152" marR="73152" marT="27432" marB="27432" anchor="ctr">
                     <a:solidFill>
                       <a:srgbClr val="FFFFFF"/>
                     </a:solidFill>
@@ -7408,12 +7824,17 @@
                       </a:r>
                     </a:p>
                   </a:txBody>
-                  <a:tcPr marT="27432" marB="27432" marL="73152" marR="73152" anchor="ctr">
+                  <a:tcPr marL="73152" marR="73152" marT="27432" marB="27432" anchor="ctr">
                     <a:solidFill>
                       <a:srgbClr val="FFFFFF"/>
                     </a:solidFill>
                   </a:tcPr>
                 </a:tc>
+                <a:extLst>
+                  <a:ext uri="{0D108BD9-81ED-4DB2-BD59-A6C34878D82A}">
+                    <a16:rowId xmlns:a16="http://schemas.microsoft.com/office/drawing/2014/main" val="10003"/>
+                  </a:ext>
+                </a:extLst>
               </a:tr>
               <a:tr h="457200">
                 <a:tc>
@@ -7438,7 +7859,7 @@
                       </a:r>
                     </a:p>
                   </a:txBody>
-                  <a:tcPr marT="27432" marB="27432" marL="73152" marR="73152" anchor="ctr">
+                  <a:tcPr marL="73152" marR="73152" marT="27432" marB="27432" anchor="ctr">
                     <a:solidFill>
                       <a:srgbClr val="F6F7F8"/>
                     </a:solidFill>
@@ -7466,7 +7887,7 @@
                       </a:r>
                     </a:p>
                   </a:txBody>
-                  <a:tcPr marT="27432" marB="27432" marL="73152" marR="73152" anchor="ctr">
+                  <a:tcPr marL="73152" marR="73152" marT="27432" marB="27432" anchor="ctr">
                     <a:solidFill>
                       <a:srgbClr val="F6F7F8"/>
                     </a:solidFill>
@@ -7494,12 +7915,17 @@
                       </a:r>
                     </a:p>
                   </a:txBody>
-                  <a:tcPr marT="27432" marB="27432" marL="73152" marR="73152" anchor="ctr">
+                  <a:tcPr marL="73152" marR="73152" marT="27432" marB="27432" anchor="ctr">
                     <a:solidFill>
                       <a:srgbClr val="F6F7F8"/>
                     </a:solidFill>
                   </a:tcPr>
                 </a:tc>
+                <a:extLst>
+                  <a:ext uri="{0D108BD9-81ED-4DB2-BD59-A6C34878D82A}">
+                    <a16:rowId xmlns:a16="http://schemas.microsoft.com/office/drawing/2014/main" val="10004"/>
+                  </a:ext>
+                </a:extLst>
               </a:tr>
               <a:tr h="457200">
                 <a:tc>
@@ -7524,7 +7950,7 @@
                       </a:r>
                     </a:p>
                   </a:txBody>
-                  <a:tcPr marT="27432" marB="27432" marL="73152" marR="73152" anchor="ctr">
+                  <a:tcPr marL="73152" marR="73152" marT="27432" marB="27432" anchor="ctr">
                     <a:solidFill>
                       <a:srgbClr val="E3E5E8"/>
                     </a:solidFill>
@@ -7552,7 +7978,7 @@
                       </a:r>
                     </a:p>
                   </a:txBody>
-                  <a:tcPr marT="27432" marB="27432" marL="73152" marR="73152" anchor="ctr">
+                  <a:tcPr marL="73152" marR="73152" marT="27432" marB="27432" anchor="ctr">
                     <a:solidFill>
                       <a:srgbClr val="E3E5E8"/>
                     </a:solidFill>
@@ -7580,12 +8006,17 @@
                       </a:r>
                     </a:p>
                   </a:txBody>
-                  <a:tcPr marT="27432" marB="27432" marL="73152" marR="73152" anchor="ctr">
+                  <a:tcPr marL="73152" marR="73152" marT="27432" marB="27432" anchor="ctr">
                     <a:solidFill>
                       <a:srgbClr val="E3E5E8"/>
                     </a:solidFill>
                   </a:tcPr>
                 </a:tc>
+                <a:extLst>
+                  <a:ext uri="{0D108BD9-81ED-4DB2-BD59-A6C34878D82A}">
+                    <a16:rowId xmlns:a16="http://schemas.microsoft.com/office/drawing/2014/main" val="10005"/>
+                  </a:ext>
+                </a:extLst>
               </a:tr>
             </a:tbl>
           </a:graphicData>
@@ -7642,6 +8073,7 @@
           <a:lstStyle/>
           <a:p>
             <a:pPr algn="ctr"/>
+            <a:endParaRPr/>
           </a:p>
         </p:txBody>
       </p:sp>
@@ -7757,7 +8189,7 @@
 </file>
 
 <file path=ppt/slides/slide15.xml><?xml version="1.0" encoding="utf-8"?>
-<p:sld xmlns:a="http://schemas.openxmlformats.org/drawingml/2006/main" xmlns:p="http://schemas.openxmlformats.org/presentationml/2006/main" xmlns:r="http://schemas.openxmlformats.org/officeDocument/2006/relationships">
+<p:sld xmlns:a="http://schemas.openxmlformats.org/drawingml/2006/main" xmlns:r="http://schemas.openxmlformats.org/officeDocument/2006/relationships" xmlns:p="http://schemas.openxmlformats.org/presentationml/2006/main">
   <p:cSld>
     <p:spTree>
       <p:nvGrpSpPr>
@@ -7765,7 +8197,14 @@
         <p:cNvGrpSpPr/>
         <p:nvPr/>
       </p:nvGrpSpPr>
-      <p:grpSpPr/>
+      <p:grpSpPr>
+        <a:xfrm>
+          <a:off x="0" y="0"/>
+          <a:ext cx="0" cy="0"/>
+          <a:chOff x="0" y="0"/>
+          <a:chExt cx="0" cy="0"/>
+        </a:xfrm>
+      </p:grpSpPr>
       <p:sp>
         <p:nvSpPr>
           <p:cNvPr id="2" name="Rectangle 1"/>
@@ -7807,6 +8246,7 @@
           <a:lstStyle/>
           <a:p>
             <a:pPr algn="ctr"/>
+            <a:endParaRPr/>
           </a:p>
         </p:txBody>
       </p:sp>
@@ -7818,8 +8258,8 @@
         </p:nvSpPr>
         <p:spPr>
           <a:xfrm>
-            <a:off x="502920" y="475488"/>
-            <a:ext cx="310896" cy="310896"/>
+            <a:off x="554736" y="527304"/>
+            <a:ext cx="207264" cy="207264"/>
           </a:xfrm>
           <a:prstGeom prst="roundRect">
             <a:avLst>
@@ -7835,7 +8275,7 @@
                 <a:srgbClr val="73787E"/>
               </a:gs>
             </a:gsLst>
-            <a:lin scaled="0" ang="18900000"/>
+            <a:lin ang="18900000" scaled="0"/>
           </a:gradFill>
           <a:ln>
             <a:noFill/>
@@ -7867,6 +8307,7 @@
           <a:lstStyle/>
           <a:p>
             <a:pPr algn="ctr"/>
+            <a:endParaRPr/>
           </a:p>
         </p:txBody>
       </p:sp>
@@ -7936,7 +8377,7 @@
                 <a:srgbClr val="FFFFFF"/>
               </a:gs>
             </a:gsLst>
-            <a:lin scaled="0" ang="0"/>
+            <a:lin ang="0" scaled="0"/>
           </a:gradFill>
           <a:ln>
             <a:noFill/>
@@ -7962,6 +8403,7 @@
           <a:lstStyle/>
           <a:p>
             <a:pPr algn="ctr"/>
+            <a:endParaRPr/>
           </a:p>
         </p:txBody>
       </p:sp>
@@ -8102,6 +8544,7 @@
           <a:lstStyle/>
           <a:p>
             <a:pPr algn="ctr"/>
+            <a:endParaRPr/>
           </a:p>
         </p:txBody>
       </p:sp>
@@ -8259,6 +8702,7 @@
           <a:lstStyle/>
           <a:p>
             <a:pPr algn="ctr"/>
+            <a:endParaRPr/>
           </a:p>
         </p:txBody>
       </p:sp>
@@ -8414,6 +8858,7 @@
           <a:lstStyle/>
           <a:p>
             <a:pPr algn="ctr"/>
+            <a:endParaRPr/>
           </a:p>
         </p:txBody>
       </p:sp>
@@ -8450,7 +8895,7 @@
 </file>
 
 <file path=ppt/slides/slide16.xml><?xml version="1.0" encoding="utf-8"?>
-<p:sld xmlns:a="http://schemas.openxmlformats.org/drawingml/2006/main" xmlns:p="http://schemas.openxmlformats.org/presentationml/2006/main" xmlns:r="http://schemas.openxmlformats.org/officeDocument/2006/relationships">
+<p:sld xmlns:a="http://schemas.openxmlformats.org/drawingml/2006/main" xmlns:r="http://schemas.openxmlformats.org/officeDocument/2006/relationships" xmlns:p="http://schemas.openxmlformats.org/presentationml/2006/main">
   <p:cSld>
     <p:spTree>
       <p:nvGrpSpPr>
@@ -8458,7 +8903,14 @@
         <p:cNvGrpSpPr/>
         <p:nvPr/>
       </p:nvGrpSpPr>
-      <p:grpSpPr/>
+      <p:grpSpPr>
+        <a:xfrm>
+          <a:off x="0" y="0"/>
+          <a:ext cx="0" cy="0"/>
+          <a:chOff x="0" y="0"/>
+          <a:chExt cx="0" cy="0"/>
+        </a:xfrm>
+      </p:grpSpPr>
       <p:sp>
         <p:nvSpPr>
           <p:cNvPr id="2" name="Rectangle 1"/>
@@ -8500,6 +8952,7 @@
           <a:lstStyle/>
           <a:p>
             <a:pPr algn="ctr"/>
+            <a:endParaRPr/>
           </a:p>
         </p:txBody>
       </p:sp>
@@ -8511,8 +8964,8 @@
         </p:nvSpPr>
         <p:spPr>
           <a:xfrm>
-            <a:off x="502920" y="475488"/>
-            <a:ext cx="310896" cy="310896"/>
+            <a:off x="554736" y="527304"/>
+            <a:ext cx="207264" cy="207264"/>
           </a:xfrm>
           <a:prstGeom prst="roundRect">
             <a:avLst>
@@ -8528,7 +8981,7 @@
                 <a:srgbClr val="73787E"/>
               </a:gs>
             </a:gsLst>
-            <a:lin scaled="0" ang="18900000"/>
+            <a:lin ang="18900000" scaled="0"/>
           </a:gradFill>
           <a:ln>
             <a:noFill/>
@@ -8560,6 +9013,7 @@
           <a:lstStyle/>
           <a:p>
             <a:pPr algn="ctr"/>
+            <a:endParaRPr/>
           </a:p>
         </p:txBody>
       </p:sp>
@@ -8629,7 +9083,7 @@
                 <a:srgbClr val="FFFFFF"/>
               </a:gs>
             </a:gsLst>
-            <a:lin scaled="0" ang="0"/>
+            <a:lin ang="0" scaled="0"/>
           </a:gradFill>
           <a:ln>
             <a:noFill/>
@@ -8655,6 +9109,7 @@
           <a:lstStyle/>
           <a:p>
             <a:pPr algn="ctr"/>
+            <a:endParaRPr/>
           </a:p>
         </p:txBody>
       </p:sp>
@@ -8795,6 +9250,7 @@
           <a:lstStyle/>
           <a:p>
             <a:pPr algn="ctr"/>
+            <a:endParaRPr/>
           </a:p>
         </p:txBody>
       </p:sp>
@@ -8992,6 +9448,7 @@
           <a:lstStyle/>
           <a:p>
             <a:pPr algn="ctr"/>
+            <a:endParaRPr/>
           </a:p>
         </p:txBody>
       </p:sp>
@@ -9147,6 +9604,7 @@
           <a:lstStyle/>
           <a:p>
             <a:pPr algn="ctr"/>
+            <a:endParaRPr/>
           </a:p>
         </p:txBody>
       </p:sp>
@@ -9183,7 +9641,7 @@
 </file>
 
 <file path=ppt/slides/slide17.xml><?xml version="1.0" encoding="utf-8"?>
-<p:sld xmlns:a="http://schemas.openxmlformats.org/drawingml/2006/main" xmlns:p="http://schemas.openxmlformats.org/presentationml/2006/main" xmlns:r="http://schemas.openxmlformats.org/officeDocument/2006/relationships">
+<p:sld xmlns:a="http://schemas.openxmlformats.org/drawingml/2006/main" xmlns:r="http://schemas.openxmlformats.org/officeDocument/2006/relationships" xmlns:p="http://schemas.openxmlformats.org/presentationml/2006/main">
   <p:cSld>
     <p:spTree>
       <p:nvGrpSpPr>
@@ -9191,7 +9649,14 @@
         <p:cNvGrpSpPr/>
         <p:nvPr/>
       </p:nvGrpSpPr>
-      <p:grpSpPr/>
+      <p:grpSpPr>
+        <a:xfrm>
+          <a:off x="0" y="0"/>
+          <a:ext cx="0" cy="0"/>
+          <a:chOff x="0" y="0"/>
+          <a:chExt cx="0" cy="0"/>
+        </a:xfrm>
+      </p:grpSpPr>
       <p:sp>
         <p:nvSpPr>
           <p:cNvPr id="2" name="Rectangle 1"/>
@@ -9233,6 +9698,7 @@
           <a:lstStyle/>
           <a:p>
             <a:pPr algn="ctr"/>
+            <a:endParaRPr/>
           </a:p>
         </p:txBody>
       </p:sp>
@@ -9244,8 +9710,8 @@
         </p:nvSpPr>
         <p:spPr>
           <a:xfrm>
-            <a:off x="502920" y="475488"/>
-            <a:ext cx="310896" cy="310896"/>
+            <a:off x="554736" y="527304"/>
+            <a:ext cx="207264" cy="207264"/>
           </a:xfrm>
           <a:prstGeom prst="roundRect">
             <a:avLst>
@@ -9261,7 +9727,7 @@
                 <a:srgbClr val="73787E"/>
               </a:gs>
             </a:gsLst>
-            <a:lin scaled="0" ang="18900000"/>
+            <a:lin ang="18900000" scaled="0"/>
           </a:gradFill>
           <a:ln>
             <a:noFill/>
@@ -9293,6 +9759,7 @@
           <a:lstStyle/>
           <a:p>
             <a:pPr algn="ctr"/>
+            <a:endParaRPr/>
           </a:p>
         </p:txBody>
       </p:sp>
@@ -9362,7 +9829,7 @@
                 <a:srgbClr val="FFFFFF"/>
               </a:gs>
             </a:gsLst>
-            <a:lin scaled="0" ang="0"/>
+            <a:lin ang="0" scaled="0"/>
           </a:gradFill>
           <a:ln>
             <a:noFill/>
@@ -9388,6 +9855,7 @@
           <a:lstStyle/>
           <a:p>
             <a:pPr algn="ctr"/>
+            <a:endParaRPr/>
           </a:p>
         </p:txBody>
       </p:sp>
@@ -9526,6 +9994,7 @@
           <a:lstStyle/>
           <a:p>
             <a:pPr algn="ctr"/>
+            <a:endParaRPr/>
           </a:p>
         </p:txBody>
       </p:sp>
@@ -9604,6 +10073,7 @@
           <a:lstStyle/>
           <a:p>
             <a:pPr algn="ctr"/>
+            <a:endParaRPr/>
           </a:p>
         </p:txBody>
       </p:sp>
@@ -9761,6 +10231,7 @@
           <a:lstStyle/>
           <a:p>
             <a:pPr algn="ctr"/>
+            <a:endParaRPr/>
           </a:p>
         </p:txBody>
       </p:sp>
@@ -9876,7 +10347,7 @@
 </file>
 
 <file path=ppt/slides/slide18.xml><?xml version="1.0" encoding="utf-8"?>
-<p:sld xmlns:a="http://schemas.openxmlformats.org/drawingml/2006/main" xmlns:p="http://schemas.openxmlformats.org/presentationml/2006/main" xmlns:r="http://schemas.openxmlformats.org/officeDocument/2006/relationships">
+<p:sld xmlns:a="http://schemas.openxmlformats.org/drawingml/2006/main" xmlns:r="http://schemas.openxmlformats.org/officeDocument/2006/relationships" xmlns:p="http://schemas.openxmlformats.org/presentationml/2006/main">
   <p:cSld>
     <p:spTree>
       <p:nvGrpSpPr>
@@ -9884,7 +10355,14 @@
         <p:cNvGrpSpPr/>
         <p:nvPr/>
       </p:nvGrpSpPr>
-      <p:grpSpPr/>
+      <p:grpSpPr>
+        <a:xfrm>
+          <a:off x="0" y="0"/>
+          <a:ext cx="0" cy="0"/>
+          <a:chOff x="0" y="0"/>
+          <a:chExt cx="0" cy="0"/>
+        </a:xfrm>
+      </p:grpSpPr>
       <p:sp>
         <p:nvSpPr>
           <p:cNvPr id="2" name="Rectangle 1"/>
@@ -9926,6 +10404,7 @@
           <a:lstStyle/>
           <a:p>
             <a:pPr algn="ctr"/>
+            <a:endParaRPr/>
           </a:p>
         </p:txBody>
       </p:sp>
@@ -9937,8 +10416,8 @@
         </p:nvSpPr>
         <p:spPr>
           <a:xfrm>
-            <a:off x="502920" y="475488"/>
-            <a:ext cx="310896" cy="310896"/>
+            <a:off x="554736" y="527304"/>
+            <a:ext cx="207264" cy="207264"/>
           </a:xfrm>
           <a:prstGeom prst="roundRect">
             <a:avLst>
@@ -9954,7 +10433,7 @@
                 <a:srgbClr val="73787E"/>
               </a:gs>
             </a:gsLst>
-            <a:lin scaled="0" ang="18900000"/>
+            <a:lin ang="18900000" scaled="0"/>
           </a:gradFill>
           <a:ln>
             <a:noFill/>
@@ -9986,6 +10465,7 @@
           <a:lstStyle/>
           <a:p>
             <a:pPr algn="ctr"/>
+            <a:endParaRPr/>
           </a:p>
         </p:txBody>
       </p:sp>
@@ -10055,7 +10535,7 @@
                 <a:srgbClr val="FFFFFF"/>
               </a:gs>
             </a:gsLst>
-            <a:lin scaled="0" ang="0"/>
+            <a:lin ang="0" scaled="0"/>
           </a:gradFill>
           <a:ln>
             <a:noFill/>
@@ -10081,6 +10561,7 @@
           <a:lstStyle/>
           <a:p>
             <a:pPr algn="ctr"/>
+            <a:endParaRPr/>
           </a:p>
         </p:txBody>
       </p:sp>
@@ -10221,6 +10702,7 @@
           <a:lstStyle/>
           <a:p>
             <a:pPr algn="ctr"/>
+            <a:endParaRPr/>
           </a:p>
         </p:txBody>
       </p:sp>
@@ -10378,6 +10860,7 @@
           <a:lstStyle/>
           <a:p>
             <a:pPr algn="ctr"/>
+            <a:endParaRPr/>
           </a:p>
         </p:txBody>
       </p:sp>
@@ -10535,6 +11018,7 @@
           <a:lstStyle/>
           <a:p>
             <a:pPr algn="ctr"/>
+            <a:endParaRPr/>
           </a:p>
         </p:txBody>
       </p:sp>
@@ -10692,6 +11176,7 @@
           <a:lstStyle/>
           <a:p>
             <a:pPr algn="ctr"/>
+            <a:endParaRPr/>
           </a:p>
         </p:txBody>
       </p:sp>
@@ -10787,7 +11272,7 @@
 </file>
 
 <file path=ppt/slides/slide19.xml><?xml version="1.0" encoding="utf-8"?>
-<p:sld xmlns:a="http://schemas.openxmlformats.org/drawingml/2006/main" xmlns:p="http://schemas.openxmlformats.org/presentationml/2006/main" xmlns:r="http://schemas.openxmlformats.org/officeDocument/2006/relationships">
+<p:sld xmlns:a="http://schemas.openxmlformats.org/drawingml/2006/main" xmlns:r="http://schemas.openxmlformats.org/officeDocument/2006/relationships" xmlns:p="http://schemas.openxmlformats.org/presentationml/2006/main">
   <p:cSld>
     <p:spTree>
       <p:nvGrpSpPr>
@@ -10795,7 +11280,14 @@
         <p:cNvGrpSpPr/>
         <p:nvPr/>
       </p:nvGrpSpPr>
-      <p:grpSpPr/>
+      <p:grpSpPr>
+        <a:xfrm>
+          <a:off x="0" y="0"/>
+          <a:ext cx="0" cy="0"/>
+          <a:chOff x="0" y="0"/>
+          <a:chExt cx="0" cy="0"/>
+        </a:xfrm>
+      </p:grpSpPr>
       <p:sp>
         <p:nvSpPr>
           <p:cNvPr id="2" name="Rectangle 1"/>
@@ -10837,6 +11329,7 @@
           <a:lstStyle/>
           <a:p>
             <a:pPr algn="ctr"/>
+            <a:endParaRPr/>
           </a:p>
         </p:txBody>
       </p:sp>
@@ -10848,8 +11341,8 @@
         </p:nvSpPr>
         <p:spPr>
           <a:xfrm>
-            <a:off x="502920" y="475488"/>
-            <a:ext cx="310896" cy="310896"/>
+            <a:off x="554736" y="527304"/>
+            <a:ext cx="207264" cy="207264"/>
           </a:xfrm>
           <a:prstGeom prst="roundRect">
             <a:avLst>
@@ -10865,7 +11358,7 @@
                 <a:srgbClr val="73787E"/>
               </a:gs>
             </a:gsLst>
-            <a:lin scaled="0" ang="18900000"/>
+            <a:lin ang="18900000" scaled="0"/>
           </a:gradFill>
           <a:ln>
             <a:noFill/>
@@ -10897,6 +11390,7 @@
           <a:lstStyle/>
           <a:p>
             <a:pPr algn="ctr"/>
+            <a:endParaRPr/>
           </a:p>
         </p:txBody>
       </p:sp>
@@ -10966,7 +11460,7 @@
                 <a:srgbClr val="FFFFFF"/>
               </a:gs>
             </a:gsLst>
-            <a:lin scaled="0" ang="0"/>
+            <a:lin ang="0" scaled="0"/>
           </a:gradFill>
           <a:ln>
             <a:noFill/>
@@ -10992,6 +11486,7 @@
           <a:lstStyle/>
           <a:p>
             <a:pPr algn="ctr"/>
+            <a:endParaRPr/>
           </a:p>
         </p:txBody>
       </p:sp>
@@ -11100,10 +11595,34 @@
                 <a:tableStyleId>{5C22544A-7EE6-4342-B048-85BDC9FD1C3A}</a:tableStyleId>
               </a:tblPr>
               <a:tblGrid>
-                <a:gridCol w="502920"/>
-                <a:gridCol w="5577840"/>
-                <a:gridCol w="3840480"/>
-                <a:gridCol w="1371600"/>
+                <a:gridCol w="502920">
+                  <a:extLst>
+                    <a:ext uri="{9D8B030D-6E8A-4147-A177-3AD203B41FA5}">
+                      <a16:colId xmlns:a16="http://schemas.microsoft.com/office/drawing/2014/main" val="20000"/>
+                    </a:ext>
+                  </a:extLst>
+                </a:gridCol>
+                <a:gridCol w="5577840">
+                  <a:extLst>
+                    <a:ext uri="{9D8B030D-6E8A-4147-A177-3AD203B41FA5}">
+                      <a16:colId xmlns:a16="http://schemas.microsoft.com/office/drawing/2014/main" val="20001"/>
+                    </a:ext>
+                  </a:extLst>
+                </a:gridCol>
+                <a:gridCol w="3840480">
+                  <a:extLst>
+                    <a:ext uri="{9D8B030D-6E8A-4147-A177-3AD203B41FA5}">
+                      <a16:colId xmlns:a16="http://schemas.microsoft.com/office/drawing/2014/main" val="20002"/>
+                    </a:ext>
+                  </a:extLst>
+                </a:gridCol>
+                <a:gridCol w="1371600">
+                  <a:extLst>
+                    <a:ext uri="{9D8B030D-6E8A-4147-A177-3AD203B41FA5}">
+                      <a16:colId xmlns:a16="http://schemas.microsoft.com/office/drawing/2014/main" val="20003"/>
+                    </a:ext>
+                  </a:extLst>
+                </a:gridCol>
               </a:tblGrid>
               <a:tr h="475488">
                 <a:tc>
@@ -11128,7 +11647,7 @@
                       </a:r>
                     </a:p>
                   </a:txBody>
-                  <a:tcPr marT="27432" marB="27432" marL="73152" marR="73152" anchor="ctr">
+                  <a:tcPr marL="73152" marR="73152" marT="27432" marB="27432" anchor="ctr">
                     <a:solidFill>
                       <a:srgbClr val="33393F"/>
                     </a:solidFill>
@@ -11156,7 +11675,7 @@
                       </a:r>
                     </a:p>
                   </a:txBody>
-                  <a:tcPr marT="27432" marB="27432" marL="73152" marR="73152" anchor="ctr">
+                  <a:tcPr marL="73152" marR="73152" marT="27432" marB="27432" anchor="ctr">
                     <a:solidFill>
                       <a:srgbClr val="33393F"/>
                     </a:solidFill>
@@ -11184,7 +11703,7 @@
                       </a:r>
                     </a:p>
                   </a:txBody>
-                  <a:tcPr marT="27432" marB="27432" marL="73152" marR="73152" anchor="ctr">
+                  <a:tcPr marL="73152" marR="73152" marT="27432" marB="27432" anchor="ctr">
                     <a:solidFill>
                       <a:srgbClr val="33393F"/>
                     </a:solidFill>
@@ -11212,12 +11731,17 @@
                       </a:r>
                     </a:p>
                   </a:txBody>
-                  <a:tcPr marT="27432" marB="27432" marL="73152" marR="73152" anchor="ctr">
+                  <a:tcPr marL="73152" marR="73152" marT="27432" marB="27432" anchor="ctr">
                     <a:solidFill>
                       <a:srgbClr val="33393F"/>
                     </a:solidFill>
                   </a:tcPr>
                 </a:tc>
+                <a:extLst>
+                  <a:ext uri="{0D108BD9-81ED-4DB2-BD59-A6C34878D82A}">
+                    <a16:rowId xmlns:a16="http://schemas.microsoft.com/office/drawing/2014/main" val="10000"/>
+                  </a:ext>
+                </a:extLst>
               </a:tr>
               <a:tr h="475488">
                 <a:tc>
@@ -11242,7 +11766,7 @@
                       </a:r>
                     </a:p>
                   </a:txBody>
-                  <a:tcPr marT="27432" marB="27432" marL="73152" marR="73152" anchor="ctr">
+                  <a:tcPr marL="73152" marR="73152" marT="27432" marB="27432" anchor="ctr">
                     <a:solidFill>
                       <a:srgbClr val="FFFFFF"/>
                     </a:solidFill>
@@ -11270,7 +11794,7 @@
                       </a:r>
                     </a:p>
                   </a:txBody>
-                  <a:tcPr marT="27432" marB="27432" marL="73152" marR="73152" anchor="ctr">
+                  <a:tcPr marL="73152" marR="73152" marT="27432" marB="27432" anchor="ctr">
                     <a:solidFill>
                       <a:srgbClr val="FFFFFF"/>
                     </a:solidFill>
@@ -11298,7 +11822,7 @@
                       </a:r>
                     </a:p>
                   </a:txBody>
-                  <a:tcPr marT="27432" marB="27432" marL="73152" marR="73152" anchor="ctr">
+                  <a:tcPr marL="73152" marR="73152" marT="27432" marB="27432" anchor="ctr">
                     <a:solidFill>
                       <a:srgbClr val="FFFFFF"/>
                     </a:solidFill>
@@ -11326,12 +11850,17 @@
                       </a:r>
                     </a:p>
                   </a:txBody>
-                  <a:tcPr marT="27432" marB="27432" marL="73152" marR="73152" anchor="ctr">
+                  <a:tcPr marL="73152" marR="73152" marT="27432" marB="27432" anchor="ctr">
                     <a:solidFill>
                       <a:srgbClr val="FFFFFF"/>
                     </a:solidFill>
                   </a:tcPr>
                 </a:tc>
+                <a:extLst>
+                  <a:ext uri="{0D108BD9-81ED-4DB2-BD59-A6C34878D82A}">
+                    <a16:rowId xmlns:a16="http://schemas.microsoft.com/office/drawing/2014/main" val="10001"/>
+                  </a:ext>
+                </a:extLst>
               </a:tr>
               <a:tr h="475488">
                 <a:tc>
@@ -11356,7 +11885,7 @@
                       </a:r>
                     </a:p>
                   </a:txBody>
-                  <a:tcPr marT="27432" marB="27432" marL="73152" marR="73152" anchor="ctr">
+                  <a:tcPr marL="73152" marR="73152" marT="27432" marB="27432" anchor="ctr">
                     <a:solidFill>
                       <a:srgbClr val="F6F7F8"/>
                     </a:solidFill>
@@ -11384,7 +11913,7 @@
                       </a:r>
                     </a:p>
                   </a:txBody>
-                  <a:tcPr marT="27432" marB="27432" marL="73152" marR="73152" anchor="ctr">
+                  <a:tcPr marL="73152" marR="73152" marT="27432" marB="27432" anchor="ctr">
                     <a:solidFill>
                       <a:srgbClr val="F6F7F8"/>
                     </a:solidFill>
@@ -11412,7 +11941,7 @@
                       </a:r>
                     </a:p>
                   </a:txBody>
-                  <a:tcPr marT="27432" marB="27432" marL="73152" marR="73152" anchor="ctr">
+                  <a:tcPr marL="73152" marR="73152" marT="27432" marB="27432" anchor="ctr">
                     <a:solidFill>
                       <a:srgbClr val="F6F7F8"/>
                     </a:solidFill>
@@ -11440,12 +11969,17 @@
                       </a:r>
                     </a:p>
                   </a:txBody>
-                  <a:tcPr marT="27432" marB="27432" marL="73152" marR="73152" anchor="ctr">
+                  <a:tcPr marL="73152" marR="73152" marT="27432" marB="27432" anchor="ctr">
                     <a:solidFill>
                       <a:srgbClr val="F6F7F8"/>
                     </a:solidFill>
                   </a:tcPr>
                 </a:tc>
+                <a:extLst>
+                  <a:ext uri="{0D108BD9-81ED-4DB2-BD59-A6C34878D82A}">
+                    <a16:rowId xmlns:a16="http://schemas.microsoft.com/office/drawing/2014/main" val="10002"/>
+                  </a:ext>
+                </a:extLst>
               </a:tr>
               <a:tr h="475488">
                 <a:tc>
@@ -11470,7 +12004,7 @@
                       </a:r>
                     </a:p>
                   </a:txBody>
-                  <a:tcPr marT="27432" marB="27432" marL="73152" marR="73152" anchor="ctr">
+                  <a:tcPr marL="73152" marR="73152" marT="27432" marB="27432" anchor="ctr">
                     <a:solidFill>
                       <a:srgbClr val="FFFFFF"/>
                     </a:solidFill>
@@ -11498,7 +12032,7 @@
                       </a:r>
                     </a:p>
                   </a:txBody>
-                  <a:tcPr marT="27432" marB="27432" marL="73152" marR="73152" anchor="ctr">
+                  <a:tcPr marL="73152" marR="73152" marT="27432" marB="27432" anchor="ctr">
                     <a:solidFill>
                       <a:srgbClr val="FFFFFF"/>
                     </a:solidFill>
@@ -11526,7 +12060,7 @@
                       </a:r>
                     </a:p>
                   </a:txBody>
-                  <a:tcPr marT="27432" marB="27432" marL="73152" marR="73152" anchor="ctr">
+                  <a:tcPr marL="73152" marR="73152" marT="27432" marB="27432" anchor="ctr">
                     <a:solidFill>
                       <a:srgbClr val="FFFFFF"/>
                     </a:solidFill>
@@ -11554,12 +12088,17 @@
                       </a:r>
                     </a:p>
                   </a:txBody>
-                  <a:tcPr marT="27432" marB="27432" marL="73152" marR="73152" anchor="ctr">
+                  <a:tcPr marL="73152" marR="73152" marT="27432" marB="27432" anchor="ctr">
                     <a:solidFill>
                       <a:srgbClr val="FFFFFF"/>
                     </a:solidFill>
                   </a:tcPr>
                 </a:tc>
+                <a:extLst>
+                  <a:ext uri="{0D108BD9-81ED-4DB2-BD59-A6C34878D82A}">
+                    <a16:rowId xmlns:a16="http://schemas.microsoft.com/office/drawing/2014/main" val="10003"/>
+                  </a:ext>
+                </a:extLst>
               </a:tr>
               <a:tr h="475488">
                 <a:tc>
@@ -11584,7 +12123,7 @@
                       </a:r>
                     </a:p>
                   </a:txBody>
-                  <a:tcPr marT="27432" marB="27432" marL="73152" marR="73152" anchor="ctr">
+                  <a:tcPr marL="73152" marR="73152" marT="27432" marB="27432" anchor="ctr">
                     <a:solidFill>
                       <a:srgbClr val="F6F7F8"/>
                     </a:solidFill>
@@ -11612,7 +12151,7 @@
                       </a:r>
                     </a:p>
                   </a:txBody>
-                  <a:tcPr marT="27432" marB="27432" marL="73152" marR="73152" anchor="ctr">
+                  <a:tcPr marL="73152" marR="73152" marT="27432" marB="27432" anchor="ctr">
                     <a:solidFill>
                       <a:srgbClr val="F6F7F8"/>
                     </a:solidFill>
@@ -11640,7 +12179,7 @@
                       </a:r>
                     </a:p>
                   </a:txBody>
-                  <a:tcPr marT="27432" marB="27432" marL="73152" marR="73152" anchor="ctr">
+                  <a:tcPr marL="73152" marR="73152" marT="27432" marB="27432" anchor="ctr">
                     <a:solidFill>
                       <a:srgbClr val="F6F7F8"/>
                     </a:solidFill>
@@ -11668,12 +12207,17 @@
                       </a:r>
                     </a:p>
                   </a:txBody>
-                  <a:tcPr marT="27432" marB="27432" marL="73152" marR="73152" anchor="ctr">
+                  <a:tcPr marL="73152" marR="73152" marT="27432" marB="27432" anchor="ctr">
                     <a:solidFill>
                       <a:srgbClr val="F6F7F8"/>
                     </a:solidFill>
                   </a:tcPr>
                 </a:tc>
+                <a:extLst>
+                  <a:ext uri="{0D108BD9-81ED-4DB2-BD59-A6C34878D82A}">
+                    <a16:rowId xmlns:a16="http://schemas.microsoft.com/office/drawing/2014/main" val="10004"/>
+                  </a:ext>
+                </a:extLst>
               </a:tr>
               <a:tr h="475488">
                 <a:tc>
@@ -11698,7 +12242,7 @@
                       </a:r>
                     </a:p>
                   </a:txBody>
-                  <a:tcPr marT="27432" marB="27432" marL="73152" marR="73152" anchor="ctr">
+                  <a:tcPr marL="73152" marR="73152" marT="27432" marB="27432" anchor="ctr">
                     <a:solidFill>
                       <a:srgbClr val="FFFFFF"/>
                     </a:solidFill>
@@ -11726,7 +12270,7 @@
                       </a:r>
                     </a:p>
                   </a:txBody>
-                  <a:tcPr marT="27432" marB="27432" marL="73152" marR="73152" anchor="ctr">
+                  <a:tcPr marL="73152" marR="73152" marT="27432" marB="27432" anchor="ctr">
                     <a:solidFill>
                       <a:srgbClr val="FFFFFF"/>
                     </a:solidFill>
@@ -11754,7 +12298,7 @@
                       </a:r>
                     </a:p>
                   </a:txBody>
-                  <a:tcPr marT="27432" marB="27432" marL="73152" marR="73152" anchor="ctr">
+                  <a:tcPr marL="73152" marR="73152" marT="27432" marB="27432" anchor="ctr">
                     <a:solidFill>
                       <a:srgbClr val="FFFFFF"/>
                     </a:solidFill>
@@ -11782,12 +12326,17 @@
                       </a:r>
                     </a:p>
                   </a:txBody>
-                  <a:tcPr marT="27432" marB="27432" marL="73152" marR="73152" anchor="ctr">
+                  <a:tcPr marL="73152" marR="73152" marT="27432" marB="27432" anchor="ctr">
                     <a:solidFill>
                       <a:srgbClr val="FFFFFF"/>
                     </a:solidFill>
                   </a:tcPr>
                 </a:tc>
+                <a:extLst>
+                  <a:ext uri="{0D108BD9-81ED-4DB2-BD59-A6C34878D82A}">
+                    <a16:rowId xmlns:a16="http://schemas.microsoft.com/office/drawing/2014/main" val="10005"/>
+                  </a:ext>
+                </a:extLst>
               </a:tr>
             </a:tbl>
           </a:graphicData>
@@ -11926,8 +12475,8 @@
         </p:nvSpPr>
         <p:spPr>
           <a:xfrm>
-            <a:off x="502920" y="475488"/>
-            <a:ext cx="310896" cy="310896"/>
+            <a:off x="554736" y="527304"/>
+            <a:ext cx="207264" cy="207264"/>
           </a:xfrm>
           <a:prstGeom prst="roundRect">
             <a:avLst>
@@ -12208,7 +12757,7 @@
                 <a:latin typeface="맑은 고딕"/>
                 <a:ea typeface="맑은 고딕"/>
               </a:rPr>
-              <a:t>Ⅰ. 배경</a:t>
+              <a:t>Ⅰ. 배경과 요약</a:t>
             </a:r>
           </a:p>
           <a:p>
@@ -13130,7 +13679,7 @@
 </file>
 
 <file path=ppt/slides/slide20.xml><?xml version="1.0" encoding="utf-8"?>
-<p:sld xmlns:a="http://schemas.openxmlformats.org/drawingml/2006/main" xmlns:p="http://schemas.openxmlformats.org/presentationml/2006/main" xmlns:r="http://schemas.openxmlformats.org/officeDocument/2006/relationships">
+<p:sld xmlns:a="http://schemas.openxmlformats.org/drawingml/2006/main" xmlns:r="http://schemas.openxmlformats.org/officeDocument/2006/relationships" xmlns:p="http://schemas.openxmlformats.org/presentationml/2006/main">
   <p:cSld>
     <p:spTree>
       <p:nvGrpSpPr>
@@ -13138,7 +13687,14 @@
         <p:cNvGrpSpPr/>
         <p:nvPr/>
       </p:nvGrpSpPr>
-      <p:grpSpPr/>
+      <p:grpSpPr>
+        <a:xfrm>
+          <a:off x="0" y="0"/>
+          <a:ext cx="0" cy="0"/>
+          <a:chOff x="0" y="0"/>
+          <a:chExt cx="0" cy="0"/>
+        </a:xfrm>
+      </p:grpSpPr>
       <p:sp>
         <p:nvSpPr>
           <p:cNvPr id="2" name="Rectangle 1"/>
@@ -13180,6 +13736,7 @@
           <a:lstStyle/>
           <a:p>
             <a:pPr algn="ctr"/>
+            <a:endParaRPr/>
           </a:p>
         </p:txBody>
       </p:sp>
@@ -13191,8 +13748,8 @@
         </p:nvSpPr>
         <p:spPr>
           <a:xfrm>
-            <a:off x="502920" y="475488"/>
-            <a:ext cx="310896" cy="310896"/>
+            <a:off x="554736" y="527304"/>
+            <a:ext cx="207264" cy="207264"/>
           </a:xfrm>
           <a:prstGeom prst="roundRect">
             <a:avLst>
@@ -13208,7 +13765,7 @@
                 <a:srgbClr val="73787E"/>
               </a:gs>
             </a:gsLst>
-            <a:lin scaled="0" ang="18900000"/>
+            <a:lin ang="18900000" scaled="0"/>
           </a:gradFill>
           <a:ln>
             <a:noFill/>
@@ -13240,6 +13797,7 @@
           <a:lstStyle/>
           <a:p>
             <a:pPr algn="ctr"/>
+            <a:endParaRPr/>
           </a:p>
         </p:txBody>
       </p:sp>
@@ -13309,7 +13867,7 @@
                 <a:srgbClr val="FFFFFF"/>
               </a:gs>
             </a:gsLst>
-            <a:lin scaled="0" ang="0"/>
+            <a:lin ang="0" scaled="0"/>
           </a:gradFill>
           <a:ln>
             <a:noFill/>
@@ -13335,6 +13893,7 @@
           <a:lstStyle/>
           <a:p>
             <a:pPr algn="ctr"/>
+            <a:endParaRPr/>
           </a:p>
         </p:txBody>
       </p:sp>
@@ -13475,6 +14034,7 @@
           <a:lstStyle/>
           <a:p>
             <a:pPr algn="ctr"/>
+            <a:endParaRPr/>
           </a:p>
         </p:txBody>
       </p:sp>
@@ -13672,6 +14232,7 @@
           <a:lstStyle/>
           <a:p>
             <a:pPr algn="ctr"/>
+            <a:endParaRPr/>
           </a:p>
         </p:txBody>
       </p:sp>
@@ -13850,7 +14411,7 @@
 </file>
 
 <file path=ppt/slides/slide21.xml><?xml version="1.0" encoding="utf-8"?>
-<p:sld xmlns:a="http://schemas.openxmlformats.org/drawingml/2006/main" xmlns:p="http://schemas.openxmlformats.org/presentationml/2006/main" xmlns:r="http://schemas.openxmlformats.org/officeDocument/2006/relationships">
+<p:sld xmlns:a="http://schemas.openxmlformats.org/drawingml/2006/main" xmlns:r="http://schemas.openxmlformats.org/officeDocument/2006/relationships" xmlns:p="http://schemas.openxmlformats.org/presentationml/2006/main">
   <p:cSld>
     <p:spTree>
       <p:nvGrpSpPr>
@@ -13858,7 +14419,14 @@
         <p:cNvGrpSpPr/>
         <p:nvPr/>
       </p:nvGrpSpPr>
-      <p:grpSpPr/>
+      <p:grpSpPr>
+        <a:xfrm>
+          <a:off x="0" y="0"/>
+          <a:ext cx="0" cy="0"/>
+          <a:chOff x="0" y="0"/>
+          <a:chExt cx="0" cy="0"/>
+        </a:xfrm>
+      </p:grpSpPr>
       <p:sp>
         <p:nvSpPr>
           <p:cNvPr id="2" name="Rectangle 1"/>
@@ -13900,6 +14468,7 @@
           <a:lstStyle/>
           <a:p>
             <a:pPr algn="ctr"/>
+            <a:endParaRPr/>
           </a:p>
         </p:txBody>
       </p:sp>
@@ -13969,7 +14538,7 @@
                 <a:srgbClr val="FFFFFF"/>
               </a:gs>
             </a:gsLst>
-            <a:lin scaled="0" ang="0"/>
+            <a:lin ang="0" scaled="0"/>
           </a:gradFill>
           <a:ln>
             <a:noFill/>
@@ -13995,6 +14564,7 @@
           <a:lstStyle/>
           <a:p>
             <a:pPr algn="ctr"/>
+            <a:endParaRPr/>
           </a:p>
         </p:txBody>
       </p:sp>
@@ -14173,7 +14743,7 @@
 </file>
 
 <file path=ppt/slides/slide3.xml><?xml version="1.0" encoding="utf-8"?>
-<p:sld xmlns:a="http://schemas.openxmlformats.org/drawingml/2006/main" xmlns:p="http://schemas.openxmlformats.org/presentationml/2006/main" xmlns:r="http://schemas.openxmlformats.org/officeDocument/2006/relationships">
+<p:sld xmlns:a="http://schemas.openxmlformats.org/drawingml/2006/main" xmlns:r="http://schemas.openxmlformats.org/officeDocument/2006/relationships" xmlns:p="http://schemas.openxmlformats.org/presentationml/2006/main">
   <p:cSld>
     <p:spTree>
       <p:nvGrpSpPr>
@@ -14181,7 +14751,14 @@
         <p:cNvGrpSpPr/>
         <p:nvPr/>
       </p:nvGrpSpPr>
-      <p:grpSpPr/>
+      <p:grpSpPr>
+        <a:xfrm>
+          <a:off x="0" y="0"/>
+          <a:ext cx="0" cy="0"/>
+          <a:chOff x="0" y="0"/>
+          <a:chExt cx="0" cy="0"/>
+        </a:xfrm>
+      </p:grpSpPr>
       <p:sp>
         <p:nvSpPr>
           <p:cNvPr id="2" name="Rectangle 1"/>
@@ -14223,6 +14800,7 @@
           <a:lstStyle/>
           <a:p>
             <a:pPr algn="ctr"/>
+            <a:endParaRPr/>
           </a:p>
         </p:txBody>
       </p:sp>
@@ -14234,8 +14812,8 @@
         </p:nvSpPr>
         <p:spPr>
           <a:xfrm>
-            <a:off x="502920" y="475488"/>
-            <a:ext cx="310896" cy="310896"/>
+            <a:off x="554736" y="527304"/>
+            <a:ext cx="207264" cy="207264"/>
           </a:xfrm>
           <a:prstGeom prst="roundRect">
             <a:avLst>
@@ -14251,7 +14829,7 @@
                 <a:srgbClr val="73787E"/>
               </a:gs>
             </a:gsLst>
-            <a:lin scaled="0" ang="18900000"/>
+            <a:lin ang="18900000" scaled="0"/>
           </a:gradFill>
           <a:ln>
             <a:noFill/>
@@ -14283,6 +14861,7 @@
           <a:lstStyle/>
           <a:p>
             <a:pPr algn="ctr"/>
+            <a:endParaRPr/>
           </a:p>
         </p:txBody>
       </p:sp>
@@ -14294,8 +14873,8 @@
         </p:nvSpPr>
         <p:spPr>
           <a:xfrm>
-            <a:off x="960120" y="274320"/>
-            <a:ext cx="9692640" cy="685800"/>
+            <a:off x="960120" y="399564"/>
+            <a:ext cx="9692640" cy="435312"/>
           </a:xfrm>
           <a:prstGeom prst="rect">
             <a:avLst/>
@@ -14317,7 +14896,7 @@
               </a:spcAft>
             </a:pPr>
             <a:r>
-              <a:rPr sz="2150" b="1">
+              <a:rPr lang="ko-KR" altLang="en-US" sz="2150" b="1" dirty="0">
                 <a:solidFill>
                   <a:srgbClr val="1C1C1E"/>
                 </a:solidFill>
@@ -14326,6 +14905,133 @@
               </a:rPr>
               <a:t>프로젝트 배경 — 분만취약지 제도와 접근성의 두 축</a:t>
             </a:r>
+            <a:r>
+              <a:rPr sz="2150" b="1" dirty="0">
+                <a:solidFill>
+                  <a:srgbClr val="1C1C1E"/>
+                </a:solidFill>
+                <a:latin typeface="맑은 고딕"/>
+                <a:ea typeface="맑은 고딕"/>
+              </a:rPr>
+              <a:t/>
+            </a:r>
+            <a:r>
+              <a:rPr sz="2150" b="1" dirty="0" err="1">
+                <a:solidFill>
+                  <a:srgbClr val="1C1C1E"/>
+                </a:solidFill>
+                <a:latin typeface="맑은 고딕"/>
+                <a:ea typeface="맑은 고딕"/>
+              </a:rPr>
+              <a:t/>
+            </a:r>
+            <a:r>
+              <a:rPr sz="2150" b="1" dirty="0">
+                <a:solidFill>
+                  <a:srgbClr val="1C1C1E"/>
+                </a:solidFill>
+                <a:latin typeface="맑은 고딕"/>
+                <a:ea typeface="맑은 고딕"/>
+              </a:rPr>
+              <a:t/>
+            </a:r>
+            <a:r>
+              <a:rPr sz="2150" b="1" dirty="0" err="1">
+                <a:solidFill>
+                  <a:srgbClr val="1C1C1E"/>
+                </a:solidFill>
+                <a:latin typeface="맑은 고딕"/>
+                <a:ea typeface="맑은 고딕"/>
+              </a:rPr>
+              <a:t/>
+            </a:r>
+            <a:r>
+              <a:rPr sz="2150" b="1" dirty="0">
+                <a:solidFill>
+                  <a:srgbClr val="1C1C1E"/>
+                </a:solidFill>
+                <a:latin typeface="맑은 고딕"/>
+                <a:ea typeface="맑은 고딕"/>
+              </a:rPr>
+              <a:t/>
+            </a:r>
+            <a:r>
+              <a:rPr sz="2150" b="1" dirty="0" err="1">
+                <a:solidFill>
+                  <a:srgbClr val="1C1C1E"/>
+                </a:solidFill>
+                <a:latin typeface="맑은 고딕"/>
+                <a:ea typeface="맑은 고딕"/>
+              </a:rPr>
+              <a:t/>
+            </a:r>
+            <a:r>
+              <a:rPr sz="2150" b="1" dirty="0">
+                <a:solidFill>
+                  <a:srgbClr val="1C1C1E"/>
+                </a:solidFill>
+                <a:latin typeface="맑은 고딕"/>
+                <a:ea typeface="맑은 고딕"/>
+              </a:rPr>
+              <a:t/>
+            </a:r>
+            <a:r>
+              <a:rPr sz="2150" b="1" dirty="0" err="1">
+                <a:solidFill>
+                  <a:srgbClr val="1C1C1E"/>
+                </a:solidFill>
+                <a:latin typeface="맑은 고딕"/>
+                <a:ea typeface="맑은 고딕"/>
+              </a:rPr>
+              <a:t/>
+            </a:r>
+            <a:r>
+              <a:rPr sz="2150" b="1" dirty="0">
+                <a:solidFill>
+                  <a:srgbClr val="1C1C1E"/>
+                </a:solidFill>
+                <a:latin typeface="맑은 고딕"/>
+                <a:ea typeface="맑은 고딕"/>
+              </a:rPr>
+              <a:t/>
+            </a:r>
+            <a:r>
+              <a:rPr sz="2150" b="1" dirty="0" err="1">
+                <a:solidFill>
+                  <a:srgbClr val="1C1C1E"/>
+                </a:solidFill>
+                <a:latin typeface="맑은 고딕"/>
+                <a:ea typeface="맑은 고딕"/>
+              </a:rPr>
+              <a:t/>
+            </a:r>
+            <a:r>
+              <a:rPr sz="2150" b="1" dirty="0">
+                <a:solidFill>
+                  <a:srgbClr val="1C1C1E"/>
+                </a:solidFill>
+                <a:latin typeface="맑은 고딕"/>
+                <a:ea typeface="맑은 고딕"/>
+              </a:rPr>
+              <a:t/>
+            </a:r>
+            <a:r>
+              <a:rPr sz="2150" b="1" dirty="0" err="1">
+                <a:solidFill>
+                  <a:srgbClr val="1C1C1E"/>
+                </a:solidFill>
+                <a:latin typeface="맑은 고딕"/>
+                <a:ea typeface="맑은 고딕"/>
+              </a:rPr>
+              <a:t/>
+            </a:r>
+            <a:endParaRPr sz="2150" b="1" dirty="0">
+              <a:solidFill>
+                <a:srgbClr val="1C1C1E"/>
+              </a:solidFill>
+              <a:latin typeface="맑은 고딕"/>
+              <a:ea typeface="맑은 고딕"/>
+            </a:endParaRPr>
           </a:p>
         </p:txBody>
       </p:sp>
@@ -14352,7 +15058,7 @@
                 <a:srgbClr val="FFFFFF"/>
               </a:gs>
             </a:gsLst>
-            <a:lin scaled="0" ang="0"/>
+            <a:lin ang="0" scaled="0"/>
           </a:gradFill>
           <a:ln>
             <a:noFill/>
@@ -14378,6 +15084,7 @@
           <a:lstStyle/>
           <a:p>
             <a:pPr algn="ctr"/>
+            <a:endParaRPr/>
           </a:p>
         </p:txBody>
       </p:sp>
@@ -14433,7 +15140,7 @@
         <p:spPr>
           <a:xfrm>
             <a:off x="548640" y="1097280"/>
-            <a:ext cx="11155680" cy="384048"/>
+            <a:ext cx="11155680" cy="291747"/>
           </a:xfrm>
           <a:prstGeom prst="rect">
             <a:avLst/>
@@ -14455,7 +15162,7 @@
               </a:spcAft>
             </a:pPr>
             <a:r>
-              <a:rPr sz="1250" b="0">
+              <a:rPr lang="ko-KR" altLang="en-US" sz="1250" b="0" dirty="0">
                 <a:solidFill>
                   <a:srgbClr val="767A7F"/>
                 </a:solidFill>
@@ -14464,6 +15171,113 @@
               </a:rPr>
               <a:t>무엇을 다루는 제도이고, 이 프로젝트는 그중 무엇을 감사했는가</a:t>
             </a:r>
+            <a:r>
+              <a:rPr lang="en-US" altLang="ko-KR" sz="1250" b="0" dirty="0">
+                <a:solidFill>
+                  <a:srgbClr val="767A7F"/>
+                </a:solidFill>
+                <a:latin typeface="맑은 고딕"/>
+                <a:ea typeface="맑은 고딕"/>
+              </a:rPr>
+              <a:t/>
+            </a:r>
+            <a:r>
+              <a:rPr sz="1250" b="0" dirty="0">
+                <a:solidFill>
+                  <a:srgbClr val="767A7F"/>
+                </a:solidFill>
+                <a:latin typeface="맑은 고딕"/>
+                <a:ea typeface="맑은 고딕"/>
+              </a:rPr>
+              <a:t/>
+            </a:r>
+            <a:r>
+              <a:rPr sz="1250" b="0" dirty="0" err="1">
+                <a:solidFill>
+                  <a:srgbClr val="767A7F"/>
+                </a:solidFill>
+                <a:latin typeface="맑은 고딕"/>
+                <a:ea typeface="맑은 고딕"/>
+              </a:rPr>
+              <a:t/>
+            </a:r>
+            <a:r>
+              <a:rPr sz="1250" b="0" dirty="0">
+                <a:solidFill>
+                  <a:srgbClr val="767A7F"/>
+                </a:solidFill>
+                <a:latin typeface="맑은 고딕"/>
+                <a:ea typeface="맑은 고딕"/>
+              </a:rPr>
+              <a:t/>
+            </a:r>
+            <a:r>
+              <a:rPr sz="1250" b="0" dirty="0" err="1">
+                <a:solidFill>
+                  <a:srgbClr val="767A7F"/>
+                </a:solidFill>
+                <a:latin typeface="맑은 고딕"/>
+                <a:ea typeface="맑은 고딕"/>
+              </a:rPr>
+              <a:t/>
+            </a:r>
+            <a:r>
+              <a:rPr sz="1250" b="0" dirty="0">
+                <a:solidFill>
+                  <a:srgbClr val="767A7F"/>
+                </a:solidFill>
+                <a:latin typeface="맑은 고딕"/>
+                <a:ea typeface="맑은 고딕"/>
+              </a:rPr>
+              <a:t/>
+            </a:r>
+            <a:r>
+              <a:rPr sz="1250" b="0" dirty="0" err="1">
+                <a:solidFill>
+                  <a:srgbClr val="767A7F"/>
+                </a:solidFill>
+                <a:latin typeface="맑은 고딕"/>
+                <a:ea typeface="맑은 고딕"/>
+              </a:rPr>
+              <a:t/>
+            </a:r>
+            <a:r>
+              <a:rPr sz="1250" b="0" dirty="0">
+                <a:solidFill>
+                  <a:srgbClr val="767A7F"/>
+                </a:solidFill>
+                <a:latin typeface="맑은 고딕"/>
+                <a:ea typeface="맑은 고딕"/>
+              </a:rPr>
+              <a:t/>
+            </a:r>
+            <a:r>
+              <a:rPr sz="1250" b="0" dirty="0" err="1">
+                <a:solidFill>
+                  <a:srgbClr val="767A7F"/>
+                </a:solidFill>
+                <a:latin typeface="맑은 고딕"/>
+                <a:ea typeface="맑은 고딕"/>
+              </a:rPr>
+              <a:t/>
+            </a:r>
+            <a:r>
+              <a:rPr lang="ko-KR" altLang="en-US" sz="1250" b="0" dirty="0">
+                <a:solidFill>
+                  <a:srgbClr val="767A7F"/>
+                </a:solidFill>
+                <a:latin typeface="맑은 고딕"/>
+                <a:ea typeface="맑은 고딕"/>
+              </a:rPr>
+              <a:t/>
+            </a:r>
+            <a:endParaRPr sz="1250" b="0" dirty="0">
+              <a:solidFill>
+                <a:srgbClr val="767A7F"/>
+              </a:solidFill>
+              <a:latin typeface="맑은 고딕"/>
+              <a:ea typeface="맑은 고딕"/>
+            </a:endParaRPr>
           </a:p>
         </p:txBody>
       </p:sp>
@@ -14561,6 +15375,7 @@
           <a:lstStyle/>
           <a:p>
             <a:pPr algn="ctr"/>
+            <a:endParaRPr/>
           </a:p>
         </p:txBody>
       </p:sp>
@@ -14573,7 +15388,7 @@
         <p:spPr>
           <a:xfrm>
             <a:off x="685800" y="1499616"/>
-            <a:ext cx="3246120" cy="1527048"/>
+            <a:ext cx="3246120" cy="933269"/>
           </a:xfrm>
           <a:prstGeom prst="rect">
             <a:avLst/>
@@ -14595,7 +15410,7 @@
               </a:spcAft>
             </a:pPr>
             <a:r>
-              <a:rPr sz="1300" b="1">
+              <a:rPr sz="1300" b="1" dirty="0">
                 <a:solidFill>
                   <a:srgbClr val="33393F"/>
                 </a:solidFill>
@@ -14604,18 +15419,35 @@
               </a:rPr>
               <a:t>① 분만취약지란 무엇인가</a:t>
             </a:r>
-          </a:p>
-          <a:p>
-            <a:pPr marL="160020" indent="-160020">
-              <a:lnSpc>
-                <a:spcPct val="114000"/>
-              </a:lnSpc>
-              <a:spcAft>
-                <a:spcPts val="200"/>
-              </a:spcAft>
-            </a:pPr>
-            <a:r>
-              <a:rPr sz="1100" b="0">
+            <a:r>
+              <a:rPr lang="ko-KR" altLang="en-US" sz="1300" b="1" dirty="0">
+                <a:solidFill>
+                  <a:srgbClr val="33393F"/>
+                </a:solidFill>
+                <a:latin typeface="맑은 고딕"/>
+                <a:ea typeface="맑은 고딕"/>
+              </a:rPr>
+              <a:t/>
+            </a:r>
+            <a:endParaRPr lang="en-US" altLang="ko-KR" sz="1300" b="1" dirty="0">
+              <a:solidFill>
+                <a:srgbClr val="33393F"/>
+              </a:solidFill>
+              <a:latin typeface="맑은 고딕"/>
+              <a:ea typeface="맑은 고딕"/>
+            </a:endParaRPr>
+          </a:p>
+          <a:p>
+            <a:pPr>
+              <a:lnSpc>
+                <a:spcPct val="114000"/>
+              </a:lnSpc>
+              <a:spcAft>
+                <a:spcPts val="350"/>
+              </a:spcAft>
+            </a:pPr>
+            <a:r>
+              <a:rPr sz="1100" b="0" dirty="0">
                 <a:solidFill>
                   <a:srgbClr val="1C1C1E"/>
                 </a:solidFill>
@@ -14624,6 +15456,263 @@
               </a:rPr>
               <a:t>• 소득·인구가 적은 지역이 아니라, 그 지역 가임기 여성이 ① 분만 가능 기관까지 60분 안에 닿기 어렵고(접근성) ② 실제 출산도 60분 안에 하지 못하는(이용률) 시·군 — 즉 거리와 시간으로 정의된다</a:t>
             </a:r>
+            <a:r>
+              <a:rPr sz="1100" b="0" dirty="0" err="1">
+                <a:solidFill>
+                  <a:srgbClr val="1C1C1E"/>
+                </a:solidFill>
+                <a:latin typeface="맑은 고딕"/>
+                <a:ea typeface="맑은 고딕"/>
+              </a:rPr>
+              <a:t/>
+            </a:r>
+            <a:r>
+              <a:rPr sz="1100" b="0" dirty="0">
+                <a:solidFill>
+                  <a:srgbClr val="1C1C1E"/>
+                </a:solidFill>
+                <a:latin typeface="맑은 고딕"/>
+                <a:ea typeface="맑은 고딕"/>
+              </a:rPr>
+              <a:t/>
+            </a:r>
+            <a:r>
+              <a:rPr sz="1100" b="0" dirty="0" err="1">
+                <a:solidFill>
+                  <a:srgbClr val="1C1C1E"/>
+                </a:solidFill>
+                <a:latin typeface="맑은 고딕"/>
+                <a:ea typeface="맑은 고딕"/>
+              </a:rPr>
+              <a:t/>
+            </a:r>
+            <a:r>
+              <a:rPr sz="1100" b="0" dirty="0">
+                <a:solidFill>
+                  <a:srgbClr val="1C1C1E"/>
+                </a:solidFill>
+                <a:latin typeface="맑은 고딕"/>
+                <a:ea typeface="맑은 고딕"/>
+              </a:rPr>
+              <a:t/>
+            </a:r>
+            <a:r>
+              <a:rPr sz="1100" b="0" dirty="0" err="1">
+                <a:solidFill>
+                  <a:srgbClr val="1C1C1E"/>
+                </a:solidFill>
+                <a:latin typeface="맑은 고딕"/>
+                <a:ea typeface="맑은 고딕"/>
+              </a:rPr>
+              <a:t/>
+            </a:r>
+            <a:r>
+              <a:rPr sz="1100" b="0" dirty="0">
+                <a:solidFill>
+                  <a:srgbClr val="1C1C1E"/>
+                </a:solidFill>
+                <a:latin typeface="맑은 고딕"/>
+                <a:ea typeface="맑은 고딕"/>
+              </a:rPr>
+              <a:t/>
+            </a:r>
+            <a:r>
+              <a:rPr sz="1100" b="0" dirty="0" err="1">
+                <a:solidFill>
+                  <a:srgbClr val="1C1C1E"/>
+                </a:solidFill>
+                <a:latin typeface="맑은 고딕"/>
+                <a:ea typeface="맑은 고딕"/>
+              </a:rPr>
+              <a:t/>
+            </a:r>
+            <a:r>
+              <a:rPr sz="1100" b="0" dirty="0">
+                <a:solidFill>
+                  <a:srgbClr val="1C1C1E"/>
+                </a:solidFill>
+                <a:latin typeface="맑은 고딕"/>
+                <a:ea typeface="맑은 고딕"/>
+              </a:rPr>
+              <a:t/>
+            </a:r>
+            <a:r>
+              <a:rPr sz="1100" b="0" dirty="0" err="1">
+                <a:solidFill>
+                  <a:srgbClr val="1C1C1E"/>
+                </a:solidFill>
+                <a:latin typeface="맑은 고딕"/>
+                <a:ea typeface="맑은 고딕"/>
+              </a:rPr>
+              <a:t/>
+            </a:r>
+            <a:r>
+              <a:rPr sz="1100" b="0" dirty="0">
+                <a:solidFill>
+                  <a:srgbClr val="1C1C1E"/>
+                </a:solidFill>
+                <a:latin typeface="맑은 고딕"/>
+                <a:ea typeface="맑은 고딕"/>
+              </a:rPr>
+              <a:t/>
+            </a:r>
+            <a:r>
+              <a:rPr sz="1100" b="0" dirty="0" err="1">
+                <a:solidFill>
+                  <a:srgbClr val="1C1C1E"/>
+                </a:solidFill>
+                <a:latin typeface="맑은 고딕"/>
+                <a:ea typeface="맑은 고딕"/>
+              </a:rPr>
+              <a:t/>
+            </a:r>
+            <a:r>
+              <a:rPr sz="1100" b="0" dirty="0">
+                <a:solidFill>
+                  <a:srgbClr val="1C1C1E"/>
+                </a:solidFill>
+                <a:latin typeface="맑은 고딕"/>
+                <a:ea typeface="맑은 고딕"/>
+              </a:rPr>
+              <a:t/>
+            </a:r>
+            <a:r>
+              <a:rPr sz="1100" b="0" dirty="0" err="1">
+                <a:solidFill>
+                  <a:srgbClr val="1C1C1E"/>
+                </a:solidFill>
+                <a:latin typeface="맑은 고딕"/>
+                <a:ea typeface="맑은 고딕"/>
+              </a:rPr>
+              <a:t/>
+            </a:r>
+            <a:r>
+              <a:rPr sz="1100" b="0" dirty="0">
+                <a:solidFill>
+                  <a:srgbClr val="1C1C1E"/>
+                </a:solidFill>
+                <a:latin typeface="맑은 고딕"/>
+                <a:ea typeface="맑은 고딕"/>
+              </a:rPr>
+              <a:t/>
+            </a:r>
+            <a:r>
+              <a:rPr sz="1100" b="0" dirty="0" err="1">
+                <a:solidFill>
+                  <a:srgbClr val="1C1C1E"/>
+                </a:solidFill>
+                <a:latin typeface="맑은 고딕"/>
+                <a:ea typeface="맑은 고딕"/>
+              </a:rPr>
+              <a:t/>
+            </a:r>
+            <a:r>
+              <a:rPr sz="1100" b="0" dirty="0">
+                <a:solidFill>
+                  <a:srgbClr val="1C1C1E"/>
+                </a:solidFill>
+                <a:latin typeface="맑은 고딕"/>
+                <a:ea typeface="맑은 고딕"/>
+              </a:rPr>
+              <a:t/>
+            </a:r>
+            <a:r>
+              <a:rPr sz="1100" b="0" dirty="0" err="1">
+                <a:solidFill>
+                  <a:srgbClr val="1C1C1E"/>
+                </a:solidFill>
+                <a:latin typeface="맑은 고딕"/>
+                <a:ea typeface="맑은 고딕"/>
+              </a:rPr>
+              <a:t/>
+            </a:r>
+            <a:r>
+              <a:rPr sz="1100" b="0" dirty="0">
+                <a:solidFill>
+                  <a:srgbClr val="1C1C1E"/>
+                </a:solidFill>
+                <a:latin typeface="맑은 고딕"/>
+                <a:ea typeface="맑은 고딕"/>
+              </a:rPr>
+              <a:t/>
+            </a:r>
+            <a:r>
+              <a:rPr sz="1100" b="0" dirty="0" err="1">
+                <a:solidFill>
+                  <a:srgbClr val="1C1C1E"/>
+                </a:solidFill>
+                <a:latin typeface="맑은 고딕"/>
+                <a:ea typeface="맑은 고딕"/>
+              </a:rPr>
+              <a:t/>
+            </a:r>
+            <a:r>
+              <a:rPr sz="1100" b="0" dirty="0">
+                <a:solidFill>
+                  <a:srgbClr val="1C1C1E"/>
+                </a:solidFill>
+                <a:latin typeface="맑은 고딕"/>
+                <a:ea typeface="맑은 고딕"/>
+              </a:rPr>
+              <a:t/>
+            </a:r>
+            <a:r>
+              <a:rPr sz="1100" b="0" dirty="0" err="1">
+                <a:solidFill>
+                  <a:srgbClr val="1C1C1E"/>
+                </a:solidFill>
+                <a:latin typeface="맑은 고딕"/>
+                <a:ea typeface="맑은 고딕"/>
+              </a:rPr>
+              <a:t/>
+            </a:r>
+            <a:r>
+              <a:rPr sz="1100" b="0" dirty="0">
+                <a:solidFill>
+                  <a:srgbClr val="1C1C1E"/>
+                </a:solidFill>
+                <a:latin typeface="맑은 고딕"/>
+                <a:ea typeface="맑은 고딕"/>
+              </a:rPr>
+              <a:t/>
+            </a:r>
+            <a:r>
+              <a:rPr sz="1100" b="0" dirty="0" err="1">
+                <a:solidFill>
+                  <a:srgbClr val="1C1C1E"/>
+                </a:solidFill>
+                <a:latin typeface="맑은 고딕"/>
+                <a:ea typeface="맑은 고딕"/>
+              </a:rPr>
+              <a:t/>
+            </a:r>
+            <a:r>
+              <a:rPr sz="1100" b="0" dirty="0">
+                <a:solidFill>
+                  <a:srgbClr val="1C1C1E"/>
+                </a:solidFill>
+                <a:latin typeface="맑은 고딕"/>
+                <a:ea typeface="맑은 고딕"/>
+              </a:rPr>
+              <a:t/>
+            </a:r>
+            <a:r>
+              <a:rPr sz="1100" b="0" dirty="0" err="1">
+                <a:solidFill>
+                  <a:srgbClr val="1C1C1E"/>
+                </a:solidFill>
+                <a:latin typeface="맑은 고딕"/>
+                <a:ea typeface="맑은 고딕"/>
+              </a:rPr>
+              <a:t/>
+            </a:r>
+            <a:endParaRPr sz="1100" b="0" dirty="0">
+              <a:solidFill>
+                <a:srgbClr val="1C1C1E"/>
+              </a:solidFill>
+              <a:latin typeface="맑은 고딕"/>
+              <a:ea typeface="맑은 고딕"/>
+            </a:endParaRPr>
           </a:p>
         </p:txBody>
       </p:sp>
@@ -14678,6 +15767,7 @@
           <a:lstStyle/>
           <a:p>
             <a:pPr algn="ctr"/>
+            <a:endParaRPr/>
           </a:p>
         </p:txBody>
       </p:sp>
@@ -14712,7 +15802,7 @@
               </a:spcAft>
             </a:pPr>
             <a:r>
-              <a:rPr sz="1300" b="1">
+              <a:rPr sz="1300" b="1" dirty="0">
                 <a:solidFill>
                   <a:srgbClr val="33393F"/>
                 </a:solidFill>
@@ -14721,6 +15811,43 @@
               </a:rPr>
               <a:t>② 접근성은 원래 두 축이다</a:t>
             </a:r>
+            <a:r>
+              <a:rPr sz="1300" b="1" dirty="0" err="1">
+                <a:solidFill>
+                  <a:srgbClr val="33393F"/>
+                </a:solidFill>
+                <a:latin typeface="맑은 고딕"/>
+                <a:ea typeface="맑은 고딕"/>
+              </a:rPr>
+              <a:t/>
+            </a:r>
+            <a:r>
+              <a:rPr sz="1300" b="1" dirty="0">
+                <a:solidFill>
+                  <a:srgbClr val="33393F"/>
+                </a:solidFill>
+                <a:latin typeface="맑은 고딕"/>
+                <a:ea typeface="맑은 고딕"/>
+              </a:rPr>
+              <a:t/>
+            </a:r>
+            <a:r>
+              <a:rPr sz="1300" b="1" dirty="0" err="1">
+                <a:solidFill>
+                  <a:srgbClr val="33393F"/>
+                </a:solidFill>
+                <a:latin typeface="맑은 고딕"/>
+                <a:ea typeface="맑은 고딕"/>
+              </a:rPr>
+              <a:t/>
+            </a:r>
+            <a:endParaRPr sz="1300" b="1" dirty="0">
+              <a:solidFill>
+                <a:srgbClr val="33393F"/>
+              </a:solidFill>
+              <a:latin typeface="맑은 고딕"/>
+              <a:ea typeface="맑은 고딕"/>
+            </a:endParaRPr>
           </a:p>
           <a:p>
             <a:pPr marL="160020" indent="-160020">
@@ -14732,7 +15859,7 @@
               </a:spcAft>
             </a:pPr>
             <a:r>
-              <a:rPr sz="1100" b="0">
+              <a:rPr sz="1100" b="0" dirty="0">
                 <a:solidFill>
                   <a:srgbClr val="1C1C1E"/>
                 </a:solidFill>
@@ -14741,6 +15868,223 @@
               </a:rPr>
               <a:t>• 보건지리학 표준(2SFCA)은 접근성을 공간 축(얼마나 멀리 있는가) × 비공간 축(그곳에 의사가 있는가)의 결합으로 본다. 현행 판정식이 어느 축을 보는지가 감사의 출발점이다</a:t>
             </a:r>
+            <a:r>
+              <a:rPr sz="1100" b="0" dirty="0" err="1">
+                <a:solidFill>
+                  <a:srgbClr val="1C1C1E"/>
+                </a:solidFill>
+                <a:latin typeface="맑은 고딕"/>
+                <a:ea typeface="맑은 고딕"/>
+              </a:rPr>
+              <a:t/>
+            </a:r>
+            <a:r>
+              <a:rPr sz="1100" b="0" dirty="0">
+                <a:solidFill>
+                  <a:srgbClr val="1C1C1E"/>
+                </a:solidFill>
+                <a:latin typeface="맑은 고딕"/>
+                <a:ea typeface="맑은 고딕"/>
+              </a:rPr>
+              <a:t/>
+            </a:r>
+            <a:r>
+              <a:rPr sz="1100" b="0" dirty="0" err="1">
+                <a:solidFill>
+                  <a:srgbClr val="1C1C1E"/>
+                </a:solidFill>
+                <a:latin typeface="맑은 고딕"/>
+                <a:ea typeface="맑은 고딕"/>
+              </a:rPr>
+              <a:t/>
+            </a:r>
+            <a:r>
+              <a:rPr sz="1100" b="0" dirty="0">
+                <a:solidFill>
+                  <a:srgbClr val="1C1C1E"/>
+                </a:solidFill>
+                <a:latin typeface="맑은 고딕"/>
+                <a:ea typeface="맑은 고딕"/>
+              </a:rPr>
+              <a:t/>
+            </a:r>
+            <a:r>
+              <a:rPr sz="1100" b="0" dirty="0" err="1">
+                <a:solidFill>
+                  <a:srgbClr val="1C1C1E"/>
+                </a:solidFill>
+                <a:latin typeface="맑은 고딕"/>
+                <a:ea typeface="맑은 고딕"/>
+              </a:rPr>
+              <a:t/>
+            </a:r>
+            <a:r>
+              <a:rPr sz="1100" b="0" dirty="0">
+                <a:solidFill>
+                  <a:srgbClr val="1C1C1E"/>
+                </a:solidFill>
+                <a:latin typeface="맑은 고딕"/>
+                <a:ea typeface="맑은 고딕"/>
+              </a:rPr>
+              <a:t/>
+            </a:r>
+            <a:r>
+              <a:rPr sz="1100" b="0" dirty="0" err="1">
+                <a:solidFill>
+                  <a:srgbClr val="1C1C1E"/>
+                </a:solidFill>
+                <a:latin typeface="맑은 고딕"/>
+                <a:ea typeface="맑은 고딕"/>
+              </a:rPr>
+              <a:t/>
+            </a:r>
+            <a:r>
+              <a:rPr sz="1100" b="0" dirty="0">
+                <a:solidFill>
+                  <a:srgbClr val="1C1C1E"/>
+                </a:solidFill>
+                <a:latin typeface="맑은 고딕"/>
+                <a:ea typeface="맑은 고딕"/>
+              </a:rPr>
+              <a:t/>
+            </a:r>
+            <a:r>
+              <a:rPr sz="1100" b="0" dirty="0" err="1">
+                <a:solidFill>
+                  <a:srgbClr val="1C1C1E"/>
+                </a:solidFill>
+                <a:latin typeface="맑은 고딕"/>
+                <a:ea typeface="맑은 고딕"/>
+              </a:rPr>
+              <a:t/>
+            </a:r>
+            <a:r>
+              <a:rPr sz="1100" b="0" dirty="0">
+                <a:solidFill>
+                  <a:srgbClr val="1C1C1E"/>
+                </a:solidFill>
+                <a:latin typeface="맑은 고딕"/>
+                <a:ea typeface="맑은 고딕"/>
+              </a:rPr>
+              <a:t/>
+            </a:r>
+            <a:r>
+              <a:rPr sz="1100" b="0" dirty="0" err="1">
+                <a:solidFill>
+                  <a:srgbClr val="1C1C1E"/>
+                </a:solidFill>
+                <a:latin typeface="맑은 고딕"/>
+                <a:ea typeface="맑은 고딕"/>
+              </a:rPr>
+              <a:t/>
+            </a:r>
+            <a:r>
+              <a:rPr sz="1100" b="0" dirty="0">
+                <a:solidFill>
+                  <a:srgbClr val="1C1C1E"/>
+                </a:solidFill>
+                <a:latin typeface="맑은 고딕"/>
+                <a:ea typeface="맑은 고딕"/>
+              </a:rPr>
+              <a:t/>
+            </a:r>
+            <a:r>
+              <a:rPr sz="1100" b="0" dirty="0" err="1">
+                <a:solidFill>
+                  <a:srgbClr val="1C1C1E"/>
+                </a:solidFill>
+                <a:latin typeface="맑은 고딕"/>
+                <a:ea typeface="맑은 고딕"/>
+              </a:rPr>
+              <a:t/>
+            </a:r>
+            <a:r>
+              <a:rPr sz="1100" b="0" dirty="0">
+                <a:solidFill>
+                  <a:srgbClr val="1C1C1E"/>
+                </a:solidFill>
+                <a:latin typeface="맑은 고딕"/>
+                <a:ea typeface="맑은 고딕"/>
+              </a:rPr>
+              <a:t/>
+            </a:r>
+            <a:r>
+              <a:rPr sz="1100" b="0" dirty="0" err="1">
+                <a:solidFill>
+                  <a:srgbClr val="1C1C1E"/>
+                </a:solidFill>
+                <a:latin typeface="맑은 고딕"/>
+                <a:ea typeface="맑은 고딕"/>
+              </a:rPr>
+              <a:t/>
+            </a:r>
+            <a:r>
+              <a:rPr sz="1100" b="0" dirty="0">
+                <a:solidFill>
+                  <a:srgbClr val="1C1C1E"/>
+                </a:solidFill>
+                <a:latin typeface="맑은 고딕"/>
+                <a:ea typeface="맑은 고딕"/>
+              </a:rPr>
+              <a:t/>
+            </a:r>
+            <a:r>
+              <a:rPr sz="1100" b="0" dirty="0" err="1">
+                <a:solidFill>
+                  <a:srgbClr val="1C1C1E"/>
+                </a:solidFill>
+                <a:latin typeface="맑은 고딕"/>
+                <a:ea typeface="맑은 고딕"/>
+              </a:rPr>
+              <a:t/>
+            </a:r>
+            <a:r>
+              <a:rPr sz="1100" b="0" dirty="0">
+                <a:solidFill>
+                  <a:srgbClr val="1C1C1E"/>
+                </a:solidFill>
+                <a:latin typeface="맑은 고딕"/>
+                <a:ea typeface="맑은 고딕"/>
+              </a:rPr>
+              <a:t/>
+            </a:r>
+            <a:r>
+              <a:rPr sz="1100" b="0" dirty="0" err="1">
+                <a:solidFill>
+                  <a:srgbClr val="1C1C1E"/>
+                </a:solidFill>
+                <a:latin typeface="맑은 고딕"/>
+                <a:ea typeface="맑은 고딕"/>
+              </a:rPr>
+              <a:t/>
+            </a:r>
+            <a:r>
+              <a:rPr sz="1100" b="0" dirty="0">
+                <a:solidFill>
+                  <a:srgbClr val="1C1C1E"/>
+                </a:solidFill>
+                <a:latin typeface="맑은 고딕"/>
+                <a:ea typeface="맑은 고딕"/>
+              </a:rPr>
+              <a:t/>
+            </a:r>
+            <a:r>
+              <a:rPr sz="1100" b="0" dirty="0" err="1">
+                <a:solidFill>
+                  <a:srgbClr val="1C1C1E"/>
+                </a:solidFill>
+                <a:latin typeface="맑은 고딕"/>
+                <a:ea typeface="맑은 고딕"/>
+              </a:rPr>
+              <a:t/>
+            </a:r>
+            <a:endParaRPr sz="1100" b="0" dirty="0">
+              <a:solidFill>
+                <a:srgbClr val="1C1C1E"/>
+              </a:solidFill>
+              <a:latin typeface="맑은 고딕"/>
+              <a:ea typeface="맑은 고딕"/>
+            </a:endParaRPr>
           </a:p>
         </p:txBody>
       </p:sp>
@@ -14795,6 +16139,7 @@
           <a:lstStyle/>
           <a:p>
             <a:pPr algn="ctr"/>
+            <a:endParaRPr/>
           </a:p>
         </p:txBody>
       </p:sp>
@@ -14807,7 +16152,7 @@
         <p:spPr>
           <a:xfrm>
             <a:off x="8366760" y="1499616"/>
-            <a:ext cx="3246120" cy="1527048"/>
+            <a:ext cx="3246120" cy="933269"/>
           </a:xfrm>
           <a:prstGeom prst="rect">
             <a:avLst/>
@@ -14829,7 +16174,7 @@
               </a:spcAft>
             </a:pPr>
             <a:r>
-              <a:rPr sz="1300" b="1">
+              <a:rPr sz="1300" b="1" dirty="0">
                 <a:solidFill>
                   <a:srgbClr val="000000"/>
                 </a:solidFill>
@@ -14838,18 +16183,35 @@
               </a:rPr>
               <a:t>③ 이 프로젝트가 감사한 것</a:t>
             </a:r>
-          </a:p>
-          <a:p>
-            <a:pPr marL="160020" indent="-160020">
-              <a:lnSpc>
-                <a:spcPct val="114000"/>
-              </a:lnSpc>
-              <a:spcAft>
-                <a:spcPts val="200"/>
-              </a:spcAft>
-            </a:pPr>
-            <a:r>
-              <a:rPr sz="1100" b="0">
+            <a:r>
+              <a:rPr lang="ko-KR" altLang="en-US" sz="1300" b="1" dirty="0">
+                <a:solidFill>
+                  <a:srgbClr val="000000"/>
+                </a:solidFill>
+                <a:latin typeface="맑은 고딕"/>
+                <a:ea typeface="맑은 고딕"/>
+              </a:rPr>
+              <a:t/>
+            </a:r>
+            <a:endParaRPr lang="en-US" altLang="ko-KR" sz="1300" b="1" dirty="0">
+              <a:solidFill>
+                <a:srgbClr val="000000"/>
+              </a:solidFill>
+              <a:latin typeface="맑은 고딕"/>
+              <a:ea typeface="맑은 고딕"/>
+            </a:endParaRPr>
+          </a:p>
+          <a:p>
+            <a:pPr>
+              <a:lnSpc>
+                <a:spcPct val="114000"/>
+              </a:lnSpc>
+              <a:spcAft>
+                <a:spcPts val="350"/>
+              </a:spcAft>
+            </a:pPr>
+            <a:r>
+              <a:rPr sz="1100" b="0" dirty="0">
                 <a:solidFill>
                   <a:srgbClr val="1C1C1E"/>
                 </a:solidFill>
@@ -14858,6 +16220,343 @@
               </a:rPr>
               <a:t>• 자원이 모자란 것(㉠)은 예산·인력의 영역이라 데이터가 답할 수 없다. 있는 자원이 체계적으로 배분되지 않는 것(㉡)은 규칙의 문제이므로 데이터로 답할 수 있다 — 이 프로젝트는 ㉡을 감사했다</a:t>
             </a:r>
+            <a:r>
+              <a:rPr sz="1100" b="0" dirty="0" err="1">
+                <a:solidFill>
+                  <a:srgbClr val="1C1C1E"/>
+                </a:solidFill>
+                <a:latin typeface="맑은 고딕"/>
+                <a:ea typeface="맑은 고딕"/>
+              </a:rPr>
+              <a:t/>
+            </a:r>
+            <a:r>
+              <a:rPr sz="1100" b="0" dirty="0">
+                <a:solidFill>
+                  <a:srgbClr val="1C1C1E"/>
+                </a:solidFill>
+                <a:latin typeface="맑은 고딕"/>
+                <a:ea typeface="맑은 고딕"/>
+              </a:rPr>
+              <a:t/>
+            </a:r>
+            <a:r>
+              <a:rPr sz="1100" b="0" dirty="0" err="1">
+                <a:solidFill>
+                  <a:srgbClr val="1C1C1E"/>
+                </a:solidFill>
+                <a:latin typeface="맑은 고딕"/>
+                <a:ea typeface="맑은 고딕"/>
+              </a:rPr>
+              <a:t/>
+            </a:r>
+            <a:r>
+              <a:rPr sz="1100" b="0" dirty="0">
+                <a:solidFill>
+                  <a:srgbClr val="1C1C1E"/>
+                </a:solidFill>
+                <a:latin typeface="맑은 고딕"/>
+                <a:ea typeface="맑은 고딕"/>
+              </a:rPr>
+              <a:t/>
+            </a:r>
+            <a:r>
+              <a:rPr sz="1100" b="0" dirty="0" err="1">
+                <a:solidFill>
+                  <a:srgbClr val="1C1C1E"/>
+                </a:solidFill>
+                <a:latin typeface="맑은 고딕"/>
+                <a:ea typeface="맑은 고딕"/>
+              </a:rPr>
+              <a:t/>
+            </a:r>
+            <a:r>
+              <a:rPr sz="1100" b="0" dirty="0">
+                <a:solidFill>
+                  <a:srgbClr val="1C1C1E"/>
+                </a:solidFill>
+                <a:latin typeface="맑은 고딕"/>
+                <a:ea typeface="맑은 고딕"/>
+              </a:rPr>
+              <a:t/>
+            </a:r>
+            <a:r>
+              <a:rPr sz="1100" b="0" dirty="0" err="1">
+                <a:solidFill>
+                  <a:srgbClr val="1C1C1E"/>
+                </a:solidFill>
+                <a:latin typeface="맑은 고딕"/>
+                <a:ea typeface="맑은 고딕"/>
+              </a:rPr>
+              <a:t/>
+            </a:r>
+            <a:r>
+              <a:rPr sz="1100" b="0" dirty="0">
+                <a:solidFill>
+                  <a:srgbClr val="1C1C1E"/>
+                </a:solidFill>
+                <a:latin typeface="맑은 고딕"/>
+                <a:ea typeface="맑은 고딕"/>
+              </a:rPr>
+              <a:t/>
+            </a:r>
+            <a:r>
+              <a:rPr sz="1100" b="0" dirty="0" err="1">
+                <a:solidFill>
+                  <a:srgbClr val="1C1C1E"/>
+                </a:solidFill>
+                <a:latin typeface="맑은 고딕"/>
+                <a:ea typeface="맑은 고딕"/>
+              </a:rPr>
+              <a:t/>
+            </a:r>
+            <a:r>
+              <a:rPr sz="1100" b="0" dirty="0">
+                <a:solidFill>
+                  <a:srgbClr val="1C1C1E"/>
+                </a:solidFill>
+                <a:latin typeface="맑은 고딕"/>
+                <a:ea typeface="맑은 고딕"/>
+              </a:rPr>
+              <a:t/>
+            </a:r>
+            <a:r>
+              <a:rPr sz="1100" b="0" dirty="0" err="1">
+                <a:solidFill>
+                  <a:srgbClr val="1C1C1E"/>
+                </a:solidFill>
+                <a:latin typeface="맑은 고딕"/>
+                <a:ea typeface="맑은 고딕"/>
+              </a:rPr>
+              <a:t/>
+            </a:r>
+            <a:r>
+              <a:rPr sz="1100" b="0" dirty="0">
+                <a:solidFill>
+                  <a:srgbClr val="1C1C1E"/>
+                </a:solidFill>
+                <a:latin typeface="맑은 고딕"/>
+                <a:ea typeface="맑은 고딕"/>
+              </a:rPr>
+              <a:t/>
+            </a:r>
+            <a:r>
+              <a:rPr sz="1100" b="0" dirty="0" err="1">
+                <a:solidFill>
+                  <a:srgbClr val="1C1C1E"/>
+                </a:solidFill>
+                <a:latin typeface="맑은 고딕"/>
+                <a:ea typeface="맑은 고딕"/>
+              </a:rPr>
+              <a:t/>
+            </a:r>
+            <a:r>
+              <a:rPr sz="1100" b="0" dirty="0">
+                <a:solidFill>
+                  <a:srgbClr val="1C1C1E"/>
+                </a:solidFill>
+                <a:latin typeface="맑은 고딕"/>
+                <a:ea typeface="맑은 고딕"/>
+              </a:rPr>
+              <a:t/>
+            </a:r>
+            <a:r>
+              <a:rPr sz="1100" b="0" dirty="0" err="1">
+                <a:solidFill>
+                  <a:srgbClr val="1C1C1E"/>
+                </a:solidFill>
+                <a:latin typeface="맑은 고딕"/>
+                <a:ea typeface="맑은 고딕"/>
+              </a:rPr>
+              <a:t/>
+            </a:r>
+            <a:r>
+              <a:rPr sz="1100" b="0" dirty="0">
+                <a:solidFill>
+                  <a:srgbClr val="1C1C1E"/>
+                </a:solidFill>
+                <a:latin typeface="맑은 고딕"/>
+                <a:ea typeface="맑은 고딕"/>
+              </a:rPr>
+              <a:t/>
+            </a:r>
+            <a:r>
+              <a:rPr sz="1100" b="0" dirty="0" err="1">
+                <a:solidFill>
+                  <a:srgbClr val="1C1C1E"/>
+                </a:solidFill>
+                <a:latin typeface="맑은 고딕"/>
+                <a:ea typeface="맑은 고딕"/>
+              </a:rPr>
+              <a:t/>
+            </a:r>
+            <a:r>
+              <a:rPr sz="1100" b="0" dirty="0">
+                <a:solidFill>
+                  <a:srgbClr val="1C1C1E"/>
+                </a:solidFill>
+                <a:latin typeface="맑은 고딕"/>
+                <a:ea typeface="맑은 고딕"/>
+              </a:rPr>
+              <a:t/>
+            </a:r>
+            <a:r>
+              <a:rPr sz="1100" b="0" dirty="0" err="1">
+                <a:solidFill>
+                  <a:srgbClr val="1C1C1E"/>
+                </a:solidFill>
+                <a:latin typeface="맑은 고딕"/>
+                <a:ea typeface="맑은 고딕"/>
+              </a:rPr>
+              <a:t/>
+            </a:r>
+            <a:r>
+              <a:rPr sz="1100" b="0" dirty="0">
+                <a:solidFill>
+                  <a:srgbClr val="1C1C1E"/>
+                </a:solidFill>
+                <a:latin typeface="맑은 고딕"/>
+                <a:ea typeface="맑은 고딕"/>
+              </a:rPr>
+              <a:t/>
+            </a:r>
+            <a:r>
+              <a:rPr sz="1100" b="0" dirty="0" err="1">
+                <a:solidFill>
+                  <a:srgbClr val="1C1C1E"/>
+                </a:solidFill>
+                <a:latin typeface="맑은 고딕"/>
+                <a:ea typeface="맑은 고딕"/>
+              </a:rPr>
+              <a:t/>
+            </a:r>
+            <a:r>
+              <a:rPr sz="1100" b="0" dirty="0">
+                <a:solidFill>
+                  <a:srgbClr val="1C1C1E"/>
+                </a:solidFill>
+                <a:latin typeface="맑은 고딕"/>
+                <a:ea typeface="맑은 고딕"/>
+              </a:rPr>
+              <a:t/>
+            </a:r>
+            <a:r>
+              <a:rPr sz="1100" b="0" dirty="0" err="1">
+                <a:solidFill>
+                  <a:srgbClr val="1C1C1E"/>
+                </a:solidFill>
+                <a:latin typeface="맑은 고딕"/>
+                <a:ea typeface="맑은 고딕"/>
+              </a:rPr>
+              <a:t/>
+            </a:r>
+            <a:r>
+              <a:rPr sz="1100" b="0" dirty="0">
+                <a:solidFill>
+                  <a:srgbClr val="1C1C1E"/>
+                </a:solidFill>
+                <a:latin typeface="맑은 고딕"/>
+                <a:ea typeface="맑은 고딕"/>
+              </a:rPr>
+              <a:t/>
+            </a:r>
+            <a:r>
+              <a:rPr sz="1100" b="0" dirty="0" err="1">
+                <a:solidFill>
+                  <a:srgbClr val="1C1C1E"/>
+                </a:solidFill>
+                <a:latin typeface="맑은 고딕"/>
+                <a:ea typeface="맑은 고딕"/>
+              </a:rPr>
+              <a:t/>
+            </a:r>
+            <a:r>
+              <a:rPr sz="1100" b="0" dirty="0">
+                <a:solidFill>
+                  <a:srgbClr val="1C1C1E"/>
+                </a:solidFill>
+                <a:latin typeface="맑은 고딕"/>
+                <a:ea typeface="맑은 고딕"/>
+              </a:rPr>
+              <a:t/>
+            </a:r>
+            <a:r>
+              <a:rPr sz="1100" b="0" dirty="0" err="1">
+                <a:solidFill>
+                  <a:srgbClr val="1C1C1E"/>
+                </a:solidFill>
+                <a:latin typeface="맑은 고딕"/>
+                <a:ea typeface="맑은 고딕"/>
+              </a:rPr>
+              <a:t/>
+            </a:r>
+            <a:r>
+              <a:rPr sz="1100" b="0" dirty="0">
+                <a:solidFill>
+                  <a:srgbClr val="1C1C1E"/>
+                </a:solidFill>
+                <a:latin typeface="맑은 고딕"/>
+                <a:ea typeface="맑은 고딕"/>
+              </a:rPr>
+              <a:t/>
+            </a:r>
+            <a:r>
+              <a:rPr sz="1100" b="0" dirty="0" err="1">
+                <a:solidFill>
+                  <a:srgbClr val="1C1C1E"/>
+                </a:solidFill>
+                <a:latin typeface="맑은 고딕"/>
+                <a:ea typeface="맑은 고딕"/>
+              </a:rPr>
+              <a:t/>
+            </a:r>
+            <a:r>
+              <a:rPr sz="1100" b="0" dirty="0">
+                <a:solidFill>
+                  <a:srgbClr val="1C1C1E"/>
+                </a:solidFill>
+                <a:latin typeface="맑은 고딕"/>
+                <a:ea typeface="맑은 고딕"/>
+              </a:rPr>
+              <a:t/>
+            </a:r>
+            <a:r>
+              <a:rPr sz="1100" b="0" dirty="0" err="1">
+                <a:solidFill>
+                  <a:srgbClr val="1C1C1E"/>
+                </a:solidFill>
+                <a:latin typeface="맑은 고딕"/>
+                <a:ea typeface="맑은 고딕"/>
+              </a:rPr>
+              <a:t/>
+            </a:r>
+            <a:r>
+              <a:rPr sz="1100" b="0" dirty="0">
+                <a:solidFill>
+                  <a:srgbClr val="1C1C1E"/>
+                </a:solidFill>
+                <a:latin typeface="맑은 고딕"/>
+                <a:ea typeface="맑은 고딕"/>
+              </a:rPr>
+              <a:t/>
+            </a:r>
+            <a:r>
+              <a:rPr sz="1100" b="0" dirty="0" err="1">
+                <a:solidFill>
+                  <a:srgbClr val="1C1C1E"/>
+                </a:solidFill>
+                <a:latin typeface="맑은 고딕"/>
+                <a:ea typeface="맑은 고딕"/>
+              </a:rPr>
+              <a:t/>
+            </a:r>
+            <a:endParaRPr sz="1100" b="0" dirty="0">
+              <a:solidFill>
+                <a:srgbClr val="1C1C1E"/>
+              </a:solidFill>
+              <a:latin typeface="맑은 고딕"/>
+              <a:ea typeface="맑은 고딕"/>
+            </a:endParaRPr>
           </a:p>
         </p:txBody>
       </p:sp>
@@ -14912,6 +16611,7 @@
           <a:lstStyle/>
           <a:p>
             <a:pPr algn="ctr"/>
+            <a:endParaRPr/>
           </a:p>
         </p:txBody>
       </p:sp>
@@ -14924,7 +16624,7 @@
         <p:spPr>
           <a:xfrm>
             <a:off x="685800" y="3529584"/>
-            <a:ext cx="10927080" cy="1316736"/>
+            <a:ext cx="10927080" cy="1370568"/>
           </a:xfrm>
           <a:prstGeom prst="rect">
             <a:avLst/>
@@ -14946,7 +16646,7 @@
               </a:spcAft>
             </a:pPr>
             <a:r>
-              <a:rPr sz="1300" b="1">
+              <a:rPr sz="1300" b="1" dirty="0" err="1">
                 <a:solidFill>
                   <a:srgbClr val="33393F"/>
                 </a:solidFill>
@@ -14955,6 +16655,196 @@
               </a:rPr>
               <a:t>제도는 15년째 운영 중이다 — 그런데 결과는</a:t>
             </a:r>
+            <a:r>
+              <a:rPr sz="1300" b="1" dirty="0">
+                <a:solidFill>
+                  <a:srgbClr val="33393F"/>
+                </a:solidFill>
+                <a:latin typeface="맑은 고딕"/>
+                <a:ea typeface="맑은 고딕"/>
+              </a:rPr>
+              <a:t/>
+            </a:r>
+            <a:r>
+              <a:rPr sz="1300" b="1" dirty="0" err="1">
+                <a:solidFill>
+                  <a:srgbClr val="33393F"/>
+                </a:solidFill>
+                <a:latin typeface="맑은 고딕"/>
+                <a:ea typeface="맑은 고딕"/>
+              </a:rPr>
+              <a:t/>
+            </a:r>
+            <a:r>
+              <a:rPr sz="1300" b="1" dirty="0">
+                <a:solidFill>
+                  <a:srgbClr val="33393F"/>
+                </a:solidFill>
+                <a:latin typeface="맑은 고딕"/>
+                <a:ea typeface="맑은 고딕"/>
+              </a:rPr>
+              <a:t/>
+            </a:r>
+            <a:r>
+              <a:rPr sz="1300" b="1" dirty="0" err="1">
+                <a:solidFill>
+                  <a:srgbClr val="33393F"/>
+                </a:solidFill>
+                <a:latin typeface="맑은 고딕"/>
+                <a:ea typeface="맑은 고딕"/>
+              </a:rPr>
+              <a:t/>
+            </a:r>
+            <a:r>
+              <a:rPr sz="1300" b="1" dirty="0">
+                <a:solidFill>
+                  <a:srgbClr val="33393F"/>
+                </a:solidFill>
+                <a:latin typeface="맑은 고딕"/>
+                <a:ea typeface="맑은 고딕"/>
+              </a:rPr>
+              <a:t/>
+            </a:r>
+            <a:r>
+              <a:rPr sz="1300" b="1" dirty="0" err="1">
+                <a:solidFill>
+                  <a:srgbClr val="33393F"/>
+                </a:solidFill>
+                <a:latin typeface="맑은 고딕"/>
+                <a:ea typeface="맑은 고딕"/>
+              </a:rPr>
+              <a:t/>
+            </a:r>
+            <a:r>
+              <a:rPr sz="1300" b="1" dirty="0">
+                <a:solidFill>
+                  <a:srgbClr val="33393F"/>
+                </a:solidFill>
+                <a:latin typeface="맑은 고딕"/>
+                <a:ea typeface="맑은 고딕"/>
+              </a:rPr>
+              <a:t/>
+            </a:r>
+            <a:r>
+              <a:rPr sz="1300" b="1" dirty="0" err="1">
+                <a:solidFill>
+                  <a:srgbClr val="33393F"/>
+                </a:solidFill>
+                <a:latin typeface="맑은 고딕"/>
+                <a:ea typeface="맑은 고딕"/>
+              </a:rPr>
+              <a:t/>
+            </a:r>
+            <a:r>
+              <a:rPr sz="1300" b="1" dirty="0">
+                <a:solidFill>
+                  <a:srgbClr val="33393F"/>
+                </a:solidFill>
+                <a:latin typeface="맑은 고딕"/>
+                <a:ea typeface="맑은 고딕"/>
+              </a:rPr>
+              <a:t/>
+            </a:r>
+            <a:r>
+              <a:rPr sz="1300" b="1" dirty="0" err="1">
+                <a:solidFill>
+                  <a:srgbClr val="33393F"/>
+                </a:solidFill>
+                <a:latin typeface="맑은 고딕"/>
+                <a:ea typeface="맑은 고딕"/>
+              </a:rPr>
+              <a:t/>
+            </a:r>
+            <a:r>
+              <a:rPr sz="1300" b="1" dirty="0">
+                <a:solidFill>
+                  <a:srgbClr val="33393F"/>
+                </a:solidFill>
+                <a:latin typeface="맑은 고딕"/>
+                <a:ea typeface="맑은 고딕"/>
+              </a:rPr>
+              <a:t/>
+            </a:r>
+            <a:r>
+              <a:rPr sz="1300" b="1" dirty="0" err="1">
+                <a:solidFill>
+                  <a:srgbClr val="33393F"/>
+                </a:solidFill>
+                <a:latin typeface="맑은 고딕"/>
+                <a:ea typeface="맑은 고딕"/>
+              </a:rPr>
+              <a:t/>
+            </a:r>
+            <a:r>
+              <a:rPr sz="1300" b="1" dirty="0">
+                <a:solidFill>
+                  <a:srgbClr val="33393F"/>
+                </a:solidFill>
+                <a:latin typeface="맑은 고딕"/>
+                <a:ea typeface="맑은 고딕"/>
+              </a:rPr>
+              <a:t/>
+            </a:r>
+            <a:r>
+              <a:rPr sz="1300" b="1" dirty="0" err="1">
+                <a:solidFill>
+                  <a:srgbClr val="33393F"/>
+                </a:solidFill>
+                <a:latin typeface="맑은 고딕"/>
+                <a:ea typeface="맑은 고딕"/>
+              </a:rPr>
+              <a:t/>
+            </a:r>
+            <a:r>
+              <a:rPr sz="1300" b="1" dirty="0">
+                <a:solidFill>
+                  <a:srgbClr val="33393F"/>
+                </a:solidFill>
+                <a:latin typeface="맑은 고딕"/>
+                <a:ea typeface="맑은 고딕"/>
+              </a:rPr>
+              <a:t/>
+            </a:r>
+            <a:r>
+              <a:rPr sz="1300" b="1" dirty="0" err="1">
+                <a:solidFill>
+                  <a:srgbClr val="33393F"/>
+                </a:solidFill>
+                <a:latin typeface="맑은 고딕"/>
+                <a:ea typeface="맑은 고딕"/>
+              </a:rPr>
+              <a:t/>
+            </a:r>
+            <a:r>
+              <a:rPr sz="1300" b="1" dirty="0">
+                <a:solidFill>
+                  <a:srgbClr val="33393F"/>
+                </a:solidFill>
+                <a:latin typeface="맑은 고딕"/>
+                <a:ea typeface="맑은 고딕"/>
+              </a:rPr>
+              <a:t/>
+            </a:r>
+            <a:r>
+              <a:rPr sz="1300" b="1" dirty="0" err="1">
+                <a:solidFill>
+                  <a:srgbClr val="33393F"/>
+                </a:solidFill>
+                <a:latin typeface="맑은 고딕"/>
+                <a:ea typeface="맑은 고딕"/>
+              </a:rPr>
+              <a:t/>
+            </a:r>
+            <a:r>
+              <a:rPr sz="1300" b="1" dirty="0">
+                <a:solidFill>
+                  <a:srgbClr val="33393F"/>
+                </a:solidFill>
+                <a:latin typeface="맑은 고딕"/>
+                <a:ea typeface="맑은 고딕"/>
+              </a:rPr>
+              <a:t/>
+            </a:r>
           </a:p>
           <a:p>
             <a:pPr marL="160020" indent="-160020">
@@ -14966,7 +16856,7 @@
               </a:spcAft>
             </a:pPr>
             <a:r>
-              <a:rPr sz="1100" b="0">
+              <a:rPr sz="1100" b="0" dirty="0">
                 <a:solidFill>
                   <a:srgbClr val="1C1C1E"/>
                 </a:solidFill>
@@ -14975,6 +16865,443 @@
               </a:rPr>
               <a:t>• 전국 108곳이 분만취약지로 지정되어 있다 (A 32곳 · B 21곳 · C 55곳)</a:t>
             </a:r>
+            <a:r>
+              <a:rPr sz="1100" b="0" dirty="0" err="1">
+                <a:solidFill>
+                  <a:srgbClr val="1C1C1E"/>
+                </a:solidFill>
+                <a:latin typeface="맑은 고딕"/>
+                <a:ea typeface="맑은 고딕"/>
+              </a:rPr>
+              <a:t/>
+            </a:r>
+            <a:r>
+              <a:rPr sz="1100" b="0" dirty="0">
+                <a:solidFill>
+                  <a:srgbClr val="1C1C1E"/>
+                </a:solidFill>
+                <a:latin typeface="맑은 고딕"/>
+                <a:ea typeface="맑은 고딕"/>
+              </a:rPr>
+              <a:t/>
+            </a:r>
+            <a:r>
+              <a:rPr sz="1100" b="0" dirty="0" err="1">
+                <a:solidFill>
+                  <a:srgbClr val="1C1C1E"/>
+                </a:solidFill>
+                <a:latin typeface="맑은 고딕"/>
+                <a:ea typeface="맑은 고딕"/>
+              </a:rPr>
+              <a:t/>
+            </a:r>
+            <a:r>
+              <a:rPr sz="1100" b="0" dirty="0">
+                <a:solidFill>
+                  <a:srgbClr val="1C1C1E"/>
+                </a:solidFill>
+                <a:latin typeface="맑은 고딕"/>
+                <a:ea typeface="맑은 고딕"/>
+              </a:rPr>
+              <a:t/>
+            </a:r>
+            <a:r>
+              <a:rPr sz="1100" b="0" dirty="0" err="1">
+                <a:solidFill>
+                  <a:srgbClr val="1C1C1E"/>
+                </a:solidFill>
+                <a:latin typeface="맑은 고딕"/>
+                <a:ea typeface="맑은 고딕"/>
+              </a:rPr>
+              <a:t/>
+            </a:r>
+            <a:r>
+              <a:rPr sz="1100" b="0" dirty="0">
+                <a:solidFill>
+                  <a:srgbClr val="1C1C1E"/>
+                </a:solidFill>
+                <a:latin typeface="맑은 고딕"/>
+                <a:ea typeface="맑은 고딕"/>
+              </a:rPr>
+              <a:t/>
+            </a:r>
+            <a:r>
+              <a:rPr sz="1100" b="0" dirty="0" err="1">
+                <a:solidFill>
+                  <a:srgbClr val="1C1C1E"/>
+                </a:solidFill>
+                <a:latin typeface="맑은 고딕"/>
+                <a:ea typeface="맑은 고딕"/>
+              </a:rPr>
+              <a:t/>
+            </a:r>
+            <a:r>
+              <a:rPr sz="1100" b="0" dirty="0">
+                <a:solidFill>
+                  <a:srgbClr val="1C1C1E"/>
+                </a:solidFill>
+                <a:latin typeface="맑은 고딕"/>
+                <a:ea typeface="맑은 고딕"/>
+              </a:rPr>
+              <a:t/>
+            </a:r>
+            <a:r>
+              <a:rPr sz="1100" b="0" dirty="0" err="1">
+                <a:solidFill>
+                  <a:srgbClr val="1C1C1E"/>
+                </a:solidFill>
+                <a:latin typeface="맑은 고딕"/>
+                <a:ea typeface="맑은 고딕"/>
+              </a:rPr>
+              <a:t/>
+            </a:r>
+            <a:r>
+              <a:rPr sz="1100" b="0" dirty="0">
+                <a:solidFill>
+                  <a:srgbClr val="1C1C1E"/>
+                </a:solidFill>
+                <a:latin typeface="맑은 고딕"/>
+                <a:ea typeface="맑은 고딕"/>
+              </a:rPr>
+              <a:t/>
+            </a:r>
+            <a:r>
+              <a:rPr sz="1100" b="0" dirty="0" err="1">
+                <a:solidFill>
+                  <a:srgbClr val="1C1C1E"/>
+                </a:solidFill>
+                <a:latin typeface="맑은 고딕"/>
+                <a:ea typeface="맑은 고딕"/>
+              </a:rPr>
+              <a:t/>
+            </a:r>
+            <a:r>
+              <a:rPr sz="1100" b="0" dirty="0">
+                <a:solidFill>
+                  <a:srgbClr val="1C1C1E"/>
+                </a:solidFill>
+                <a:latin typeface="맑은 고딕"/>
+                <a:ea typeface="맑은 고딕"/>
+              </a:rPr>
+              <a:t/>
+            </a:r>
+            <a:r>
+              <a:rPr sz="1100" b="0" dirty="0" err="1">
+                <a:solidFill>
+                  <a:srgbClr val="1C1C1E"/>
+                </a:solidFill>
+                <a:latin typeface="맑은 고딕"/>
+                <a:ea typeface="맑은 고딕"/>
+              </a:rPr>
+              <a:t/>
+            </a:r>
+            <a:r>
+              <a:rPr sz="1100" b="0" dirty="0">
+                <a:solidFill>
+                  <a:srgbClr val="1C1C1E"/>
+                </a:solidFill>
+                <a:latin typeface="맑은 고딕"/>
+                <a:ea typeface="맑은 고딕"/>
+              </a:rPr>
+              <a:t/>
+            </a:r>
+            <a:r>
+              <a:rPr sz="1100" b="0" dirty="0" err="1">
+                <a:solidFill>
+                  <a:srgbClr val="1C1C1E"/>
+                </a:solidFill>
+                <a:latin typeface="맑은 고딕"/>
+                <a:ea typeface="맑은 고딕"/>
+              </a:rPr>
+              <a:t/>
+            </a:r>
+            <a:r>
+              <a:rPr sz="1100" b="0" dirty="0">
+                <a:solidFill>
+                  <a:srgbClr val="1C1C1E"/>
+                </a:solidFill>
+                <a:latin typeface="맑은 고딕"/>
+                <a:ea typeface="맑은 고딕"/>
+              </a:rPr>
+              <a:t/>
+            </a:r>
+            <a:r>
+              <a:rPr sz="1100" b="0" dirty="0" err="1">
+                <a:solidFill>
+                  <a:srgbClr val="1C1C1E"/>
+                </a:solidFill>
+                <a:latin typeface="맑은 고딕"/>
+                <a:ea typeface="맑은 고딕"/>
+              </a:rPr>
+              <a:t/>
+            </a:r>
+            <a:r>
+              <a:rPr sz="1100" b="0" dirty="0">
+                <a:solidFill>
+                  <a:srgbClr val="1C1C1E"/>
+                </a:solidFill>
+                <a:latin typeface="맑은 고딕"/>
+                <a:ea typeface="맑은 고딕"/>
+              </a:rPr>
+              <a:t/>
+            </a:r>
+            <a:r>
+              <a:rPr sz="1100" b="0" dirty="0" err="1">
+                <a:solidFill>
+                  <a:srgbClr val="1C1C1E"/>
+                </a:solidFill>
+                <a:latin typeface="맑은 고딕"/>
+                <a:ea typeface="맑은 고딕"/>
+              </a:rPr>
+              <a:t/>
+            </a:r>
+            <a:r>
+              <a:rPr sz="1100" b="0" dirty="0">
+                <a:solidFill>
+                  <a:srgbClr val="1C1C1E"/>
+                </a:solidFill>
+                <a:latin typeface="맑은 고딕"/>
+                <a:ea typeface="맑은 고딕"/>
+              </a:rPr>
+              <a:t/>
+            </a:r>
+            <a:r>
+              <a:rPr sz="1100" b="0" dirty="0" err="1">
+                <a:solidFill>
+                  <a:srgbClr val="1C1C1E"/>
+                </a:solidFill>
+                <a:latin typeface="맑은 고딕"/>
+                <a:ea typeface="맑은 고딕"/>
+              </a:rPr>
+              <a:t/>
+            </a:r>
+            <a:r>
+              <a:rPr sz="1100" b="0" dirty="0">
+                <a:solidFill>
+                  <a:srgbClr val="1C1C1E"/>
+                </a:solidFill>
+                <a:latin typeface="맑은 고딕"/>
+                <a:ea typeface="맑은 고딕"/>
+              </a:rPr>
+              <a:t/>
+            </a:r>
+            <a:r>
+              <a:rPr sz="1100" b="0" dirty="0" err="1">
+                <a:solidFill>
+                  <a:srgbClr val="1C1C1E"/>
+                </a:solidFill>
+                <a:latin typeface="맑은 고딕"/>
+                <a:ea typeface="맑은 고딕"/>
+              </a:rPr>
+              <a:t/>
+            </a:r>
+            <a:r>
+              <a:rPr sz="1100" b="0" dirty="0">
+                <a:solidFill>
+                  <a:srgbClr val="1C1C1E"/>
+                </a:solidFill>
+                <a:latin typeface="맑은 고딕"/>
+                <a:ea typeface="맑은 고딕"/>
+              </a:rPr>
+              <a:t/>
+            </a:r>
+            <a:r>
+              <a:rPr sz="1100" b="0" dirty="0" err="1">
+                <a:solidFill>
+                  <a:srgbClr val="1C1C1E"/>
+                </a:solidFill>
+                <a:latin typeface="맑은 고딕"/>
+                <a:ea typeface="맑은 고딕"/>
+              </a:rPr>
+              <a:t/>
+            </a:r>
+            <a:r>
+              <a:rPr sz="1100" b="0" dirty="0">
+                <a:solidFill>
+                  <a:srgbClr val="1C1C1E"/>
+                </a:solidFill>
+                <a:latin typeface="맑은 고딕"/>
+                <a:ea typeface="맑은 고딕"/>
+              </a:rPr>
+              <a:t/>
+            </a:r>
+            <a:r>
+              <a:rPr sz="1100" b="0" dirty="0" err="1">
+                <a:solidFill>
+                  <a:srgbClr val="1C1C1E"/>
+                </a:solidFill>
+                <a:latin typeface="맑은 고딕"/>
+                <a:ea typeface="맑은 고딕"/>
+              </a:rPr>
+              <a:t/>
+            </a:r>
+            <a:r>
+              <a:rPr sz="1100" b="0" dirty="0">
+                <a:solidFill>
+                  <a:srgbClr val="1C1C1E"/>
+                </a:solidFill>
+                <a:latin typeface="맑은 고딕"/>
+                <a:ea typeface="맑은 고딕"/>
+              </a:rPr>
+              <a:t/>
+            </a:r>
+            <a:r>
+              <a:rPr sz="1100" b="0" dirty="0" err="1">
+                <a:solidFill>
+                  <a:srgbClr val="1C1C1E"/>
+                </a:solidFill>
+                <a:latin typeface="맑은 고딕"/>
+                <a:ea typeface="맑은 고딕"/>
+              </a:rPr>
+              <a:t/>
+            </a:r>
+            <a:r>
+              <a:rPr sz="1100" b="0" dirty="0">
+                <a:solidFill>
+                  <a:srgbClr val="1C1C1E"/>
+                </a:solidFill>
+                <a:latin typeface="맑은 고딕"/>
+                <a:ea typeface="맑은 고딕"/>
+              </a:rPr>
+              <a:t/>
+            </a:r>
+            <a:r>
+              <a:rPr sz="1100" b="0" dirty="0" err="1">
+                <a:solidFill>
+                  <a:srgbClr val="1C1C1E"/>
+                </a:solidFill>
+                <a:latin typeface="맑은 고딕"/>
+                <a:ea typeface="맑은 고딕"/>
+              </a:rPr>
+              <a:t/>
+            </a:r>
+            <a:r>
+              <a:rPr sz="1100" b="0" dirty="0">
+                <a:solidFill>
+                  <a:srgbClr val="1C1C1E"/>
+                </a:solidFill>
+                <a:latin typeface="맑은 고딕"/>
+                <a:ea typeface="맑은 고딕"/>
+              </a:rPr>
+              <a:t/>
+            </a:r>
+            <a:r>
+              <a:rPr sz="1100" b="0" dirty="0" err="1">
+                <a:solidFill>
+                  <a:srgbClr val="1C1C1E"/>
+                </a:solidFill>
+                <a:latin typeface="맑은 고딕"/>
+                <a:ea typeface="맑은 고딕"/>
+              </a:rPr>
+              <a:t/>
+            </a:r>
+            <a:r>
+              <a:rPr sz="1100" b="0" dirty="0">
+                <a:solidFill>
+                  <a:srgbClr val="1C1C1E"/>
+                </a:solidFill>
+                <a:latin typeface="맑은 고딕"/>
+                <a:ea typeface="맑은 고딕"/>
+              </a:rPr>
+              <a:t/>
+            </a:r>
+            <a:r>
+              <a:rPr sz="1100" b="0" dirty="0" err="1">
+                <a:solidFill>
+                  <a:srgbClr val="1C1C1E"/>
+                </a:solidFill>
+                <a:latin typeface="맑은 고딕"/>
+                <a:ea typeface="맑은 고딕"/>
+              </a:rPr>
+              <a:t/>
+            </a:r>
+            <a:r>
+              <a:rPr sz="1100" b="0" dirty="0">
+                <a:solidFill>
+                  <a:srgbClr val="1C1C1E"/>
+                </a:solidFill>
+                <a:latin typeface="맑은 고딕"/>
+                <a:ea typeface="맑은 고딕"/>
+              </a:rPr>
+              <a:t/>
+            </a:r>
+            <a:r>
+              <a:rPr sz="1100" b="0" dirty="0" err="1">
+                <a:solidFill>
+                  <a:srgbClr val="1C1C1E"/>
+                </a:solidFill>
+                <a:latin typeface="맑은 고딕"/>
+                <a:ea typeface="맑은 고딕"/>
+              </a:rPr>
+              <a:t/>
+            </a:r>
+            <a:r>
+              <a:rPr sz="1100" b="0" dirty="0">
+                <a:solidFill>
+                  <a:srgbClr val="1C1C1E"/>
+                </a:solidFill>
+                <a:latin typeface="맑은 고딕"/>
+                <a:ea typeface="맑은 고딕"/>
+              </a:rPr>
+              <a:t/>
+            </a:r>
+            <a:r>
+              <a:rPr sz="1100" b="0" dirty="0" err="1">
+                <a:solidFill>
+                  <a:srgbClr val="1C1C1E"/>
+                </a:solidFill>
+                <a:latin typeface="맑은 고딕"/>
+                <a:ea typeface="맑은 고딕"/>
+              </a:rPr>
+              <a:t/>
+            </a:r>
+            <a:r>
+              <a:rPr sz="1100" b="0" dirty="0">
+                <a:solidFill>
+                  <a:srgbClr val="1C1C1E"/>
+                </a:solidFill>
+                <a:latin typeface="맑은 고딕"/>
+                <a:ea typeface="맑은 고딕"/>
+              </a:rPr>
+              <a:t/>
+            </a:r>
+            <a:r>
+              <a:rPr sz="1100" b="0" dirty="0" err="1">
+                <a:solidFill>
+                  <a:srgbClr val="1C1C1E"/>
+                </a:solidFill>
+                <a:latin typeface="맑은 고딕"/>
+                <a:ea typeface="맑은 고딕"/>
+              </a:rPr>
+              <a:t/>
+            </a:r>
+            <a:r>
+              <a:rPr sz="1100" b="0" dirty="0">
+                <a:solidFill>
+                  <a:srgbClr val="1C1C1E"/>
+                </a:solidFill>
+                <a:latin typeface="맑은 고딕"/>
+                <a:ea typeface="맑은 고딕"/>
+              </a:rPr>
+              <a:t/>
+            </a:r>
+            <a:r>
+              <a:rPr sz="1100" b="0" dirty="0" err="1">
+                <a:solidFill>
+                  <a:srgbClr val="1C1C1E"/>
+                </a:solidFill>
+                <a:latin typeface="맑은 고딕"/>
+                <a:ea typeface="맑은 고딕"/>
+              </a:rPr>
+              <a:t/>
+            </a:r>
+            <a:endParaRPr sz="1100" b="0" dirty="0">
+              <a:solidFill>
+                <a:srgbClr val="1C1C1E"/>
+              </a:solidFill>
+              <a:latin typeface="맑은 고딕"/>
+              <a:ea typeface="맑은 고딕"/>
+            </a:endParaRPr>
           </a:p>
           <a:p>
             <a:pPr marL="160020" indent="-160020">
@@ -14986,7 +17313,7 @@
               </a:spcAft>
             </a:pPr>
             <a:r>
-              <a:rPr sz="1100" b="0">
+              <a:rPr sz="1100" b="0" dirty="0">
                 <a:solidFill>
                   <a:srgbClr val="1C1C1E"/>
                 </a:solidFill>
@@ -14995,6 +17322,243 @@
               </a:rPr>
               <a:t>• 15년 누적 지원은 57개소 (분만 36 · 외래 15 · 순회 6). 2025년 신규는 전국 1개소</a:t>
             </a:r>
+            <a:r>
+              <a:rPr sz="1100" b="0" dirty="0" err="1">
+                <a:solidFill>
+                  <a:srgbClr val="1C1C1E"/>
+                </a:solidFill>
+                <a:latin typeface="맑은 고딕"/>
+                <a:ea typeface="맑은 고딕"/>
+              </a:rPr>
+              <a:t/>
+            </a:r>
+            <a:r>
+              <a:rPr sz="1100" b="0" dirty="0">
+                <a:solidFill>
+                  <a:srgbClr val="1C1C1E"/>
+                </a:solidFill>
+                <a:latin typeface="맑은 고딕"/>
+                <a:ea typeface="맑은 고딕"/>
+              </a:rPr>
+              <a:t/>
+            </a:r>
+            <a:r>
+              <a:rPr sz="1100" b="0" dirty="0" err="1">
+                <a:solidFill>
+                  <a:srgbClr val="1C1C1E"/>
+                </a:solidFill>
+                <a:latin typeface="맑은 고딕"/>
+                <a:ea typeface="맑은 고딕"/>
+              </a:rPr>
+              <a:t/>
+            </a:r>
+            <a:r>
+              <a:rPr sz="1100" b="0" dirty="0">
+                <a:solidFill>
+                  <a:srgbClr val="1C1C1E"/>
+                </a:solidFill>
+                <a:latin typeface="맑은 고딕"/>
+                <a:ea typeface="맑은 고딕"/>
+              </a:rPr>
+              <a:t/>
+            </a:r>
+            <a:r>
+              <a:rPr sz="1100" b="0" dirty="0" err="1">
+                <a:solidFill>
+                  <a:srgbClr val="1C1C1E"/>
+                </a:solidFill>
+                <a:latin typeface="맑은 고딕"/>
+                <a:ea typeface="맑은 고딕"/>
+              </a:rPr>
+              <a:t/>
+            </a:r>
+            <a:r>
+              <a:rPr sz="1100" b="0" dirty="0">
+                <a:solidFill>
+                  <a:srgbClr val="1C1C1E"/>
+                </a:solidFill>
+                <a:latin typeface="맑은 고딕"/>
+                <a:ea typeface="맑은 고딕"/>
+              </a:rPr>
+              <a:t/>
+            </a:r>
+            <a:r>
+              <a:rPr sz="1100" b="0" dirty="0" err="1">
+                <a:solidFill>
+                  <a:srgbClr val="1C1C1E"/>
+                </a:solidFill>
+                <a:latin typeface="맑은 고딕"/>
+                <a:ea typeface="맑은 고딕"/>
+              </a:rPr>
+              <a:t/>
+            </a:r>
+            <a:r>
+              <a:rPr sz="1100" b="0" dirty="0">
+                <a:solidFill>
+                  <a:srgbClr val="1C1C1E"/>
+                </a:solidFill>
+                <a:latin typeface="맑은 고딕"/>
+                <a:ea typeface="맑은 고딕"/>
+              </a:rPr>
+              <a:t/>
+            </a:r>
+            <a:r>
+              <a:rPr sz="1100" b="0" dirty="0" err="1">
+                <a:solidFill>
+                  <a:srgbClr val="1C1C1E"/>
+                </a:solidFill>
+                <a:latin typeface="맑은 고딕"/>
+                <a:ea typeface="맑은 고딕"/>
+              </a:rPr>
+              <a:t/>
+            </a:r>
+            <a:r>
+              <a:rPr sz="1100" b="0" dirty="0">
+                <a:solidFill>
+                  <a:srgbClr val="1C1C1E"/>
+                </a:solidFill>
+                <a:latin typeface="맑은 고딕"/>
+                <a:ea typeface="맑은 고딕"/>
+              </a:rPr>
+              <a:t/>
+            </a:r>
+            <a:r>
+              <a:rPr sz="1100" b="0" dirty="0" err="1">
+                <a:solidFill>
+                  <a:srgbClr val="1C1C1E"/>
+                </a:solidFill>
+                <a:latin typeface="맑은 고딕"/>
+                <a:ea typeface="맑은 고딕"/>
+              </a:rPr>
+              <a:t/>
+            </a:r>
+            <a:r>
+              <a:rPr sz="1100" b="0" dirty="0">
+                <a:solidFill>
+                  <a:srgbClr val="1C1C1E"/>
+                </a:solidFill>
+                <a:latin typeface="맑은 고딕"/>
+                <a:ea typeface="맑은 고딕"/>
+              </a:rPr>
+              <a:t/>
+            </a:r>
+            <a:r>
+              <a:rPr sz="1100" b="0" dirty="0" err="1">
+                <a:solidFill>
+                  <a:srgbClr val="1C1C1E"/>
+                </a:solidFill>
+                <a:latin typeface="맑은 고딕"/>
+                <a:ea typeface="맑은 고딕"/>
+              </a:rPr>
+              <a:t/>
+            </a:r>
+            <a:r>
+              <a:rPr sz="1100" b="0" dirty="0">
+                <a:solidFill>
+                  <a:srgbClr val="1C1C1E"/>
+                </a:solidFill>
+                <a:latin typeface="맑은 고딕"/>
+                <a:ea typeface="맑은 고딕"/>
+              </a:rPr>
+              <a:t/>
+            </a:r>
+            <a:r>
+              <a:rPr sz="1100" b="0" dirty="0" err="1">
+                <a:solidFill>
+                  <a:srgbClr val="1C1C1E"/>
+                </a:solidFill>
+                <a:latin typeface="맑은 고딕"/>
+                <a:ea typeface="맑은 고딕"/>
+              </a:rPr>
+              <a:t/>
+            </a:r>
+            <a:r>
+              <a:rPr sz="1100" b="0" dirty="0">
+                <a:solidFill>
+                  <a:srgbClr val="1C1C1E"/>
+                </a:solidFill>
+                <a:latin typeface="맑은 고딕"/>
+                <a:ea typeface="맑은 고딕"/>
+              </a:rPr>
+              <a:t/>
+            </a:r>
+            <a:r>
+              <a:rPr sz="1100" b="0" dirty="0" err="1">
+                <a:solidFill>
+                  <a:srgbClr val="1C1C1E"/>
+                </a:solidFill>
+                <a:latin typeface="맑은 고딕"/>
+                <a:ea typeface="맑은 고딕"/>
+              </a:rPr>
+              <a:t/>
+            </a:r>
+            <a:r>
+              <a:rPr sz="1100" b="0" dirty="0">
+                <a:solidFill>
+                  <a:srgbClr val="1C1C1E"/>
+                </a:solidFill>
+                <a:latin typeface="맑은 고딕"/>
+                <a:ea typeface="맑은 고딕"/>
+              </a:rPr>
+              <a:t/>
+            </a:r>
+            <a:r>
+              <a:rPr sz="1100" b="0" dirty="0" err="1">
+                <a:solidFill>
+                  <a:srgbClr val="1C1C1E"/>
+                </a:solidFill>
+                <a:latin typeface="맑은 고딕"/>
+                <a:ea typeface="맑은 고딕"/>
+              </a:rPr>
+              <a:t/>
+            </a:r>
+            <a:r>
+              <a:rPr sz="1100" b="0" dirty="0">
+                <a:solidFill>
+                  <a:srgbClr val="1C1C1E"/>
+                </a:solidFill>
+                <a:latin typeface="맑은 고딕"/>
+                <a:ea typeface="맑은 고딕"/>
+              </a:rPr>
+              <a:t/>
+            </a:r>
+            <a:r>
+              <a:rPr sz="1100" b="0" dirty="0" err="1">
+                <a:solidFill>
+                  <a:srgbClr val="1C1C1E"/>
+                </a:solidFill>
+                <a:latin typeface="맑은 고딕"/>
+                <a:ea typeface="맑은 고딕"/>
+              </a:rPr>
+              <a:t/>
+            </a:r>
+            <a:r>
+              <a:rPr sz="1100" b="0" dirty="0">
+                <a:solidFill>
+                  <a:srgbClr val="1C1C1E"/>
+                </a:solidFill>
+                <a:latin typeface="맑은 고딕"/>
+                <a:ea typeface="맑은 고딕"/>
+              </a:rPr>
+              <a:t/>
+            </a:r>
+            <a:r>
+              <a:rPr sz="1100" b="0" dirty="0" err="1">
+                <a:solidFill>
+                  <a:srgbClr val="1C1C1E"/>
+                </a:solidFill>
+                <a:latin typeface="맑은 고딕"/>
+                <a:ea typeface="맑은 고딕"/>
+              </a:rPr>
+              <a:t/>
+            </a:r>
+            <a:endParaRPr sz="1100" b="0" dirty="0">
+              <a:solidFill>
+                <a:srgbClr val="1C1C1E"/>
+              </a:solidFill>
+              <a:latin typeface="맑은 고딕"/>
+              <a:ea typeface="맑은 고딕"/>
+            </a:endParaRPr>
           </a:p>
           <a:p>
             <a:pPr marL="160020" indent="-160020">
@@ -15006,7 +17570,7 @@
               </a:spcAft>
             </a:pPr>
             <a:r>
-              <a:rPr sz="1100" b="0">
+              <a:rPr sz="1100" b="0" dirty="0">
                 <a:solidFill>
                   <a:srgbClr val="1C1C1E"/>
                 </a:solidFill>
@@ -15014,6 +17578,276 @@
                 <a:ea typeface="맑은 고딕"/>
               </a:rPr>
               <a:t>• 나눠 줄 것이 적을수록 순서는 오히려 더 중요해진다 — 한 해에 한 곳뿐이면 순서가 곧 결과다. 그런데 그 순서를 정하는 규칙이 제도에 없다</a:t>
+            </a:r>
+            <a:r>
+              <a:rPr sz="1100" b="0" dirty="0" err="1">
+                <a:solidFill>
+                  <a:srgbClr val="1C1C1E"/>
+                </a:solidFill>
+                <a:latin typeface="맑은 고딕"/>
+                <a:ea typeface="맑은 고딕"/>
+              </a:rPr>
+              <a:t/>
+            </a:r>
+            <a:r>
+              <a:rPr sz="1100" b="0" dirty="0">
+                <a:solidFill>
+                  <a:srgbClr val="1C1C1E"/>
+                </a:solidFill>
+                <a:latin typeface="맑은 고딕"/>
+                <a:ea typeface="맑은 고딕"/>
+              </a:rPr>
+              <a:t/>
+            </a:r>
+            <a:r>
+              <a:rPr sz="1100" b="0" dirty="0" err="1">
+                <a:solidFill>
+                  <a:srgbClr val="1C1C1E"/>
+                </a:solidFill>
+                <a:latin typeface="맑은 고딕"/>
+                <a:ea typeface="맑은 고딕"/>
+              </a:rPr>
+              <a:t/>
+            </a:r>
+            <a:r>
+              <a:rPr lang="en-US" sz="1100" b="0" dirty="0">
+                <a:solidFill>
+                  <a:srgbClr val="1C1C1E"/>
+                </a:solidFill>
+                <a:latin typeface="맑은 고딕"/>
+                <a:ea typeface="맑은 고딕"/>
+              </a:rPr>
+              <a:t/>
+            </a:r>
+            <a:r>
+              <a:rPr lang="ko-KR" altLang="en-US" sz="1100" b="0" dirty="0">
+                <a:solidFill>
+                  <a:srgbClr val="1C1C1E"/>
+                </a:solidFill>
+                <a:latin typeface="맑은 고딕"/>
+                <a:ea typeface="맑은 고딕"/>
+              </a:rPr>
+              <a:t/>
+            </a:r>
+            <a:r>
+              <a:rPr sz="1100" b="0" dirty="0">
+                <a:solidFill>
+                  <a:srgbClr val="1C1C1E"/>
+                </a:solidFill>
+                <a:latin typeface="맑은 고딕"/>
+                <a:ea typeface="맑은 고딕"/>
+              </a:rPr>
+              <a:t/>
+            </a:r>
+            <a:r>
+              <a:rPr lang="ko-KR" altLang="en-US" sz="1100" b="0" dirty="0">
+                <a:solidFill>
+                  <a:srgbClr val="1C1C1E"/>
+                </a:solidFill>
+                <a:latin typeface="맑은 고딕"/>
+                <a:ea typeface="맑은 고딕"/>
+              </a:rPr>
+              <a:t/>
+            </a:r>
+            <a:r>
+              <a:rPr sz="1100" b="0" dirty="0">
+                <a:solidFill>
+                  <a:srgbClr val="1C1C1E"/>
+                </a:solidFill>
+                <a:latin typeface="맑은 고딕"/>
+                <a:ea typeface="맑은 고딕"/>
+              </a:rPr>
+              <a:t/>
+            </a:r>
+            <a:r>
+              <a:rPr sz="1100" b="0" dirty="0" err="1">
+                <a:solidFill>
+                  <a:srgbClr val="1C1C1E"/>
+                </a:solidFill>
+                <a:latin typeface="맑은 고딕"/>
+                <a:ea typeface="맑은 고딕"/>
+              </a:rPr>
+              <a:t/>
+            </a:r>
+            <a:r>
+              <a:rPr sz="1100" b="0" dirty="0">
+                <a:solidFill>
+                  <a:srgbClr val="1C1C1E"/>
+                </a:solidFill>
+                <a:latin typeface="맑은 고딕"/>
+                <a:ea typeface="맑은 고딕"/>
+              </a:rPr>
+              <a:t/>
+            </a:r>
+            <a:r>
+              <a:rPr sz="1100" b="0" dirty="0" err="1">
+                <a:solidFill>
+                  <a:srgbClr val="1C1C1E"/>
+                </a:solidFill>
+                <a:latin typeface="맑은 고딕"/>
+                <a:ea typeface="맑은 고딕"/>
+              </a:rPr>
+              <a:t/>
+            </a:r>
+            <a:r>
+              <a:rPr sz="1100" b="0" dirty="0">
+                <a:solidFill>
+                  <a:srgbClr val="1C1C1E"/>
+                </a:solidFill>
+                <a:latin typeface="맑은 고딕"/>
+                <a:ea typeface="맑은 고딕"/>
+              </a:rPr>
+              <a:t/>
+            </a:r>
+            <a:r>
+              <a:rPr lang="ko-KR" altLang="en-US" sz="1100" dirty="0">
+                <a:solidFill>
+                  <a:srgbClr val="1C1C1E"/>
+                </a:solidFill>
+                <a:latin typeface="맑은 고딕"/>
+                <a:ea typeface="맑은 고딕"/>
+              </a:rPr>
+              <a:t/>
+            </a:r>
+            <a:r>
+              <a:rPr lang="ko-KR" altLang="en-US" sz="1100" b="0" dirty="0">
+                <a:solidFill>
+                  <a:srgbClr val="1C1C1E"/>
+                </a:solidFill>
+                <a:latin typeface="맑은 고딕"/>
+                <a:ea typeface="맑은 고딕"/>
+              </a:rPr>
+              <a:t/>
+            </a:r>
+            <a:r>
+              <a:rPr sz="1100" b="0" dirty="0">
+                <a:solidFill>
+                  <a:srgbClr val="1C1C1E"/>
+                </a:solidFill>
+                <a:latin typeface="맑은 고딕"/>
+                <a:ea typeface="맑은 고딕"/>
+              </a:rPr>
+              <a:t/>
+            </a:r>
+            <a:r>
+              <a:rPr sz="1100" b="0" dirty="0" err="1">
+                <a:solidFill>
+                  <a:srgbClr val="1C1C1E"/>
+                </a:solidFill>
+                <a:latin typeface="맑은 고딕"/>
+                <a:ea typeface="맑은 고딕"/>
+              </a:rPr>
+              <a:t/>
+            </a:r>
+            <a:r>
+              <a:rPr sz="1100" b="0" dirty="0">
+                <a:solidFill>
+                  <a:srgbClr val="1C1C1E"/>
+                </a:solidFill>
+                <a:latin typeface="맑은 고딕"/>
+                <a:ea typeface="맑은 고딕"/>
+              </a:rPr>
+              <a:t/>
+            </a:r>
+            <a:r>
+              <a:rPr sz="1100" b="0" dirty="0" err="1">
+                <a:solidFill>
+                  <a:srgbClr val="1C1C1E"/>
+                </a:solidFill>
+                <a:latin typeface="맑은 고딕"/>
+                <a:ea typeface="맑은 고딕"/>
+              </a:rPr>
+              <a:t/>
+            </a:r>
+            <a:r>
+              <a:rPr sz="1100" b="0" dirty="0">
+                <a:solidFill>
+                  <a:srgbClr val="1C1C1E"/>
+                </a:solidFill>
+                <a:latin typeface="맑은 고딕"/>
+                <a:ea typeface="맑은 고딕"/>
+              </a:rPr>
+              <a:t/>
+            </a:r>
+            <a:r>
+              <a:rPr sz="1100" b="0" dirty="0" err="1">
+                <a:solidFill>
+                  <a:srgbClr val="1C1C1E"/>
+                </a:solidFill>
+                <a:latin typeface="맑은 고딕"/>
+                <a:ea typeface="맑은 고딕"/>
+              </a:rPr>
+              <a:t/>
+            </a:r>
+            <a:r>
+              <a:rPr sz="1100" b="0" dirty="0">
+                <a:solidFill>
+                  <a:srgbClr val="1C1C1E"/>
+                </a:solidFill>
+                <a:latin typeface="맑은 고딕"/>
+                <a:ea typeface="맑은 고딕"/>
+              </a:rPr>
+              <a:t/>
+            </a:r>
+            <a:r>
+              <a:rPr sz="1100" b="0" dirty="0" err="1">
+                <a:solidFill>
+                  <a:srgbClr val="1C1C1E"/>
+                </a:solidFill>
+                <a:latin typeface="맑은 고딕"/>
+                <a:ea typeface="맑은 고딕"/>
+              </a:rPr>
+              <a:t/>
+            </a:r>
+            <a:r>
+              <a:rPr sz="1100" b="0" dirty="0">
+                <a:solidFill>
+                  <a:srgbClr val="1C1C1E"/>
+                </a:solidFill>
+                <a:latin typeface="맑은 고딕"/>
+                <a:ea typeface="맑은 고딕"/>
+              </a:rPr>
+              <a:t/>
+            </a:r>
+            <a:r>
+              <a:rPr sz="1100" b="0" dirty="0" err="1">
+                <a:solidFill>
+                  <a:srgbClr val="1C1C1E"/>
+                </a:solidFill>
+                <a:latin typeface="맑은 고딕"/>
+                <a:ea typeface="맑은 고딕"/>
+              </a:rPr>
+              <a:t/>
+            </a:r>
+            <a:r>
+              <a:rPr sz="1100" b="0" dirty="0">
+                <a:solidFill>
+                  <a:srgbClr val="1C1C1E"/>
+                </a:solidFill>
+                <a:latin typeface="맑은 고딕"/>
+                <a:ea typeface="맑은 고딕"/>
+              </a:rPr>
+              <a:t/>
+            </a:r>
+            <a:r>
+              <a:rPr sz="1100" b="0" dirty="0" err="1">
+                <a:solidFill>
+                  <a:srgbClr val="1C1C1E"/>
+                </a:solidFill>
+                <a:latin typeface="맑은 고딕"/>
+                <a:ea typeface="맑은 고딕"/>
+              </a:rPr>
+              <a:t/>
+            </a:r>
+            <a:r>
+              <a:rPr sz="1100" b="0" dirty="0">
+                <a:solidFill>
+                  <a:srgbClr val="1C1C1E"/>
+                </a:solidFill>
+                <a:latin typeface="맑은 고딕"/>
+                <a:ea typeface="맑은 고딕"/>
+              </a:rPr>
+              <a:t/>
             </a:r>
           </a:p>
         </p:txBody>
@@ -15027,7 +17861,7 @@
         <p:spPr>
           <a:xfrm>
             <a:off x="502920" y="5230368"/>
-            <a:ext cx="11247120" cy="1005840"/>
+            <a:ext cx="11247120" cy="331629"/>
           </a:xfrm>
           <a:prstGeom prst="rect">
             <a:avLst/>
@@ -15049,7 +17883,7 @@
               </a:spcAft>
             </a:pPr>
             <a:r>
-              <a:rPr sz="1500" b="1">
+              <a:rPr sz="1500" b="1" dirty="0">
                 <a:solidFill>
                   <a:srgbClr val="1C1C1E"/>
                 </a:solidFill>
@@ -15058,26 +17892,263 @@
               </a:rPr>
               <a:t>자원 부족은 여전히 문제다. 다만 그와 별개로, 있는 자원이 체계적으로 배분되지 않는 문제가 함께 있다.</a:t>
             </a:r>
-          </a:p>
-          <a:p>
-            <a:pPr>
-              <a:lnSpc>
-                <a:spcPct val="114000"/>
-              </a:lnSpc>
-              <a:spcAft>
-                <a:spcPts val="0"/>
-              </a:spcAft>
-            </a:pPr>
-            <a:r>
-              <a:rPr sz="1500" b="1">
+            <a:r>
+              <a:rPr lang="ko-KR" altLang="en-US" sz="1500" b="1" dirty="0">
+                <a:solidFill>
+                  <a:srgbClr val="1C1C1E"/>
+                </a:solidFill>
+                <a:latin typeface="맑은 고딕"/>
+                <a:ea typeface="맑은 고딕"/>
+              </a:rPr>
+              <a:t/>
+            </a:r>
+            <a:r>
+              <a:rPr sz="1500" b="1" dirty="0" err="1">
+                <a:solidFill>
+                  <a:srgbClr val="1C1C1E"/>
+                </a:solidFill>
+                <a:latin typeface="맑은 고딕"/>
+                <a:ea typeface="맑은 고딕"/>
+              </a:rPr>
+              <a:t/>
+            </a:r>
+            <a:r>
+              <a:rPr sz="1500" b="1" dirty="0">
+                <a:solidFill>
+                  <a:srgbClr val="1C1C1E"/>
+                </a:solidFill>
+                <a:latin typeface="맑은 고딕"/>
+                <a:ea typeface="맑은 고딕"/>
+              </a:rPr>
+              <a:t/>
+            </a:r>
+            <a:r>
+              <a:rPr sz="1500" b="1" dirty="0" err="1">
+                <a:solidFill>
+                  <a:srgbClr val="1C1C1E"/>
+                </a:solidFill>
+                <a:latin typeface="맑은 고딕"/>
+                <a:ea typeface="맑은 고딕"/>
+              </a:rPr>
+              <a:t/>
+            </a:r>
+            <a:r>
+              <a:rPr sz="1500" b="1" dirty="0">
+                <a:solidFill>
+                  <a:srgbClr val="1C1C1E"/>
+                </a:solidFill>
+                <a:latin typeface="맑은 고딕"/>
+                <a:ea typeface="맑은 고딕"/>
+              </a:rPr>
+              <a:t/>
+            </a:r>
+            <a:r>
+              <a:rPr lang="ko-KR" altLang="en-US" sz="1500" b="1" dirty="0">
+                <a:solidFill>
+                  <a:srgbClr val="1C1C1E"/>
+                </a:solidFill>
+                <a:latin typeface="맑은 고딕"/>
+                <a:ea typeface="맑은 고딕"/>
+              </a:rPr>
+              <a:t/>
+            </a:r>
+            <a:r>
+              <a:rPr lang="en-US" altLang="ko-KR" sz="1500" b="1" dirty="0">
+                <a:solidFill>
+                  <a:srgbClr val="1C1C1E"/>
+                </a:solidFill>
+                <a:latin typeface="맑은 고딕"/>
+                <a:ea typeface="맑은 고딕"/>
+              </a:rPr>
+              <a:t/>
+            </a:r>
+            <a:r>
+              <a:rPr sz="1500" b="1" dirty="0">
                 <a:solidFill>
                   <a:srgbClr val="000000"/>
                 </a:solidFill>
                 <a:latin typeface="맑은 고딕"/>
                 <a:ea typeface="맑은 고딕"/>
               </a:rPr>
-              <a:t>"현재 주어진 자원이 체계적으로, 필요한 곳으로 배분되고 있는가" — 이것이 이 프로젝트의 질문이다.</a:t>
-            </a:r>
+              <a:t/>
+            </a:r>
+            <a:r>
+              <a:rPr lang="ko-KR" altLang="en-US" sz="1500" b="1" dirty="0">
+                <a:solidFill>
+                  <a:srgbClr val="000000"/>
+                </a:solidFill>
+                <a:latin typeface="맑은 고딕"/>
+                <a:ea typeface="맑은 고딕"/>
+              </a:rPr>
+              <a:t/>
+            </a:r>
+            <a:r>
+              <a:rPr sz="1500" b="1" dirty="0" err="1">
+                <a:solidFill>
+                  <a:srgbClr val="000000"/>
+                </a:solidFill>
+                <a:latin typeface="맑은 고딕"/>
+                <a:ea typeface="맑은 고딕"/>
+              </a:rPr>
+              <a:t/>
+            </a:r>
+            <a:r>
+              <a:rPr sz="1500" b="1" dirty="0">
+                <a:solidFill>
+                  <a:srgbClr val="000000"/>
+                </a:solidFill>
+                <a:latin typeface="맑은 고딕"/>
+                <a:ea typeface="맑은 고딕"/>
+              </a:rPr>
+              <a:t/>
+            </a:r>
+            <a:r>
+              <a:rPr sz="1500" b="1" dirty="0" err="1">
+                <a:solidFill>
+                  <a:srgbClr val="000000"/>
+                </a:solidFill>
+                <a:latin typeface="맑은 고딕"/>
+                <a:ea typeface="맑은 고딕"/>
+              </a:rPr>
+              <a:t/>
+            </a:r>
+            <a:r>
+              <a:rPr sz="1500" b="1" dirty="0">
+                <a:solidFill>
+                  <a:srgbClr val="000000"/>
+                </a:solidFill>
+                <a:latin typeface="맑은 고딕"/>
+                <a:ea typeface="맑은 고딕"/>
+              </a:rPr>
+              <a:t/>
+            </a:r>
+            <a:r>
+              <a:rPr sz="1500" b="1" dirty="0" err="1">
+                <a:solidFill>
+                  <a:srgbClr val="000000"/>
+                </a:solidFill>
+                <a:latin typeface="맑은 고딕"/>
+                <a:ea typeface="맑은 고딕"/>
+              </a:rPr>
+              <a:t/>
+            </a:r>
+            <a:r>
+              <a:rPr sz="1500" b="1" dirty="0">
+                <a:solidFill>
+                  <a:srgbClr val="000000"/>
+                </a:solidFill>
+                <a:latin typeface="맑은 고딕"/>
+                <a:ea typeface="맑은 고딕"/>
+              </a:rPr>
+              <a:t/>
+            </a:r>
+            <a:r>
+              <a:rPr sz="1500" b="1" dirty="0" err="1">
+                <a:solidFill>
+                  <a:srgbClr val="000000"/>
+                </a:solidFill>
+                <a:latin typeface="맑은 고딕"/>
+                <a:ea typeface="맑은 고딕"/>
+              </a:rPr>
+              <a:t/>
+            </a:r>
+            <a:r>
+              <a:rPr sz="1500" b="1" dirty="0">
+                <a:solidFill>
+                  <a:srgbClr val="000000"/>
+                </a:solidFill>
+                <a:latin typeface="맑은 고딕"/>
+                <a:ea typeface="맑은 고딕"/>
+              </a:rPr>
+              <a:t/>
+            </a:r>
+            <a:r>
+              <a:rPr sz="1500" b="1" dirty="0" err="1">
+                <a:solidFill>
+                  <a:srgbClr val="000000"/>
+                </a:solidFill>
+                <a:latin typeface="맑은 고딕"/>
+                <a:ea typeface="맑은 고딕"/>
+              </a:rPr>
+              <a:t/>
+            </a:r>
+            <a:r>
+              <a:rPr sz="1500" b="1" dirty="0">
+                <a:solidFill>
+                  <a:srgbClr val="000000"/>
+                </a:solidFill>
+                <a:latin typeface="맑은 고딕"/>
+                <a:ea typeface="맑은 고딕"/>
+              </a:rPr>
+              <a:t/>
+            </a:r>
+            <a:r>
+              <a:rPr sz="1500" b="1" dirty="0" err="1">
+                <a:solidFill>
+                  <a:srgbClr val="000000"/>
+                </a:solidFill>
+                <a:latin typeface="맑은 고딕"/>
+                <a:ea typeface="맑은 고딕"/>
+              </a:rPr>
+              <a:t/>
+            </a:r>
+            <a:r>
+              <a:rPr sz="1500" b="1" dirty="0">
+                <a:solidFill>
+                  <a:srgbClr val="000000"/>
+                </a:solidFill>
+                <a:latin typeface="맑은 고딕"/>
+                <a:ea typeface="맑은 고딕"/>
+              </a:rPr>
+              <a:t/>
+            </a:r>
+            <a:r>
+              <a:rPr sz="1500" b="1" dirty="0" err="1">
+                <a:solidFill>
+                  <a:srgbClr val="000000"/>
+                </a:solidFill>
+                <a:latin typeface="맑은 고딕"/>
+                <a:ea typeface="맑은 고딕"/>
+              </a:rPr>
+              <a:t/>
+            </a:r>
+            <a:r>
+              <a:rPr sz="1500" b="1" dirty="0">
+                <a:solidFill>
+                  <a:srgbClr val="000000"/>
+                </a:solidFill>
+                <a:latin typeface="맑은 고딕"/>
+                <a:ea typeface="맑은 고딕"/>
+              </a:rPr>
+              <a:t/>
+            </a:r>
+            <a:r>
+              <a:rPr sz="1500" b="1" dirty="0" err="1">
+                <a:solidFill>
+                  <a:srgbClr val="000000"/>
+                </a:solidFill>
+                <a:latin typeface="맑은 고딕"/>
+                <a:ea typeface="맑은 고딕"/>
+              </a:rPr>
+              <a:t/>
+            </a:r>
+            <a:r>
+              <a:rPr sz="1500" b="1" dirty="0">
+                <a:solidFill>
+                  <a:srgbClr val="000000"/>
+                </a:solidFill>
+                <a:latin typeface="맑은 고딕"/>
+                <a:ea typeface="맑은 고딕"/>
+              </a:rPr>
+              <a:t/>
+            </a:r>
+            <a:endParaRPr lang="en-US" sz="1500" b="1" dirty="0">
+              <a:solidFill>
+                <a:srgbClr val="000000"/>
+              </a:solidFill>
+              <a:latin typeface="맑은 고딕"/>
+              <a:ea typeface="맑은 고딕"/>
+            </a:endParaRPr>
           </a:p>
         </p:txBody>
       </p:sp>
@@ -15090,7 +18161,7 @@
 </file>
 
 <file path=ppt/slides/slide4.xml><?xml version="1.0" encoding="utf-8"?>
-<p:sld xmlns:a="http://schemas.openxmlformats.org/drawingml/2006/main" xmlns:p="http://schemas.openxmlformats.org/presentationml/2006/main" xmlns:r="http://schemas.openxmlformats.org/officeDocument/2006/relationships">
+<p:sld xmlns:a="http://schemas.openxmlformats.org/drawingml/2006/main" xmlns:r="http://schemas.openxmlformats.org/officeDocument/2006/relationships" xmlns:p="http://schemas.openxmlformats.org/presentationml/2006/main">
   <p:cSld>
     <p:spTree>
       <p:nvGrpSpPr>
@@ -15098,7 +18169,14 @@
         <p:cNvGrpSpPr/>
         <p:nvPr/>
       </p:nvGrpSpPr>
-      <p:grpSpPr/>
+      <p:grpSpPr>
+        <a:xfrm>
+          <a:off x="0" y="0"/>
+          <a:ext cx="0" cy="0"/>
+          <a:chOff x="0" y="0"/>
+          <a:chExt cx="0" cy="0"/>
+        </a:xfrm>
+      </p:grpSpPr>
       <p:sp>
         <p:nvSpPr>
           <p:cNvPr id="2" name="Rectangle 1"/>
@@ -15140,6 +18218,7 @@
           <a:lstStyle/>
           <a:p>
             <a:pPr algn="ctr"/>
+            <a:endParaRPr/>
           </a:p>
         </p:txBody>
       </p:sp>
@@ -15151,8 +18230,8 @@
         </p:nvSpPr>
         <p:spPr>
           <a:xfrm>
-            <a:off x="502920" y="475488"/>
-            <a:ext cx="310896" cy="310896"/>
+            <a:off x="554736" y="527304"/>
+            <a:ext cx="207264" cy="207264"/>
           </a:xfrm>
           <a:prstGeom prst="roundRect">
             <a:avLst>
@@ -15168,7 +18247,7 @@
                 <a:srgbClr val="73787E"/>
               </a:gs>
             </a:gsLst>
-            <a:lin scaled="0" ang="18900000"/>
+            <a:lin ang="18900000" scaled="0"/>
           </a:gradFill>
           <a:ln>
             <a:noFill/>
@@ -15200,6 +18279,7 @@
           <a:lstStyle/>
           <a:p>
             <a:pPr algn="ctr"/>
+            <a:endParaRPr/>
           </a:p>
         </p:txBody>
       </p:sp>
@@ -15211,8 +18291,8 @@
         </p:nvSpPr>
         <p:spPr>
           <a:xfrm>
-            <a:off x="960120" y="274320"/>
-            <a:ext cx="9692640" cy="685800"/>
+            <a:off x="960120" y="399564"/>
+            <a:ext cx="9692640" cy="435312"/>
           </a:xfrm>
           <a:prstGeom prst="rect">
             <a:avLst/>
@@ -15234,15 +18314,62 @@
               </a:spcAft>
             </a:pPr>
             <a:r>
-              <a:rPr sz="2150" b="1">
-                <a:solidFill>
-                  <a:srgbClr val="1C1C1E"/>
-                </a:solidFill>
-                <a:latin typeface="맑은 고딕"/>
-                <a:ea typeface="맑은 고딕"/>
-              </a:rPr>
-              <a:t>프로젝트 요약 — 네 가지 발견</a:t>
-            </a:r>
+              <a:rPr lang="ko-KR" altLang="en-US" sz="2150" b="1" dirty="0">
+                <a:solidFill>
+                  <a:srgbClr val="1C1C1E"/>
+                </a:solidFill>
+                <a:latin typeface="맑은 고딕"/>
+                <a:ea typeface="맑은 고딕"/>
+              </a:rPr>
+              <a:t>데이터 분석을 통한 </a:t>
+            </a:r>
+            <a:r>
+              <a:rPr sz="2150" b="1" dirty="0">
+                <a:solidFill>
+                  <a:srgbClr val="1C1C1E"/>
+                </a:solidFill>
+                <a:latin typeface="맑은 고딕"/>
+                <a:ea typeface="맑은 고딕"/>
+              </a:rPr>
+              <a:t>네 </a:t>
+            </a:r>
+            <a:r>
+              <a:rPr sz="2150" b="1" dirty="0" err="1">
+                <a:solidFill>
+                  <a:srgbClr val="1C1C1E"/>
+                </a:solidFill>
+                <a:latin typeface="맑은 고딕"/>
+                <a:ea typeface="맑은 고딕"/>
+              </a:rPr>
+              <a:t>가지</a:t>
+            </a:r>
+            <a:r>
+              <a:rPr sz="2150" b="1" dirty="0">
+                <a:solidFill>
+                  <a:srgbClr val="1C1C1E"/>
+                </a:solidFill>
+                <a:latin typeface="맑은 고딕"/>
+                <a:ea typeface="맑은 고딕"/>
+              </a:rPr>
+              <a:t> </a:t>
+            </a:r>
+            <a:r>
+              <a:rPr sz="2150" b="1" dirty="0" err="1">
+                <a:solidFill>
+                  <a:srgbClr val="1C1C1E"/>
+                </a:solidFill>
+                <a:latin typeface="맑은 고딕"/>
+                <a:ea typeface="맑은 고딕"/>
+              </a:rPr>
+              <a:t>발견</a:t>
+            </a:r>
+            <a:endParaRPr sz="2150" b="1" dirty="0">
+              <a:solidFill>
+                <a:srgbClr val="1C1C1E"/>
+              </a:solidFill>
+              <a:latin typeface="맑은 고딕"/>
+              <a:ea typeface="맑은 고딕"/>
+            </a:endParaRPr>
           </a:p>
         </p:txBody>
       </p:sp>
@@ -15269,7 +18396,7 @@
                 <a:srgbClr val="FFFFFF"/>
               </a:gs>
             </a:gsLst>
-            <a:lin scaled="0" ang="0"/>
+            <a:lin ang="0" scaled="0"/>
           </a:gradFill>
           <a:ln>
             <a:noFill/>
@@ -15295,6 +18422,7 @@
           <a:lstStyle/>
           <a:p>
             <a:pPr algn="ctr"/>
+            <a:endParaRPr/>
           </a:p>
         </p:txBody>
       </p:sp>
@@ -15435,6 +18563,7 @@
           <a:lstStyle/>
           <a:p>
             <a:pPr algn="ctr"/>
+            <a:endParaRPr/>
           </a:p>
         </p:txBody>
       </p:sp>
@@ -15447,7 +18576,7 @@
         <p:spPr>
           <a:xfrm>
             <a:off x="685800" y="1362456"/>
-            <a:ext cx="5166359" cy="1664208"/>
+            <a:ext cx="5166359" cy="958660"/>
           </a:xfrm>
           <a:prstGeom prst="rect">
             <a:avLst/>
@@ -15469,15 +18598,82 @@
               </a:spcAft>
             </a:pPr>
             <a:r>
-              <a:rPr sz="1300" b="1">
+              <a:rPr sz="1300" b="1" dirty="0" err="1">
                 <a:solidFill>
                   <a:srgbClr val="33393F"/>
                 </a:solidFill>
                 <a:latin typeface="맑은 고딕"/>
                 <a:ea typeface="맑은 고딕"/>
               </a:rPr>
-              <a:t>발견 1 · 지정은 이동시간만 본다</a:t>
-            </a:r>
+              <a:t>발견</a:t>
+            </a:r>
+            <a:r>
+              <a:rPr sz="1300" b="1" dirty="0">
+                <a:solidFill>
+                  <a:srgbClr val="33393F"/>
+                </a:solidFill>
+                <a:latin typeface="맑은 고딕"/>
+                <a:ea typeface="맑은 고딕"/>
+              </a:rPr>
+              <a:t> 1 · </a:t>
+            </a:r>
+            <a:r>
+              <a:rPr sz="1300" b="1" dirty="0" err="1">
+                <a:solidFill>
+                  <a:srgbClr val="33393F"/>
+                </a:solidFill>
+                <a:latin typeface="맑은 고딕"/>
+                <a:ea typeface="맑은 고딕"/>
+              </a:rPr>
+              <a:t>지정은</a:t>
+            </a:r>
+            <a:r>
+              <a:rPr sz="1300" b="1" dirty="0">
+                <a:solidFill>
+                  <a:srgbClr val="33393F"/>
+                </a:solidFill>
+                <a:latin typeface="맑은 고딕"/>
+                <a:ea typeface="맑은 고딕"/>
+              </a:rPr>
+              <a:t> </a:t>
+            </a:r>
+            <a:r>
+              <a:rPr sz="1300" b="1" dirty="0" err="1">
+                <a:solidFill>
+                  <a:srgbClr val="33393F"/>
+                </a:solidFill>
+                <a:latin typeface="맑은 고딕"/>
+                <a:ea typeface="맑은 고딕"/>
+              </a:rPr>
+              <a:t>이동시간만</a:t>
+            </a:r>
+            <a:r>
+              <a:rPr sz="1300" b="1" dirty="0">
+                <a:solidFill>
+                  <a:srgbClr val="33393F"/>
+                </a:solidFill>
+                <a:latin typeface="맑은 고딕"/>
+                <a:ea typeface="맑은 고딕"/>
+              </a:rPr>
+              <a:t> </a:t>
+            </a:r>
+            <a:r>
+              <a:rPr sz="1300" b="1" dirty="0" err="1">
+                <a:solidFill>
+                  <a:srgbClr val="33393F"/>
+                </a:solidFill>
+                <a:latin typeface="맑은 고딕"/>
+                <a:ea typeface="맑은 고딕"/>
+              </a:rPr>
+              <a:t>본다</a:t>
+            </a:r>
+            <a:endParaRPr sz="1300" b="1" dirty="0">
+              <a:solidFill>
+                <a:srgbClr val="33393F"/>
+              </a:solidFill>
+              <a:latin typeface="맑은 고딕"/>
+              <a:ea typeface="맑은 고딕"/>
+            </a:endParaRPr>
           </a:p>
           <a:p>
             <a:pPr marL="160020" indent="-160020">
@@ -15489,15 +18685,332 @@
               </a:spcAft>
             </a:pPr>
             <a:r>
-              <a:rPr sz="1150" b="0">
-                <a:solidFill>
-                  <a:srgbClr val="1C1C1E"/>
-                </a:solidFill>
-                <a:latin typeface="맑은 고딕"/>
-                <a:ea typeface="맑은 고딕"/>
-              </a:rPr>
-              <a:t>• 공표 판정식(접근성·TRI)이 실제 지정 159건 중 158건(99.4%)을 재현. 공급 변수를 추가해도 판별력(AUC)은 전혀 늘지 않는다</a:t>
-            </a:r>
+              <a:rPr sz="1150" b="0" dirty="0">
+                <a:solidFill>
+                  <a:srgbClr val="1C1C1E"/>
+                </a:solidFill>
+                <a:latin typeface="맑은 고딕"/>
+                <a:ea typeface="맑은 고딕"/>
+              </a:rPr>
+              <a:t>• </a:t>
+            </a:r>
+            <a:r>
+              <a:rPr lang="ko-KR" altLang="en-US" sz="1150" dirty="0">
+                <a:solidFill>
+                  <a:srgbClr val="1C1C1E"/>
+                </a:solidFill>
+                <a:latin typeface="맑은 고딕"/>
+                <a:ea typeface="맑은 고딕"/>
+              </a:rPr>
+              <a:t>의료</a:t>
+            </a:r>
+            <a:r>
+              <a:rPr lang="ko-KR" altLang="en-US" sz="1150" b="0" dirty="0">
+                <a:solidFill>
+                  <a:srgbClr val="1C1C1E"/>
+                </a:solidFill>
+                <a:latin typeface="맑은 고딕"/>
+                <a:ea typeface="맑은 고딕"/>
+              </a:rPr>
+              <a:t> </a:t>
+            </a:r>
+            <a:r>
+              <a:rPr lang="ko-KR" altLang="en-US" sz="1150" dirty="0">
+                <a:solidFill>
+                  <a:srgbClr val="1C1C1E"/>
+                </a:solidFill>
+                <a:latin typeface="맑은 고딕"/>
+                <a:ea typeface="맑은 고딕"/>
+              </a:rPr>
+              <a:t>접근성과 </a:t>
+            </a:r>
+            <a:r>
+              <a:rPr lang="en-US" altLang="ko-KR" sz="1150" dirty="0">
+                <a:solidFill>
+                  <a:srgbClr val="1C1C1E"/>
+                </a:solidFill>
+                <a:latin typeface="맑은 고딕"/>
+                <a:ea typeface="맑은 고딕"/>
+              </a:rPr>
+              <a:t>TRI(</a:t>
+            </a:r>
+            <a:r>
+              <a:rPr lang="ko-KR" altLang="en-US" sz="1150" dirty="0">
+                <a:solidFill>
+                  <a:srgbClr val="1C1C1E"/>
+                </a:solidFill>
+                <a:latin typeface="맑은 고딕"/>
+                <a:ea typeface="맑은 고딕"/>
+              </a:rPr>
+              <a:t>기준시간내 </a:t>
+            </a:r>
+            <a:r>
+              <a:rPr lang="ko-KR" altLang="en-US" sz="1150" dirty="0" err="1">
+                <a:solidFill>
+                  <a:srgbClr val="1C1C1E"/>
+                </a:solidFill>
+                <a:latin typeface="맑은 고딕"/>
+                <a:ea typeface="맑은 고딕"/>
+              </a:rPr>
+              <a:t>의료이용률</a:t>
+            </a:r>
+            <a:r>
+              <a:rPr lang="en-US" altLang="ko-KR" sz="1150" dirty="0">
+                <a:solidFill>
+                  <a:srgbClr val="1C1C1E"/>
+                </a:solidFill>
+                <a:latin typeface="맑은 고딕"/>
+                <a:ea typeface="맑은 고딕"/>
+              </a:rPr>
+              <a:t>) </a:t>
+            </a:r>
+            <a:r>
+              <a:rPr lang="ko-KR" altLang="en-US" sz="1150" dirty="0">
+                <a:solidFill>
+                  <a:srgbClr val="1C1C1E"/>
+                </a:solidFill>
+                <a:latin typeface="맑은 고딕"/>
+                <a:ea typeface="맑은 고딕"/>
+              </a:rPr>
+              <a:t>만 반영하는 </a:t>
+            </a:r>
+            <a:r>
+              <a:rPr sz="1150" b="0" dirty="0" err="1">
+                <a:solidFill>
+                  <a:srgbClr val="1C1C1E"/>
+                </a:solidFill>
+                <a:latin typeface="맑은 고딕"/>
+                <a:ea typeface="맑은 고딕"/>
+              </a:rPr>
+              <a:t>공표</a:t>
+            </a:r>
+            <a:r>
+              <a:rPr sz="1150" b="0" dirty="0">
+                <a:solidFill>
+                  <a:srgbClr val="1C1C1E"/>
+                </a:solidFill>
+                <a:latin typeface="맑은 고딕"/>
+                <a:ea typeface="맑은 고딕"/>
+              </a:rPr>
+              <a:t> </a:t>
+            </a:r>
+            <a:r>
+              <a:rPr sz="1150" b="0" dirty="0" err="1">
+                <a:solidFill>
+                  <a:srgbClr val="1C1C1E"/>
+                </a:solidFill>
+                <a:latin typeface="맑은 고딕"/>
+                <a:ea typeface="맑은 고딕"/>
+              </a:rPr>
+              <a:t>판정식이</a:t>
+            </a:r>
+            <a:r>
+              <a:rPr sz="1150" b="0" dirty="0">
+                <a:solidFill>
+                  <a:srgbClr val="1C1C1E"/>
+                </a:solidFill>
+                <a:latin typeface="맑은 고딕"/>
+                <a:ea typeface="맑은 고딕"/>
+              </a:rPr>
+              <a:t> </a:t>
+            </a:r>
+            <a:r>
+              <a:rPr sz="1150" b="0" dirty="0" err="1">
+                <a:solidFill>
+                  <a:srgbClr val="1C1C1E"/>
+                </a:solidFill>
+                <a:latin typeface="맑은 고딕"/>
+                <a:ea typeface="맑은 고딕"/>
+              </a:rPr>
+              <a:t>실제</a:t>
+            </a:r>
+            <a:r>
+              <a:rPr sz="1150" b="0" dirty="0">
+                <a:solidFill>
+                  <a:srgbClr val="1C1C1E"/>
+                </a:solidFill>
+                <a:latin typeface="맑은 고딕"/>
+                <a:ea typeface="맑은 고딕"/>
+              </a:rPr>
+              <a:t> </a:t>
+            </a:r>
+            <a:r>
+              <a:rPr sz="1150" b="0" dirty="0" err="1">
+                <a:solidFill>
+                  <a:srgbClr val="1C1C1E"/>
+                </a:solidFill>
+                <a:latin typeface="맑은 고딕"/>
+                <a:ea typeface="맑은 고딕"/>
+              </a:rPr>
+              <a:t>지정</a:t>
+            </a:r>
+            <a:r>
+              <a:rPr sz="1150" b="0" dirty="0">
+                <a:solidFill>
+                  <a:srgbClr val="1C1C1E"/>
+                </a:solidFill>
+                <a:latin typeface="맑은 고딕"/>
+                <a:ea typeface="맑은 고딕"/>
+              </a:rPr>
+              <a:t> 159건 중 158건(99.4%)을 </a:t>
+            </a:r>
+            <a:r>
+              <a:rPr sz="1150" b="0" dirty="0" err="1">
+                <a:solidFill>
+                  <a:srgbClr val="1C1C1E"/>
+                </a:solidFill>
+                <a:latin typeface="맑은 고딕"/>
+                <a:ea typeface="맑은 고딕"/>
+              </a:rPr>
+              <a:t>재현</a:t>
+            </a:r>
+            <a:r>
+              <a:rPr sz="1150" b="0" dirty="0">
+                <a:solidFill>
+                  <a:srgbClr val="1C1C1E"/>
+                </a:solidFill>
+                <a:latin typeface="맑은 고딕"/>
+                <a:ea typeface="맑은 고딕"/>
+              </a:rPr>
+              <a:t>. </a:t>
+            </a:r>
+            <a:r>
+              <a:rPr sz="1150" b="0" dirty="0" err="1">
+                <a:solidFill>
+                  <a:srgbClr val="1C1C1E"/>
+                </a:solidFill>
+                <a:latin typeface="맑은 고딕"/>
+                <a:ea typeface="맑은 고딕"/>
+              </a:rPr>
+              <a:t>공급</a:t>
+            </a:r>
+            <a:r>
+              <a:rPr sz="1150" b="0" dirty="0">
+                <a:solidFill>
+                  <a:srgbClr val="1C1C1E"/>
+                </a:solidFill>
+                <a:latin typeface="맑은 고딕"/>
+                <a:ea typeface="맑은 고딕"/>
+              </a:rPr>
+              <a:t> </a:t>
+            </a:r>
+            <a:r>
+              <a:rPr sz="1150" b="0" dirty="0" err="1">
+                <a:solidFill>
+                  <a:srgbClr val="1C1C1E"/>
+                </a:solidFill>
+                <a:latin typeface="맑은 고딕"/>
+                <a:ea typeface="맑은 고딕"/>
+              </a:rPr>
+              <a:t>변수를</a:t>
+            </a:r>
+            <a:r>
+              <a:rPr sz="1150" b="0" dirty="0">
+                <a:solidFill>
+                  <a:srgbClr val="1C1C1E"/>
+                </a:solidFill>
+                <a:latin typeface="맑은 고딕"/>
+                <a:ea typeface="맑은 고딕"/>
+              </a:rPr>
+              <a:t> </a:t>
+            </a:r>
+            <a:r>
+              <a:rPr sz="1150" b="0" dirty="0" err="1">
+                <a:solidFill>
+                  <a:srgbClr val="1C1C1E"/>
+                </a:solidFill>
+                <a:latin typeface="맑은 고딕"/>
+                <a:ea typeface="맑은 고딕"/>
+              </a:rPr>
+              <a:t>추가해도</a:t>
+            </a:r>
+            <a:r>
+              <a:rPr sz="1150" b="0" dirty="0">
+                <a:solidFill>
+                  <a:srgbClr val="1C1C1E"/>
+                </a:solidFill>
+                <a:latin typeface="맑은 고딕"/>
+                <a:ea typeface="맑은 고딕"/>
+              </a:rPr>
+              <a:t> </a:t>
+            </a:r>
+            <a:r>
+              <a:rPr sz="1150" b="0" dirty="0" err="1">
+                <a:solidFill>
+                  <a:srgbClr val="1C1C1E"/>
+                </a:solidFill>
+                <a:latin typeface="맑은 고딕"/>
+                <a:ea typeface="맑은 고딕"/>
+              </a:rPr>
+              <a:t>판별력</a:t>
+            </a:r>
+            <a:r>
+              <a:rPr sz="1150" b="0" dirty="0">
+                <a:solidFill>
+                  <a:srgbClr val="1C1C1E"/>
+                </a:solidFill>
+                <a:latin typeface="맑은 고딕"/>
+                <a:ea typeface="맑은 고딕"/>
+              </a:rPr>
+              <a:t>(AUC)은 </a:t>
+            </a:r>
+            <a:r>
+              <a:rPr sz="1150" b="0" dirty="0" err="1">
+                <a:solidFill>
+                  <a:srgbClr val="1C1C1E"/>
+                </a:solidFill>
+                <a:latin typeface="맑은 고딕"/>
+                <a:ea typeface="맑은 고딕"/>
+              </a:rPr>
+              <a:t>전혀</a:t>
+            </a:r>
+            <a:r>
+              <a:rPr sz="1150" b="0" dirty="0">
+                <a:solidFill>
+                  <a:srgbClr val="1C1C1E"/>
+                </a:solidFill>
+                <a:latin typeface="맑은 고딕"/>
+                <a:ea typeface="맑은 고딕"/>
+              </a:rPr>
+              <a:t> </a:t>
+            </a:r>
+            <a:r>
+              <a:rPr sz="1150" b="0" dirty="0" err="1">
+                <a:solidFill>
+                  <a:srgbClr val="1C1C1E"/>
+                </a:solidFill>
+                <a:latin typeface="맑은 고딕"/>
+                <a:ea typeface="맑은 고딕"/>
+              </a:rPr>
+              <a:t>늘지</a:t>
+            </a:r>
+            <a:r>
+              <a:rPr sz="1150" b="0" dirty="0">
+                <a:solidFill>
+                  <a:srgbClr val="1C1C1E"/>
+                </a:solidFill>
+                <a:latin typeface="맑은 고딕"/>
+                <a:ea typeface="맑은 고딕"/>
+              </a:rPr>
+              <a:t> </a:t>
+            </a:r>
+            <a:r>
+              <a:rPr sz="1150" b="0" dirty="0" err="1">
+                <a:solidFill>
+                  <a:srgbClr val="1C1C1E"/>
+                </a:solidFill>
+                <a:latin typeface="맑은 고딕"/>
+                <a:ea typeface="맑은 고딕"/>
+              </a:rPr>
+              <a:t>않는다</a:t>
+            </a:r>
+            <a:endParaRPr sz="1150" b="0" dirty="0">
+              <a:solidFill>
+                <a:srgbClr val="1C1C1E"/>
+              </a:solidFill>
+              <a:latin typeface="맑은 고딕"/>
+              <a:ea typeface="맑은 고딕"/>
+            </a:endParaRPr>
           </a:p>
         </p:txBody>
       </p:sp>
@@ -15552,6 +19065,7 @@
           <a:lstStyle/>
           <a:p>
             <a:pPr algn="ctr"/>
+            <a:endParaRPr/>
           </a:p>
         </p:txBody>
       </p:sp>
@@ -15564,7 +19078,7 @@
         <p:spPr>
           <a:xfrm>
             <a:off x="6446520" y="1362456"/>
-            <a:ext cx="5166359" cy="1664208"/>
+            <a:ext cx="5166359" cy="958660"/>
           </a:xfrm>
           <a:prstGeom prst="rect">
             <a:avLst/>
@@ -15586,15 +19100,112 @@
               </a:spcAft>
             </a:pPr>
             <a:r>
-              <a:rPr sz="1300" b="1">
+              <a:rPr sz="1300" b="1" dirty="0" err="1">
                 <a:solidFill>
                   <a:srgbClr val="000000"/>
                 </a:solidFill>
                 <a:latin typeface="맑은 고딕"/>
                 <a:ea typeface="맑은 고딕"/>
               </a:rPr>
-              <a:t>발견 2 · 공급 공백형 사각지대 실재</a:t>
-            </a:r>
+              <a:t>발견</a:t>
+            </a:r>
+            <a:r>
+              <a:rPr sz="1300" b="1" dirty="0">
+                <a:solidFill>
+                  <a:srgbClr val="000000"/>
+                </a:solidFill>
+                <a:latin typeface="맑은 고딕"/>
+                <a:ea typeface="맑은 고딕"/>
+              </a:rPr>
+              <a:t> 2 · </a:t>
+            </a:r>
+            <a:r>
+              <a:rPr sz="1300" b="1" dirty="0" err="1">
+                <a:solidFill>
+                  <a:srgbClr val="000000"/>
+                </a:solidFill>
+                <a:latin typeface="맑은 고딕"/>
+                <a:ea typeface="맑은 고딕"/>
+              </a:rPr>
+              <a:t>공급</a:t>
+            </a:r>
+            <a:r>
+              <a:rPr sz="1300" b="1" dirty="0">
+                <a:solidFill>
+                  <a:srgbClr val="000000"/>
+                </a:solidFill>
+                <a:latin typeface="맑은 고딕"/>
+                <a:ea typeface="맑은 고딕"/>
+              </a:rPr>
+              <a:t> </a:t>
+            </a:r>
+            <a:r>
+              <a:rPr sz="1300" b="1" dirty="0" err="1">
+                <a:solidFill>
+                  <a:srgbClr val="000000"/>
+                </a:solidFill>
+                <a:latin typeface="맑은 고딕"/>
+                <a:ea typeface="맑은 고딕"/>
+              </a:rPr>
+              <a:t>공백</a:t>
+            </a:r>
+            <a:r>
+              <a:rPr lang="ko-KR" altLang="en-US" sz="1300" b="1" dirty="0">
+                <a:solidFill>
+                  <a:srgbClr val="000000"/>
+                </a:solidFill>
+                <a:latin typeface="맑은 고딕"/>
+                <a:ea typeface="맑은 고딕"/>
+              </a:rPr>
+              <a:t>이 있는</a:t>
+            </a:r>
+            <a:r>
+              <a:rPr sz="1300" b="1" dirty="0">
+                <a:solidFill>
+                  <a:srgbClr val="000000"/>
+                </a:solidFill>
+                <a:latin typeface="맑은 고딕"/>
+                <a:ea typeface="맑은 고딕"/>
+              </a:rPr>
+              <a:t> </a:t>
+            </a:r>
+            <a:r>
+              <a:rPr sz="1300" b="1" dirty="0" err="1">
+                <a:solidFill>
+                  <a:srgbClr val="000000"/>
+                </a:solidFill>
+                <a:latin typeface="맑은 고딕"/>
+                <a:ea typeface="맑은 고딕"/>
+              </a:rPr>
+              <a:t>사각지대</a:t>
+            </a:r>
+            <a:r>
+              <a:rPr lang="en-US" sz="1300" b="1" dirty="0">
+                <a:solidFill>
+                  <a:srgbClr val="000000"/>
+                </a:solidFill>
+                <a:latin typeface="맑은 고딕"/>
+                <a:ea typeface="맑은 고딕"/>
+              </a:rPr>
+              <a:t> </a:t>
+            </a:r>
+            <a:r>
+              <a:rPr lang="ko-KR" altLang="en-US" sz="1300" b="1" dirty="0">
+                <a:solidFill>
+                  <a:srgbClr val="000000"/>
+                </a:solidFill>
+                <a:latin typeface="맑은 고딕"/>
+                <a:ea typeface="맑은 고딕"/>
+              </a:rPr>
+              <a:t>실재</a:t>
+            </a:r>
+            <a:endParaRPr sz="1300" b="1" dirty="0">
+              <a:solidFill>
+                <a:srgbClr val="000000"/>
+              </a:solidFill>
+              <a:latin typeface="맑은 고딕"/>
+              <a:ea typeface="맑은 고딕"/>
+            </a:endParaRPr>
           </a:p>
           <a:p>
             <a:pPr marL="160020" indent="-160020">
@@ -15606,15 +19217,412 @@
               </a:spcAft>
             </a:pPr>
             <a:r>
-              <a:rPr sz="1150" b="0">
-                <a:solidFill>
-                  <a:srgbClr val="1C1C1E"/>
-                </a:solidFill>
-                <a:latin typeface="맑은 고딕"/>
-                <a:ea typeface="맑은 고딕"/>
-              </a:rPr>
-              <a:t>• 거리 기준은 통과하지만 관내 공급이 소멸한 지역 — 분만 완전 사각 5곳(등급 체계 밖), 소아과 5개 지역 입원 5,689건 전량(100%) 관외 유출</a:t>
-            </a:r>
+              <a:rPr sz="1150" b="0" dirty="0">
+                <a:solidFill>
+                  <a:srgbClr val="1C1C1E"/>
+                </a:solidFill>
+                <a:latin typeface="맑은 고딕"/>
+                <a:ea typeface="맑은 고딕"/>
+              </a:rPr>
+              <a:t>• </a:t>
+            </a:r>
+            <a:r>
+              <a:rPr sz="1150" b="0" dirty="0" err="1">
+                <a:solidFill>
+                  <a:srgbClr val="1C1C1E"/>
+                </a:solidFill>
+                <a:latin typeface="맑은 고딕"/>
+                <a:ea typeface="맑은 고딕"/>
+              </a:rPr>
+              <a:t>거리</a:t>
+            </a:r>
+            <a:r>
+              <a:rPr sz="1150" b="0" dirty="0">
+                <a:solidFill>
+                  <a:srgbClr val="1C1C1E"/>
+                </a:solidFill>
+                <a:latin typeface="맑은 고딕"/>
+                <a:ea typeface="맑은 고딕"/>
+              </a:rPr>
+              <a:t> </a:t>
+            </a:r>
+            <a:r>
+              <a:rPr sz="1150" b="0" dirty="0" err="1">
+                <a:solidFill>
+                  <a:srgbClr val="1C1C1E"/>
+                </a:solidFill>
+                <a:latin typeface="맑은 고딕"/>
+                <a:ea typeface="맑은 고딕"/>
+              </a:rPr>
+              <a:t>기준은</a:t>
+            </a:r>
+            <a:r>
+              <a:rPr sz="1150" b="0" dirty="0">
+                <a:solidFill>
+                  <a:srgbClr val="1C1C1E"/>
+                </a:solidFill>
+                <a:latin typeface="맑은 고딕"/>
+                <a:ea typeface="맑은 고딕"/>
+              </a:rPr>
+              <a:t> </a:t>
+            </a:r>
+            <a:r>
+              <a:rPr sz="1150" b="0" dirty="0" err="1">
+                <a:solidFill>
+                  <a:srgbClr val="1C1C1E"/>
+                </a:solidFill>
+                <a:latin typeface="맑은 고딕"/>
+                <a:ea typeface="맑은 고딕"/>
+              </a:rPr>
+              <a:t>통과하지만</a:t>
+            </a:r>
+            <a:r>
+              <a:rPr sz="1150" b="0" dirty="0">
+                <a:solidFill>
+                  <a:srgbClr val="1C1C1E"/>
+                </a:solidFill>
+                <a:latin typeface="맑은 고딕"/>
+                <a:ea typeface="맑은 고딕"/>
+              </a:rPr>
+              <a:t> </a:t>
+            </a:r>
+            <a:r>
+              <a:rPr sz="1150" b="0" dirty="0" err="1">
+                <a:solidFill>
+                  <a:srgbClr val="1C1C1E"/>
+                </a:solidFill>
+                <a:latin typeface="맑은 고딕"/>
+                <a:ea typeface="맑은 고딕"/>
+              </a:rPr>
+              <a:t>관내</a:t>
+            </a:r>
+            <a:r>
+              <a:rPr sz="1150" b="0" dirty="0">
+                <a:solidFill>
+                  <a:srgbClr val="1C1C1E"/>
+                </a:solidFill>
+                <a:latin typeface="맑은 고딕"/>
+                <a:ea typeface="맑은 고딕"/>
+              </a:rPr>
+              <a:t> </a:t>
+            </a:r>
+            <a:r>
+              <a:rPr sz="1150" b="0" dirty="0" err="1">
+                <a:solidFill>
+                  <a:srgbClr val="1C1C1E"/>
+                </a:solidFill>
+                <a:latin typeface="맑은 고딕"/>
+                <a:ea typeface="맑은 고딕"/>
+              </a:rPr>
+              <a:t>공급이</a:t>
+            </a:r>
+            <a:r>
+              <a:rPr sz="1150" b="0" dirty="0">
+                <a:solidFill>
+                  <a:srgbClr val="1C1C1E"/>
+                </a:solidFill>
+                <a:latin typeface="맑은 고딕"/>
+                <a:ea typeface="맑은 고딕"/>
+              </a:rPr>
+              <a:t> </a:t>
+            </a:r>
+            <a:r>
+              <a:rPr sz="1150" b="0" dirty="0" err="1">
+                <a:solidFill>
+                  <a:srgbClr val="1C1C1E"/>
+                </a:solidFill>
+                <a:latin typeface="맑은 고딕"/>
+                <a:ea typeface="맑은 고딕"/>
+              </a:rPr>
+              <a:t>소멸한</a:t>
+            </a:r>
+            <a:r>
+              <a:rPr sz="1150" b="0" dirty="0">
+                <a:solidFill>
+                  <a:srgbClr val="1C1C1E"/>
+                </a:solidFill>
+                <a:latin typeface="맑은 고딕"/>
+                <a:ea typeface="맑은 고딕"/>
+              </a:rPr>
+              <a:t> </a:t>
+            </a:r>
+            <a:r>
+              <a:rPr sz="1150" b="0" dirty="0" err="1">
+                <a:solidFill>
+                  <a:srgbClr val="1C1C1E"/>
+                </a:solidFill>
+                <a:latin typeface="맑은 고딕"/>
+                <a:ea typeface="맑은 고딕"/>
+              </a:rPr>
+              <a:t>지역</a:t>
+            </a:r>
+            <a:r>
+              <a:rPr lang="en-US" sz="1150" b="0" dirty="0">
+                <a:solidFill>
+                  <a:srgbClr val="1C1C1E"/>
+                </a:solidFill>
+                <a:latin typeface="맑은 고딕"/>
+                <a:ea typeface="맑은 고딕"/>
+              </a:rPr>
+              <a:t>(</a:t>
+            </a:r>
+            <a:r>
+              <a:rPr lang="ko-KR" altLang="en-US" sz="1150" b="0" dirty="0">
+                <a:solidFill>
+                  <a:srgbClr val="1C1C1E"/>
+                </a:solidFill>
+                <a:latin typeface="맑은 고딕"/>
+                <a:ea typeface="맑은 고딕"/>
+              </a:rPr>
+              <a:t>가까운 의료시설은 존재하나</a:t>
+            </a:r>
+            <a:r>
+              <a:rPr lang="en-US" altLang="ko-KR" sz="1150" b="0" dirty="0">
+                <a:solidFill>
+                  <a:srgbClr val="1C1C1E"/>
+                </a:solidFill>
+                <a:latin typeface="맑은 고딕"/>
+                <a:ea typeface="맑은 고딕"/>
+              </a:rPr>
+              <a:t>, </a:t>
+            </a:r>
+            <a:r>
+              <a:rPr lang="ko-KR" altLang="en-US" sz="1150" b="0" dirty="0">
+                <a:solidFill>
+                  <a:srgbClr val="1C1C1E"/>
+                </a:solidFill>
+                <a:latin typeface="맑은 고딕"/>
+                <a:ea typeface="맑은 고딕"/>
+              </a:rPr>
+              <a:t>정작 해당 지역 사람들은 </a:t>
+            </a:r>
+            <a:r>
+              <a:rPr lang="ko-KR" altLang="en-US" sz="1150" b="0" dirty="0" err="1">
+                <a:solidFill>
+                  <a:srgbClr val="1C1C1E"/>
+                </a:solidFill>
+                <a:latin typeface="맑은 고딕"/>
+                <a:ea typeface="맑은 고딕"/>
+              </a:rPr>
+              <a:t>타지역</a:t>
+            </a:r>
+            <a:r>
+              <a:rPr lang="ko-KR" altLang="en-US" sz="1150" b="0" dirty="0">
+                <a:solidFill>
+                  <a:srgbClr val="1C1C1E"/>
+                </a:solidFill>
+                <a:latin typeface="맑은 고딕"/>
+                <a:ea typeface="맑은 고딕"/>
+              </a:rPr>
+              <a:t> 의료시설을 이용</a:t>
+            </a:r>
+            <a:r>
+              <a:rPr lang="en-US" altLang="ko-KR" sz="1150" b="0" dirty="0">
+                <a:solidFill>
+                  <a:srgbClr val="1C1C1E"/>
+                </a:solidFill>
+                <a:latin typeface="맑은 고딕"/>
+                <a:ea typeface="맑은 고딕"/>
+              </a:rPr>
+              <a:t>)</a:t>
+            </a:r>
+            <a:r>
+              <a:rPr sz="1150" b="0" dirty="0">
+                <a:solidFill>
+                  <a:srgbClr val="1C1C1E"/>
+                </a:solidFill>
+                <a:latin typeface="맑은 고딕"/>
+                <a:ea typeface="맑은 고딕"/>
+              </a:rPr>
+              <a:t> — </a:t>
+            </a:r>
+            <a:r>
+              <a:rPr sz="1150" b="0" dirty="0" err="1">
+                <a:solidFill>
+                  <a:srgbClr val="1C1C1E"/>
+                </a:solidFill>
+                <a:latin typeface="맑은 고딕"/>
+                <a:ea typeface="맑은 고딕"/>
+              </a:rPr>
+              <a:t>분만</a:t>
+            </a:r>
+            <a:r>
+              <a:rPr sz="1150" b="0" dirty="0">
+                <a:solidFill>
+                  <a:srgbClr val="1C1C1E"/>
+                </a:solidFill>
+                <a:latin typeface="맑은 고딕"/>
+                <a:ea typeface="맑은 고딕"/>
+              </a:rPr>
+              <a:t> </a:t>
+            </a:r>
+            <a:r>
+              <a:rPr sz="1150" b="0" dirty="0" err="1">
+                <a:solidFill>
+                  <a:srgbClr val="1C1C1E"/>
+                </a:solidFill>
+                <a:latin typeface="맑은 고딕"/>
+                <a:ea typeface="맑은 고딕"/>
+              </a:rPr>
+              <a:t>완전</a:t>
+            </a:r>
+            <a:r>
+              <a:rPr sz="1150" b="0" dirty="0">
+                <a:solidFill>
+                  <a:srgbClr val="1C1C1E"/>
+                </a:solidFill>
+                <a:latin typeface="맑은 고딕"/>
+                <a:ea typeface="맑은 고딕"/>
+              </a:rPr>
+              <a:t> </a:t>
+            </a:r>
+            <a:r>
+              <a:rPr sz="1150" b="0" dirty="0" err="1">
+                <a:solidFill>
+                  <a:srgbClr val="1C1C1E"/>
+                </a:solidFill>
+                <a:latin typeface="맑은 고딕"/>
+                <a:ea typeface="맑은 고딕"/>
+              </a:rPr>
+              <a:t>사각</a:t>
+            </a:r>
+            <a:r>
+              <a:rPr sz="1150" b="0" dirty="0">
+                <a:solidFill>
+                  <a:srgbClr val="1C1C1E"/>
+                </a:solidFill>
+                <a:latin typeface="맑은 고딕"/>
+                <a:ea typeface="맑은 고딕"/>
+              </a:rPr>
+              <a:t> 5곳</a:t>
+            </a:r>
+            <a:r>
+              <a:rPr lang="en-US" sz="1150" b="0" dirty="0">
+                <a:solidFill>
+                  <a:srgbClr val="1C1C1E"/>
+                </a:solidFill>
+                <a:latin typeface="맑은 고딕"/>
+                <a:ea typeface="맑은 고딕"/>
+              </a:rPr>
+              <a:t>, </a:t>
+            </a:r>
+            <a:r>
+              <a:rPr sz="1150" b="0" dirty="0" err="1">
+                <a:solidFill>
+                  <a:srgbClr val="1C1C1E"/>
+                </a:solidFill>
+                <a:latin typeface="맑은 고딕"/>
+                <a:ea typeface="맑은 고딕"/>
+              </a:rPr>
+              <a:t>소아과</a:t>
+            </a:r>
+            <a:r>
+              <a:rPr sz="1150" b="0" dirty="0">
+                <a:solidFill>
+                  <a:srgbClr val="1C1C1E"/>
+                </a:solidFill>
+                <a:latin typeface="맑은 고딕"/>
+                <a:ea typeface="맑은 고딕"/>
+              </a:rPr>
+              <a:t> 5개 </a:t>
+            </a:r>
+            <a:r>
+              <a:rPr sz="1150" b="0" dirty="0" err="1">
+                <a:solidFill>
+                  <a:srgbClr val="1C1C1E"/>
+                </a:solidFill>
+                <a:latin typeface="맑은 고딕"/>
+                <a:ea typeface="맑은 고딕"/>
+              </a:rPr>
+              <a:t>지역</a:t>
+            </a:r>
+            <a:r>
+              <a:rPr sz="1150" b="0" dirty="0">
+                <a:solidFill>
+                  <a:srgbClr val="1C1C1E"/>
+                </a:solidFill>
+                <a:latin typeface="맑은 고딕"/>
+                <a:ea typeface="맑은 고딕"/>
+              </a:rPr>
+              <a:t> </a:t>
+            </a:r>
+            <a:r>
+              <a:rPr sz="1150" b="0" dirty="0" err="1">
+                <a:solidFill>
+                  <a:srgbClr val="1C1C1E"/>
+                </a:solidFill>
+                <a:latin typeface="맑은 고딕"/>
+                <a:ea typeface="맑은 고딕"/>
+              </a:rPr>
+              <a:t>입원</a:t>
+            </a:r>
+            <a:r>
+              <a:rPr sz="1150" b="0" dirty="0">
+                <a:solidFill>
+                  <a:srgbClr val="1C1C1E"/>
+                </a:solidFill>
+                <a:latin typeface="맑은 고딕"/>
+                <a:ea typeface="맑은 고딕"/>
+              </a:rPr>
+              <a:t> 5,689건 </a:t>
+            </a:r>
+            <a:r>
+              <a:rPr sz="1150" b="0" dirty="0" err="1">
+                <a:solidFill>
+                  <a:srgbClr val="1C1C1E"/>
+                </a:solidFill>
+                <a:latin typeface="맑은 고딕"/>
+                <a:ea typeface="맑은 고딕"/>
+              </a:rPr>
+              <a:t>전량</a:t>
+            </a:r>
+            <a:r>
+              <a:rPr sz="1150" b="0" dirty="0">
+                <a:solidFill>
+                  <a:srgbClr val="1C1C1E"/>
+                </a:solidFill>
+                <a:latin typeface="맑은 고딕"/>
+                <a:ea typeface="맑은 고딕"/>
+              </a:rPr>
+              <a:t>(100%) </a:t>
+            </a:r>
+            <a:r>
+              <a:rPr sz="1150" b="0" dirty="0" err="1">
+                <a:solidFill>
+                  <a:srgbClr val="1C1C1E"/>
+                </a:solidFill>
+                <a:latin typeface="맑은 고딕"/>
+                <a:ea typeface="맑은 고딕"/>
+              </a:rPr>
+              <a:t>관외</a:t>
+            </a:r>
+            <a:r>
+              <a:rPr sz="1150" b="0" dirty="0">
+                <a:solidFill>
+                  <a:srgbClr val="1C1C1E"/>
+                </a:solidFill>
+                <a:latin typeface="맑은 고딕"/>
+                <a:ea typeface="맑은 고딕"/>
+              </a:rPr>
+              <a:t> </a:t>
+            </a:r>
+            <a:r>
+              <a:rPr sz="1150" b="0" dirty="0" err="1">
+                <a:solidFill>
+                  <a:srgbClr val="1C1C1E"/>
+                </a:solidFill>
+                <a:latin typeface="맑은 고딕"/>
+                <a:ea typeface="맑은 고딕"/>
+              </a:rPr>
+              <a:t>유출</a:t>
+            </a:r>
+            <a:endParaRPr sz="1150" b="0" dirty="0">
+              <a:solidFill>
+                <a:srgbClr val="1C1C1E"/>
+              </a:solidFill>
+              <a:latin typeface="맑은 고딕"/>
+              <a:ea typeface="맑은 고딕"/>
+            </a:endParaRPr>
           </a:p>
         </p:txBody>
       </p:sp>
@@ -15669,6 +19677,7 @@
           <a:lstStyle/>
           <a:p>
             <a:pPr algn="ctr"/>
+            <a:endParaRPr/>
           </a:p>
         </p:txBody>
       </p:sp>
@@ -15703,15 +19712,122 @@
               </a:spcAft>
             </a:pPr>
             <a:r>
-              <a:rPr sz="1300" b="1">
+              <a:rPr sz="1300" b="1" dirty="0" err="1">
                 <a:solidFill>
                   <a:srgbClr val="000000"/>
                 </a:solidFill>
                 <a:latin typeface="맑은 고딕"/>
                 <a:ea typeface="맑은 고딕"/>
               </a:rPr>
-              <a:t>발견 3 · 배분 규칙은 데이터 밖에 있다</a:t>
-            </a:r>
+              <a:t>발견</a:t>
+            </a:r>
+            <a:r>
+              <a:rPr sz="1300" b="1" dirty="0">
+                <a:solidFill>
+                  <a:srgbClr val="000000"/>
+                </a:solidFill>
+                <a:latin typeface="맑은 고딕"/>
+                <a:ea typeface="맑은 고딕"/>
+              </a:rPr>
+              <a:t> 3 · </a:t>
+            </a:r>
+            <a:r>
+              <a:rPr sz="1300" b="1" dirty="0" err="1">
+                <a:solidFill>
+                  <a:srgbClr val="000000"/>
+                </a:solidFill>
+                <a:latin typeface="맑은 고딕"/>
+                <a:ea typeface="맑은 고딕"/>
+              </a:rPr>
+              <a:t>배분</a:t>
+            </a:r>
+            <a:r>
+              <a:rPr sz="1300" b="1" dirty="0">
+                <a:solidFill>
+                  <a:srgbClr val="000000"/>
+                </a:solidFill>
+                <a:latin typeface="맑은 고딕"/>
+                <a:ea typeface="맑은 고딕"/>
+              </a:rPr>
+              <a:t> </a:t>
+            </a:r>
+            <a:r>
+              <a:rPr sz="1300" b="1" dirty="0" err="1">
+                <a:solidFill>
+                  <a:srgbClr val="000000"/>
+                </a:solidFill>
+                <a:latin typeface="맑은 고딕"/>
+                <a:ea typeface="맑은 고딕"/>
+              </a:rPr>
+              <a:t>규칙은</a:t>
+            </a:r>
+            <a:r>
+              <a:rPr sz="1300" b="1" dirty="0">
+                <a:solidFill>
+                  <a:srgbClr val="000000"/>
+                </a:solidFill>
+                <a:latin typeface="맑은 고딕"/>
+                <a:ea typeface="맑은 고딕"/>
+              </a:rPr>
+              <a:t> </a:t>
+            </a:r>
+            <a:r>
+              <a:rPr sz="1300" b="1" dirty="0" err="1">
+                <a:solidFill>
+                  <a:srgbClr val="000000"/>
+                </a:solidFill>
+                <a:latin typeface="맑은 고딕"/>
+                <a:ea typeface="맑은 고딕"/>
+              </a:rPr>
+              <a:t>데이터</a:t>
+            </a:r>
+            <a:r>
+              <a:rPr sz="1300" b="1" dirty="0">
+                <a:solidFill>
+                  <a:srgbClr val="000000"/>
+                </a:solidFill>
+                <a:latin typeface="맑은 고딕"/>
+                <a:ea typeface="맑은 고딕"/>
+              </a:rPr>
+              <a:t> </a:t>
+            </a:r>
+            <a:r>
+              <a:rPr sz="1300" b="1" dirty="0" err="1">
+                <a:solidFill>
+                  <a:srgbClr val="000000"/>
+                </a:solidFill>
+                <a:latin typeface="맑은 고딕"/>
+                <a:ea typeface="맑은 고딕"/>
+              </a:rPr>
+              <a:t>밖에</a:t>
+            </a:r>
+            <a:r>
+              <a:rPr sz="1300" b="1" dirty="0">
+                <a:solidFill>
+                  <a:srgbClr val="000000"/>
+                </a:solidFill>
+                <a:latin typeface="맑은 고딕"/>
+                <a:ea typeface="맑은 고딕"/>
+              </a:rPr>
+              <a:t> </a:t>
+            </a:r>
+            <a:r>
+              <a:rPr sz="1300" b="1" dirty="0" err="1">
+                <a:solidFill>
+                  <a:srgbClr val="000000"/>
+                </a:solidFill>
+                <a:latin typeface="맑은 고딕"/>
+                <a:ea typeface="맑은 고딕"/>
+              </a:rPr>
+              <a:t>있다</a:t>
+            </a:r>
+            <a:endParaRPr sz="1300" b="1" dirty="0">
+              <a:solidFill>
+                <a:srgbClr val="000000"/>
+              </a:solidFill>
+              <a:latin typeface="맑은 고딕"/>
+              <a:ea typeface="맑은 고딕"/>
+            </a:endParaRPr>
           </a:p>
           <a:p>
             <a:pPr marL="160020" indent="-160020">
@@ -15723,14 +19839,274 @@
               </a:spcAft>
             </a:pPr>
             <a:r>
-              <a:rPr sz="1150" b="0">
-                <a:solidFill>
-                  <a:srgbClr val="1C1C1E"/>
-                </a:solidFill>
-                <a:latin typeface="맑은 고딕"/>
-                <a:ea typeface="맑은 고딕"/>
-              </a:rPr>
-              <a:t>• 실질 취약지 A·B 53곳 중 21곳만 기지원. A등급 지원 오즈는 B의 4.82배(p=0.021)인데, 그 선정은 공개 지표로 16% 남짓만 설명된다(McFadden R² 0.163)</a:t>
+              <a:rPr sz="1150" b="0" dirty="0">
+                <a:solidFill>
+                  <a:srgbClr val="1C1C1E"/>
+                </a:solidFill>
+                <a:latin typeface="맑은 고딕"/>
+                <a:ea typeface="맑은 고딕"/>
+              </a:rPr>
+              <a:t>• </a:t>
+            </a:r>
+            <a:r>
+              <a:rPr sz="1150" b="0" dirty="0" err="1">
+                <a:solidFill>
+                  <a:srgbClr val="1C1C1E"/>
+                </a:solidFill>
+                <a:latin typeface="맑은 고딕"/>
+                <a:ea typeface="맑은 고딕"/>
+              </a:rPr>
+              <a:t>실질</a:t>
+            </a:r>
+            <a:r>
+              <a:rPr sz="1150" b="0" dirty="0">
+                <a:solidFill>
+                  <a:srgbClr val="1C1C1E"/>
+                </a:solidFill>
+                <a:latin typeface="맑은 고딕"/>
+                <a:ea typeface="맑은 고딕"/>
+              </a:rPr>
+              <a:t> </a:t>
+            </a:r>
+            <a:r>
+              <a:rPr sz="1150" b="0" dirty="0" err="1">
+                <a:solidFill>
+                  <a:srgbClr val="1C1C1E"/>
+                </a:solidFill>
+                <a:latin typeface="맑은 고딕"/>
+                <a:ea typeface="맑은 고딕"/>
+              </a:rPr>
+              <a:t>취약지</a:t>
+            </a:r>
+            <a:r>
+              <a:rPr sz="1150" b="0" dirty="0">
+                <a:solidFill>
+                  <a:srgbClr val="1C1C1E"/>
+                </a:solidFill>
+                <a:latin typeface="맑은 고딕"/>
+                <a:ea typeface="맑은 고딕"/>
+              </a:rPr>
+              <a:t> A·B 53곳 중 21곳만 </a:t>
+            </a:r>
+            <a:r>
+              <a:rPr sz="1150" b="0" dirty="0" err="1">
+                <a:solidFill>
+                  <a:srgbClr val="1C1C1E"/>
+                </a:solidFill>
+                <a:latin typeface="맑은 고딕"/>
+                <a:ea typeface="맑은 고딕"/>
+              </a:rPr>
+              <a:t>기지원</a:t>
+            </a:r>
+            <a:r>
+              <a:rPr sz="1150" b="0" dirty="0">
+                <a:solidFill>
+                  <a:srgbClr val="1C1C1E"/>
+                </a:solidFill>
+                <a:latin typeface="맑은 고딕"/>
+                <a:ea typeface="맑은 고딕"/>
+              </a:rPr>
+              <a:t>. </a:t>
+            </a:r>
+            <a:r>
+              <a:rPr sz="1150" b="0" dirty="0" err="1">
+                <a:solidFill>
+                  <a:srgbClr val="1C1C1E"/>
+                </a:solidFill>
+                <a:latin typeface="맑은 고딕"/>
+                <a:ea typeface="맑은 고딕"/>
+              </a:rPr>
+              <a:t>A등급</a:t>
+            </a:r>
+            <a:r>
+              <a:rPr sz="1150" b="0" dirty="0">
+                <a:solidFill>
+                  <a:srgbClr val="1C1C1E"/>
+                </a:solidFill>
+                <a:latin typeface="맑은 고딕"/>
+                <a:ea typeface="맑은 고딕"/>
+              </a:rPr>
+              <a:t> </a:t>
+            </a:r>
+            <a:r>
+              <a:rPr sz="1150" b="0" dirty="0" err="1">
+                <a:solidFill>
+                  <a:srgbClr val="1C1C1E"/>
+                </a:solidFill>
+                <a:latin typeface="맑은 고딕"/>
+                <a:ea typeface="맑은 고딕"/>
+              </a:rPr>
+              <a:t>지원</a:t>
+            </a:r>
+            <a:r>
+              <a:rPr sz="1150" b="0" dirty="0">
+                <a:solidFill>
+                  <a:srgbClr val="1C1C1E"/>
+                </a:solidFill>
+                <a:latin typeface="맑은 고딕"/>
+                <a:ea typeface="맑은 고딕"/>
+              </a:rPr>
+              <a:t> </a:t>
+            </a:r>
+            <a:r>
+              <a:rPr sz="1150" b="0" dirty="0" err="1">
+                <a:solidFill>
+                  <a:srgbClr val="1C1C1E"/>
+                </a:solidFill>
+                <a:latin typeface="맑은 고딕"/>
+                <a:ea typeface="맑은 고딕"/>
+              </a:rPr>
+              <a:t>오즈는</a:t>
+            </a:r>
+            <a:r>
+              <a:rPr sz="1150" b="0" dirty="0">
+                <a:solidFill>
+                  <a:srgbClr val="1C1C1E"/>
+                </a:solidFill>
+                <a:latin typeface="맑은 고딕"/>
+                <a:ea typeface="맑은 고딕"/>
+              </a:rPr>
+              <a:t> </a:t>
+            </a:r>
+            <a:r>
+              <a:rPr sz="1150" b="0" dirty="0" err="1">
+                <a:solidFill>
+                  <a:srgbClr val="1C1C1E"/>
+                </a:solidFill>
+                <a:latin typeface="맑은 고딕"/>
+                <a:ea typeface="맑은 고딕"/>
+              </a:rPr>
+              <a:t>B의</a:t>
+            </a:r>
+            <a:r>
+              <a:rPr sz="1150" b="0" dirty="0">
+                <a:solidFill>
+                  <a:srgbClr val="1C1C1E"/>
+                </a:solidFill>
+                <a:latin typeface="맑은 고딕"/>
+                <a:ea typeface="맑은 고딕"/>
+              </a:rPr>
+              <a:t> 4.82배(p=0.021)</a:t>
+            </a:r>
+            <a:r>
+              <a:rPr sz="1150" b="0" dirty="0" err="1">
+                <a:solidFill>
+                  <a:srgbClr val="1C1C1E"/>
+                </a:solidFill>
+                <a:latin typeface="맑은 고딕"/>
+                <a:ea typeface="맑은 고딕"/>
+              </a:rPr>
+              <a:t>인데</a:t>
+            </a:r>
+            <a:r>
+              <a:rPr sz="1150" b="0" dirty="0">
+                <a:solidFill>
+                  <a:srgbClr val="1C1C1E"/>
+                </a:solidFill>
+                <a:latin typeface="맑은 고딕"/>
+                <a:ea typeface="맑은 고딕"/>
+              </a:rPr>
+              <a:t>, 그 </a:t>
+            </a:r>
+            <a:r>
+              <a:rPr sz="1150" b="0" dirty="0" err="1">
+                <a:solidFill>
+                  <a:srgbClr val="1C1C1E"/>
+                </a:solidFill>
+                <a:latin typeface="맑은 고딕"/>
+                <a:ea typeface="맑은 고딕"/>
+              </a:rPr>
+              <a:t>선정은</a:t>
+            </a:r>
+            <a:r>
+              <a:rPr sz="1150" b="0" dirty="0">
+                <a:solidFill>
+                  <a:srgbClr val="1C1C1E"/>
+                </a:solidFill>
+                <a:latin typeface="맑은 고딕"/>
+                <a:ea typeface="맑은 고딕"/>
+              </a:rPr>
+              <a:t> </a:t>
+            </a:r>
+            <a:r>
+              <a:rPr sz="1150" b="0" dirty="0" err="1">
+                <a:solidFill>
+                  <a:srgbClr val="1C1C1E"/>
+                </a:solidFill>
+                <a:latin typeface="맑은 고딕"/>
+                <a:ea typeface="맑은 고딕"/>
+              </a:rPr>
+              <a:t>공개</a:t>
+            </a:r>
+            <a:r>
+              <a:rPr sz="1150" b="0" dirty="0">
+                <a:solidFill>
+                  <a:srgbClr val="1C1C1E"/>
+                </a:solidFill>
+                <a:latin typeface="맑은 고딕"/>
+                <a:ea typeface="맑은 고딕"/>
+              </a:rPr>
+              <a:t> </a:t>
+            </a:r>
+            <a:r>
+              <a:rPr sz="1150" b="0" dirty="0" err="1">
+                <a:solidFill>
+                  <a:srgbClr val="1C1C1E"/>
+                </a:solidFill>
+                <a:latin typeface="맑은 고딕"/>
+                <a:ea typeface="맑은 고딕"/>
+              </a:rPr>
+              <a:t>지표로</a:t>
+            </a:r>
+            <a:r>
+              <a:rPr sz="1150" b="0" dirty="0">
+                <a:solidFill>
+                  <a:srgbClr val="1C1C1E"/>
+                </a:solidFill>
+                <a:latin typeface="맑은 고딕"/>
+                <a:ea typeface="맑은 고딕"/>
+              </a:rPr>
+              <a:t> 16% </a:t>
+            </a:r>
+            <a:r>
+              <a:rPr sz="1150" b="0" dirty="0" err="1">
+                <a:solidFill>
+                  <a:srgbClr val="1C1C1E"/>
+                </a:solidFill>
+                <a:latin typeface="맑은 고딕"/>
+                <a:ea typeface="맑은 고딕"/>
+              </a:rPr>
+              <a:t>남짓만</a:t>
+            </a:r>
+            <a:r>
+              <a:rPr sz="1150" b="0" dirty="0">
+                <a:solidFill>
+                  <a:srgbClr val="1C1C1E"/>
+                </a:solidFill>
+                <a:latin typeface="맑은 고딕"/>
+                <a:ea typeface="맑은 고딕"/>
+              </a:rPr>
+              <a:t> </a:t>
+            </a:r>
+            <a:r>
+              <a:rPr sz="1150" b="0" dirty="0" err="1">
+                <a:solidFill>
+                  <a:srgbClr val="1C1C1E"/>
+                </a:solidFill>
+                <a:latin typeface="맑은 고딕"/>
+                <a:ea typeface="맑은 고딕"/>
+              </a:rPr>
+              <a:t>설명된다</a:t>
+            </a:r>
+            <a:r>
+              <a:rPr sz="1150" b="0" dirty="0">
+                <a:solidFill>
+                  <a:srgbClr val="1C1C1E"/>
+                </a:solidFill>
+                <a:latin typeface="맑은 고딕"/>
+                <a:ea typeface="맑은 고딕"/>
+              </a:rPr>
+              <a:t>(McFadden R² 0.163)</a:t>
             </a:r>
           </a:p>
         </p:txBody>
@@ -15786,6 +20162,7 @@
           <a:lstStyle/>
           <a:p>
             <a:pPr algn="ctr"/>
+            <a:endParaRPr/>
           </a:p>
         </p:txBody>
       </p:sp>
@@ -15820,15 +20197,122 @@
               </a:spcAft>
             </a:pPr>
             <a:r>
-              <a:rPr sz="1300" b="1">
+              <a:rPr sz="1300" b="1" dirty="0" err="1">
                 <a:solidFill>
                   <a:srgbClr val="33393F"/>
                 </a:solidFill>
                 <a:latin typeface="맑은 고딕"/>
                 <a:ea typeface="맑은 고딕"/>
               </a:rPr>
-              <a:t>발견 4 · 깊이는 보지만 인원 수는 안 본다</a:t>
-            </a:r>
+              <a:t>발견</a:t>
+            </a:r>
+            <a:r>
+              <a:rPr sz="1300" b="1" dirty="0">
+                <a:solidFill>
+                  <a:srgbClr val="33393F"/>
+                </a:solidFill>
+                <a:latin typeface="맑은 고딕"/>
+                <a:ea typeface="맑은 고딕"/>
+              </a:rPr>
+              <a:t> 4 · </a:t>
+            </a:r>
+            <a:r>
+              <a:rPr sz="1300" b="1" dirty="0" err="1">
+                <a:solidFill>
+                  <a:srgbClr val="33393F"/>
+                </a:solidFill>
+                <a:latin typeface="맑은 고딕"/>
+                <a:ea typeface="맑은 고딕"/>
+              </a:rPr>
+              <a:t>깊이는</a:t>
+            </a:r>
+            <a:r>
+              <a:rPr sz="1300" b="1" dirty="0">
+                <a:solidFill>
+                  <a:srgbClr val="33393F"/>
+                </a:solidFill>
+                <a:latin typeface="맑은 고딕"/>
+                <a:ea typeface="맑은 고딕"/>
+              </a:rPr>
+              <a:t> </a:t>
+            </a:r>
+            <a:r>
+              <a:rPr sz="1300" b="1" dirty="0" err="1">
+                <a:solidFill>
+                  <a:srgbClr val="33393F"/>
+                </a:solidFill>
+                <a:latin typeface="맑은 고딕"/>
+                <a:ea typeface="맑은 고딕"/>
+              </a:rPr>
+              <a:t>보지만</a:t>
+            </a:r>
+            <a:r>
+              <a:rPr sz="1300" b="1" dirty="0">
+                <a:solidFill>
+                  <a:srgbClr val="33393F"/>
+                </a:solidFill>
+                <a:latin typeface="맑은 고딕"/>
+                <a:ea typeface="맑은 고딕"/>
+              </a:rPr>
+              <a:t> </a:t>
+            </a:r>
+            <a:r>
+              <a:rPr sz="1300" b="1" dirty="0" err="1">
+                <a:solidFill>
+                  <a:srgbClr val="33393F"/>
+                </a:solidFill>
+                <a:latin typeface="맑은 고딕"/>
+                <a:ea typeface="맑은 고딕"/>
+              </a:rPr>
+              <a:t>인원</a:t>
+            </a:r>
+            <a:r>
+              <a:rPr sz="1300" b="1" dirty="0">
+                <a:solidFill>
+                  <a:srgbClr val="33393F"/>
+                </a:solidFill>
+                <a:latin typeface="맑은 고딕"/>
+                <a:ea typeface="맑은 고딕"/>
+              </a:rPr>
+              <a:t> </a:t>
+            </a:r>
+            <a:r>
+              <a:rPr sz="1300" b="1" dirty="0" err="1">
+                <a:solidFill>
+                  <a:srgbClr val="33393F"/>
+                </a:solidFill>
+                <a:latin typeface="맑은 고딕"/>
+                <a:ea typeface="맑은 고딕"/>
+              </a:rPr>
+              <a:t>수는</a:t>
+            </a:r>
+            <a:r>
+              <a:rPr sz="1300" b="1" dirty="0">
+                <a:solidFill>
+                  <a:srgbClr val="33393F"/>
+                </a:solidFill>
+                <a:latin typeface="맑은 고딕"/>
+                <a:ea typeface="맑은 고딕"/>
+              </a:rPr>
+              <a:t> 안 </a:t>
+            </a:r>
+            <a:r>
+              <a:rPr sz="1300" b="1" dirty="0" err="1">
+                <a:solidFill>
+                  <a:srgbClr val="33393F"/>
+                </a:solidFill>
+                <a:latin typeface="맑은 고딕"/>
+                <a:ea typeface="맑은 고딕"/>
+              </a:rPr>
+              <a:t>본다</a:t>
+            </a:r>
+            <a:endParaRPr sz="1300" b="1" dirty="0">
+              <a:solidFill>
+                <a:srgbClr val="33393F"/>
+              </a:solidFill>
+              <a:latin typeface="맑은 고딕"/>
+              <a:ea typeface="맑은 고딕"/>
+            </a:endParaRPr>
           </a:p>
           <a:p>
             <a:pPr marL="160020" indent="-160020">
@@ -15840,15 +20324,372 @@
               </a:spcAft>
             </a:pPr>
             <a:r>
-              <a:rPr sz="1150" b="0">
-                <a:solidFill>
-                  <a:srgbClr val="1C1C1E"/>
-                </a:solidFill>
-                <a:latin typeface="맑은 고딕"/>
-                <a:ea typeface="맑은 고딕"/>
-              </a:rPr>
-              <a:t>• 현행 배분은 취약 심도와는 정렬(ρ=+0.381), 영향 인원 규모(부담)와는 무관(ρ=−0.131). 두 관점의 순위 상관은 −0.190 — 축의 선택이 결과를 바꾼다</a:t>
-            </a:r>
+              <a:rPr sz="1150" b="0" dirty="0">
+                <a:solidFill>
+                  <a:srgbClr val="1C1C1E"/>
+                </a:solidFill>
+                <a:latin typeface="맑은 고딕"/>
+                <a:ea typeface="맑은 고딕"/>
+              </a:rPr>
+              <a:t>• </a:t>
+            </a:r>
+            <a:r>
+              <a:rPr sz="1150" b="0" dirty="0" err="1">
+                <a:solidFill>
+                  <a:srgbClr val="1C1C1E"/>
+                </a:solidFill>
+                <a:latin typeface="맑은 고딕"/>
+                <a:ea typeface="맑은 고딕"/>
+              </a:rPr>
+              <a:t>현행</a:t>
+            </a:r>
+            <a:r>
+              <a:rPr sz="1150" b="0" dirty="0">
+                <a:solidFill>
+                  <a:srgbClr val="1C1C1E"/>
+                </a:solidFill>
+                <a:latin typeface="맑은 고딕"/>
+                <a:ea typeface="맑은 고딕"/>
+              </a:rPr>
+              <a:t> </a:t>
+            </a:r>
+            <a:r>
+              <a:rPr sz="1150" b="0" dirty="0" err="1">
+                <a:solidFill>
+                  <a:srgbClr val="1C1C1E"/>
+                </a:solidFill>
+                <a:latin typeface="맑은 고딕"/>
+                <a:ea typeface="맑은 고딕"/>
+              </a:rPr>
+              <a:t>배분은</a:t>
+            </a:r>
+            <a:r>
+              <a:rPr sz="1150" b="0" dirty="0">
+                <a:solidFill>
+                  <a:srgbClr val="1C1C1E"/>
+                </a:solidFill>
+                <a:latin typeface="맑은 고딕"/>
+                <a:ea typeface="맑은 고딕"/>
+              </a:rPr>
+              <a:t> </a:t>
+            </a:r>
+            <a:r>
+              <a:rPr sz="1150" b="0" dirty="0" err="1">
+                <a:solidFill>
+                  <a:srgbClr val="1C1C1E"/>
+                </a:solidFill>
+                <a:latin typeface="맑은 고딕"/>
+                <a:ea typeface="맑은 고딕"/>
+              </a:rPr>
+              <a:t>취약</a:t>
+            </a:r>
+            <a:r>
+              <a:rPr sz="1150" b="0" dirty="0">
+                <a:solidFill>
+                  <a:srgbClr val="1C1C1E"/>
+                </a:solidFill>
+                <a:latin typeface="맑은 고딕"/>
+                <a:ea typeface="맑은 고딕"/>
+              </a:rPr>
+              <a:t> </a:t>
+            </a:r>
+            <a:r>
+              <a:rPr sz="1150" b="0" dirty="0" err="1">
+                <a:solidFill>
+                  <a:srgbClr val="1C1C1E"/>
+                </a:solidFill>
+                <a:latin typeface="맑은 고딕"/>
+                <a:ea typeface="맑은 고딕"/>
+              </a:rPr>
+              <a:t>심도와는</a:t>
+            </a:r>
+            <a:r>
+              <a:rPr sz="1150" b="0" dirty="0">
+                <a:solidFill>
+                  <a:srgbClr val="1C1C1E"/>
+                </a:solidFill>
+                <a:latin typeface="맑은 고딕"/>
+                <a:ea typeface="맑은 고딕"/>
+              </a:rPr>
+              <a:t> </a:t>
+            </a:r>
+            <a:r>
+              <a:rPr sz="1150" b="0" dirty="0" err="1">
+                <a:solidFill>
+                  <a:srgbClr val="1C1C1E"/>
+                </a:solidFill>
+                <a:latin typeface="맑은 고딕"/>
+                <a:ea typeface="맑은 고딕"/>
+              </a:rPr>
+              <a:t>정렬</a:t>
+            </a:r>
+            <a:r>
+              <a:rPr sz="1150" b="0" dirty="0">
+                <a:solidFill>
+                  <a:srgbClr val="1C1C1E"/>
+                </a:solidFill>
+                <a:latin typeface="맑은 고딕"/>
+                <a:ea typeface="맑은 고딕"/>
+              </a:rPr>
+              <a:t>(ρ=+0.381), </a:t>
+            </a:r>
+            <a:r>
+              <a:rPr sz="1150" b="0" dirty="0" err="1">
+                <a:solidFill>
+                  <a:srgbClr val="1C1C1E"/>
+                </a:solidFill>
+                <a:latin typeface="맑은 고딕"/>
+                <a:ea typeface="맑은 고딕"/>
+              </a:rPr>
+              <a:t>영향</a:t>
+            </a:r>
+            <a:r>
+              <a:rPr sz="1150" b="0" dirty="0">
+                <a:solidFill>
+                  <a:srgbClr val="1C1C1E"/>
+                </a:solidFill>
+                <a:latin typeface="맑은 고딕"/>
+                <a:ea typeface="맑은 고딕"/>
+              </a:rPr>
+              <a:t> </a:t>
+            </a:r>
+            <a:r>
+              <a:rPr sz="1150" b="0" dirty="0" err="1">
+                <a:solidFill>
+                  <a:srgbClr val="1C1C1E"/>
+                </a:solidFill>
+                <a:latin typeface="맑은 고딕"/>
+                <a:ea typeface="맑은 고딕"/>
+              </a:rPr>
+              <a:t>인원</a:t>
+            </a:r>
+            <a:r>
+              <a:rPr sz="1150" b="0" dirty="0">
+                <a:solidFill>
+                  <a:srgbClr val="1C1C1E"/>
+                </a:solidFill>
+                <a:latin typeface="맑은 고딕"/>
+                <a:ea typeface="맑은 고딕"/>
+              </a:rPr>
+              <a:t> </a:t>
+            </a:r>
+            <a:r>
+              <a:rPr sz="1150" b="0" dirty="0" err="1">
+                <a:solidFill>
+                  <a:srgbClr val="1C1C1E"/>
+                </a:solidFill>
+                <a:latin typeface="맑은 고딕"/>
+                <a:ea typeface="맑은 고딕"/>
+              </a:rPr>
+              <a:t>규모</a:t>
+            </a:r>
+            <a:r>
+              <a:rPr sz="1150" b="0" dirty="0">
+                <a:solidFill>
+                  <a:srgbClr val="1C1C1E"/>
+                </a:solidFill>
+                <a:latin typeface="맑은 고딕"/>
+                <a:ea typeface="맑은 고딕"/>
+              </a:rPr>
+              <a:t>(</a:t>
+            </a:r>
+            <a:r>
+              <a:rPr sz="1150" b="0" dirty="0" err="1">
+                <a:solidFill>
+                  <a:srgbClr val="1C1C1E"/>
+                </a:solidFill>
+                <a:latin typeface="맑은 고딕"/>
+                <a:ea typeface="맑은 고딕"/>
+              </a:rPr>
+              <a:t>부담</a:t>
+            </a:r>
+            <a:r>
+              <a:rPr sz="1150" b="0" dirty="0">
+                <a:solidFill>
+                  <a:srgbClr val="1C1C1E"/>
+                </a:solidFill>
+                <a:latin typeface="맑은 고딕"/>
+                <a:ea typeface="맑은 고딕"/>
+              </a:rPr>
+              <a:t>)</a:t>
+            </a:r>
+            <a:r>
+              <a:rPr sz="1150" b="0" dirty="0" err="1">
+                <a:solidFill>
+                  <a:srgbClr val="1C1C1E"/>
+                </a:solidFill>
+                <a:latin typeface="맑은 고딕"/>
+                <a:ea typeface="맑은 고딕"/>
+              </a:rPr>
+              <a:t>와는</a:t>
+            </a:r>
+            <a:r>
+              <a:rPr sz="1150" b="0" dirty="0">
+                <a:solidFill>
+                  <a:srgbClr val="1C1C1E"/>
+                </a:solidFill>
+                <a:latin typeface="맑은 고딕"/>
+                <a:ea typeface="맑은 고딕"/>
+              </a:rPr>
+              <a:t> </a:t>
+            </a:r>
+            <a:r>
+              <a:rPr sz="1150" b="0" dirty="0" err="1">
+                <a:solidFill>
+                  <a:srgbClr val="1C1C1E"/>
+                </a:solidFill>
+                <a:latin typeface="맑은 고딕"/>
+                <a:ea typeface="맑은 고딕"/>
+              </a:rPr>
+              <a:t>무관</a:t>
+            </a:r>
+            <a:r>
+              <a:rPr sz="1150" b="0" dirty="0">
+                <a:solidFill>
+                  <a:srgbClr val="1C1C1E"/>
+                </a:solidFill>
+                <a:latin typeface="맑은 고딕"/>
+                <a:ea typeface="맑은 고딕"/>
+              </a:rPr>
+              <a:t>(ρ=−0.131). 두 </a:t>
+            </a:r>
+            <a:r>
+              <a:rPr sz="1150" b="0" dirty="0" err="1">
+                <a:solidFill>
+                  <a:srgbClr val="1C1C1E"/>
+                </a:solidFill>
+                <a:latin typeface="맑은 고딕"/>
+                <a:ea typeface="맑은 고딕"/>
+              </a:rPr>
+              <a:t>관점의</a:t>
+            </a:r>
+            <a:r>
+              <a:rPr sz="1150" b="0" dirty="0">
+                <a:solidFill>
+                  <a:srgbClr val="1C1C1E"/>
+                </a:solidFill>
+                <a:latin typeface="맑은 고딕"/>
+                <a:ea typeface="맑은 고딕"/>
+              </a:rPr>
+              <a:t> </a:t>
+            </a:r>
+            <a:r>
+              <a:rPr sz="1150" b="0" dirty="0" err="1">
+                <a:solidFill>
+                  <a:srgbClr val="1C1C1E"/>
+                </a:solidFill>
+                <a:latin typeface="맑은 고딕"/>
+                <a:ea typeface="맑은 고딕"/>
+              </a:rPr>
+              <a:t>순위</a:t>
+            </a:r>
+            <a:r>
+              <a:rPr sz="1150" b="0" dirty="0">
+                <a:solidFill>
+                  <a:srgbClr val="1C1C1E"/>
+                </a:solidFill>
+                <a:latin typeface="맑은 고딕"/>
+                <a:ea typeface="맑은 고딕"/>
+              </a:rPr>
+              <a:t> </a:t>
+            </a:r>
+            <a:r>
+              <a:rPr sz="1150" b="0" dirty="0" err="1">
+                <a:solidFill>
+                  <a:srgbClr val="1C1C1E"/>
+                </a:solidFill>
+                <a:latin typeface="맑은 고딕"/>
+                <a:ea typeface="맑은 고딕"/>
+              </a:rPr>
+              <a:t>상관은</a:t>
+            </a:r>
+            <a:r>
+              <a:rPr sz="1150" b="0" dirty="0">
+                <a:solidFill>
+                  <a:srgbClr val="1C1C1E"/>
+                </a:solidFill>
+                <a:latin typeface="맑은 고딕"/>
+                <a:ea typeface="맑은 고딕"/>
+              </a:rPr>
+              <a:t> −0.190 — </a:t>
+            </a:r>
+            <a:r>
+              <a:rPr sz="1150" b="0" dirty="0" err="1">
+                <a:solidFill>
+                  <a:srgbClr val="1C1C1E"/>
+                </a:solidFill>
+                <a:latin typeface="맑은 고딕"/>
+                <a:ea typeface="맑은 고딕"/>
+              </a:rPr>
+              <a:t>축의</a:t>
+            </a:r>
+            <a:r>
+              <a:rPr sz="1150" b="0" dirty="0">
+                <a:solidFill>
+                  <a:srgbClr val="1C1C1E"/>
+                </a:solidFill>
+                <a:latin typeface="맑은 고딕"/>
+                <a:ea typeface="맑은 고딕"/>
+              </a:rPr>
+              <a:t> </a:t>
+            </a:r>
+            <a:r>
+              <a:rPr sz="1150" b="0" dirty="0" err="1">
+                <a:solidFill>
+                  <a:srgbClr val="1C1C1E"/>
+                </a:solidFill>
+                <a:latin typeface="맑은 고딕"/>
+                <a:ea typeface="맑은 고딕"/>
+              </a:rPr>
+              <a:t>선택이</a:t>
+            </a:r>
+            <a:r>
+              <a:rPr sz="1150" b="0" dirty="0">
+                <a:solidFill>
+                  <a:srgbClr val="1C1C1E"/>
+                </a:solidFill>
+                <a:latin typeface="맑은 고딕"/>
+                <a:ea typeface="맑은 고딕"/>
+              </a:rPr>
+              <a:t> </a:t>
+            </a:r>
+            <a:r>
+              <a:rPr sz="1150" b="0" dirty="0" err="1">
+                <a:solidFill>
+                  <a:srgbClr val="1C1C1E"/>
+                </a:solidFill>
+                <a:latin typeface="맑은 고딕"/>
+                <a:ea typeface="맑은 고딕"/>
+              </a:rPr>
+              <a:t>결과를</a:t>
+            </a:r>
+            <a:r>
+              <a:rPr sz="1150" b="0" dirty="0">
+                <a:solidFill>
+                  <a:srgbClr val="1C1C1E"/>
+                </a:solidFill>
+                <a:latin typeface="맑은 고딕"/>
+                <a:ea typeface="맑은 고딕"/>
+              </a:rPr>
+              <a:t> </a:t>
+            </a:r>
+            <a:r>
+              <a:rPr sz="1150" b="0" dirty="0" err="1">
+                <a:solidFill>
+                  <a:srgbClr val="1C1C1E"/>
+                </a:solidFill>
+                <a:latin typeface="맑은 고딕"/>
+                <a:ea typeface="맑은 고딕"/>
+              </a:rPr>
+              <a:t>바꾼다</a:t>
+            </a:r>
+            <a:endParaRPr sz="1150" b="0" dirty="0">
+              <a:solidFill>
+                <a:srgbClr val="1C1C1E"/>
+              </a:solidFill>
+              <a:latin typeface="맑은 고딕"/>
+              <a:ea typeface="맑은 고딕"/>
+            </a:endParaRPr>
           </a:p>
         </p:txBody>
       </p:sp>
@@ -15904,7 +20745,7 @@
 </file>
 
 <file path=ppt/slides/slide5.xml><?xml version="1.0" encoding="utf-8"?>
-<p:sld xmlns:a="http://schemas.openxmlformats.org/drawingml/2006/main" xmlns:p="http://schemas.openxmlformats.org/presentationml/2006/main" xmlns:r="http://schemas.openxmlformats.org/officeDocument/2006/relationships">
+<p:sld xmlns:a="http://schemas.openxmlformats.org/drawingml/2006/main" xmlns:r="http://schemas.openxmlformats.org/officeDocument/2006/relationships" xmlns:p="http://schemas.openxmlformats.org/presentationml/2006/main">
   <p:cSld>
     <p:spTree>
       <p:nvGrpSpPr>
@@ -15912,7 +20753,14 @@
         <p:cNvGrpSpPr/>
         <p:nvPr/>
       </p:nvGrpSpPr>
-      <p:grpSpPr/>
+      <p:grpSpPr>
+        <a:xfrm>
+          <a:off x="0" y="0"/>
+          <a:ext cx="0" cy="0"/>
+          <a:chOff x="0" y="0"/>
+          <a:chExt cx="0" cy="0"/>
+        </a:xfrm>
+      </p:grpSpPr>
       <p:sp>
         <p:nvSpPr>
           <p:cNvPr id="2" name="Rectangle 1"/>
@@ -15954,6 +20802,7 @@
           <a:lstStyle/>
           <a:p>
             <a:pPr algn="ctr"/>
+            <a:endParaRPr/>
           </a:p>
         </p:txBody>
       </p:sp>
@@ -15965,8 +20814,8 @@
         </p:nvSpPr>
         <p:spPr>
           <a:xfrm>
-            <a:off x="502920" y="475488"/>
-            <a:ext cx="310896" cy="310896"/>
+            <a:off x="554736" y="527304"/>
+            <a:ext cx="207264" cy="207264"/>
           </a:xfrm>
           <a:prstGeom prst="roundRect">
             <a:avLst>
@@ -15982,7 +20831,7 @@
                 <a:srgbClr val="73787E"/>
               </a:gs>
             </a:gsLst>
-            <a:lin scaled="0" ang="18900000"/>
+            <a:lin ang="18900000" scaled="0"/>
           </a:gradFill>
           <a:ln>
             <a:noFill/>
@@ -16014,6 +20863,7 @@
           <a:lstStyle/>
           <a:p>
             <a:pPr algn="ctr"/>
+            <a:endParaRPr/>
           </a:p>
         </p:txBody>
       </p:sp>
@@ -16083,7 +20933,7 @@
                 <a:srgbClr val="FFFFFF"/>
               </a:gs>
             </a:gsLst>
-            <a:lin scaled="0" ang="0"/>
+            <a:lin ang="0" scaled="0"/>
           </a:gradFill>
           <a:ln>
             <a:noFill/>
@@ -16109,6 +20959,7 @@
           <a:lstStyle/>
           <a:p>
             <a:pPr algn="ctr"/>
+            <a:endParaRPr/>
           </a:p>
         </p:txBody>
       </p:sp>
@@ -16292,6 +21143,7 @@
           <a:lstStyle/>
           <a:p>
             <a:pPr algn="ctr"/>
+            <a:endParaRPr/>
           </a:p>
         </p:txBody>
       </p:sp>
@@ -16472,6 +21324,7 @@
           <a:lstStyle/>
           <a:p>
             <a:pPr algn="ctr"/>
+            <a:endParaRPr/>
           </a:p>
         </p:txBody>
       </p:sp>
@@ -16652,6 +21505,7 @@
           <a:lstStyle/>
           <a:p>
             <a:pPr algn="ctr"/>
+            <a:endParaRPr/>
           </a:p>
         </p:txBody>
       </p:sp>
@@ -16763,7 +21617,7 @@
                 <a:srgbClr val="4A4F55"/>
               </a:gs>
             </a:gsLst>
-            <a:lin scaled="0" ang="14700000"/>
+            <a:lin ang="14700000" scaled="0"/>
           </a:gradFill>
           <a:ln>
             <a:noFill/>
@@ -16795,6 +21649,7 @@
           <a:lstStyle/>
           <a:p>
             <a:pPr algn="ctr"/>
+            <a:endParaRPr/>
           </a:p>
         </p:txBody>
       </p:sp>
@@ -16892,6 +21747,7 @@
           <a:lstStyle/>
           <a:p>
             <a:pPr algn="ctr"/>
+            <a:endParaRPr/>
           </a:p>
         </p:txBody>
       </p:sp>
@@ -16989,6 +21845,7 @@
           <a:lstStyle/>
           <a:p>
             <a:pPr algn="ctr"/>
+            <a:endParaRPr/>
           </a:p>
         </p:txBody>
       </p:sp>
@@ -17060,7 +21917,7 @@
                 <a:srgbClr val="4A4F55"/>
               </a:gs>
             </a:gsLst>
-            <a:lin scaled="0" ang="14700000"/>
+            <a:lin ang="14700000" scaled="0"/>
           </a:gradFill>
           <a:ln>
             <a:noFill/>
@@ -17092,6 +21949,7 @@
           <a:lstStyle/>
           <a:p>
             <a:pPr algn="ctr"/>
+            <a:endParaRPr/>
           </a:p>
         </p:txBody>
       </p:sp>
@@ -17189,6 +22047,7 @@
           <a:lstStyle/>
           <a:p>
             <a:pPr algn="ctr"/>
+            <a:endParaRPr/>
           </a:p>
         </p:txBody>
       </p:sp>
@@ -17286,6 +22145,7 @@
           <a:lstStyle/>
           <a:p>
             <a:pPr algn="ctr"/>
+            <a:endParaRPr/>
           </a:p>
         </p:txBody>
       </p:sp>
@@ -17357,7 +22217,7 @@
                 <a:srgbClr val="4A4F55"/>
               </a:gs>
             </a:gsLst>
-            <a:lin scaled="0" ang="14700000"/>
+            <a:lin ang="14700000" scaled="0"/>
           </a:gradFill>
           <a:ln>
             <a:noFill/>
@@ -17389,6 +22249,7 @@
           <a:lstStyle/>
           <a:p>
             <a:pPr algn="ctr"/>
+            <a:endParaRPr/>
           </a:p>
         </p:txBody>
       </p:sp>
@@ -17486,6 +22347,7 @@
           <a:lstStyle/>
           <a:p>
             <a:pPr algn="ctr"/>
+            <a:endParaRPr/>
           </a:p>
         </p:txBody>
       </p:sp>
@@ -17583,6 +22445,7 @@
           <a:lstStyle/>
           <a:p>
             <a:pPr algn="ctr"/>
+            <a:endParaRPr/>
           </a:p>
         </p:txBody>
       </p:sp>
@@ -17654,7 +22517,7 @@
                 <a:srgbClr val="4A4F55"/>
               </a:gs>
             </a:gsLst>
-            <a:lin scaled="0" ang="14700000"/>
+            <a:lin ang="14700000" scaled="0"/>
           </a:gradFill>
           <a:ln>
             <a:noFill/>
@@ -17686,6 +22549,7 @@
           <a:lstStyle/>
           <a:p>
             <a:pPr algn="ctr"/>
+            <a:endParaRPr/>
           </a:p>
         </p:txBody>
       </p:sp>
@@ -17783,6 +22647,7 @@
           <a:lstStyle/>
           <a:p>
             <a:pPr algn="ctr"/>
+            <a:endParaRPr/>
           </a:p>
         </p:txBody>
       </p:sp>
@@ -17880,6 +22745,7 @@
           <a:lstStyle/>
           <a:p>
             <a:pPr algn="ctr"/>
+            <a:endParaRPr/>
           </a:p>
         </p:txBody>
       </p:sp>
@@ -17978,7 +22844,7 @@
 </file>
 
 <file path=ppt/slides/slide6.xml><?xml version="1.0" encoding="utf-8"?>
-<p:sld xmlns:a="http://schemas.openxmlformats.org/drawingml/2006/main" xmlns:p="http://schemas.openxmlformats.org/presentationml/2006/main" xmlns:r="http://schemas.openxmlformats.org/officeDocument/2006/relationships">
+<p:sld xmlns:a="http://schemas.openxmlformats.org/drawingml/2006/main" xmlns:r="http://schemas.openxmlformats.org/officeDocument/2006/relationships" xmlns:p="http://schemas.openxmlformats.org/presentationml/2006/main">
   <p:cSld>
     <p:spTree>
       <p:nvGrpSpPr>
@@ -17986,7 +22852,14 @@
         <p:cNvGrpSpPr/>
         <p:nvPr/>
       </p:nvGrpSpPr>
-      <p:grpSpPr/>
+      <p:grpSpPr>
+        <a:xfrm>
+          <a:off x="0" y="0"/>
+          <a:ext cx="0" cy="0"/>
+          <a:chOff x="0" y="0"/>
+          <a:chExt cx="0" cy="0"/>
+        </a:xfrm>
+      </p:grpSpPr>
       <p:sp>
         <p:nvSpPr>
           <p:cNvPr id="2" name="Rectangle 1"/>
@@ -18028,6 +22901,7 @@
           <a:lstStyle/>
           <a:p>
             <a:pPr algn="ctr"/>
+            <a:endParaRPr/>
           </a:p>
         </p:txBody>
       </p:sp>
@@ -18039,8 +22913,8 @@
         </p:nvSpPr>
         <p:spPr>
           <a:xfrm>
-            <a:off x="502920" y="475488"/>
-            <a:ext cx="310896" cy="310896"/>
+            <a:off x="554736" y="527304"/>
+            <a:ext cx="207264" cy="207264"/>
           </a:xfrm>
           <a:prstGeom prst="roundRect">
             <a:avLst>
@@ -18056,7 +22930,7 @@
                 <a:srgbClr val="73787E"/>
               </a:gs>
             </a:gsLst>
-            <a:lin scaled="0" ang="18900000"/>
+            <a:lin ang="18900000" scaled="0"/>
           </a:gradFill>
           <a:ln>
             <a:noFill/>
@@ -18088,6 +22962,7 @@
           <a:lstStyle/>
           <a:p>
             <a:pPr algn="ctr"/>
+            <a:endParaRPr/>
           </a:p>
         </p:txBody>
       </p:sp>
@@ -18157,7 +23032,7 @@
                 <a:srgbClr val="FFFFFF"/>
               </a:gs>
             </a:gsLst>
-            <a:lin scaled="0" ang="0"/>
+            <a:lin ang="0" scaled="0"/>
           </a:gradFill>
           <a:ln>
             <a:noFill/>
@@ -18183,6 +23058,7 @@
           <a:lstStyle/>
           <a:p>
             <a:pPr algn="ctr"/>
+            <a:endParaRPr/>
           </a:p>
         </p:txBody>
       </p:sp>
@@ -18291,9 +23167,27 @@
                 <a:tableStyleId>{5C22544A-7EE6-4342-B048-85BDC9FD1C3A}</a:tableStyleId>
               </a:tblPr>
               <a:tblGrid>
-                <a:gridCol w="2834640"/>
-                <a:gridCol w="6675120"/>
-                <a:gridCol w="1783080"/>
+                <a:gridCol w="2834640">
+                  <a:extLst>
+                    <a:ext uri="{9D8B030D-6E8A-4147-A177-3AD203B41FA5}">
+                      <a16:colId xmlns:a16="http://schemas.microsoft.com/office/drawing/2014/main" val="20000"/>
+                    </a:ext>
+                  </a:extLst>
+                </a:gridCol>
+                <a:gridCol w="6675120">
+                  <a:extLst>
+                    <a:ext uri="{9D8B030D-6E8A-4147-A177-3AD203B41FA5}">
+                      <a16:colId xmlns:a16="http://schemas.microsoft.com/office/drawing/2014/main" val="20001"/>
+                    </a:ext>
+                  </a:extLst>
+                </a:gridCol>
+                <a:gridCol w="1783080">
+                  <a:extLst>
+                    <a:ext uri="{9D8B030D-6E8A-4147-A177-3AD203B41FA5}">
+                      <a16:colId xmlns:a16="http://schemas.microsoft.com/office/drawing/2014/main" val="20002"/>
+                    </a:ext>
+                  </a:extLst>
+                </a:gridCol>
               </a:tblGrid>
               <a:tr h="457200">
                 <a:tc>
@@ -18318,7 +23212,7 @@
                       </a:r>
                     </a:p>
                   </a:txBody>
-                  <a:tcPr marT="27432" marB="27432" marL="73152" marR="73152" anchor="ctr">
+                  <a:tcPr marL="73152" marR="73152" marT="27432" marB="27432" anchor="ctr">
                     <a:solidFill>
                       <a:srgbClr val="33393F"/>
                     </a:solidFill>
@@ -18346,7 +23240,7 @@
                       </a:r>
                     </a:p>
                   </a:txBody>
-                  <a:tcPr marT="27432" marB="27432" marL="73152" marR="73152" anchor="ctr">
+                  <a:tcPr marL="73152" marR="73152" marT="27432" marB="27432" anchor="ctr">
                     <a:solidFill>
                       <a:srgbClr val="33393F"/>
                     </a:solidFill>
@@ -18374,12 +23268,17 @@
                       </a:r>
                     </a:p>
                   </a:txBody>
-                  <a:tcPr marT="27432" marB="27432" marL="73152" marR="73152" anchor="ctr">
+                  <a:tcPr marL="73152" marR="73152" marT="27432" marB="27432" anchor="ctr">
                     <a:solidFill>
                       <a:srgbClr val="33393F"/>
                     </a:solidFill>
                   </a:tcPr>
                 </a:tc>
+                <a:extLst>
+                  <a:ext uri="{0D108BD9-81ED-4DB2-BD59-A6C34878D82A}">
+                    <a16:rowId xmlns:a16="http://schemas.microsoft.com/office/drawing/2014/main" val="10000"/>
+                  </a:ext>
+                </a:extLst>
               </a:tr>
               <a:tr h="457200">
                 <a:tc>
@@ -18404,7 +23303,7 @@
                       </a:r>
                     </a:p>
                   </a:txBody>
-                  <a:tcPr marT="27432" marB="27432" marL="73152" marR="73152" anchor="ctr">
+                  <a:tcPr marL="73152" marR="73152" marT="27432" marB="27432" anchor="ctr">
                     <a:solidFill>
                       <a:srgbClr val="FFFFFF"/>
                     </a:solidFill>
@@ -18432,7 +23331,7 @@
                       </a:r>
                     </a:p>
                   </a:txBody>
-                  <a:tcPr marT="27432" marB="27432" marL="73152" marR="73152" anchor="ctr">
+                  <a:tcPr marL="73152" marR="73152" marT="27432" marB="27432" anchor="ctr">
                     <a:solidFill>
                       <a:srgbClr val="FFFFFF"/>
                     </a:solidFill>
@@ -18460,12 +23359,17 @@
                       </a:r>
                     </a:p>
                   </a:txBody>
-                  <a:tcPr marT="27432" marB="27432" marL="73152" marR="73152" anchor="ctr">
+                  <a:tcPr marL="73152" marR="73152" marT="27432" marB="27432" anchor="ctr">
                     <a:solidFill>
                       <a:srgbClr val="FFFFFF"/>
                     </a:solidFill>
                   </a:tcPr>
                 </a:tc>
+                <a:extLst>
+                  <a:ext uri="{0D108BD9-81ED-4DB2-BD59-A6C34878D82A}">
+                    <a16:rowId xmlns:a16="http://schemas.microsoft.com/office/drawing/2014/main" val="10001"/>
+                  </a:ext>
+                </a:extLst>
               </a:tr>
               <a:tr h="457200">
                 <a:tc>
@@ -18490,7 +23394,7 @@
                       </a:r>
                     </a:p>
                   </a:txBody>
-                  <a:tcPr marT="27432" marB="27432" marL="73152" marR="73152" anchor="ctr">
+                  <a:tcPr marL="73152" marR="73152" marT="27432" marB="27432" anchor="ctr">
                     <a:solidFill>
                       <a:srgbClr val="F6F7F8"/>
                     </a:solidFill>
@@ -18518,7 +23422,7 @@
                       </a:r>
                     </a:p>
                   </a:txBody>
-                  <a:tcPr marT="27432" marB="27432" marL="73152" marR="73152" anchor="ctr">
+                  <a:tcPr marL="73152" marR="73152" marT="27432" marB="27432" anchor="ctr">
                     <a:solidFill>
                       <a:srgbClr val="F6F7F8"/>
                     </a:solidFill>
@@ -18546,12 +23450,17 @@
                       </a:r>
                     </a:p>
                   </a:txBody>
-                  <a:tcPr marT="27432" marB="27432" marL="73152" marR="73152" anchor="ctr">
+                  <a:tcPr marL="73152" marR="73152" marT="27432" marB="27432" anchor="ctr">
                     <a:solidFill>
                       <a:srgbClr val="F6F7F8"/>
                     </a:solidFill>
                   </a:tcPr>
                 </a:tc>
+                <a:extLst>
+                  <a:ext uri="{0D108BD9-81ED-4DB2-BD59-A6C34878D82A}">
+                    <a16:rowId xmlns:a16="http://schemas.microsoft.com/office/drawing/2014/main" val="10002"/>
+                  </a:ext>
+                </a:extLst>
               </a:tr>
             </a:tbl>
           </a:graphicData>
@@ -18651,6 +23560,7 @@
           <a:lstStyle/>
           <a:p>
             <a:pPr algn="ctr"/>
+            <a:endParaRPr/>
           </a:p>
         </p:txBody>
       </p:sp>
@@ -18768,6 +23678,7 @@
           <a:lstStyle/>
           <a:p>
             <a:pPr algn="ctr"/>
+            <a:endParaRPr/>
           </a:p>
         </p:txBody>
       </p:sp>
@@ -18885,6 +23796,7 @@
           <a:lstStyle/>
           <a:p>
             <a:pPr algn="ctr"/>
+            <a:endParaRPr/>
           </a:p>
         </p:txBody>
       </p:sp>
@@ -18946,7 +23858,7 @@
                 <a:latin typeface="맑은 고딕"/>
                 <a:ea typeface="맑은 고딕"/>
               </a:rPr>
-              <a:t>• 옆 도시 병원이라도 60분 안이면 "이용됨" — 지정 감사의 핵심 열쇠</a:t>
+              <a:t>• 옆 도시 병원이라도 60분 안이면 "이용됨" — 이 프로젝트 지정 감사의 핵심 열쇠</a:t>
             </a:r>
           </a:p>
         </p:txBody>
@@ -19002,6 +23914,7 @@
           <a:lstStyle/>
           <a:p>
             <a:pPr algn="ctr"/>
+            <a:endParaRPr/>
           </a:p>
         </p:txBody>
       </p:sp>
@@ -19077,7 +23990,7 @@
 </file>
 
 <file path=ppt/slides/slide7.xml><?xml version="1.0" encoding="utf-8"?>
-<p:sld xmlns:a="http://schemas.openxmlformats.org/drawingml/2006/main" xmlns:p="http://schemas.openxmlformats.org/presentationml/2006/main" xmlns:r="http://schemas.openxmlformats.org/officeDocument/2006/relationships">
+<p:sld xmlns:a="http://schemas.openxmlformats.org/drawingml/2006/main" xmlns:r="http://schemas.openxmlformats.org/officeDocument/2006/relationships" xmlns:p="http://schemas.openxmlformats.org/presentationml/2006/main">
   <p:cSld>
     <p:spTree>
       <p:nvGrpSpPr>
@@ -19085,7 +23998,14 @@
         <p:cNvGrpSpPr/>
         <p:nvPr/>
       </p:nvGrpSpPr>
-      <p:grpSpPr/>
+      <p:grpSpPr>
+        <a:xfrm>
+          <a:off x="0" y="0"/>
+          <a:ext cx="0" cy="0"/>
+          <a:chOff x="0" y="0"/>
+          <a:chExt cx="0" cy="0"/>
+        </a:xfrm>
+      </p:grpSpPr>
       <p:sp>
         <p:nvSpPr>
           <p:cNvPr id="2" name="Rectangle 1"/>
@@ -19127,6 +24047,7 @@
           <a:lstStyle/>
           <a:p>
             <a:pPr algn="ctr"/>
+            <a:endParaRPr/>
           </a:p>
         </p:txBody>
       </p:sp>
@@ -19138,8 +24059,8 @@
         </p:nvSpPr>
         <p:spPr>
           <a:xfrm>
-            <a:off x="502920" y="475488"/>
-            <a:ext cx="310896" cy="310896"/>
+            <a:off x="554736" y="527304"/>
+            <a:ext cx="207264" cy="207264"/>
           </a:xfrm>
           <a:prstGeom prst="roundRect">
             <a:avLst>
@@ -19155,7 +24076,7 @@
                 <a:srgbClr val="73787E"/>
               </a:gs>
             </a:gsLst>
-            <a:lin scaled="0" ang="18900000"/>
+            <a:lin ang="18900000" scaled="0"/>
           </a:gradFill>
           <a:ln>
             <a:noFill/>
@@ -19187,6 +24108,7 @@
           <a:lstStyle/>
           <a:p>
             <a:pPr algn="ctr"/>
+            <a:endParaRPr/>
           </a:p>
         </p:txBody>
       </p:sp>
@@ -19256,7 +24178,7 @@
                 <a:srgbClr val="FFFFFF"/>
               </a:gs>
             </a:gsLst>
-            <a:lin scaled="0" ang="0"/>
+            <a:lin ang="0" scaled="0"/>
           </a:gradFill>
           <a:ln>
             <a:noFill/>
@@ -19282,6 +24204,7 @@
           <a:lstStyle/>
           <a:p>
             <a:pPr algn="ctr"/>
+            <a:endParaRPr/>
           </a:p>
         </p:txBody>
       </p:sp>
@@ -19390,9 +24313,27 @@
                 <a:tableStyleId>{5C22544A-7EE6-4342-B048-85BDC9FD1C3A}</a:tableStyleId>
               </a:tblPr>
               <a:tblGrid>
-                <a:gridCol w="822960"/>
-                <a:gridCol w="3931920"/>
-                <a:gridCol w="1188720"/>
+                <a:gridCol w="822960">
+                  <a:extLst>
+                    <a:ext uri="{9D8B030D-6E8A-4147-A177-3AD203B41FA5}">
+                      <a16:colId xmlns:a16="http://schemas.microsoft.com/office/drawing/2014/main" val="20000"/>
+                    </a:ext>
+                  </a:extLst>
+                </a:gridCol>
+                <a:gridCol w="3931920">
+                  <a:extLst>
+                    <a:ext uri="{9D8B030D-6E8A-4147-A177-3AD203B41FA5}">
+                      <a16:colId xmlns:a16="http://schemas.microsoft.com/office/drawing/2014/main" val="20001"/>
+                    </a:ext>
+                  </a:extLst>
+                </a:gridCol>
+                <a:gridCol w="1188720">
+                  <a:extLst>
+                    <a:ext uri="{9D8B030D-6E8A-4147-A177-3AD203B41FA5}">
+                      <a16:colId xmlns:a16="http://schemas.microsoft.com/office/drawing/2014/main" val="20002"/>
+                    </a:ext>
+                  </a:extLst>
+                </a:gridCol>
               </a:tblGrid>
               <a:tr h="457200">
                 <a:tc>
@@ -19417,7 +24358,7 @@
                       </a:r>
                     </a:p>
                   </a:txBody>
-                  <a:tcPr marT="27432" marB="27432" marL="73152" marR="73152" anchor="ctr">
+                  <a:tcPr marL="73152" marR="73152" marT="27432" marB="27432" anchor="ctr">
                     <a:solidFill>
                       <a:srgbClr val="33393F"/>
                     </a:solidFill>
@@ -19445,7 +24386,7 @@
                       </a:r>
                     </a:p>
                   </a:txBody>
-                  <a:tcPr marT="27432" marB="27432" marL="73152" marR="73152" anchor="ctr">
+                  <a:tcPr marL="73152" marR="73152" marT="27432" marB="27432" anchor="ctr">
                     <a:solidFill>
                       <a:srgbClr val="33393F"/>
                     </a:solidFill>
@@ -19473,12 +24414,17 @@
                       </a:r>
                     </a:p>
                   </a:txBody>
-                  <a:tcPr marT="27432" marB="27432" marL="73152" marR="73152" anchor="ctr">
+                  <a:tcPr marL="73152" marR="73152" marT="27432" marB="27432" anchor="ctr">
                     <a:solidFill>
                       <a:srgbClr val="33393F"/>
                     </a:solidFill>
                   </a:tcPr>
                 </a:tc>
+                <a:extLst>
+                  <a:ext uri="{0D108BD9-81ED-4DB2-BD59-A6C34878D82A}">
+                    <a16:rowId xmlns:a16="http://schemas.microsoft.com/office/drawing/2014/main" val="10000"/>
+                  </a:ext>
+                </a:extLst>
               </a:tr>
               <a:tr h="457200">
                 <a:tc>
@@ -19503,7 +24449,7 @@
                       </a:r>
                     </a:p>
                   </a:txBody>
-                  <a:tcPr marT="27432" marB="27432" marL="73152" marR="73152" anchor="ctr">
+                  <a:tcPr marL="73152" marR="73152" marT="27432" marB="27432" anchor="ctr">
                     <a:solidFill>
                       <a:srgbClr val="FFFFFF"/>
                     </a:solidFill>
@@ -19531,7 +24477,7 @@
                       </a:r>
                     </a:p>
                   </a:txBody>
-                  <a:tcPr marT="27432" marB="27432" marL="73152" marR="73152" anchor="ctr">
+                  <a:tcPr marL="73152" marR="73152" marT="27432" marB="27432" anchor="ctr">
                     <a:solidFill>
                       <a:srgbClr val="FFFFFF"/>
                     </a:solidFill>
@@ -19559,12 +24505,17 @@
                       </a:r>
                     </a:p>
                   </a:txBody>
-                  <a:tcPr marT="27432" marB="27432" marL="73152" marR="73152" anchor="ctr">
+                  <a:tcPr marL="73152" marR="73152" marT="27432" marB="27432" anchor="ctr">
                     <a:solidFill>
                       <a:srgbClr val="FFFFFF"/>
                     </a:solidFill>
                   </a:tcPr>
                 </a:tc>
+                <a:extLst>
+                  <a:ext uri="{0D108BD9-81ED-4DB2-BD59-A6C34878D82A}">
+                    <a16:rowId xmlns:a16="http://schemas.microsoft.com/office/drawing/2014/main" val="10001"/>
+                  </a:ext>
+                </a:extLst>
               </a:tr>
               <a:tr h="457200">
                 <a:tc>
@@ -19589,7 +24540,7 @@
                       </a:r>
                     </a:p>
                   </a:txBody>
-                  <a:tcPr marT="27432" marB="27432" marL="73152" marR="73152" anchor="ctr">
+                  <a:tcPr marL="73152" marR="73152" marT="27432" marB="27432" anchor="ctr">
                     <a:solidFill>
                       <a:srgbClr val="F6F7F8"/>
                     </a:solidFill>
@@ -19617,7 +24568,7 @@
                       </a:r>
                     </a:p>
                   </a:txBody>
-                  <a:tcPr marT="27432" marB="27432" marL="73152" marR="73152" anchor="ctr">
+                  <a:tcPr marL="73152" marR="73152" marT="27432" marB="27432" anchor="ctr">
                     <a:solidFill>
                       <a:srgbClr val="F6F7F8"/>
                     </a:solidFill>
@@ -19645,12 +24596,17 @@
                       </a:r>
                     </a:p>
                   </a:txBody>
-                  <a:tcPr marT="27432" marB="27432" marL="73152" marR="73152" anchor="ctr">
+                  <a:tcPr marL="73152" marR="73152" marT="27432" marB="27432" anchor="ctr">
                     <a:solidFill>
                       <a:srgbClr val="F6F7F8"/>
                     </a:solidFill>
                   </a:tcPr>
                 </a:tc>
+                <a:extLst>
+                  <a:ext uri="{0D108BD9-81ED-4DB2-BD59-A6C34878D82A}">
+                    <a16:rowId xmlns:a16="http://schemas.microsoft.com/office/drawing/2014/main" val="10002"/>
+                  </a:ext>
+                </a:extLst>
               </a:tr>
               <a:tr h="457200">
                 <a:tc>
@@ -19675,7 +24631,7 @@
                       </a:r>
                     </a:p>
                   </a:txBody>
-                  <a:tcPr marT="27432" marB="27432" marL="73152" marR="73152" anchor="ctr">
+                  <a:tcPr marL="73152" marR="73152" marT="27432" marB="27432" anchor="ctr">
                     <a:solidFill>
                       <a:srgbClr val="FFFFFF"/>
                     </a:solidFill>
@@ -19703,7 +24659,7 @@
                       </a:r>
                     </a:p>
                   </a:txBody>
-                  <a:tcPr marT="27432" marB="27432" marL="73152" marR="73152" anchor="ctr">
+                  <a:tcPr marL="73152" marR="73152" marT="27432" marB="27432" anchor="ctr">
                     <a:solidFill>
                       <a:srgbClr val="FFFFFF"/>
                     </a:solidFill>
@@ -19731,12 +24687,17 @@
                       </a:r>
                     </a:p>
                   </a:txBody>
-                  <a:tcPr marT="27432" marB="27432" marL="73152" marR="73152" anchor="ctr">
+                  <a:tcPr marL="73152" marR="73152" marT="27432" marB="27432" anchor="ctr">
                     <a:solidFill>
                       <a:srgbClr val="FFFFFF"/>
                     </a:solidFill>
                   </a:tcPr>
                 </a:tc>
+                <a:extLst>
+                  <a:ext uri="{0D108BD9-81ED-4DB2-BD59-A6C34878D82A}">
+                    <a16:rowId xmlns:a16="http://schemas.microsoft.com/office/drawing/2014/main" val="10003"/>
+                  </a:ext>
+                </a:extLst>
               </a:tr>
             </a:tbl>
           </a:graphicData>
@@ -19793,6 +24754,7 @@
           <a:lstStyle/>
           <a:p>
             <a:pPr algn="ctr"/>
+            <a:endParaRPr/>
           </a:p>
         </p:txBody>
       </p:sp>
@@ -19930,6 +24892,7 @@
           <a:lstStyle/>
           <a:p>
             <a:pPr algn="ctr"/>
+            <a:endParaRPr/>
           </a:p>
         </p:txBody>
       </p:sp>
@@ -20107,6 +25070,7 @@
           <a:lstStyle/>
           <a:p>
             <a:pPr algn="ctr"/>
+            <a:endParaRPr/>
           </a:p>
         </p:txBody>
       </p:sp>
@@ -20245,7 +25209,7 @@
 </file>
 
 <file path=ppt/slides/slide8.xml><?xml version="1.0" encoding="utf-8"?>
-<p:sld xmlns:a="http://schemas.openxmlformats.org/drawingml/2006/main" xmlns:p="http://schemas.openxmlformats.org/presentationml/2006/main" xmlns:r="http://schemas.openxmlformats.org/officeDocument/2006/relationships">
+<p:sld xmlns:a="http://schemas.openxmlformats.org/drawingml/2006/main" xmlns:r="http://schemas.openxmlformats.org/officeDocument/2006/relationships" xmlns:p="http://schemas.openxmlformats.org/presentationml/2006/main">
   <p:cSld>
     <p:spTree>
       <p:nvGrpSpPr>
@@ -20253,7 +25217,14 @@
         <p:cNvGrpSpPr/>
         <p:nvPr/>
       </p:nvGrpSpPr>
-      <p:grpSpPr/>
+      <p:grpSpPr>
+        <a:xfrm>
+          <a:off x="0" y="0"/>
+          <a:ext cx="0" cy="0"/>
+          <a:chOff x="0" y="0"/>
+          <a:chExt cx="0" cy="0"/>
+        </a:xfrm>
+      </p:grpSpPr>
       <p:sp>
         <p:nvSpPr>
           <p:cNvPr id="2" name="Rectangle 1"/>
@@ -20295,6 +25266,7 @@
           <a:lstStyle/>
           <a:p>
             <a:pPr algn="ctr"/>
+            <a:endParaRPr/>
           </a:p>
         </p:txBody>
       </p:sp>
@@ -20306,8 +25278,8 @@
         </p:nvSpPr>
         <p:spPr>
           <a:xfrm>
-            <a:off x="502920" y="475488"/>
-            <a:ext cx="310896" cy="310896"/>
+            <a:off x="554736" y="527304"/>
+            <a:ext cx="207264" cy="207264"/>
           </a:xfrm>
           <a:prstGeom prst="roundRect">
             <a:avLst>
@@ -20323,7 +25295,7 @@
                 <a:srgbClr val="73787E"/>
               </a:gs>
             </a:gsLst>
-            <a:lin scaled="0" ang="18900000"/>
+            <a:lin ang="18900000" scaled="0"/>
           </a:gradFill>
           <a:ln>
             <a:noFill/>
@@ -20355,6 +25327,7 @@
           <a:lstStyle/>
           <a:p>
             <a:pPr algn="ctr"/>
+            <a:endParaRPr/>
           </a:p>
         </p:txBody>
       </p:sp>
@@ -20424,7 +25397,7 @@
                 <a:srgbClr val="FFFFFF"/>
               </a:gs>
             </a:gsLst>
-            <a:lin scaled="0" ang="0"/>
+            <a:lin ang="0" scaled="0"/>
           </a:gradFill>
           <a:ln>
             <a:noFill/>
@@ -20450,6 +25423,7 @@
           <a:lstStyle/>
           <a:p>
             <a:pPr algn="ctr"/>
+            <a:endParaRPr/>
           </a:p>
         </p:txBody>
       </p:sp>
@@ -20558,8 +25532,20 @@
                 <a:tableStyleId>{5C22544A-7EE6-4342-B048-85BDC9FD1C3A}</a:tableStyleId>
               </a:tblPr>
               <a:tblGrid>
-                <a:gridCol w="5760720"/>
-                <a:gridCol w="5532120"/>
+                <a:gridCol w="5760720">
+                  <a:extLst>
+                    <a:ext uri="{9D8B030D-6E8A-4147-A177-3AD203B41FA5}">
+                      <a16:colId xmlns:a16="http://schemas.microsoft.com/office/drawing/2014/main" val="20000"/>
+                    </a:ext>
+                  </a:extLst>
+                </a:gridCol>
+                <a:gridCol w="5532120">
+                  <a:extLst>
+                    <a:ext uri="{9D8B030D-6E8A-4147-A177-3AD203B41FA5}">
+                      <a16:colId xmlns:a16="http://schemas.microsoft.com/office/drawing/2014/main" val="20001"/>
+                    </a:ext>
+                  </a:extLst>
+                </a:gridCol>
               </a:tblGrid>
               <a:tr h="475488">
                 <a:tc>
@@ -20584,7 +25570,7 @@
                       </a:r>
                     </a:p>
                   </a:txBody>
-                  <a:tcPr marT="27432" marB="27432" marL="73152" marR="73152" anchor="ctr">
+                  <a:tcPr marL="73152" marR="73152" marT="27432" marB="27432" anchor="ctr">
                     <a:solidFill>
                       <a:srgbClr val="33393F"/>
                     </a:solidFill>
@@ -20612,12 +25598,17 @@
                       </a:r>
                     </a:p>
                   </a:txBody>
-                  <a:tcPr marT="27432" marB="27432" marL="73152" marR="73152" anchor="ctr">
+                  <a:tcPr marL="73152" marR="73152" marT="27432" marB="27432" anchor="ctr">
                     <a:solidFill>
                       <a:srgbClr val="33393F"/>
                     </a:solidFill>
                   </a:tcPr>
                 </a:tc>
+                <a:extLst>
+                  <a:ext uri="{0D108BD9-81ED-4DB2-BD59-A6C34878D82A}">
+                    <a16:rowId xmlns:a16="http://schemas.microsoft.com/office/drawing/2014/main" val="10000"/>
+                  </a:ext>
+                </a:extLst>
               </a:tr>
               <a:tr h="475488">
                 <a:tc>
@@ -20642,7 +25633,7 @@
                       </a:r>
                     </a:p>
                   </a:txBody>
-                  <a:tcPr marT="27432" marB="27432" marL="73152" marR="73152" anchor="ctr">
+                  <a:tcPr marL="73152" marR="73152" marT="27432" marB="27432" anchor="ctr">
                     <a:solidFill>
                       <a:srgbClr val="FFFFFF"/>
                     </a:solidFill>
@@ -20670,12 +25661,17 @@
                       </a:r>
                     </a:p>
                   </a:txBody>
-                  <a:tcPr marT="27432" marB="27432" marL="73152" marR="73152" anchor="ctr">
+                  <a:tcPr marL="73152" marR="73152" marT="27432" marB="27432" anchor="ctr">
                     <a:solidFill>
                       <a:srgbClr val="FFFFFF"/>
                     </a:solidFill>
                   </a:tcPr>
                 </a:tc>
+                <a:extLst>
+                  <a:ext uri="{0D108BD9-81ED-4DB2-BD59-A6C34878D82A}">
+                    <a16:rowId xmlns:a16="http://schemas.microsoft.com/office/drawing/2014/main" val="10001"/>
+                  </a:ext>
+                </a:extLst>
               </a:tr>
               <a:tr h="475488">
                 <a:tc>
@@ -20700,7 +25696,7 @@
                       </a:r>
                     </a:p>
                   </a:txBody>
-                  <a:tcPr marT="27432" marB="27432" marL="73152" marR="73152" anchor="ctr">
+                  <a:tcPr marL="73152" marR="73152" marT="27432" marB="27432" anchor="ctr">
                     <a:solidFill>
                       <a:srgbClr val="F6F7F8"/>
                     </a:solidFill>
@@ -20728,12 +25724,17 @@
                       </a:r>
                     </a:p>
                   </a:txBody>
-                  <a:tcPr marT="27432" marB="27432" marL="73152" marR="73152" anchor="ctr">
+                  <a:tcPr marL="73152" marR="73152" marT="27432" marB="27432" anchor="ctr">
                     <a:solidFill>
                       <a:srgbClr val="F6F7F8"/>
                     </a:solidFill>
                   </a:tcPr>
                 </a:tc>
+                <a:extLst>
+                  <a:ext uri="{0D108BD9-81ED-4DB2-BD59-A6C34878D82A}">
+                    <a16:rowId xmlns:a16="http://schemas.microsoft.com/office/drawing/2014/main" val="10002"/>
+                  </a:ext>
+                </a:extLst>
               </a:tr>
             </a:tbl>
           </a:graphicData>
@@ -20790,6 +25791,7 @@
           <a:lstStyle/>
           <a:p>
             <a:pPr algn="ctr"/>
+            <a:endParaRPr/>
           </a:p>
         </p:txBody>
       </p:sp>
@@ -20907,6 +25909,7 @@
           <a:lstStyle/>
           <a:p>
             <a:pPr algn="ctr"/>
+            <a:endParaRPr/>
           </a:p>
         </p:txBody>
       </p:sp>
@@ -21024,6 +26027,7 @@
           <a:lstStyle/>
           <a:p>
             <a:pPr algn="ctr"/>
+            <a:endParaRPr/>
           </a:p>
         </p:txBody>
       </p:sp>
@@ -21141,6 +26145,7 @@
           <a:lstStyle/>
           <a:p>
             <a:pPr algn="ctr"/>
+            <a:endParaRPr/>
           </a:p>
         </p:txBody>
       </p:sp>
@@ -21256,7 +26261,7 @@
 </file>
 
 <file path=ppt/slides/slide9.xml><?xml version="1.0" encoding="utf-8"?>
-<p:sld xmlns:a="http://schemas.openxmlformats.org/drawingml/2006/main" xmlns:p="http://schemas.openxmlformats.org/presentationml/2006/main" xmlns:r="http://schemas.openxmlformats.org/officeDocument/2006/relationships">
+<p:sld xmlns:a="http://schemas.openxmlformats.org/drawingml/2006/main" xmlns:r="http://schemas.openxmlformats.org/officeDocument/2006/relationships" xmlns:p="http://schemas.openxmlformats.org/presentationml/2006/main">
   <p:cSld>
     <p:spTree>
       <p:nvGrpSpPr>
@@ -21264,7 +26269,14 @@
         <p:cNvGrpSpPr/>
         <p:nvPr/>
       </p:nvGrpSpPr>
-      <p:grpSpPr/>
+      <p:grpSpPr>
+        <a:xfrm>
+          <a:off x="0" y="0"/>
+          <a:ext cx="0" cy="0"/>
+          <a:chOff x="0" y="0"/>
+          <a:chExt cx="0" cy="0"/>
+        </a:xfrm>
+      </p:grpSpPr>
       <p:sp>
         <p:nvSpPr>
           <p:cNvPr id="2" name="Rectangle 1"/>
@@ -21306,6 +26318,7 @@
           <a:lstStyle/>
           <a:p>
             <a:pPr algn="ctr"/>
+            <a:endParaRPr/>
           </a:p>
         </p:txBody>
       </p:sp>
@@ -21317,8 +26330,8 @@
         </p:nvSpPr>
         <p:spPr>
           <a:xfrm>
-            <a:off x="502920" y="475488"/>
-            <a:ext cx="310896" cy="310896"/>
+            <a:off x="554736" y="527304"/>
+            <a:ext cx="207264" cy="207264"/>
           </a:xfrm>
           <a:prstGeom prst="roundRect">
             <a:avLst>
@@ -21334,7 +26347,7 @@
                 <a:srgbClr val="73787E"/>
               </a:gs>
             </a:gsLst>
-            <a:lin scaled="0" ang="18900000"/>
+            <a:lin ang="18900000" scaled="0"/>
           </a:gradFill>
           <a:ln>
             <a:noFill/>
@@ -21366,6 +26379,7 @@
           <a:lstStyle/>
           <a:p>
             <a:pPr algn="ctr"/>
+            <a:endParaRPr/>
           </a:p>
         </p:txBody>
       </p:sp>
@@ -21435,7 +26449,7 @@
                 <a:srgbClr val="FFFFFF"/>
               </a:gs>
             </a:gsLst>
-            <a:lin scaled="0" ang="0"/>
+            <a:lin ang="0" scaled="0"/>
           </a:gradFill>
           <a:ln>
             <a:noFill/>
@@ -21461,6 +26475,7 @@
           <a:lstStyle/>
           <a:p>
             <a:pPr algn="ctr"/>
+            <a:endParaRPr/>
           </a:p>
         </p:txBody>
       </p:sp>
@@ -21601,6 +26616,7 @@
           <a:lstStyle/>
           <a:p>
             <a:pPr algn="ctr"/>
+            <a:endParaRPr/>
           </a:p>
         </p:txBody>
       </p:sp>
@@ -21769,10 +26785,34 @@
                 <a:tableStyleId>{5C22544A-7EE6-4342-B048-85BDC9FD1C3A}</a:tableStyleId>
               </a:tblPr>
               <a:tblGrid>
-                <a:gridCol w="822960"/>
-                <a:gridCol w="822960"/>
-                <a:gridCol w="914400"/>
-                <a:gridCol w="2971800"/>
+                <a:gridCol w="822960">
+                  <a:extLst>
+                    <a:ext uri="{9D8B030D-6E8A-4147-A177-3AD203B41FA5}">
+                      <a16:colId xmlns:a16="http://schemas.microsoft.com/office/drawing/2014/main" val="20000"/>
+                    </a:ext>
+                  </a:extLst>
+                </a:gridCol>
+                <a:gridCol w="822960">
+                  <a:extLst>
+                    <a:ext uri="{9D8B030D-6E8A-4147-A177-3AD203B41FA5}">
+                      <a16:colId xmlns:a16="http://schemas.microsoft.com/office/drawing/2014/main" val="20001"/>
+                    </a:ext>
+                  </a:extLst>
+                </a:gridCol>
+                <a:gridCol w="914400">
+                  <a:extLst>
+                    <a:ext uri="{9D8B030D-6E8A-4147-A177-3AD203B41FA5}">
+                      <a16:colId xmlns:a16="http://schemas.microsoft.com/office/drawing/2014/main" val="20002"/>
+                    </a:ext>
+                  </a:extLst>
+                </a:gridCol>
+                <a:gridCol w="2971800">
+                  <a:extLst>
+                    <a:ext uri="{9D8B030D-6E8A-4147-A177-3AD203B41FA5}">
+                      <a16:colId xmlns:a16="http://schemas.microsoft.com/office/drawing/2014/main" val="20003"/>
+                    </a:ext>
+                  </a:extLst>
+                </a:gridCol>
               </a:tblGrid>
               <a:tr h="438912">
                 <a:tc>
@@ -21797,7 +26837,7 @@
                       </a:r>
                     </a:p>
                   </a:txBody>
-                  <a:tcPr marT="27432" marB="27432" marL="73152" marR="73152" anchor="ctr">
+                  <a:tcPr marL="73152" marR="73152" marT="27432" marB="27432" anchor="ctr">
                     <a:solidFill>
                       <a:srgbClr val="33393F"/>
                     </a:solidFill>
@@ -21825,7 +26865,7 @@
                       </a:r>
                     </a:p>
                   </a:txBody>
-                  <a:tcPr marT="27432" marB="27432" marL="73152" marR="73152" anchor="ctr">
+                  <a:tcPr marL="73152" marR="73152" marT="27432" marB="27432" anchor="ctr">
                     <a:solidFill>
                       <a:srgbClr val="33393F"/>
                     </a:solidFill>
@@ -21853,7 +26893,7 @@
                       </a:r>
                     </a:p>
                   </a:txBody>
-                  <a:tcPr marT="27432" marB="27432" marL="73152" marR="73152" anchor="ctr">
+                  <a:tcPr marL="73152" marR="73152" marT="27432" marB="27432" anchor="ctr">
                     <a:solidFill>
                       <a:srgbClr val="33393F"/>
                     </a:solidFill>
@@ -21881,12 +26921,17 @@
                       </a:r>
                     </a:p>
                   </a:txBody>
-                  <a:tcPr marT="27432" marB="27432" marL="73152" marR="73152" anchor="ctr">
+                  <a:tcPr marL="73152" marR="73152" marT="27432" marB="27432" anchor="ctr">
                     <a:solidFill>
                       <a:srgbClr val="33393F"/>
                     </a:solidFill>
                   </a:tcPr>
                 </a:tc>
+                <a:extLst>
+                  <a:ext uri="{0D108BD9-81ED-4DB2-BD59-A6C34878D82A}">
+                    <a16:rowId xmlns:a16="http://schemas.microsoft.com/office/drawing/2014/main" val="10000"/>
+                  </a:ext>
+                </a:extLst>
               </a:tr>
               <a:tr h="438912">
                 <a:tc>
@@ -21911,7 +26956,7 @@
                       </a:r>
                     </a:p>
                   </a:txBody>
-                  <a:tcPr marT="27432" marB="27432" marL="73152" marR="73152" anchor="ctr">
+                  <a:tcPr marL="73152" marR="73152" marT="27432" marB="27432" anchor="ctr">
                     <a:solidFill>
                       <a:srgbClr val="FFFFFF"/>
                     </a:solidFill>
@@ -21939,7 +26984,7 @@
                       </a:r>
                     </a:p>
                   </a:txBody>
-                  <a:tcPr marT="27432" marB="27432" marL="73152" marR="73152" anchor="ctr">
+                  <a:tcPr marL="73152" marR="73152" marT="27432" marB="27432" anchor="ctr">
                     <a:solidFill>
                       <a:srgbClr val="FFFFFF"/>
                     </a:solidFill>
@@ -21967,7 +27012,7 @@
                       </a:r>
                     </a:p>
                   </a:txBody>
-                  <a:tcPr marT="27432" marB="27432" marL="73152" marR="73152" anchor="ctr">
+                  <a:tcPr marL="73152" marR="73152" marT="27432" marB="27432" anchor="ctr">
                     <a:solidFill>
                       <a:srgbClr val="FFFFFF"/>
                     </a:solidFill>
@@ -21995,12 +27040,17 @@
                       </a:r>
                     </a:p>
                   </a:txBody>
-                  <a:tcPr marT="27432" marB="27432" marL="73152" marR="73152" anchor="ctr">
+                  <a:tcPr marL="73152" marR="73152" marT="27432" marB="27432" anchor="ctr">
                     <a:solidFill>
                       <a:srgbClr val="FFFFFF"/>
                     </a:solidFill>
                   </a:tcPr>
                 </a:tc>
+                <a:extLst>
+                  <a:ext uri="{0D108BD9-81ED-4DB2-BD59-A6C34878D82A}">
+                    <a16:rowId xmlns:a16="http://schemas.microsoft.com/office/drawing/2014/main" val="10001"/>
+                  </a:ext>
+                </a:extLst>
               </a:tr>
               <a:tr h="438912">
                 <a:tc>
@@ -22025,7 +27075,7 @@
                       </a:r>
                     </a:p>
                   </a:txBody>
-                  <a:tcPr marT="27432" marB="27432" marL="73152" marR="73152" anchor="ctr">
+                  <a:tcPr marL="73152" marR="73152" marT="27432" marB="27432" anchor="ctr">
                     <a:solidFill>
                       <a:srgbClr val="E3E5E8"/>
                     </a:solidFill>
@@ -22053,7 +27103,7 @@
                       </a:r>
                     </a:p>
                   </a:txBody>
-                  <a:tcPr marT="27432" marB="27432" marL="73152" marR="73152" anchor="ctr">
+                  <a:tcPr marL="73152" marR="73152" marT="27432" marB="27432" anchor="ctr">
                     <a:solidFill>
                       <a:srgbClr val="E3E5E8"/>
                     </a:solidFill>
@@ -22081,7 +27131,7 @@
                       </a:r>
                     </a:p>
                   </a:txBody>
-                  <a:tcPr marT="27432" marB="27432" marL="73152" marR="73152" anchor="ctr">
+                  <a:tcPr marL="73152" marR="73152" marT="27432" marB="27432" anchor="ctr">
                     <a:solidFill>
                       <a:srgbClr val="E3E5E8"/>
                     </a:solidFill>
@@ -22109,12 +27159,17 @@
                       </a:r>
                     </a:p>
                   </a:txBody>
-                  <a:tcPr marT="27432" marB="27432" marL="73152" marR="73152" anchor="ctr">
+                  <a:tcPr marL="73152" marR="73152" marT="27432" marB="27432" anchor="ctr">
                     <a:solidFill>
                       <a:srgbClr val="E3E5E8"/>
                     </a:solidFill>
                   </a:tcPr>
                 </a:tc>
+                <a:extLst>
+                  <a:ext uri="{0D108BD9-81ED-4DB2-BD59-A6C34878D82A}">
+                    <a16:rowId xmlns:a16="http://schemas.microsoft.com/office/drawing/2014/main" val="10002"/>
+                  </a:ext>
+                </a:extLst>
               </a:tr>
               <a:tr h="438912">
                 <a:tc>
@@ -22139,7 +27194,7 @@
                       </a:r>
                     </a:p>
                   </a:txBody>
-                  <a:tcPr marT="27432" marB="27432" marL="73152" marR="73152" anchor="ctr">
+                  <a:tcPr marL="73152" marR="73152" marT="27432" marB="27432" anchor="ctr">
                     <a:solidFill>
                       <a:srgbClr val="FFFFFF"/>
                     </a:solidFill>
@@ -22167,7 +27222,7 @@
                       </a:r>
                     </a:p>
                   </a:txBody>
-                  <a:tcPr marT="27432" marB="27432" marL="73152" marR="73152" anchor="ctr">
+                  <a:tcPr marL="73152" marR="73152" marT="27432" marB="27432" anchor="ctr">
                     <a:solidFill>
                       <a:srgbClr val="FFFFFF"/>
                     </a:solidFill>
@@ -22195,7 +27250,7 @@
                       </a:r>
                     </a:p>
                   </a:txBody>
-                  <a:tcPr marT="27432" marB="27432" marL="73152" marR="73152" anchor="ctr">
+                  <a:tcPr marL="73152" marR="73152" marT="27432" marB="27432" anchor="ctr">
                     <a:solidFill>
                       <a:srgbClr val="FFFFFF"/>
                     </a:solidFill>
@@ -22223,12 +27278,17 @@
                       </a:r>
                     </a:p>
                   </a:txBody>
-                  <a:tcPr marT="27432" marB="27432" marL="73152" marR="73152" anchor="ctr">
+                  <a:tcPr marL="73152" marR="73152" marT="27432" marB="27432" anchor="ctr">
                     <a:solidFill>
                       <a:srgbClr val="FFFFFF"/>
                     </a:solidFill>
                   </a:tcPr>
                 </a:tc>
+                <a:extLst>
+                  <a:ext uri="{0D108BD9-81ED-4DB2-BD59-A6C34878D82A}">
+                    <a16:rowId xmlns:a16="http://schemas.microsoft.com/office/drawing/2014/main" val="10003"/>
+                  </a:ext>
+                </a:extLst>
               </a:tr>
             </a:tbl>
           </a:graphicData>
@@ -22285,6 +27345,7 @@
           <a:lstStyle/>
           <a:p>
             <a:pPr algn="ctr"/>
+            <a:endParaRPr/>
           </a:p>
         </p:txBody>
       </p:sp>

--- a/05_작업자료/_PPT생성본/데이터분석_결과보고서.pptx
+++ b/05_작업자료/_PPT생성본/데이터분석_결과보고서.pptx
@@ -5,29 +5,29 @@
     <p:sldMasterId id="2147483648" r:id="rId1"/>
   </p:sldMasterIdLst>
   <p:sldIdLst>
-    <p:sldId id="256" r:id="rId2"/>
-    <p:sldId id="276" r:id="rId26"/>
-    <p:sldId id="257" r:id="rId3"/>
-    <p:sldId id="258" r:id="rId4"/>
-    <p:sldId id="259" r:id="rId5"/>
-    <p:sldId id="260" r:id="rId6"/>
-    <p:sldId id="261" r:id="rId7"/>
-    <p:sldId id="262" r:id="rId8"/>
-    <p:sldId id="263" r:id="rId9"/>
-    <p:sldId id="264" r:id="rId10"/>
-    <p:sldId id="265" r:id="rId11"/>
-    <p:sldId id="266" r:id="rId12"/>
-    <p:sldId id="267" r:id="rId13"/>
-    <p:sldId id="268" r:id="rId14"/>
-    <p:sldId id="269" r:id="rId15"/>
-    <p:sldId id="270" r:id="rId16"/>
-    <p:sldId id="271" r:id="rId17"/>
-    <p:sldId id="272" r:id="rId18"/>
-    <p:sldId id="273" r:id="rId19"/>
-    <p:sldId id="274" r:id="rId20"/>
-    <p:sldId id="275" r:id="rId21"/>
+    <p:sldId id="256" r:id="rId7"/>
+    <p:sldId id="257" r:id="rId8"/>
+    <p:sldId id="258" r:id="rId9"/>
+    <p:sldId id="259" r:id="rId10"/>
+    <p:sldId id="260" r:id="rId11"/>
+    <p:sldId id="261" r:id="rId12"/>
+    <p:sldId id="262" r:id="rId13"/>
+    <p:sldId id="263" r:id="rId14"/>
+    <p:sldId id="264" r:id="rId15"/>
+    <p:sldId id="265" r:id="rId16"/>
+    <p:sldId id="266" r:id="rId17"/>
+    <p:sldId id="267" r:id="rId18"/>
+    <p:sldId id="268" r:id="rId19"/>
+    <p:sldId id="269" r:id="rId20"/>
+    <p:sldId id="270" r:id="rId21"/>
+    <p:sldId id="271" r:id="rId22"/>
+    <p:sldId id="272" r:id="rId23"/>
+    <p:sldId id="273" r:id="rId24"/>
+    <p:sldId id="274" r:id="rId25"/>
+    <p:sldId id="275" r:id="rId26"/>
+    <p:sldId id="276" r:id="rId27"/>
   </p:sldIdLst>
-  <p:sldSz cx="12192000" cy="6858000"/>
+  <p:sldSz cx="12191695" cy="6858000" type="screen4x3"/>
   <p:notesSz cx="6858000" cy="9144000"/>
   <p:defaultTextStyle>
     <a:defPPr>
@@ -124,22 +124,6 @@
       </a:defRPr>
     </a:lvl9pPr>
   </p:defaultTextStyle>
-  <p:extLst>
-    <p:ext uri="{EFAFB233-063F-42B5-8137-9DF3F51BA10A}">
-      <p15:sldGuideLst xmlns:p15="http://schemas.microsoft.com/office/powerpoint/2012/main">
-        <p15:guide id="1" orient="horz" pos="2160">
-          <p15:clr>
-            <a:srgbClr val="A4A3A4"/>
-          </p15:clr>
-        </p15:guide>
-        <p15:guide id="2" pos="2880">
-          <p15:clr>
-            <a:srgbClr val="A4A3A4"/>
-          </p15:clr>
-        </p15:guide>
-      </p15:sldGuideLst>
-    </p:ext>
-  </p:extLst>
 </p:presentation>
 </file>
 
@@ -181,9 +165,10 @@
           <a:lstStyle/>
           <a:p>
             <a:r>
-              <a:rPr lang="en-US"/>
+              <a:rPr lang="en-US" smtClean="0"/>
               <a:t>Click to edit Master title style</a:t>
             </a:r>
+            <a:endParaRPr lang="en-US"/>
           </a:p>
         </p:txBody>
       </p:sp>
@@ -299,9 +284,10 @@
           </a:lstStyle>
           <a:p>
             <a:r>
-              <a:rPr lang="en-US"/>
+              <a:rPr lang="en-US" smtClean="0"/>
               <a:t>Click to edit Master subtitle style</a:t>
             </a:r>
+            <a:endParaRPr lang="en-US"/>
           </a:p>
         </p:txBody>
       </p:sp>
@@ -322,7 +308,7 @@
           <a:p>
             <a:fld id="{5BCAD085-E8A6-8845-BD4E-CB4CCA059FC4}" type="datetimeFigureOut">
               <a:rPr lang="en-US" smtClean="0"/>
-              <a:t>8/12/2026</a:t>
+              <a:t>1/27/13</a:t>
             </a:fld>
             <a:endParaRPr lang="en-US"/>
           </a:p>
@@ -416,9 +402,10 @@
           <a:lstStyle/>
           <a:p>
             <a:r>
-              <a:rPr lang="en-US"/>
+              <a:rPr lang="en-US" smtClean="0"/>
               <a:t>Click to edit Master title style</a:t>
             </a:r>
+            <a:endParaRPr lang="en-US"/>
           </a:p>
         </p:txBody>
       </p:sp>
@@ -439,37 +426,38 @@
           <a:p>
             <a:pPr lvl="0"/>
             <a:r>
-              <a:rPr lang="en-US"/>
+              <a:rPr lang="en-US" smtClean="0"/>
               <a:t>Click to edit Master text styles</a:t>
             </a:r>
           </a:p>
           <a:p>
             <a:pPr lvl="1"/>
             <a:r>
-              <a:rPr lang="en-US"/>
+              <a:rPr lang="en-US" smtClean="0"/>
               <a:t>Second level</a:t>
             </a:r>
           </a:p>
           <a:p>
             <a:pPr lvl="2"/>
             <a:r>
-              <a:rPr lang="en-US"/>
+              <a:rPr lang="en-US" smtClean="0"/>
               <a:t>Third level</a:t>
             </a:r>
           </a:p>
           <a:p>
             <a:pPr lvl="3"/>
             <a:r>
-              <a:rPr lang="en-US"/>
+              <a:rPr lang="en-US" smtClean="0"/>
               <a:t>Fourth level</a:t>
             </a:r>
           </a:p>
           <a:p>
             <a:pPr lvl="4"/>
             <a:r>
-              <a:rPr lang="en-US"/>
+              <a:rPr lang="en-US" smtClean="0"/>
               <a:t>Fifth level</a:t>
             </a:r>
+            <a:endParaRPr lang="en-US"/>
           </a:p>
         </p:txBody>
       </p:sp>
@@ -490,7 +478,7 @@
           <a:p>
             <a:fld id="{5BCAD085-E8A6-8845-BD4E-CB4CCA059FC4}" type="datetimeFigureOut">
               <a:rPr lang="en-US" smtClean="0"/>
-              <a:t>8/12/2026</a:t>
+              <a:t>1/27/13</a:t>
             </a:fld>
             <a:endParaRPr lang="en-US"/>
           </a:p>
@@ -589,9 +577,10 @@
           <a:lstStyle/>
           <a:p>
             <a:r>
-              <a:rPr lang="en-US"/>
+              <a:rPr lang="en-US" smtClean="0"/>
               <a:t>Click to edit Master title style</a:t>
             </a:r>
+            <a:endParaRPr lang="en-US"/>
           </a:p>
         </p:txBody>
       </p:sp>
@@ -617,37 +606,38 @@
           <a:p>
             <a:pPr lvl="0"/>
             <a:r>
-              <a:rPr lang="en-US"/>
+              <a:rPr lang="en-US" smtClean="0"/>
               <a:t>Click to edit Master text styles</a:t>
             </a:r>
           </a:p>
           <a:p>
             <a:pPr lvl="1"/>
             <a:r>
-              <a:rPr lang="en-US"/>
+              <a:rPr lang="en-US" smtClean="0"/>
               <a:t>Second level</a:t>
             </a:r>
           </a:p>
           <a:p>
             <a:pPr lvl="2"/>
             <a:r>
-              <a:rPr lang="en-US"/>
+              <a:rPr lang="en-US" smtClean="0"/>
               <a:t>Third level</a:t>
             </a:r>
           </a:p>
           <a:p>
             <a:pPr lvl="3"/>
             <a:r>
-              <a:rPr lang="en-US"/>
+              <a:rPr lang="en-US" smtClean="0"/>
               <a:t>Fourth level</a:t>
             </a:r>
           </a:p>
           <a:p>
             <a:pPr lvl="4"/>
             <a:r>
-              <a:rPr lang="en-US"/>
+              <a:rPr lang="en-US" smtClean="0"/>
               <a:t>Fifth level</a:t>
             </a:r>
+            <a:endParaRPr lang="en-US"/>
           </a:p>
         </p:txBody>
       </p:sp>
@@ -668,7 +658,7 @@
           <a:p>
             <a:fld id="{5BCAD085-E8A6-8845-BD4E-CB4CCA059FC4}" type="datetimeFigureOut">
               <a:rPr lang="en-US" smtClean="0"/>
-              <a:t>8/12/2026</a:t>
+              <a:t>1/27/13</a:t>
             </a:fld>
             <a:endParaRPr lang="en-US"/>
           </a:p>
@@ -762,9 +752,10 @@
           <a:lstStyle/>
           <a:p>
             <a:r>
-              <a:rPr lang="en-US"/>
+              <a:rPr lang="en-US" smtClean="0"/>
               <a:t>Click to edit Master title style</a:t>
             </a:r>
+            <a:endParaRPr lang="en-US"/>
           </a:p>
         </p:txBody>
       </p:sp>
@@ -785,37 +776,38 @@
           <a:p>
             <a:pPr lvl="0"/>
             <a:r>
-              <a:rPr lang="en-US"/>
+              <a:rPr lang="en-US" smtClean="0"/>
               <a:t>Click to edit Master text styles</a:t>
             </a:r>
           </a:p>
           <a:p>
             <a:pPr lvl="1"/>
             <a:r>
-              <a:rPr lang="en-US"/>
+              <a:rPr lang="en-US" smtClean="0"/>
               <a:t>Second level</a:t>
             </a:r>
           </a:p>
           <a:p>
             <a:pPr lvl="2"/>
             <a:r>
-              <a:rPr lang="en-US"/>
+              <a:rPr lang="en-US" smtClean="0"/>
               <a:t>Third level</a:t>
             </a:r>
           </a:p>
           <a:p>
             <a:pPr lvl="3"/>
             <a:r>
-              <a:rPr lang="en-US"/>
+              <a:rPr lang="en-US" smtClean="0"/>
               <a:t>Fourth level</a:t>
             </a:r>
           </a:p>
           <a:p>
             <a:pPr lvl="4"/>
             <a:r>
-              <a:rPr lang="en-US"/>
+              <a:rPr lang="en-US" smtClean="0"/>
               <a:t>Fifth level</a:t>
             </a:r>
+            <a:endParaRPr lang="en-US"/>
           </a:p>
         </p:txBody>
       </p:sp>
@@ -836,7 +828,7 @@
           <a:p>
             <a:fld id="{5BCAD085-E8A6-8845-BD4E-CB4CCA059FC4}" type="datetimeFigureOut">
               <a:rPr lang="en-US" smtClean="0"/>
-              <a:t>8/12/2026</a:t>
+              <a:t>1/27/13</a:t>
             </a:fld>
             <a:endParaRPr lang="en-US"/>
           </a:p>
@@ -939,9 +931,10 @@
           </a:lstStyle>
           <a:p>
             <a:r>
-              <a:rPr lang="en-US"/>
+              <a:rPr lang="en-US" smtClean="0"/>
               <a:t>Click to edit Master title style</a:t>
             </a:r>
+            <a:endParaRPr lang="en-US"/>
           </a:p>
         </p:txBody>
       </p:sp>
@@ -1058,7 +1051,7 @@
           <a:p>
             <a:pPr lvl="0"/>
             <a:r>
-              <a:rPr lang="en-US"/>
+              <a:rPr lang="en-US" smtClean="0"/>
               <a:t>Click to edit Master text styles</a:t>
             </a:r>
           </a:p>
@@ -1081,7 +1074,7 @@
           <a:p>
             <a:fld id="{5BCAD085-E8A6-8845-BD4E-CB4CCA059FC4}" type="datetimeFigureOut">
               <a:rPr lang="en-US" smtClean="0"/>
-              <a:t>8/12/2026</a:t>
+              <a:t>1/27/13</a:t>
             </a:fld>
             <a:endParaRPr lang="en-US"/>
           </a:p>
@@ -1175,9 +1168,10 @@
           <a:lstStyle/>
           <a:p>
             <a:r>
-              <a:rPr lang="en-US"/>
+              <a:rPr lang="en-US" smtClean="0"/>
               <a:t>Click to edit Master title style</a:t>
             </a:r>
+            <a:endParaRPr lang="en-US"/>
           </a:p>
         </p:txBody>
       </p:sp>
@@ -1231,37 +1225,38 @@
           <a:p>
             <a:pPr lvl="0"/>
             <a:r>
-              <a:rPr lang="en-US"/>
+              <a:rPr lang="en-US" smtClean="0"/>
               <a:t>Click to edit Master text styles</a:t>
             </a:r>
           </a:p>
           <a:p>
             <a:pPr lvl="1"/>
             <a:r>
-              <a:rPr lang="en-US"/>
+              <a:rPr lang="en-US" smtClean="0"/>
               <a:t>Second level</a:t>
             </a:r>
           </a:p>
           <a:p>
             <a:pPr lvl="2"/>
             <a:r>
-              <a:rPr lang="en-US"/>
+              <a:rPr lang="en-US" smtClean="0"/>
               <a:t>Third level</a:t>
             </a:r>
           </a:p>
           <a:p>
             <a:pPr lvl="3"/>
             <a:r>
-              <a:rPr lang="en-US"/>
+              <a:rPr lang="en-US" smtClean="0"/>
               <a:t>Fourth level</a:t>
             </a:r>
           </a:p>
           <a:p>
             <a:pPr lvl="4"/>
             <a:r>
-              <a:rPr lang="en-US"/>
+              <a:rPr lang="en-US" smtClean="0"/>
               <a:t>Fifth level</a:t>
             </a:r>
+            <a:endParaRPr lang="en-US"/>
           </a:p>
         </p:txBody>
       </p:sp>
@@ -1315,37 +1310,38 @@
           <a:p>
             <a:pPr lvl="0"/>
             <a:r>
-              <a:rPr lang="en-US"/>
+              <a:rPr lang="en-US" smtClean="0"/>
               <a:t>Click to edit Master text styles</a:t>
             </a:r>
           </a:p>
           <a:p>
             <a:pPr lvl="1"/>
             <a:r>
-              <a:rPr lang="en-US"/>
+              <a:rPr lang="en-US" smtClean="0"/>
               <a:t>Second level</a:t>
             </a:r>
           </a:p>
           <a:p>
             <a:pPr lvl="2"/>
             <a:r>
-              <a:rPr lang="en-US"/>
+              <a:rPr lang="en-US" smtClean="0"/>
               <a:t>Third level</a:t>
             </a:r>
           </a:p>
           <a:p>
             <a:pPr lvl="3"/>
             <a:r>
-              <a:rPr lang="en-US"/>
+              <a:rPr lang="en-US" smtClean="0"/>
               <a:t>Fourth level</a:t>
             </a:r>
           </a:p>
           <a:p>
             <a:pPr lvl="4"/>
             <a:r>
-              <a:rPr lang="en-US"/>
+              <a:rPr lang="en-US" smtClean="0"/>
               <a:t>Fifth level</a:t>
             </a:r>
+            <a:endParaRPr lang="en-US"/>
           </a:p>
         </p:txBody>
       </p:sp>
@@ -1366,7 +1362,7 @@
           <a:p>
             <a:fld id="{5BCAD085-E8A6-8845-BD4E-CB4CCA059FC4}" type="datetimeFigureOut">
               <a:rPr lang="en-US" smtClean="0"/>
-              <a:t>8/12/2026</a:t>
+              <a:t>1/27/13</a:t>
             </a:fld>
             <a:endParaRPr lang="en-US"/>
           </a:p>
@@ -1464,9 +1460,10 @@
           </a:lstStyle>
           <a:p>
             <a:r>
-              <a:rPr lang="en-US"/>
+              <a:rPr lang="en-US" smtClean="0"/>
               <a:t>Click to edit Master title style</a:t>
             </a:r>
+            <a:endParaRPr lang="en-US"/>
           </a:p>
         </p:txBody>
       </p:sp>
@@ -1529,7 +1526,7 @@
           <a:p>
             <a:pPr lvl="0"/>
             <a:r>
-              <a:rPr lang="en-US"/>
+              <a:rPr lang="en-US" smtClean="0"/>
               <a:t>Click to edit Master text styles</a:t>
             </a:r>
           </a:p>
@@ -1585,37 +1582,38 @@
           <a:p>
             <a:pPr lvl="0"/>
             <a:r>
-              <a:rPr lang="en-US"/>
+              <a:rPr lang="en-US" smtClean="0"/>
               <a:t>Click to edit Master text styles</a:t>
             </a:r>
           </a:p>
           <a:p>
             <a:pPr lvl="1"/>
             <a:r>
-              <a:rPr lang="en-US"/>
+              <a:rPr lang="en-US" smtClean="0"/>
               <a:t>Second level</a:t>
             </a:r>
           </a:p>
           <a:p>
             <a:pPr lvl="2"/>
             <a:r>
-              <a:rPr lang="en-US"/>
+              <a:rPr lang="en-US" smtClean="0"/>
               <a:t>Third level</a:t>
             </a:r>
           </a:p>
           <a:p>
             <a:pPr lvl="3"/>
             <a:r>
-              <a:rPr lang="en-US"/>
+              <a:rPr lang="en-US" smtClean="0"/>
               <a:t>Fourth level</a:t>
             </a:r>
           </a:p>
           <a:p>
             <a:pPr lvl="4"/>
             <a:r>
-              <a:rPr lang="en-US"/>
+              <a:rPr lang="en-US" smtClean="0"/>
               <a:t>Fifth level</a:t>
             </a:r>
+            <a:endParaRPr lang="en-US"/>
           </a:p>
         </p:txBody>
       </p:sp>
@@ -1678,7 +1676,7 @@
           <a:p>
             <a:pPr lvl="0"/>
             <a:r>
-              <a:rPr lang="en-US"/>
+              <a:rPr lang="en-US" smtClean="0"/>
               <a:t>Click to edit Master text styles</a:t>
             </a:r>
           </a:p>
@@ -1734,37 +1732,38 @@
           <a:p>
             <a:pPr lvl="0"/>
             <a:r>
-              <a:rPr lang="en-US"/>
+              <a:rPr lang="en-US" smtClean="0"/>
               <a:t>Click to edit Master text styles</a:t>
             </a:r>
           </a:p>
           <a:p>
             <a:pPr lvl="1"/>
             <a:r>
-              <a:rPr lang="en-US"/>
+              <a:rPr lang="en-US" smtClean="0"/>
               <a:t>Second level</a:t>
             </a:r>
           </a:p>
           <a:p>
             <a:pPr lvl="2"/>
             <a:r>
-              <a:rPr lang="en-US"/>
+              <a:rPr lang="en-US" smtClean="0"/>
               <a:t>Third level</a:t>
             </a:r>
           </a:p>
           <a:p>
             <a:pPr lvl="3"/>
             <a:r>
-              <a:rPr lang="en-US"/>
+              <a:rPr lang="en-US" smtClean="0"/>
               <a:t>Fourth level</a:t>
             </a:r>
           </a:p>
           <a:p>
             <a:pPr lvl="4"/>
             <a:r>
-              <a:rPr lang="en-US"/>
+              <a:rPr lang="en-US" smtClean="0"/>
               <a:t>Fifth level</a:t>
             </a:r>
+            <a:endParaRPr lang="en-US"/>
           </a:p>
         </p:txBody>
       </p:sp>
@@ -1785,7 +1784,7 @@
           <a:p>
             <a:fld id="{5BCAD085-E8A6-8845-BD4E-CB4CCA059FC4}" type="datetimeFigureOut">
               <a:rPr lang="en-US" smtClean="0"/>
-              <a:t>8/12/2026</a:t>
+              <a:t>1/27/13</a:t>
             </a:fld>
             <a:endParaRPr lang="en-US"/>
           </a:p>
@@ -1879,9 +1878,10 @@
           <a:lstStyle/>
           <a:p>
             <a:r>
-              <a:rPr lang="en-US"/>
+              <a:rPr lang="en-US" smtClean="0"/>
               <a:t>Click to edit Master title style</a:t>
             </a:r>
+            <a:endParaRPr lang="en-US"/>
           </a:p>
         </p:txBody>
       </p:sp>
@@ -1902,7 +1902,7 @@
           <a:p>
             <a:fld id="{5BCAD085-E8A6-8845-BD4E-CB4CCA059FC4}" type="datetimeFigureOut">
               <a:rPr lang="en-US" smtClean="0"/>
-              <a:t>8/12/2026</a:t>
+              <a:t>1/27/13</a:t>
             </a:fld>
             <a:endParaRPr lang="en-US"/>
           </a:p>
@@ -1997,7 +1997,7 @@
           <a:p>
             <a:fld id="{5BCAD085-E8A6-8845-BD4E-CB4CCA059FC4}" type="datetimeFigureOut">
               <a:rPr lang="en-US" smtClean="0"/>
-              <a:t>8/12/2026</a:t>
+              <a:t>1/27/13</a:t>
             </a:fld>
             <a:endParaRPr lang="en-US"/>
           </a:p>
@@ -2100,9 +2100,10 @@
           </a:lstStyle>
           <a:p>
             <a:r>
-              <a:rPr lang="en-US"/>
+              <a:rPr lang="en-US" smtClean="0"/>
               <a:t>Click to edit Master title style</a:t>
             </a:r>
+            <a:endParaRPr lang="en-US"/>
           </a:p>
         </p:txBody>
       </p:sp>
@@ -2156,37 +2157,38 @@
           <a:p>
             <a:pPr lvl="0"/>
             <a:r>
-              <a:rPr lang="en-US"/>
+              <a:rPr lang="en-US" smtClean="0"/>
               <a:t>Click to edit Master text styles</a:t>
             </a:r>
           </a:p>
           <a:p>
             <a:pPr lvl="1"/>
             <a:r>
-              <a:rPr lang="en-US"/>
+              <a:rPr lang="en-US" smtClean="0"/>
               <a:t>Second level</a:t>
             </a:r>
           </a:p>
           <a:p>
             <a:pPr lvl="2"/>
             <a:r>
-              <a:rPr lang="en-US"/>
+              <a:rPr lang="en-US" smtClean="0"/>
               <a:t>Third level</a:t>
             </a:r>
           </a:p>
           <a:p>
             <a:pPr lvl="3"/>
             <a:r>
-              <a:rPr lang="en-US"/>
+              <a:rPr lang="en-US" smtClean="0"/>
               <a:t>Fourth level</a:t>
             </a:r>
           </a:p>
           <a:p>
             <a:pPr lvl="4"/>
             <a:r>
-              <a:rPr lang="en-US"/>
+              <a:rPr lang="en-US" smtClean="0"/>
               <a:t>Fifth level</a:t>
             </a:r>
+            <a:endParaRPr lang="en-US"/>
           </a:p>
         </p:txBody>
       </p:sp>
@@ -2249,7 +2251,7 @@
           <a:p>
             <a:pPr lvl="0"/>
             <a:r>
-              <a:rPr lang="en-US"/>
+              <a:rPr lang="en-US" smtClean="0"/>
               <a:t>Click to edit Master text styles</a:t>
             </a:r>
           </a:p>
@@ -2272,7 +2274,7 @@
           <a:p>
             <a:fld id="{5BCAD085-E8A6-8845-BD4E-CB4CCA059FC4}" type="datetimeFigureOut">
               <a:rPr lang="en-US" smtClean="0"/>
-              <a:t>8/12/2026</a:t>
+              <a:t>1/27/13</a:t>
             </a:fld>
             <a:endParaRPr lang="en-US"/>
           </a:p>
@@ -2375,9 +2377,10 @@
           </a:lstStyle>
           <a:p>
             <a:r>
-              <a:rPr lang="en-US"/>
+              <a:rPr lang="en-US" smtClean="0"/>
               <a:t>Click to edit Master title style</a:t>
             </a:r>
+            <a:endParaRPr lang="en-US"/>
           </a:p>
         </p:txBody>
       </p:sp>
@@ -2501,7 +2504,7 @@
           <a:p>
             <a:pPr lvl="0"/>
             <a:r>
-              <a:rPr lang="en-US"/>
+              <a:rPr lang="en-US" smtClean="0"/>
               <a:t>Click to edit Master text styles</a:t>
             </a:r>
           </a:p>
@@ -2524,7 +2527,7 @@
           <a:p>
             <a:fld id="{5BCAD085-E8A6-8845-BD4E-CB4CCA059FC4}" type="datetimeFigureOut">
               <a:rPr lang="en-US" smtClean="0"/>
-              <a:t>8/12/2026</a:t>
+              <a:t>1/27/13</a:t>
             </a:fld>
             <a:endParaRPr lang="en-US"/>
           </a:p>
@@ -2633,9 +2636,10 @@
           <a:lstStyle/>
           <a:p>
             <a:r>
-              <a:rPr lang="en-US"/>
+              <a:rPr lang="en-US" smtClean="0"/>
               <a:t>Click to edit Master title style</a:t>
             </a:r>
+            <a:endParaRPr lang="en-US"/>
           </a:p>
         </p:txBody>
       </p:sp>
@@ -2666,37 +2670,38 @@
           <a:p>
             <a:pPr lvl="0"/>
             <a:r>
-              <a:rPr lang="en-US"/>
+              <a:rPr lang="en-US" smtClean="0"/>
               <a:t>Click to edit Master text styles</a:t>
             </a:r>
           </a:p>
           <a:p>
             <a:pPr lvl="1"/>
             <a:r>
-              <a:rPr lang="en-US"/>
+              <a:rPr lang="en-US" smtClean="0"/>
               <a:t>Second level</a:t>
             </a:r>
           </a:p>
           <a:p>
             <a:pPr lvl="2"/>
             <a:r>
-              <a:rPr lang="en-US"/>
+              <a:rPr lang="en-US" smtClean="0"/>
               <a:t>Third level</a:t>
             </a:r>
           </a:p>
           <a:p>
             <a:pPr lvl="3"/>
             <a:r>
-              <a:rPr lang="en-US"/>
+              <a:rPr lang="en-US" smtClean="0"/>
               <a:t>Fourth level</a:t>
             </a:r>
           </a:p>
           <a:p>
             <a:pPr lvl="4"/>
             <a:r>
-              <a:rPr lang="en-US"/>
+              <a:rPr lang="en-US" smtClean="0"/>
               <a:t>Fifth level</a:t>
             </a:r>
+            <a:endParaRPr lang="en-US"/>
           </a:p>
         </p:txBody>
       </p:sp>
@@ -2735,7 +2740,7 @@
           <a:p>
             <a:fld id="{5BCAD085-E8A6-8845-BD4E-CB4CCA059FC4}" type="datetimeFigureOut">
               <a:rPr lang="en-US" smtClean="0"/>
-              <a:t>8/12/2026</a:t>
+              <a:t>1/27/13</a:t>
             </a:fld>
             <a:endParaRPr lang="en-US"/>
           </a:p>
@@ -3094,7 +3099,7 @@
 </file>
 
 <file path=ppt/slides/slide1.xml><?xml version="1.0" encoding="utf-8"?>
-<p:sld xmlns:a="http://schemas.openxmlformats.org/drawingml/2006/main" xmlns:r="http://schemas.openxmlformats.org/officeDocument/2006/relationships" xmlns:p="http://schemas.openxmlformats.org/presentationml/2006/main">
+<p:sld xmlns:a="http://schemas.openxmlformats.org/drawingml/2006/main" xmlns:p="http://schemas.openxmlformats.org/presentationml/2006/main" xmlns:r="http://schemas.openxmlformats.org/officeDocument/2006/relationships">
   <p:cSld>
     <p:spTree>
       <p:nvGrpSpPr>
@@ -3102,14 +3107,51 @@
         <p:cNvGrpSpPr/>
         <p:nvPr/>
       </p:nvGrpSpPr>
-      <p:grpSpPr>
-        <a:xfrm>
-          <a:off x="0" y="0"/>
-          <a:ext cx="0" cy="0"/>
-          <a:chOff x="0" y="0"/>
-          <a:chExt cx="0" cy="0"/>
-        </a:xfrm>
-      </p:grpSpPr>
+      <p:grpSpPr/>
+      <p:sp>
+        <p:nvSpPr>
+          <p:cNvPr id="2" name="Rectangle 1"/>
+          <p:cNvSpPr/>
+          <p:nvPr/>
+        </p:nvSpPr>
+        <p:spPr>
+          <a:xfrm>
+            <a:off x="0" y="0"/>
+            <a:ext cx="12191695" cy="6858000"/>
+          </a:xfrm>
+          <a:prstGeom prst="rect">
+            <a:avLst/>
+          </a:prstGeom>
+          <a:solidFill>
+            <a:srgbClr val="FFFFFF"/>
+          </a:solidFill>
+          <a:ln>
+            <a:noFill/>
+          </a:ln>
+          <a:effectLst/>
+        </p:spPr>
+        <p:style>
+          <a:lnRef idx="1">
+            <a:schemeClr val="accent1"/>
+          </a:lnRef>
+          <a:fillRef idx="3">
+            <a:schemeClr val="accent1"/>
+          </a:fillRef>
+          <a:effectRef idx="2">
+            <a:schemeClr val="accent1"/>
+          </a:effectRef>
+          <a:fontRef idx="minor">
+            <a:schemeClr val="lt1"/>
+          </a:fontRef>
+        </p:style>
+        <p:txBody>
+          <a:bodyPr rtlCol="0" anchor="ctr"/>
+          <a:lstStyle/>
+          <a:p>
+            <a:pPr algn="ctr"/>
+          </a:p>
+        </p:txBody>
+      </p:sp>
       <p:sp>
         <p:nvSpPr>
           <p:cNvPr id="3" name="Rounded Rectangle 2"/>
@@ -3135,7 +3177,7 @@
                 <a:srgbClr val="73787E"/>
               </a:gs>
             </a:gsLst>
-            <a:lin ang="18900000" scaled="0"/>
+            <a:lin scaled="0" ang="18900000"/>
           </a:gradFill>
           <a:ln>
             <a:noFill/>
@@ -3167,7 +3209,6 @@
           <a:lstStyle/>
           <a:p>
             <a:pPr algn="ctr"/>
-            <a:endParaRPr/>
           </a:p>
         </p:txBody>
       </p:sp>
@@ -3179,8 +3220,8 @@
         </p:nvSpPr>
         <p:spPr>
           <a:xfrm>
-            <a:off x="914399" y="1481328"/>
-            <a:ext cx="8464063" cy="1769267"/>
+            <a:off x="914400" y="1481328"/>
+            <a:ext cx="8467344" cy="1764792"/>
           </a:xfrm>
           <a:prstGeom prst="rect">
             <a:avLst/>
@@ -3202,62 +3243,15 @@
               </a:spcAft>
             </a:pPr>
             <a:r>
-              <a:rPr sz="1450" b="0" dirty="0" err="1">
+              <a:rPr sz="1450" b="0">
                 <a:solidFill>
                   <a:srgbClr val="767A7F"/>
                 </a:solidFill>
                 <a:latin typeface="맑은 고딕"/>
                 <a:ea typeface="맑은 고딕"/>
               </a:rPr>
-              <a:t>데이터</a:t>
-            </a:r>
-            <a:r>
-              <a:rPr sz="1450" b="0" dirty="0">
-                <a:solidFill>
-                  <a:srgbClr val="767A7F"/>
-                </a:solidFill>
-                <a:latin typeface="맑은 고딕"/>
-                <a:ea typeface="맑은 고딕"/>
-              </a:rPr>
-              <a:t> </a:t>
-            </a:r>
-            <a:r>
-              <a:rPr sz="1450" b="0" dirty="0" err="1">
-                <a:solidFill>
-                  <a:srgbClr val="767A7F"/>
-                </a:solidFill>
-                <a:latin typeface="맑은 고딕"/>
-                <a:ea typeface="맑은 고딕"/>
-              </a:rPr>
-              <a:t>분석</a:t>
-            </a:r>
-            <a:r>
-              <a:rPr sz="1450" b="0" dirty="0">
-                <a:solidFill>
-                  <a:srgbClr val="767A7F"/>
-                </a:solidFill>
-                <a:latin typeface="맑은 고딕"/>
-                <a:ea typeface="맑은 고딕"/>
-              </a:rPr>
-              <a:t> </a:t>
-            </a:r>
-            <a:r>
-              <a:rPr sz="1450" b="0" dirty="0" err="1">
-                <a:solidFill>
-                  <a:srgbClr val="767A7F"/>
-                </a:solidFill>
-                <a:latin typeface="맑은 고딕"/>
-                <a:ea typeface="맑은 고딕"/>
-              </a:rPr>
-              <a:t>결과보고서</a:t>
-            </a:r>
-            <a:endParaRPr sz="1450" b="0" dirty="0">
-              <a:solidFill>
-                <a:srgbClr val="767A7F"/>
-              </a:solidFill>
-              <a:latin typeface="맑은 고딕"/>
-              <a:ea typeface="맑은 고딕"/>
-            </a:endParaRPr>
+              <a:t>데이터 분석 결과보고서</a:t>
+            </a:r>
           </a:p>
           <a:p>
             <a:pPr>
@@ -3269,7 +3263,7 @@
               </a:spcAft>
             </a:pPr>
             <a:r>
-              <a:rPr lang="ko-KR" altLang="en-US" sz="4700" b="1" dirty="0">
+              <a:rPr sz="4700" b="1">
                 <a:solidFill>
                   <a:srgbClr val="1C1C1E"/>
                 </a:solidFill>
@@ -3278,13 +3272,6 @@
               </a:rPr>
               <a:t>분만취약지 지원제도 개선안</a:t>
             </a:r>
-            <a:endParaRPr lang="en-US" altLang="ko-KR" sz="1900" dirty="0">
-              <a:solidFill>
-                <a:srgbClr val="33393F"/>
-              </a:solidFill>
-              <a:latin typeface="맑은 고딕"/>
-              <a:ea typeface="맑은 고딕"/>
-            </a:endParaRPr>
           </a:p>
           <a:p>
             <a:pPr>
@@ -3292,156 +3279,19 @@
                 <a:spcPct val="114000"/>
               </a:lnSpc>
               <a:spcAft>
-                <a:spcPts val="800"/>
-              </a:spcAft>
-            </a:pPr>
-            <a:r>
-              <a:rPr sz="1900" b="0" dirty="0" err="1">
+                <a:spcPts val="0"/>
+              </a:spcAft>
+            </a:pPr>
+            <a:r>
+              <a:rPr sz="1900" b="0">
                 <a:solidFill>
                   <a:srgbClr val="33393F"/>
                 </a:solidFill>
                 <a:latin typeface="맑은 고딕"/>
                 <a:ea typeface="맑은 고딕"/>
               </a:rPr>
-              <a:t>분만취약지</a:t>
-            </a:r>
-            <a:r>
-              <a:rPr sz="1900" b="0" dirty="0">
-                <a:solidFill>
-                  <a:srgbClr val="33393F"/>
-                </a:solidFill>
-                <a:latin typeface="맑은 고딕"/>
-                <a:ea typeface="맑은 고딕"/>
-              </a:rPr>
-              <a:t> </a:t>
-            </a:r>
-            <a:r>
-              <a:rPr lang="ko-KR" altLang="en-US" sz="1900" b="0" dirty="0">
-                <a:solidFill>
-                  <a:srgbClr val="33393F"/>
-                </a:solidFill>
-                <a:latin typeface="맑은 고딕"/>
-                <a:ea typeface="맑은 고딕"/>
-              </a:rPr>
-              <a:t>지원 </a:t>
-            </a:r>
-            <a:r>
-              <a:rPr sz="1900" b="0" dirty="0" err="1">
-                <a:solidFill>
-                  <a:srgbClr val="33393F"/>
-                </a:solidFill>
-                <a:latin typeface="맑은 고딕"/>
-                <a:ea typeface="맑은 고딕"/>
-              </a:rPr>
-              <a:t>제도의</a:t>
-            </a:r>
-            <a:r>
-              <a:rPr sz="1900" b="0" dirty="0">
-                <a:solidFill>
-                  <a:srgbClr val="33393F"/>
-                </a:solidFill>
-                <a:latin typeface="맑은 고딕"/>
-                <a:ea typeface="맑은 고딕"/>
-              </a:rPr>
-              <a:t> </a:t>
-            </a:r>
-            <a:r>
-              <a:rPr lang="ko-KR" altLang="en-US" sz="1900" b="0" dirty="0">
-                <a:solidFill>
-                  <a:srgbClr val="33393F"/>
-                </a:solidFill>
-                <a:latin typeface="맑은 고딕"/>
-                <a:ea typeface="맑은 고딕"/>
-              </a:rPr>
-              <a:t>모든 절차 속 데이터</a:t>
-            </a:r>
-            <a:r>
-              <a:rPr sz="1900" b="0" dirty="0">
-                <a:solidFill>
-                  <a:srgbClr val="33393F"/>
-                </a:solidFill>
-                <a:latin typeface="맑은 고딕"/>
-                <a:ea typeface="맑은 고딕"/>
-              </a:rPr>
-              <a:t> </a:t>
-            </a:r>
-            <a:r>
-              <a:rPr sz="1900" b="0" dirty="0" err="1">
-                <a:solidFill>
-                  <a:srgbClr val="33393F"/>
-                </a:solidFill>
-                <a:latin typeface="맑은 고딕"/>
-                <a:ea typeface="맑은 고딕"/>
-              </a:rPr>
-              <a:t>감사와</a:t>
-            </a:r>
-            <a:r>
-              <a:rPr sz="1900" b="0" dirty="0">
-                <a:solidFill>
-                  <a:srgbClr val="33393F"/>
-                </a:solidFill>
-                <a:latin typeface="맑은 고딕"/>
-                <a:ea typeface="맑은 고딕"/>
-              </a:rPr>
-              <a:t> </a:t>
-            </a:r>
-            <a:r>
-              <a:rPr lang="ko-KR" altLang="en-US" sz="1900" dirty="0">
-                <a:solidFill>
-                  <a:srgbClr val="33393F"/>
-                </a:solidFill>
-                <a:latin typeface="맑은 고딕"/>
-                <a:ea typeface="맑은 고딕"/>
-              </a:rPr>
-              <a:t>개선된 분석</a:t>
-            </a:r>
-            <a:r>
-              <a:rPr sz="1900" b="0" dirty="0">
-                <a:solidFill>
-                  <a:srgbClr val="33393F"/>
-                </a:solidFill>
-                <a:latin typeface="맑은 고딕"/>
-                <a:ea typeface="맑은 고딕"/>
-              </a:rPr>
-              <a:t> </a:t>
-            </a:r>
-            <a:r>
-              <a:rPr sz="1900" b="0" dirty="0" err="1">
-                <a:solidFill>
-                  <a:srgbClr val="33393F"/>
-                </a:solidFill>
-                <a:latin typeface="맑은 고딕"/>
-                <a:ea typeface="맑은 고딕"/>
-              </a:rPr>
-              <a:t>모형</a:t>
-            </a:r>
-            <a:r>
-              <a:rPr lang="en-US" sz="1900" b="0" dirty="0">
-                <a:solidFill>
-                  <a:srgbClr val="33393F"/>
-                </a:solidFill>
-                <a:latin typeface="맑은 고딕"/>
-                <a:ea typeface="맑은 고딕"/>
-              </a:rPr>
-              <a:t> </a:t>
-            </a:r>
-            <a:r>
-              <a:rPr lang="ko-KR" altLang="en-US" sz="1900" b="0" dirty="0">
-                <a:solidFill>
-                  <a:srgbClr val="33393F"/>
-                </a:solidFill>
-                <a:latin typeface="맑은 고딕"/>
-                <a:ea typeface="맑은 고딕"/>
-              </a:rPr>
-              <a:t>제안</a:t>
-            </a:r>
-            <a:endParaRPr sz="1900" b="0" dirty="0">
-              <a:solidFill>
-                <a:srgbClr val="33393F"/>
-              </a:solidFill>
-              <a:latin typeface="맑은 고딕"/>
-              <a:ea typeface="맑은 고딕"/>
-            </a:endParaRPr>
+              <a:t>분만취약지 지원 제도의 모든 절차 속 데이터 감사와 개선된 분석 모형 제안</a:t>
+            </a:r>
           </a:p>
         </p:txBody>
       </p:sp>
@@ -3468,7 +3318,7 @@
                 <a:srgbClr val="FFFFFF"/>
               </a:gs>
             </a:gsLst>
-            <a:lin ang="0" scaled="0"/>
+            <a:lin scaled="0" ang="0"/>
           </a:gradFill>
           <a:ln>
             <a:noFill/>
@@ -3494,7 +3344,6 @@
           <a:lstStyle/>
           <a:p>
             <a:pPr algn="ctr"/>
-            <a:endParaRPr/>
           </a:p>
         </p:txBody>
       </p:sp>
@@ -3507,7 +3356,7 @@
         <p:spPr>
           <a:xfrm>
             <a:off x="914400" y="4663440"/>
-            <a:ext cx="6949440" cy="307777"/>
+            <a:ext cx="6949440" cy="310896"/>
           </a:xfrm>
           <a:prstGeom prst="rect">
             <a:avLst/>
@@ -3525,156 +3374,19 @@
                 <a:spcPct val="114000"/>
               </a:lnSpc>
               <a:spcAft>
-                <a:spcPts val="600"/>
-              </a:spcAft>
-            </a:pPr>
-            <a:r>
-              <a:rPr sz="1350" b="1" dirty="0">
+                <a:spcPts val="0"/>
+              </a:spcAft>
+            </a:pPr>
+            <a:r>
+              <a:rPr sz="1350" b="1">
                 <a:solidFill>
                   <a:srgbClr val="1C1C1E"/>
                 </a:solidFill>
                 <a:latin typeface="맑은 고딕"/>
                 <a:ea typeface="맑은 고딕"/>
               </a:rPr>
-              <a:t>2026 제5회 </a:t>
-            </a:r>
-            <a:r>
-              <a:rPr sz="1350" b="1" dirty="0" err="1">
-                <a:solidFill>
-                  <a:srgbClr val="1C1C1E"/>
-                </a:solidFill>
-                <a:latin typeface="맑은 고딕"/>
-                <a:ea typeface="맑은 고딕"/>
-              </a:rPr>
-              <a:t>명지대학교</a:t>
-            </a:r>
-            <a:r>
-              <a:rPr sz="1350" b="1" dirty="0">
-                <a:solidFill>
-                  <a:srgbClr val="1C1C1E"/>
-                </a:solidFill>
-                <a:latin typeface="맑은 고딕"/>
-                <a:ea typeface="맑은 고딕"/>
-              </a:rPr>
-              <a:t> </a:t>
-            </a:r>
-            <a:r>
-              <a:rPr sz="1350" b="1" dirty="0" err="1">
-                <a:solidFill>
-                  <a:srgbClr val="1C1C1E"/>
-                </a:solidFill>
-                <a:latin typeface="맑은 고딕"/>
-                <a:ea typeface="맑은 고딕"/>
-              </a:rPr>
-              <a:t>창의적</a:t>
-            </a:r>
-            <a:r>
-              <a:rPr sz="1350" b="1" dirty="0">
-                <a:solidFill>
-                  <a:srgbClr val="1C1C1E"/>
-                </a:solidFill>
-                <a:latin typeface="맑은 고딕"/>
-                <a:ea typeface="맑은 고딕"/>
-              </a:rPr>
-              <a:t> </a:t>
-            </a:r>
-            <a:r>
-              <a:rPr sz="1350" b="1" dirty="0" err="1">
-                <a:solidFill>
-                  <a:srgbClr val="1C1C1E"/>
-                </a:solidFill>
-                <a:latin typeface="맑은 고딕"/>
-                <a:ea typeface="맑은 고딕"/>
-              </a:rPr>
-              <a:t>SW프로그램</a:t>
-            </a:r>
-            <a:r>
-              <a:rPr sz="1350" b="1" dirty="0">
-                <a:solidFill>
-                  <a:srgbClr val="1C1C1E"/>
-                </a:solidFill>
-                <a:latin typeface="맑은 고딕"/>
-                <a:ea typeface="맑은 고딕"/>
-              </a:rPr>
-              <a:t> </a:t>
-            </a:r>
-            <a:r>
-              <a:rPr sz="1350" b="1" dirty="0" err="1">
-                <a:solidFill>
-                  <a:srgbClr val="1C1C1E"/>
-                </a:solidFill>
-                <a:latin typeface="맑은 고딕"/>
-                <a:ea typeface="맑은 고딕"/>
-              </a:rPr>
-              <a:t>경진대회</a:t>
-            </a:r>
-            <a:r>
-              <a:rPr sz="1350" b="1" dirty="0">
-                <a:solidFill>
-                  <a:srgbClr val="1C1C1E"/>
-                </a:solidFill>
-                <a:latin typeface="맑은 고딕"/>
-                <a:ea typeface="맑은 고딕"/>
-              </a:rPr>
-              <a:t> · </a:t>
-            </a:r>
-            <a:r>
-              <a:rPr sz="1350" b="1" dirty="0" err="1">
-                <a:solidFill>
-                  <a:srgbClr val="1C1C1E"/>
-                </a:solidFill>
-                <a:latin typeface="맑은 고딕"/>
-                <a:ea typeface="맑은 고딕"/>
-              </a:rPr>
-              <a:t>빅데이터</a:t>
-            </a:r>
-            <a:r>
-              <a:rPr sz="1350" b="1" dirty="0">
-                <a:solidFill>
-                  <a:srgbClr val="1C1C1E"/>
-                </a:solidFill>
-                <a:latin typeface="맑은 고딕"/>
-                <a:ea typeface="맑은 고딕"/>
-              </a:rPr>
-              <a:t> </a:t>
-            </a:r>
-            <a:r>
-              <a:rPr sz="1350" b="1" dirty="0" err="1">
-                <a:solidFill>
-                  <a:srgbClr val="1C1C1E"/>
-                </a:solidFill>
-                <a:latin typeface="맑은 고딕"/>
-                <a:ea typeface="맑은 고딕"/>
-              </a:rPr>
-              <a:t>분석</a:t>
-            </a:r>
-            <a:r>
-              <a:rPr sz="1350" b="1" dirty="0">
-                <a:solidFill>
-                  <a:srgbClr val="1C1C1E"/>
-                </a:solidFill>
-                <a:latin typeface="맑은 고딕"/>
-                <a:ea typeface="맑은 고딕"/>
-              </a:rPr>
-              <a:t> </a:t>
-            </a:r>
-            <a:r>
-              <a:rPr sz="1350" b="1" dirty="0" err="1">
-                <a:solidFill>
-                  <a:srgbClr val="1C1C1E"/>
-                </a:solidFill>
-                <a:latin typeface="맑은 고딕"/>
-                <a:ea typeface="맑은 고딕"/>
-              </a:rPr>
-              <a:t>부문</a:t>
-            </a:r>
-            <a:endParaRPr sz="1350" b="1" dirty="0">
-              <a:solidFill>
-                <a:srgbClr val="1C1C1E"/>
-              </a:solidFill>
-              <a:latin typeface="맑은 고딕"/>
-              <a:ea typeface="맑은 고딕"/>
-            </a:endParaRPr>
+              <a:t>2026 제5회 명지대학교 창의적 SW프로그램 경진대회 · 빅데이터 분석 부문</a:t>
+            </a:r>
           </a:p>
         </p:txBody>
       </p:sp>
@@ -3687,7 +3399,7 @@
 </file>
 
 <file path=ppt/slides/slide10.xml><?xml version="1.0" encoding="utf-8"?>
-<p:sld xmlns:a="http://schemas.openxmlformats.org/drawingml/2006/main" xmlns:r="http://schemas.openxmlformats.org/officeDocument/2006/relationships" xmlns:p="http://schemas.openxmlformats.org/presentationml/2006/main">
+<p:sld xmlns:a="http://schemas.openxmlformats.org/drawingml/2006/main" xmlns:p="http://schemas.openxmlformats.org/presentationml/2006/main" xmlns:r="http://schemas.openxmlformats.org/officeDocument/2006/relationships">
   <p:cSld>
     <p:spTree>
       <p:nvGrpSpPr>
@@ -3695,14 +3407,7 @@
         <p:cNvGrpSpPr/>
         <p:nvPr/>
       </p:nvGrpSpPr>
-      <p:grpSpPr>
-        <a:xfrm>
-          <a:off x="0" y="0"/>
-          <a:ext cx="0" cy="0"/>
-          <a:chOff x="0" y="0"/>
-          <a:chExt cx="0" cy="0"/>
-        </a:xfrm>
-      </p:grpSpPr>
+      <p:grpSpPr/>
       <p:sp>
         <p:nvSpPr>
           <p:cNvPr id="2" name="Rectangle 1"/>
@@ -3744,7 +3449,6 @@
           <a:lstStyle/>
           <a:p>
             <a:pPr algn="ctr"/>
-            <a:endParaRPr/>
           </a:p>
         </p:txBody>
       </p:sp>
@@ -3756,8 +3460,8 @@
         </p:nvSpPr>
         <p:spPr>
           <a:xfrm>
-            <a:off x="554736" y="527304"/>
-            <a:ext cx="207264" cy="207264"/>
+            <a:off x="606247" y="578815"/>
+            <a:ext cx="104241" cy="104241"/>
           </a:xfrm>
           <a:prstGeom prst="roundRect">
             <a:avLst>
@@ -3773,7 +3477,7 @@
                 <a:srgbClr val="73787E"/>
               </a:gs>
             </a:gsLst>
-            <a:lin ang="18900000" scaled="0"/>
+            <a:lin scaled="0" ang="18900000"/>
           </a:gradFill>
           <a:ln>
             <a:noFill/>
@@ -3805,7 +3509,6 @@
           <a:lstStyle/>
           <a:p>
             <a:pPr algn="ctr"/>
-            <a:endParaRPr/>
           </a:p>
         </p:txBody>
       </p:sp>
@@ -3875,7 +3578,7 @@
                 <a:srgbClr val="FFFFFF"/>
               </a:gs>
             </a:gsLst>
-            <a:lin ang="0" scaled="0"/>
+            <a:lin scaled="0" ang="0"/>
           </a:gradFill>
           <a:ln>
             <a:noFill/>
@@ -3901,7 +3604,6 @@
           <a:lstStyle/>
           <a:p>
             <a:pPr algn="ctr"/>
-            <a:endParaRPr/>
           </a:p>
         </p:txBody>
       </p:sp>
@@ -4059,7 +3761,7 @@
                 <a:srgbClr val="4A4F55"/>
               </a:gs>
             </a:gsLst>
-            <a:lin ang="14700000" scaled="0"/>
+            <a:lin scaled="0" ang="14700000"/>
           </a:gradFill>
           <a:ln>
             <a:noFill/>
@@ -4091,7 +3793,6 @@
           <a:lstStyle/>
           <a:p>
             <a:pPr algn="ctr"/>
-            <a:endParaRPr/>
           </a:p>
         </p:txBody>
       </p:sp>
@@ -4209,7 +3910,6 @@
           <a:lstStyle/>
           <a:p>
             <a:pPr algn="ctr"/>
-            <a:endParaRPr/>
           </a:p>
         </p:txBody>
       </p:sp>
@@ -4367,7 +4067,6 @@
           <a:lstStyle/>
           <a:p>
             <a:pPr algn="ctr"/>
-            <a:endParaRPr/>
           </a:p>
         </p:txBody>
       </p:sp>
@@ -4503,7 +4202,7 @@
 </file>
 
 <file path=ppt/slides/slide11.xml><?xml version="1.0" encoding="utf-8"?>
-<p:sld xmlns:a="http://schemas.openxmlformats.org/drawingml/2006/main" xmlns:r="http://schemas.openxmlformats.org/officeDocument/2006/relationships" xmlns:p="http://schemas.openxmlformats.org/presentationml/2006/main">
+<p:sld xmlns:a="http://schemas.openxmlformats.org/drawingml/2006/main" xmlns:p="http://schemas.openxmlformats.org/presentationml/2006/main" xmlns:r="http://schemas.openxmlformats.org/officeDocument/2006/relationships">
   <p:cSld>
     <p:spTree>
       <p:nvGrpSpPr>
@@ -4511,14 +4210,7 @@
         <p:cNvGrpSpPr/>
         <p:nvPr/>
       </p:nvGrpSpPr>
-      <p:grpSpPr>
-        <a:xfrm>
-          <a:off x="0" y="0"/>
-          <a:ext cx="0" cy="0"/>
-          <a:chOff x="0" y="0"/>
-          <a:chExt cx="0" cy="0"/>
-        </a:xfrm>
-      </p:grpSpPr>
+      <p:grpSpPr/>
       <p:sp>
         <p:nvSpPr>
           <p:cNvPr id="2" name="Rectangle 1"/>
@@ -4560,7 +4252,6 @@
           <a:lstStyle/>
           <a:p>
             <a:pPr algn="ctr"/>
-            <a:endParaRPr/>
           </a:p>
         </p:txBody>
       </p:sp>
@@ -4572,8 +4263,8 @@
         </p:nvSpPr>
         <p:spPr>
           <a:xfrm>
-            <a:off x="554736" y="527304"/>
-            <a:ext cx="207264" cy="207264"/>
+            <a:off x="606247" y="578815"/>
+            <a:ext cx="104241" cy="104241"/>
           </a:xfrm>
           <a:prstGeom prst="roundRect">
             <a:avLst>
@@ -4589,7 +4280,7 @@
                 <a:srgbClr val="73787E"/>
               </a:gs>
             </a:gsLst>
-            <a:lin ang="18900000" scaled="0"/>
+            <a:lin scaled="0" ang="18900000"/>
           </a:gradFill>
           <a:ln>
             <a:noFill/>
@@ -4621,7 +4312,6 @@
           <a:lstStyle/>
           <a:p>
             <a:pPr algn="ctr"/>
-            <a:endParaRPr/>
           </a:p>
         </p:txBody>
       </p:sp>
@@ -4691,7 +4381,7 @@
                 <a:srgbClr val="FFFFFF"/>
               </a:gs>
             </a:gsLst>
-            <a:lin ang="0" scaled="0"/>
+            <a:lin scaled="0" ang="0"/>
           </a:gradFill>
           <a:ln>
             <a:noFill/>
@@ -4717,7 +4407,6 @@
           <a:lstStyle/>
           <a:p>
             <a:pPr algn="ctr"/>
-            <a:endParaRPr/>
           </a:p>
         </p:txBody>
       </p:sp>
@@ -4826,27 +4515,9 @@
                 <a:tableStyleId>{5C22544A-7EE6-4342-B048-85BDC9FD1C3A}</a:tableStyleId>
               </a:tblPr>
               <a:tblGrid>
-                <a:gridCol w="3291840">
-                  <a:extLst>
-                    <a:ext uri="{9D8B030D-6E8A-4147-A177-3AD203B41FA5}">
-                      <a16:colId xmlns:a16="http://schemas.microsoft.com/office/drawing/2014/main" val="20000"/>
-                    </a:ext>
-                  </a:extLst>
-                </a:gridCol>
-                <a:gridCol w="4846320">
-                  <a:extLst>
-                    <a:ext uri="{9D8B030D-6E8A-4147-A177-3AD203B41FA5}">
-                      <a16:colId xmlns:a16="http://schemas.microsoft.com/office/drawing/2014/main" val="20001"/>
-                    </a:ext>
-                  </a:extLst>
-                </a:gridCol>
-                <a:gridCol w="3154680">
-                  <a:extLst>
-                    <a:ext uri="{9D8B030D-6E8A-4147-A177-3AD203B41FA5}">
-                      <a16:colId xmlns:a16="http://schemas.microsoft.com/office/drawing/2014/main" val="20002"/>
-                    </a:ext>
-                  </a:extLst>
-                </a:gridCol>
+                <a:gridCol w="3291840"/>
+                <a:gridCol w="4846320"/>
+                <a:gridCol w="3154680"/>
               </a:tblGrid>
               <a:tr h="512064">
                 <a:tc>
@@ -4871,7 +4542,7 @@
                       </a:r>
                     </a:p>
                   </a:txBody>
-                  <a:tcPr marL="73152" marR="73152" marT="27432" marB="27432" anchor="ctr">
+                  <a:tcPr marT="27432" marB="27432" marL="73152" marR="73152" anchor="ctr">
                     <a:solidFill>
                       <a:srgbClr val="33393F"/>
                     </a:solidFill>
@@ -4899,7 +4570,7 @@
                       </a:r>
                     </a:p>
                   </a:txBody>
-                  <a:tcPr marL="73152" marR="73152" marT="27432" marB="27432" anchor="ctr">
+                  <a:tcPr marT="27432" marB="27432" marL="73152" marR="73152" anchor="ctr">
                     <a:solidFill>
                       <a:srgbClr val="33393F"/>
                     </a:solidFill>
@@ -4927,17 +4598,12 @@
                       </a:r>
                     </a:p>
                   </a:txBody>
-                  <a:tcPr marL="73152" marR="73152" marT="27432" marB="27432" anchor="ctr">
+                  <a:tcPr marT="27432" marB="27432" marL="73152" marR="73152" anchor="ctr">
                     <a:solidFill>
                       <a:srgbClr val="33393F"/>
                     </a:solidFill>
                   </a:tcPr>
                 </a:tc>
-                <a:extLst>
-                  <a:ext uri="{0D108BD9-81ED-4DB2-BD59-A6C34878D82A}">
-                    <a16:rowId xmlns:a16="http://schemas.microsoft.com/office/drawing/2014/main" val="10000"/>
-                  </a:ext>
-                </a:extLst>
               </a:tr>
               <a:tr h="512064">
                 <a:tc>
@@ -4962,7 +4628,7 @@
                       </a:r>
                     </a:p>
                   </a:txBody>
-                  <a:tcPr marL="73152" marR="73152" marT="27432" marB="27432" anchor="ctr">
+                  <a:tcPr marT="27432" marB="27432" marL="73152" marR="73152" anchor="ctr">
                     <a:solidFill>
                       <a:srgbClr val="E3E5E8"/>
                     </a:solidFill>
@@ -4990,7 +4656,7 @@
                       </a:r>
                     </a:p>
                   </a:txBody>
-                  <a:tcPr marL="73152" marR="73152" marT="27432" marB="27432" anchor="ctr">
+                  <a:tcPr marT="27432" marB="27432" marL="73152" marR="73152" anchor="ctr">
                     <a:solidFill>
                       <a:srgbClr val="E3E5E8"/>
                     </a:solidFill>
@@ -5018,17 +4684,12 @@
                       </a:r>
                     </a:p>
                   </a:txBody>
-                  <a:tcPr marL="73152" marR="73152" marT="27432" marB="27432" anchor="ctr">
+                  <a:tcPr marT="27432" marB="27432" marL="73152" marR="73152" anchor="ctr">
                     <a:solidFill>
                       <a:srgbClr val="E3E5E8"/>
                     </a:solidFill>
                   </a:tcPr>
                 </a:tc>
-                <a:extLst>
-                  <a:ext uri="{0D108BD9-81ED-4DB2-BD59-A6C34878D82A}">
-                    <a16:rowId xmlns:a16="http://schemas.microsoft.com/office/drawing/2014/main" val="10001"/>
-                  </a:ext>
-                </a:extLst>
               </a:tr>
               <a:tr h="512064">
                 <a:tc>
@@ -5053,7 +4714,7 @@
                       </a:r>
                     </a:p>
                   </a:txBody>
-                  <a:tcPr marL="73152" marR="73152" marT="27432" marB="27432" anchor="ctr">
+                  <a:tcPr marT="27432" marB="27432" marL="73152" marR="73152" anchor="ctr">
                     <a:solidFill>
                       <a:srgbClr val="F6F7F8"/>
                     </a:solidFill>
@@ -5081,7 +4742,7 @@
                       </a:r>
                     </a:p>
                   </a:txBody>
-                  <a:tcPr marL="73152" marR="73152" marT="27432" marB="27432" anchor="ctr">
+                  <a:tcPr marT="27432" marB="27432" marL="73152" marR="73152" anchor="ctr">
                     <a:solidFill>
                       <a:srgbClr val="F6F7F8"/>
                     </a:solidFill>
@@ -5109,17 +4770,12 @@
                       </a:r>
                     </a:p>
                   </a:txBody>
-                  <a:tcPr marL="73152" marR="73152" marT="27432" marB="27432" anchor="ctr">
+                  <a:tcPr marT="27432" marB="27432" marL="73152" marR="73152" anchor="ctr">
                     <a:solidFill>
                       <a:srgbClr val="F6F7F8"/>
                     </a:solidFill>
                   </a:tcPr>
                 </a:tc>
-                <a:extLst>
-                  <a:ext uri="{0D108BD9-81ED-4DB2-BD59-A6C34878D82A}">
-                    <a16:rowId xmlns:a16="http://schemas.microsoft.com/office/drawing/2014/main" val="10002"/>
-                  </a:ext>
-                </a:extLst>
               </a:tr>
             </a:tbl>
           </a:graphicData>
@@ -5176,7 +4832,6 @@
           <a:lstStyle/>
           <a:p>
             <a:pPr algn="ctr"/>
-            <a:endParaRPr/>
           </a:p>
         </p:txBody>
       </p:sp>
@@ -5354,7 +5009,6 @@
           <a:lstStyle/>
           <a:p>
             <a:pPr algn="ctr"/>
-            <a:endParaRPr/>
           </a:p>
         </p:txBody>
       </p:sp>
@@ -5490,7 +5144,7 @@
 </file>
 
 <file path=ppt/slides/slide12.xml><?xml version="1.0" encoding="utf-8"?>
-<p:sld xmlns:a="http://schemas.openxmlformats.org/drawingml/2006/main" xmlns:r="http://schemas.openxmlformats.org/officeDocument/2006/relationships" xmlns:p="http://schemas.openxmlformats.org/presentationml/2006/main">
+<p:sld xmlns:a="http://schemas.openxmlformats.org/drawingml/2006/main" xmlns:p="http://schemas.openxmlformats.org/presentationml/2006/main" xmlns:r="http://schemas.openxmlformats.org/officeDocument/2006/relationships">
   <p:cSld>
     <p:spTree>
       <p:nvGrpSpPr>
@@ -5498,14 +5152,7 @@
         <p:cNvGrpSpPr/>
         <p:nvPr/>
       </p:nvGrpSpPr>
-      <p:grpSpPr>
-        <a:xfrm>
-          <a:off x="0" y="0"/>
-          <a:ext cx="0" cy="0"/>
-          <a:chOff x="0" y="0"/>
-          <a:chExt cx="0" cy="0"/>
-        </a:xfrm>
-      </p:grpSpPr>
+      <p:grpSpPr/>
       <p:sp>
         <p:nvSpPr>
           <p:cNvPr id="2" name="Rectangle 1"/>
@@ -5547,7 +5194,6 @@
           <a:lstStyle/>
           <a:p>
             <a:pPr algn="ctr"/>
-            <a:endParaRPr/>
           </a:p>
         </p:txBody>
       </p:sp>
@@ -5559,8 +5205,8 @@
         </p:nvSpPr>
         <p:spPr>
           <a:xfrm>
-            <a:off x="554736" y="527304"/>
-            <a:ext cx="207264" cy="207264"/>
+            <a:off x="606247" y="578815"/>
+            <a:ext cx="104241" cy="104241"/>
           </a:xfrm>
           <a:prstGeom prst="roundRect">
             <a:avLst>
@@ -5576,7 +5222,7 @@
                 <a:srgbClr val="73787E"/>
               </a:gs>
             </a:gsLst>
-            <a:lin ang="18900000" scaled="0"/>
+            <a:lin scaled="0" ang="18900000"/>
           </a:gradFill>
           <a:ln>
             <a:noFill/>
@@ -5608,7 +5254,6 @@
           <a:lstStyle/>
           <a:p>
             <a:pPr algn="ctr"/>
-            <a:endParaRPr/>
           </a:p>
         </p:txBody>
       </p:sp>
@@ -5678,7 +5323,7 @@
                 <a:srgbClr val="FFFFFF"/>
               </a:gs>
             </a:gsLst>
-            <a:lin ang="0" scaled="0"/>
+            <a:lin scaled="0" ang="0"/>
           </a:gradFill>
           <a:ln>
             <a:noFill/>
@@ -5704,7 +5349,6 @@
           <a:lstStyle/>
           <a:p>
             <a:pPr algn="ctr"/>
-            <a:endParaRPr/>
           </a:p>
         </p:txBody>
       </p:sp>
@@ -5845,7 +5489,6 @@
           <a:lstStyle/>
           <a:p>
             <a:pPr algn="ctr"/>
-            <a:endParaRPr/>
           </a:p>
         </p:txBody>
       </p:sp>
@@ -5963,7 +5606,6 @@
           <a:lstStyle/>
           <a:p>
             <a:pPr algn="ctr"/>
-            <a:endParaRPr/>
           </a:p>
         </p:txBody>
       </p:sp>
@@ -6101,7 +5743,6 @@
           <a:lstStyle/>
           <a:p>
             <a:pPr algn="ctr"/>
-            <a:endParaRPr/>
           </a:p>
         </p:txBody>
       </p:sp>
@@ -6239,7 +5880,6 @@
           <a:lstStyle/>
           <a:p>
             <a:pPr algn="ctr"/>
-            <a:endParaRPr/>
           </a:p>
         </p:txBody>
       </p:sp>
@@ -6378,7 +6018,7 @@
 </file>
 
 <file path=ppt/slides/slide13.xml><?xml version="1.0" encoding="utf-8"?>
-<p:sld xmlns:a="http://schemas.openxmlformats.org/drawingml/2006/main" xmlns:r="http://schemas.openxmlformats.org/officeDocument/2006/relationships" xmlns:p="http://schemas.openxmlformats.org/presentationml/2006/main">
+<p:sld xmlns:a="http://schemas.openxmlformats.org/drawingml/2006/main" xmlns:p="http://schemas.openxmlformats.org/presentationml/2006/main" xmlns:r="http://schemas.openxmlformats.org/officeDocument/2006/relationships">
   <p:cSld>
     <p:spTree>
       <p:nvGrpSpPr>
@@ -6386,14 +6026,7 @@
         <p:cNvGrpSpPr/>
         <p:nvPr/>
       </p:nvGrpSpPr>
-      <p:grpSpPr>
-        <a:xfrm>
-          <a:off x="0" y="0"/>
-          <a:ext cx="0" cy="0"/>
-          <a:chOff x="0" y="0"/>
-          <a:chExt cx="0" cy="0"/>
-        </a:xfrm>
-      </p:grpSpPr>
+      <p:grpSpPr/>
       <p:sp>
         <p:nvSpPr>
           <p:cNvPr id="2" name="Rectangle 1"/>
@@ -6435,7 +6068,6 @@
           <a:lstStyle/>
           <a:p>
             <a:pPr algn="ctr"/>
-            <a:endParaRPr/>
           </a:p>
         </p:txBody>
       </p:sp>
@@ -6447,8 +6079,8 @@
         </p:nvSpPr>
         <p:spPr>
           <a:xfrm>
-            <a:off x="554736" y="527304"/>
-            <a:ext cx="207264" cy="207264"/>
+            <a:off x="606247" y="578815"/>
+            <a:ext cx="104241" cy="104241"/>
           </a:xfrm>
           <a:prstGeom prst="roundRect">
             <a:avLst>
@@ -6464,7 +6096,7 @@
                 <a:srgbClr val="73787E"/>
               </a:gs>
             </a:gsLst>
-            <a:lin ang="18900000" scaled="0"/>
+            <a:lin scaled="0" ang="18900000"/>
           </a:gradFill>
           <a:ln>
             <a:noFill/>
@@ -6496,7 +6128,6 @@
           <a:lstStyle/>
           <a:p>
             <a:pPr algn="ctr"/>
-            <a:endParaRPr/>
           </a:p>
         </p:txBody>
       </p:sp>
@@ -6566,7 +6197,7 @@
                 <a:srgbClr val="FFFFFF"/>
               </a:gs>
             </a:gsLst>
-            <a:lin ang="0" scaled="0"/>
+            <a:lin scaled="0" ang="0"/>
           </a:gradFill>
           <a:ln>
             <a:noFill/>
@@ -6592,7 +6223,6 @@
           <a:lstStyle/>
           <a:p>
             <a:pPr algn="ctr"/>
-            <a:endParaRPr/>
           </a:p>
         </p:txBody>
       </p:sp>
@@ -6733,7 +6363,6 @@
           <a:lstStyle/>
           <a:p>
             <a:pPr algn="ctr"/>
-            <a:endParaRPr/>
           </a:p>
         </p:txBody>
       </p:sp>
@@ -6871,7 +6500,6 @@
           <a:lstStyle/>
           <a:p>
             <a:pPr algn="ctr"/>
-            <a:endParaRPr/>
           </a:p>
         </p:txBody>
       </p:sp>
@@ -7047,7 +6675,6 @@
           <a:lstStyle/>
           <a:p>
             <a:pPr algn="ctr"/>
-            <a:endParaRPr/>
           </a:p>
         </p:txBody>
       </p:sp>
@@ -7084,7 +6711,7 @@
 </file>
 
 <file path=ppt/slides/slide14.xml><?xml version="1.0" encoding="utf-8"?>
-<p:sld xmlns:a="http://schemas.openxmlformats.org/drawingml/2006/main" xmlns:r="http://schemas.openxmlformats.org/officeDocument/2006/relationships" xmlns:p="http://schemas.openxmlformats.org/presentationml/2006/main">
+<p:sld xmlns:a="http://schemas.openxmlformats.org/drawingml/2006/main" xmlns:p="http://schemas.openxmlformats.org/presentationml/2006/main" xmlns:r="http://schemas.openxmlformats.org/officeDocument/2006/relationships">
   <p:cSld>
     <p:spTree>
       <p:nvGrpSpPr>
@@ -7092,14 +6719,7 @@
         <p:cNvGrpSpPr/>
         <p:nvPr/>
       </p:nvGrpSpPr>
-      <p:grpSpPr>
-        <a:xfrm>
-          <a:off x="0" y="0"/>
-          <a:ext cx="0" cy="0"/>
-          <a:chOff x="0" y="0"/>
-          <a:chExt cx="0" cy="0"/>
-        </a:xfrm>
-      </p:grpSpPr>
+      <p:grpSpPr/>
       <p:sp>
         <p:nvSpPr>
           <p:cNvPr id="2" name="Rectangle 1"/>
@@ -7141,7 +6761,6 @@
           <a:lstStyle/>
           <a:p>
             <a:pPr algn="ctr"/>
-            <a:endParaRPr/>
           </a:p>
         </p:txBody>
       </p:sp>
@@ -7153,8 +6772,8 @@
         </p:nvSpPr>
         <p:spPr>
           <a:xfrm>
-            <a:off x="554736" y="527304"/>
-            <a:ext cx="207264" cy="207264"/>
+            <a:off x="606247" y="578815"/>
+            <a:ext cx="104241" cy="104241"/>
           </a:xfrm>
           <a:prstGeom prst="roundRect">
             <a:avLst>
@@ -7170,7 +6789,7 @@
                 <a:srgbClr val="73787E"/>
               </a:gs>
             </a:gsLst>
-            <a:lin ang="18900000" scaled="0"/>
+            <a:lin scaled="0" ang="18900000"/>
           </a:gradFill>
           <a:ln>
             <a:noFill/>
@@ -7202,7 +6821,6 @@
           <a:lstStyle/>
           <a:p>
             <a:pPr algn="ctr"/>
-            <a:endParaRPr/>
           </a:p>
         </p:txBody>
       </p:sp>
@@ -7272,7 +6890,7 @@
                 <a:srgbClr val="FFFFFF"/>
               </a:gs>
             </a:gsLst>
-            <a:lin ang="0" scaled="0"/>
+            <a:lin scaled="0" ang="0"/>
           </a:gradFill>
           <a:ln>
             <a:noFill/>
@@ -7298,7 +6916,6 @@
           <a:lstStyle/>
           <a:p>
             <a:pPr algn="ctr"/>
-            <a:endParaRPr/>
           </a:p>
         </p:txBody>
       </p:sp>
@@ -7450,27 +7067,9 @@
                 <a:tableStyleId>{5C22544A-7EE6-4342-B048-85BDC9FD1C3A}</a:tableStyleId>
               </a:tblPr>
               <a:tblGrid>
-                <a:gridCol w="3931920">
-                  <a:extLst>
-                    <a:ext uri="{9D8B030D-6E8A-4147-A177-3AD203B41FA5}">
-                      <a16:colId xmlns:a16="http://schemas.microsoft.com/office/drawing/2014/main" val="20000"/>
-                    </a:ext>
-                  </a:extLst>
-                </a:gridCol>
-                <a:gridCol w="4206240">
-                  <a:extLst>
-                    <a:ext uri="{9D8B030D-6E8A-4147-A177-3AD203B41FA5}">
-                      <a16:colId xmlns:a16="http://schemas.microsoft.com/office/drawing/2014/main" val="20001"/>
-                    </a:ext>
-                  </a:extLst>
-                </a:gridCol>
-                <a:gridCol w="3154680">
-                  <a:extLst>
-                    <a:ext uri="{9D8B030D-6E8A-4147-A177-3AD203B41FA5}">
-                      <a16:colId xmlns:a16="http://schemas.microsoft.com/office/drawing/2014/main" val="20002"/>
-                    </a:ext>
-                  </a:extLst>
-                </a:gridCol>
+                <a:gridCol w="3931920"/>
+                <a:gridCol w="4206240"/>
+                <a:gridCol w="3154680"/>
               </a:tblGrid>
               <a:tr h="457200">
                 <a:tc>
@@ -7495,7 +7094,7 @@
                       </a:r>
                     </a:p>
                   </a:txBody>
-                  <a:tcPr marL="73152" marR="73152" marT="27432" marB="27432" anchor="ctr">
+                  <a:tcPr marT="27432" marB="27432" marL="73152" marR="73152" anchor="ctr">
                     <a:solidFill>
                       <a:srgbClr val="33393F"/>
                     </a:solidFill>
@@ -7523,7 +7122,7 @@
                       </a:r>
                     </a:p>
                   </a:txBody>
-                  <a:tcPr marL="73152" marR="73152" marT="27432" marB="27432" anchor="ctr">
+                  <a:tcPr marT="27432" marB="27432" marL="73152" marR="73152" anchor="ctr">
                     <a:solidFill>
                       <a:srgbClr val="33393F"/>
                     </a:solidFill>
@@ -7551,17 +7150,12 @@
                       </a:r>
                     </a:p>
                   </a:txBody>
-                  <a:tcPr marL="73152" marR="73152" marT="27432" marB="27432" anchor="ctr">
+                  <a:tcPr marT="27432" marB="27432" marL="73152" marR="73152" anchor="ctr">
                     <a:solidFill>
                       <a:srgbClr val="33393F"/>
                     </a:solidFill>
                   </a:tcPr>
                 </a:tc>
-                <a:extLst>
-                  <a:ext uri="{0D108BD9-81ED-4DB2-BD59-A6C34878D82A}">
-                    <a16:rowId xmlns:a16="http://schemas.microsoft.com/office/drawing/2014/main" val="10000"/>
-                  </a:ext>
-                </a:extLst>
               </a:tr>
               <a:tr h="457200">
                 <a:tc>
@@ -7586,7 +7180,7 @@
                       </a:r>
                     </a:p>
                   </a:txBody>
-                  <a:tcPr marL="73152" marR="73152" marT="27432" marB="27432" anchor="ctr">
+                  <a:tcPr marT="27432" marB="27432" marL="73152" marR="73152" anchor="ctr">
                     <a:solidFill>
                       <a:srgbClr val="FFFFFF"/>
                     </a:solidFill>
@@ -7614,7 +7208,7 @@
                       </a:r>
                     </a:p>
                   </a:txBody>
-                  <a:tcPr marL="73152" marR="73152" marT="27432" marB="27432" anchor="ctr">
+                  <a:tcPr marT="27432" marB="27432" marL="73152" marR="73152" anchor="ctr">
                     <a:solidFill>
                       <a:srgbClr val="FFFFFF"/>
                     </a:solidFill>
@@ -7642,17 +7236,12 @@
                       </a:r>
                     </a:p>
                   </a:txBody>
-                  <a:tcPr marL="73152" marR="73152" marT="27432" marB="27432" anchor="ctr">
+                  <a:tcPr marT="27432" marB="27432" marL="73152" marR="73152" anchor="ctr">
                     <a:solidFill>
                       <a:srgbClr val="FFFFFF"/>
                     </a:solidFill>
                   </a:tcPr>
                 </a:tc>
-                <a:extLst>
-                  <a:ext uri="{0D108BD9-81ED-4DB2-BD59-A6C34878D82A}">
-                    <a16:rowId xmlns:a16="http://schemas.microsoft.com/office/drawing/2014/main" val="10001"/>
-                  </a:ext>
-                </a:extLst>
               </a:tr>
               <a:tr h="457200">
                 <a:tc>
@@ -7677,7 +7266,7 @@
                       </a:r>
                     </a:p>
                   </a:txBody>
-                  <a:tcPr marL="73152" marR="73152" marT="27432" marB="27432" anchor="ctr">
+                  <a:tcPr marT="27432" marB="27432" marL="73152" marR="73152" anchor="ctr">
                     <a:solidFill>
                       <a:srgbClr val="F6F7F8"/>
                     </a:solidFill>
@@ -7705,7 +7294,7 @@
                       </a:r>
                     </a:p>
                   </a:txBody>
-                  <a:tcPr marL="73152" marR="73152" marT="27432" marB="27432" anchor="ctr">
+                  <a:tcPr marT="27432" marB="27432" marL="73152" marR="73152" anchor="ctr">
                     <a:solidFill>
                       <a:srgbClr val="F6F7F8"/>
                     </a:solidFill>
@@ -7733,17 +7322,12 @@
                       </a:r>
                     </a:p>
                   </a:txBody>
-                  <a:tcPr marL="73152" marR="73152" marT="27432" marB="27432" anchor="ctr">
+                  <a:tcPr marT="27432" marB="27432" marL="73152" marR="73152" anchor="ctr">
                     <a:solidFill>
                       <a:srgbClr val="F6F7F8"/>
                     </a:solidFill>
                   </a:tcPr>
                 </a:tc>
-                <a:extLst>
-                  <a:ext uri="{0D108BD9-81ED-4DB2-BD59-A6C34878D82A}">
-                    <a16:rowId xmlns:a16="http://schemas.microsoft.com/office/drawing/2014/main" val="10002"/>
-                  </a:ext>
-                </a:extLst>
               </a:tr>
               <a:tr h="457200">
                 <a:tc>
@@ -7768,7 +7352,7 @@
                       </a:r>
                     </a:p>
                   </a:txBody>
-                  <a:tcPr marL="73152" marR="73152" marT="27432" marB="27432" anchor="ctr">
+                  <a:tcPr marT="27432" marB="27432" marL="73152" marR="73152" anchor="ctr">
                     <a:solidFill>
                       <a:srgbClr val="FFFFFF"/>
                     </a:solidFill>
@@ -7796,7 +7380,7 @@
                       </a:r>
                     </a:p>
                   </a:txBody>
-                  <a:tcPr marL="73152" marR="73152" marT="27432" marB="27432" anchor="ctr">
+                  <a:tcPr marT="27432" marB="27432" marL="73152" marR="73152" anchor="ctr">
                     <a:solidFill>
                       <a:srgbClr val="FFFFFF"/>
                     </a:solidFill>
@@ -7824,17 +7408,12 @@
                       </a:r>
                     </a:p>
                   </a:txBody>
-                  <a:tcPr marL="73152" marR="73152" marT="27432" marB="27432" anchor="ctr">
+                  <a:tcPr marT="27432" marB="27432" marL="73152" marR="73152" anchor="ctr">
                     <a:solidFill>
                       <a:srgbClr val="FFFFFF"/>
                     </a:solidFill>
                   </a:tcPr>
                 </a:tc>
-                <a:extLst>
-                  <a:ext uri="{0D108BD9-81ED-4DB2-BD59-A6C34878D82A}">
-                    <a16:rowId xmlns:a16="http://schemas.microsoft.com/office/drawing/2014/main" val="10003"/>
-                  </a:ext>
-                </a:extLst>
               </a:tr>
               <a:tr h="457200">
                 <a:tc>
@@ -7859,7 +7438,7 @@
                       </a:r>
                     </a:p>
                   </a:txBody>
-                  <a:tcPr marL="73152" marR="73152" marT="27432" marB="27432" anchor="ctr">
+                  <a:tcPr marT="27432" marB="27432" marL="73152" marR="73152" anchor="ctr">
                     <a:solidFill>
                       <a:srgbClr val="F6F7F8"/>
                     </a:solidFill>
@@ -7887,7 +7466,7 @@
                       </a:r>
                     </a:p>
                   </a:txBody>
-                  <a:tcPr marL="73152" marR="73152" marT="27432" marB="27432" anchor="ctr">
+                  <a:tcPr marT="27432" marB="27432" marL="73152" marR="73152" anchor="ctr">
                     <a:solidFill>
                       <a:srgbClr val="F6F7F8"/>
                     </a:solidFill>
@@ -7915,17 +7494,12 @@
                       </a:r>
                     </a:p>
                   </a:txBody>
-                  <a:tcPr marL="73152" marR="73152" marT="27432" marB="27432" anchor="ctr">
+                  <a:tcPr marT="27432" marB="27432" marL="73152" marR="73152" anchor="ctr">
                     <a:solidFill>
                       <a:srgbClr val="F6F7F8"/>
                     </a:solidFill>
                   </a:tcPr>
                 </a:tc>
-                <a:extLst>
-                  <a:ext uri="{0D108BD9-81ED-4DB2-BD59-A6C34878D82A}">
-                    <a16:rowId xmlns:a16="http://schemas.microsoft.com/office/drawing/2014/main" val="10004"/>
-                  </a:ext>
-                </a:extLst>
               </a:tr>
               <a:tr h="457200">
                 <a:tc>
@@ -7950,7 +7524,7 @@
                       </a:r>
                     </a:p>
                   </a:txBody>
-                  <a:tcPr marL="73152" marR="73152" marT="27432" marB="27432" anchor="ctr">
+                  <a:tcPr marT="27432" marB="27432" marL="73152" marR="73152" anchor="ctr">
                     <a:solidFill>
                       <a:srgbClr val="E3E5E8"/>
                     </a:solidFill>
@@ -7978,7 +7552,7 @@
                       </a:r>
                     </a:p>
                   </a:txBody>
-                  <a:tcPr marL="73152" marR="73152" marT="27432" marB="27432" anchor="ctr">
+                  <a:tcPr marT="27432" marB="27432" marL="73152" marR="73152" anchor="ctr">
                     <a:solidFill>
                       <a:srgbClr val="E3E5E8"/>
                     </a:solidFill>
@@ -8006,17 +7580,12 @@
                       </a:r>
                     </a:p>
                   </a:txBody>
-                  <a:tcPr marL="73152" marR="73152" marT="27432" marB="27432" anchor="ctr">
+                  <a:tcPr marT="27432" marB="27432" marL="73152" marR="73152" anchor="ctr">
                     <a:solidFill>
                       <a:srgbClr val="E3E5E8"/>
                     </a:solidFill>
                   </a:tcPr>
                 </a:tc>
-                <a:extLst>
-                  <a:ext uri="{0D108BD9-81ED-4DB2-BD59-A6C34878D82A}">
-                    <a16:rowId xmlns:a16="http://schemas.microsoft.com/office/drawing/2014/main" val="10005"/>
-                  </a:ext>
-                </a:extLst>
               </a:tr>
             </a:tbl>
           </a:graphicData>
@@ -8073,7 +7642,6 @@
           <a:lstStyle/>
           <a:p>
             <a:pPr algn="ctr"/>
-            <a:endParaRPr/>
           </a:p>
         </p:txBody>
       </p:sp>
@@ -8189,7 +7757,7 @@
 </file>
 
 <file path=ppt/slides/slide15.xml><?xml version="1.0" encoding="utf-8"?>
-<p:sld xmlns:a="http://schemas.openxmlformats.org/drawingml/2006/main" xmlns:r="http://schemas.openxmlformats.org/officeDocument/2006/relationships" xmlns:p="http://schemas.openxmlformats.org/presentationml/2006/main">
+<p:sld xmlns:a="http://schemas.openxmlformats.org/drawingml/2006/main" xmlns:p="http://schemas.openxmlformats.org/presentationml/2006/main" xmlns:r="http://schemas.openxmlformats.org/officeDocument/2006/relationships">
   <p:cSld>
     <p:spTree>
       <p:nvGrpSpPr>
@@ -8197,14 +7765,7 @@
         <p:cNvGrpSpPr/>
         <p:nvPr/>
       </p:nvGrpSpPr>
-      <p:grpSpPr>
-        <a:xfrm>
-          <a:off x="0" y="0"/>
-          <a:ext cx="0" cy="0"/>
-          <a:chOff x="0" y="0"/>
-          <a:chExt cx="0" cy="0"/>
-        </a:xfrm>
-      </p:grpSpPr>
+      <p:grpSpPr/>
       <p:sp>
         <p:nvSpPr>
           <p:cNvPr id="2" name="Rectangle 1"/>
@@ -8246,7 +7807,6 @@
           <a:lstStyle/>
           <a:p>
             <a:pPr algn="ctr"/>
-            <a:endParaRPr/>
           </a:p>
         </p:txBody>
       </p:sp>
@@ -8258,8 +7818,8 @@
         </p:nvSpPr>
         <p:spPr>
           <a:xfrm>
-            <a:off x="554736" y="527304"/>
-            <a:ext cx="207264" cy="207264"/>
+            <a:off x="606247" y="578815"/>
+            <a:ext cx="104241" cy="104241"/>
           </a:xfrm>
           <a:prstGeom prst="roundRect">
             <a:avLst>
@@ -8275,7 +7835,7 @@
                 <a:srgbClr val="73787E"/>
               </a:gs>
             </a:gsLst>
-            <a:lin ang="18900000" scaled="0"/>
+            <a:lin scaled="0" ang="18900000"/>
           </a:gradFill>
           <a:ln>
             <a:noFill/>
@@ -8307,7 +7867,6 @@
           <a:lstStyle/>
           <a:p>
             <a:pPr algn="ctr"/>
-            <a:endParaRPr/>
           </a:p>
         </p:txBody>
       </p:sp>
@@ -8377,7 +7936,7 @@
                 <a:srgbClr val="FFFFFF"/>
               </a:gs>
             </a:gsLst>
-            <a:lin ang="0" scaled="0"/>
+            <a:lin scaled="0" ang="0"/>
           </a:gradFill>
           <a:ln>
             <a:noFill/>
@@ -8403,7 +7962,6 @@
           <a:lstStyle/>
           <a:p>
             <a:pPr algn="ctr"/>
-            <a:endParaRPr/>
           </a:p>
         </p:txBody>
       </p:sp>
@@ -8544,7 +8102,6 @@
           <a:lstStyle/>
           <a:p>
             <a:pPr algn="ctr"/>
-            <a:endParaRPr/>
           </a:p>
         </p:txBody>
       </p:sp>
@@ -8702,7 +8259,6 @@
           <a:lstStyle/>
           <a:p>
             <a:pPr algn="ctr"/>
-            <a:endParaRPr/>
           </a:p>
         </p:txBody>
       </p:sp>
@@ -8858,7 +8414,6 @@
           <a:lstStyle/>
           <a:p>
             <a:pPr algn="ctr"/>
-            <a:endParaRPr/>
           </a:p>
         </p:txBody>
       </p:sp>
@@ -8895,7 +8450,7 @@
 </file>
 
 <file path=ppt/slides/slide16.xml><?xml version="1.0" encoding="utf-8"?>
-<p:sld xmlns:a="http://schemas.openxmlformats.org/drawingml/2006/main" xmlns:r="http://schemas.openxmlformats.org/officeDocument/2006/relationships" xmlns:p="http://schemas.openxmlformats.org/presentationml/2006/main">
+<p:sld xmlns:a="http://schemas.openxmlformats.org/drawingml/2006/main" xmlns:p="http://schemas.openxmlformats.org/presentationml/2006/main" xmlns:r="http://schemas.openxmlformats.org/officeDocument/2006/relationships">
   <p:cSld>
     <p:spTree>
       <p:nvGrpSpPr>
@@ -8903,14 +8458,7 @@
         <p:cNvGrpSpPr/>
         <p:nvPr/>
       </p:nvGrpSpPr>
-      <p:grpSpPr>
-        <a:xfrm>
-          <a:off x="0" y="0"/>
-          <a:ext cx="0" cy="0"/>
-          <a:chOff x="0" y="0"/>
-          <a:chExt cx="0" cy="0"/>
-        </a:xfrm>
-      </p:grpSpPr>
+      <p:grpSpPr/>
       <p:sp>
         <p:nvSpPr>
           <p:cNvPr id="2" name="Rectangle 1"/>
@@ -8952,7 +8500,6 @@
           <a:lstStyle/>
           <a:p>
             <a:pPr algn="ctr"/>
-            <a:endParaRPr/>
           </a:p>
         </p:txBody>
       </p:sp>
@@ -8964,8 +8511,8 @@
         </p:nvSpPr>
         <p:spPr>
           <a:xfrm>
-            <a:off x="554736" y="527304"/>
-            <a:ext cx="207264" cy="207264"/>
+            <a:off x="606247" y="578815"/>
+            <a:ext cx="104241" cy="104241"/>
           </a:xfrm>
           <a:prstGeom prst="roundRect">
             <a:avLst>
@@ -8981,7 +8528,7 @@
                 <a:srgbClr val="73787E"/>
               </a:gs>
             </a:gsLst>
-            <a:lin ang="18900000" scaled="0"/>
+            <a:lin scaled="0" ang="18900000"/>
           </a:gradFill>
           <a:ln>
             <a:noFill/>
@@ -9013,7 +8560,6 @@
           <a:lstStyle/>
           <a:p>
             <a:pPr algn="ctr"/>
-            <a:endParaRPr/>
           </a:p>
         </p:txBody>
       </p:sp>
@@ -9083,7 +8629,7 @@
                 <a:srgbClr val="FFFFFF"/>
               </a:gs>
             </a:gsLst>
-            <a:lin ang="0" scaled="0"/>
+            <a:lin scaled="0" ang="0"/>
           </a:gradFill>
           <a:ln>
             <a:noFill/>
@@ -9109,7 +8655,6 @@
           <a:lstStyle/>
           <a:p>
             <a:pPr algn="ctr"/>
-            <a:endParaRPr/>
           </a:p>
         </p:txBody>
       </p:sp>
@@ -9250,7 +8795,6 @@
           <a:lstStyle/>
           <a:p>
             <a:pPr algn="ctr"/>
-            <a:endParaRPr/>
           </a:p>
         </p:txBody>
       </p:sp>
@@ -9448,7 +8992,6 @@
           <a:lstStyle/>
           <a:p>
             <a:pPr algn="ctr"/>
-            <a:endParaRPr/>
           </a:p>
         </p:txBody>
       </p:sp>
@@ -9604,7 +9147,6 @@
           <a:lstStyle/>
           <a:p>
             <a:pPr algn="ctr"/>
-            <a:endParaRPr/>
           </a:p>
         </p:txBody>
       </p:sp>
@@ -9641,7 +9183,7 @@
 </file>
 
 <file path=ppt/slides/slide17.xml><?xml version="1.0" encoding="utf-8"?>
-<p:sld xmlns:a="http://schemas.openxmlformats.org/drawingml/2006/main" xmlns:r="http://schemas.openxmlformats.org/officeDocument/2006/relationships" xmlns:p="http://schemas.openxmlformats.org/presentationml/2006/main">
+<p:sld xmlns:a="http://schemas.openxmlformats.org/drawingml/2006/main" xmlns:p="http://schemas.openxmlformats.org/presentationml/2006/main" xmlns:r="http://schemas.openxmlformats.org/officeDocument/2006/relationships">
   <p:cSld>
     <p:spTree>
       <p:nvGrpSpPr>
@@ -9649,14 +9191,7 @@
         <p:cNvGrpSpPr/>
         <p:nvPr/>
       </p:nvGrpSpPr>
-      <p:grpSpPr>
-        <a:xfrm>
-          <a:off x="0" y="0"/>
-          <a:ext cx="0" cy="0"/>
-          <a:chOff x="0" y="0"/>
-          <a:chExt cx="0" cy="0"/>
-        </a:xfrm>
-      </p:grpSpPr>
+      <p:grpSpPr/>
       <p:sp>
         <p:nvSpPr>
           <p:cNvPr id="2" name="Rectangle 1"/>
@@ -9698,7 +9233,6 @@
           <a:lstStyle/>
           <a:p>
             <a:pPr algn="ctr"/>
-            <a:endParaRPr/>
           </a:p>
         </p:txBody>
       </p:sp>
@@ -9710,8 +9244,8 @@
         </p:nvSpPr>
         <p:spPr>
           <a:xfrm>
-            <a:off x="554736" y="527304"/>
-            <a:ext cx="207264" cy="207264"/>
+            <a:off x="606247" y="578815"/>
+            <a:ext cx="104241" cy="104241"/>
           </a:xfrm>
           <a:prstGeom prst="roundRect">
             <a:avLst>
@@ -9727,7 +9261,7 @@
                 <a:srgbClr val="73787E"/>
               </a:gs>
             </a:gsLst>
-            <a:lin ang="18900000" scaled="0"/>
+            <a:lin scaled="0" ang="18900000"/>
           </a:gradFill>
           <a:ln>
             <a:noFill/>
@@ -9759,7 +9293,6 @@
           <a:lstStyle/>
           <a:p>
             <a:pPr algn="ctr"/>
-            <a:endParaRPr/>
           </a:p>
         </p:txBody>
       </p:sp>
@@ -9829,7 +9362,7 @@
                 <a:srgbClr val="FFFFFF"/>
               </a:gs>
             </a:gsLst>
-            <a:lin ang="0" scaled="0"/>
+            <a:lin scaled="0" ang="0"/>
           </a:gradFill>
           <a:ln>
             <a:noFill/>
@@ -9855,7 +9388,6 @@
           <a:lstStyle/>
           <a:p>
             <a:pPr algn="ctr"/>
-            <a:endParaRPr/>
           </a:p>
         </p:txBody>
       </p:sp>
@@ -9994,7 +9526,6 @@
           <a:lstStyle/>
           <a:p>
             <a:pPr algn="ctr"/>
-            <a:endParaRPr/>
           </a:p>
         </p:txBody>
       </p:sp>
@@ -10073,7 +9604,6 @@
           <a:lstStyle/>
           <a:p>
             <a:pPr algn="ctr"/>
-            <a:endParaRPr/>
           </a:p>
         </p:txBody>
       </p:sp>
@@ -10231,7 +9761,6 @@
           <a:lstStyle/>
           <a:p>
             <a:pPr algn="ctr"/>
-            <a:endParaRPr/>
           </a:p>
         </p:txBody>
       </p:sp>
@@ -10347,7 +9876,7 @@
 </file>
 
 <file path=ppt/slides/slide18.xml><?xml version="1.0" encoding="utf-8"?>
-<p:sld xmlns:a="http://schemas.openxmlformats.org/drawingml/2006/main" xmlns:r="http://schemas.openxmlformats.org/officeDocument/2006/relationships" xmlns:p="http://schemas.openxmlformats.org/presentationml/2006/main">
+<p:sld xmlns:a="http://schemas.openxmlformats.org/drawingml/2006/main" xmlns:p="http://schemas.openxmlformats.org/presentationml/2006/main" xmlns:r="http://schemas.openxmlformats.org/officeDocument/2006/relationships">
   <p:cSld>
     <p:spTree>
       <p:nvGrpSpPr>
@@ -10355,14 +9884,7 @@
         <p:cNvGrpSpPr/>
         <p:nvPr/>
       </p:nvGrpSpPr>
-      <p:grpSpPr>
-        <a:xfrm>
-          <a:off x="0" y="0"/>
-          <a:ext cx="0" cy="0"/>
-          <a:chOff x="0" y="0"/>
-          <a:chExt cx="0" cy="0"/>
-        </a:xfrm>
-      </p:grpSpPr>
+      <p:grpSpPr/>
       <p:sp>
         <p:nvSpPr>
           <p:cNvPr id="2" name="Rectangle 1"/>
@@ -10404,7 +9926,6 @@
           <a:lstStyle/>
           <a:p>
             <a:pPr algn="ctr"/>
-            <a:endParaRPr/>
           </a:p>
         </p:txBody>
       </p:sp>
@@ -10416,8 +9937,8 @@
         </p:nvSpPr>
         <p:spPr>
           <a:xfrm>
-            <a:off x="554736" y="527304"/>
-            <a:ext cx="207264" cy="207264"/>
+            <a:off x="606247" y="578815"/>
+            <a:ext cx="104241" cy="104241"/>
           </a:xfrm>
           <a:prstGeom prst="roundRect">
             <a:avLst>
@@ -10433,7 +9954,7 @@
                 <a:srgbClr val="73787E"/>
               </a:gs>
             </a:gsLst>
-            <a:lin ang="18900000" scaled="0"/>
+            <a:lin scaled="0" ang="18900000"/>
           </a:gradFill>
           <a:ln>
             <a:noFill/>
@@ -10465,7 +9986,6 @@
           <a:lstStyle/>
           <a:p>
             <a:pPr algn="ctr"/>
-            <a:endParaRPr/>
           </a:p>
         </p:txBody>
       </p:sp>
@@ -10535,7 +10055,7 @@
                 <a:srgbClr val="FFFFFF"/>
               </a:gs>
             </a:gsLst>
-            <a:lin ang="0" scaled="0"/>
+            <a:lin scaled="0" ang="0"/>
           </a:gradFill>
           <a:ln>
             <a:noFill/>
@@ -10561,7 +10081,6 @@
           <a:lstStyle/>
           <a:p>
             <a:pPr algn="ctr"/>
-            <a:endParaRPr/>
           </a:p>
         </p:txBody>
       </p:sp>
@@ -10702,7 +10221,6 @@
           <a:lstStyle/>
           <a:p>
             <a:pPr algn="ctr"/>
-            <a:endParaRPr/>
           </a:p>
         </p:txBody>
       </p:sp>
@@ -10860,7 +10378,6 @@
           <a:lstStyle/>
           <a:p>
             <a:pPr algn="ctr"/>
-            <a:endParaRPr/>
           </a:p>
         </p:txBody>
       </p:sp>
@@ -11018,7 +10535,6 @@
           <a:lstStyle/>
           <a:p>
             <a:pPr algn="ctr"/>
-            <a:endParaRPr/>
           </a:p>
         </p:txBody>
       </p:sp>
@@ -11176,7 +10692,6 @@
           <a:lstStyle/>
           <a:p>
             <a:pPr algn="ctr"/>
-            <a:endParaRPr/>
           </a:p>
         </p:txBody>
       </p:sp>
@@ -11272,7 +10787,7 @@
 </file>
 
 <file path=ppt/slides/slide19.xml><?xml version="1.0" encoding="utf-8"?>
-<p:sld xmlns:a="http://schemas.openxmlformats.org/drawingml/2006/main" xmlns:r="http://schemas.openxmlformats.org/officeDocument/2006/relationships" xmlns:p="http://schemas.openxmlformats.org/presentationml/2006/main">
+<p:sld xmlns:a="http://schemas.openxmlformats.org/drawingml/2006/main" xmlns:p="http://schemas.openxmlformats.org/presentationml/2006/main" xmlns:r="http://schemas.openxmlformats.org/officeDocument/2006/relationships">
   <p:cSld>
     <p:spTree>
       <p:nvGrpSpPr>
@@ -11280,14 +10795,7 @@
         <p:cNvGrpSpPr/>
         <p:nvPr/>
       </p:nvGrpSpPr>
-      <p:grpSpPr>
-        <a:xfrm>
-          <a:off x="0" y="0"/>
-          <a:ext cx="0" cy="0"/>
-          <a:chOff x="0" y="0"/>
-          <a:chExt cx="0" cy="0"/>
-        </a:xfrm>
-      </p:grpSpPr>
+      <p:grpSpPr/>
       <p:sp>
         <p:nvSpPr>
           <p:cNvPr id="2" name="Rectangle 1"/>
@@ -11329,7 +10837,6 @@
           <a:lstStyle/>
           <a:p>
             <a:pPr algn="ctr"/>
-            <a:endParaRPr/>
           </a:p>
         </p:txBody>
       </p:sp>
@@ -11341,8 +10848,8 @@
         </p:nvSpPr>
         <p:spPr>
           <a:xfrm>
-            <a:off x="554736" y="527304"/>
-            <a:ext cx="207264" cy="207264"/>
+            <a:off x="606247" y="578815"/>
+            <a:ext cx="104241" cy="104241"/>
           </a:xfrm>
           <a:prstGeom prst="roundRect">
             <a:avLst>
@@ -11358,7 +10865,7 @@
                 <a:srgbClr val="73787E"/>
               </a:gs>
             </a:gsLst>
-            <a:lin ang="18900000" scaled="0"/>
+            <a:lin scaled="0" ang="18900000"/>
           </a:gradFill>
           <a:ln>
             <a:noFill/>
@@ -11390,7 +10897,6 @@
           <a:lstStyle/>
           <a:p>
             <a:pPr algn="ctr"/>
-            <a:endParaRPr/>
           </a:p>
         </p:txBody>
       </p:sp>
@@ -11460,7 +10966,7 @@
                 <a:srgbClr val="FFFFFF"/>
               </a:gs>
             </a:gsLst>
-            <a:lin ang="0" scaled="0"/>
+            <a:lin scaled="0" ang="0"/>
           </a:gradFill>
           <a:ln>
             <a:noFill/>
@@ -11486,7 +10992,6 @@
           <a:lstStyle/>
           <a:p>
             <a:pPr algn="ctr"/>
-            <a:endParaRPr/>
           </a:p>
         </p:txBody>
       </p:sp>
@@ -11595,34 +11100,10 @@
                 <a:tableStyleId>{5C22544A-7EE6-4342-B048-85BDC9FD1C3A}</a:tableStyleId>
               </a:tblPr>
               <a:tblGrid>
-                <a:gridCol w="502920">
-                  <a:extLst>
-                    <a:ext uri="{9D8B030D-6E8A-4147-A177-3AD203B41FA5}">
-                      <a16:colId xmlns:a16="http://schemas.microsoft.com/office/drawing/2014/main" val="20000"/>
-                    </a:ext>
-                  </a:extLst>
-                </a:gridCol>
-                <a:gridCol w="5577840">
-                  <a:extLst>
-                    <a:ext uri="{9D8B030D-6E8A-4147-A177-3AD203B41FA5}">
-                      <a16:colId xmlns:a16="http://schemas.microsoft.com/office/drawing/2014/main" val="20001"/>
-                    </a:ext>
-                  </a:extLst>
-                </a:gridCol>
-                <a:gridCol w="3840480">
-                  <a:extLst>
-                    <a:ext uri="{9D8B030D-6E8A-4147-A177-3AD203B41FA5}">
-                      <a16:colId xmlns:a16="http://schemas.microsoft.com/office/drawing/2014/main" val="20002"/>
-                    </a:ext>
-                  </a:extLst>
-                </a:gridCol>
-                <a:gridCol w="1371600">
-                  <a:extLst>
-                    <a:ext uri="{9D8B030D-6E8A-4147-A177-3AD203B41FA5}">
-                      <a16:colId xmlns:a16="http://schemas.microsoft.com/office/drawing/2014/main" val="20003"/>
-                    </a:ext>
-                  </a:extLst>
-                </a:gridCol>
+                <a:gridCol w="502920"/>
+                <a:gridCol w="5577840"/>
+                <a:gridCol w="3840480"/>
+                <a:gridCol w="1371600"/>
               </a:tblGrid>
               <a:tr h="475488">
                 <a:tc>
@@ -11647,7 +11128,7 @@
                       </a:r>
                     </a:p>
                   </a:txBody>
-                  <a:tcPr marL="73152" marR="73152" marT="27432" marB="27432" anchor="ctr">
+                  <a:tcPr marT="27432" marB="27432" marL="73152" marR="73152" anchor="ctr">
                     <a:solidFill>
                       <a:srgbClr val="33393F"/>
                     </a:solidFill>
@@ -11675,7 +11156,7 @@
                       </a:r>
                     </a:p>
                   </a:txBody>
-                  <a:tcPr marL="73152" marR="73152" marT="27432" marB="27432" anchor="ctr">
+                  <a:tcPr marT="27432" marB="27432" marL="73152" marR="73152" anchor="ctr">
                     <a:solidFill>
                       <a:srgbClr val="33393F"/>
                     </a:solidFill>
@@ -11703,7 +11184,7 @@
                       </a:r>
                     </a:p>
                   </a:txBody>
-                  <a:tcPr marL="73152" marR="73152" marT="27432" marB="27432" anchor="ctr">
+                  <a:tcPr marT="27432" marB="27432" marL="73152" marR="73152" anchor="ctr">
                     <a:solidFill>
                       <a:srgbClr val="33393F"/>
                     </a:solidFill>
@@ -11731,17 +11212,12 @@
                       </a:r>
                     </a:p>
                   </a:txBody>
-                  <a:tcPr marL="73152" marR="73152" marT="27432" marB="27432" anchor="ctr">
+                  <a:tcPr marT="27432" marB="27432" marL="73152" marR="73152" anchor="ctr">
                     <a:solidFill>
                       <a:srgbClr val="33393F"/>
                     </a:solidFill>
                   </a:tcPr>
                 </a:tc>
-                <a:extLst>
-                  <a:ext uri="{0D108BD9-81ED-4DB2-BD59-A6C34878D82A}">
-                    <a16:rowId xmlns:a16="http://schemas.microsoft.com/office/drawing/2014/main" val="10000"/>
-                  </a:ext>
-                </a:extLst>
               </a:tr>
               <a:tr h="475488">
                 <a:tc>
@@ -11766,7 +11242,7 @@
                       </a:r>
                     </a:p>
                   </a:txBody>
-                  <a:tcPr marL="73152" marR="73152" marT="27432" marB="27432" anchor="ctr">
+                  <a:tcPr marT="27432" marB="27432" marL="73152" marR="73152" anchor="ctr">
                     <a:solidFill>
                       <a:srgbClr val="FFFFFF"/>
                     </a:solidFill>
@@ -11794,7 +11270,7 @@
                       </a:r>
                     </a:p>
                   </a:txBody>
-                  <a:tcPr marL="73152" marR="73152" marT="27432" marB="27432" anchor="ctr">
+                  <a:tcPr marT="27432" marB="27432" marL="73152" marR="73152" anchor="ctr">
                     <a:solidFill>
                       <a:srgbClr val="FFFFFF"/>
                     </a:solidFill>
@@ -11822,7 +11298,7 @@
                       </a:r>
                     </a:p>
                   </a:txBody>
-                  <a:tcPr marL="73152" marR="73152" marT="27432" marB="27432" anchor="ctr">
+                  <a:tcPr marT="27432" marB="27432" marL="73152" marR="73152" anchor="ctr">
                     <a:solidFill>
                       <a:srgbClr val="FFFFFF"/>
                     </a:solidFill>
@@ -11850,17 +11326,12 @@
                       </a:r>
                     </a:p>
                   </a:txBody>
-                  <a:tcPr marL="73152" marR="73152" marT="27432" marB="27432" anchor="ctr">
+                  <a:tcPr marT="27432" marB="27432" marL="73152" marR="73152" anchor="ctr">
                     <a:solidFill>
                       <a:srgbClr val="FFFFFF"/>
                     </a:solidFill>
                   </a:tcPr>
                 </a:tc>
-                <a:extLst>
-                  <a:ext uri="{0D108BD9-81ED-4DB2-BD59-A6C34878D82A}">
-                    <a16:rowId xmlns:a16="http://schemas.microsoft.com/office/drawing/2014/main" val="10001"/>
-                  </a:ext>
-                </a:extLst>
               </a:tr>
               <a:tr h="475488">
                 <a:tc>
@@ -11885,7 +11356,7 @@
                       </a:r>
                     </a:p>
                   </a:txBody>
-                  <a:tcPr marL="73152" marR="73152" marT="27432" marB="27432" anchor="ctr">
+                  <a:tcPr marT="27432" marB="27432" marL="73152" marR="73152" anchor="ctr">
                     <a:solidFill>
                       <a:srgbClr val="F6F7F8"/>
                     </a:solidFill>
@@ -11913,7 +11384,7 @@
                       </a:r>
                     </a:p>
                   </a:txBody>
-                  <a:tcPr marL="73152" marR="73152" marT="27432" marB="27432" anchor="ctr">
+                  <a:tcPr marT="27432" marB="27432" marL="73152" marR="73152" anchor="ctr">
                     <a:solidFill>
                       <a:srgbClr val="F6F7F8"/>
                     </a:solidFill>
@@ -11941,7 +11412,7 @@
                       </a:r>
                     </a:p>
                   </a:txBody>
-                  <a:tcPr marL="73152" marR="73152" marT="27432" marB="27432" anchor="ctr">
+                  <a:tcPr marT="27432" marB="27432" marL="73152" marR="73152" anchor="ctr">
                     <a:solidFill>
                       <a:srgbClr val="F6F7F8"/>
                     </a:solidFill>
@@ -11969,17 +11440,12 @@
                       </a:r>
                     </a:p>
                   </a:txBody>
-                  <a:tcPr marL="73152" marR="73152" marT="27432" marB="27432" anchor="ctr">
+                  <a:tcPr marT="27432" marB="27432" marL="73152" marR="73152" anchor="ctr">
                     <a:solidFill>
                       <a:srgbClr val="F6F7F8"/>
                     </a:solidFill>
                   </a:tcPr>
                 </a:tc>
-                <a:extLst>
-                  <a:ext uri="{0D108BD9-81ED-4DB2-BD59-A6C34878D82A}">
-                    <a16:rowId xmlns:a16="http://schemas.microsoft.com/office/drawing/2014/main" val="10002"/>
-                  </a:ext>
-                </a:extLst>
               </a:tr>
               <a:tr h="475488">
                 <a:tc>
@@ -12004,7 +11470,7 @@
                       </a:r>
                     </a:p>
                   </a:txBody>
-                  <a:tcPr marL="73152" marR="73152" marT="27432" marB="27432" anchor="ctr">
+                  <a:tcPr marT="27432" marB="27432" marL="73152" marR="73152" anchor="ctr">
                     <a:solidFill>
                       <a:srgbClr val="FFFFFF"/>
                     </a:solidFill>
@@ -12032,7 +11498,7 @@
                       </a:r>
                     </a:p>
                   </a:txBody>
-                  <a:tcPr marL="73152" marR="73152" marT="27432" marB="27432" anchor="ctr">
+                  <a:tcPr marT="27432" marB="27432" marL="73152" marR="73152" anchor="ctr">
                     <a:solidFill>
                       <a:srgbClr val="FFFFFF"/>
                     </a:solidFill>
@@ -12060,7 +11526,7 @@
                       </a:r>
                     </a:p>
                   </a:txBody>
-                  <a:tcPr marL="73152" marR="73152" marT="27432" marB="27432" anchor="ctr">
+                  <a:tcPr marT="27432" marB="27432" marL="73152" marR="73152" anchor="ctr">
                     <a:solidFill>
                       <a:srgbClr val="FFFFFF"/>
                     </a:solidFill>
@@ -12088,17 +11554,12 @@
                       </a:r>
                     </a:p>
                   </a:txBody>
-                  <a:tcPr marL="73152" marR="73152" marT="27432" marB="27432" anchor="ctr">
+                  <a:tcPr marT="27432" marB="27432" marL="73152" marR="73152" anchor="ctr">
                     <a:solidFill>
                       <a:srgbClr val="FFFFFF"/>
                     </a:solidFill>
                   </a:tcPr>
                 </a:tc>
-                <a:extLst>
-                  <a:ext uri="{0D108BD9-81ED-4DB2-BD59-A6C34878D82A}">
-                    <a16:rowId xmlns:a16="http://schemas.microsoft.com/office/drawing/2014/main" val="10003"/>
-                  </a:ext>
-                </a:extLst>
               </a:tr>
               <a:tr h="475488">
                 <a:tc>
@@ -12123,7 +11584,7 @@
                       </a:r>
                     </a:p>
                   </a:txBody>
-                  <a:tcPr marL="73152" marR="73152" marT="27432" marB="27432" anchor="ctr">
+                  <a:tcPr marT="27432" marB="27432" marL="73152" marR="73152" anchor="ctr">
                     <a:solidFill>
                       <a:srgbClr val="F6F7F8"/>
                     </a:solidFill>
@@ -12151,7 +11612,7 @@
                       </a:r>
                     </a:p>
                   </a:txBody>
-                  <a:tcPr marL="73152" marR="73152" marT="27432" marB="27432" anchor="ctr">
+                  <a:tcPr marT="27432" marB="27432" marL="73152" marR="73152" anchor="ctr">
                     <a:solidFill>
                       <a:srgbClr val="F6F7F8"/>
                     </a:solidFill>
@@ -12179,7 +11640,7 @@
                       </a:r>
                     </a:p>
                   </a:txBody>
-                  <a:tcPr marL="73152" marR="73152" marT="27432" marB="27432" anchor="ctr">
+                  <a:tcPr marT="27432" marB="27432" marL="73152" marR="73152" anchor="ctr">
                     <a:solidFill>
                       <a:srgbClr val="F6F7F8"/>
                     </a:solidFill>
@@ -12207,17 +11668,12 @@
                       </a:r>
                     </a:p>
                   </a:txBody>
-                  <a:tcPr marL="73152" marR="73152" marT="27432" marB="27432" anchor="ctr">
+                  <a:tcPr marT="27432" marB="27432" marL="73152" marR="73152" anchor="ctr">
                     <a:solidFill>
                       <a:srgbClr val="F6F7F8"/>
                     </a:solidFill>
                   </a:tcPr>
                 </a:tc>
-                <a:extLst>
-                  <a:ext uri="{0D108BD9-81ED-4DB2-BD59-A6C34878D82A}">
-                    <a16:rowId xmlns:a16="http://schemas.microsoft.com/office/drawing/2014/main" val="10004"/>
-                  </a:ext>
-                </a:extLst>
               </a:tr>
               <a:tr h="475488">
                 <a:tc>
@@ -12242,7 +11698,7 @@
                       </a:r>
                     </a:p>
                   </a:txBody>
-                  <a:tcPr marL="73152" marR="73152" marT="27432" marB="27432" anchor="ctr">
+                  <a:tcPr marT="27432" marB="27432" marL="73152" marR="73152" anchor="ctr">
                     <a:solidFill>
                       <a:srgbClr val="FFFFFF"/>
                     </a:solidFill>
@@ -12270,7 +11726,7 @@
                       </a:r>
                     </a:p>
                   </a:txBody>
-                  <a:tcPr marL="73152" marR="73152" marT="27432" marB="27432" anchor="ctr">
+                  <a:tcPr marT="27432" marB="27432" marL="73152" marR="73152" anchor="ctr">
                     <a:solidFill>
                       <a:srgbClr val="FFFFFF"/>
                     </a:solidFill>
@@ -12298,7 +11754,7 @@
                       </a:r>
                     </a:p>
                   </a:txBody>
-                  <a:tcPr marL="73152" marR="73152" marT="27432" marB="27432" anchor="ctr">
+                  <a:tcPr marT="27432" marB="27432" marL="73152" marR="73152" anchor="ctr">
                     <a:solidFill>
                       <a:srgbClr val="FFFFFF"/>
                     </a:solidFill>
@@ -12326,17 +11782,12 @@
                       </a:r>
                     </a:p>
                   </a:txBody>
-                  <a:tcPr marL="73152" marR="73152" marT="27432" marB="27432" anchor="ctr">
+                  <a:tcPr marT="27432" marB="27432" marL="73152" marR="73152" anchor="ctr">
                     <a:solidFill>
                       <a:srgbClr val="FFFFFF"/>
                     </a:solidFill>
                   </a:tcPr>
                 </a:tc>
-                <a:extLst>
-                  <a:ext uri="{0D108BD9-81ED-4DB2-BD59-A6C34878D82A}">
-                    <a16:rowId xmlns:a16="http://schemas.microsoft.com/office/drawing/2014/main" val="10005"/>
-                  </a:ext>
-                </a:extLst>
               </a:tr>
             </a:tbl>
           </a:graphicData>
@@ -12475,8 +11926,8 @@
         </p:nvSpPr>
         <p:spPr>
           <a:xfrm>
-            <a:off x="554736" y="527304"/>
-            <a:ext cx="207264" cy="207264"/>
+            <a:off x="606247" y="578815"/>
+            <a:ext cx="104241" cy="104241"/>
           </a:xfrm>
           <a:prstGeom prst="roundRect">
             <a:avLst>
@@ -12757,7 +12208,7 @@
                 <a:latin typeface="맑은 고딕"/>
                 <a:ea typeface="맑은 고딕"/>
               </a:rPr>
-              <a:t>Ⅰ. 배경과 요약</a:t>
+              <a:t>Ⅰ. 배경</a:t>
             </a:r>
           </a:p>
           <a:p>
@@ -13679,7 +13130,7 @@
 </file>
 
 <file path=ppt/slides/slide20.xml><?xml version="1.0" encoding="utf-8"?>
-<p:sld xmlns:a="http://schemas.openxmlformats.org/drawingml/2006/main" xmlns:r="http://schemas.openxmlformats.org/officeDocument/2006/relationships" xmlns:p="http://schemas.openxmlformats.org/presentationml/2006/main">
+<p:sld xmlns:a="http://schemas.openxmlformats.org/drawingml/2006/main" xmlns:p="http://schemas.openxmlformats.org/presentationml/2006/main" xmlns:r="http://schemas.openxmlformats.org/officeDocument/2006/relationships">
   <p:cSld>
     <p:spTree>
       <p:nvGrpSpPr>
@@ -13687,14 +13138,7 @@
         <p:cNvGrpSpPr/>
         <p:nvPr/>
       </p:nvGrpSpPr>
-      <p:grpSpPr>
-        <a:xfrm>
-          <a:off x="0" y="0"/>
-          <a:ext cx="0" cy="0"/>
-          <a:chOff x="0" y="0"/>
-          <a:chExt cx="0" cy="0"/>
-        </a:xfrm>
-      </p:grpSpPr>
+      <p:grpSpPr/>
       <p:sp>
         <p:nvSpPr>
           <p:cNvPr id="2" name="Rectangle 1"/>
@@ -13736,7 +13180,6 @@
           <a:lstStyle/>
           <a:p>
             <a:pPr algn="ctr"/>
-            <a:endParaRPr/>
           </a:p>
         </p:txBody>
       </p:sp>
@@ -13748,8 +13191,8 @@
         </p:nvSpPr>
         <p:spPr>
           <a:xfrm>
-            <a:off x="554736" y="527304"/>
-            <a:ext cx="207264" cy="207264"/>
+            <a:off x="606247" y="578815"/>
+            <a:ext cx="104241" cy="104241"/>
           </a:xfrm>
           <a:prstGeom prst="roundRect">
             <a:avLst>
@@ -13765,7 +13208,7 @@
                 <a:srgbClr val="73787E"/>
               </a:gs>
             </a:gsLst>
-            <a:lin ang="18900000" scaled="0"/>
+            <a:lin scaled="0" ang="18900000"/>
           </a:gradFill>
           <a:ln>
             <a:noFill/>
@@ -13797,7 +13240,6 @@
           <a:lstStyle/>
           <a:p>
             <a:pPr algn="ctr"/>
-            <a:endParaRPr/>
           </a:p>
         </p:txBody>
       </p:sp>
@@ -13867,7 +13309,7 @@
                 <a:srgbClr val="FFFFFF"/>
               </a:gs>
             </a:gsLst>
-            <a:lin ang="0" scaled="0"/>
+            <a:lin scaled="0" ang="0"/>
           </a:gradFill>
           <a:ln>
             <a:noFill/>
@@ -13893,7 +13335,6 @@
           <a:lstStyle/>
           <a:p>
             <a:pPr algn="ctr"/>
-            <a:endParaRPr/>
           </a:p>
         </p:txBody>
       </p:sp>
@@ -14034,7 +13475,6 @@
           <a:lstStyle/>
           <a:p>
             <a:pPr algn="ctr"/>
-            <a:endParaRPr/>
           </a:p>
         </p:txBody>
       </p:sp>
@@ -14232,7 +13672,6 @@
           <a:lstStyle/>
           <a:p>
             <a:pPr algn="ctr"/>
-            <a:endParaRPr/>
           </a:p>
         </p:txBody>
       </p:sp>
@@ -14411,7 +13850,7 @@
 </file>
 
 <file path=ppt/slides/slide21.xml><?xml version="1.0" encoding="utf-8"?>
-<p:sld xmlns:a="http://schemas.openxmlformats.org/drawingml/2006/main" xmlns:r="http://schemas.openxmlformats.org/officeDocument/2006/relationships" xmlns:p="http://schemas.openxmlformats.org/presentationml/2006/main">
+<p:sld xmlns:a="http://schemas.openxmlformats.org/drawingml/2006/main" xmlns:p="http://schemas.openxmlformats.org/presentationml/2006/main" xmlns:r="http://schemas.openxmlformats.org/officeDocument/2006/relationships">
   <p:cSld>
     <p:spTree>
       <p:nvGrpSpPr>
@@ -14419,14 +13858,7 @@
         <p:cNvGrpSpPr/>
         <p:nvPr/>
       </p:nvGrpSpPr>
-      <p:grpSpPr>
-        <a:xfrm>
-          <a:off x="0" y="0"/>
-          <a:ext cx="0" cy="0"/>
-          <a:chOff x="0" y="0"/>
-          <a:chExt cx="0" cy="0"/>
-        </a:xfrm>
-      </p:grpSpPr>
+      <p:grpSpPr/>
       <p:sp>
         <p:nvSpPr>
           <p:cNvPr id="2" name="Rectangle 1"/>
@@ -14468,7 +13900,6 @@
           <a:lstStyle/>
           <a:p>
             <a:pPr algn="ctr"/>
-            <a:endParaRPr/>
           </a:p>
         </p:txBody>
       </p:sp>
@@ -14538,7 +13969,7 @@
                 <a:srgbClr val="FFFFFF"/>
               </a:gs>
             </a:gsLst>
-            <a:lin ang="0" scaled="0"/>
+            <a:lin scaled="0" ang="0"/>
           </a:gradFill>
           <a:ln>
             <a:noFill/>
@@ -14564,7 +13995,6 @@
           <a:lstStyle/>
           <a:p>
             <a:pPr algn="ctr"/>
-            <a:endParaRPr/>
           </a:p>
         </p:txBody>
       </p:sp>
@@ -14743,7 +14173,7 @@
 </file>
 
 <file path=ppt/slides/slide3.xml><?xml version="1.0" encoding="utf-8"?>
-<p:sld xmlns:a="http://schemas.openxmlformats.org/drawingml/2006/main" xmlns:r="http://schemas.openxmlformats.org/officeDocument/2006/relationships" xmlns:p="http://schemas.openxmlformats.org/presentationml/2006/main">
+<p:sld xmlns:a="http://schemas.openxmlformats.org/drawingml/2006/main" xmlns:p="http://schemas.openxmlformats.org/presentationml/2006/main" xmlns:r="http://schemas.openxmlformats.org/officeDocument/2006/relationships">
   <p:cSld>
     <p:spTree>
       <p:nvGrpSpPr>
@@ -14751,14 +14181,7 @@
         <p:cNvGrpSpPr/>
         <p:nvPr/>
       </p:nvGrpSpPr>
-      <p:grpSpPr>
-        <a:xfrm>
-          <a:off x="0" y="0"/>
-          <a:ext cx="0" cy="0"/>
-          <a:chOff x="0" y="0"/>
-          <a:chExt cx="0" cy="0"/>
-        </a:xfrm>
-      </p:grpSpPr>
+      <p:grpSpPr/>
       <p:sp>
         <p:nvSpPr>
           <p:cNvPr id="2" name="Rectangle 1"/>
@@ -14800,7 +14223,6 @@
           <a:lstStyle/>
           <a:p>
             <a:pPr algn="ctr"/>
-            <a:endParaRPr/>
           </a:p>
         </p:txBody>
       </p:sp>
@@ -14812,8 +14234,8 @@
         </p:nvSpPr>
         <p:spPr>
           <a:xfrm>
-            <a:off x="554736" y="527304"/>
-            <a:ext cx="207264" cy="207264"/>
+            <a:off x="606247" y="578815"/>
+            <a:ext cx="104241" cy="104241"/>
           </a:xfrm>
           <a:prstGeom prst="roundRect">
             <a:avLst>
@@ -14829,7 +14251,7 @@
                 <a:srgbClr val="73787E"/>
               </a:gs>
             </a:gsLst>
-            <a:lin ang="18900000" scaled="0"/>
+            <a:lin scaled="0" ang="18900000"/>
           </a:gradFill>
           <a:ln>
             <a:noFill/>
@@ -14861,7 +14283,6 @@
           <a:lstStyle/>
           <a:p>
             <a:pPr algn="ctr"/>
-            <a:endParaRPr/>
           </a:p>
         </p:txBody>
       </p:sp>
@@ -14873,8 +14294,8 @@
         </p:nvSpPr>
         <p:spPr>
           <a:xfrm>
-            <a:off x="960120" y="399564"/>
-            <a:ext cx="9692640" cy="435312"/>
+            <a:off x="960120" y="274320"/>
+            <a:ext cx="9692640" cy="685800"/>
           </a:xfrm>
           <a:prstGeom prst="rect">
             <a:avLst/>
@@ -14896,7 +14317,7 @@
               </a:spcAft>
             </a:pPr>
             <a:r>
-              <a:rPr lang="ko-KR" altLang="en-US" sz="2150" b="1" dirty="0">
+              <a:rPr sz="2150" b="1">
                 <a:solidFill>
                   <a:srgbClr val="1C1C1E"/>
                 </a:solidFill>
@@ -14905,133 +14326,6 @@
               </a:rPr>
               <a:t>프로젝트 배경 — 분만취약지 제도와 접근성의 두 축</a:t>
             </a:r>
-            <a:r>
-              <a:rPr sz="2150" b="1" dirty="0">
-                <a:solidFill>
-                  <a:srgbClr val="1C1C1E"/>
-                </a:solidFill>
-                <a:latin typeface="맑은 고딕"/>
-                <a:ea typeface="맑은 고딕"/>
-              </a:rPr>
-              <a:t/>
-            </a:r>
-            <a:r>
-              <a:rPr sz="2150" b="1" dirty="0" err="1">
-                <a:solidFill>
-                  <a:srgbClr val="1C1C1E"/>
-                </a:solidFill>
-                <a:latin typeface="맑은 고딕"/>
-                <a:ea typeface="맑은 고딕"/>
-              </a:rPr>
-              <a:t/>
-            </a:r>
-            <a:r>
-              <a:rPr sz="2150" b="1" dirty="0">
-                <a:solidFill>
-                  <a:srgbClr val="1C1C1E"/>
-                </a:solidFill>
-                <a:latin typeface="맑은 고딕"/>
-                <a:ea typeface="맑은 고딕"/>
-              </a:rPr>
-              <a:t/>
-            </a:r>
-            <a:r>
-              <a:rPr sz="2150" b="1" dirty="0" err="1">
-                <a:solidFill>
-                  <a:srgbClr val="1C1C1E"/>
-                </a:solidFill>
-                <a:latin typeface="맑은 고딕"/>
-                <a:ea typeface="맑은 고딕"/>
-              </a:rPr>
-              <a:t/>
-            </a:r>
-            <a:r>
-              <a:rPr sz="2150" b="1" dirty="0">
-                <a:solidFill>
-                  <a:srgbClr val="1C1C1E"/>
-                </a:solidFill>
-                <a:latin typeface="맑은 고딕"/>
-                <a:ea typeface="맑은 고딕"/>
-              </a:rPr>
-              <a:t/>
-            </a:r>
-            <a:r>
-              <a:rPr sz="2150" b="1" dirty="0" err="1">
-                <a:solidFill>
-                  <a:srgbClr val="1C1C1E"/>
-                </a:solidFill>
-                <a:latin typeface="맑은 고딕"/>
-                <a:ea typeface="맑은 고딕"/>
-              </a:rPr>
-              <a:t/>
-            </a:r>
-            <a:r>
-              <a:rPr sz="2150" b="1" dirty="0">
-                <a:solidFill>
-                  <a:srgbClr val="1C1C1E"/>
-                </a:solidFill>
-                <a:latin typeface="맑은 고딕"/>
-                <a:ea typeface="맑은 고딕"/>
-              </a:rPr>
-              <a:t/>
-            </a:r>
-            <a:r>
-              <a:rPr sz="2150" b="1" dirty="0" err="1">
-                <a:solidFill>
-                  <a:srgbClr val="1C1C1E"/>
-                </a:solidFill>
-                <a:latin typeface="맑은 고딕"/>
-                <a:ea typeface="맑은 고딕"/>
-              </a:rPr>
-              <a:t/>
-            </a:r>
-            <a:r>
-              <a:rPr sz="2150" b="1" dirty="0">
-                <a:solidFill>
-                  <a:srgbClr val="1C1C1E"/>
-                </a:solidFill>
-                <a:latin typeface="맑은 고딕"/>
-                <a:ea typeface="맑은 고딕"/>
-              </a:rPr>
-              <a:t/>
-            </a:r>
-            <a:r>
-              <a:rPr sz="2150" b="1" dirty="0" err="1">
-                <a:solidFill>
-                  <a:srgbClr val="1C1C1E"/>
-                </a:solidFill>
-                <a:latin typeface="맑은 고딕"/>
-                <a:ea typeface="맑은 고딕"/>
-              </a:rPr>
-              <a:t/>
-            </a:r>
-            <a:r>
-              <a:rPr sz="2150" b="1" dirty="0">
-                <a:solidFill>
-                  <a:srgbClr val="1C1C1E"/>
-                </a:solidFill>
-                <a:latin typeface="맑은 고딕"/>
-                <a:ea typeface="맑은 고딕"/>
-              </a:rPr>
-              <a:t/>
-            </a:r>
-            <a:r>
-              <a:rPr sz="2150" b="1" dirty="0" err="1">
-                <a:solidFill>
-                  <a:srgbClr val="1C1C1E"/>
-                </a:solidFill>
-                <a:latin typeface="맑은 고딕"/>
-                <a:ea typeface="맑은 고딕"/>
-              </a:rPr>
-              <a:t/>
-            </a:r>
-            <a:endParaRPr sz="2150" b="1" dirty="0">
-              <a:solidFill>
-                <a:srgbClr val="1C1C1E"/>
-              </a:solidFill>
-              <a:latin typeface="맑은 고딕"/>
-              <a:ea typeface="맑은 고딕"/>
-            </a:endParaRPr>
           </a:p>
         </p:txBody>
       </p:sp>
@@ -15058,7 +14352,7 @@
                 <a:srgbClr val="FFFFFF"/>
               </a:gs>
             </a:gsLst>
-            <a:lin ang="0" scaled="0"/>
+            <a:lin scaled="0" ang="0"/>
           </a:gradFill>
           <a:ln>
             <a:noFill/>
@@ -15084,7 +14378,6 @@
           <a:lstStyle/>
           <a:p>
             <a:pPr algn="ctr"/>
-            <a:endParaRPr/>
           </a:p>
         </p:txBody>
       </p:sp>
@@ -15140,7 +14433,7 @@
         <p:spPr>
           <a:xfrm>
             <a:off x="548640" y="1097280"/>
-            <a:ext cx="11155680" cy="291747"/>
+            <a:ext cx="11155680" cy="384048"/>
           </a:xfrm>
           <a:prstGeom prst="rect">
             <a:avLst/>
@@ -15162,7 +14455,7 @@
               </a:spcAft>
             </a:pPr>
             <a:r>
-              <a:rPr lang="ko-KR" altLang="en-US" sz="1250" b="0" dirty="0">
+              <a:rPr sz="1250" b="0">
                 <a:solidFill>
                   <a:srgbClr val="767A7F"/>
                 </a:solidFill>
@@ -15171,113 +14464,6 @@
               </a:rPr>
               <a:t>무엇을 다루는 제도이고, 이 프로젝트는 그중 무엇을 감사했는가</a:t>
             </a:r>
-            <a:r>
-              <a:rPr lang="en-US" altLang="ko-KR" sz="1250" b="0" dirty="0">
-                <a:solidFill>
-                  <a:srgbClr val="767A7F"/>
-                </a:solidFill>
-                <a:latin typeface="맑은 고딕"/>
-                <a:ea typeface="맑은 고딕"/>
-              </a:rPr>
-              <a:t/>
-            </a:r>
-            <a:r>
-              <a:rPr sz="1250" b="0" dirty="0">
-                <a:solidFill>
-                  <a:srgbClr val="767A7F"/>
-                </a:solidFill>
-                <a:latin typeface="맑은 고딕"/>
-                <a:ea typeface="맑은 고딕"/>
-              </a:rPr>
-              <a:t/>
-            </a:r>
-            <a:r>
-              <a:rPr sz="1250" b="0" dirty="0" err="1">
-                <a:solidFill>
-                  <a:srgbClr val="767A7F"/>
-                </a:solidFill>
-                <a:latin typeface="맑은 고딕"/>
-                <a:ea typeface="맑은 고딕"/>
-              </a:rPr>
-              <a:t/>
-            </a:r>
-            <a:r>
-              <a:rPr sz="1250" b="0" dirty="0">
-                <a:solidFill>
-                  <a:srgbClr val="767A7F"/>
-                </a:solidFill>
-                <a:latin typeface="맑은 고딕"/>
-                <a:ea typeface="맑은 고딕"/>
-              </a:rPr>
-              <a:t/>
-            </a:r>
-            <a:r>
-              <a:rPr sz="1250" b="0" dirty="0" err="1">
-                <a:solidFill>
-                  <a:srgbClr val="767A7F"/>
-                </a:solidFill>
-                <a:latin typeface="맑은 고딕"/>
-                <a:ea typeface="맑은 고딕"/>
-              </a:rPr>
-              <a:t/>
-            </a:r>
-            <a:r>
-              <a:rPr sz="1250" b="0" dirty="0">
-                <a:solidFill>
-                  <a:srgbClr val="767A7F"/>
-                </a:solidFill>
-                <a:latin typeface="맑은 고딕"/>
-                <a:ea typeface="맑은 고딕"/>
-              </a:rPr>
-              <a:t/>
-            </a:r>
-            <a:r>
-              <a:rPr sz="1250" b="0" dirty="0" err="1">
-                <a:solidFill>
-                  <a:srgbClr val="767A7F"/>
-                </a:solidFill>
-                <a:latin typeface="맑은 고딕"/>
-                <a:ea typeface="맑은 고딕"/>
-              </a:rPr>
-              <a:t/>
-            </a:r>
-            <a:r>
-              <a:rPr sz="1250" b="0" dirty="0">
-                <a:solidFill>
-                  <a:srgbClr val="767A7F"/>
-                </a:solidFill>
-                <a:latin typeface="맑은 고딕"/>
-                <a:ea typeface="맑은 고딕"/>
-              </a:rPr>
-              <a:t/>
-            </a:r>
-            <a:r>
-              <a:rPr sz="1250" b="0" dirty="0" err="1">
-                <a:solidFill>
-                  <a:srgbClr val="767A7F"/>
-                </a:solidFill>
-                <a:latin typeface="맑은 고딕"/>
-                <a:ea typeface="맑은 고딕"/>
-              </a:rPr>
-              <a:t/>
-            </a:r>
-            <a:r>
-              <a:rPr lang="ko-KR" altLang="en-US" sz="1250" b="0" dirty="0">
-                <a:solidFill>
-                  <a:srgbClr val="767A7F"/>
-                </a:solidFill>
-                <a:latin typeface="맑은 고딕"/>
-                <a:ea typeface="맑은 고딕"/>
-              </a:rPr>
-              <a:t/>
-            </a:r>
-            <a:endParaRPr sz="1250" b="0" dirty="0">
-              <a:solidFill>
-                <a:srgbClr val="767A7F"/>
-              </a:solidFill>
-              <a:latin typeface="맑은 고딕"/>
-              <a:ea typeface="맑은 고딕"/>
-            </a:endParaRPr>
           </a:p>
         </p:txBody>
       </p:sp>
@@ -15375,7 +14561,6 @@
           <a:lstStyle/>
           <a:p>
             <a:pPr algn="ctr"/>
-            <a:endParaRPr/>
           </a:p>
         </p:txBody>
       </p:sp>
@@ -15388,7 +14573,7 @@
         <p:spPr>
           <a:xfrm>
             <a:off x="685800" y="1499616"/>
-            <a:ext cx="3246120" cy="933269"/>
+            <a:ext cx="3246120" cy="1527048"/>
           </a:xfrm>
           <a:prstGeom prst="rect">
             <a:avLst/>
@@ -15410,7 +14595,7 @@
               </a:spcAft>
             </a:pPr>
             <a:r>
-              <a:rPr sz="1300" b="1" dirty="0">
+              <a:rPr sz="1300" b="1">
                 <a:solidFill>
                   <a:srgbClr val="33393F"/>
                 </a:solidFill>
@@ -15419,35 +14604,18 @@
               </a:rPr>
               <a:t>① 분만취약지란 무엇인가</a:t>
             </a:r>
-            <a:r>
-              <a:rPr lang="ko-KR" altLang="en-US" sz="1300" b="1" dirty="0">
-                <a:solidFill>
-                  <a:srgbClr val="33393F"/>
-                </a:solidFill>
-                <a:latin typeface="맑은 고딕"/>
-                <a:ea typeface="맑은 고딕"/>
-              </a:rPr>
-              <a:t/>
-            </a:r>
-            <a:endParaRPr lang="en-US" altLang="ko-KR" sz="1300" b="1" dirty="0">
-              <a:solidFill>
-                <a:srgbClr val="33393F"/>
-              </a:solidFill>
-              <a:latin typeface="맑은 고딕"/>
-              <a:ea typeface="맑은 고딕"/>
-            </a:endParaRPr>
-          </a:p>
-          <a:p>
-            <a:pPr>
-              <a:lnSpc>
-                <a:spcPct val="114000"/>
-              </a:lnSpc>
-              <a:spcAft>
-                <a:spcPts val="350"/>
-              </a:spcAft>
-            </a:pPr>
-            <a:r>
-              <a:rPr sz="1100" b="0" dirty="0">
+          </a:p>
+          <a:p>
+            <a:pPr marL="160020" indent="-160020">
+              <a:lnSpc>
+                <a:spcPct val="114000"/>
+              </a:lnSpc>
+              <a:spcAft>
+                <a:spcPts val="200"/>
+              </a:spcAft>
+            </a:pPr>
+            <a:r>
+              <a:rPr sz="1100" b="0">
                 <a:solidFill>
                   <a:srgbClr val="1C1C1E"/>
                 </a:solidFill>
@@ -15456,263 +14624,6 @@
               </a:rPr>
               <a:t>• 소득·인구가 적은 지역이 아니라, 그 지역 가임기 여성이 ① 분만 가능 기관까지 60분 안에 닿기 어렵고(접근성) ② 실제 출산도 60분 안에 하지 못하는(이용률) 시·군 — 즉 거리와 시간으로 정의된다</a:t>
             </a:r>
-            <a:r>
-              <a:rPr sz="1100" b="0" dirty="0" err="1">
-                <a:solidFill>
-                  <a:srgbClr val="1C1C1E"/>
-                </a:solidFill>
-                <a:latin typeface="맑은 고딕"/>
-                <a:ea typeface="맑은 고딕"/>
-              </a:rPr>
-              <a:t/>
-            </a:r>
-            <a:r>
-              <a:rPr sz="1100" b="0" dirty="0">
-                <a:solidFill>
-                  <a:srgbClr val="1C1C1E"/>
-                </a:solidFill>
-                <a:latin typeface="맑은 고딕"/>
-                <a:ea typeface="맑은 고딕"/>
-              </a:rPr>
-              <a:t/>
-            </a:r>
-            <a:r>
-              <a:rPr sz="1100" b="0" dirty="0" err="1">
-                <a:solidFill>
-                  <a:srgbClr val="1C1C1E"/>
-                </a:solidFill>
-                <a:latin typeface="맑은 고딕"/>
-                <a:ea typeface="맑은 고딕"/>
-              </a:rPr>
-              <a:t/>
-            </a:r>
-            <a:r>
-              <a:rPr sz="1100" b="0" dirty="0">
-                <a:solidFill>
-                  <a:srgbClr val="1C1C1E"/>
-                </a:solidFill>
-                <a:latin typeface="맑은 고딕"/>
-                <a:ea typeface="맑은 고딕"/>
-              </a:rPr>
-              <a:t/>
-            </a:r>
-            <a:r>
-              <a:rPr sz="1100" b="0" dirty="0" err="1">
-                <a:solidFill>
-                  <a:srgbClr val="1C1C1E"/>
-                </a:solidFill>
-                <a:latin typeface="맑은 고딕"/>
-                <a:ea typeface="맑은 고딕"/>
-              </a:rPr>
-              <a:t/>
-            </a:r>
-            <a:r>
-              <a:rPr sz="1100" b="0" dirty="0">
-                <a:solidFill>
-                  <a:srgbClr val="1C1C1E"/>
-                </a:solidFill>
-                <a:latin typeface="맑은 고딕"/>
-                <a:ea typeface="맑은 고딕"/>
-              </a:rPr>
-              <a:t/>
-            </a:r>
-            <a:r>
-              <a:rPr sz="1100" b="0" dirty="0" err="1">
-                <a:solidFill>
-                  <a:srgbClr val="1C1C1E"/>
-                </a:solidFill>
-                <a:latin typeface="맑은 고딕"/>
-                <a:ea typeface="맑은 고딕"/>
-              </a:rPr>
-              <a:t/>
-            </a:r>
-            <a:r>
-              <a:rPr sz="1100" b="0" dirty="0">
-                <a:solidFill>
-                  <a:srgbClr val="1C1C1E"/>
-                </a:solidFill>
-                <a:latin typeface="맑은 고딕"/>
-                <a:ea typeface="맑은 고딕"/>
-              </a:rPr>
-              <a:t/>
-            </a:r>
-            <a:r>
-              <a:rPr sz="1100" b="0" dirty="0" err="1">
-                <a:solidFill>
-                  <a:srgbClr val="1C1C1E"/>
-                </a:solidFill>
-                <a:latin typeface="맑은 고딕"/>
-                <a:ea typeface="맑은 고딕"/>
-              </a:rPr>
-              <a:t/>
-            </a:r>
-            <a:r>
-              <a:rPr sz="1100" b="0" dirty="0">
-                <a:solidFill>
-                  <a:srgbClr val="1C1C1E"/>
-                </a:solidFill>
-                <a:latin typeface="맑은 고딕"/>
-                <a:ea typeface="맑은 고딕"/>
-              </a:rPr>
-              <a:t/>
-            </a:r>
-            <a:r>
-              <a:rPr sz="1100" b="0" dirty="0" err="1">
-                <a:solidFill>
-                  <a:srgbClr val="1C1C1E"/>
-                </a:solidFill>
-                <a:latin typeface="맑은 고딕"/>
-                <a:ea typeface="맑은 고딕"/>
-              </a:rPr>
-              <a:t/>
-            </a:r>
-            <a:r>
-              <a:rPr sz="1100" b="0" dirty="0">
-                <a:solidFill>
-                  <a:srgbClr val="1C1C1E"/>
-                </a:solidFill>
-                <a:latin typeface="맑은 고딕"/>
-                <a:ea typeface="맑은 고딕"/>
-              </a:rPr>
-              <a:t/>
-            </a:r>
-            <a:r>
-              <a:rPr sz="1100" b="0" dirty="0" err="1">
-                <a:solidFill>
-                  <a:srgbClr val="1C1C1E"/>
-                </a:solidFill>
-                <a:latin typeface="맑은 고딕"/>
-                <a:ea typeface="맑은 고딕"/>
-              </a:rPr>
-              <a:t/>
-            </a:r>
-            <a:r>
-              <a:rPr sz="1100" b="0" dirty="0">
-                <a:solidFill>
-                  <a:srgbClr val="1C1C1E"/>
-                </a:solidFill>
-                <a:latin typeface="맑은 고딕"/>
-                <a:ea typeface="맑은 고딕"/>
-              </a:rPr>
-              <a:t/>
-            </a:r>
-            <a:r>
-              <a:rPr sz="1100" b="0" dirty="0" err="1">
-                <a:solidFill>
-                  <a:srgbClr val="1C1C1E"/>
-                </a:solidFill>
-                <a:latin typeface="맑은 고딕"/>
-                <a:ea typeface="맑은 고딕"/>
-              </a:rPr>
-              <a:t/>
-            </a:r>
-            <a:r>
-              <a:rPr sz="1100" b="0" dirty="0">
-                <a:solidFill>
-                  <a:srgbClr val="1C1C1E"/>
-                </a:solidFill>
-                <a:latin typeface="맑은 고딕"/>
-                <a:ea typeface="맑은 고딕"/>
-              </a:rPr>
-              <a:t/>
-            </a:r>
-            <a:r>
-              <a:rPr sz="1100" b="0" dirty="0" err="1">
-                <a:solidFill>
-                  <a:srgbClr val="1C1C1E"/>
-                </a:solidFill>
-                <a:latin typeface="맑은 고딕"/>
-                <a:ea typeface="맑은 고딕"/>
-              </a:rPr>
-              <a:t/>
-            </a:r>
-            <a:r>
-              <a:rPr sz="1100" b="0" dirty="0">
-                <a:solidFill>
-                  <a:srgbClr val="1C1C1E"/>
-                </a:solidFill>
-                <a:latin typeface="맑은 고딕"/>
-                <a:ea typeface="맑은 고딕"/>
-              </a:rPr>
-              <a:t/>
-            </a:r>
-            <a:r>
-              <a:rPr sz="1100" b="0" dirty="0" err="1">
-                <a:solidFill>
-                  <a:srgbClr val="1C1C1E"/>
-                </a:solidFill>
-                <a:latin typeface="맑은 고딕"/>
-                <a:ea typeface="맑은 고딕"/>
-              </a:rPr>
-              <a:t/>
-            </a:r>
-            <a:r>
-              <a:rPr sz="1100" b="0" dirty="0">
-                <a:solidFill>
-                  <a:srgbClr val="1C1C1E"/>
-                </a:solidFill>
-                <a:latin typeface="맑은 고딕"/>
-                <a:ea typeface="맑은 고딕"/>
-              </a:rPr>
-              <a:t/>
-            </a:r>
-            <a:r>
-              <a:rPr sz="1100" b="0" dirty="0" err="1">
-                <a:solidFill>
-                  <a:srgbClr val="1C1C1E"/>
-                </a:solidFill>
-                <a:latin typeface="맑은 고딕"/>
-                <a:ea typeface="맑은 고딕"/>
-              </a:rPr>
-              <a:t/>
-            </a:r>
-            <a:r>
-              <a:rPr sz="1100" b="0" dirty="0">
-                <a:solidFill>
-                  <a:srgbClr val="1C1C1E"/>
-                </a:solidFill>
-                <a:latin typeface="맑은 고딕"/>
-                <a:ea typeface="맑은 고딕"/>
-              </a:rPr>
-              <a:t/>
-            </a:r>
-            <a:r>
-              <a:rPr sz="1100" b="0" dirty="0" err="1">
-                <a:solidFill>
-                  <a:srgbClr val="1C1C1E"/>
-                </a:solidFill>
-                <a:latin typeface="맑은 고딕"/>
-                <a:ea typeface="맑은 고딕"/>
-              </a:rPr>
-              <a:t/>
-            </a:r>
-            <a:r>
-              <a:rPr sz="1100" b="0" dirty="0">
-                <a:solidFill>
-                  <a:srgbClr val="1C1C1E"/>
-                </a:solidFill>
-                <a:latin typeface="맑은 고딕"/>
-                <a:ea typeface="맑은 고딕"/>
-              </a:rPr>
-              <a:t/>
-            </a:r>
-            <a:r>
-              <a:rPr sz="1100" b="0" dirty="0" err="1">
-                <a:solidFill>
-                  <a:srgbClr val="1C1C1E"/>
-                </a:solidFill>
-                <a:latin typeface="맑은 고딕"/>
-                <a:ea typeface="맑은 고딕"/>
-              </a:rPr>
-              <a:t/>
-            </a:r>
-            <a:endParaRPr sz="1100" b="0" dirty="0">
-              <a:solidFill>
-                <a:srgbClr val="1C1C1E"/>
-              </a:solidFill>
-              <a:latin typeface="맑은 고딕"/>
-              <a:ea typeface="맑은 고딕"/>
-            </a:endParaRPr>
           </a:p>
         </p:txBody>
       </p:sp>
@@ -15767,7 +14678,6 @@
           <a:lstStyle/>
           <a:p>
             <a:pPr algn="ctr"/>
-            <a:endParaRPr/>
           </a:p>
         </p:txBody>
       </p:sp>
@@ -15802,7 +14712,7 @@
               </a:spcAft>
             </a:pPr>
             <a:r>
-              <a:rPr sz="1300" b="1" dirty="0">
+              <a:rPr sz="1300" b="1">
                 <a:solidFill>
                   <a:srgbClr val="33393F"/>
                 </a:solidFill>
@@ -15811,43 +14721,6 @@
               </a:rPr>
               <a:t>② 접근성은 원래 두 축이다</a:t>
             </a:r>
-            <a:r>
-              <a:rPr sz="1300" b="1" dirty="0" err="1">
-                <a:solidFill>
-                  <a:srgbClr val="33393F"/>
-                </a:solidFill>
-                <a:latin typeface="맑은 고딕"/>
-                <a:ea typeface="맑은 고딕"/>
-              </a:rPr>
-              <a:t/>
-            </a:r>
-            <a:r>
-              <a:rPr sz="1300" b="1" dirty="0">
-                <a:solidFill>
-                  <a:srgbClr val="33393F"/>
-                </a:solidFill>
-                <a:latin typeface="맑은 고딕"/>
-                <a:ea typeface="맑은 고딕"/>
-              </a:rPr>
-              <a:t/>
-            </a:r>
-            <a:r>
-              <a:rPr sz="1300" b="1" dirty="0" err="1">
-                <a:solidFill>
-                  <a:srgbClr val="33393F"/>
-                </a:solidFill>
-                <a:latin typeface="맑은 고딕"/>
-                <a:ea typeface="맑은 고딕"/>
-              </a:rPr>
-              <a:t/>
-            </a:r>
-            <a:endParaRPr sz="1300" b="1" dirty="0">
-              <a:solidFill>
-                <a:srgbClr val="33393F"/>
-              </a:solidFill>
-              <a:latin typeface="맑은 고딕"/>
-              <a:ea typeface="맑은 고딕"/>
-            </a:endParaRPr>
           </a:p>
           <a:p>
             <a:pPr marL="160020" indent="-160020">
@@ -15859,7 +14732,7 @@
               </a:spcAft>
             </a:pPr>
             <a:r>
-              <a:rPr sz="1100" b="0" dirty="0">
+              <a:rPr sz="1100" b="0">
                 <a:solidFill>
                   <a:srgbClr val="1C1C1E"/>
                 </a:solidFill>
@@ -15868,223 +14741,6 @@
               </a:rPr>
               <a:t>• 보건지리학 표준(2SFCA)은 접근성을 공간 축(얼마나 멀리 있는가) × 비공간 축(그곳에 의사가 있는가)의 결합으로 본다. 현행 판정식이 어느 축을 보는지가 감사의 출발점이다</a:t>
             </a:r>
-            <a:r>
-              <a:rPr sz="1100" b="0" dirty="0" err="1">
-                <a:solidFill>
-                  <a:srgbClr val="1C1C1E"/>
-                </a:solidFill>
-                <a:latin typeface="맑은 고딕"/>
-                <a:ea typeface="맑은 고딕"/>
-              </a:rPr>
-              <a:t/>
-            </a:r>
-            <a:r>
-              <a:rPr sz="1100" b="0" dirty="0">
-                <a:solidFill>
-                  <a:srgbClr val="1C1C1E"/>
-                </a:solidFill>
-                <a:latin typeface="맑은 고딕"/>
-                <a:ea typeface="맑은 고딕"/>
-              </a:rPr>
-              <a:t/>
-            </a:r>
-            <a:r>
-              <a:rPr sz="1100" b="0" dirty="0" err="1">
-                <a:solidFill>
-                  <a:srgbClr val="1C1C1E"/>
-                </a:solidFill>
-                <a:latin typeface="맑은 고딕"/>
-                <a:ea typeface="맑은 고딕"/>
-              </a:rPr>
-              <a:t/>
-            </a:r>
-            <a:r>
-              <a:rPr sz="1100" b="0" dirty="0">
-                <a:solidFill>
-                  <a:srgbClr val="1C1C1E"/>
-                </a:solidFill>
-                <a:latin typeface="맑은 고딕"/>
-                <a:ea typeface="맑은 고딕"/>
-              </a:rPr>
-              <a:t/>
-            </a:r>
-            <a:r>
-              <a:rPr sz="1100" b="0" dirty="0" err="1">
-                <a:solidFill>
-                  <a:srgbClr val="1C1C1E"/>
-                </a:solidFill>
-                <a:latin typeface="맑은 고딕"/>
-                <a:ea typeface="맑은 고딕"/>
-              </a:rPr>
-              <a:t/>
-            </a:r>
-            <a:r>
-              <a:rPr sz="1100" b="0" dirty="0">
-                <a:solidFill>
-                  <a:srgbClr val="1C1C1E"/>
-                </a:solidFill>
-                <a:latin typeface="맑은 고딕"/>
-                <a:ea typeface="맑은 고딕"/>
-              </a:rPr>
-              <a:t/>
-            </a:r>
-            <a:r>
-              <a:rPr sz="1100" b="0" dirty="0" err="1">
-                <a:solidFill>
-                  <a:srgbClr val="1C1C1E"/>
-                </a:solidFill>
-                <a:latin typeface="맑은 고딕"/>
-                <a:ea typeface="맑은 고딕"/>
-              </a:rPr>
-              <a:t/>
-            </a:r>
-            <a:r>
-              <a:rPr sz="1100" b="0" dirty="0">
-                <a:solidFill>
-                  <a:srgbClr val="1C1C1E"/>
-                </a:solidFill>
-                <a:latin typeface="맑은 고딕"/>
-                <a:ea typeface="맑은 고딕"/>
-              </a:rPr>
-              <a:t/>
-            </a:r>
-            <a:r>
-              <a:rPr sz="1100" b="0" dirty="0" err="1">
-                <a:solidFill>
-                  <a:srgbClr val="1C1C1E"/>
-                </a:solidFill>
-                <a:latin typeface="맑은 고딕"/>
-                <a:ea typeface="맑은 고딕"/>
-              </a:rPr>
-              <a:t/>
-            </a:r>
-            <a:r>
-              <a:rPr sz="1100" b="0" dirty="0">
-                <a:solidFill>
-                  <a:srgbClr val="1C1C1E"/>
-                </a:solidFill>
-                <a:latin typeface="맑은 고딕"/>
-                <a:ea typeface="맑은 고딕"/>
-              </a:rPr>
-              <a:t/>
-            </a:r>
-            <a:r>
-              <a:rPr sz="1100" b="0" dirty="0" err="1">
-                <a:solidFill>
-                  <a:srgbClr val="1C1C1E"/>
-                </a:solidFill>
-                <a:latin typeface="맑은 고딕"/>
-                <a:ea typeface="맑은 고딕"/>
-              </a:rPr>
-              <a:t/>
-            </a:r>
-            <a:r>
-              <a:rPr sz="1100" b="0" dirty="0">
-                <a:solidFill>
-                  <a:srgbClr val="1C1C1E"/>
-                </a:solidFill>
-                <a:latin typeface="맑은 고딕"/>
-                <a:ea typeface="맑은 고딕"/>
-              </a:rPr>
-              <a:t/>
-            </a:r>
-            <a:r>
-              <a:rPr sz="1100" b="0" dirty="0" err="1">
-                <a:solidFill>
-                  <a:srgbClr val="1C1C1E"/>
-                </a:solidFill>
-                <a:latin typeface="맑은 고딕"/>
-                <a:ea typeface="맑은 고딕"/>
-              </a:rPr>
-              <a:t/>
-            </a:r>
-            <a:r>
-              <a:rPr sz="1100" b="0" dirty="0">
-                <a:solidFill>
-                  <a:srgbClr val="1C1C1E"/>
-                </a:solidFill>
-                <a:latin typeface="맑은 고딕"/>
-                <a:ea typeface="맑은 고딕"/>
-              </a:rPr>
-              <a:t/>
-            </a:r>
-            <a:r>
-              <a:rPr sz="1100" b="0" dirty="0" err="1">
-                <a:solidFill>
-                  <a:srgbClr val="1C1C1E"/>
-                </a:solidFill>
-                <a:latin typeface="맑은 고딕"/>
-                <a:ea typeface="맑은 고딕"/>
-              </a:rPr>
-              <a:t/>
-            </a:r>
-            <a:r>
-              <a:rPr sz="1100" b="0" dirty="0">
-                <a:solidFill>
-                  <a:srgbClr val="1C1C1E"/>
-                </a:solidFill>
-                <a:latin typeface="맑은 고딕"/>
-                <a:ea typeface="맑은 고딕"/>
-              </a:rPr>
-              <a:t/>
-            </a:r>
-            <a:r>
-              <a:rPr sz="1100" b="0" dirty="0" err="1">
-                <a:solidFill>
-                  <a:srgbClr val="1C1C1E"/>
-                </a:solidFill>
-                <a:latin typeface="맑은 고딕"/>
-                <a:ea typeface="맑은 고딕"/>
-              </a:rPr>
-              <a:t/>
-            </a:r>
-            <a:r>
-              <a:rPr sz="1100" b="0" dirty="0">
-                <a:solidFill>
-                  <a:srgbClr val="1C1C1E"/>
-                </a:solidFill>
-                <a:latin typeface="맑은 고딕"/>
-                <a:ea typeface="맑은 고딕"/>
-              </a:rPr>
-              <a:t/>
-            </a:r>
-            <a:r>
-              <a:rPr sz="1100" b="0" dirty="0" err="1">
-                <a:solidFill>
-                  <a:srgbClr val="1C1C1E"/>
-                </a:solidFill>
-                <a:latin typeface="맑은 고딕"/>
-                <a:ea typeface="맑은 고딕"/>
-              </a:rPr>
-              <a:t/>
-            </a:r>
-            <a:r>
-              <a:rPr sz="1100" b="0" dirty="0">
-                <a:solidFill>
-                  <a:srgbClr val="1C1C1E"/>
-                </a:solidFill>
-                <a:latin typeface="맑은 고딕"/>
-                <a:ea typeface="맑은 고딕"/>
-              </a:rPr>
-              <a:t/>
-            </a:r>
-            <a:r>
-              <a:rPr sz="1100" b="0" dirty="0" err="1">
-                <a:solidFill>
-                  <a:srgbClr val="1C1C1E"/>
-                </a:solidFill>
-                <a:latin typeface="맑은 고딕"/>
-                <a:ea typeface="맑은 고딕"/>
-              </a:rPr>
-              <a:t/>
-            </a:r>
-            <a:endParaRPr sz="1100" b="0" dirty="0">
-              <a:solidFill>
-                <a:srgbClr val="1C1C1E"/>
-              </a:solidFill>
-              <a:latin typeface="맑은 고딕"/>
-              <a:ea typeface="맑은 고딕"/>
-            </a:endParaRPr>
           </a:p>
         </p:txBody>
       </p:sp>
@@ -16139,7 +14795,6 @@
           <a:lstStyle/>
           <a:p>
             <a:pPr algn="ctr"/>
-            <a:endParaRPr/>
           </a:p>
         </p:txBody>
       </p:sp>
@@ -16152,7 +14807,7 @@
         <p:spPr>
           <a:xfrm>
             <a:off x="8366760" y="1499616"/>
-            <a:ext cx="3246120" cy="933269"/>
+            <a:ext cx="3246120" cy="1527048"/>
           </a:xfrm>
           <a:prstGeom prst="rect">
             <a:avLst/>
@@ -16174,7 +14829,7 @@
               </a:spcAft>
             </a:pPr>
             <a:r>
-              <a:rPr sz="1300" b="1" dirty="0">
+              <a:rPr sz="1300" b="1">
                 <a:solidFill>
                   <a:srgbClr val="000000"/>
                 </a:solidFill>
@@ -16183,35 +14838,18 @@
               </a:rPr>
               <a:t>③ 이 프로젝트가 감사한 것</a:t>
             </a:r>
-            <a:r>
-              <a:rPr lang="ko-KR" altLang="en-US" sz="1300" b="1" dirty="0">
-                <a:solidFill>
-                  <a:srgbClr val="000000"/>
-                </a:solidFill>
-                <a:latin typeface="맑은 고딕"/>
-                <a:ea typeface="맑은 고딕"/>
-              </a:rPr>
-              <a:t/>
-            </a:r>
-            <a:endParaRPr lang="en-US" altLang="ko-KR" sz="1300" b="1" dirty="0">
-              <a:solidFill>
-                <a:srgbClr val="000000"/>
-              </a:solidFill>
-              <a:latin typeface="맑은 고딕"/>
-              <a:ea typeface="맑은 고딕"/>
-            </a:endParaRPr>
-          </a:p>
-          <a:p>
-            <a:pPr>
-              <a:lnSpc>
-                <a:spcPct val="114000"/>
-              </a:lnSpc>
-              <a:spcAft>
-                <a:spcPts val="350"/>
-              </a:spcAft>
-            </a:pPr>
-            <a:r>
-              <a:rPr sz="1100" b="0" dirty="0">
+          </a:p>
+          <a:p>
+            <a:pPr marL="160020" indent="-160020">
+              <a:lnSpc>
+                <a:spcPct val="114000"/>
+              </a:lnSpc>
+              <a:spcAft>
+                <a:spcPts val="200"/>
+              </a:spcAft>
+            </a:pPr>
+            <a:r>
+              <a:rPr sz="1100" b="0">
                 <a:solidFill>
                   <a:srgbClr val="1C1C1E"/>
                 </a:solidFill>
@@ -16220,343 +14858,6 @@
               </a:rPr>
               <a:t>• 자원이 모자란 것(㉠)은 예산·인력의 영역이라 데이터가 답할 수 없다. 있는 자원이 체계적으로 배분되지 않는 것(㉡)은 규칙의 문제이므로 데이터로 답할 수 있다 — 이 프로젝트는 ㉡을 감사했다</a:t>
             </a:r>
-            <a:r>
-              <a:rPr sz="1100" b="0" dirty="0" err="1">
-                <a:solidFill>
-                  <a:srgbClr val="1C1C1E"/>
-                </a:solidFill>
-                <a:latin typeface="맑은 고딕"/>
-                <a:ea typeface="맑은 고딕"/>
-              </a:rPr>
-              <a:t/>
-            </a:r>
-            <a:r>
-              <a:rPr sz="1100" b="0" dirty="0">
-                <a:solidFill>
-                  <a:srgbClr val="1C1C1E"/>
-                </a:solidFill>
-                <a:latin typeface="맑은 고딕"/>
-                <a:ea typeface="맑은 고딕"/>
-              </a:rPr>
-              <a:t/>
-            </a:r>
-            <a:r>
-              <a:rPr sz="1100" b="0" dirty="0" err="1">
-                <a:solidFill>
-                  <a:srgbClr val="1C1C1E"/>
-                </a:solidFill>
-                <a:latin typeface="맑은 고딕"/>
-                <a:ea typeface="맑은 고딕"/>
-              </a:rPr>
-              <a:t/>
-            </a:r>
-            <a:r>
-              <a:rPr sz="1100" b="0" dirty="0">
-                <a:solidFill>
-                  <a:srgbClr val="1C1C1E"/>
-                </a:solidFill>
-                <a:latin typeface="맑은 고딕"/>
-                <a:ea typeface="맑은 고딕"/>
-              </a:rPr>
-              <a:t/>
-            </a:r>
-            <a:r>
-              <a:rPr sz="1100" b="0" dirty="0" err="1">
-                <a:solidFill>
-                  <a:srgbClr val="1C1C1E"/>
-                </a:solidFill>
-                <a:latin typeface="맑은 고딕"/>
-                <a:ea typeface="맑은 고딕"/>
-              </a:rPr>
-              <a:t/>
-            </a:r>
-            <a:r>
-              <a:rPr sz="1100" b="0" dirty="0">
-                <a:solidFill>
-                  <a:srgbClr val="1C1C1E"/>
-                </a:solidFill>
-                <a:latin typeface="맑은 고딕"/>
-                <a:ea typeface="맑은 고딕"/>
-              </a:rPr>
-              <a:t/>
-            </a:r>
-            <a:r>
-              <a:rPr sz="1100" b="0" dirty="0" err="1">
-                <a:solidFill>
-                  <a:srgbClr val="1C1C1E"/>
-                </a:solidFill>
-                <a:latin typeface="맑은 고딕"/>
-                <a:ea typeface="맑은 고딕"/>
-              </a:rPr>
-              <a:t/>
-            </a:r>
-            <a:r>
-              <a:rPr sz="1100" b="0" dirty="0">
-                <a:solidFill>
-                  <a:srgbClr val="1C1C1E"/>
-                </a:solidFill>
-                <a:latin typeface="맑은 고딕"/>
-                <a:ea typeface="맑은 고딕"/>
-              </a:rPr>
-              <a:t/>
-            </a:r>
-            <a:r>
-              <a:rPr sz="1100" b="0" dirty="0" err="1">
-                <a:solidFill>
-                  <a:srgbClr val="1C1C1E"/>
-                </a:solidFill>
-                <a:latin typeface="맑은 고딕"/>
-                <a:ea typeface="맑은 고딕"/>
-              </a:rPr>
-              <a:t/>
-            </a:r>
-            <a:r>
-              <a:rPr sz="1100" b="0" dirty="0">
-                <a:solidFill>
-                  <a:srgbClr val="1C1C1E"/>
-                </a:solidFill>
-                <a:latin typeface="맑은 고딕"/>
-                <a:ea typeface="맑은 고딕"/>
-              </a:rPr>
-              <a:t/>
-            </a:r>
-            <a:r>
-              <a:rPr sz="1100" b="0" dirty="0" err="1">
-                <a:solidFill>
-                  <a:srgbClr val="1C1C1E"/>
-                </a:solidFill>
-                <a:latin typeface="맑은 고딕"/>
-                <a:ea typeface="맑은 고딕"/>
-              </a:rPr>
-              <a:t/>
-            </a:r>
-            <a:r>
-              <a:rPr sz="1100" b="0" dirty="0">
-                <a:solidFill>
-                  <a:srgbClr val="1C1C1E"/>
-                </a:solidFill>
-                <a:latin typeface="맑은 고딕"/>
-                <a:ea typeface="맑은 고딕"/>
-              </a:rPr>
-              <a:t/>
-            </a:r>
-            <a:r>
-              <a:rPr sz="1100" b="0" dirty="0" err="1">
-                <a:solidFill>
-                  <a:srgbClr val="1C1C1E"/>
-                </a:solidFill>
-                <a:latin typeface="맑은 고딕"/>
-                <a:ea typeface="맑은 고딕"/>
-              </a:rPr>
-              <a:t/>
-            </a:r>
-            <a:r>
-              <a:rPr sz="1100" b="0" dirty="0">
-                <a:solidFill>
-                  <a:srgbClr val="1C1C1E"/>
-                </a:solidFill>
-                <a:latin typeface="맑은 고딕"/>
-                <a:ea typeface="맑은 고딕"/>
-              </a:rPr>
-              <a:t/>
-            </a:r>
-            <a:r>
-              <a:rPr sz="1100" b="0" dirty="0" err="1">
-                <a:solidFill>
-                  <a:srgbClr val="1C1C1E"/>
-                </a:solidFill>
-                <a:latin typeface="맑은 고딕"/>
-                <a:ea typeface="맑은 고딕"/>
-              </a:rPr>
-              <a:t/>
-            </a:r>
-            <a:r>
-              <a:rPr sz="1100" b="0" dirty="0">
-                <a:solidFill>
-                  <a:srgbClr val="1C1C1E"/>
-                </a:solidFill>
-                <a:latin typeface="맑은 고딕"/>
-                <a:ea typeface="맑은 고딕"/>
-              </a:rPr>
-              <a:t/>
-            </a:r>
-            <a:r>
-              <a:rPr sz="1100" b="0" dirty="0" err="1">
-                <a:solidFill>
-                  <a:srgbClr val="1C1C1E"/>
-                </a:solidFill>
-                <a:latin typeface="맑은 고딕"/>
-                <a:ea typeface="맑은 고딕"/>
-              </a:rPr>
-              <a:t/>
-            </a:r>
-            <a:r>
-              <a:rPr sz="1100" b="0" dirty="0">
-                <a:solidFill>
-                  <a:srgbClr val="1C1C1E"/>
-                </a:solidFill>
-                <a:latin typeface="맑은 고딕"/>
-                <a:ea typeface="맑은 고딕"/>
-              </a:rPr>
-              <a:t/>
-            </a:r>
-            <a:r>
-              <a:rPr sz="1100" b="0" dirty="0" err="1">
-                <a:solidFill>
-                  <a:srgbClr val="1C1C1E"/>
-                </a:solidFill>
-                <a:latin typeface="맑은 고딕"/>
-                <a:ea typeface="맑은 고딕"/>
-              </a:rPr>
-              <a:t/>
-            </a:r>
-            <a:r>
-              <a:rPr sz="1100" b="0" dirty="0">
-                <a:solidFill>
-                  <a:srgbClr val="1C1C1E"/>
-                </a:solidFill>
-                <a:latin typeface="맑은 고딕"/>
-                <a:ea typeface="맑은 고딕"/>
-              </a:rPr>
-              <a:t/>
-            </a:r>
-            <a:r>
-              <a:rPr sz="1100" b="0" dirty="0" err="1">
-                <a:solidFill>
-                  <a:srgbClr val="1C1C1E"/>
-                </a:solidFill>
-                <a:latin typeface="맑은 고딕"/>
-                <a:ea typeface="맑은 고딕"/>
-              </a:rPr>
-              <a:t/>
-            </a:r>
-            <a:r>
-              <a:rPr sz="1100" b="0" dirty="0">
-                <a:solidFill>
-                  <a:srgbClr val="1C1C1E"/>
-                </a:solidFill>
-                <a:latin typeface="맑은 고딕"/>
-                <a:ea typeface="맑은 고딕"/>
-              </a:rPr>
-              <a:t/>
-            </a:r>
-            <a:r>
-              <a:rPr sz="1100" b="0" dirty="0" err="1">
-                <a:solidFill>
-                  <a:srgbClr val="1C1C1E"/>
-                </a:solidFill>
-                <a:latin typeface="맑은 고딕"/>
-                <a:ea typeface="맑은 고딕"/>
-              </a:rPr>
-              <a:t/>
-            </a:r>
-            <a:r>
-              <a:rPr sz="1100" b="0" dirty="0">
-                <a:solidFill>
-                  <a:srgbClr val="1C1C1E"/>
-                </a:solidFill>
-                <a:latin typeface="맑은 고딕"/>
-                <a:ea typeface="맑은 고딕"/>
-              </a:rPr>
-              <a:t/>
-            </a:r>
-            <a:r>
-              <a:rPr sz="1100" b="0" dirty="0" err="1">
-                <a:solidFill>
-                  <a:srgbClr val="1C1C1E"/>
-                </a:solidFill>
-                <a:latin typeface="맑은 고딕"/>
-                <a:ea typeface="맑은 고딕"/>
-              </a:rPr>
-              <a:t/>
-            </a:r>
-            <a:r>
-              <a:rPr sz="1100" b="0" dirty="0">
-                <a:solidFill>
-                  <a:srgbClr val="1C1C1E"/>
-                </a:solidFill>
-                <a:latin typeface="맑은 고딕"/>
-                <a:ea typeface="맑은 고딕"/>
-              </a:rPr>
-              <a:t/>
-            </a:r>
-            <a:r>
-              <a:rPr sz="1100" b="0" dirty="0" err="1">
-                <a:solidFill>
-                  <a:srgbClr val="1C1C1E"/>
-                </a:solidFill>
-                <a:latin typeface="맑은 고딕"/>
-                <a:ea typeface="맑은 고딕"/>
-              </a:rPr>
-              <a:t/>
-            </a:r>
-            <a:r>
-              <a:rPr sz="1100" b="0" dirty="0">
-                <a:solidFill>
-                  <a:srgbClr val="1C1C1E"/>
-                </a:solidFill>
-                <a:latin typeface="맑은 고딕"/>
-                <a:ea typeface="맑은 고딕"/>
-              </a:rPr>
-              <a:t/>
-            </a:r>
-            <a:r>
-              <a:rPr sz="1100" b="0" dirty="0" err="1">
-                <a:solidFill>
-                  <a:srgbClr val="1C1C1E"/>
-                </a:solidFill>
-                <a:latin typeface="맑은 고딕"/>
-                <a:ea typeface="맑은 고딕"/>
-              </a:rPr>
-              <a:t/>
-            </a:r>
-            <a:r>
-              <a:rPr sz="1100" b="0" dirty="0">
-                <a:solidFill>
-                  <a:srgbClr val="1C1C1E"/>
-                </a:solidFill>
-                <a:latin typeface="맑은 고딕"/>
-                <a:ea typeface="맑은 고딕"/>
-              </a:rPr>
-              <a:t/>
-            </a:r>
-            <a:r>
-              <a:rPr sz="1100" b="0" dirty="0" err="1">
-                <a:solidFill>
-                  <a:srgbClr val="1C1C1E"/>
-                </a:solidFill>
-                <a:latin typeface="맑은 고딕"/>
-                <a:ea typeface="맑은 고딕"/>
-              </a:rPr>
-              <a:t/>
-            </a:r>
-            <a:r>
-              <a:rPr sz="1100" b="0" dirty="0">
-                <a:solidFill>
-                  <a:srgbClr val="1C1C1E"/>
-                </a:solidFill>
-                <a:latin typeface="맑은 고딕"/>
-                <a:ea typeface="맑은 고딕"/>
-              </a:rPr>
-              <a:t/>
-            </a:r>
-            <a:r>
-              <a:rPr sz="1100" b="0" dirty="0" err="1">
-                <a:solidFill>
-                  <a:srgbClr val="1C1C1E"/>
-                </a:solidFill>
-                <a:latin typeface="맑은 고딕"/>
-                <a:ea typeface="맑은 고딕"/>
-              </a:rPr>
-              <a:t/>
-            </a:r>
-            <a:endParaRPr sz="1100" b="0" dirty="0">
-              <a:solidFill>
-                <a:srgbClr val="1C1C1E"/>
-              </a:solidFill>
-              <a:latin typeface="맑은 고딕"/>
-              <a:ea typeface="맑은 고딕"/>
-            </a:endParaRPr>
           </a:p>
         </p:txBody>
       </p:sp>
@@ -16611,7 +14912,6 @@
           <a:lstStyle/>
           <a:p>
             <a:pPr algn="ctr"/>
-            <a:endParaRPr/>
           </a:p>
         </p:txBody>
       </p:sp>
@@ -16624,7 +14924,7 @@
         <p:spPr>
           <a:xfrm>
             <a:off x="685800" y="3529584"/>
-            <a:ext cx="10927080" cy="1370568"/>
+            <a:ext cx="10927080" cy="1316736"/>
           </a:xfrm>
           <a:prstGeom prst="rect">
             <a:avLst/>
@@ -16646,7 +14946,7 @@
               </a:spcAft>
             </a:pPr>
             <a:r>
-              <a:rPr sz="1300" b="1" dirty="0" err="1">
+              <a:rPr sz="1300" b="1">
                 <a:solidFill>
                   <a:srgbClr val="33393F"/>
                 </a:solidFill>
@@ -16655,196 +14955,6 @@
               </a:rPr>
               <a:t>제도는 15년째 운영 중이다 — 그런데 결과는</a:t>
             </a:r>
-            <a:r>
-              <a:rPr sz="1300" b="1" dirty="0">
-                <a:solidFill>
-                  <a:srgbClr val="33393F"/>
-                </a:solidFill>
-                <a:latin typeface="맑은 고딕"/>
-                <a:ea typeface="맑은 고딕"/>
-              </a:rPr>
-              <a:t/>
-            </a:r>
-            <a:r>
-              <a:rPr sz="1300" b="1" dirty="0" err="1">
-                <a:solidFill>
-                  <a:srgbClr val="33393F"/>
-                </a:solidFill>
-                <a:latin typeface="맑은 고딕"/>
-                <a:ea typeface="맑은 고딕"/>
-              </a:rPr>
-              <a:t/>
-            </a:r>
-            <a:r>
-              <a:rPr sz="1300" b="1" dirty="0">
-                <a:solidFill>
-                  <a:srgbClr val="33393F"/>
-                </a:solidFill>
-                <a:latin typeface="맑은 고딕"/>
-                <a:ea typeface="맑은 고딕"/>
-              </a:rPr>
-              <a:t/>
-            </a:r>
-            <a:r>
-              <a:rPr sz="1300" b="1" dirty="0" err="1">
-                <a:solidFill>
-                  <a:srgbClr val="33393F"/>
-                </a:solidFill>
-                <a:latin typeface="맑은 고딕"/>
-                <a:ea typeface="맑은 고딕"/>
-              </a:rPr>
-              <a:t/>
-            </a:r>
-            <a:r>
-              <a:rPr sz="1300" b="1" dirty="0">
-                <a:solidFill>
-                  <a:srgbClr val="33393F"/>
-                </a:solidFill>
-                <a:latin typeface="맑은 고딕"/>
-                <a:ea typeface="맑은 고딕"/>
-              </a:rPr>
-              <a:t/>
-            </a:r>
-            <a:r>
-              <a:rPr sz="1300" b="1" dirty="0" err="1">
-                <a:solidFill>
-                  <a:srgbClr val="33393F"/>
-                </a:solidFill>
-                <a:latin typeface="맑은 고딕"/>
-                <a:ea typeface="맑은 고딕"/>
-              </a:rPr>
-              <a:t/>
-            </a:r>
-            <a:r>
-              <a:rPr sz="1300" b="1" dirty="0">
-                <a:solidFill>
-                  <a:srgbClr val="33393F"/>
-                </a:solidFill>
-                <a:latin typeface="맑은 고딕"/>
-                <a:ea typeface="맑은 고딕"/>
-              </a:rPr>
-              <a:t/>
-            </a:r>
-            <a:r>
-              <a:rPr sz="1300" b="1" dirty="0" err="1">
-                <a:solidFill>
-                  <a:srgbClr val="33393F"/>
-                </a:solidFill>
-                <a:latin typeface="맑은 고딕"/>
-                <a:ea typeface="맑은 고딕"/>
-              </a:rPr>
-              <a:t/>
-            </a:r>
-            <a:r>
-              <a:rPr sz="1300" b="1" dirty="0">
-                <a:solidFill>
-                  <a:srgbClr val="33393F"/>
-                </a:solidFill>
-                <a:latin typeface="맑은 고딕"/>
-                <a:ea typeface="맑은 고딕"/>
-              </a:rPr>
-              <a:t/>
-            </a:r>
-            <a:r>
-              <a:rPr sz="1300" b="1" dirty="0" err="1">
-                <a:solidFill>
-                  <a:srgbClr val="33393F"/>
-                </a:solidFill>
-                <a:latin typeface="맑은 고딕"/>
-                <a:ea typeface="맑은 고딕"/>
-              </a:rPr>
-              <a:t/>
-            </a:r>
-            <a:r>
-              <a:rPr sz="1300" b="1" dirty="0">
-                <a:solidFill>
-                  <a:srgbClr val="33393F"/>
-                </a:solidFill>
-                <a:latin typeface="맑은 고딕"/>
-                <a:ea typeface="맑은 고딕"/>
-              </a:rPr>
-              <a:t/>
-            </a:r>
-            <a:r>
-              <a:rPr sz="1300" b="1" dirty="0" err="1">
-                <a:solidFill>
-                  <a:srgbClr val="33393F"/>
-                </a:solidFill>
-                <a:latin typeface="맑은 고딕"/>
-                <a:ea typeface="맑은 고딕"/>
-              </a:rPr>
-              <a:t/>
-            </a:r>
-            <a:r>
-              <a:rPr sz="1300" b="1" dirty="0">
-                <a:solidFill>
-                  <a:srgbClr val="33393F"/>
-                </a:solidFill>
-                <a:latin typeface="맑은 고딕"/>
-                <a:ea typeface="맑은 고딕"/>
-              </a:rPr>
-              <a:t/>
-            </a:r>
-            <a:r>
-              <a:rPr sz="1300" b="1" dirty="0" err="1">
-                <a:solidFill>
-                  <a:srgbClr val="33393F"/>
-                </a:solidFill>
-                <a:latin typeface="맑은 고딕"/>
-                <a:ea typeface="맑은 고딕"/>
-              </a:rPr>
-              <a:t/>
-            </a:r>
-            <a:r>
-              <a:rPr sz="1300" b="1" dirty="0">
-                <a:solidFill>
-                  <a:srgbClr val="33393F"/>
-                </a:solidFill>
-                <a:latin typeface="맑은 고딕"/>
-                <a:ea typeface="맑은 고딕"/>
-              </a:rPr>
-              <a:t/>
-            </a:r>
-            <a:r>
-              <a:rPr sz="1300" b="1" dirty="0" err="1">
-                <a:solidFill>
-                  <a:srgbClr val="33393F"/>
-                </a:solidFill>
-                <a:latin typeface="맑은 고딕"/>
-                <a:ea typeface="맑은 고딕"/>
-              </a:rPr>
-              <a:t/>
-            </a:r>
-            <a:r>
-              <a:rPr sz="1300" b="1" dirty="0">
-                <a:solidFill>
-                  <a:srgbClr val="33393F"/>
-                </a:solidFill>
-                <a:latin typeface="맑은 고딕"/>
-                <a:ea typeface="맑은 고딕"/>
-              </a:rPr>
-              <a:t/>
-            </a:r>
-            <a:r>
-              <a:rPr sz="1300" b="1" dirty="0" err="1">
-                <a:solidFill>
-                  <a:srgbClr val="33393F"/>
-                </a:solidFill>
-                <a:latin typeface="맑은 고딕"/>
-                <a:ea typeface="맑은 고딕"/>
-              </a:rPr>
-              <a:t/>
-            </a:r>
-            <a:r>
-              <a:rPr sz="1300" b="1" dirty="0">
-                <a:solidFill>
-                  <a:srgbClr val="33393F"/>
-                </a:solidFill>
-                <a:latin typeface="맑은 고딕"/>
-                <a:ea typeface="맑은 고딕"/>
-              </a:rPr>
-              <a:t/>
-            </a:r>
           </a:p>
           <a:p>
             <a:pPr marL="160020" indent="-160020">
@@ -16856,7 +14966,7 @@
               </a:spcAft>
             </a:pPr>
             <a:r>
-              <a:rPr sz="1100" b="0" dirty="0">
+              <a:rPr sz="1100" b="0">
                 <a:solidFill>
                   <a:srgbClr val="1C1C1E"/>
                 </a:solidFill>
@@ -16865,989 +14975,45 @@
               </a:rPr>
               <a:t>• 전국 108곳이 분만취약지로 지정되어 있다 (A 32곳 · B 21곳 · C 55곳)</a:t>
             </a:r>
-            <a:r>
-              <a:rPr sz="1100" b="0" dirty="0" err="1">
+          </a:p>
+          <a:p>
+            <a:pPr marL="160020" indent="-160020">
+              <a:lnSpc>
+                <a:spcPct val="114000"/>
+              </a:lnSpc>
+              <a:spcAft>
+                <a:spcPts val="200"/>
+              </a:spcAft>
+            </a:pPr>
+            <a:r>
+              <a:rPr sz="1100" b="0">
                 <a:solidFill>
                   <a:srgbClr val="1C1C1E"/>
                 </a:solidFill>
                 <a:latin typeface="맑은 고딕"/>
                 <a:ea typeface="맑은 고딕"/>
               </a:rPr>
-              <a:t/>
-            </a:r>
-            <a:r>
-              <a:rPr sz="1100" b="0" dirty="0">
+              <a:t>• 15년 누적 지원은 57개소 (분만 36 · 외래 15 · 순회 6). 2025년 신규는 전국 1개소</a:t>
+            </a:r>
+          </a:p>
+          <a:p>
+            <a:pPr marL="160020" indent="-160020">
+              <a:lnSpc>
+                <a:spcPct val="114000"/>
+              </a:lnSpc>
+              <a:spcAft>
+                <a:spcPts val="200"/>
+              </a:spcAft>
+            </a:pPr>
+            <a:r>
+              <a:rPr sz="1100" b="0">
                 <a:solidFill>
                   <a:srgbClr val="1C1C1E"/>
                 </a:solidFill>
                 <a:latin typeface="맑은 고딕"/>
                 <a:ea typeface="맑은 고딕"/>
               </a:rPr>
-              <a:t/>
-            </a:r>
-            <a:r>
-              <a:rPr sz="1100" b="0" dirty="0" err="1">
-                <a:solidFill>
-                  <a:srgbClr val="1C1C1E"/>
-                </a:solidFill>
-                <a:latin typeface="맑은 고딕"/>
-                <a:ea typeface="맑은 고딕"/>
-              </a:rPr>
-              <a:t/>
-            </a:r>
-            <a:r>
-              <a:rPr sz="1100" b="0" dirty="0">
-                <a:solidFill>
-                  <a:srgbClr val="1C1C1E"/>
-                </a:solidFill>
-                <a:latin typeface="맑은 고딕"/>
-                <a:ea typeface="맑은 고딕"/>
-              </a:rPr>
-              <a:t/>
-            </a:r>
-            <a:r>
-              <a:rPr sz="1100" b="0" dirty="0" err="1">
-                <a:solidFill>
-                  <a:srgbClr val="1C1C1E"/>
-                </a:solidFill>
-                <a:latin typeface="맑은 고딕"/>
-                <a:ea typeface="맑은 고딕"/>
-              </a:rPr>
-              <a:t/>
-            </a:r>
-            <a:r>
-              <a:rPr sz="1100" b="0" dirty="0">
-                <a:solidFill>
-                  <a:srgbClr val="1C1C1E"/>
-                </a:solidFill>
-                <a:latin typeface="맑은 고딕"/>
-                <a:ea typeface="맑은 고딕"/>
-              </a:rPr>
-              <a:t/>
-            </a:r>
-            <a:r>
-              <a:rPr sz="1100" b="0" dirty="0" err="1">
-                <a:solidFill>
-                  <a:srgbClr val="1C1C1E"/>
-                </a:solidFill>
-                <a:latin typeface="맑은 고딕"/>
-                <a:ea typeface="맑은 고딕"/>
-              </a:rPr>
-              <a:t/>
-            </a:r>
-            <a:r>
-              <a:rPr sz="1100" b="0" dirty="0">
-                <a:solidFill>
-                  <a:srgbClr val="1C1C1E"/>
-                </a:solidFill>
-                <a:latin typeface="맑은 고딕"/>
-                <a:ea typeface="맑은 고딕"/>
-              </a:rPr>
-              <a:t/>
-            </a:r>
-            <a:r>
-              <a:rPr sz="1100" b="0" dirty="0" err="1">
-                <a:solidFill>
-                  <a:srgbClr val="1C1C1E"/>
-                </a:solidFill>
-                <a:latin typeface="맑은 고딕"/>
-                <a:ea typeface="맑은 고딕"/>
-              </a:rPr>
-              <a:t/>
-            </a:r>
-            <a:r>
-              <a:rPr sz="1100" b="0" dirty="0">
-                <a:solidFill>
-                  <a:srgbClr val="1C1C1E"/>
-                </a:solidFill>
-                <a:latin typeface="맑은 고딕"/>
-                <a:ea typeface="맑은 고딕"/>
-              </a:rPr>
-              <a:t/>
-            </a:r>
-            <a:r>
-              <a:rPr sz="1100" b="0" dirty="0" err="1">
-                <a:solidFill>
-                  <a:srgbClr val="1C1C1E"/>
-                </a:solidFill>
-                <a:latin typeface="맑은 고딕"/>
-                <a:ea typeface="맑은 고딕"/>
-              </a:rPr>
-              <a:t/>
-            </a:r>
-            <a:r>
-              <a:rPr sz="1100" b="0" dirty="0">
-                <a:solidFill>
-                  <a:srgbClr val="1C1C1E"/>
-                </a:solidFill>
-                <a:latin typeface="맑은 고딕"/>
-                <a:ea typeface="맑은 고딕"/>
-              </a:rPr>
-              <a:t/>
-            </a:r>
-            <a:r>
-              <a:rPr sz="1100" b="0" dirty="0" err="1">
-                <a:solidFill>
-                  <a:srgbClr val="1C1C1E"/>
-                </a:solidFill>
-                <a:latin typeface="맑은 고딕"/>
-                <a:ea typeface="맑은 고딕"/>
-              </a:rPr>
-              <a:t/>
-            </a:r>
-            <a:r>
-              <a:rPr sz="1100" b="0" dirty="0">
-                <a:solidFill>
-                  <a:srgbClr val="1C1C1E"/>
-                </a:solidFill>
-                <a:latin typeface="맑은 고딕"/>
-                <a:ea typeface="맑은 고딕"/>
-              </a:rPr>
-              <a:t/>
-            </a:r>
-            <a:r>
-              <a:rPr sz="1100" b="0" dirty="0" err="1">
-                <a:solidFill>
-                  <a:srgbClr val="1C1C1E"/>
-                </a:solidFill>
-                <a:latin typeface="맑은 고딕"/>
-                <a:ea typeface="맑은 고딕"/>
-              </a:rPr>
-              <a:t/>
-            </a:r>
-            <a:r>
-              <a:rPr sz="1100" b="0" dirty="0">
-                <a:solidFill>
-                  <a:srgbClr val="1C1C1E"/>
-                </a:solidFill>
-                <a:latin typeface="맑은 고딕"/>
-                <a:ea typeface="맑은 고딕"/>
-              </a:rPr>
-              <a:t/>
-            </a:r>
-            <a:r>
-              <a:rPr sz="1100" b="0" dirty="0" err="1">
-                <a:solidFill>
-                  <a:srgbClr val="1C1C1E"/>
-                </a:solidFill>
-                <a:latin typeface="맑은 고딕"/>
-                <a:ea typeface="맑은 고딕"/>
-              </a:rPr>
-              <a:t/>
-            </a:r>
-            <a:r>
-              <a:rPr sz="1100" b="0" dirty="0">
-                <a:solidFill>
-                  <a:srgbClr val="1C1C1E"/>
-                </a:solidFill>
-                <a:latin typeface="맑은 고딕"/>
-                <a:ea typeface="맑은 고딕"/>
-              </a:rPr>
-              <a:t/>
-            </a:r>
-            <a:r>
-              <a:rPr sz="1100" b="0" dirty="0" err="1">
-                <a:solidFill>
-                  <a:srgbClr val="1C1C1E"/>
-                </a:solidFill>
-                <a:latin typeface="맑은 고딕"/>
-                <a:ea typeface="맑은 고딕"/>
-              </a:rPr>
-              <a:t/>
-            </a:r>
-            <a:r>
-              <a:rPr sz="1100" b="0" dirty="0">
-                <a:solidFill>
-                  <a:srgbClr val="1C1C1E"/>
-                </a:solidFill>
-                <a:latin typeface="맑은 고딕"/>
-                <a:ea typeface="맑은 고딕"/>
-              </a:rPr>
-              <a:t/>
-            </a:r>
-            <a:r>
-              <a:rPr sz="1100" b="0" dirty="0" err="1">
-                <a:solidFill>
-                  <a:srgbClr val="1C1C1E"/>
-                </a:solidFill>
-                <a:latin typeface="맑은 고딕"/>
-                <a:ea typeface="맑은 고딕"/>
-              </a:rPr>
-              <a:t/>
-            </a:r>
-            <a:r>
-              <a:rPr sz="1100" b="0" dirty="0">
-                <a:solidFill>
-                  <a:srgbClr val="1C1C1E"/>
-                </a:solidFill>
-                <a:latin typeface="맑은 고딕"/>
-                <a:ea typeface="맑은 고딕"/>
-              </a:rPr>
-              <a:t/>
-            </a:r>
-            <a:r>
-              <a:rPr sz="1100" b="0" dirty="0" err="1">
-                <a:solidFill>
-                  <a:srgbClr val="1C1C1E"/>
-                </a:solidFill>
-                <a:latin typeface="맑은 고딕"/>
-                <a:ea typeface="맑은 고딕"/>
-              </a:rPr>
-              <a:t/>
-            </a:r>
-            <a:r>
-              <a:rPr sz="1100" b="0" dirty="0">
-                <a:solidFill>
-                  <a:srgbClr val="1C1C1E"/>
-                </a:solidFill>
-                <a:latin typeface="맑은 고딕"/>
-                <a:ea typeface="맑은 고딕"/>
-              </a:rPr>
-              <a:t/>
-            </a:r>
-            <a:r>
-              <a:rPr sz="1100" b="0" dirty="0" err="1">
-                <a:solidFill>
-                  <a:srgbClr val="1C1C1E"/>
-                </a:solidFill>
-                <a:latin typeface="맑은 고딕"/>
-                <a:ea typeface="맑은 고딕"/>
-              </a:rPr>
-              <a:t/>
-            </a:r>
-            <a:r>
-              <a:rPr sz="1100" b="0" dirty="0">
-                <a:solidFill>
-                  <a:srgbClr val="1C1C1E"/>
-                </a:solidFill>
-                <a:latin typeface="맑은 고딕"/>
-                <a:ea typeface="맑은 고딕"/>
-              </a:rPr>
-              <a:t/>
-            </a:r>
-            <a:r>
-              <a:rPr sz="1100" b="0" dirty="0" err="1">
-                <a:solidFill>
-                  <a:srgbClr val="1C1C1E"/>
-                </a:solidFill>
-                <a:latin typeface="맑은 고딕"/>
-                <a:ea typeface="맑은 고딕"/>
-              </a:rPr>
-              <a:t/>
-            </a:r>
-            <a:r>
-              <a:rPr sz="1100" b="0" dirty="0">
-                <a:solidFill>
-                  <a:srgbClr val="1C1C1E"/>
-                </a:solidFill>
-                <a:latin typeface="맑은 고딕"/>
-                <a:ea typeface="맑은 고딕"/>
-              </a:rPr>
-              <a:t/>
-            </a:r>
-            <a:r>
-              <a:rPr sz="1100" b="0" dirty="0" err="1">
-                <a:solidFill>
-                  <a:srgbClr val="1C1C1E"/>
-                </a:solidFill>
-                <a:latin typeface="맑은 고딕"/>
-                <a:ea typeface="맑은 고딕"/>
-              </a:rPr>
-              <a:t/>
-            </a:r>
-            <a:r>
-              <a:rPr sz="1100" b="0" dirty="0">
-                <a:solidFill>
-                  <a:srgbClr val="1C1C1E"/>
-                </a:solidFill>
-                <a:latin typeface="맑은 고딕"/>
-                <a:ea typeface="맑은 고딕"/>
-              </a:rPr>
-              <a:t/>
-            </a:r>
-            <a:r>
-              <a:rPr sz="1100" b="0" dirty="0" err="1">
-                <a:solidFill>
-                  <a:srgbClr val="1C1C1E"/>
-                </a:solidFill>
-                <a:latin typeface="맑은 고딕"/>
-                <a:ea typeface="맑은 고딕"/>
-              </a:rPr>
-              <a:t/>
-            </a:r>
-            <a:r>
-              <a:rPr sz="1100" b="0" dirty="0">
-                <a:solidFill>
-                  <a:srgbClr val="1C1C1E"/>
-                </a:solidFill>
-                <a:latin typeface="맑은 고딕"/>
-                <a:ea typeface="맑은 고딕"/>
-              </a:rPr>
-              <a:t/>
-            </a:r>
-            <a:r>
-              <a:rPr sz="1100" b="0" dirty="0" err="1">
-                <a:solidFill>
-                  <a:srgbClr val="1C1C1E"/>
-                </a:solidFill>
-                <a:latin typeface="맑은 고딕"/>
-                <a:ea typeface="맑은 고딕"/>
-              </a:rPr>
-              <a:t/>
-            </a:r>
-            <a:r>
-              <a:rPr sz="1100" b="0" dirty="0">
-                <a:solidFill>
-                  <a:srgbClr val="1C1C1E"/>
-                </a:solidFill>
-                <a:latin typeface="맑은 고딕"/>
-                <a:ea typeface="맑은 고딕"/>
-              </a:rPr>
-              <a:t/>
-            </a:r>
-            <a:r>
-              <a:rPr sz="1100" b="0" dirty="0" err="1">
-                <a:solidFill>
-                  <a:srgbClr val="1C1C1E"/>
-                </a:solidFill>
-                <a:latin typeface="맑은 고딕"/>
-                <a:ea typeface="맑은 고딕"/>
-              </a:rPr>
-              <a:t/>
-            </a:r>
-            <a:r>
-              <a:rPr sz="1100" b="0" dirty="0">
-                <a:solidFill>
-                  <a:srgbClr val="1C1C1E"/>
-                </a:solidFill>
-                <a:latin typeface="맑은 고딕"/>
-                <a:ea typeface="맑은 고딕"/>
-              </a:rPr>
-              <a:t/>
-            </a:r>
-            <a:r>
-              <a:rPr sz="1100" b="0" dirty="0" err="1">
-                <a:solidFill>
-                  <a:srgbClr val="1C1C1E"/>
-                </a:solidFill>
-                <a:latin typeface="맑은 고딕"/>
-                <a:ea typeface="맑은 고딕"/>
-              </a:rPr>
-              <a:t/>
-            </a:r>
-            <a:r>
-              <a:rPr sz="1100" b="0" dirty="0">
-                <a:solidFill>
-                  <a:srgbClr val="1C1C1E"/>
-                </a:solidFill>
-                <a:latin typeface="맑은 고딕"/>
-                <a:ea typeface="맑은 고딕"/>
-              </a:rPr>
-              <a:t/>
-            </a:r>
-            <a:r>
-              <a:rPr sz="1100" b="0" dirty="0" err="1">
-                <a:solidFill>
-                  <a:srgbClr val="1C1C1E"/>
-                </a:solidFill>
-                <a:latin typeface="맑은 고딕"/>
-                <a:ea typeface="맑은 고딕"/>
-              </a:rPr>
-              <a:t/>
-            </a:r>
-            <a:r>
-              <a:rPr sz="1100" b="0" dirty="0">
-                <a:solidFill>
-                  <a:srgbClr val="1C1C1E"/>
-                </a:solidFill>
-                <a:latin typeface="맑은 고딕"/>
-                <a:ea typeface="맑은 고딕"/>
-              </a:rPr>
-              <a:t/>
-            </a:r>
-            <a:r>
-              <a:rPr sz="1100" b="0" dirty="0" err="1">
-                <a:solidFill>
-                  <a:srgbClr val="1C1C1E"/>
-                </a:solidFill>
-                <a:latin typeface="맑은 고딕"/>
-                <a:ea typeface="맑은 고딕"/>
-              </a:rPr>
-              <a:t/>
-            </a:r>
-            <a:r>
-              <a:rPr sz="1100" b="0" dirty="0">
-                <a:solidFill>
-                  <a:srgbClr val="1C1C1E"/>
-                </a:solidFill>
-                <a:latin typeface="맑은 고딕"/>
-                <a:ea typeface="맑은 고딕"/>
-              </a:rPr>
-              <a:t/>
-            </a:r>
-            <a:r>
-              <a:rPr sz="1100" b="0" dirty="0" err="1">
-                <a:solidFill>
-                  <a:srgbClr val="1C1C1E"/>
-                </a:solidFill>
-                <a:latin typeface="맑은 고딕"/>
-                <a:ea typeface="맑은 고딕"/>
-              </a:rPr>
-              <a:t/>
-            </a:r>
-            <a:endParaRPr sz="1100" b="0" dirty="0">
-              <a:solidFill>
-                <a:srgbClr val="1C1C1E"/>
-              </a:solidFill>
-              <a:latin typeface="맑은 고딕"/>
-              <a:ea typeface="맑은 고딕"/>
-            </a:endParaRPr>
-          </a:p>
-          <a:p>
-            <a:pPr marL="160020" indent="-160020">
-              <a:lnSpc>
-                <a:spcPct val="114000"/>
-              </a:lnSpc>
-              <a:spcAft>
-                <a:spcPts val="200"/>
-              </a:spcAft>
-            </a:pPr>
-            <a:r>
-              <a:rPr sz="1100" b="0" dirty="0">
-                <a:solidFill>
-                  <a:srgbClr val="1C1C1E"/>
-                </a:solidFill>
-                <a:latin typeface="맑은 고딕"/>
-                <a:ea typeface="맑은 고딕"/>
-              </a:rPr>
-              <a:t>• 15년 누적 지원은 57개소 (분만 36 · 외래 15 · 순회 6). 2025년 신규는 전국 1개소</a:t>
-            </a:r>
-            <a:r>
-              <a:rPr sz="1100" b="0" dirty="0" err="1">
-                <a:solidFill>
-                  <a:srgbClr val="1C1C1E"/>
-                </a:solidFill>
-                <a:latin typeface="맑은 고딕"/>
-                <a:ea typeface="맑은 고딕"/>
-              </a:rPr>
-              <a:t/>
-            </a:r>
-            <a:r>
-              <a:rPr sz="1100" b="0" dirty="0">
-                <a:solidFill>
-                  <a:srgbClr val="1C1C1E"/>
-                </a:solidFill>
-                <a:latin typeface="맑은 고딕"/>
-                <a:ea typeface="맑은 고딕"/>
-              </a:rPr>
-              <a:t/>
-            </a:r>
-            <a:r>
-              <a:rPr sz="1100" b="0" dirty="0" err="1">
-                <a:solidFill>
-                  <a:srgbClr val="1C1C1E"/>
-                </a:solidFill>
-                <a:latin typeface="맑은 고딕"/>
-                <a:ea typeface="맑은 고딕"/>
-              </a:rPr>
-              <a:t/>
-            </a:r>
-            <a:r>
-              <a:rPr sz="1100" b="0" dirty="0">
-                <a:solidFill>
-                  <a:srgbClr val="1C1C1E"/>
-                </a:solidFill>
-                <a:latin typeface="맑은 고딕"/>
-                <a:ea typeface="맑은 고딕"/>
-              </a:rPr>
-              <a:t/>
-            </a:r>
-            <a:r>
-              <a:rPr sz="1100" b="0" dirty="0" err="1">
-                <a:solidFill>
-                  <a:srgbClr val="1C1C1E"/>
-                </a:solidFill>
-                <a:latin typeface="맑은 고딕"/>
-                <a:ea typeface="맑은 고딕"/>
-              </a:rPr>
-              <a:t/>
-            </a:r>
-            <a:r>
-              <a:rPr sz="1100" b="0" dirty="0">
-                <a:solidFill>
-                  <a:srgbClr val="1C1C1E"/>
-                </a:solidFill>
-                <a:latin typeface="맑은 고딕"/>
-                <a:ea typeface="맑은 고딕"/>
-              </a:rPr>
-              <a:t/>
-            </a:r>
-            <a:r>
-              <a:rPr sz="1100" b="0" dirty="0" err="1">
-                <a:solidFill>
-                  <a:srgbClr val="1C1C1E"/>
-                </a:solidFill>
-                <a:latin typeface="맑은 고딕"/>
-                <a:ea typeface="맑은 고딕"/>
-              </a:rPr>
-              <a:t/>
-            </a:r>
-            <a:r>
-              <a:rPr sz="1100" b="0" dirty="0">
-                <a:solidFill>
-                  <a:srgbClr val="1C1C1E"/>
-                </a:solidFill>
-                <a:latin typeface="맑은 고딕"/>
-                <a:ea typeface="맑은 고딕"/>
-              </a:rPr>
-              <a:t/>
-            </a:r>
-            <a:r>
-              <a:rPr sz="1100" b="0" dirty="0" err="1">
-                <a:solidFill>
-                  <a:srgbClr val="1C1C1E"/>
-                </a:solidFill>
-                <a:latin typeface="맑은 고딕"/>
-                <a:ea typeface="맑은 고딕"/>
-              </a:rPr>
-              <a:t/>
-            </a:r>
-            <a:r>
-              <a:rPr sz="1100" b="0" dirty="0">
-                <a:solidFill>
-                  <a:srgbClr val="1C1C1E"/>
-                </a:solidFill>
-                <a:latin typeface="맑은 고딕"/>
-                <a:ea typeface="맑은 고딕"/>
-              </a:rPr>
-              <a:t/>
-            </a:r>
-            <a:r>
-              <a:rPr sz="1100" b="0" dirty="0" err="1">
-                <a:solidFill>
-                  <a:srgbClr val="1C1C1E"/>
-                </a:solidFill>
-                <a:latin typeface="맑은 고딕"/>
-                <a:ea typeface="맑은 고딕"/>
-              </a:rPr>
-              <a:t/>
-            </a:r>
-            <a:r>
-              <a:rPr sz="1100" b="0" dirty="0">
-                <a:solidFill>
-                  <a:srgbClr val="1C1C1E"/>
-                </a:solidFill>
-                <a:latin typeface="맑은 고딕"/>
-                <a:ea typeface="맑은 고딕"/>
-              </a:rPr>
-              <a:t/>
-            </a:r>
-            <a:r>
-              <a:rPr sz="1100" b="0" dirty="0" err="1">
-                <a:solidFill>
-                  <a:srgbClr val="1C1C1E"/>
-                </a:solidFill>
-                <a:latin typeface="맑은 고딕"/>
-                <a:ea typeface="맑은 고딕"/>
-              </a:rPr>
-              <a:t/>
-            </a:r>
-            <a:r>
-              <a:rPr sz="1100" b="0" dirty="0">
-                <a:solidFill>
-                  <a:srgbClr val="1C1C1E"/>
-                </a:solidFill>
-                <a:latin typeface="맑은 고딕"/>
-                <a:ea typeface="맑은 고딕"/>
-              </a:rPr>
-              <a:t/>
-            </a:r>
-            <a:r>
-              <a:rPr sz="1100" b="0" dirty="0" err="1">
-                <a:solidFill>
-                  <a:srgbClr val="1C1C1E"/>
-                </a:solidFill>
-                <a:latin typeface="맑은 고딕"/>
-                <a:ea typeface="맑은 고딕"/>
-              </a:rPr>
-              <a:t/>
-            </a:r>
-            <a:r>
-              <a:rPr sz="1100" b="0" dirty="0">
-                <a:solidFill>
-                  <a:srgbClr val="1C1C1E"/>
-                </a:solidFill>
-                <a:latin typeface="맑은 고딕"/>
-                <a:ea typeface="맑은 고딕"/>
-              </a:rPr>
-              <a:t/>
-            </a:r>
-            <a:r>
-              <a:rPr sz="1100" b="0" dirty="0" err="1">
-                <a:solidFill>
-                  <a:srgbClr val="1C1C1E"/>
-                </a:solidFill>
-                <a:latin typeface="맑은 고딕"/>
-                <a:ea typeface="맑은 고딕"/>
-              </a:rPr>
-              <a:t/>
-            </a:r>
-            <a:r>
-              <a:rPr sz="1100" b="0" dirty="0">
-                <a:solidFill>
-                  <a:srgbClr val="1C1C1E"/>
-                </a:solidFill>
-                <a:latin typeface="맑은 고딕"/>
-                <a:ea typeface="맑은 고딕"/>
-              </a:rPr>
-              <a:t/>
-            </a:r>
-            <a:r>
-              <a:rPr sz="1100" b="0" dirty="0" err="1">
-                <a:solidFill>
-                  <a:srgbClr val="1C1C1E"/>
-                </a:solidFill>
-                <a:latin typeface="맑은 고딕"/>
-                <a:ea typeface="맑은 고딕"/>
-              </a:rPr>
-              <a:t/>
-            </a:r>
-            <a:r>
-              <a:rPr sz="1100" b="0" dirty="0">
-                <a:solidFill>
-                  <a:srgbClr val="1C1C1E"/>
-                </a:solidFill>
-                <a:latin typeface="맑은 고딕"/>
-                <a:ea typeface="맑은 고딕"/>
-              </a:rPr>
-              <a:t/>
-            </a:r>
-            <a:r>
-              <a:rPr sz="1100" b="0" dirty="0" err="1">
-                <a:solidFill>
-                  <a:srgbClr val="1C1C1E"/>
-                </a:solidFill>
-                <a:latin typeface="맑은 고딕"/>
-                <a:ea typeface="맑은 고딕"/>
-              </a:rPr>
-              <a:t/>
-            </a:r>
-            <a:r>
-              <a:rPr sz="1100" b="0" dirty="0">
-                <a:solidFill>
-                  <a:srgbClr val="1C1C1E"/>
-                </a:solidFill>
-                <a:latin typeface="맑은 고딕"/>
-                <a:ea typeface="맑은 고딕"/>
-              </a:rPr>
-              <a:t/>
-            </a:r>
-            <a:r>
-              <a:rPr sz="1100" b="0" dirty="0" err="1">
-                <a:solidFill>
-                  <a:srgbClr val="1C1C1E"/>
-                </a:solidFill>
-                <a:latin typeface="맑은 고딕"/>
-                <a:ea typeface="맑은 고딕"/>
-              </a:rPr>
-              <a:t/>
-            </a:r>
-            <a:endParaRPr sz="1100" b="0" dirty="0">
-              <a:solidFill>
-                <a:srgbClr val="1C1C1E"/>
-              </a:solidFill>
-              <a:latin typeface="맑은 고딕"/>
-              <a:ea typeface="맑은 고딕"/>
-            </a:endParaRPr>
-          </a:p>
-          <a:p>
-            <a:pPr marL="160020" indent="-160020">
-              <a:lnSpc>
-                <a:spcPct val="114000"/>
-              </a:lnSpc>
-              <a:spcAft>
-                <a:spcPts val="200"/>
-              </a:spcAft>
-            </a:pPr>
-            <a:r>
-              <a:rPr sz="1100" b="0" dirty="0">
-                <a:solidFill>
-                  <a:srgbClr val="1C1C1E"/>
-                </a:solidFill>
-                <a:latin typeface="맑은 고딕"/>
-                <a:ea typeface="맑은 고딕"/>
-              </a:rPr>
               <a:t>• 나눠 줄 것이 적을수록 순서는 오히려 더 중요해진다 — 한 해에 한 곳뿐이면 순서가 곧 결과다. 그런데 그 순서를 정하는 규칙이 제도에 없다</a:t>
-            </a:r>
-            <a:r>
-              <a:rPr sz="1100" b="0" dirty="0" err="1">
-                <a:solidFill>
-                  <a:srgbClr val="1C1C1E"/>
-                </a:solidFill>
-                <a:latin typeface="맑은 고딕"/>
-                <a:ea typeface="맑은 고딕"/>
-              </a:rPr>
-              <a:t/>
-            </a:r>
-            <a:r>
-              <a:rPr sz="1100" b="0" dirty="0">
-                <a:solidFill>
-                  <a:srgbClr val="1C1C1E"/>
-                </a:solidFill>
-                <a:latin typeface="맑은 고딕"/>
-                <a:ea typeface="맑은 고딕"/>
-              </a:rPr>
-              <a:t/>
-            </a:r>
-            <a:r>
-              <a:rPr sz="1100" b="0" dirty="0" err="1">
-                <a:solidFill>
-                  <a:srgbClr val="1C1C1E"/>
-                </a:solidFill>
-                <a:latin typeface="맑은 고딕"/>
-                <a:ea typeface="맑은 고딕"/>
-              </a:rPr>
-              <a:t/>
-            </a:r>
-            <a:r>
-              <a:rPr lang="en-US" sz="1100" b="0" dirty="0">
-                <a:solidFill>
-                  <a:srgbClr val="1C1C1E"/>
-                </a:solidFill>
-                <a:latin typeface="맑은 고딕"/>
-                <a:ea typeface="맑은 고딕"/>
-              </a:rPr>
-              <a:t/>
-            </a:r>
-            <a:r>
-              <a:rPr lang="ko-KR" altLang="en-US" sz="1100" b="0" dirty="0">
-                <a:solidFill>
-                  <a:srgbClr val="1C1C1E"/>
-                </a:solidFill>
-                <a:latin typeface="맑은 고딕"/>
-                <a:ea typeface="맑은 고딕"/>
-              </a:rPr>
-              <a:t/>
-            </a:r>
-            <a:r>
-              <a:rPr sz="1100" b="0" dirty="0">
-                <a:solidFill>
-                  <a:srgbClr val="1C1C1E"/>
-                </a:solidFill>
-                <a:latin typeface="맑은 고딕"/>
-                <a:ea typeface="맑은 고딕"/>
-              </a:rPr>
-              <a:t/>
-            </a:r>
-            <a:r>
-              <a:rPr lang="ko-KR" altLang="en-US" sz="1100" b="0" dirty="0">
-                <a:solidFill>
-                  <a:srgbClr val="1C1C1E"/>
-                </a:solidFill>
-                <a:latin typeface="맑은 고딕"/>
-                <a:ea typeface="맑은 고딕"/>
-              </a:rPr>
-              <a:t/>
-            </a:r>
-            <a:r>
-              <a:rPr sz="1100" b="0" dirty="0">
-                <a:solidFill>
-                  <a:srgbClr val="1C1C1E"/>
-                </a:solidFill>
-                <a:latin typeface="맑은 고딕"/>
-                <a:ea typeface="맑은 고딕"/>
-              </a:rPr>
-              <a:t/>
-            </a:r>
-            <a:r>
-              <a:rPr sz="1100" b="0" dirty="0" err="1">
-                <a:solidFill>
-                  <a:srgbClr val="1C1C1E"/>
-                </a:solidFill>
-                <a:latin typeface="맑은 고딕"/>
-                <a:ea typeface="맑은 고딕"/>
-              </a:rPr>
-              <a:t/>
-            </a:r>
-            <a:r>
-              <a:rPr sz="1100" b="0" dirty="0">
-                <a:solidFill>
-                  <a:srgbClr val="1C1C1E"/>
-                </a:solidFill>
-                <a:latin typeface="맑은 고딕"/>
-                <a:ea typeface="맑은 고딕"/>
-              </a:rPr>
-              <a:t/>
-            </a:r>
-            <a:r>
-              <a:rPr sz="1100" b="0" dirty="0" err="1">
-                <a:solidFill>
-                  <a:srgbClr val="1C1C1E"/>
-                </a:solidFill>
-                <a:latin typeface="맑은 고딕"/>
-                <a:ea typeface="맑은 고딕"/>
-              </a:rPr>
-              <a:t/>
-            </a:r>
-            <a:r>
-              <a:rPr sz="1100" b="0" dirty="0">
-                <a:solidFill>
-                  <a:srgbClr val="1C1C1E"/>
-                </a:solidFill>
-                <a:latin typeface="맑은 고딕"/>
-                <a:ea typeface="맑은 고딕"/>
-              </a:rPr>
-              <a:t/>
-            </a:r>
-            <a:r>
-              <a:rPr lang="ko-KR" altLang="en-US" sz="1100" dirty="0">
-                <a:solidFill>
-                  <a:srgbClr val="1C1C1E"/>
-                </a:solidFill>
-                <a:latin typeface="맑은 고딕"/>
-                <a:ea typeface="맑은 고딕"/>
-              </a:rPr>
-              <a:t/>
-            </a:r>
-            <a:r>
-              <a:rPr lang="ko-KR" altLang="en-US" sz="1100" b="0" dirty="0">
-                <a:solidFill>
-                  <a:srgbClr val="1C1C1E"/>
-                </a:solidFill>
-                <a:latin typeface="맑은 고딕"/>
-                <a:ea typeface="맑은 고딕"/>
-              </a:rPr>
-              <a:t/>
-            </a:r>
-            <a:r>
-              <a:rPr sz="1100" b="0" dirty="0">
-                <a:solidFill>
-                  <a:srgbClr val="1C1C1E"/>
-                </a:solidFill>
-                <a:latin typeface="맑은 고딕"/>
-                <a:ea typeface="맑은 고딕"/>
-              </a:rPr>
-              <a:t/>
-            </a:r>
-            <a:r>
-              <a:rPr sz="1100" b="0" dirty="0" err="1">
-                <a:solidFill>
-                  <a:srgbClr val="1C1C1E"/>
-                </a:solidFill>
-                <a:latin typeface="맑은 고딕"/>
-                <a:ea typeface="맑은 고딕"/>
-              </a:rPr>
-              <a:t/>
-            </a:r>
-            <a:r>
-              <a:rPr sz="1100" b="0" dirty="0">
-                <a:solidFill>
-                  <a:srgbClr val="1C1C1E"/>
-                </a:solidFill>
-                <a:latin typeface="맑은 고딕"/>
-                <a:ea typeface="맑은 고딕"/>
-              </a:rPr>
-              <a:t/>
-            </a:r>
-            <a:r>
-              <a:rPr sz="1100" b="0" dirty="0" err="1">
-                <a:solidFill>
-                  <a:srgbClr val="1C1C1E"/>
-                </a:solidFill>
-                <a:latin typeface="맑은 고딕"/>
-                <a:ea typeface="맑은 고딕"/>
-              </a:rPr>
-              <a:t/>
-            </a:r>
-            <a:r>
-              <a:rPr sz="1100" b="0" dirty="0">
-                <a:solidFill>
-                  <a:srgbClr val="1C1C1E"/>
-                </a:solidFill>
-                <a:latin typeface="맑은 고딕"/>
-                <a:ea typeface="맑은 고딕"/>
-              </a:rPr>
-              <a:t/>
-            </a:r>
-            <a:r>
-              <a:rPr sz="1100" b="0" dirty="0" err="1">
-                <a:solidFill>
-                  <a:srgbClr val="1C1C1E"/>
-                </a:solidFill>
-                <a:latin typeface="맑은 고딕"/>
-                <a:ea typeface="맑은 고딕"/>
-              </a:rPr>
-              <a:t/>
-            </a:r>
-            <a:r>
-              <a:rPr sz="1100" b="0" dirty="0">
-                <a:solidFill>
-                  <a:srgbClr val="1C1C1E"/>
-                </a:solidFill>
-                <a:latin typeface="맑은 고딕"/>
-                <a:ea typeface="맑은 고딕"/>
-              </a:rPr>
-              <a:t/>
-            </a:r>
-            <a:r>
-              <a:rPr sz="1100" b="0" dirty="0" err="1">
-                <a:solidFill>
-                  <a:srgbClr val="1C1C1E"/>
-                </a:solidFill>
-                <a:latin typeface="맑은 고딕"/>
-                <a:ea typeface="맑은 고딕"/>
-              </a:rPr>
-              <a:t/>
-            </a:r>
-            <a:r>
-              <a:rPr sz="1100" b="0" dirty="0">
-                <a:solidFill>
-                  <a:srgbClr val="1C1C1E"/>
-                </a:solidFill>
-                <a:latin typeface="맑은 고딕"/>
-                <a:ea typeface="맑은 고딕"/>
-              </a:rPr>
-              <a:t/>
-            </a:r>
-            <a:r>
-              <a:rPr sz="1100" b="0" dirty="0" err="1">
-                <a:solidFill>
-                  <a:srgbClr val="1C1C1E"/>
-                </a:solidFill>
-                <a:latin typeface="맑은 고딕"/>
-                <a:ea typeface="맑은 고딕"/>
-              </a:rPr>
-              <a:t/>
-            </a:r>
-            <a:r>
-              <a:rPr sz="1100" b="0" dirty="0">
-                <a:solidFill>
-                  <a:srgbClr val="1C1C1E"/>
-                </a:solidFill>
-                <a:latin typeface="맑은 고딕"/>
-                <a:ea typeface="맑은 고딕"/>
-              </a:rPr>
-              <a:t/>
-            </a:r>
-            <a:r>
-              <a:rPr sz="1100" b="0" dirty="0" err="1">
-                <a:solidFill>
-                  <a:srgbClr val="1C1C1E"/>
-                </a:solidFill>
-                <a:latin typeface="맑은 고딕"/>
-                <a:ea typeface="맑은 고딕"/>
-              </a:rPr>
-              <a:t/>
-            </a:r>
-            <a:r>
-              <a:rPr sz="1100" b="0" dirty="0">
-                <a:solidFill>
-                  <a:srgbClr val="1C1C1E"/>
-                </a:solidFill>
-                <a:latin typeface="맑은 고딕"/>
-                <a:ea typeface="맑은 고딕"/>
-              </a:rPr>
-              <a:t/>
             </a:r>
           </a:p>
         </p:txBody>
@@ -17861,7 +15027,7 @@
         <p:spPr>
           <a:xfrm>
             <a:off x="502920" y="5230368"/>
-            <a:ext cx="11247120" cy="331629"/>
+            <a:ext cx="11247120" cy="1005840"/>
           </a:xfrm>
           <a:prstGeom prst="rect">
             <a:avLst/>
@@ -17883,7 +15049,7 @@
               </a:spcAft>
             </a:pPr>
             <a:r>
-              <a:rPr sz="1500" b="1" dirty="0">
+              <a:rPr sz="1500" b="1">
                 <a:solidFill>
                   <a:srgbClr val="1C1C1E"/>
                 </a:solidFill>
@@ -17892,263 +15058,26 @@
               </a:rPr>
               <a:t>자원 부족은 여전히 문제다. 다만 그와 별개로, 있는 자원이 체계적으로 배분되지 않는 문제가 함께 있다.</a:t>
             </a:r>
-            <a:r>
-              <a:rPr lang="ko-KR" altLang="en-US" sz="1500" b="1" dirty="0">
-                <a:solidFill>
-                  <a:srgbClr val="1C1C1E"/>
-                </a:solidFill>
-                <a:latin typeface="맑은 고딕"/>
-                <a:ea typeface="맑은 고딕"/>
-              </a:rPr>
-              <a:t/>
-            </a:r>
-            <a:r>
-              <a:rPr sz="1500" b="1" dirty="0" err="1">
-                <a:solidFill>
-                  <a:srgbClr val="1C1C1E"/>
-                </a:solidFill>
-                <a:latin typeface="맑은 고딕"/>
-                <a:ea typeface="맑은 고딕"/>
-              </a:rPr>
-              <a:t/>
-            </a:r>
-            <a:r>
-              <a:rPr sz="1500" b="1" dirty="0">
-                <a:solidFill>
-                  <a:srgbClr val="1C1C1E"/>
-                </a:solidFill>
-                <a:latin typeface="맑은 고딕"/>
-                <a:ea typeface="맑은 고딕"/>
-              </a:rPr>
-              <a:t/>
-            </a:r>
-            <a:r>
-              <a:rPr sz="1500" b="1" dirty="0" err="1">
-                <a:solidFill>
-                  <a:srgbClr val="1C1C1E"/>
-                </a:solidFill>
-                <a:latin typeface="맑은 고딕"/>
-                <a:ea typeface="맑은 고딕"/>
-              </a:rPr>
-              <a:t/>
-            </a:r>
-            <a:r>
-              <a:rPr sz="1500" b="1" dirty="0">
-                <a:solidFill>
-                  <a:srgbClr val="1C1C1E"/>
-                </a:solidFill>
-                <a:latin typeface="맑은 고딕"/>
-                <a:ea typeface="맑은 고딕"/>
-              </a:rPr>
-              <a:t/>
-            </a:r>
-            <a:r>
-              <a:rPr lang="ko-KR" altLang="en-US" sz="1500" b="1" dirty="0">
-                <a:solidFill>
-                  <a:srgbClr val="1C1C1E"/>
-                </a:solidFill>
-                <a:latin typeface="맑은 고딕"/>
-                <a:ea typeface="맑은 고딕"/>
-              </a:rPr>
-              <a:t/>
-            </a:r>
-            <a:r>
-              <a:rPr lang="en-US" altLang="ko-KR" sz="1500" b="1" dirty="0">
-                <a:solidFill>
-                  <a:srgbClr val="1C1C1E"/>
-                </a:solidFill>
-                <a:latin typeface="맑은 고딕"/>
-                <a:ea typeface="맑은 고딕"/>
-              </a:rPr>
-              <a:t/>
-            </a:r>
-            <a:r>
-              <a:rPr sz="1500" b="1" dirty="0">
+          </a:p>
+          <a:p>
+            <a:pPr>
+              <a:lnSpc>
+                <a:spcPct val="114000"/>
+              </a:lnSpc>
+              <a:spcAft>
+                <a:spcPts val="0"/>
+              </a:spcAft>
+            </a:pPr>
+            <a:r>
+              <a:rPr sz="1500" b="1">
                 <a:solidFill>
                   <a:srgbClr val="000000"/>
                 </a:solidFill>
                 <a:latin typeface="맑은 고딕"/>
                 <a:ea typeface="맑은 고딕"/>
               </a:rPr>
-              <a:t/>
-            </a:r>
-            <a:r>
-              <a:rPr lang="ko-KR" altLang="en-US" sz="1500" b="1" dirty="0">
-                <a:solidFill>
-                  <a:srgbClr val="000000"/>
-                </a:solidFill>
-                <a:latin typeface="맑은 고딕"/>
-                <a:ea typeface="맑은 고딕"/>
-              </a:rPr>
-              <a:t/>
-            </a:r>
-            <a:r>
-              <a:rPr sz="1500" b="1" dirty="0" err="1">
-                <a:solidFill>
-                  <a:srgbClr val="000000"/>
-                </a:solidFill>
-                <a:latin typeface="맑은 고딕"/>
-                <a:ea typeface="맑은 고딕"/>
-              </a:rPr>
-              <a:t/>
-            </a:r>
-            <a:r>
-              <a:rPr sz="1500" b="1" dirty="0">
-                <a:solidFill>
-                  <a:srgbClr val="000000"/>
-                </a:solidFill>
-                <a:latin typeface="맑은 고딕"/>
-                <a:ea typeface="맑은 고딕"/>
-              </a:rPr>
-              <a:t/>
-            </a:r>
-            <a:r>
-              <a:rPr sz="1500" b="1" dirty="0" err="1">
-                <a:solidFill>
-                  <a:srgbClr val="000000"/>
-                </a:solidFill>
-                <a:latin typeface="맑은 고딕"/>
-                <a:ea typeface="맑은 고딕"/>
-              </a:rPr>
-              <a:t/>
-            </a:r>
-            <a:r>
-              <a:rPr sz="1500" b="1" dirty="0">
-                <a:solidFill>
-                  <a:srgbClr val="000000"/>
-                </a:solidFill>
-                <a:latin typeface="맑은 고딕"/>
-                <a:ea typeface="맑은 고딕"/>
-              </a:rPr>
-              <a:t/>
-            </a:r>
-            <a:r>
-              <a:rPr sz="1500" b="1" dirty="0" err="1">
-                <a:solidFill>
-                  <a:srgbClr val="000000"/>
-                </a:solidFill>
-                <a:latin typeface="맑은 고딕"/>
-                <a:ea typeface="맑은 고딕"/>
-              </a:rPr>
-              <a:t/>
-            </a:r>
-            <a:r>
-              <a:rPr sz="1500" b="1" dirty="0">
-                <a:solidFill>
-                  <a:srgbClr val="000000"/>
-                </a:solidFill>
-                <a:latin typeface="맑은 고딕"/>
-                <a:ea typeface="맑은 고딕"/>
-              </a:rPr>
-              <a:t/>
-            </a:r>
-            <a:r>
-              <a:rPr sz="1500" b="1" dirty="0" err="1">
-                <a:solidFill>
-                  <a:srgbClr val="000000"/>
-                </a:solidFill>
-                <a:latin typeface="맑은 고딕"/>
-                <a:ea typeface="맑은 고딕"/>
-              </a:rPr>
-              <a:t/>
-            </a:r>
-            <a:r>
-              <a:rPr sz="1500" b="1" dirty="0">
-                <a:solidFill>
-                  <a:srgbClr val="000000"/>
-                </a:solidFill>
-                <a:latin typeface="맑은 고딕"/>
-                <a:ea typeface="맑은 고딕"/>
-              </a:rPr>
-              <a:t/>
-            </a:r>
-            <a:r>
-              <a:rPr sz="1500" b="1" dirty="0" err="1">
-                <a:solidFill>
-                  <a:srgbClr val="000000"/>
-                </a:solidFill>
-                <a:latin typeface="맑은 고딕"/>
-                <a:ea typeface="맑은 고딕"/>
-              </a:rPr>
-              <a:t/>
-            </a:r>
-            <a:r>
-              <a:rPr sz="1500" b="1" dirty="0">
-                <a:solidFill>
-                  <a:srgbClr val="000000"/>
-                </a:solidFill>
-                <a:latin typeface="맑은 고딕"/>
-                <a:ea typeface="맑은 고딕"/>
-              </a:rPr>
-              <a:t/>
-            </a:r>
-            <a:r>
-              <a:rPr sz="1500" b="1" dirty="0" err="1">
-                <a:solidFill>
-                  <a:srgbClr val="000000"/>
-                </a:solidFill>
-                <a:latin typeface="맑은 고딕"/>
-                <a:ea typeface="맑은 고딕"/>
-              </a:rPr>
-              <a:t/>
-            </a:r>
-            <a:r>
-              <a:rPr sz="1500" b="1" dirty="0">
-                <a:solidFill>
-                  <a:srgbClr val="000000"/>
-                </a:solidFill>
-                <a:latin typeface="맑은 고딕"/>
-                <a:ea typeface="맑은 고딕"/>
-              </a:rPr>
-              <a:t/>
-            </a:r>
-            <a:r>
-              <a:rPr sz="1500" b="1" dirty="0" err="1">
-                <a:solidFill>
-                  <a:srgbClr val="000000"/>
-                </a:solidFill>
-                <a:latin typeface="맑은 고딕"/>
-                <a:ea typeface="맑은 고딕"/>
-              </a:rPr>
-              <a:t/>
-            </a:r>
-            <a:r>
-              <a:rPr sz="1500" b="1" dirty="0">
-                <a:solidFill>
-                  <a:srgbClr val="000000"/>
-                </a:solidFill>
-                <a:latin typeface="맑은 고딕"/>
-                <a:ea typeface="맑은 고딕"/>
-              </a:rPr>
-              <a:t/>
-            </a:r>
-            <a:r>
-              <a:rPr sz="1500" b="1" dirty="0" err="1">
-                <a:solidFill>
-                  <a:srgbClr val="000000"/>
-                </a:solidFill>
-                <a:latin typeface="맑은 고딕"/>
-                <a:ea typeface="맑은 고딕"/>
-              </a:rPr>
-              <a:t/>
-            </a:r>
-            <a:r>
-              <a:rPr sz="1500" b="1" dirty="0">
-                <a:solidFill>
-                  <a:srgbClr val="000000"/>
-                </a:solidFill>
-                <a:latin typeface="맑은 고딕"/>
-                <a:ea typeface="맑은 고딕"/>
-              </a:rPr>
-              <a:t/>
-            </a:r>
-            <a:endParaRPr lang="en-US" sz="1500" b="1" dirty="0">
-              <a:solidFill>
-                <a:srgbClr val="000000"/>
-              </a:solidFill>
-              <a:latin typeface="맑은 고딕"/>
-              <a:ea typeface="맑은 고딕"/>
-            </a:endParaRPr>
+              <a:t>"현재 주어진 자원이 체계적으로, 필요한 곳으로 배분되고 있는가" — 이것이 이 프로젝트의 질문이다.</a:t>
+            </a:r>
           </a:p>
         </p:txBody>
       </p:sp>
@@ -18161,7 +15090,7 @@
 </file>
 
 <file path=ppt/slides/slide4.xml><?xml version="1.0" encoding="utf-8"?>
-<p:sld xmlns:a="http://schemas.openxmlformats.org/drawingml/2006/main" xmlns:r="http://schemas.openxmlformats.org/officeDocument/2006/relationships" xmlns:p="http://schemas.openxmlformats.org/presentationml/2006/main">
+<p:sld xmlns:a="http://schemas.openxmlformats.org/drawingml/2006/main" xmlns:p="http://schemas.openxmlformats.org/presentationml/2006/main" xmlns:r="http://schemas.openxmlformats.org/officeDocument/2006/relationships">
   <p:cSld>
     <p:spTree>
       <p:nvGrpSpPr>
@@ -18169,14 +15098,7 @@
         <p:cNvGrpSpPr/>
         <p:nvPr/>
       </p:nvGrpSpPr>
-      <p:grpSpPr>
-        <a:xfrm>
-          <a:off x="0" y="0"/>
-          <a:ext cx="0" cy="0"/>
-          <a:chOff x="0" y="0"/>
-          <a:chExt cx="0" cy="0"/>
-        </a:xfrm>
-      </p:grpSpPr>
+      <p:grpSpPr/>
       <p:sp>
         <p:nvSpPr>
           <p:cNvPr id="2" name="Rectangle 1"/>
@@ -18218,7 +15140,6 @@
           <a:lstStyle/>
           <a:p>
             <a:pPr algn="ctr"/>
-            <a:endParaRPr/>
           </a:p>
         </p:txBody>
       </p:sp>
@@ -18230,8 +15151,8 @@
         </p:nvSpPr>
         <p:spPr>
           <a:xfrm>
-            <a:off x="554736" y="527304"/>
-            <a:ext cx="207264" cy="207264"/>
+            <a:off x="606247" y="578815"/>
+            <a:ext cx="104241" cy="104241"/>
           </a:xfrm>
           <a:prstGeom prst="roundRect">
             <a:avLst>
@@ -18247,7 +15168,7 @@
                 <a:srgbClr val="73787E"/>
               </a:gs>
             </a:gsLst>
-            <a:lin ang="18900000" scaled="0"/>
+            <a:lin scaled="0" ang="18900000"/>
           </a:gradFill>
           <a:ln>
             <a:noFill/>
@@ -18279,7 +15200,6 @@
           <a:lstStyle/>
           <a:p>
             <a:pPr algn="ctr"/>
-            <a:endParaRPr/>
           </a:p>
         </p:txBody>
       </p:sp>
@@ -18291,8 +15211,8 @@
         </p:nvSpPr>
         <p:spPr>
           <a:xfrm>
-            <a:off x="960120" y="399564"/>
-            <a:ext cx="9692640" cy="435312"/>
+            <a:off x="960120" y="274320"/>
+            <a:ext cx="9692640" cy="685800"/>
           </a:xfrm>
           <a:prstGeom prst="rect">
             <a:avLst/>
@@ -18314,62 +15234,15 @@
               </a:spcAft>
             </a:pPr>
             <a:r>
-              <a:rPr lang="ko-KR" altLang="en-US" sz="2150" b="1" dirty="0">
+              <a:rPr sz="2150" b="1">
                 <a:solidFill>
                   <a:srgbClr val="1C1C1E"/>
                 </a:solidFill>
                 <a:latin typeface="맑은 고딕"/>
                 <a:ea typeface="맑은 고딕"/>
               </a:rPr>
-              <a:t>데이터 분석을 통한 </a:t>
-            </a:r>
-            <a:r>
-              <a:rPr sz="2150" b="1" dirty="0">
-                <a:solidFill>
-                  <a:srgbClr val="1C1C1E"/>
-                </a:solidFill>
-                <a:latin typeface="맑은 고딕"/>
-                <a:ea typeface="맑은 고딕"/>
-              </a:rPr>
-              <a:t>네 </a:t>
-            </a:r>
-            <a:r>
-              <a:rPr sz="2150" b="1" dirty="0" err="1">
-                <a:solidFill>
-                  <a:srgbClr val="1C1C1E"/>
-                </a:solidFill>
-                <a:latin typeface="맑은 고딕"/>
-                <a:ea typeface="맑은 고딕"/>
-              </a:rPr>
-              <a:t>가지</a:t>
-            </a:r>
-            <a:r>
-              <a:rPr sz="2150" b="1" dirty="0">
-                <a:solidFill>
-                  <a:srgbClr val="1C1C1E"/>
-                </a:solidFill>
-                <a:latin typeface="맑은 고딕"/>
-                <a:ea typeface="맑은 고딕"/>
-              </a:rPr>
-              <a:t> </a:t>
-            </a:r>
-            <a:r>
-              <a:rPr sz="2150" b="1" dirty="0" err="1">
-                <a:solidFill>
-                  <a:srgbClr val="1C1C1E"/>
-                </a:solidFill>
-                <a:latin typeface="맑은 고딕"/>
-                <a:ea typeface="맑은 고딕"/>
-              </a:rPr>
-              <a:t>발견</a:t>
-            </a:r>
-            <a:endParaRPr sz="2150" b="1" dirty="0">
-              <a:solidFill>
-                <a:srgbClr val="1C1C1E"/>
-              </a:solidFill>
-              <a:latin typeface="맑은 고딕"/>
-              <a:ea typeface="맑은 고딕"/>
-            </a:endParaRPr>
+              <a:t>프로젝트 요약 — 네 가지 발견</a:t>
+            </a:r>
           </a:p>
         </p:txBody>
       </p:sp>
@@ -18396,7 +15269,7 @@
                 <a:srgbClr val="FFFFFF"/>
               </a:gs>
             </a:gsLst>
-            <a:lin ang="0" scaled="0"/>
+            <a:lin scaled="0" ang="0"/>
           </a:gradFill>
           <a:ln>
             <a:noFill/>
@@ -18422,7 +15295,6 @@
           <a:lstStyle/>
           <a:p>
             <a:pPr algn="ctr"/>
-            <a:endParaRPr/>
           </a:p>
         </p:txBody>
       </p:sp>
@@ -18563,7 +15435,6 @@
           <a:lstStyle/>
           <a:p>
             <a:pPr algn="ctr"/>
-            <a:endParaRPr/>
           </a:p>
         </p:txBody>
       </p:sp>
@@ -18576,7 +15447,7 @@
         <p:spPr>
           <a:xfrm>
             <a:off x="685800" y="1362456"/>
-            <a:ext cx="5166359" cy="958660"/>
+            <a:ext cx="5166359" cy="1664208"/>
           </a:xfrm>
           <a:prstGeom prst="rect">
             <a:avLst/>
@@ -18598,82 +15469,15 @@
               </a:spcAft>
             </a:pPr>
             <a:r>
-              <a:rPr sz="1300" b="1" dirty="0" err="1">
+              <a:rPr sz="1300" b="1">
                 <a:solidFill>
                   <a:srgbClr val="33393F"/>
                 </a:solidFill>
                 <a:latin typeface="맑은 고딕"/>
                 <a:ea typeface="맑은 고딕"/>
               </a:rPr>
-              <a:t>발견</a:t>
-            </a:r>
-            <a:r>
-              <a:rPr sz="1300" b="1" dirty="0">
-                <a:solidFill>
-                  <a:srgbClr val="33393F"/>
-                </a:solidFill>
-                <a:latin typeface="맑은 고딕"/>
-                <a:ea typeface="맑은 고딕"/>
-              </a:rPr>
-              <a:t> 1 · </a:t>
-            </a:r>
-            <a:r>
-              <a:rPr sz="1300" b="1" dirty="0" err="1">
-                <a:solidFill>
-                  <a:srgbClr val="33393F"/>
-                </a:solidFill>
-                <a:latin typeface="맑은 고딕"/>
-                <a:ea typeface="맑은 고딕"/>
-              </a:rPr>
-              <a:t>지정은</a:t>
-            </a:r>
-            <a:r>
-              <a:rPr sz="1300" b="1" dirty="0">
-                <a:solidFill>
-                  <a:srgbClr val="33393F"/>
-                </a:solidFill>
-                <a:latin typeface="맑은 고딕"/>
-                <a:ea typeface="맑은 고딕"/>
-              </a:rPr>
-              <a:t> </a:t>
-            </a:r>
-            <a:r>
-              <a:rPr sz="1300" b="1" dirty="0" err="1">
-                <a:solidFill>
-                  <a:srgbClr val="33393F"/>
-                </a:solidFill>
-                <a:latin typeface="맑은 고딕"/>
-                <a:ea typeface="맑은 고딕"/>
-              </a:rPr>
-              <a:t>이동시간만</a:t>
-            </a:r>
-            <a:r>
-              <a:rPr sz="1300" b="1" dirty="0">
-                <a:solidFill>
-                  <a:srgbClr val="33393F"/>
-                </a:solidFill>
-                <a:latin typeface="맑은 고딕"/>
-                <a:ea typeface="맑은 고딕"/>
-              </a:rPr>
-              <a:t> </a:t>
-            </a:r>
-            <a:r>
-              <a:rPr sz="1300" b="1" dirty="0" err="1">
-                <a:solidFill>
-                  <a:srgbClr val="33393F"/>
-                </a:solidFill>
-                <a:latin typeface="맑은 고딕"/>
-                <a:ea typeface="맑은 고딕"/>
-              </a:rPr>
-              <a:t>본다</a:t>
-            </a:r>
-            <a:endParaRPr sz="1300" b="1" dirty="0">
-              <a:solidFill>
-                <a:srgbClr val="33393F"/>
-              </a:solidFill>
-              <a:latin typeface="맑은 고딕"/>
-              <a:ea typeface="맑은 고딕"/>
-            </a:endParaRPr>
+              <a:t>발견 1 · 지정은 이동시간만 본다</a:t>
+            </a:r>
           </a:p>
           <a:p>
             <a:pPr marL="160020" indent="-160020">
@@ -18685,332 +15489,15 @@
               </a:spcAft>
             </a:pPr>
             <a:r>
-              <a:rPr sz="1150" b="0" dirty="0">
+              <a:rPr sz="1150" b="0">
                 <a:solidFill>
                   <a:srgbClr val="1C1C1E"/>
                 </a:solidFill>
                 <a:latin typeface="맑은 고딕"/>
                 <a:ea typeface="맑은 고딕"/>
               </a:rPr>
-              <a:t>• </a:t>
-            </a:r>
-            <a:r>
-              <a:rPr lang="ko-KR" altLang="en-US" sz="1150" dirty="0">
-                <a:solidFill>
-                  <a:srgbClr val="1C1C1E"/>
-                </a:solidFill>
-                <a:latin typeface="맑은 고딕"/>
-                <a:ea typeface="맑은 고딕"/>
-              </a:rPr>
-              <a:t>의료</a:t>
-            </a:r>
-            <a:r>
-              <a:rPr lang="ko-KR" altLang="en-US" sz="1150" b="0" dirty="0">
-                <a:solidFill>
-                  <a:srgbClr val="1C1C1E"/>
-                </a:solidFill>
-                <a:latin typeface="맑은 고딕"/>
-                <a:ea typeface="맑은 고딕"/>
-              </a:rPr>
-              <a:t> </a:t>
-            </a:r>
-            <a:r>
-              <a:rPr lang="ko-KR" altLang="en-US" sz="1150" dirty="0">
-                <a:solidFill>
-                  <a:srgbClr val="1C1C1E"/>
-                </a:solidFill>
-                <a:latin typeface="맑은 고딕"/>
-                <a:ea typeface="맑은 고딕"/>
-              </a:rPr>
-              <a:t>접근성과 </a:t>
-            </a:r>
-            <a:r>
-              <a:rPr lang="en-US" altLang="ko-KR" sz="1150" dirty="0">
-                <a:solidFill>
-                  <a:srgbClr val="1C1C1E"/>
-                </a:solidFill>
-                <a:latin typeface="맑은 고딕"/>
-                <a:ea typeface="맑은 고딕"/>
-              </a:rPr>
-              <a:t>TRI(</a:t>
-            </a:r>
-            <a:r>
-              <a:rPr lang="ko-KR" altLang="en-US" sz="1150" dirty="0">
-                <a:solidFill>
-                  <a:srgbClr val="1C1C1E"/>
-                </a:solidFill>
-                <a:latin typeface="맑은 고딕"/>
-                <a:ea typeface="맑은 고딕"/>
-              </a:rPr>
-              <a:t>기준시간내 </a:t>
-            </a:r>
-            <a:r>
-              <a:rPr lang="ko-KR" altLang="en-US" sz="1150" dirty="0" err="1">
-                <a:solidFill>
-                  <a:srgbClr val="1C1C1E"/>
-                </a:solidFill>
-                <a:latin typeface="맑은 고딕"/>
-                <a:ea typeface="맑은 고딕"/>
-              </a:rPr>
-              <a:t>의료이용률</a:t>
-            </a:r>
-            <a:r>
-              <a:rPr lang="en-US" altLang="ko-KR" sz="1150" dirty="0">
-                <a:solidFill>
-                  <a:srgbClr val="1C1C1E"/>
-                </a:solidFill>
-                <a:latin typeface="맑은 고딕"/>
-                <a:ea typeface="맑은 고딕"/>
-              </a:rPr>
-              <a:t>) </a:t>
-            </a:r>
-            <a:r>
-              <a:rPr lang="ko-KR" altLang="en-US" sz="1150" dirty="0">
-                <a:solidFill>
-                  <a:srgbClr val="1C1C1E"/>
-                </a:solidFill>
-                <a:latin typeface="맑은 고딕"/>
-                <a:ea typeface="맑은 고딕"/>
-              </a:rPr>
-              <a:t>만 반영하는 </a:t>
-            </a:r>
-            <a:r>
-              <a:rPr sz="1150" b="0" dirty="0" err="1">
-                <a:solidFill>
-                  <a:srgbClr val="1C1C1E"/>
-                </a:solidFill>
-                <a:latin typeface="맑은 고딕"/>
-                <a:ea typeface="맑은 고딕"/>
-              </a:rPr>
-              <a:t>공표</a:t>
-            </a:r>
-            <a:r>
-              <a:rPr sz="1150" b="0" dirty="0">
-                <a:solidFill>
-                  <a:srgbClr val="1C1C1E"/>
-                </a:solidFill>
-                <a:latin typeface="맑은 고딕"/>
-                <a:ea typeface="맑은 고딕"/>
-              </a:rPr>
-              <a:t> </a:t>
-            </a:r>
-            <a:r>
-              <a:rPr sz="1150" b="0" dirty="0" err="1">
-                <a:solidFill>
-                  <a:srgbClr val="1C1C1E"/>
-                </a:solidFill>
-                <a:latin typeface="맑은 고딕"/>
-                <a:ea typeface="맑은 고딕"/>
-              </a:rPr>
-              <a:t>판정식이</a:t>
-            </a:r>
-            <a:r>
-              <a:rPr sz="1150" b="0" dirty="0">
-                <a:solidFill>
-                  <a:srgbClr val="1C1C1E"/>
-                </a:solidFill>
-                <a:latin typeface="맑은 고딕"/>
-                <a:ea typeface="맑은 고딕"/>
-              </a:rPr>
-              <a:t> </a:t>
-            </a:r>
-            <a:r>
-              <a:rPr sz="1150" b="0" dirty="0" err="1">
-                <a:solidFill>
-                  <a:srgbClr val="1C1C1E"/>
-                </a:solidFill>
-                <a:latin typeface="맑은 고딕"/>
-                <a:ea typeface="맑은 고딕"/>
-              </a:rPr>
-              <a:t>실제</a:t>
-            </a:r>
-            <a:r>
-              <a:rPr sz="1150" b="0" dirty="0">
-                <a:solidFill>
-                  <a:srgbClr val="1C1C1E"/>
-                </a:solidFill>
-                <a:latin typeface="맑은 고딕"/>
-                <a:ea typeface="맑은 고딕"/>
-              </a:rPr>
-              <a:t> </a:t>
-            </a:r>
-            <a:r>
-              <a:rPr sz="1150" b="0" dirty="0" err="1">
-                <a:solidFill>
-                  <a:srgbClr val="1C1C1E"/>
-                </a:solidFill>
-                <a:latin typeface="맑은 고딕"/>
-                <a:ea typeface="맑은 고딕"/>
-              </a:rPr>
-              <a:t>지정</a:t>
-            </a:r>
-            <a:r>
-              <a:rPr sz="1150" b="0" dirty="0">
-                <a:solidFill>
-                  <a:srgbClr val="1C1C1E"/>
-                </a:solidFill>
-                <a:latin typeface="맑은 고딕"/>
-                <a:ea typeface="맑은 고딕"/>
-              </a:rPr>
-              <a:t> 159건 중 158건(99.4%)을 </a:t>
-            </a:r>
-            <a:r>
-              <a:rPr sz="1150" b="0" dirty="0" err="1">
-                <a:solidFill>
-                  <a:srgbClr val="1C1C1E"/>
-                </a:solidFill>
-                <a:latin typeface="맑은 고딕"/>
-                <a:ea typeface="맑은 고딕"/>
-              </a:rPr>
-              <a:t>재현</a:t>
-            </a:r>
-            <a:r>
-              <a:rPr sz="1150" b="0" dirty="0">
-                <a:solidFill>
-                  <a:srgbClr val="1C1C1E"/>
-                </a:solidFill>
-                <a:latin typeface="맑은 고딕"/>
-                <a:ea typeface="맑은 고딕"/>
-              </a:rPr>
-              <a:t>. </a:t>
-            </a:r>
-            <a:r>
-              <a:rPr sz="1150" b="0" dirty="0" err="1">
-                <a:solidFill>
-                  <a:srgbClr val="1C1C1E"/>
-                </a:solidFill>
-                <a:latin typeface="맑은 고딕"/>
-                <a:ea typeface="맑은 고딕"/>
-              </a:rPr>
-              <a:t>공급</a:t>
-            </a:r>
-            <a:r>
-              <a:rPr sz="1150" b="0" dirty="0">
-                <a:solidFill>
-                  <a:srgbClr val="1C1C1E"/>
-                </a:solidFill>
-                <a:latin typeface="맑은 고딕"/>
-                <a:ea typeface="맑은 고딕"/>
-              </a:rPr>
-              <a:t> </a:t>
-            </a:r>
-            <a:r>
-              <a:rPr sz="1150" b="0" dirty="0" err="1">
-                <a:solidFill>
-                  <a:srgbClr val="1C1C1E"/>
-                </a:solidFill>
-                <a:latin typeface="맑은 고딕"/>
-                <a:ea typeface="맑은 고딕"/>
-              </a:rPr>
-              <a:t>변수를</a:t>
-            </a:r>
-            <a:r>
-              <a:rPr sz="1150" b="0" dirty="0">
-                <a:solidFill>
-                  <a:srgbClr val="1C1C1E"/>
-                </a:solidFill>
-                <a:latin typeface="맑은 고딕"/>
-                <a:ea typeface="맑은 고딕"/>
-              </a:rPr>
-              <a:t> </a:t>
-            </a:r>
-            <a:r>
-              <a:rPr sz="1150" b="0" dirty="0" err="1">
-                <a:solidFill>
-                  <a:srgbClr val="1C1C1E"/>
-                </a:solidFill>
-                <a:latin typeface="맑은 고딕"/>
-                <a:ea typeface="맑은 고딕"/>
-              </a:rPr>
-              <a:t>추가해도</a:t>
-            </a:r>
-            <a:r>
-              <a:rPr sz="1150" b="0" dirty="0">
-                <a:solidFill>
-                  <a:srgbClr val="1C1C1E"/>
-                </a:solidFill>
-                <a:latin typeface="맑은 고딕"/>
-                <a:ea typeface="맑은 고딕"/>
-              </a:rPr>
-              <a:t> </a:t>
-            </a:r>
-            <a:r>
-              <a:rPr sz="1150" b="0" dirty="0" err="1">
-                <a:solidFill>
-                  <a:srgbClr val="1C1C1E"/>
-                </a:solidFill>
-                <a:latin typeface="맑은 고딕"/>
-                <a:ea typeface="맑은 고딕"/>
-              </a:rPr>
-              <a:t>판별력</a:t>
-            </a:r>
-            <a:r>
-              <a:rPr sz="1150" b="0" dirty="0">
-                <a:solidFill>
-                  <a:srgbClr val="1C1C1E"/>
-                </a:solidFill>
-                <a:latin typeface="맑은 고딕"/>
-                <a:ea typeface="맑은 고딕"/>
-              </a:rPr>
-              <a:t>(AUC)은 </a:t>
-            </a:r>
-            <a:r>
-              <a:rPr sz="1150" b="0" dirty="0" err="1">
-                <a:solidFill>
-                  <a:srgbClr val="1C1C1E"/>
-                </a:solidFill>
-                <a:latin typeface="맑은 고딕"/>
-                <a:ea typeface="맑은 고딕"/>
-              </a:rPr>
-              <a:t>전혀</a:t>
-            </a:r>
-            <a:r>
-              <a:rPr sz="1150" b="0" dirty="0">
-                <a:solidFill>
-                  <a:srgbClr val="1C1C1E"/>
-                </a:solidFill>
-                <a:latin typeface="맑은 고딕"/>
-                <a:ea typeface="맑은 고딕"/>
-              </a:rPr>
-              <a:t> </a:t>
-            </a:r>
-            <a:r>
-              <a:rPr sz="1150" b="0" dirty="0" err="1">
-                <a:solidFill>
-                  <a:srgbClr val="1C1C1E"/>
-                </a:solidFill>
-                <a:latin typeface="맑은 고딕"/>
-                <a:ea typeface="맑은 고딕"/>
-              </a:rPr>
-              <a:t>늘지</a:t>
-            </a:r>
-            <a:r>
-              <a:rPr sz="1150" b="0" dirty="0">
-                <a:solidFill>
-                  <a:srgbClr val="1C1C1E"/>
-                </a:solidFill>
-                <a:latin typeface="맑은 고딕"/>
-                <a:ea typeface="맑은 고딕"/>
-              </a:rPr>
-              <a:t> </a:t>
-            </a:r>
-            <a:r>
-              <a:rPr sz="1150" b="0" dirty="0" err="1">
-                <a:solidFill>
-                  <a:srgbClr val="1C1C1E"/>
-                </a:solidFill>
-                <a:latin typeface="맑은 고딕"/>
-                <a:ea typeface="맑은 고딕"/>
-              </a:rPr>
-              <a:t>않는다</a:t>
-            </a:r>
-            <a:endParaRPr sz="1150" b="0" dirty="0">
-              <a:solidFill>
-                <a:srgbClr val="1C1C1E"/>
-              </a:solidFill>
-              <a:latin typeface="맑은 고딕"/>
-              <a:ea typeface="맑은 고딕"/>
-            </a:endParaRPr>
+              <a:t>• 공표 판정식(접근성·TRI)이 실제 지정 159건 중 158건(99.4%)을 재현. 공급 변수를 추가해도 판별력(AUC)은 전혀 늘지 않는다</a:t>
+            </a:r>
           </a:p>
         </p:txBody>
       </p:sp>
@@ -19065,7 +15552,6 @@
           <a:lstStyle/>
           <a:p>
             <a:pPr algn="ctr"/>
-            <a:endParaRPr/>
           </a:p>
         </p:txBody>
       </p:sp>
@@ -19078,7 +15564,7 @@
         <p:spPr>
           <a:xfrm>
             <a:off x="6446520" y="1362456"/>
-            <a:ext cx="5166359" cy="958660"/>
+            <a:ext cx="5166359" cy="1664208"/>
           </a:xfrm>
           <a:prstGeom prst="rect">
             <a:avLst/>
@@ -19100,112 +15586,15 @@
               </a:spcAft>
             </a:pPr>
             <a:r>
-              <a:rPr sz="1300" b="1" dirty="0" err="1">
+              <a:rPr sz="1300" b="1">
                 <a:solidFill>
                   <a:srgbClr val="000000"/>
                 </a:solidFill>
                 <a:latin typeface="맑은 고딕"/>
                 <a:ea typeface="맑은 고딕"/>
               </a:rPr>
-              <a:t>발견</a:t>
-            </a:r>
-            <a:r>
-              <a:rPr sz="1300" b="1" dirty="0">
-                <a:solidFill>
-                  <a:srgbClr val="000000"/>
-                </a:solidFill>
-                <a:latin typeface="맑은 고딕"/>
-                <a:ea typeface="맑은 고딕"/>
-              </a:rPr>
-              <a:t> 2 · </a:t>
-            </a:r>
-            <a:r>
-              <a:rPr sz="1300" b="1" dirty="0" err="1">
-                <a:solidFill>
-                  <a:srgbClr val="000000"/>
-                </a:solidFill>
-                <a:latin typeface="맑은 고딕"/>
-                <a:ea typeface="맑은 고딕"/>
-              </a:rPr>
-              <a:t>공급</a:t>
-            </a:r>
-            <a:r>
-              <a:rPr sz="1300" b="1" dirty="0">
-                <a:solidFill>
-                  <a:srgbClr val="000000"/>
-                </a:solidFill>
-                <a:latin typeface="맑은 고딕"/>
-                <a:ea typeface="맑은 고딕"/>
-              </a:rPr>
-              <a:t> </a:t>
-            </a:r>
-            <a:r>
-              <a:rPr sz="1300" b="1" dirty="0" err="1">
-                <a:solidFill>
-                  <a:srgbClr val="000000"/>
-                </a:solidFill>
-                <a:latin typeface="맑은 고딕"/>
-                <a:ea typeface="맑은 고딕"/>
-              </a:rPr>
-              <a:t>공백</a:t>
-            </a:r>
-            <a:r>
-              <a:rPr lang="ko-KR" altLang="en-US" sz="1300" b="1" dirty="0">
-                <a:solidFill>
-                  <a:srgbClr val="000000"/>
-                </a:solidFill>
-                <a:latin typeface="맑은 고딕"/>
-                <a:ea typeface="맑은 고딕"/>
-              </a:rPr>
-              <a:t>이 있는</a:t>
-            </a:r>
-            <a:r>
-              <a:rPr sz="1300" b="1" dirty="0">
-                <a:solidFill>
-                  <a:srgbClr val="000000"/>
-                </a:solidFill>
-                <a:latin typeface="맑은 고딕"/>
-                <a:ea typeface="맑은 고딕"/>
-              </a:rPr>
-              <a:t> </a:t>
-            </a:r>
-            <a:r>
-              <a:rPr sz="1300" b="1" dirty="0" err="1">
-                <a:solidFill>
-                  <a:srgbClr val="000000"/>
-                </a:solidFill>
-                <a:latin typeface="맑은 고딕"/>
-                <a:ea typeface="맑은 고딕"/>
-              </a:rPr>
-              <a:t>사각지대</a:t>
-            </a:r>
-            <a:r>
-              <a:rPr lang="en-US" sz="1300" b="1" dirty="0">
-                <a:solidFill>
-                  <a:srgbClr val="000000"/>
-                </a:solidFill>
-                <a:latin typeface="맑은 고딕"/>
-                <a:ea typeface="맑은 고딕"/>
-              </a:rPr>
-              <a:t> </a:t>
-            </a:r>
-            <a:r>
-              <a:rPr lang="ko-KR" altLang="en-US" sz="1300" b="1" dirty="0">
-                <a:solidFill>
-                  <a:srgbClr val="000000"/>
-                </a:solidFill>
-                <a:latin typeface="맑은 고딕"/>
-                <a:ea typeface="맑은 고딕"/>
-              </a:rPr>
-              <a:t>실재</a:t>
-            </a:r>
-            <a:endParaRPr sz="1300" b="1" dirty="0">
-              <a:solidFill>
-                <a:srgbClr val="000000"/>
-              </a:solidFill>
-              <a:latin typeface="맑은 고딕"/>
-              <a:ea typeface="맑은 고딕"/>
-            </a:endParaRPr>
+              <a:t>발견 2 · 공급 공백형 사각지대 실재</a:t>
+            </a:r>
           </a:p>
           <a:p>
             <a:pPr marL="160020" indent="-160020">
@@ -19217,412 +15606,15 @@
               </a:spcAft>
             </a:pPr>
             <a:r>
-              <a:rPr sz="1150" b="0" dirty="0">
+              <a:rPr sz="1150" b="0">
                 <a:solidFill>
                   <a:srgbClr val="1C1C1E"/>
                 </a:solidFill>
                 <a:latin typeface="맑은 고딕"/>
                 <a:ea typeface="맑은 고딕"/>
               </a:rPr>
-              <a:t>• </a:t>
-            </a:r>
-            <a:r>
-              <a:rPr sz="1150" b="0" dirty="0" err="1">
-                <a:solidFill>
-                  <a:srgbClr val="1C1C1E"/>
-                </a:solidFill>
-                <a:latin typeface="맑은 고딕"/>
-                <a:ea typeface="맑은 고딕"/>
-              </a:rPr>
-              <a:t>거리</a:t>
-            </a:r>
-            <a:r>
-              <a:rPr sz="1150" b="0" dirty="0">
-                <a:solidFill>
-                  <a:srgbClr val="1C1C1E"/>
-                </a:solidFill>
-                <a:latin typeface="맑은 고딕"/>
-                <a:ea typeface="맑은 고딕"/>
-              </a:rPr>
-              <a:t> </a:t>
-            </a:r>
-            <a:r>
-              <a:rPr sz="1150" b="0" dirty="0" err="1">
-                <a:solidFill>
-                  <a:srgbClr val="1C1C1E"/>
-                </a:solidFill>
-                <a:latin typeface="맑은 고딕"/>
-                <a:ea typeface="맑은 고딕"/>
-              </a:rPr>
-              <a:t>기준은</a:t>
-            </a:r>
-            <a:r>
-              <a:rPr sz="1150" b="0" dirty="0">
-                <a:solidFill>
-                  <a:srgbClr val="1C1C1E"/>
-                </a:solidFill>
-                <a:latin typeface="맑은 고딕"/>
-                <a:ea typeface="맑은 고딕"/>
-              </a:rPr>
-              <a:t> </a:t>
-            </a:r>
-            <a:r>
-              <a:rPr sz="1150" b="0" dirty="0" err="1">
-                <a:solidFill>
-                  <a:srgbClr val="1C1C1E"/>
-                </a:solidFill>
-                <a:latin typeface="맑은 고딕"/>
-                <a:ea typeface="맑은 고딕"/>
-              </a:rPr>
-              <a:t>통과하지만</a:t>
-            </a:r>
-            <a:r>
-              <a:rPr sz="1150" b="0" dirty="0">
-                <a:solidFill>
-                  <a:srgbClr val="1C1C1E"/>
-                </a:solidFill>
-                <a:latin typeface="맑은 고딕"/>
-                <a:ea typeface="맑은 고딕"/>
-              </a:rPr>
-              <a:t> </a:t>
-            </a:r>
-            <a:r>
-              <a:rPr sz="1150" b="0" dirty="0" err="1">
-                <a:solidFill>
-                  <a:srgbClr val="1C1C1E"/>
-                </a:solidFill>
-                <a:latin typeface="맑은 고딕"/>
-                <a:ea typeface="맑은 고딕"/>
-              </a:rPr>
-              <a:t>관내</a:t>
-            </a:r>
-            <a:r>
-              <a:rPr sz="1150" b="0" dirty="0">
-                <a:solidFill>
-                  <a:srgbClr val="1C1C1E"/>
-                </a:solidFill>
-                <a:latin typeface="맑은 고딕"/>
-                <a:ea typeface="맑은 고딕"/>
-              </a:rPr>
-              <a:t> </a:t>
-            </a:r>
-            <a:r>
-              <a:rPr sz="1150" b="0" dirty="0" err="1">
-                <a:solidFill>
-                  <a:srgbClr val="1C1C1E"/>
-                </a:solidFill>
-                <a:latin typeface="맑은 고딕"/>
-                <a:ea typeface="맑은 고딕"/>
-              </a:rPr>
-              <a:t>공급이</a:t>
-            </a:r>
-            <a:r>
-              <a:rPr sz="1150" b="0" dirty="0">
-                <a:solidFill>
-                  <a:srgbClr val="1C1C1E"/>
-                </a:solidFill>
-                <a:latin typeface="맑은 고딕"/>
-                <a:ea typeface="맑은 고딕"/>
-              </a:rPr>
-              <a:t> </a:t>
-            </a:r>
-            <a:r>
-              <a:rPr sz="1150" b="0" dirty="0" err="1">
-                <a:solidFill>
-                  <a:srgbClr val="1C1C1E"/>
-                </a:solidFill>
-                <a:latin typeface="맑은 고딕"/>
-                <a:ea typeface="맑은 고딕"/>
-              </a:rPr>
-              <a:t>소멸한</a:t>
-            </a:r>
-            <a:r>
-              <a:rPr sz="1150" b="0" dirty="0">
-                <a:solidFill>
-                  <a:srgbClr val="1C1C1E"/>
-                </a:solidFill>
-                <a:latin typeface="맑은 고딕"/>
-                <a:ea typeface="맑은 고딕"/>
-              </a:rPr>
-              <a:t> </a:t>
-            </a:r>
-            <a:r>
-              <a:rPr sz="1150" b="0" dirty="0" err="1">
-                <a:solidFill>
-                  <a:srgbClr val="1C1C1E"/>
-                </a:solidFill>
-                <a:latin typeface="맑은 고딕"/>
-                <a:ea typeface="맑은 고딕"/>
-              </a:rPr>
-              <a:t>지역</a:t>
-            </a:r>
-            <a:r>
-              <a:rPr lang="en-US" sz="1150" b="0" dirty="0">
-                <a:solidFill>
-                  <a:srgbClr val="1C1C1E"/>
-                </a:solidFill>
-                <a:latin typeface="맑은 고딕"/>
-                <a:ea typeface="맑은 고딕"/>
-              </a:rPr>
-              <a:t>(</a:t>
-            </a:r>
-            <a:r>
-              <a:rPr lang="ko-KR" altLang="en-US" sz="1150" b="0" dirty="0">
-                <a:solidFill>
-                  <a:srgbClr val="1C1C1E"/>
-                </a:solidFill>
-                <a:latin typeface="맑은 고딕"/>
-                <a:ea typeface="맑은 고딕"/>
-              </a:rPr>
-              <a:t>가까운 의료시설은 존재하나</a:t>
-            </a:r>
-            <a:r>
-              <a:rPr lang="en-US" altLang="ko-KR" sz="1150" b="0" dirty="0">
-                <a:solidFill>
-                  <a:srgbClr val="1C1C1E"/>
-                </a:solidFill>
-                <a:latin typeface="맑은 고딕"/>
-                <a:ea typeface="맑은 고딕"/>
-              </a:rPr>
-              <a:t>, </a:t>
-            </a:r>
-            <a:r>
-              <a:rPr lang="ko-KR" altLang="en-US" sz="1150" b="0" dirty="0">
-                <a:solidFill>
-                  <a:srgbClr val="1C1C1E"/>
-                </a:solidFill>
-                <a:latin typeface="맑은 고딕"/>
-                <a:ea typeface="맑은 고딕"/>
-              </a:rPr>
-              <a:t>정작 해당 지역 사람들은 </a:t>
-            </a:r>
-            <a:r>
-              <a:rPr lang="ko-KR" altLang="en-US" sz="1150" b="0" dirty="0" err="1">
-                <a:solidFill>
-                  <a:srgbClr val="1C1C1E"/>
-                </a:solidFill>
-                <a:latin typeface="맑은 고딕"/>
-                <a:ea typeface="맑은 고딕"/>
-              </a:rPr>
-              <a:t>타지역</a:t>
-            </a:r>
-            <a:r>
-              <a:rPr lang="ko-KR" altLang="en-US" sz="1150" b="0" dirty="0">
-                <a:solidFill>
-                  <a:srgbClr val="1C1C1E"/>
-                </a:solidFill>
-                <a:latin typeface="맑은 고딕"/>
-                <a:ea typeface="맑은 고딕"/>
-              </a:rPr>
-              <a:t> 의료시설을 이용</a:t>
-            </a:r>
-            <a:r>
-              <a:rPr lang="en-US" altLang="ko-KR" sz="1150" b="0" dirty="0">
-                <a:solidFill>
-                  <a:srgbClr val="1C1C1E"/>
-                </a:solidFill>
-                <a:latin typeface="맑은 고딕"/>
-                <a:ea typeface="맑은 고딕"/>
-              </a:rPr>
-              <a:t>)</a:t>
-            </a:r>
-            <a:r>
-              <a:rPr sz="1150" b="0" dirty="0">
-                <a:solidFill>
-                  <a:srgbClr val="1C1C1E"/>
-                </a:solidFill>
-                <a:latin typeface="맑은 고딕"/>
-                <a:ea typeface="맑은 고딕"/>
-              </a:rPr>
-              <a:t> — </a:t>
-            </a:r>
-            <a:r>
-              <a:rPr sz="1150" b="0" dirty="0" err="1">
-                <a:solidFill>
-                  <a:srgbClr val="1C1C1E"/>
-                </a:solidFill>
-                <a:latin typeface="맑은 고딕"/>
-                <a:ea typeface="맑은 고딕"/>
-              </a:rPr>
-              <a:t>분만</a:t>
-            </a:r>
-            <a:r>
-              <a:rPr sz="1150" b="0" dirty="0">
-                <a:solidFill>
-                  <a:srgbClr val="1C1C1E"/>
-                </a:solidFill>
-                <a:latin typeface="맑은 고딕"/>
-                <a:ea typeface="맑은 고딕"/>
-              </a:rPr>
-              <a:t> </a:t>
-            </a:r>
-            <a:r>
-              <a:rPr sz="1150" b="0" dirty="0" err="1">
-                <a:solidFill>
-                  <a:srgbClr val="1C1C1E"/>
-                </a:solidFill>
-                <a:latin typeface="맑은 고딕"/>
-                <a:ea typeface="맑은 고딕"/>
-              </a:rPr>
-              <a:t>완전</a:t>
-            </a:r>
-            <a:r>
-              <a:rPr sz="1150" b="0" dirty="0">
-                <a:solidFill>
-                  <a:srgbClr val="1C1C1E"/>
-                </a:solidFill>
-                <a:latin typeface="맑은 고딕"/>
-                <a:ea typeface="맑은 고딕"/>
-              </a:rPr>
-              <a:t> </a:t>
-            </a:r>
-            <a:r>
-              <a:rPr sz="1150" b="0" dirty="0" err="1">
-                <a:solidFill>
-                  <a:srgbClr val="1C1C1E"/>
-                </a:solidFill>
-                <a:latin typeface="맑은 고딕"/>
-                <a:ea typeface="맑은 고딕"/>
-              </a:rPr>
-              <a:t>사각</a:t>
-            </a:r>
-            <a:r>
-              <a:rPr sz="1150" b="0" dirty="0">
-                <a:solidFill>
-                  <a:srgbClr val="1C1C1E"/>
-                </a:solidFill>
-                <a:latin typeface="맑은 고딕"/>
-                <a:ea typeface="맑은 고딕"/>
-              </a:rPr>
-              <a:t> 5곳</a:t>
-            </a:r>
-            <a:r>
-              <a:rPr lang="en-US" sz="1150" b="0" dirty="0">
-                <a:solidFill>
-                  <a:srgbClr val="1C1C1E"/>
-                </a:solidFill>
-                <a:latin typeface="맑은 고딕"/>
-                <a:ea typeface="맑은 고딕"/>
-              </a:rPr>
-              <a:t>, </a:t>
-            </a:r>
-            <a:r>
-              <a:rPr sz="1150" b="0" dirty="0" err="1">
-                <a:solidFill>
-                  <a:srgbClr val="1C1C1E"/>
-                </a:solidFill>
-                <a:latin typeface="맑은 고딕"/>
-                <a:ea typeface="맑은 고딕"/>
-              </a:rPr>
-              <a:t>소아과</a:t>
-            </a:r>
-            <a:r>
-              <a:rPr sz="1150" b="0" dirty="0">
-                <a:solidFill>
-                  <a:srgbClr val="1C1C1E"/>
-                </a:solidFill>
-                <a:latin typeface="맑은 고딕"/>
-                <a:ea typeface="맑은 고딕"/>
-              </a:rPr>
-              <a:t> 5개 </a:t>
-            </a:r>
-            <a:r>
-              <a:rPr sz="1150" b="0" dirty="0" err="1">
-                <a:solidFill>
-                  <a:srgbClr val="1C1C1E"/>
-                </a:solidFill>
-                <a:latin typeface="맑은 고딕"/>
-                <a:ea typeface="맑은 고딕"/>
-              </a:rPr>
-              <a:t>지역</a:t>
-            </a:r>
-            <a:r>
-              <a:rPr sz="1150" b="0" dirty="0">
-                <a:solidFill>
-                  <a:srgbClr val="1C1C1E"/>
-                </a:solidFill>
-                <a:latin typeface="맑은 고딕"/>
-                <a:ea typeface="맑은 고딕"/>
-              </a:rPr>
-              <a:t> </a:t>
-            </a:r>
-            <a:r>
-              <a:rPr sz="1150" b="0" dirty="0" err="1">
-                <a:solidFill>
-                  <a:srgbClr val="1C1C1E"/>
-                </a:solidFill>
-                <a:latin typeface="맑은 고딕"/>
-                <a:ea typeface="맑은 고딕"/>
-              </a:rPr>
-              <a:t>입원</a:t>
-            </a:r>
-            <a:r>
-              <a:rPr sz="1150" b="0" dirty="0">
-                <a:solidFill>
-                  <a:srgbClr val="1C1C1E"/>
-                </a:solidFill>
-                <a:latin typeface="맑은 고딕"/>
-                <a:ea typeface="맑은 고딕"/>
-              </a:rPr>
-              <a:t> 5,689건 </a:t>
-            </a:r>
-            <a:r>
-              <a:rPr sz="1150" b="0" dirty="0" err="1">
-                <a:solidFill>
-                  <a:srgbClr val="1C1C1E"/>
-                </a:solidFill>
-                <a:latin typeface="맑은 고딕"/>
-                <a:ea typeface="맑은 고딕"/>
-              </a:rPr>
-              <a:t>전량</a:t>
-            </a:r>
-            <a:r>
-              <a:rPr sz="1150" b="0" dirty="0">
-                <a:solidFill>
-                  <a:srgbClr val="1C1C1E"/>
-                </a:solidFill>
-                <a:latin typeface="맑은 고딕"/>
-                <a:ea typeface="맑은 고딕"/>
-              </a:rPr>
-              <a:t>(100%) </a:t>
-            </a:r>
-            <a:r>
-              <a:rPr sz="1150" b="0" dirty="0" err="1">
-                <a:solidFill>
-                  <a:srgbClr val="1C1C1E"/>
-                </a:solidFill>
-                <a:latin typeface="맑은 고딕"/>
-                <a:ea typeface="맑은 고딕"/>
-              </a:rPr>
-              <a:t>관외</a:t>
-            </a:r>
-            <a:r>
-              <a:rPr sz="1150" b="0" dirty="0">
-                <a:solidFill>
-                  <a:srgbClr val="1C1C1E"/>
-                </a:solidFill>
-                <a:latin typeface="맑은 고딕"/>
-                <a:ea typeface="맑은 고딕"/>
-              </a:rPr>
-              <a:t> </a:t>
-            </a:r>
-            <a:r>
-              <a:rPr sz="1150" b="0" dirty="0" err="1">
-                <a:solidFill>
-                  <a:srgbClr val="1C1C1E"/>
-                </a:solidFill>
-                <a:latin typeface="맑은 고딕"/>
-                <a:ea typeface="맑은 고딕"/>
-              </a:rPr>
-              <a:t>유출</a:t>
-            </a:r>
-            <a:endParaRPr sz="1150" b="0" dirty="0">
-              <a:solidFill>
-                <a:srgbClr val="1C1C1E"/>
-              </a:solidFill>
-              <a:latin typeface="맑은 고딕"/>
-              <a:ea typeface="맑은 고딕"/>
-            </a:endParaRPr>
+              <a:t>• 거리 기준은 통과하지만 관내 공급이 소멸한 지역 — 분만 완전 사각 5곳(등급 체계 밖), 소아과 5개 지역 입원 5,689건 전량(100%) 관외 유출</a:t>
+            </a:r>
           </a:p>
         </p:txBody>
       </p:sp>
@@ -19677,7 +15669,6 @@
           <a:lstStyle/>
           <a:p>
             <a:pPr algn="ctr"/>
-            <a:endParaRPr/>
           </a:p>
         </p:txBody>
       </p:sp>
@@ -19712,122 +15703,15 @@
               </a:spcAft>
             </a:pPr>
             <a:r>
-              <a:rPr sz="1300" b="1" dirty="0" err="1">
+              <a:rPr sz="1300" b="1">
                 <a:solidFill>
                   <a:srgbClr val="000000"/>
                 </a:solidFill>
                 <a:latin typeface="맑은 고딕"/>
                 <a:ea typeface="맑은 고딕"/>
               </a:rPr>
-              <a:t>발견</a:t>
-            </a:r>
-            <a:r>
-              <a:rPr sz="1300" b="1" dirty="0">
-                <a:solidFill>
-                  <a:srgbClr val="000000"/>
-                </a:solidFill>
-                <a:latin typeface="맑은 고딕"/>
-                <a:ea typeface="맑은 고딕"/>
-              </a:rPr>
-              <a:t> 3 · </a:t>
-            </a:r>
-            <a:r>
-              <a:rPr sz="1300" b="1" dirty="0" err="1">
-                <a:solidFill>
-                  <a:srgbClr val="000000"/>
-                </a:solidFill>
-                <a:latin typeface="맑은 고딕"/>
-                <a:ea typeface="맑은 고딕"/>
-              </a:rPr>
-              <a:t>배분</a:t>
-            </a:r>
-            <a:r>
-              <a:rPr sz="1300" b="1" dirty="0">
-                <a:solidFill>
-                  <a:srgbClr val="000000"/>
-                </a:solidFill>
-                <a:latin typeface="맑은 고딕"/>
-                <a:ea typeface="맑은 고딕"/>
-              </a:rPr>
-              <a:t> </a:t>
-            </a:r>
-            <a:r>
-              <a:rPr sz="1300" b="1" dirty="0" err="1">
-                <a:solidFill>
-                  <a:srgbClr val="000000"/>
-                </a:solidFill>
-                <a:latin typeface="맑은 고딕"/>
-                <a:ea typeface="맑은 고딕"/>
-              </a:rPr>
-              <a:t>규칙은</a:t>
-            </a:r>
-            <a:r>
-              <a:rPr sz="1300" b="1" dirty="0">
-                <a:solidFill>
-                  <a:srgbClr val="000000"/>
-                </a:solidFill>
-                <a:latin typeface="맑은 고딕"/>
-                <a:ea typeface="맑은 고딕"/>
-              </a:rPr>
-              <a:t> </a:t>
-            </a:r>
-            <a:r>
-              <a:rPr sz="1300" b="1" dirty="0" err="1">
-                <a:solidFill>
-                  <a:srgbClr val="000000"/>
-                </a:solidFill>
-                <a:latin typeface="맑은 고딕"/>
-                <a:ea typeface="맑은 고딕"/>
-              </a:rPr>
-              <a:t>데이터</a:t>
-            </a:r>
-            <a:r>
-              <a:rPr sz="1300" b="1" dirty="0">
-                <a:solidFill>
-                  <a:srgbClr val="000000"/>
-                </a:solidFill>
-                <a:latin typeface="맑은 고딕"/>
-                <a:ea typeface="맑은 고딕"/>
-              </a:rPr>
-              <a:t> </a:t>
-            </a:r>
-            <a:r>
-              <a:rPr sz="1300" b="1" dirty="0" err="1">
-                <a:solidFill>
-                  <a:srgbClr val="000000"/>
-                </a:solidFill>
-                <a:latin typeface="맑은 고딕"/>
-                <a:ea typeface="맑은 고딕"/>
-              </a:rPr>
-              <a:t>밖에</a:t>
-            </a:r>
-            <a:r>
-              <a:rPr sz="1300" b="1" dirty="0">
-                <a:solidFill>
-                  <a:srgbClr val="000000"/>
-                </a:solidFill>
-                <a:latin typeface="맑은 고딕"/>
-                <a:ea typeface="맑은 고딕"/>
-              </a:rPr>
-              <a:t> </a:t>
-            </a:r>
-            <a:r>
-              <a:rPr sz="1300" b="1" dirty="0" err="1">
-                <a:solidFill>
-                  <a:srgbClr val="000000"/>
-                </a:solidFill>
-                <a:latin typeface="맑은 고딕"/>
-                <a:ea typeface="맑은 고딕"/>
-              </a:rPr>
-              <a:t>있다</a:t>
-            </a:r>
-            <a:endParaRPr sz="1300" b="1" dirty="0">
-              <a:solidFill>
-                <a:srgbClr val="000000"/>
-              </a:solidFill>
-              <a:latin typeface="맑은 고딕"/>
-              <a:ea typeface="맑은 고딕"/>
-            </a:endParaRPr>
+              <a:t>발견 3 · 배분 규칙은 데이터 밖에 있다</a:t>
+            </a:r>
           </a:p>
           <a:p>
             <a:pPr marL="160020" indent="-160020">
@@ -19839,274 +15723,14 @@
               </a:spcAft>
             </a:pPr>
             <a:r>
-              <a:rPr sz="1150" b="0" dirty="0">
+              <a:rPr sz="1150" b="0">
                 <a:solidFill>
                   <a:srgbClr val="1C1C1E"/>
                 </a:solidFill>
                 <a:latin typeface="맑은 고딕"/>
                 <a:ea typeface="맑은 고딕"/>
               </a:rPr>
-              <a:t>• </a:t>
-            </a:r>
-            <a:r>
-              <a:rPr sz="1150" b="0" dirty="0" err="1">
-                <a:solidFill>
-                  <a:srgbClr val="1C1C1E"/>
-                </a:solidFill>
-                <a:latin typeface="맑은 고딕"/>
-                <a:ea typeface="맑은 고딕"/>
-              </a:rPr>
-              <a:t>실질</a:t>
-            </a:r>
-            <a:r>
-              <a:rPr sz="1150" b="0" dirty="0">
-                <a:solidFill>
-                  <a:srgbClr val="1C1C1E"/>
-                </a:solidFill>
-                <a:latin typeface="맑은 고딕"/>
-                <a:ea typeface="맑은 고딕"/>
-              </a:rPr>
-              <a:t> </a:t>
-            </a:r>
-            <a:r>
-              <a:rPr sz="1150" b="0" dirty="0" err="1">
-                <a:solidFill>
-                  <a:srgbClr val="1C1C1E"/>
-                </a:solidFill>
-                <a:latin typeface="맑은 고딕"/>
-                <a:ea typeface="맑은 고딕"/>
-              </a:rPr>
-              <a:t>취약지</a:t>
-            </a:r>
-            <a:r>
-              <a:rPr sz="1150" b="0" dirty="0">
-                <a:solidFill>
-                  <a:srgbClr val="1C1C1E"/>
-                </a:solidFill>
-                <a:latin typeface="맑은 고딕"/>
-                <a:ea typeface="맑은 고딕"/>
-              </a:rPr>
-              <a:t> A·B 53곳 중 21곳만 </a:t>
-            </a:r>
-            <a:r>
-              <a:rPr sz="1150" b="0" dirty="0" err="1">
-                <a:solidFill>
-                  <a:srgbClr val="1C1C1E"/>
-                </a:solidFill>
-                <a:latin typeface="맑은 고딕"/>
-                <a:ea typeface="맑은 고딕"/>
-              </a:rPr>
-              <a:t>기지원</a:t>
-            </a:r>
-            <a:r>
-              <a:rPr sz="1150" b="0" dirty="0">
-                <a:solidFill>
-                  <a:srgbClr val="1C1C1E"/>
-                </a:solidFill>
-                <a:latin typeface="맑은 고딕"/>
-                <a:ea typeface="맑은 고딕"/>
-              </a:rPr>
-              <a:t>. </a:t>
-            </a:r>
-            <a:r>
-              <a:rPr sz="1150" b="0" dirty="0" err="1">
-                <a:solidFill>
-                  <a:srgbClr val="1C1C1E"/>
-                </a:solidFill>
-                <a:latin typeface="맑은 고딕"/>
-                <a:ea typeface="맑은 고딕"/>
-              </a:rPr>
-              <a:t>A등급</a:t>
-            </a:r>
-            <a:r>
-              <a:rPr sz="1150" b="0" dirty="0">
-                <a:solidFill>
-                  <a:srgbClr val="1C1C1E"/>
-                </a:solidFill>
-                <a:latin typeface="맑은 고딕"/>
-                <a:ea typeface="맑은 고딕"/>
-              </a:rPr>
-              <a:t> </a:t>
-            </a:r>
-            <a:r>
-              <a:rPr sz="1150" b="0" dirty="0" err="1">
-                <a:solidFill>
-                  <a:srgbClr val="1C1C1E"/>
-                </a:solidFill>
-                <a:latin typeface="맑은 고딕"/>
-                <a:ea typeface="맑은 고딕"/>
-              </a:rPr>
-              <a:t>지원</a:t>
-            </a:r>
-            <a:r>
-              <a:rPr sz="1150" b="0" dirty="0">
-                <a:solidFill>
-                  <a:srgbClr val="1C1C1E"/>
-                </a:solidFill>
-                <a:latin typeface="맑은 고딕"/>
-                <a:ea typeface="맑은 고딕"/>
-              </a:rPr>
-              <a:t> </a:t>
-            </a:r>
-            <a:r>
-              <a:rPr sz="1150" b="0" dirty="0" err="1">
-                <a:solidFill>
-                  <a:srgbClr val="1C1C1E"/>
-                </a:solidFill>
-                <a:latin typeface="맑은 고딕"/>
-                <a:ea typeface="맑은 고딕"/>
-              </a:rPr>
-              <a:t>오즈는</a:t>
-            </a:r>
-            <a:r>
-              <a:rPr sz="1150" b="0" dirty="0">
-                <a:solidFill>
-                  <a:srgbClr val="1C1C1E"/>
-                </a:solidFill>
-                <a:latin typeface="맑은 고딕"/>
-                <a:ea typeface="맑은 고딕"/>
-              </a:rPr>
-              <a:t> </a:t>
-            </a:r>
-            <a:r>
-              <a:rPr sz="1150" b="0" dirty="0" err="1">
-                <a:solidFill>
-                  <a:srgbClr val="1C1C1E"/>
-                </a:solidFill>
-                <a:latin typeface="맑은 고딕"/>
-                <a:ea typeface="맑은 고딕"/>
-              </a:rPr>
-              <a:t>B의</a:t>
-            </a:r>
-            <a:r>
-              <a:rPr sz="1150" b="0" dirty="0">
-                <a:solidFill>
-                  <a:srgbClr val="1C1C1E"/>
-                </a:solidFill>
-                <a:latin typeface="맑은 고딕"/>
-                <a:ea typeface="맑은 고딕"/>
-              </a:rPr>
-              <a:t> 4.82배(p=0.021)</a:t>
-            </a:r>
-            <a:r>
-              <a:rPr sz="1150" b="0" dirty="0" err="1">
-                <a:solidFill>
-                  <a:srgbClr val="1C1C1E"/>
-                </a:solidFill>
-                <a:latin typeface="맑은 고딕"/>
-                <a:ea typeface="맑은 고딕"/>
-              </a:rPr>
-              <a:t>인데</a:t>
-            </a:r>
-            <a:r>
-              <a:rPr sz="1150" b="0" dirty="0">
-                <a:solidFill>
-                  <a:srgbClr val="1C1C1E"/>
-                </a:solidFill>
-                <a:latin typeface="맑은 고딕"/>
-                <a:ea typeface="맑은 고딕"/>
-              </a:rPr>
-              <a:t>, 그 </a:t>
-            </a:r>
-            <a:r>
-              <a:rPr sz="1150" b="0" dirty="0" err="1">
-                <a:solidFill>
-                  <a:srgbClr val="1C1C1E"/>
-                </a:solidFill>
-                <a:latin typeface="맑은 고딕"/>
-                <a:ea typeface="맑은 고딕"/>
-              </a:rPr>
-              <a:t>선정은</a:t>
-            </a:r>
-            <a:r>
-              <a:rPr sz="1150" b="0" dirty="0">
-                <a:solidFill>
-                  <a:srgbClr val="1C1C1E"/>
-                </a:solidFill>
-                <a:latin typeface="맑은 고딕"/>
-                <a:ea typeface="맑은 고딕"/>
-              </a:rPr>
-              <a:t> </a:t>
-            </a:r>
-            <a:r>
-              <a:rPr sz="1150" b="0" dirty="0" err="1">
-                <a:solidFill>
-                  <a:srgbClr val="1C1C1E"/>
-                </a:solidFill>
-                <a:latin typeface="맑은 고딕"/>
-                <a:ea typeface="맑은 고딕"/>
-              </a:rPr>
-              <a:t>공개</a:t>
-            </a:r>
-            <a:r>
-              <a:rPr sz="1150" b="0" dirty="0">
-                <a:solidFill>
-                  <a:srgbClr val="1C1C1E"/>
-                </a:solidFill>
-                <a:latin typeface="맑은 고딕"/>
-                <a:ea typeface="맑은 고딕"/>
-              </a:rPr>
-              <a:t> </a:t>
-            </a:r>
-            <a:r>
-              <a:rPr sz="1150" b="0" dirty="0" err="1">
-                <a:solidFill>
-                  <a:srgbClr val="1C1C1E"/>
-                </a:solidFill>
-                <a:latin typeface="맑은 고딕"/>
-                <a:ea typeface="맑은 고딕"/>
-              </a:rPr>
-              <a:t>지표로</a:t>
-            </a:r>
-            <a:r>
-              <a:rPr sz="1150" b="0" dirty="0">
-                <a:solidFill>
-                  <a:srgbClr val="1C1C1E"/>
-                </a:solidFill>
-                <a:latin typeface="맑은 고딕"/>
-                <a:ea typeface="맑은 고딕"/>
-              </a:rPr>
-              <a:t> 16% </a:t>
-            </a:r>
-            <a:r>
-              <a:rPr sz="1150" b="0" dirty="0" err="1">
-                <a:solidFill>
-                  <a:srgbClr val="1C1C1E"/>
-                </a:solidFill>
-                <a:latin typeface="맑은 고딕"/>
-                <a:ea typeface="맑은 고딕"/>
-              </a:rPr>
-              <a:t>남짓만</a:t>
-            </a:r>
-            <a:r>
-              <a:rPr sz="1150" b="0" dirty="0">
-                <a:solidFill>
-                  <a:srgbClr val="1C1C1E"/>
-                </a:solidFill>
-                <a:latin typeface="맑은 고딕"/>
-                <a:ea typeface="맑은 고딕"/>
-              </a:rPr>
-              <a:t> </a:t>
-            </a:r>
-            <a:r>
-              <a:rPr sz="1150" b="0" dirty="0" err="1">
-                <a:solidFill>
-                  <a:srgbClr val="1C1C1E"/>
-                </a:solidFill>
-                <a:latin typeface="맑은 고딕"/>
-                <a:ea typeface="맑은 고딕"/>
-              </a:rPr>
-              <a:t>설명된다</a:t>
-            </a:r>
-            <a:r>
-              <a:rPr sz="1150" b="0" dirty="0">
-                <a:solidFill>
-                  <a:srgbClr val="1C1C1E"/>
-                </a:solidFill>
-                <a:latin typeface="맑은 고딕"/>
-                <a:ea typeface="맑은 고딕"/>
-              </a:rPr>
-              <a:t>(McFadden R² 0.163)</a:t>
+              <a:t>• 실질 취약지 A·B 53곳 중 21곳만 기지원. A등급 지원 오즈는 B의 4.82배(p=0.021)인데, 그 선정은 공개 지표로 16% 남짓만 설명된다(McFadden R² 0.163)</a:t>
             </a:r>
           </a:p>
         </p:txBody>
@@ -20162,7 +15786,6 @@
           <a:lstStyle/>
           <a:p>
             <a:pPr algn="ctr"/>
-            <a:endParaRPr/>
           </a:p>
         </p:txBody>
       </p:sp>
@@ -20197,122 +15820,15 @@
               </a:spcAft>
             </a:pPr>
             <a:r>
-              <a:rPr sz="1300" b="1" dirty="0" err="1">
+              <a:rPr sz="1300" b="1">
                 <a:solidFill>
                   <a:srgbClr val="33393F"/>
                 </a:solidFill>
                 <a:latin typeface="맑은 고딕"/>
                 <a:ea typeface="맑은 고딕"/>
               </a:rPr>
-              <a:t>발견</a:t>
-            </a:r>
-            <a:r>
-              <a:rPr sz="1300" b="1" dirty="0">
-                <a:solidFill>
-                  <a:srgbClr val="33393F"/>
-                </a:solidFill>
-                <a:latin typeface="맑은 고딕"/>
-                <a:ea typeface="맑은 고딕"/>
-              </a:rPr>
-              <a:t> 4 · </a:t>
-            </a:r>
-            <a:r>
-              <a:rPr sz="1300" b="1" dirty="0" err="1">
-                <a:solidFill>
-                  <a:srgbClr val="33393F"/>
-                </a:solidFill>
-                <a:latin typeface="맑은 고딕"/>
-                <a:ea typeface="맑은 고딕"/>
-              </a:rPr>
-              <a:t>깊이는</a:t>
-            </a:r>
-            <a:r>
-              <a:rPr sz="1300" b="1" dirty="0">
-                <a:solidFill>
-                  <a:srgbClr val="33393F"/>
-                </a:solidFill>
-                <a:latin typeface="맑은 고딕"/>
-                <a:ea typeface="맑은 고딕"/>
-              </a:rPr>
-              <a:t> </a:t>
-            </a:r>
-            <a:r>
-              <a:rPr sz="1300" b="1" dirty="0" err="1">
-                <a:solidFill>
-                  <a:srgbClr val="33393F"/>
-                </a:solidFill>
-                <a:latin typeface="맑은 고딕"/>
-                <a:ea typeface="맑은 고딕"/>
-              </a:rPr>
-              <a:t>보지만</a:t>
-            </a:r>
-            <a:r>
-              <a:rPr sz="1300" b="1" dirty="0">
-                <a:solidFill>
-                  <a:srgbClr val="33393F"/>
-                </a:solidFill>
-                <a:latin typeface="맑은 고딕"/>
-                <a:ea typeface="맑은 고딕"/>
-              </a:rPr>
-              <a:t> </a:t>
-            </a:r>
-            <a:r>
-              <a:rPr sz="1300" b="1" dirty="0" err="1">
-                <a:solidFill>
-                  <a:srgbClr val="33393F"/>
-                </a:solidFill>
-                <a:latin typeface="맑은 고딕"/>
-                <a:ea typeface="맑은 고딕"/>
-              </a:rPr>
-              <a:t>인원</a:t>
-            </a:r>
-            <a:r>
-              <a:rPr sz="1300" b="1" dirty="0">
-                <a:solidFill>
-                  <a:srgbClr val="33393F"/>
-                </a:solidFill>
-                <a:latin typeface="맑은 고딕"/>
-                <a:ea typeface="맑은 고딕"/>
-              </a:rPr>
-              <a:t> </a:t>
-            </a:r>
-            <a:r>
-              <a:rPr sz="1300" b="1" dirty="0" err="1">
-                <a:solidFill>
-                  <a:srgbClr val="33393F"/>
-                </a:solidFill>
-                <a:latin typeface="맑은 고딕"/>
-                <a:ea typeface="맑은 고딕"/>
-              </a:rPr>
-              <a:t>수는</a:t>
-            </a:r>
-            <a:r>
-              <a:rPr sz="1300" b="1" dirty="0">
-                <a:solidFill>
-                  <a:srgbClr val="33393F"/>
-                </a:solidFill>
-                <a:latin typeface="맑은 고딕"/>
-                <a:ea typeface="맑은 고딕"/>
-              </a:rPr>
-              <a:t> 안 </a:t>
-            </a:r>
-            <a:r>
-              <a:rPr sz="1300" b="1" dirty="0" err="1">
-                <a:solidFill>
-                  <a:srgbClr val="33393F"/>
-                </a:solidFill>
-                <a:latin typeface="맑은 고딕"/>
-                <a:ea typeface="맑은 고딕"/>
-              </a:rPr>
-              <a:t>본다</a:t>
-            </a:r>
-            <a:endParaRPr sz="1300" b="1" dirty="0">
-              <a:solidFill>
-                <a:srgbClr val="33393F"/>
-              </a:solidFill>
-              <a:latin typeface="맑은 고딕"/>
-              <a:ea typeface="맑은 고딕"/>
-            </a:endParaRPr>
+              <a:t>발견 4 · 깊이는 보지만 인원 수는 안 본다</a:t>
+            </a:r>
           </a:p>
           <a:p>
             <a:pPr marL="160020" indent="-160020">
@@ -20324,372 +15840,15 @@
               </a:spcAft>
             </a:pPr>
             <a:r>
-              <a:rPr sz="1150" b="0" dirty="0">
+              <a:rPr sz="1150" b="0">
                 <a:solidFill>
                   <a:srgbClr val="1C1C1E"/>
                 </a:solidFill>
                 <a:latin typeface="맑은 고딕"/>
                 <a:ea typeface="맑은 고딕"/>
               </a:rPr>
-              <a:t>• </a:t>
-            </a:r>
-            <a:r>
-              <a:rPr sz="1150" b="0" dirty="0" err="1">
-                <a:solidFill>
-                  <a:srgbClr val="1C1C1E"/>
-                </a:solidFill>
-                <a:latin typeface="맑은 고딕"/>
-                <a:ea typeface="맑은 고딕"/>
-              </a:rPr>
-              <a:t>현행</a:t>
-            </a:r>
-            <a:r>
-              <a:rPr sz="1150" b="0" dirty="0">
-                <a:solidFill>
-                  <a:srgbClr val="1C1C1E"/>
-                </a:solidFill>
-                <a:latin typeface="맑은 고딕"/>
-                <a:ea typeface="맑은 고딕"/>
-              </a:rPr>
-              <a:t> </a:t>
-            </a:r>
-            <a:r>
-              <a:rPr sz="1150" b="0" dirty="0" err="1">
-                <a:solidFill>
-                  <a:srgbClr val="1C1C1E"/>
-                </a:solidFill>
-                <a:latin typeface="맑은 고딕"/>
-                <a:ea typeface="맑은 고딕"/>
-              </a:rPr>
-              <a:t>배분은</a:t>
-            </a:r>
-            <a:r>
-              <a:rPr sz="1150" b="0" dirty="0">
-                <a:solidFill>
-                  <a:srgbClr val="1C1C1E"/>
-                </a:solidFill>
-                <a:latin typeface="맑은 고딕"/>
-                <a:ea typeface="맑은 고딕"/>
-              </a:rPr>
-              <a:t> </a:t>
-            </a:r>
-            <a:r>
-              <a:rPr sz="1150" b="0" dirty="0" err="1">
-                <a:solidFill>
-                  <a:srgbClr val="1C1C1E"/>
-                </a:solidFill>
-                <a:latin typeface="맑은 고딕"/>
-                <a:ea typeface="맑은 고딕"/>
-              </a:rPr>
-              <a:t>취약</a:t>
-            </a:r>
-            <a:r>
-              <a:rPr sz="1150" b="0" dirty="0">
-                <a:solidFill>
-                  <a:srgbClr val="1C1C1E"/>
-                </a:solidFill>
-                <a:latin typeface="맑은 고딕"/>
-                <a:ea typeface="맑은 고딕"/>
-              </a:rPr>
-              <a:t> </a:t>
-            </a:r>
-            <a:r>
-              <a:rPr sz="1150" b="0" dirty="0" err="1">
-                <a:solidFill>
-                  <a:srgbClr val="1C1C1E"/>
-                </a:solidFill>
-                <a:latin typeface="맑은 고딕"/>
-                <a:ea typeface="맑은 고딕"/>
-              </a:rPr>
-              <a:t>심도와는</a:t>
-            </a:r>
-            <a:r>
-              <a:rPr sz="1150" b="0" dirty="0">
-                <a:solidFill>
-                  <a:srgbClr val="1C1C1E"/>
-                </a:solidFill>
-                <a:latin typeface="맑은 고딕"/>
-                <a:ea typeface="맑은 고딕"/>
-              </a:rPr>
-              <a:t> </a:t>
-            </a:r>
-            <a:r>
-              <a:rPr sz="1150" b="0" dirty="0" err="1">
-                <a:solidFill>
-                  <a:srgbClr val="1C1C1E"/>
-                </a:solidFill>
-                <a:latin typeface="맑은 고딕"/>
-                <a:ea typeface="맑은 고딕"/>
-              </a:rPr>
-              <a:t>정렬</a:t>
-            </a:r>
-            <a:r>
-              <a:rPr sz="1150" b="0" dirty="0">
-                <a:solidFill>
-                  <a:srgbClr val="1C1C1E"/>
-                </a:solidFill>
-                <a:latin typeface="맑은 고딕"/>
-                <a:ea typeface="맑은 고딕"/>
-              </a:rPr>
-              <a:t>(ρ=+0.381), </a:t>
-            </a:r>
-            <a:r>
-              <a:rPr sz="1150" b="0" dirty="0" err="1">
-                <a:solidFill>
-                  <a:srgbClr val="1C1C1E"/>
-                </a:solidFill>
-                <a:latin typeface="맑은 고딕"/>
-                <a:ea typeface="맑은 고딕"/>
-              </a:rPr>
-              <a:t>영향</a:t>
-            </a:r>
-            <a:r>
-              <a:rPr sz="1150" b="0" dirty="0">
-                <a:solidFill>
-                  <a:srgbClr val="1C1C1E"/>
-                </a:solidFill>
-                <a:latin typeface="맑은 고딕"/>
-                <a:ea typeface="맑은 고딕"/>
-              </a:rPr>
-              <a:t> </a:t>
-            </a:r>
-            <a:r>
-              <a:rPr sz="1150" b="0" dirty="0" err="1">
-                <a:solidFill>
-                  <a:srgbClr val="1C1C1E"/>
-                </a:solidFill>
-                <a:latin typeface="맑은 고딕"/>
-                <a:ea typeface="맑은 고딕"/>
-              </a:rPr>
-              <a:t>인원</a:t>
-            </a:r>
-            <a:r>
-              <a:rPr sz="1150" b="0" dirty="0">
-                <a:solidFill>
-                  <a:srgbClr val="1C1C1E"/>
-                </a:solidFill>
-                <a:latin typeface="맑은 고딕"/>
-                <a:ea typeface="맑은 고딕"/>
-              </a:rPr>
-              <a:t> </a:t>
-            </a:r>
-            <a:r>
-              <a:rPr sz="1150" b="0" dirty="0" err="1">
-                <a:solidFill>
-                  <a:srgbClr val="1C1C1E"/>
-                </a:solidFill>
-                <a:latin typeface="맑은 고딕"/>
-                <a:ea typeface="맑은 고딕"/>
-              </a:rPr>
-              <a:t>규모</a:t>
-            </a:r>
-            <a:r>
-              <a:rPr sz="1150" b="0" dirty="0">
-                <a:solidFill>
-                  <a:srgbClr val="1C1C1E"/>
-                </a:solidFill>
-                <a:latin typeface="맑은 고딕"/>
-                <a:ea typeface="맑은 고딕"/>
-              </a:rPr>
-              <a:t>(</a:t>
-            </a:r>
-            <a:r>
-              <a:rPr sz="1150" b="0" dirty="0" err="1">
-                <a:solidFill>
-                  <a:srgbClr val="1C1C1E"/>
-                </a:solidFill>
-                <a:latin typeface="맑은 고딕"/>
-                <a:ea typeface="맑은 고딕"/>
-              </a:rPr>
-              <a:t>부담</a:t>
-            </a:r>
-            <a:r>
-              <a:rPr sz="1150" b="0" dirty="0">
-                <a:solidFill>
-                  <a:srgbClr val="1C1C1E"/>
-                </a:solidFill>
-                <a:latin typeface="맑은 고딕"/>
-                <a:ea typeface="맑은 고딕"/>
-              </a:rPr>
-              <a:t>)</a:t>
-            </a:r>
-            <a:r>
-              <a:rPr sz="1150" b="0" dirty="0" err="1">
-                <a:solidFill>
-                  <a:srgbClr val="1C1C1E"/>
-                </a:solidFill>
-                <a:latin typeface="맑은 고딕"/>
-                <a:ea typeface="맑은 고딕"/>
-              </a:rPr>
-              <a:t>와는</a:t>
-            </a:r>
-            <a:r>
-              <a:rPr sz="1150" b="0" dirty="0">
-                <a:solidFill>
-                  <a:srgbClr val="1C1C1E"/>
-                </a:solidFill>
-                <a:latin typeface="맑은 고딕"/>
-                <a:ea typeface="맑은 고딕"/>
-              </a:rPr>
-              <a:t> </a:t>
-            </a:r>
-            <a:r>
-              <a:rPr sz="1150" b="0" dirty="0" err="1">
-                <a:solidFill>
-                  <a:srgbClr val="1C1C1E"/>
-                </a:solidFill>
-                <a:latin typeface="맑은 고딕"/>
-                <a:ea typeface="맑은 고딕"/>
-              </a:rPr>
-              <a:t>무관</a:t>
-            </a:r>
-            <a:r>
-              <a:rPr sz="1150" b="0" dirty="0">
-                <a:solidFill>
-                  <a:srgbClr val="1C1C1E"/>
-                </a:solidFill>
-                <a:latin typeface="맑은 고딕"/>
-                <a:ea typeface="맑은 고딕"/>
-              </a:rPr>
-              <a:t>(ρ=−0.131). 두 </a:t>
-            </a:r>
-            <a:r>
-              <a:rPr sz="1150" b="0" dirty="0" err="1">
-                <a:solidFill>
-                  <a:srgbClr val="1C1C1E"/>
-                </a:solidFill>
-                <a:latin typeface="맑은 고딕"/>
-                <a:ea typeface="맑은 고딕"/>
-              </a:rPr>
-              <a:t>관점의</a:t>
-            </a:r>
-            <a:r>
-              <a:rPr sz="1150" b="0" dirty="0">
-                <a:solidFill>
-                  <a:srgbClr val="1C1C1E"/>
-                </a:solidFill>
-                <a:latin typeface="맑은 고딕"/>
-                <a:ea typeface="맑은 고딕"/>
-              </a:rPr>
-              <a:t> </a:t>
-            </a:r>
-            <a:r>
-              <a:rPr sz="1150" b="0" dirty="0" err="1">
-                <a:solidFill>
-                  <a:srgbClr val="1C1C1E"/>
-                </a:solidFill>
-                <a:latin typeface="맑은 고딕"/>
-                <a:ea typeface="맑은 고딕"/>
-              </a:rPr>
-              <a:t>순위</a:t>
-            </a:r>
-            <a:r>
-              <a:rPr sz="1150" b="0" dirty="0">
-                <a:solidFill>
-                  <a:srgbClr val="1C1C1E"/>
-                </a:solidFill>
-                <a:latin typeface="맑은 고딕"/>
-                <a:ea typeface="맑은 고딕"/>
-              </a:rPr>
-              <a:t> </a:t>
-            </a:r>
-            <a:r>
-              <a:rPr sz="1150" b="0" dirty="0" err="1">
-                <a:solidFill>
-                  <a:srgbClr val="1C1C1E"/>
-                </a:solidFill>
-                <a:latin typeface="맑은 고딕"/>
-                <a:ea typeface="맑은 고딕"/>
-              </a:rPr>
-              <a:t>상관은</a:t>
-            </a:r>
-            <a:r>
-              <a:rPr sz="1150" b="0" dirty="0">
-                <a:solidFill>
-                  <a:srgbClr val="1C1C1E"/>
-                </a:solidFill>
-                <a:latin typeface="맑은 고딕"/>
-                <a:ea typeface="맑은 고딕"/>
-              </a:rPr>
-              <a:t> −0.190 — </a:t>
-            </a:r>
-            <a:r>
-              <a:rPr sz="1150" b="0" dirty="0" err="1">
-                <a:solidFill>
-                  <a:srgbClr val="1C1C1E"/>
-                </a:solidFill>
-                <a:latin typeface="맑은 고딕"/>
-                <a:ea typeface="맑은 고딕"/>
-              </a:rPr>
-              <a:t>축의</a:t>
-            </a:r>
-            <a:r>
-              <a:rPr sz="1150" b="0" dirty="0">
-                <a:solidFill>
-                  <a:srgbClr val="1C1C1E"/>
-                </a:solidFill>
-                <a:latin typeface="맑은 고딕"/>
-                <a:ea typeface="맑은 고딕"/>
-              </a:rPr>
-              <a:t> </a:t>
-            </a:r>
-            <a:r>
-              <a:rPr sz="1150" b="0" dirty="0" err="1">
-                <a:solidFill>
-                  <a:srgbClr val="1C1C1E"/>
-                </a:solidFill>
-                <a:latin typeface="맑은 고딕"/>
-                <a:ea typeface="맑은 고딕"/>
-              </a:rPr>
-              <a:t>선택이</a:t>
-            </a:r>
-            <a:r>
-              <a:rPr sz="1150" b="0" dirty="0">
-                <a:solidFill>
-                  <a:srgbClr val="1C1C1E"/>
-                </a:solidFill>
-                <a:latin typeface="맑은 고딕"/>
-                <a:ea typeface="맑은 고딕"/>
-              </a:rPr>
-              <a:t> </a:t>
-            </a:r>
-            <a:r>
-              <a:rPr sz="1150" b="0" dirty="0" err="1">
-                <a:solidFill>
-                  <a:srgbClr val="1C1C1E"/>
-                </a:solidFill>
-                <a:latin typeface="맑은 고딕"/>
-                <a:ea typeface="맑은 고딕"/>
-              </a:rPr>
-              <a:t>결과를</a:t>
-            </a:r>
-            <a:r>
-              <a:rPr sz="1150" b="0" dirty="0">
-                <a:solidFill>
-                  <a:srgbClr val="1C1C1E"/>
-                </a:solidFill>
-                <a:latin typeface="맑은 고딕"/>
-                <a:ea typeface="맑은 고딕"/>
-              </a:rPr>
-              <a:t> </a:t>
-            </a:r>
-            <a:r>
-              <a:rPr sz="1150" b="0" dirty="0" err="1">
-                <a:solidFill>
-                  <a:srgbClr val="1C1C1E"/>
-                </a:solidFill>
-                <a:latin typeface="맑은 고딕"/>
-                <a:ea typeface="맑은 고딕"/>
-              </a:rPr>
-              <a:t>바꾼다</a:t>
-            </a:r>
-            <a:endParaRPr sz="1150" b="0" dirty="0">
-              <a:solidFill>
-                <a:srgbClr val="1C1C1E"/>
-              </a:solidFill>
-              <a:latin typeface="맑은 고딕"/>
-              <a:ea typeface="맑은 고딕"/>
-            </a:endParaRPr>
+              <a:t>• 현행 배분은 취약 심도와는 정렬(ρ=+0.381), 영향 인원 규모(부담)와는 무관(ρ=−0.131). 두 관점의 순위 상관은 −0.190 — 축의 선택이 결과를 바꾼다</a:t>
+            </a:r>
           </a:p>
         </p:txBody>
       </p:sp>
@@ -20745,7 +15904,7 @@
 </file>
 
 <file path=ppt/slides/slide5.xml><?xml version="1.0" encoding="utf-8"?>
-<p:sld xmlns:a="http://schemas.openxmlformats.org/drawingml/2006/main" xmlns:r="http://schemas.openxmlformats.org/officeDocument/2006/relationships" xmlns:p="http://schemas.openxmlformats.org/presentationml/2006/main">
+<p:sld xmlns:a="http://schemas.openxmlformats.org/drawingml/2006/main" xmlns:p="http://schemas.openxmlformats.org/presentationml/2006/main" xmlns:r="http://schemas.openxmlformats.org/officeDocument/2006/relationships">
   <p:cSld>
     <p:spTree>
       <p:nvGrpSpPr>
@@ -20753,14 +15912,7 @@
         <p:cNvGrpSpPr/>
         <p:nvPr/>
       </p:nvGrpSpPr>
-      <p:grpSpPr>
-        <a:xfrm>
-          <a:off x="0" y="0"/>
-          <a:ext cx="0" cy="0"/>
-          <a:chOff x="0" y="0"/>
-          <a:chExt cx="0" cy="0"/>
-        </a:xfrm>
-      </p:grpSpPr>
+      <p:grpSpPr/>
       <p:sp>
         <p:nvSpPr>
           <p:cNvPr id="2" name="Rectangle 1"/>
@@ -20802,7 +15954,6 @@
           <a:lstStyle/>
           <a:p>
             <a:pPr algn="ctr"/>
-            <a:endParaRPr/>
           </a:p>
         </p:txBody>
       </p:sp>
@@ -20814,8 +15965,8 @@
         </p:nvSpPr>
         <p:spPr>
           <a:xfrm>
-            <a:off x="554736" y="527304"/>
-            <a:ext cx="207264" cy="207264"/>
+            <a:off x="606247" y="578815"/>
+            <a:ext cx="104241" cy="104241"/>
           </a:xfrm>
           <a:prstGeom prst="roundRect">
             <a:avLst>
@@ -20831,7 +15982,7 @@
                 <a:srgbClr val="73787E"/>
               </a:gs>
             </a:gsLst>
-            <a:lin ang="18900000" scaled="0"/>
+            <a:lin scaled="0" ang="18900000"/>
           </a:gradFill>
           <a:ln>
             <a:noFill/>
@@ -20863,7 +16014,6 @@
           <a:lstStyle/>
           <a:p>
             <a:pPr algn="ctr"/>
-            <a:endParaRPr/>
           </a:p>
         </p:txBody>
       </p:sp>
@@ -20933,7 +16083,7 @@
                 <a:srgbClr val="FFFFFF"/>
               </a:gs>
             </a:gsLst>
-            <a:lin ang="0" scaled="0"/>
+            <a:lin scaled="0" ang="0"/>
           </a:gradFill>
           <a:ln>
             <a:noFill/>
@@ -20959,7 +16109,6 @@
           <a:lstStyle/>
           <a:p>
             <a:pPr algn="ctr"/>
-            <a:endParaRPr/>
           </a:p>
         </p:txBody>
       </p:sp>
@@ -21143,7 +16292,6 @@
           <a:lstStyle/>
           <a:p>
             <a:pPr algn="ctr"/>
-            <a:endParaRPr/>
           </a:p>
         </p:txBody>
       </p:sp>
@@ -21324,7 +16472,6 @@
           <a:lstStyle/>
           <a:p>
             <a:pPr algn="ctr"/>
-            <a:endParaRPr/>
           </a:p>
         </p:txBody>
       </p:sp>
@@ -21505,7 +16652,6 @@
           <a:lstStyle/>
           <a:p>
             <a:pPr algn="ctr"/>
-            <a:endParaRPr/>
           </a:p>
         </p:txBody>
       </p:sp>
@@ -21617,7 +16763,7 @@
                 <a:srgbClr val="4A4F55"/>
               </a:gs>
             </a:gsLst>
-            <a:lin ang="14700000" scaled="0"/>
+            <a:lin scaled="0" ang="14700000"/>
           </a:gradFill>
           <a:ln>
             <a:noFill/>
@@ -21649,7 +16795,6 @@
           <a:lstStyle/>
           <a:p>
             <a:pPr algn="ctr"/>
-            <a:endParaRPr/>
           </a:p>
         </p:txBody>
       </p:sp>
@@ -21747,7 +16892,6 @@
           <a:lstStyle/>
           <a:p>
             <a:pPr algn="ctr"/>
-            <a:endParaRPr/>
           </a:p>
         </p:txBody>
       </p:sp>
@@ -21845,7 +16989,6 @@
           <a:lstStyle/>
           <a:p>
             <a:pPr algn="ctr"/>
-            <a:endParaRPr/>
           </a:p>
         </p:txBody>
       </p:sp>
@@ -21917,7 +17060,7 @@
                 <a:srgbClr val="4A4F55"/>
               </a:gs>
             </a:gsLst>
-            <a:lin ang="14700000" scaled="0"/>
+            <a:lin scaled="0" ang="14700000"/>
           </a:gradFill>
           <a:ln>
             <a:noFill/>
@@ -21949,7 +17092,6 @@
           <a:lstStyle/>
           <a:p>
             <a:pPr algn="ctr"/>
-            <a:endParaRPr/>
           </a:p>
         </p:txBody>
       </p:sp>
@@ -22047,7 +17189,6 @@
           <a:lstStyle/>
           <a:p>
             <a:pPr algn="ctr"/>
-            <a:endParaRPr/>
           </a:p>
         </p:txBody>
       </p:sp>
@@ -22145,7 +17286,6 @@
           <a:lstStyle/>
           <a:p>
             <a:pPr algn="ctr"/>
-            <a:endParaRPr/>
           </a:p>
         </p:txBody>
       </p:sp>
@@ -22217,7 +17357,7 @@
                 <a:srgbClr val="4A4F55"/>
               </a:gs>
             </a:gsLst>
-            <a:lin ang="14700000" scaled="0"/>
+            <a:lin scaled="0" ang="14700000"/>
           </a:gradFill>
           <a:ln>
             <a:noFill/>
@@ -22249,7 +17389,6 @@
           <a:lstStyle/>
           <a:p>
             <a:pPr algn="ctr"/>
-            <a:endParaRPr/>
           </a:p>
         </p:txBody>
       </p:sp>
@@ -22347,7 +17486,6 @@
           <a:lstStyle/>
           <a:p>
             <a:pPr algn="ctr"/>
-            <a:endParaRPr/>
           </a:p>
         </p:txBody>
       </p:sp>
@@ -22445,7 +17583,6 @@
           <a:lstStyle/>
           <a:p>
             <a:pPr algn="ctr"/>
-            <a:endParaRPr/>
           </a:p>
         </p:txBody>
       </p:sp>
@@ -22517,7 +17654,7 @@
                 <a:srgbClr val="4A4F55"/>
               </a:gs>
             </a:gsLst>
-            <a:lin ang="14700000" scaled="0"/>
+            <a:lin scaled="0" ang="14700000"/>
           </a:gradFill>
           <a:ln>
             <a:noFill/>
@@ -22549,7 +17686,6 @@
           <a:lstStyle/>
           <a:p>
             <a:pPr algn="ctr"/>
-            <a:endParaRPr/>
           </a:p>
         </p:txBody>
       </p:sp>
@@ -22647,7 +17783,6 @@
           <a:lstStyle/>
           <a:p>
             <a:pPr algn="ctr"/>
-            <a:endParaRPr/>
           </a:p>
         </p:txBody>
       </p:sp>
@@ -22745,7 +17880,6 @@
           <a:lstStyle/>
           <a:p>
             <a:pPr algn="ctr"/>
-            <a:endParaRPr/>
           </a:p>
         </p:txBody>
       </p:sp>
@@ -22844,7 +17978,7 @@
 </file>
 
 <file path=ppt/slides/slide6.xml><?xml version="1.0" encoding="utf-8"?>
-<p:sld xmlns:a="http://schemas.openxmlformats.org/drawingml/2006/main" xmlns:r="http://schemas.openxmlformats.org/officeDocument/2006/relationships" xmlns:p="http://schemas.openxmlformats.org/presentationml/2006/main">
+<p:sld xmlns:a="http://schemas.openxmlformats.org/drawingml/2006/main" xmlns:p="http://schemas.openxmlformats.org/presentationml/2006/main" xmlns:r="http://schemas.openxmlformats.org/officeDocument/2006/relationships">
   <p:cSld>
     <p:spTree>
       <p:nvGrpSpPr>
@@ -22852,14 +17986,7 @@
         <p:cNvGrpSpPr/>
         <p:nvPr/>
       </p:nvGrpSpPr>
-      <p:grpSpPr>
-        <a:xfrm>
-          <a:off x="0" y="0"/>
-          <a:ext cx="0" cy="0"/>
-          <a:chOff x="0" y="0"/>
-          <a:chExt cx="0" cy="0"/>
-        </a:xfrm>
-      </p:grpSpPr>
+      <p:grpSpPr/>
       <p:sp>
         <p:nvSpPr>
           <p:cNvPr id="2" name="Rectangle 1"/>
@@ -22901,7 +18028,6 @@
           <a:lstStyle/>
           <a:p>
             <a:pPr algn="ctr"/>
-            <a:endParaRPr/>
           </a:p>
         </p:txBody>
       </p:sp>
@@ -22913,8 +18039,8 @@
         </p:nvSpPr>
         <p:spPr>
           <a:xfrm>
-            <a:off x="554736" y="527304"/>
-            <a:ext cx="207264" cy="207264"/>
+            <a:off x="606247" y="578815"/>
+            <a:ext cx="104241" cy="104241"/>
           </a:xfrm>
           <a:prstGeom prst="roundRect">
             <a:avLst>
@@ -22930,7 +18056,7 @@
                 <a:srgbClr val="73787E"/>
               </a:gs>
             </a:gsLst>
-            <a:lin ang="18900000" scaled="0"/>
+            <a:lin scaled="0" ang="18900000"/>
           </a:gradFill>
           <a:ln>
             <a:noFill/>
@@ -22962,7 +18088,6 @@
           <a:lstStyle/>
           <a:p>
             <a:pPr algn="ctr"/>
-            <a:endParaRPr/>
           </a:p>
         </p:txBody>
       </p:sp>
@@ -23032,7 +18157,7 @@
                 <a:srgbClr val="FFFFFF"/>
               </a:gs>
             </a:gsLst>
-            <a:lin ang="0" scaled="0"/>
+            <a:lin scaled="0" ang="0"/>
           </a:gradFill>
           <a:ln>
             <a:noFill/>
@@ -23058,7 +18183,6 @@
           <a:lstStyle/>
           <a:p>
             <a:pPr algn="ctr"/>
-            <a:endParaRPr/>
           </a:p>
         </p:txBody>
       </p:sp>
@@ -23167,27 +18291,9 @@
                 <a:tableStyleId>{5C22544A-7EE6-4342-B048-85BDC9FD1C3A}</a:tableStyleId>
               </a:tblPr>
               <a:tblGrid>
-                <a:gridCol w="2834640">
-                  <a:extLst>
-                    <a:ext uri="{9D8B030D-6E8A-4147-A177-3AD203B41FA5}">
-                      <a16:colId xmlns:a16="http://schemas.microsoft.com/office/drawing/2014/main" val="20000"/>
-                    </a:ext>
-                  </a:extLst>
-                </a:gridCol>
-                <a:gridCol w="6675120">
-                  <a:extLst>
-                    <a:ext uri="{9D8B030D-6E8A-4147-A177-3AD203B41FA5}">
-                      <a16:colId xmlns:a16="http://schemas.microsoft.com/office/drawing/2014/main" val="20001"/>
-                    </a:ext>
-                  </a:extLst>
-                </a:gridCol>
-                <a:gridCol w="1783080">
-                  <a:extLst>
-                    <a:ext uri="{9D8B030D-6E8A-4147-A177-3AD203B41FA5}">
-                      <a16:colId xmlns:a16="http://schemas.microsoft.com/office/drawing/2014/main" val="20002"/>
-                    </a:ext>
-                  </a:extLst>
-                </a:gridCol>
+                <a:gridCol w="2834640"/>
+                <a:gridCol w="6675120"/>
+                <a:gridCol w="1783080"/>
               </a:tblGrid>
               <a:tr h="457200">
                 <a:tc>
@@ -23212,7 +18318,7 @@
                       </a:r>
                     </a:p>
                   </a:txBody>
-                  <a:tcPr marL="73152" marR="73152" marT="27432" marB="27432" anchor="ctr">
+                  <a:tcPr marT="27432" marB="27432" marL="73152" marR="73152" anchor="ctr">
                     <a:solidFill>
                       <a:srgbClr val="33393F"/>
                     </a:solidFill>
@@ -23240,7 +18346,7 @@
                       </a:r>
                     </a:p>
                   </a:txBody>
-                  <a:tcPr marL="73152" marR="73152" marT="27432" marB="27432" anchor="ctr">
+                  <a:tcPr marT="27432" marB="27432" marL="73152" marR="73152" anchor="ctr">
                     <a:solidFill>
                       <a:srgbClr val="33393F"/>
                     </a:solidFill>
@@ -23268,17 +18374,12 @@
                       </a:r>
                     </a:p>
                   </a:txBody>
-                  <a:tcPr marL="73152" marR="73152" marT="27432" marB="27432" anchor="ctr">
+                  <a:tcPr marT="27432" marB="27432" marL="73152" marR="73152" anchor="ctr">
                     <a:solidFill>
                       <a:srgbClr val="33393F"/>
                     </a:solidFill>
                   </a:tcPr>
                 </a:tc>
-                <a:extLst>
-                  <a:ext uri="{0D108BD9-81ED-4DB2-BD59-A6C34878D82A}">
-                    <a16:rowId xmlns:a16="http://schemas.microsoft.com/office/drawing/2014/main" val="10000"/>
-                  </a:ext>
-                </a:extLst>
               </a:tr>
               <a:tr h="457200">
                 <a:tc>
@@ -23303,7 +18404,7 @@
                       </a:r>
                     </a:p>
                   </a:txBody>
-                  <a:tcPr marL="73152" marR="73152" marT="27432" marB="27432" anchor="ctr">
+                  <a:tcPr marT="27432" marB="27432" marL="73152" marR="73152" anchor="ctr">
                     <a:solidFill>
                       <a:srgbClr val="FFFFFF"/>
                     </a:solidFill>
@@ -23331,7 +18432,7 @@
                       </a:r>
                     </a:p>
                   </a:txBody>
-                  <a:tcPr marL="73152" marR="73152" marT="27432" marB="27432" anchor="ctr">
+                  <a:tcPr marT="27432" marB="27432" marL="73152" marR="73152" anchor="ctr">
                     <a:solidFill>
                       <a:srgbClr val="FFFFFF"/>
                     </a:solidFill>
@@ -23359,17 +18460,12 @@
                       </a:r>
                     </a:p>
                   </a:txBody>
-                  <a:tcPr marL="73152" marR="73152" marT="27432" marB="27432" anchor="ctr">
+                  <a:tcPr marT="27432" marB="27432" marL="73152" marR="73152" anchor="ctr">
                     <a:solidFill>
                       <a:srgbClr val="FFFFFF"/>
                     </a:solidFill>
                   </a:tcPr>
                 </a:tc>
-                <a:extLst>
-                  <a:ext uri="{0D108BD9-81ED-4DB2-BD59-A6C34878D82A}">
-                    <a16:rowId xmlns:a16="http://schemas.microsoft.com/office/drawing/2014/main" val="10001"/>
-                  </a:ext>
-                </a:extLst>
               </a:tr>
               <a:tr h="457200">
                 <a:tc>
@@ -23394,7 +18490,7 @@
                       </a:r>
                     </a:p>
                   </a:txBody>
-                  <a:tcPr marL="73152" marR="73152" marT="27432" marB="27432" anchor="ctr">
+                  <a:tcPr marT="27432" marB="27432" marL="73152" marR="73152" anchor="ctr">
                     <a:solidFill>
                       <a:srgbClr val="F6F7F8"/>
                     </a:solidFill>
@@ -23422,7 +18518,7 @@
                       </a:r>
                     </a:p>
                   </a:txBody>
-                  <a:tcPr marL="73152" marR="73152" marT="27432" marB="27432" anchor="ctr">
+                  <a:tcPr marT="27432" marB="27432" marL="73152" marR="73152" anchor="ctr">
                     <a:solidFill>
                       <a:srgbClr val="F6F7F8"/>
                     </a:solidFill>
@@ -23450,17 +18546,12 @@
                       </a:r>
                     </a:p>
                   </a:txBody>
-                  <a:tcPr marL="73152" marR="73152" marT="27432" marB="27432" anchor="ctr">
+                  <a:tcPr marT="27432" marB="27432" marL="73152" marR="73152" anchor="ctr">
                     <a:solidFill>
                       <a:srgbClr val="F6F7F8"/>
                     </a:solidFill>
                   </a:tcPr>
                 </a:tc>
-                <a:extLst>
-                  <a:ext uri="{0D108BD9-81ED-4DB2-BD59-A6C34878D82A}">
-                    <a16:rowId xmlns:a16="http://schemas.microsoft.com/office/drawing/2014/main" val="10002"/>
-                  </a:ext>
-                </a:extLst>
               </a:tr>
             </a:tbl>
           </a:graphicData>
@@ -23560,7 +18651,6 @@
           <a:lstStyle/>
           <a:p>
             <a:pPr algn="ctr"/>
-            <a:endParaRPr/>
           </a:p>
         </p:txBody>
       </p:sp>
@@ -23678,7 +18768,6 @@
           <a:lstStyle/>
           <a:p>
             <a:pPr algn="ctr"/>
-            <a:endParaRPr/>
           </a:p>
         </p:txBody>
       </p:sp>
@@ -23796,7 +18885,6 @@
           <a:lstStyle/>
           <a:p>
             <a:pPr algn="ctr"/>
-            <a:endParaRPr/>
           </a:p>
         </p:txBody>
       </p:sp>
@@ -23858,7 +18946,7 @@
                 <a:latin typeface="맑은 고딕"/>
                 <a:ea typeface="맑은 고딕"/>
               </a:rPr>
-              <a:t>• 옆 도시 병원이라도 60분 안이면 "이용됨" — 이 프로젝트 지정 감사의 핵심 열쇠</a:t>
+              <a:t>• 옆 도시 병원이라도 60분 안이면 "이용됨" — 지정 감사의 핵심 열쇠</a:t>
             </a:r>
           </a:p>
         </p:txBody>
@@ -23914,7 +19002,6 @@
           <a:lstStyle/>
           <a:p>
             <a:pPr algn="ctr"/>
-            <a:endParaRPr/>
           </a:p>
         </p:txBody>
       </p:sp>
@@ -23990,7 +19077,7 @@
 </file>
 
 <file path=ppt/slides/slide7.xml><?xml version="1.0" encoding="utf-8"?>
-<p:sld xmlns:a="http://schemas.openxmlformats.org/drawingml/2006/main" xmlns:r="http://schemas.openxmlformats.org/officeDocument/2006/relationships" xmlns:p="http://schemas.openxmlformats.org/presentationml/2006/main">
+<p:sld xmlns:a="http://schemas.openxmlformats.org/drawingml/2006/main" xmlns:p="http://schemas.openxmlformats.org/presentationml/2006/main" xmlns:r="http://schemas.openxmlformats.org/officeDocument/2006/relationships">
   <p:cSld>
     <p:spTree>
       <p:nvGrpSpPr>
@@ -23998,14 +19085,7 @@
         <p:cNvGrpSpPr/>
         <p:nvPr/>
       </p:nvGrpSpPr>
-      <p:grpSpPr>
-        <a:xfrm>
-          <a:off x="0" y="0"/>
-          <a:ext cx="0" cy="0"/>
-          <a:chOff x="0" y="0"/>
-          <a:chExt cx="0" cy="0"/>
-        </a:xfrm>
-      </p:grpSpPr>
+      <p:grpSpPr/>
       <p:sp>
         <p:nvSpPr>
           <p:cNvPr id="2" name="Rectangle 1"/>
@@ -24047,7 +19127,6 @@
           <a:lstStyle/>
           <a:p>
             <a:pPr algn="ctr"/>
-            <a:endParaRPr/>
           </a:p>
         </p:txBody>
       </p:sp>
@@ -24059,8 +19138,8 @@
         </p:nvSpPr>
         <p:spPr>
           <a:xfrm>
-            <a:off x="554736" y="527304"/>
-            <a:ext cx="207264" cy="207264"/>
+            <a:off x="606247" y="578815"/>
+            <a:ext cx="104241" cy="104241"/>
           </a:xfrm>
           <a:prstGeom prst="roundRect">
             <a:avLst>
@@ -24076,7 +19155,7 @@
                 <a:srgbClr val="73787E"/>
               </a:gs>
             </a:gsLst>
-            <a:lin ang="18900000" scaled="0"/>
+            <a:lin scaled="0" ang="18900000"/>
           </a:gradFill>
           <a:ln>
             <a:noFill/>
@@ -24108,7 +19187,6 @@
           <a:lstStyle/>
           <a:p>
             <a:pPr algn="ctr"/>
-            <a:endParaRPr/>
           </a:p>
         </p:txBody>
       </p:sp>
@@ -24178,7 +19256,7 @@
                 <a:srgbClr val="FFFFFF"/>
               </a:gs>
             </a:gsLst>
-            <a:lin ang="0" scaled="0"/>
+            <a:lin scaled="0" ang="0"/>
           </a:gradFill>
           <a:ln>
             <a:noFill/>
@@ -24204,7 +19282,6 @@
           <a:lstStyle/>
           <a:p>
             <a:pPr algn="ctr"/>
-            <a:endParaRPr/>
           </a:p>
         </p:txBody>
       </p:sp>
@@ -24313,27 +19390,9 @@
                 <a:tableStyleId>{5C22544A-7EE6-4342-B048-85BDC9FD1C3A}</a:tableStyleId>
               </a:tblPr>
               <a:tblGrid>
-                <a:gridCol w="822960">
-                  <a:extLst>
-                    <a:ext uri="{9D8B030D-6E8A-4147-A177-3AD203B41FA5}">
-                      <a16:colId xmlns:a16="http://schemas.microsoft.com/office/drawing/2014/main" val="20000"/>
-                    </a:ext>
-                  </a:extLst>
-                </a:gridCol>
-                <a:gridCol w="3931920">
-                  <a:extLst>
-                    <a:ext uri="{9D8B030D-6E8A-4147-A177-3AD203B41FA5}">
-                      <a16:colId xmlns:a16="http://schemas.microsoft.com/office/drawing/2014/main" val="20001"/>
-                    </a:ext>
-                  </a:extLst>
-                </a:gridCol>
-                <a:gridCol w="1188720">
-                  <a:extLst>
-                    <a:ext uri="{9D8B030D-6E8A-4147-A177-3AD203B41FA5}">
-                      <a16:colId xmlns:a16="http://schemas.microsoft.com/office/drawing/2014/main" val="20002"/>
-                    </a:ext>
-                  </a:extLst>
-                </a:gridCol>
+                <a:gridCol w="822960"/>
+                <a:gridCol w="3931920"/>
+                <a:gridCol w="1188720"/>
               </a:tblGrid>
               <a:tr h="457200">
                 <a:tc>
@@ -24358,7 +19417,7 @@
                       </a:r>
                     </a:p>
                   </a:txBody>
-                  <a:tcPr marL="73152" marR="73152" marT="27432" marB="27432" anchor="ctr">
+                  <a:tcPr marT="27432" marB="27432" marL="73152" marR="73152" anchor="ctr">
                     <a:solidFill>
                       <a:srgbClr val="33393F"/>
                     </a:solidFill>
@@ -24386,7 +19445,7 @@
                       </a:r>
                     </a:p>
                   </a:txBody>
-                  <a:tcPr marL="73152" marR="73152" marT="27432" marB="27432" anchor="ctr">
+                  <a:tcPr marT="27432" marB="27432" marL="73152" marR="73152" anchor="ctr">
                     <a:solidFill>
                       <a:srgbClr val="33393F"/>
                     </a:solidFill>
@@ -24414,17 +19473,12 @@
                       </a:r>
                     </a:p>
                   </a:txBody>
-                  <a:tcPr marL="73152" marR="73152" marT="27432" marB="27432" anchor="ctr">
+                  <a:tcPr marT="27432" marB="27432" marL="73152" marR="73152" anchor="ctr">
                     <a:solidFill>
                       <a:srgbClr val="33393F"/>
                     </a:solidFill>
                   </a:tcPr>
                 </a:tc>
-                <a:extLst>
-                  <a:ext uri="{0D108BD9-81ED-4DB2-BD59-A6C34878D82A}">
-                    <a16:rowId xmlns:a16="http://schemas.microsoft.com/office/drawing/2014/main" val="10000"/>
-                  </a:ext>
-                </a:extLst>
               </a:tr>
               <a:tr h="457200">
                 <a:tc>
@@ -24449,7 +19503,7 @@
                       </a:r>
                     </a:p>
                   </a:txBody>
-                  <a:tcPr marL="73152" marR="73152" marT="27432" marB="27432" anchor="ctr">
+                  <a:tcPr marT="27432" marB="27432" marL="73152" marR="73152" anchor="ctr">
                     <a:solidFill>
                       <a:srgbClr val="FFFFFF"/>
                     </a:solidFill>
@@ -24477,7 +19531,7 @@
                       </a:r>
                     </a:p>
                   </a:txBody>
-                  <a:tcPr marL="73152" marR="73152" marT="27432" marB="27432" anchor="ctr">
+                  <a:tcPr marT="27432" marB="27432" marL="73152" marR="73152" anchor="ctr">
                     <a:solidFill>
                       <a:srgbClr val="FFFFFF"/>
                     </a:solidFill>
@@ -24505,17 +19559,12 @@
                       </a:r>
                     </a:p>
                   </a:txBody>
-                  <a:tcPr marL="73152" marR="73152" marT="27432" marB="27432" anchor="ctr">
+                  <a:tcPr marT="27432" marB="27432" marL="73152" marR="73152" anchor="ctr">
                     <a:solidFill>
                       <a:srgbClr val="FFFFFF"/>
                     </a:solidFill>
                   </a:tcPr>
                 </a:tc>
-                <a:extLst>
-                  <a:ext uri="{0D108BD9-81ED-4DB2-BD59-A6C34878D82A}">
-                    <a16:rowId xmlns:a16="http://schemas.microsoft.com/office/drawing/2014/main" val="10001"/>
-                  </a:ext>
-                </a:extLst>
               </a:tr>
               <a:tr h="457200">
                 <a:tc>
@@ -24540,7 +19589,7 @@
                       </a:r>
                     </a:p>
                   </a:txBody>
-                  <a:tcPr marL="73152" marR="73152" marT="27432" marB="27432" anchor="ctr">
+                  <a:tcPr marT="27432" marB="27432" marL="73152" marR="73152" anchor="ctr">
                     <a:solidFill>
                       <a:srgbClr val="F6F7F8"/>
                     </a:solidFill>
@@ -24568,7 +19617,7 @@
                       </a:r>
                     </a:p>
                   </a:txBody>
-                  <a:tcPr marL="73152" marR="73152" marT="27432" marB="27432" anchor="ctr">
+                  <a:tcPr marT="27432" marB="27432" marL="73152" marR="73152" anchor="ctr">
                     <a:solidFill>
                       <a:srgbClr val="F6F7F8"/>
                     </a:solidFill>
@@ -24596,17 +19645,12 @@
                       </a:r>
                     </a:p>
                   </a:txBody>
-                  <a:tcPr marL="73152" marR="73152" marT="27432" marB="27432" anchor="ctr">
+                  <a:tcPr marT="27432" marB="27432" marL="73152" marR="73152" anchor="ctr">
                     <a:solidFill>
                       <a:srgbClr val="F6F7F8"/>
                     </a:solidFill>
                   </a:tcPr>
                 </a:tc>
-                <a:extLst>
-                  <a:ext uri="{0D108BD9-81ED-4DB2-BD59-A6C34878D82A}">
-                    <a16:rowId xmlns:a16="http://schemas.microsoft.com/office/drawing/2014/main" val="10002"/>
-                  </a:ext>
-                </a:extLst>
               </a:tr>
               <a:tr h="457200">
                 <a:tc>
@@ -24631,7 +19675,7 @@
                       </a:r>
                     </a:p>
                   </a:txBody>
-                  <a:tcPr marL="73152" marR="73152" marT="27432" marB="27432" anchor="ctr">
+                  <a:tcPr marT="27432" marB="27432" marL="73152" marR="73152" anchor="ctr">
                     <a:solidFill>
                       <a:srgbClr val="FFFFFF"/>
                     </a:solidFill>
@@ -24659,7 +19703,7 @@
                       </a:r>
                     </a:p>
                   </a:txBody>
-                  <a:tcPr marL="73152" marR="73152" marT="27432" marB="27432" anchor="ctr">
+                  <a:tcPr marT="27432" marB="27432" marL="73152" marR="73152" anchor="ctr">
                     <a:solidFill>
                       <a:srgbClr val="FFFFFF"/>
                     </a:solidFill>
@@ -24687,17 +19731,12 @@
                       </a:r>
                     </a:p>
                   </a:txBody>
-                  <a:tcPr marL="73152" marR="73152" marT="27432" marB="27432" anchor="ctr">
+                  <a:tcPr marT="27432" marB="27432" marL="73152" marR="73152" anchor="ctr">
                     <a:solidFill>
                       <a:srgbClr val="FFFFFF"/>
                     </a:solidFill>
                   </a:tcPr>
                 </a:tc>
-                <a:extLst>
-                  <a:ext uri="{0D108BD9-81ED-4DB2-BD59-A6C34878D82A}">
-                    <a16:rowId xmlns:a16="http://schemas.microsoft.com/office/drawing/2014/main" val="10003"/>
-                  </a:ext>
-                </a:extLst>
               </a:tr>
             </a:tbl>
           </a:graphicData>
@@ -24754,7 +19793,6 @@
           <a:lstStyle/>
           <a:p>
             <a:pPr algn="ctr"/>
-            <a:endParaRPr/>
           </a:p>
         </p:txBody>
       </p:sp>
@@ -24892,7 +19930,6 @@
           <a:lstStyle/>
           <a:p>
             <a:pPr algn="ctr"/>
-            <a:endParaRPr/>
           </a:p>
         </p:txBody>
       </p:sp>
@@ -25070,7 +20107,6 @@
           <a:lstStyle/>
           <a:p>
             <a:pPr algn="ctr"/>
-            <a:endParaRPr/>
           </a:p>
         </p:txBody>
       </p:sp>
@@ -25209,7 +20245,7 @@
 </file>
 
 <file path=ppt/slides/slide8.xml><?xml version="1.0" encoding="utf-8"?>
-<p:sld xmlns:a="http://schemas.openxmlformats.org/drawingml/2006/main" xmlns:r="http://schemas.openxmlformats.org/officeDocument/2006/relationships" xmlns:p="http://schemas.openxmlformats.org/presentationml/2006/main">
+<p:sld xmlns:a="http://schemas.openxmlformats.org/drawingml/2006/main" xmlns:p="http://schemas.openxmlformats.org/presentationml/2006/main" xmlns:r="http://schemas.openxmlformats.org/officeDocument/2006/relationships">
   <p:cSld>
     <p:spTree>
       <p:nvGrpSpPr>
@@ -25217,14 +20253,7 @@
         <p:cNvGrpSpPr/>
         <p:nvPr/>
       </p:nvGrpSpPr>
-      <p:grpSpPr>
-        <a:xfrm>
-          <a:off x="0" y="0"/>
-          <a:ext cx="0" cy="0"/>
-          <a:chOff x="0" y="0"/>
-          <a:chExt cx="0" cy="0"/>
-        </a:xfrm>
-      </p:grpSpPr>
+      <p:grpSpPr/>
       <p:sp>
         <p:nvSpPr>
           <p:cNvPr id="2" name="Rectangle 1"/>
@@ -25266,7 +20295,6 @@
           <a:lstStyle/>
           <a:p>
             <a:pPr algn="ctr"/>
-            <a:endParaRPr/>
           </a:p>
         </p:txBody>
       </p:sp>
@@ -25278,8 +20306,8 @@
         </p:nvSpPr>
         <p:spPr>
           <a:xfrm>
-            <a:off x="554736" y="527304"/>
-            <a:ext cx="207264" cy="207264"/>
+            <a:off x="606247" y="578815"/>
+            <a:ext cx="104241" cy="104241"/>
           </a:xfrm>
           <a:prstGeom prst="roundRect">
             <a:avLst>
@@ -25295,7 +20323,7 @@
                 <a:srgbClr val="73787E"/>
               </a:gs>
             </a:gsLst>
-            <a:lin ang="18900000" scaled="0"/>
+            <a:lin scaled="0" ang="18900000"/>
           </a:gradFill>
           <a:ln>
             <a:noFill/>
@@ -25327,7 +20355,6 @@
           <a:lstStyle/>
           <a:p>
             <a:pPr algn="ctr"/>
-            <a:endParaRPr/>
           </a:p>
         </p:txBody>
       </p:sp>
@@ -25397,7 +20424,7 @@
                 <a:srgbClr val="FFFFFF"/>
               </a:gs>
             </a:gsLst>
-            <a:lin ang="0" scaled="0"/>
+            <a:lin scaled="0" ang="0"/>
           </a:gradFill>
           <a:ln>
             <a:noFill/>
@@ -25423,7 +20450,6 @@
           <a:lstStyle/>
           <a:p>
             <a:pPr algn="ctr"/>
-            <a:endParaRPr/>
           </a:p>
         </p:txBody>
       </p:sp>
@@ -25532,20 +20558,8 @@
                 <a:tableStyleId>{5C22544A-7EE6-4342-B048-85BDC9FD1C3A}</a:tableStyleId>
               </a:tblPr>
               <a:tblGrid>
-                <a:gridCol w="5760720">
-                  <a:extLst>
-                    <a:ext uri="{9D8B030D-6E8A-4147-A177-3AD203B41FA5}">
-                      <a16:colId xmlns:a16="http://schemas.microsoft.com/office/drawing/2014/main" val="20000"/>
-                    </a:ext>
-                  </a:extLst>
-                </a:gridCol>
-                <a:gridCol w="5532120">
-                  <a:extLst>
-                    <a:ext uri="{9D8B030D-6E8A-4147-A177-3AD203B41FA5}">
-                      <a16:colId xmlns:a16="http://schemas.microsoft.com/office/drawing/2014/main" val="20001"/>
-                    </a:ext>
-                  </a:extLst>
-                </a:gridCol>
+                <a:gridCol w="5760720"/>
+                <a:gridCol w="5532120"/>
               </a:tblGrid>
               <a:tr h="475488">
                 <a:tc>
@@ -25570,7 +20584,7 @@
                       </a:r>
                     </a:p>
                   </a:txBody>
-                  <a:tcPr marL="73152" marR="73152" marT="27432" marB="27432" anchor="ctr">
+                  <a:tcPr marT="27432" marB="27432" marL="73152" marR="73152" anchor="ctr">
                     <a:solidFill>
                       <a:srgbClr val="33393F"/>
                     </a:solidFill>
@@ -25598,17 +20612,12 @@
                       </a:r>
                     </a:p>
                   </a:txBody>
-                  <a:tcPr marL="73152" marR="73152" marT="27432" marB="27432" anchor="ctr">
+                  <a:tcPr marT="27432" marB="27432" marL="73152" marR="73152" anchor="ctr">
                     <a:solidFill>
                       <a:srgbClr val="33393F"/>
                     </a:solidFill>
                   </a:tcPr>
                 </a:tc>
-                <a:extLst>
-                  <a:ext uri="{0D108BD9-81ED-4DB2-BD59-A6C34878D82A}">
-                    <a16:rowId xmlns:a16="http://schemas.microsoft.com/office/drawing/2014/main" val="10000"/>
-                  </a:ext>
-                </a:extLst>
               </a:tr>
               <a:tr h="475488">
                 <a:tc>
@@ -25633,7 +20642,7 @@
                       </a:r>
                     </a:p>
                   </a:txBody>
-                  <a:tcPr marL="73152" marR="73152" marT="27432" marB="27432" anchor="ctr">
+                  <a:tcPr marT="27432" marB="27432" marL="73152" marR="73152" anchor="ctr">
                     <a:solidFill>
                       <a:srgbClr val="FFFFFF"/>
                     </a:solidFill>
@@ -25661,17 +20670,12 @@
                       </a:r>
                     </a:p>
                   </a:txBody>
-                  <a:tcPr marL="73152" marR="73152" marT="27432" marB="27432" anchor="ctr">
+                  <a:tcPr marT="27432" marB="27432" marL="73152" marR="73152" anchor="ctr">
                     <a:solidFill>
                       <a:srgbClr val="FFFFFF"/>
                     </a:solidFill>
                   </a:tcPr>
                 </a:tc>
-                <a:extLst>
-                  <a:ext uri="{0D108BD9-81ED-4DB2-BD59-A6C34878D82A}">
-                    <a16:rowId xmlns:a16="http://schemas.microsoft.com/office/drawing/2014/main" val="10001"/>
-                  </a:ext>
-                </a:extLst>
               </a:tr>
               <a:tr h="475488">
                 <a:tc>
@@ -25696,7 +20700,7 @@
                       </a:r>
                     </a:p>
                   </a:txBody>
-                  <a:tcPr marL="73152" marR="73152" marT="27432" marB="27432" anchor="ctr">
+                  <a:tcPr marT="27432" marB="27432" marL="73152" marR="73152" anchor="ctr">
                     <a:solidFill>
                       <a:srgbClr val="F6F7F8"/>
                     </a:solidFill>
@@ -25724,17 +20728,12 @@
                       </a:r>
                     </a:p>
                   </a:txBody>
-                  <a:tcPr marL="73152" marR="73152" marT="27432" marB="27432" anchor="ctr">
+                  <a:tcPr marT="27432" marB="27432" marL="73152" marR="73152" anchor="ctr">
                     <a:solidFill>
                       <a:srgbClr val="F6F7F8"/>
                     </a:solidFill>
                   </a:tcPr>
                 </a:tc>
-                <a:extLst>
-                  <a:ext uri="{0D108BD9-81ED-4DB2-BD59-A6C34878D82A}">
-                    <a16:rowId xmlns:a16="http://schemas.microsoft.com/office/drawing/2014/main" val="10002"/>
-                  </a:ext>
-                </a:extLst>
               </a:tr>
             </a:tbl>
           </a:graphicData>
@@ -25791,7 +20790,6 @@
           <a:lstStyle/>
           <a:p>
             <a:pPr algn="ctr"/>
-            <a:endParaRPr/>
           </a:p>
         </p:txBody>
       </p:sp>
@@ -25909,7 +20907,6 @@
           <a:lstStyle/>
           <a:p>
             <a:pPr algn="ctr"/>
-            <a:endParaRPr/>
           </a:p>
         </p:txBody>
       </p:sp>
@@ -26027,7 +21024,6 @@
           <a:lstStyle/>
           <a:p>
             <a:pPr algn="ctr"/>
-            <a:endParaRPr/>
           </a:p>
         </p:txBody>
       </p:sp>
@@ -26145,7 +21141,6 @@
           <a:lstStyle/>
           <a:p>
             <a:pPr algn="ctr"/>
-            <a:endParaRPr/>
           </a:p>
         </p:txBody>
       </p:sp>
@@ -26261,7 +21256,7 @@
 </file>
 
 <file path=ppt/slides/slide9.xml><?xml version="1.0" encoding="utf-8"?>
-<p:sld xmlns:a="http://schemas.openxmlformats.org/drawingml/2006/main" xmlns:r="http://schemas.openxmlformats.org/officeDocument/2006/relationships" xmlns:p="http://schemas.openxmlformats.org/presentationml/2006/main">
+<p:sld xmlns:a="http://schemas.openxmlformats.org/drawingml/2006/main" xmlns:p="http://schemas.openxmlformats.org/presentationml/2006/main" xmlns:r="http://schemas.openxmlformats.org/officeDocument/2006/relationships">
   <p:cSld>
     <p:spTree>
       <p:nvGrpSpPr>
@@ -26269,14 +21264,7 @@
         <p:cNvGrpSpPr/>
         <p:nvPr/>
       </p:nvGrpSpPr>
-      <p:grpSpPr>
-        <a:xfrm>
-          <a:off x="0" y="0"/>
-          <a:ext cx="0" cy="0"/>
-          <a:chOff x="0" y="0"/>
-          <a:chExt cx="0" cy="0"/>
-        </a:xfrm>
-      </p:grpSpPr>
+      <p:grpSpPr/>
       <p:sp>
         <p:nvSpPr>
           <p:cNvPr id="2" name="Rectangle 1"/>
@@ -26318,7 +21306,6 @@
           <a:lstStyle/>
           <a:p>
             <a:pPr algn="ctr"/>
-            <a:endParaRPr/>
           </a:p>
         </p:txBody>
       </p:sp>
@@ -26330,8 +21317,8 @@
         </p:nvSpPr>
         <p:spPr>
           <a:xfrm>
-            <a:off x="554736" y="527304"/>
-            <a:ext cx="207264" cy="207264"/>
+            <a:off x="606247" y="578815"/>
+            <a:ext cx="104241" cy="104241"/>
           </a:xfrm>
           <a:prstGeom prst="roundRect">
             <a:avLst>
@@ -26347,7 +21334,7 @@
                 <a:srgbClr val="73787E"/>
               </a:gs>
             </a:gsLst>
-            <a:lin ang="18900000" scaled="0"/>
+            <a:lin scaled="0" ang="18900000"/>
           </a:gradFill>
           <a:ln>
             <a:noFill/>
@@ -26379,7 +21366,6 @@
           <a:lstStyle/>
           <a:p>
             <a:pPr algn="ctr"/>
-            <a:endParaRPr/>
           </a:p>
         </p:txBody>
       </p:sp>
@@ -26449,7 +21435,7 @@
                 <a:srgbClr val="FFFFFF"/>
               </a:gs>
             </a:gsLst>
-            <a:lin ang="0" scaled="0"/>
+            <a:lin scaled="0" ang="0"/>
           </a:gradFill>
           <a:ln>
             <a:noFill/>
@@ -26475,7 +21461,6 @@
           <a:lstStyle/>
           <a:p>
             <a:pPr algn="ctr"/>
-            <a:endParaRPr/>
           </a:p>
         </p:txBody>
       </p:sp>
@@ -26616,7 +21601,6 @@
           <a:lstStyle/>
           <a:p>
             <a:pPr algn="ctr"/>
-            <a:endParaRPr/>
           </a:p>
         </p:txBody>
       </p:sp>
@@ -26785,34 +21769,10 @@
                 <a:tableStyleId>{5C22544A-7EE6-4342-B048-85BDC9FD1C3A}</a:tableStyleId>
               </a:tblPr>
               <a:tblGrid>
-                <a:gridCol w="822960">
-                  <a:extLst>
-                    <a:ext uri="{9D8B030D-6E8A-4147-A177-3AD203B41FA5}">
-                      <a16:colId xmlns:a16="http://schemas.microsoft.com/office/drawing/2014/main" val="20000"/>
-                    </a:ext>
-                  </a:extLst>
-                </a:gridCol>
-                <a:gridCol w="822960">
-                  <a:extLst>
-                    <a:ext uri="{9D8B030D-6E8A-4147-A177-3AD203B41FA5}">
-                      <a16:colId xmlns:a16="http://schemas.microsoft.com/office/drawing/2014/main" val="20001"/>
-                    </a:ext>
-                  </a:extLst>
-                </a:gridCol>
-                <a:gridCol w="914400">
-                  <a:extLst>
-                    <a:ext uri="{9D8B030D-6E8A-4147-A177-3AD203B41FA5}">
-                      <a16:colId xmlns:a16="http://schemas.microsoft.com/office/drawing/2014/main" val="20002"/>
-                    </a:ext>
-                  </a:extLst>
-                </a:gridCol>
-                <a:gridCol w="2971800">
-                  <a:extLst>
-                    <a:ext uri="{9D8B030D-6E8A-4147-A177-3AD203B41FA5}">
-                      <a16:colId xmlns:a16="http://schemas.microsoft.com/office/drawing/2014/main" val="20003"/>
-                    </a:ext>
-                  </a:extLst>
-                </a:gridCol>
+                <a:gridCol w="822960"/>
+                <a:gridCol w="822960"/>
+                <a:gridCol w="914400"/>
+                <a:gridCol w="2971800"/>
               </a:tblGrid>
               <a:tr h="438912">
                 <a:tc>
@@ -26837,7 +21797,7 @@
                       </a:r>
                     </a:p>
                   </a:txBody>
-                  <a:tcPr marL="73152" marR="73152" marT="27432" marB="27432" anchor="ctr">
+                  <a:tcPr marT="27432" marB="27432" marL="73152" marR="73152" anchor="ctr">
                     <a:solidFill>
                       <a:srgbClr val="33393F"/>
                     </a:solidFill>
@@ -26865,7 +21825,7 @@
                       </a:r>
                     </a:p>
                   </a:txBody>
-                  <a:tcPr marL="73152" marR="73152" marT="27432" marB="27432" anchor="ctr">
+                  <a:tcPr marT="27432" marB="27432" marL="73152" marR="73152" anchor="ctr">
                     <a:solidFill>
                       <a:srgbClr val="33393F"/>
                     </a:solidFill>
@@ -26893,7 +21853,7 @@
                       </a:r>
                     </a:p>
                   </a:txBody>
-                  <a:tcPr marL="73152" marR="73152" marT="27432" marB="27432" anchor="ctr">
+                  <a:tcPr marT="27432" marB="27432" marL="73152" marR="73152" anchor="ctr">
                     <a:solidFill>
                       <a:srgbClr val="33393F"/>
                     </a:solidFill>
@@ -26921,17 +21881,12 @@
                       </a:r>
                     </a:p>
                   </a:txBody>
-                  <a:tcPr marL="73152" marR="73152" marT="27432" marB="27432" anchor="ctr">
+                  <a:tcPr marT="27432" marB="27432" marL="73152" marR="73152" anchor="ctr">
                     <a:solidFill>
                       <a:srgbClr val="33393F"/>
                     </a:solidFill>
                   </a:tcPr>
                 </a:tc>
-                <a:extLst>
-                  <a:ext uri="{0D108BD9-81ED-4DB2-BD59-A6C34878D82A}">
-                    <a16:rowId xmlns:a16="http://schemas.microsoft.com/office/drawing/2014/main" val="10000"/>
-                  </a:ext>
-                </a:extLst>
               </a:tr>
               <a:tr h="438912">
                 <a:tc>
@@ -26956,7 +21911,7 @@
                       </a:r>
                     </a:p>
                   </a:txBody>
-                  <a:tcPr marL="73152" marR="73152" marT="27432" marB="27432" anchor="ctr">
+                  <a:tcPr marT="27432" marB="27432" marL="73152" marR="73152" anchor="ctr">
                     <a:solidFill>
                       <a:srgbClr val="FFFFFF"/>
                     </a:solidFill>
@@ -26984,7 +21939,7 @@
                       </a:r>
                     </a:p>
                   </a:txBody>
-                  <a:tcPr marL="73152" marR="73152" marT="27432" marB="27432" anchor="ctr">
+                  <a:tcPr marT="27432" marB="27432" marL="73152" marR="73152" anchor="ctr">
                     <a:solidFill>
                       <a:srgbClr val="FFFFFF"/>
                     </a:solidFill>
@@ -27012,7 +21967,7 @@
                       </a:r>
                     </a:p>
                   </a:txBody>
-                  <a:tcPr marL="73152" marR="73152" marT="27432" marB="27432" anchor="ctr">
+                  <a:tcPr marT="27432" marB="27432" marL="73152" marR="73152" anchor="ctr">
                     <a:solidFill>
                       <a:srgbClr val="FFFFFF"/>
                     </a:solidFill>
@@ -27040,17 +21995,12 @@
                       </a:r>
                     </a:p>
                   </a:txBody>
-                  <a:tcPr marL="73152" marR="73152" marT="27432" marB="27432" anchor="ctr">
+                  <a:tcPr marT="27432" marB="27432" marL="73152" marR="73152" anchor="ctr">
                     <a:solidFill>
                       <a:srgbClr val="FFFFFF"/>
                     </a:solidFill>
                   </a:tcPr>
                 </a:tc>
-                <a:extLst>
-                  <a:ext uri="{0D108BD9-81ED-4DB2-BD59-A6C34878D82A}">
-                    <a16:rowId xmlns:a16="http://schemas.microsoft.com/office/drawing/2014/main" val="10001"/>
-                  </a:ext>
-                </a:extLst>
               </a:tr>
               <a:tr h="438912">
                 <a:tc>
@@ -27075,7 +22025,7 @@
                       </a:r>
                     </a:p>
                   </a:txBody>
-                  <a:tcPr marL="73152" marR="73152" marT="27432" marB="27432" anchor="ctr">
+                  <a:tcPr marT="27432" marB="27432" marL="73152" marR="73152" anchor="ctr">
                     <a:solidFill>
                       <a:srgbClr val="E3E5E8"/>
                     </a:solidFill>
@@ -27103,7 +22053,7 @@
                       </a:r>
                     </a:p>
                   </a:txBody>
-                  <a:tcPr marL="73152" marR="73152" marT="27432" marB="27432" anchor="ctr">
+                  <a:tcPr marT="27432" marB="27432" marL="73152" marR="73152" anchor="ctr">
                     <a:solidFill>
                       <a:srgbClr val="E3E5E8"/>
                     </a:solidFill>
@@ -27131,7 +22081,7 @@
                       </a:r>
                     </a:p>
                   </a:txBody>
-                  <a:tcPr marL="73152" marR="73152" marT="27432" marB="27432" anchor="ctr">
+                  <a:tcPr marT="27432" marB="27432" marL="73152" marR="73152" anchor="ctr">
                     <a:solidFill>
                       <a:srgbClr val="E3E5E8"/>
                     </a:solidFill>
@@ -27159,17 +22109,12 @@
                       </a:r>
                     </a:p>
                   </a:txBody>
-                  <a:tcPr marL="73152" marR="73152" marT="27432" marB="27432" anchor="ctr">
+                  <a:tcPr marT="27432" marB="27432" marL="73152" marR="73152" anchor="ctr">
                     <a:solidFill>
                       <a:srgbClr val="E3E5E8"/>
                     </a:solidFill>
                   </a:tcPr>
                 </a:tc>
-                <a:extLst>
-                  <a:ext uri="{0D108BD9-81ED-4DB2-BD59-A6C34878D82A}">
-                    <a16:rowId xmlns:a16="http://schemas.microsoft.com/office/drawing/2014/main" val="10002"/>
-                  </a:ext>
-                </a:extLst>
               </a:tr>
               <a:tr h="438912">
                 <a:tc>
@@ -27194,7 +22139,7 @@
                       </a:r>
                     </a:p>
                   </a:txBody>
-                  <a:tcPr marL="73152" marR="73152" marT="27432" marB="27432" anchor="ctr">
+                  <a:tcPr marT="27432" marB="27432" marL="73152" marR="73152" anchor="ctr">
                     <a:solidFill>
                       <a:srgbClr val="FFFFFF"/>
                     </a:solidFill>
@@ -27222,7 +22167,7 @@
                       </a:r>
                     </a:p>
                   </a:txBody>
-                  <a:tcPr marL="73152" marR="73152" marT="27432" marB="27432" anchor="ctr">
+                  <a:tcPr marT="27432" marB="27432" marL="73152" marR="73152" anchor="ctr">
                     <a:solidFill>
                       <a:srgbClr val="FFFFFF"/>
                     </a:solidFill>
@@ -27250,7 +22195,7 @@
                       </a:r>
                     </a:p>
                   </a:txBody>
-                  <a:tcPr marL="73152" marR="73152" marT="27432" marB="27432" anchor="ctr">
+                  <a:tcPr marT="27432" marB="27432" marL="73152" marR="73152" anchor="ctr">
                     <a:solidFill>
                       <a:srgbClr val="FFFFFF"/>
                     </a:solidFill>
@@ -27278,17 +22223,12 @@
                       </a:r>
                     </a:p>
                   </a:txBody>
-                  <a:tcPr marL="73152" marR="73152" marT="27432" marB="27432" anchor="ctr">
+                  <a:tcPr marT="27432" marB="27432" marL="73152" marR="73152" anchor="ctr">
                     <a:solidFill>
                       <a:srgbClr val="FFFFFF"/>
                     </a:solidFill>
                   </a:tcPr>
                 </a:tc>
-                <a:extLst>
-                  <a:ext uri="{0D108BD9-81ED-4DB2-BD59-A6C34878D82A}">
-                    <a16:rowId xmlns:a16="http://schemas.microsoft.com/office/drawing/2014/main" val="10003"/>
-                  </a:ext>
-                </a:extLst>
               </a:tr>
             </a:tbl>
           </a:graphicData>
@@ -27345,7 +22285,6 @@
           <a:lstStyle/>
           <a:p>
             <a:pPr algn="ctr"/>
-            <a:endParaRPr/>
           </a:p>
         </p:txBody>
       </p:sp>
